--- a/submission/REDRED_2차_발표자료.pptx
+++ b/submission/REDRED_2차_발표자료.pptx
@@ -4645,11 +4645,11 @@
         <p:spPr>
           <a:xfrm>
             <a:off x="6583680" y="4389120"/>
-            <a:ext cx="5029200" cy="1005840"/>
+            <a:ext cx="5029200" cy="1188720"/>
           </a:xfrm>
           <a:prstGeom prst="roundRect">
             <a:avLst>
-              <a:gd name="adj" fmla="val 10909"/>
+              <a:gd name="adj" fmla="val 9231"/>
             </a:avLst>
           </a:prstGeom>
           <a:solidFill>
@@ -4711,7 +4711,7 @@
         <p:spPr>
           <a:xfrm>
             <a:off x="6766560" y="4937760"/>
-            <a:ext cx="4663440" cy="320040"/>
+            <a:ext cx="4663440" cy="502920"/>
           </a:xfrm>
           <a:prstGeom prst="rect">
             <a:avLst/>
@@ -4766,8 +4766,8 @@
         </p:nvSpPr>
         <p:spPr>
           <a:xfrm>
-            <a:off x="548640" y="5486400"/>
-            <a:ext cx="11064240" cy="822960"/>
+            <a:off x="548640" y="5715000"/>
+            <a:ext cx="11064240" cy="640080"/>
           </a:xfrm>
           <a:prstGeom prst="rect">
             <a:avLst/>
@@ -4783,7 +4783,7 @@
               <a:buNone/>
             </a:pPr>
             <a:r>
-              <a:rPr lang="en-US" sz="1400" dirty="0">
+              <a:rPr lang="en-US" sz="1300" dirty="0">
                 <a:solidFill>
                   <a:srgbClr val="7A7A7A"/>
                 </a:solidFill>
@@ -4793,7 +4793,7 @@
               </a:rPr>
               <a:t>C64·C256 = 쓰기 캐시 64·256항목. 원리: 행(y)마다 클록 게이트를 두어 쓰는 행의 128개 FF만 클록을 받는다(리셋 때만 전 행). 쓰기 캐시(64항목)는 전력 −16%, 면적 +5.5%로 이득이 작아 필수로 두지 않았다. 256항목은 오히려 전력이 늘었다.</a:t>
             </a:r>
-            <a:endParaRPr lang="en-US" sz="1400" dirty="0"/>
+            <a:endParaRPr lang="en-US" sz="1300" dirty="0"/>
           </a:p>
         </p:txBody>
       </p:sp>
@@ -7633,7 +7633,7 @@
                 <a:ea typeface="Malgun Gothic" pitchFamily="34" charset="-122"/>
                 <a:cs typeface="Malgun Gothic" pitchFamily="34" charset="-120"/>
               </a:rPr>
-              <a:t>P&amp;R 셀 배치도 (메모리 FF = 주황, 클록 게이트 = 빨강)</a:t>
+              <a:t>P&amp;R 셀 배치도 (플립플롭 = 연회색, 클록 게이트 = 파랑)</a:t>
             </a:r>
             <a:endParaRPr lang="en-US" sz="1100" dirty="0"/>
           </a:p>
@@ -9701,7 +9701,7 @@
         <p:spPr>
           <a:xfrm>
             <a:off x="548640" y="4114800"/>
-            <a:ext cx="5852160" cy="2395728"/>
+            <a:ext cx="5486400" cy="2240280"/>
           </a:xfrm>
           <a:prstGeom prst="rect">
             <a:avLst/>

--- a/submission/REDRED_2차_발표자료.pptx
+++ b/submission/REDRED_2차_발표자료.pptx
@@ -141,7 +141,8 @@
                 <a:solidFill>
                   <a:srgbClr val="1D1D1F"/>
                 </a:solidFill>
-                <a:latin typeface="Malgun Gothic"/>
+                <a:latin typeface="NanumSquare Neo"/>
+                <a:ea typeface="NanumSquare Neo"/>
               </a:defRPr>
             </a:pPr>
             <a:r>
@@ -149,7 +150,8 @@
                 <a:solidFill>
                   <a:srgbClr val="1D1D1F"/>
                 </a:solidFill>
-                <a:latin typeface="Malgun Gothic"/>
+                <a:latin typeface="NanumSquare Neo"/>
+                <a:ea typeface="NanumSquare Neo"/>
               </a:rPr>
               <a:t>면적 (µm²)</a:t>
             </a:r>
@@ -198,7 +200,8 @@
                     <a:solidFill>
                       <a:srgbClr val="1D1D1F"/>
                     </a:solidFill>
-                    <a:latin typeface="Malgun Gothic"/>
+                    <a:latin typeface="NanumSquare Neo"/>
+                    <a:ea typeface="NanumSquare Neo"/>
                   </a:defRPr>
                 </a:pPr>
               </a:p>
@@ -293,7 +296,8 @@
                   <a:solidFill>
                     <a:srgbClr val="1D1D1F"/>
                   </a:solidFill>
-                  <a:latin typeface="Malgun Gothic"/>
+                  <a:latin typeface="NanumSquare Neo"/>
+                  <a:ea typeface="NanumSquare Neo"/>
                 </a:defRPr>
               </a:pPr>
             </a:p>
@@ -341,7 +345,8 @@
                 <a:solidFill>
                   <a:srgbClr val="1D1D1F"/>
                 </a:solidFill>
-                <a:latin typeface="Malgun Gothic"/>
+                <a:latin typeface="NanumSquare Neo"/>
+                <a:ea typeface="NanumSquare Neo"/>
               </a:defRPr>
             </a:pPr>
             <a:endParaRPr lang="en-US"/>
@@ -393,7 +398,8 @@
                 <a:solidFill>
                   <a:srgbClr val="7A7A7A"/>
                 </a:solidFill>
-                <a:latin typeface="Malgun Gothic"/>
+                <a:latin typeface="NanumSquare Neo"/>
+                <a:ea typeface="NanumSquare Neo"/>
               </a:defRPr>
             </a:pPr>
             <a:endParaRPr lang="en-US"/>
@@ -443,7 +449,8 @@
                 <a:solidFill>
                   <a:srgbClr val="1D1D1F"/>
                 </a:solidFill>
-                <a:latin typeface="Malgun Gothic"/>
+                <a:latin typeface="NanumSquare Neo"/>
+                <a:ea typeface="NanumSquare Neo"/>
               </a:defRPr>
             </a:pPr>
             <a:r>
@@ -451,7 +458,8 @@
                 <a:solidFill>
                   <a:srgbClr val="1D1D1F"/>
                 </a:solidFill>
-                <a:latin typeface="Malgun Gothic"/>
+                <a:latin typeface="NanumSquare Neo"/>
+                <a:ea typeface="NanumSquare Neo"/>
               </a:rPr>
               <a:t>전력 (mW)</a:t>
             </a:r>
@@ -500,7 +508,8 @@
                     <a:solidFill>
                       <a:srgbClr val="1D1D1F"/>
                     </a:solidFill>
-                    <a:latin typeface="Malgun Gothic"/>
+                    <a:latin typeface="NanumSquare Neo"/>
+                    <a:ea typeface="NanumSquare Neo"/>
                   </a:defRPr>
                 </a:pPr>
               </a:p>
@@ -595,7 +604,8 @@
                   <a:solidFill>
                     <a:srgbClr val="1D1D1F"/>
                   </a:solidFill>
-                  <a:latin typeface="Malgun Gothic"/>
+                  <a:latin typeface="NanumSquare Neo"/>
+                  <a:ea typeface="NanumSquare Neo"/>
                 </a:defRPr>
               </a:pPr>
             </a:p>
@@ -643,7 +653,8 @@
                 <a:solidFill>
                   <a:srgbClr val="1D1D1F"/>
                 </a:solidFill>
-                <a:latin typeface="Malgun Gothic"/>
+                <a:latin typeface="NanumSquare Neo"/>
+                <a:ea typeface="NanumSquare Neo"/>
               </a:defRPr>
             </a:pPr>
             <a:endParaRPr lang="en-US"/>
@@ -695,7 +706,8 @@
                 <a:solidFill>
                   <a:srgbClr val="7A7A7A"/>
                 </a:solidFill>
-                <a:latin typeface="Malgun Gothic"/>
+                <a:latin typeface="NanumSquare Neo"/>
+                <a:ea typeface="NanumSquare Neo"/>
               </a:defRPr>
             </a:pPr>
             <a:endParaRPr lang="en-US"/>
@@ -745,7 +757,8 @@
                 <a:solidFill>
                   <a:srgbClr val="1D1D1F"/>
                 </a:solidFill>
-                <a:latin typeface="Malgun Gothic"/>
+                <a:latin typeface="NanumSquare Neo"/>
+                <a:ea typeface="NanumSquare Neo"/>
               </a:defRPr>
             </a:pPr>
             <a:r>
@@ -753,7 +766,8 @@
                 <a:solidFill>
                   <a:srgbClr val="1D1D1F"/>
                 </a:solidFill>
-                <a:latin typeface="Malgun Gothic"/>
+                <a:latin typeface="NanumSquare Neo"/>
+                <a:ea typeface="NanumSquare Neo"/>
               </a:rPr>
               <a:t>P&amp;R 셀 면적 (µm²)</a:t>
             </a:r>
@@ -802,7 +816,8 @@
                     <a:solidFill>
                       <a:srgbClr val="1D1D1F"/>
                     </a:solidFill>
-                    <a:latin typeface="Malgun Gothic"/>
+                    <a:latin typeface="NanumSquare Neo"/>
+                    <a:ea typeface="NanumSquare Neo"/>
                   </a:defRPr>
                 </a:pPr>
               </a:p>
@@ -880,7 +895,8 @@
                   <a:solidFill>
                     <a:srgbClr val="1D1D1F"/>
                   </a:solidFill>
-                  <a:latin typeface="Malgun Gothic"/>
+                  <a:latin typeface="NanumSquare Neo"/>
+                  <a:ea typeface="NanumSquare Neo"/>
                 </a:defRPr>
               </a:pPr>
             </a:p>
@@ -928,7 +944,8 @@
                 <a:solidFill>
                   <a:srgbClr val="1D1D1F"/>
                 </a:solidFill>
-                <a:latin typeface="Malgun Gothic"/>
+                <a:latin typeface="NanumSquare Neo"/>
+                <a:ea typeface="NanumSquare Neo"/>
               </a:defRPr>
             </a:pPr>
             <a:endParaRPr lang="en-US"/>
@@ -980,7 +997,8 @@
                 <a:solidFill>
                   <a:srgbClr val="7A7A7A"/>
                 </a:solidFill>
-                <a:latin typeface="Malgun Gothic"/>
+                <a:latin typeface="NanumSquare Neo"/>
+                <a:ea typeface="NanumSquare Neo"/>
               </a:defRPr>
             </a:pPr>
             <a:endParaRPr lang="en-US"/>
@@ -1030,7 +1048,8 @@
                 <a:solidFill>
                   <a:srgbClr val="1D1D1F"/>
                 </a:solidFill>
-                <a:latin typeface="Malgun Gothic"/>
+                <a:latin typeface="NanumSquare Neo"/>
+                <a:ea typeface="NanumSquare Neo"/>
               </a:defRPr>
             </a:pPr>
             <a:r>
@@ -1038,7 +1057,8 @@
                 <a:solidFill>
                   <a:srgbClr val="1D1D1F"/>
                 </a:solidFill>
-                <a:latin typeface="Malgun Gothic"/>
+                <a:latin typeface="NanumSquare Neo"/>
+                <a:ea typeface="NanumSquare Neo"/>
               </a:rPr>
               <a:t>실제 DELTA 활동도 전력 (mW)</a:t>
             </a:r>
@@ -1087,7 +1107,8 @@
                     <a:solidFill>
                       <a:srgbClr val="1D1D1F"/>
                     </a:solidFill>
-                    <a:latin typeface="Malgun Gothic"/>
+                    <a:latin typeface="NanumSquare Neo"/>
+                    <a:ea typeface="NanumSquare Neo"/>
                   </a:defRPr>
                 </a:pPr>
               </a:p>
@@ -1233,7 +1254,8 @@
                   <a:solidFill>
                     <a:srgbClr val="1D1D1F"/>
                   </a:solidFill>
-                  <a:latin typeface="Malgun Gothic"/>
+                  <a:latin typeface="NanumSquare Neo"/>
+                  <a:ea typeface="NanumSquare Neo"/>
                 </a:defRPr>
               </a:pPr>
             </a:p>
@@ -1281,7 +1303,8 @@
                 <a:solidFill>
                   <a:srgbClr val="1D1D1F"/>
                 </a:solidFill>
-                <a:latin typeface="Malgun Gothic"/>
+                <a:latin typeface="NanumSquare Neo"/>
+                <a:ea typeface="NanumSquare Neo"/>
               </a:defRPr>
             </a:pPr>
             <a:endParaRPr lang="en-US"/>
@@ -1333,7 +1356,8 @@
                 <a:solidFill>
                   <a:srgbClr val="7A7A7A"/>
                 </a:solidFill>
-                <a:latin typeface="Malgun Gothic"/>
+                <a:latin typeface="NanumSquare Neo"/>
+                <a:ea typeface="NanumSquare Neo"/>
               </a:defRPr>
             </a:pPr>
             <a:endParaRPr lang="en-US"/>
@@ -1383,7 +1407,8 @@
                 <a:solidFill>
                   <a:srgbClr val="1D1D1F"/>
                 </a:solidFill>
-                <a:latin typeface="Malgun Gothic"/>
+                <a:latin typeface="NanumSquare Neo"/>
+                <a:ea typeface="NanumSquare Neo"/>
               </a:defRPr>
             </a:pPr>
             <a:r>
@@ -1391,7 +1416,8 @@
                 <a:solidFill>
                   <a:srgbClr val="1D1D1F"/>
                 </a:solidFill>
-                <a:latin typeface="Malgun Gothic"/>
+                <a:latin typeface="NanumSquare Neo"/>
+                <a:ea typeface="NanumSquare Neo"/>
               </a:rPr>
               <a:t>유휴 6000사이클 VCD 전력 (mW)</a:t>
             </a:r>
@@ -1440,7 +1466,8 @@
                     <a:solidFill>
                       <a:srgbClr val="1D1D1F"/>
                     </a:solidFill>
-                    <a:latin typeface="Malgun Gothic"/>
+                    <a:latin typeface="NanumSquare Neo"/>
+                    <a:ea typeface="NanumSquare Neo"/>
                   </a:defRPr>
                 </a:pPr>
               </a:p>
@@ -1518,7 +1545,8 @@
                   <a:solidFill>
                     <a:srgbClr val="1D1D1F"/>
                   </a:solidFill>
-                  <a:latin typeface="Malgun Gothic"/>
+                  <a:latin typeface="NanumSquare Neo"/>
+                  <a:ea typeface="NanumSquare Neo"/>
                 </a:defRPr>
               </a:pPr>
             </a:p>
@@ -1566,7 +1594,8 @@
                 <a:solidFill>
                   <a:srgbClr val="1D1D1F"/>
                 </a:solidFill>
-                <a:latin typeface="Malgun Gothic"/>
+                <a:latin typeface="NanumSquare Neo"/>
+                <a:ea typeface="NanumSquare Neo"/>
               </a:defRPr>
             </a:pPr>
             <a:endParaRPr lang="en-US"/>
@@ -1618,7 +1647,8 @@
                 <a:solidFill>
                   <a:srgbClr val="7A7A7A"/>
                 </a:solidFill>
-                <a:latin typeface="Malgun Gothic"/>
+                <a:latin typeface="NanumSquare Neo"/>
+                <a:ea typeface="NanumSquare Neo"/>
               </a:defRPr>
             </a:pPr>
             <a:endParaRPr lang="en-US"/>
@@ -3756,9 +3786,9 @@
                 <a:solidFill>
                   <a:srgbClr val="7A7A7A"/>
                 </a:solidFill>
-                <a:latin typeface="Malgun Gothic" pitchFamily="34" charset="0"/>
-                <a:ea typeface="Malgun Gothic" pitchFamily="34" charset="-122"/>
-                <a:cs typeface="Malgun Gothic" pitchFamily="34" charset="-120"/>
+                <a:latin typeface="NanumSquare Neo" pitchFamily="34" charset="0"/>
+                <a:ea typeface="NanumSquare Neo" pitchFamily="34" charset="-122"/>
+                <a:cs typeface="NanumSquare Neo" pitchFamily="34" charset="-120"/>
               </a:rPr>
               <a:t>팀 REDRED · Digital 2차</a:t>
             </a:r>
@@ -3798,9 +3828,9 @@
                 <a:solidFill>
                   <a:srgbClr val="7A7A7A"/>
                 </a:solidFill>
-                <a:latin typeface="Malgun Gothic"/>
-                <a:ea typeface="Malgun Gothic"/>
-                <a:cs typeface="Malgun Gothic"/>
+                <a:latin typeface="NanumSquare Neo"/>
+                <a:ea typeface="NanumSquare Neo"/>
+                <a:cs typeface="NanumSquare Neo"/>
               </a:defRPr>
             </a:lvl1pPr>
           </a:lstStyle>
@@ -3875,9 +3905,9 @@
                 <a:solidFill>
                   <a:srgbClr val="7A7A7A"/>
                 </a:solidFill>
-                <a:latin typeface="Malgun Gothic" pitchFamily="34" charset="0"/>
-                <a:ea typeface="Malgun Gothic" pitchFamily="34" charset="-122"/>
-                <a:cs typeface="Malgun Gothic" pitchFamily="34" charset="-120"/>
+                <a:latin typeface="NanumSquare Neo" pitchFamily="34" charset="0"/>
+                <a:ea typeface="NanumSquare Neo" pitchFamily="34" charset="-122"/>
+                <a:cs typeface="NanumSquare Neo" pitchFamily="34" charset="-120"/>
               </a:rPr>
               <a:t>팀 REDRED · Digital 2차</a:t>
             </a:r>
@@ -3917,9 +3947,9 @@
                 <a:solidFill>
                   <a:srgbClr val="7A7A7A"/>
                 </a:solidFill>
-                <a:latin typeface="Malgun Gothic"/>
-                <a:ea typeface="Malgun Gothic"/>
-                <a:cs typeface="Malgun Gothic"/>
+                <a:latin typeface="NanumSquare Neo"/>
+                <a:ea typeface="NanumSquare Neo"/>
+                <a:cs typeface="NanumSquare Neo"/>
               </a:defRPr>
             </a:lvl1pPr>
           </a:lstStyle>
@@ -4022,9 +4052,9 @@
                 <a:solidFill>
                   <a:srgbClr val="7A7A7A"/>
                 </a:solidFill>
-                <a:latin typeface="Malgun Gothic"/>
-                <a:ea typeface="Malgun Gothic"/>
-                <a:cs typeface="Malgun Gothic"/>
+                <a:latin typeface="NanumSquare Neo"/>
+                <a:ea typeface="NanumSquare Neo"/>
+                <a:cs typeface="NanumSquare Neo"/>
               </a:defRPr>
             </a:lvl1pPr>
           </a:lstStyle>
@@ -4347,9 +4377,9 @@
                 <a:solidFill>
                   <a:srgbClr val="CCCCCC"/>
                 </a:solidFill>
-                <a:latin typeface="Malgun Gothic" pitchFamily="34" charset="0"/>
-                <a:ea typeface="Malgun Gothic" pitchFamily="34" charset="-122"/>
-                <a:cs typeface="Malgun Gothic" pitchFamily="34" charset="-120"/>
+                <a:latin typeface="NanumSquare Neo" pitchFamily="34" charset="0"/>
+                <a:ea typeface="NanumSquare Neo" pitchFamily="34" charset="-122"/>
+                <a:cs typeface="NanumSquare Neo" pitchFamily="34" charset="-120"/>
               </a:rPr>
               <a:t>2026 전국 대학생 AI 반도체 회로 설계 경진대회 · Digital 트랙 2차 결과</a:t>
             </a:r>
@@ -4386,9 +4416,9 @@
                 <a:solidFill>
                   <a:srgbClr val="FFFFFF"/>
                 </a:solidFill>
-                <a:latin typeface="Malgun Gothic" pitchFamily="34" charset="0"/>
-                <a:ea typeface="Malgun Gothic" pitchFamily="34" charset="-122"/>
-                <a:cs typeface="Malgun Gothic" pitchFamily="34" charset="-120"/>
+                <a:latin typeface="NanumSquare Neo" pitchFamily="34" charset="0"/>
+                <a:ea typeface="NanumSquare Neo" pitchFamily="34" charset="-122"/>
+                <a:cs typeface="NanumSquare Neo" pitchFamily="34" charset="-120"/>
               </a:rPr>
               <a:t>회전하는 이벤트 카메라를</a:t>
             </a:r>
@@ -4403,9 +4433,9 @@
                 <a:solidFill>
                   <a:srgbClr val="FFFFFF"/>
                 </a:solidFill>
-                <a:latin typeface="Malgun Gothic" pitchFamily="34" charset="0"/>
-                <a:ea typeface="Malgun Gothic" pitchFamily="34" charset="-122"/>
-                <a:cs typeface="Malgun Gothic" pitchFamily="34" charset="-120"/>
+                <a:latin typeface="NanumSquare Neo" pitchFamily="34" charset="0"/>
+                <a:ea typeface="NanumSquare Neo" pitchFamily="34" charset="-122"/>
+                <a:cs typeface="NanumSquare Neo" pitchFamily="34" charset="-120"/>
               </a:rPr>
               <a:t>하나의 월드 지도로 옮기는 저전력 회로</a:t>
             </a:r>
@@ -4442,9 +4472,9 @@
                 <a:solidFill>
                   <a:srgbClr val="2997FF"/>
                 </a:solidFill>
-                <a:latin typeface="Malgun Gothic" pitchFamily="34" charset="0"/>
-                <a:ea typeface="Malgun Gothic" pitchFamily="34" charset="-122"/>
-                <a:cs typeface="Malgun Gothic" pitchFamily="34" charset="-120"/>
+                <a:latin typeface="NanumSquare Neo" pitchFamily="34" charset="0"/>
+                <a:ea typeface="NanumSquare Neo" pitchFamily="34" charset="-122"/>
+                <a:cs typeface="NanumSquare Neo" pitchFamily="34" charset="-120"/>
               </a:rPr>
               <a:t>Event camera world-coordinate transform &amp; world memory (RTL, P&amp;R)</a:t>
             </a:r>
@@ -4481,9 +4511,9 @@
                 <a:solidFill>
                   <a:srgbClr val="CCCCCC"/>
                 </a:solidFill>
-                <a:latin typeface="Malgun Gothic" pitchFamily="34" charset="0"/>
-                <a:ea typeface="Malgun Gothic" pitchFamily="34" charset="-122"/>
-                <a:cs typeface="Malgun Gothic" pitchFamily="34" charset="-120"/>
+                <a:latin typeface="NanumSquare Neo" pitchFamily="34" charset="0"/>
+                <a:ea typeface="NanumSquare Neo" pitchFamily="34" charset="-122"/>
+                <a:cs typeface="NanumSquare Neo" pitchFamily="34" charset="-120"/>
               </a:rPr>
               <a:t>팀 REDRED</a:t>
             </a:r>
@@ -4543,13 +4573,13 @@
               <a:buNone/>
             </a:pPr>
             <a:r>
-              <a:rPr lang="en-US" sz="2600" b="1" spc="-30" kern="0" dirty="0">
+              <a:rPr lang="en-US" sz="2600" b="1" dirty="0">
                 <a:solidFill>
                   <a:srgbClr val="1D1D1F"/>
                 </a:solidFill>
-                <a:latin typeface="Malgun Gothic" pitchFamily="34" charset="0"/>
-                <a:ea typeface="Malgun Gothic" pitchFamily="34" charset="-122"/>
-                <a:cs typeface="Malgun Gothic" pitchFamily="34" charset="-120"/>
+                <a:latin typeface="NanumSquare Neo" pitchFamily="34" charset="0"/>
+                <a:ea typeface="NanumSquare Neo" pitchFamily="34" charset="-122"/>
+                <a:cs typeface="NanumSquare Neo" pitchFamily="34" charset="-120"/>
               </a:rPr>
               <a:t>행 단위 클록 게이팅으로 메모리 전력을 65% 줄였다</a:t>
             </a:r>
@@ -4626,9 +4656,9 @@
                 <a:solidFill>
                   <a:srgbClr val="7A7A7A"/>
                 </a:solidFill>
-                <a:latin typeface="Malgun Gothic" pitchFamily="34" charset="0"/>
-                <a:ea typeface="Malgun Gothic" pitchFamily="34" charset="-122"/>
-                <a:cs typeface="Malgun Gothic" pitchFamily="34" charset="-120"/>
+                <a:latin typeface="NanumSquare Neo" pitchFamily="34" charset="0"/>
+                <a:ea typeface="NanumSquare Neo" pitchFamily="34" charset="-122"/>
+                <a:cs typeface="NanumSquare Neo" pitchFamily="34" charset="-120"/>
               </a:rPr>
               <a:t>RTL 시뮬레이션 파형: 쓰는 행의 게이트 클록만 토글</a:t>
             </a:r>
@@ -4692,9 +4722,9 @@
                 <a:solidFill>
                   <a:srgbClr val="0066CC"/>
                 </a:solidFill>
-                <a:latin typeface="Malgun Gothic" pitchFamily="34" charset="0"/>
-                <a:ea typeface="Malgun Gothic" pitchFamily="34" charset="-122"/>
-                <a:cs typeface="Malgun Gothic" pitchFamily="34" charset="-120"/>
+                <a:latin typeface="NanumSquare Neo" pitchFamily="34" charset="0"/>
+                <a:ea typeface="NanumSquare Neo" pitchFamily="34" charset="-122"/>
+                <a:cs typeface="NanumSquare Neo" pitchFamily="34" charset="-120"/>
               </a:rPr>
               <a:t>결과</a:t>
             </a:r>
@@ -4731,9 +4761,9 @@
                 <a:solidFill>
                   <a:srgbClr val="1D1D1F"/>
                 </a:solidFill>
-                <a:latin typeface="Malgun Gothic" pitchFamily="34" charset="0"/>
-                <a:ea typeface="Malgun Gothic" pitchFamily="34" charset="-122"/>
-                <a:cs typeface="Malgun Gothic" pitchFamily="34" charset="-120"/>
+                <a:latin typeface="NanumSquare Neo" pitchFamily="34" charset="0"/>
+                <a:ea typeface="NanumSquare Neo" pitchFamily="34" charset="-122"/>
+                <a:cs typeface="NanumSquare Neo" pitchFamily="34" charset="-120"/>
               </a:rPr>
               <a:t>전력 2.522 → 0.870 mW (−65.5%)</a:t>
             </a:r>
@@ -4748,9 +4778,9 @@
                 <a:solidFill>
                   <a:srgbClr val="1D1D1F"/>
                 </a:solidFill>
-                <a:latin typeface="Malgun Gothic" pitchFamily="34" charset="0"/>
-                <a:ea typeface="Malgun Gothic" pitchFamily="34" charset="-122"/>
-                <a:cs typeface="Malgun Gothic" pitchFamily="34" charset="-120"/>
+                <a:latin typeface="NanumSquare Neo" pitchFamily="34" charset="0"/>
+                <a:ea typeface="NanumSquare Neo" pitchFamily="34" charset="-122"/>
+                <a:cs typeface="NanumSquare Neo" pitchFamily="34" charset="-120"/>
               </a:rPr>
               <a:t>면적 90,105 → 85,617 µm² (−5.0%)</a:t>
             </a:r>
@@ -4787,9 +4817,9 @@
                 <a:solidFill>
                   <a:srgbClr val="7A7A7A"/>
                 </a:solidFill>
-                <a:latin typeface="Malgun Gothic" pitchFamily="34" charset="0"/>
-                <a:ea typeface="Malgun Gothic" pitchFamily="34" charset="-122"/>
-                <a:cs typeface="Malgun Gothic" pitchFamily="34" charset="-120"/>
+                <a:latin typeface="NanumSquare Neo" pitchFamily="34" charset="0"/>
+                <a:ea typeface="NanumSquare Neo" pitchFamily="34" charset="-122"/>
+                <a:cs typeface="NanumSquare Neo" pitchFamily="34" charset="-120"/>
               </a:rPr>
               <a:t>C64·C256 = 쓰기 캐시 64·256항목. 원리: 행(y)마다 클록 게이트를 두어 쓰는 행의 128개 FF만 클록을 받는다(리셋 때만 전 행). 쓰기 캐시(64항목)는 전력 −16%, 면적 +5.5%로 이득이 작아 필수로 두지 않았다. 256항목은 오히려 전력이 늘었다.</a:t>
             </a:r>
@@ -4829,9 +4859,9 @@
                 <a:solidFill>
                   <a:srgbClr val="7A7A7A"/>
                 </a:solidFill>
-                <a:latin typeface="Malgun Gothic"/>
-                <a:ea typeface="Malgun Gothic"/>
-                <a:cs typeface="Malgun Gothic"/>
+                <a:latin typeface="NanumSquare Neo"/>
+                <a:ea typeface="NanumSquare Neo"/>
+                <a:cs typeface="NanumSquare Neo"/>
               </a:defRPr>
             </a:lvl1pPr>
           </a:lstStyle>
@@ -4897,13 +4927,13 @@
               <a:buNone/>
             </a:pPr>
             <a:r>
-              <a:rPr lang="en-US" sz="2600" b="1" spc="-30" kern="0" dirty="0">
+              <a:rPr lang="en-US" sz="2600" b="1" dirty="0">
                 <a:solidFill>
                   <a:srgbClr val="1D1D1F"/>
                 </a:solidFill>
-                <a:latin typeface="Malgun Gothic" pitchFamily="34" charset="0"/>
-                <a:ea typeface="Malgun Gothic" pitchFamily="34" charset="-122"/>
-                <a:cs typeface="Malgun Gothic" pitchFamily="34" charset="-120"/>
+                <a:latin typeface="NanumSquare Neo" pitchFamily="34" charset="0"/>
+                <a:ea typeface="NanumSquare Neo" pitchFamily="34" charset="-122"/>
+                <a:cs typeface="NanumSquare Neo" pitchFamily="34" charset="-120"/>
               </a:rPr>
               <a:t>Blink: 입력이 없는 동안 코어 클록을 꺼 유휴 전력을 줄였다</a:t>
             </a:r>
@@ -4980,9 +5010,9 @@
                 <a:solidFill>
                   <a:srgbClr val="7A7A7A"/>
                 </a:solidFill>
-                <a:latin typeface="Malgun Gothic" pitchFamily="34" charset="0"/>
-                <a:ea typeface="Malgun Gothic" pitchFamily="34" charset="-122"/>
-                <a:cs typeface="Malgun Gothic" pitchFamily="34" charset="-120"/>
+                <a:latin typeface="NanumSquare Neo" pitchFamily="34" charset="0"/>
+                <a:ea typeface="NanumSquare Neo" pitchFamily="34" charset="-122"/>
+                <a:cs typeface="NanumSquare Neo" pitchFamily="34" charset="-120"/>
               </a:rPr>
               <a:t>RTL 시뮬레이션 파형: 입력이 끊기면(511사이클) 코어 클록 차단, 새 입력에 재가동</a:t>
             </a:r>
@@ -5030,16 +5060,16 @@
                           <a:solidFill>
                             <a:srgbClr val="1D1D1F"/>
                           </a:solidFill>
-                          <a:latin typeface="Malgun Gothic" pitchFamily="34" charset="0"/>
-                          <a:ea typeface="Malgun Gothic" pitchFamily="34" charset="-122"/>
-                          <a:cs typeface="Malgun Gothic" pitchFamily="34" charset="-120"/>
+                          <a:latin typeface="NanumSquare Neo" pitchFamily="34" charset="0"/>
+                          <a:ea typeface="NanumSquare Neo" pitchFamily="34" charset="-122"/>
+                          <a:cs typeface="NanumSquare Neo" pitchFamily="34" charset="-120"/>
                         </a:rPr>
                         <a:t>200 MHz에서 칩이 일하는 비율 (실제 DELTA)</a:t>
                       </a:r>
                       <a:endParaRPr lang="en-US" sz="1400" dirty="0">
-                        <a:latin typeface="Malgun Gothic" charset="0"/>
-                        <a:ea typeface="Malgun Gothic" charset="0"/>
-                        <a:cs typeface="Malgun Gothic" charset="0"/>
+                        <a:latin typeface="NanumSquare Neo" charset="0"/>
+                        <a:ea typeface="NanumSquare Neo" charset="0"/>
+                        <a:cs typeface="NanumSquare Neo" charset="0"/>
                       </a:endParaRPr>
                     </a:p>
                   </a:txBody>
@@ -5098,16 +5128,16 @@
                           <a:solidFill>
                             <a:srgbClr val="1D1D1F"/>
                           </a:solidFill>
-                          <a:latin typeface="Malgun Gothic" pitchFamily="34" charset="0"/>
-                          <a:ea typeface="Malgun Gothic" pitchFamily="34" charset="-122"/>
-                          <a:cs typeface="Malgun Gothic" pitchFamily="34" charset="-120"/>
+                          <a:latin typeface="NanumSquare Neo" pitchFamily="34" charset="0"/>
+                          <a:ea typeface="NanumSquare Neo" pitchFamily="34" charset="-122"/>
+                          <a:cs typeface="NanumSquare Neo" pitchFamily="34" charset="-120"/>
                         </a:rPr>
                         <a:t>비율</a:t>
                       </a:r>
                       <a:endParaRPr lang="en-US" sz="1400" dirty="0">
-                        <a:latin typeface="Malgun Gothic" charset="0"/>
-                        <a:ea typeface="Malgun Gothic" charset="0"/>
-                        <a:cs typeface="Malgun Gothic" charset="0"/>
+                        <a:latin typeface="NanumSquare Neo" charset="0"/>
+                        <a:ea typeface="NanumSquare Neo" charset="0"/>
+                        <a:cs typeface="NanumSquare Neo" charset="0"/>
                       </a:endParaRPr>
                     </a:p>
                   </a:txBody>
@@ -5168,16 +5198,16 @@
                           <a:solidFill>
                             <a:srgbClr val="1D1D1F"/>
                           </a:solidFill>
-                          <a:latin typeface="Malgun Gothic" pitchFamily="34" charset="0"/>
-                          <a:ea typeface="Malgun Gothic" pitchFamily="34" charset="-122"/>
-                          <a:cs typeface="Malgun Gothic" pitchFamily="34" charset="-120"/>
+                          <a:latin typeface="NanumSquare Neo" pitchFamily="34" charset="0"/>
+                          <a:ea typeface="NanumSquare Neo" pitchFamily="34" charset="-122"/>
+                          <a:cs typeface="NanumSquare Neo" pitchFamily="34" charset="-120"/>
                         </a:rPr>
                         <a:t>입력 8개/사이클 버스트 가정 (하한)</a:t>
                       </a:r>
                       <a:endParaRPr lang="en-US" sz="1400" dirty="0">
-                        <a:latin typeface="Malgun Gothic" charset="0"/>
-                        <a:ea typeface="Malgun Gothic" charset="0"/>
-                        <a:cs typeface="Malgun Gothic" charset="0"/>
+                        <a:latin typeface="NanumSquare Neo" charset="0"/>
+                        <a:ea typeface="NanumSquare Neo" charset="0"/>
+                        <a:cs typeface="NanumSquare Neo" charset="0"/>
                       </a:endParaRPr>
                     </a:p>
                   </a:txBody>
@@ -5236,16 +5266,16 @@
                           <a:solidFill>
                             <a:srgbClr val="1D1D1F"/>
                           </a:solidFill>
-                          <a:latin typeface="Malgun Gothic" pitchFamily="34" charset="0"/>
-                          <a:ea typeface="Malgun Gothic" pitchFamily="34" charset="-122"/>
-                          <a:cs typeface="Malgun Gothic" pitchFamily="34" charset="-120"/>
+                          <a:latin typeface="NanumSquare Neo" pitchFamily="34" charset="0"/>
+                          <a:ea typeface="NanumSquare Neo" pitchFamily="34" charset="-122"/>
+                          <a:cs typeface="NanumSquare Neo" pitchFamily="34" charset="-120"/>
                         </a:rPr>
                         <a:t>3.1% (p90 5.4%)</a:t>
                       </a:r>
                       <a:endParaRPr lang="en-US" sz="1400" dirty="0">
-                        <a:latin typeface="Malgun Gothic" charset="0"/>
-                        <a:ea typeface="Malgun Gothic" charset="0"/>
-                        <a:cs typeface="Malgun Gothic" charset="0"/>
+                        <a:latin typeface="NanumSquare Neo" charset="0"/>
+                        <a:ea typeface="NanumSquare Neo" charset="0"/>
+                        <a:cs typeface="NanumSquare Neo" charset="0"/>
                       </a:endParaRPr>
                     </a:p>
                   </a:txBody>
@@ -5306,16 +5336,16 @@
                           <a:solidFill>
                             <a:srgbClr val="1D1D1F"/>
                           </a:solidFill>
-                          <a:latin typeface="Malgun Gothic" pitchFamily="34" charset="0"/>
-                          <a:ea typeface="Malgun Gothic" pitchFamily="34" charset="-122"/>
-                          <a:cs typeface="Malgun Gothic" pitchFamily="34" charset="-120"/>
+                          <a:latin typeface="NanumSquare Neo" pitchFamily="34" charset="0"/>
+                          <a:ea typeface="NanumSquare Neo" pitchFamily="34" charset="-122"/>
+                          <a:cs typeface="NanumSquare Neo" pitchFamily="34" charset="-120"/>
                         </a:rPr>
                         <a:t>쓰기 포트 1건/사이클 상한 가정</a:t>
                       </a:r>
                       <a:endParaRPr lang="en-US" sz="1400" dirty="0">
-                        <a:latin typeface="Malgun Gothic" charset="0"/>
-                        <a:ea typeface="Malgun Gothic" charset="0"/>
-                        <a:cs typeface="Malgun Gothic" charset="0"/>
+                        <a:latin typeface="NanumSquare Neo" charset="0"/>
+                        <a:ea typeface="NanumSquare Neo" charset="0"/>
+                        <a:cs typeface="NanumSquare Neo" charset="0"/>
                       </a:endParaRPr>
                     </a:p>
                   </a:txBody>
@@ -5374,16 +5404,16 @@
                           <a:solidFill>
                             <a:srgbClr val="1D1D1F"/>
                           </a:solidFill>
-                          <a:latin typeface="Malgun Gothic" pitchFamily="34" charset="0"/>
-                          <a:ea typeface="Malgun Gothic" pitchFamily="34" charset="-122"/>
-                          <a:cs typeface="Malgun Gothic" pitchFamily="34" charset="-120"/>
+                          <a:latin typeface="NanumSquare Neo" pitchFamily="34" charset="0"/>
+                          <a:ea typeface="NanumSquare Neo" pitchFamily="34" charset="-122"/>
+                          <a:cs typeface="NanumSquare Neo" pitchFamily="34" charset="-120"/>
                         </a:rPr>
                         <a:t>25%</a:t>
                       </a:r>
                       <a:endParaRPr lang="en-US" sz="1400" dirty="0">
-                        <a:latin typeface="Malgun Gothic" charset="0"/>
-                        <a:ea typeface="Malgun Gothic" charset="0"/>
-                        <a:cs typeface="Malgun Gothic" charset="0"/>
+                        <a:latin typeface="NanumSquare Neo" charset="0"/>
+                        <a:ea typeface="NanumSquare Neo" charset="0"/>
+                        <a:cs typeface="NanumSquare Neo" charset="0"/>
                       </a:endParaRPr>
                     </a:p>
                   </a:txBody>
@@ -5463,9 +5493,9 @@
                 <a:solidFill>
                   <a:srgbClr val="1D1D1F"/>
                 </a:solidFill>
-                <a:latin typeface="Malgun Gothic" pitchFamily="34" charset="0"/>
-                <a:ea typeface="Malgun Gothic" pitchFamily="34" charset="-122"/>
-                <a:cs typeface="Malgun Gothic" pitchFamily="34" charset="-120"/>
+                <a:latin typeface="NanumSquare Neo" pitchFamily="34" charset="0"/>
+                <a:ea typeface="NanumSquare Neo" pitchFamily="34" charset="-122"/>
+                <a:cs typeface="NanumSquare Neo" pitchFamily="34" charset="-120"/>
               </a:rPr>
               <a:t>주의: −71%는 유휴가 길도록 만든 시험 입력의 값이다. 실제 부하에서의 절감은 위 가동 비율에 비례하며, vectorless 전력에서는 두 구성이 같게 나온다(활동도를 모르면 코어가 계속 켜져 있다고 가정).</a:t>
             </a:r>
@@ -5505,9 +5535,9 @@
                 <a:solidFill>
                   <a:srgbClr val="7A7A7A"/>
                 </a:solidFill>
-                <a:latin typeface="Malgun Gothic"/>
-                <a:ea typeface="Malgun Gothic"/>
-                <a:cs typeface="Malgun Gothic"/>
+                <a:latin typeface="NanumSquare Neo"/>
+                <a:ea typeface="NanumSquare Neo"/>
+                <a:cs typeface="NanumSquare Neo"/>
               </a:defRPr>
             </a:lvl1pPr>
           </a:lstStyle>
@@ -5573,13 +5603,13 @@
               <a:buNone/>
             </a:pPr>
             <a:r>
-              <a:rPr lang="en-US" sz="2600" b="1" spc="-30" kern="0" dirty="0">
+              <a:rPr lang="en-US" sz="2600" b="1" dirty="0">
                 <a:solidFill>
                   <a:srgbClr val="1D1D1F"/>
                 </a:solidFill>
-                <a:latin typeface="Malgun Gothic" pitchFamily="34" charset="0"/>
-                <a:ea typeface="Malgun Gothic" pitchFamily="34" charset="-122"/>
-                <a:cs typeface="Malgun Gothic" pitchFamily="34" charset="-120"/>
+                <a:latin typeface="NanumSquare Neo" pitchFamily="34" charset="0"/>
+                <a:ea typeface="NanumSquare Neo" pitchFamily="34" charset="-122"/>
+                <a:cs typeface="NanumSquare Neo" pitchFamily="34" charset="-120"/>
               </a:rPr>
               <a:t>물리 검증: 클록 게이팅 hold는 구조로 해결, 일반 경로에 ps 단위 잔여</a:t>
             </a:r>
@@ -5629,16 +5659,16 @@
                           <a:solidFill>
                             <a:srgbClr val="1D1D1F"/>
                           </a:solidFill>
-                          <a:latin typeface="Malgun Gothic" pitchFamily="34" charset="0"/>
-                          <a:ea typeface="Malgun Gothic" pitchFamily="34" charset="-122"/>
-                          <a:cs typeface="Malgun Gothic" pitchFamily="34" charset="-120"/>
+                          <a:latin typeface="NanumSquare Neo" pitchFamily="34" charset="0"/>
+                          <a:ea typeface="NanumSquare Neo" pitchFamily="34" charset="-122"/>
+                          <a:cs typeface="NanumSquare Neo" pitchFamily="34" charset="-120"/>
                         </a:rPr>
                         <a:t>항목 (signoff)</a:t>
                       </a:r>
                       <a:endParaRPr lang="en-US" sz="1200" dirty="0">
-                        <a:latin typeface="Malgun Gothic" charset="0"/>
-                        <a:ea typeface="Malgun Gothic" charset="0"/>
-                        <a:cs typeface="Malgun Gothic" charset="0"/>
+                        <a:latin typeface="NanumSquare Neo" charset="0"/>
+                        <a:ea typeface="NanumSquare Neo" charset="0"/>
+                        <a:cs typeface="NanumSquare Neo" charset="0"/>
                       </a:endParaRPr>
                     </a:p>
                   </a:txBody>
@@ -5697,16 +5727,16 @@
                           <a:solidFill>
                             <a:srgbClr val="1D1D1F"/>
                           </a:solidFill>
-                          <a:latin typeface="Malgun Gothic" pitchFamily="34" charset="0"/>
-                          <a:ea typeface="Malgun Gothic" pitchFamily="34" charset="-122"/>
-                          <a:cs typeface="Malgun Gothic" pitchFamily="34" charset="-120"/>
+                          <a:latin typeface="NanumSquare Neo" pitchFamily="34" charset="0"/>
+                          <a:ea typeface="NanumSquare Neo" pitchFamily="34" charset="-122"/>
+                          <a:cs typeface="NanumSquare Neo" pitchFamily="34" charset="-120"/>
                         </a:rPr>
                         <a:t>래치+AND 분리</a:t>
                       </a:r>
                       <a:endParaRPr lang="en-US" sz="1200" dirty="0">
-                        <a:latin typeface="Malgun Gothic" charset="0"/>
-                        <a:ea typeface="Malgun Gothic" charset="0"/>
-                        <a:cs typeface="Malgun Gothic" charset="0"/>
+                        <a:latin typeface="NanumSquare Neo" charset="0"/>
+                        <a:ea typeface="NanumSquare Neo" charset="0"/>
+                        <a:cs typeface="NanumSquare Neo" charset="0"/>
                       </a:endParaRPr>
                     </a:p>
                   </a:txBody>
@@ -5765,16 +5795,16 @@
                           <a:solidFill>
                             <a:srgbClr val="1D1D1F"/>
                           </a:solidFill>
-                          <a:latin typeface="Malgun Gothic" pitchFamily="34" charset="0"/>
-                          <a:ea typeface="Malgun Gothic" pitchFamily="34" charset="-122"/>
-                          <a:cs typeface="Malgun Gothic" pitchFamily="34" charset="-120"/>
+                          <a:latin typeface="NanumSquare Neo" pitchFamily="34" charset="0"/>
+                          <a:ea typeface="NanumSquare Neo" pitchFamily="34" charset="-122"/>
+                          <a:cs typeface="NanumSquare Neo" pitchFamily="34" charset="-120"/>
                         </a:rPr>
                         <a:t>통합 ICG</a:t>
                       </a:r>
                       <a:endParaRPr lang="en-US" sz="1200" dirty="0">
-                        <a:latin typeface="Malgun Gothic" charset="0"/>
-                        <a:ea typeface="Malgun Gothic" charset="0"/>
-                        <a:cs typeface="Malgun Gothic" charset="0"/>
+                        <a:latin typeface="NanumSquare Neo" charset="0"/>
+                        <a:ea typeface="NanumSquare Neo" charset="0"/>
+                        <a:cs typeface="NanumSquare Neo" charset="0"/>
                       </a:endParaRPr>
                     </a:p>
                   </a:txBody>
@@ -5833,16 +5863,16 @@
                           <a:solidFill>
                             <a:srgbClr val="1D1D1F"/>
                           </a:solidFill>
-                          <a:latin typeface="Malgun Gothic" pitchFamily="34" charset="0"/>
-                          <a:ea typeface="Malgun Gothic" pitchFamily="34" charset="-122"/>
-                          <a:cs typeface="Malgun Gothic" pitchFamily="34" charset="-120"/>
+                          <a:latin typeface="NanumSquare Neo" pitchFamily="34" charset="0"/>
+                          <a:ea typeface="NanumSquare Neo" pitchFamily="34" charset="-122"/>
+                          <a:cs typeface="NanumSquare Neo" pitchFamily="34" charset="-120"/>
                         </a:rPr>
                         <a:t>통합 ICG @5.2 ns</a:t>
                       </a:r>
                       <a:endParaRPr lang="en-US" sz="1200" dirty="0">
-                        <a:latin typeface="Malgun Gothic" charset="0"/>
-                        <a:ea typeface="Malgun Gothic" charset="0"/>
-                        <a:cs typeface="Malgun Gothic" charset="0"/>
+                        <a:latin typeface="NanumSquare Neo" charset="0"/>
+                        <a:ea typeface="NanumSquare Neo" charset="0"/>
+                        <a:cs typeface="NanumSquare Neo" charset="0"/>
                       </a:endParaRPr>
                     </a:p>
                   </a:txBody>
@@ -5903,16 +5933,16 @@
                           <a:solidFill>
                             <a:srgbClr val="1D1D1F"/>
                           </a:solidFill>
-                          <a:latin typeface="Malgun Gothic" pitchFamily="34" charset="0"/>
-                          <a:ea typeface="Malgun Gothic" pitchFamily="34" charset="-122"/>
-                          <a:cs typeface="Malgun Gothic" pitchFamily="34" charset="-120"/>
+                          <a:latin typeface="NanumSquare Neo" pitchFamily="34" charset="0"/>
+                          <a:ea typeface="NanumSquare Neo" pitchFamily="34" charset="-122"/>
+                          <a:cs typeface="NanumSquare Neo" pitchFamily="34" charset="-120"/>
                         </a:rPr>
                         <a:t>DRC / antenna</a:t>
                       </a:r>
                       <a:endParaRPr lang="en-US" sz="1200" dirty="0">
-                        <a:latin typeface="Malgun Gothic" charset="0"/>
-                        <a:ea typeface="Malgun Gothic" charset="0"/>
-                        <a:cs typeface="Malgun Gothic" charset="0"/>
+                        <a:latin typeface="NanumSquare Neo" charset="0"/>
+                        <a:ea typeface="NanumSquare Neo" charset="0"/>
+                        <a:cs typeface="NanumSquare Neo" charset="0"/>
                       </a:endParaRPr>
                     </a:p>
                   </a:txBody>
@@ -5971,16 +6001,16 @@
                           <a:solidFill>
                             <a:srgbClr val="1D1D1F"/>
                           </a:solidFill>
-                          <a:latin typeface="Malgun Gothic" pitchFamily="34" charset="0"/>
-                          <a:ea typeface="Malgun Gothic" pitchFamily="34" charset="-122"/>
-                          <a:cs typeface="Malgun Gothic" pitchFamily="34" charset="-120"/>
+                          <a:latin typeface="NanumSquare Neo" pitchFamily="34" charset="0"/>
+                          <a:ea typeface="NanumSquare Neo" pitchFamily="34" charset="-122"/>
+                          <a:cs typeface="NanumSquare Neo" pitchFamily="34" charset="-120"/>
                         </a:rPr>
                         <a:t>0 / 0</a:t>
                       </a:r>
                       <a:endParaRPr lang="en-US" sz="1200" dirty="0">
-                        <a:latin typeface="Malgun Gothic" charset="0"/>
-                        <a:ea typeface="Malgun Gothic" charset="0"/>
-                        <a:cs typeface="Malgun Gothic" charset="0"/>
+                        <a:latin typeface="NanumSquare Neo" charset="0"/>
+                        <a:ea typeface="NanumSquare Neo" charset="0"/>
+                        <a:cs typeface="NanumSquare Neo" charset="0"/>
                       </a:endParaRPr>
                     </a:p>
                   </a:txBody>
@@ -6039,16 +6069,16 @@
                           <a:solidFill>
                             <a:srgbClr val="1D1D1F"/>
                           </a:solidFill>
-                          <a:latin typeface="Malgun Gothic" pitchFamily="34" charset="0"/>
-                          <a:ea typeface="Malgun Gothic" pitchFamily="34" charset="-122"/>
-                          <a:cs typeface="Malgun Gothic" pitchFamily="34" charset="-120"/>
+                          <a:latin typeface="NanumSquare Neo" pitchFamily="34" charset="0"/>
+                          <a:ea typeface="NanumSquare Neo" pitchFamily="34" charset="-122"/>
+                          <a:cs typeface="NanumSquare Neo" pitchFamily="34" charset="-120"/>
                         </a:rPr>
                         <a:t>0 / 0</a:t>
                       </a:r>
                       <a:endParaRPr lang="en-US" sz="1200" dirty="0">
-                        <a:latin typeface="Malgun Gothic" charset="0"/>
-                        <a:ea typeface="Malgun Gothic" charset="0"/>
-                        <a:cs typeface="Malgun Gothic" charset="0"/>
+                        <a:latin typeface="NanumSquare Neo" charset="0"/>
+                        <a:ea typeface="NanumSquare Neo" charset="0"/>
+                        <a:cs typeface="NanumSquare Neo" charset="0"/>
                       </a:endParaRPr>
                     </a:p>
                   </a:txBody>
@@ -6107,16 +6137,16 @@
                           <a:solidFill>
                             <a:srgbClr val="1D1D1F"/>
                           </a:solidFill>
-                          <a:latin typeface="Malgun Gothic" pitchFamily="34" charset="0"/>
-                          <a:ea typeface="Malgun Gothic" pitchFamily="34" charset="-122"/>
-                          <a:cs typeface="Malgun Gothic" pitchFamily="34" charset="-120"/>
+                          <a:latin typeface="NanumSquare Neo" pitchFamily="34" charset="0"/>
+                          <a:ea typeface="NanumSquare Neo" pitchFamily="34" charset="-122"/>
+                          <a:cs typeface="NanumSquare Neo" pitchFamily="34" charset="-120"/>
                         </a:rPr>
                         <a:t>(진행 중)</a:t>
                       </a:r>
                       <a:endParaRPr lang="en-US" sz="1200" dirty="0">
-                        <a:latin typeface="Malgun Gothic" charset="0"/>
-                        <a:ea typeface="Malgun Gothic" charset="0"/>
-                        <a:cs typeface="Malgun Gothic" charset="0"/>
+                        <a:latin typeface="NanumSquare Neo" charset="0"/>
+                        <a:ea typeface="NanumSquare Neo" charset="0"/>
+                        <a:cs typeface="NanumSquare Neo" charset="0"/>
                       </a:endParaRPr>
                     </a:p>
                   </a:txBody>
@@ -6177,16 +6207,16 @@
                           <a:solidFill>
                             <a:srgbClr val="1D1D1F"/>
                           </a:solidFill>
-                          <a:latin typeface="Malgun Gothic" pitchFamily="34" charset="0"/>
-                          <a:ea typeface="Malgun Gothic" pitchFamily="34" charset="-122"/>
-                          <a:cs typeface="Malgun Gothic" pitchFamily="34" charset="-120"/>
+                          <a:latin typeface="NanumSquare Neo" pitchFamily="34" charset="0"/>
+                          <a:ea typeface="NanumSquare Neo" pitchFamily="34" charset="-122"/>
+                          <a:cs typeface="NanumSquare Neo" pitchFamily="34" charset="-120"/>
                         </a:rPr>
                         <a:t>클록 게이팅 hold</a:t>
                       </a:r>
                       <a:endParaRPr lang="en-US" sz="1200" dirty="0">
-                        <a:latin typeface="Malgun Gothic" charset="0"/>
-                        <a:ea typeface="Malgun Gothic" charset="0"/>
-                        <a:cs typeface="Malgun Gothic" charset="0"/>
+                        <a:latin typeface="NanumSquare Neo" charset="0"/>
+                        <a:ea typeface="NanumSquare Neo" charset="0"/>
+                        <a:cs typeface="NanumSquare Neo" charset="0"/>
                       </a:endParaRPr>
                     </a:p>
                   </a:txBody>
@@ -6245,16 +6275,16 @@
                           <a:solidFill>
                             <a:srgbClr val="1D1D1F"/>
                           </a:solidFill>
-                          <a:latin typeface="Malgun Gothic" pitchFamily="34" charset="0"/>
-                          <a:ea typeface="Malgun Gothic" pitchFamily="34" charset="-122"/>
-                          <a:cs typeface="Malgun Gothic" pitchFamily="34" charset="-120"/>
+                          <a:latin typeface="NanumSquare Neo" pitchFamily="34" charset="0"/>
+                          <a:ea typeface="NanumSquare Neo" pitchFamily="34" charset="-122"/>
+                          <a:cs typeface="NanumSquare Neo" pitchFamily="34" charset="-120"/>
                         </a:rPr>
                         <a:t>−0.030 ns (13)</a:t>
                       </a:r>
                       <a:endParaRPr lang="en-US" sz="1200" dirty="0">
-                        <a:latin typeface="Malgun Gothic" charset="0"/>
-                        <a:ea typeface="Malgun Gothic" charset="0"/>
-                        <a:cs typeface="Malgun Gothic" charset="0"/>
+                        <a:latin typeface="NanumSquare Neo" charset="0"/>
+                        <a:ea typeface="NanumSquare Neo" charset="0"/>
+                        <a:cs typeface="NanumSquare Neo" charset="0"/>
                       </a:endParaRPr>
                     </a:p>
                   </a:txBody>
@@ -6313,16 +6343,16 @@
                           <a:solidFill>
                             <a:srgbClr val="1D1D1F"/>
                           </a:solidFill>
-                          <a:latin typeface="Malgun Gothic" pitchFamily="34" charset="0"/>
-                          <a:ea typeface="Malgun Gothic" pitchFamily="34" charset="-122"/>
-                          <a:cs typeface="Malgun Gothic" pitchFamily="34" charset="-120"/>
+                          <a:latin typeface="NanumSquare Neo" pitchFamily="34" charset="0"/>
+                          <a:ea typeface="NanumSquare Neo" pitchFamily="34" charset="-122"/>
+                          <a:cs typeface="NanumSquare Neo" pitchFamily="34" charset="-120"/>
                         </a:rPr>
                         <a:t>+0.080 ns (0)</a:t>
                       </a:r>
                       <a:endParaRPr lang="en-US" sz="1200" dirty="0">
-                        <a:latin typeface="Malgun Gothic" charset="0"/>
-                        <a:ea typeface="Malgun Gothic" charset="0"/>
-                        <a:cs typeface="Malgun Gothic" charset="0"/>
+                        <a:latin typeface="NanumSquare Neo" charset="0"/>
+                        <a:ea typeface="NanumSquare Neo" charset="0"/>
+                        <a:cs typeface="NanumSquare Neo" charset="0"/>
                       </a:endParaRPr>
                     </a:p>
                   </a:txBody>
@@ -6381,16 +6411,16 @@
                           <a:solidFill>
                             <a:srgbClr val="1D1D1F"/>
                           </a:solidFill>
-                          <a:latin typeface="Malgun Gothic" pitchFamily="34" charset="0"/>
-                          <a:ea typeface="Malgun Gothic" pitchFamily="34" charset="-122"/>
-                          <a:cs typeface="Malgun Gothic" pitchFamily="34" charset="-120"/>
+                          <a:latin typeface="NanumSquare Neo" pitchFamily="34" charset="0"/>
+                          <a:ea typeface="NanumSquare Neo" pitchFamily="34" charset="-122"/>
+                          <a:cs typeface="NanumSquare Neo" pitchFamily="34" charset="-120"/>
                         </a:rPr>
                         <a:t>(진행 중)</a:t>
                       </a:r>
                       <a:endParaRPr lang="en-US" sz="1200" dirty="0">
-                        <a:latin typeface="Malgun Gothic" charset="0"/>
-                        <a:ea typeface="Malgun Gothic" charset="0"/>
-                        <a:cs typeface="Malgun Gothic" charset="0"/>
+                        <a:latin typeface="NanumSquare Neo" charset="0"/>
+                        <a:ea typeface="NanumSquare Neo" charset="0"/>
+                        <a:cs typeface="NanumSquare Neo" charset="0"/>
                       </a:endParaRPr>
                     </a:p>
                   </a:txBody>
@@ -6451,16 +6481,16 @@
                           <a:solidFill>
                             <a:srgbClr val="1D1D1F"/>
                           </a:solidFill>
-                          <a:latin typeface="Malgun Gothic" pitchFamily="34" charset="0"/>
-                          <a:ea typeface="Malgun Gothic" pitchFamily="34" charset="-122"/>
-                          <a:cs typeface="Malgun Gothic" pitchFamily="34" charset="-120"/>
+                          <a:latin typeface="NanumSquare Neo" pitchFamily="34" charset="0"/>
+                          <a:ea typeface="NanumSquare Neo" pitchFamily="34" charset="-122"/>
+                          <a:cs typeface="NanumSquare Neo" pitchFamily="34" charset="-120"/>
                         </a:rPr>
                         <a:t>reg2reg hold</a:t>
                       </a:r>
                       <a:endParaRPr lang="en-US" sz="1200" dirty="0">
-                        <a:latin typeface="Malgun Gothic" charset="0"/>
-                        <a:ea typeface="Malgun Gothic" charset="0"/>
-                        <a:cs typeface="Malgun Gothic" charset="0"/>
+                        <a:latin typeface="NanumSquare Neo" charset="0"/>
+                        <a:ea typeface="NanumSquare Neo" charset="0"/>
+                        <a:cs typeface="NanumSquare Neo" charset="0"/>
                       </a:endParaRPr>
                     </a:p>
                   </a:txBody>
@@ -6519,16 +6549,16 @@
                           <a:solidFill>
                             <a:srgbClr val="1D1D1F"/>
                           </a:solidFill>
-                          <a:latin typeface="Malgun Gothic" pitchFamily="34" charset="0"/>
-                          <a:ea typeface="Malgun Gothic" pitchFamily="34" charset="-122"/>
-                          <a:cs typeface="Malgun Gothic" pitchFamily="34" charset="-120"/>
+                          <a:latin typeface="NanumSquare Neo" pitchFamily="34" charset="0"/>
+                          <a:ea typeface="NanumSquare Neo" pitchFamily="34" charset="-122"/>
+                          <a:cs typeface="NanumSquare Neo" pitchFamily="34" charset="-120"/>
                         </a:rPr>
                         <a:t>−0.010 ns (135)</a:t>
                       </a:r>
                       <a:endParaRPr lang="en-US" sz="1200" dirty="0">
-                        <a:latin typeface="Malgun Gothic" charset="0"/>
-                        <a:ea typeface="Malgun Gothic" charset="0"/>
-                        <a:cs typeface="Malgun Gothic" charset="0"/>
+                        <a:latin typeface="NanumSquare Neo" charset="0"/>
+                        <a:ea typeface="NanumSquare Neo" charset="0"/>
+                        <a:cs typeface="NanumSquare Neo" charset="0"/>
                       </a:endParaRPr>
                     </a:p>
                   </a:txBody>
@@ -6587,16 +6617,16 @@
                           <a:solidFill>
                             <a:srgbClr val="1D1D1F"/>
                           </a:solidFill>
-                          <a:latin typeface="Malgun Gothic" pitchFamily="34" charset="0"/>
-                          <a:ea typeface="Malgun Gothic" pitchFamily="34" charset="-122"/>
-                          <a:cs typeface="Malgun Gothic" pitchFamily="34" charset="-120"/>
+                          <a:latin typeface="NanumSquare Neo" pitchFamily="34" charset="0"/>
+                          <a:ea typeface="NanumSquare Neo" pitchFamily="34" charset="-122"/>
+                          <a:cs typeface="NanumSquare Neo" pitchFamily="34" charset="-120"/>
                         </a:rPr>
                         <a:t>−0.007 ns (34)</a:t>
                       </a:r>
                       <a:endParaRPr lang="en-US" sz="1200" dirty="0">
-                        <a:latin typeface="Malgun Gothic" charset="0"/>
-                        <a:ea typeface="Malgun Gothic" charset="0"/>
-                        <a:cs typeface="Malgun Gothic" charset="0"/>
+                        <a:latin typeface="NanumSquare Neo" charset="0"/>
+                        <a:ea typeface="NanumSquare Neo" charset="0"/>
+                        <a:cs typeface="NanumSquare Neo" charset="0"/>
                       </a:endParaRPr>
                     </a:p>
                   </a:txBody>
@@ -6655,16 +6685,16 @@
                           <a:solidFill>
                             <a:srgbClr val="1D1D1F"/>
                           </a:solidFill>
-                          <a:latin typeface="Malgun Gothic" pitchFamily="34" charset="0"/>
-                          <a:ea typeface="Malgun Gothic" pitchFamily="34" charset="-122"/>
-                          <a:cs typeface="Malgun Gothic" pitchFamily="34" charset="-120"/>
+                          <a:latin typeface="NanumSquare Neo" pitchFamily="34" charset="0"/>
+                          <a:ea typeface="NanumSquare Neo" pitchFamily="34" charset="-122"/>
+                          <a:cs typeface="NanumSquare Neo" pitchFamily="34" charset="-120"/>
                         </a:rPr>
                         <a:t>(진행 중)</a:t>
                       </a:r>
                       <a:endParaRPr lang="en-US" sz="1200" dirty="0">
-                        <a:latin typeface="Malgun Gothic" charset="0"/>
-                        <a:ea typeface="Malgun Gothic" charset="0"/>
-                        <a:cs typeface="Malgun Gothic" charset="0"/>
+                        <a:latin typeface="NanumSquare Neo" charset="0"/>
+                        <a:ea typeface="NanumSquare Neo" charset="0"/>
+                        <a:cs typeface="NanumSquare Neo" charset="0"/>
                       </a:endParaRPr>
                     </a:p>
                   </a:txBody>
@@ -6725,16 +6755,16 @@
                           <a:solidFill>
                             <a:srgbClr val="1D1D1F"/>
                           </a:solidFill>
-                          <a:latin typeface="Malgun Gothic" pitchFamily="34" charset="0"/>
-                          <a:ea typeface="Malgun Gothic" pitchFamily="34" charset="-122"/>
-                          <a:cs typeface="Malgun Gothic" pitchFamily="34" charset="-120"/>
+                          <a:latin typeface="NanumSquare Neo" pitchFamily="34" charset="0"/>
+                          <a:ea typeface="NanumSquare Neo" pitchFamily="34" charset="-122"/>
+                          <a:cs typeface="NanumSquare Neo" pitchFamily="34" charset="-120"/>
                         </a:rPr>
                         <a:t>setup</a:t>
                       </a:r>
                       <a:endParaRPr lang="en-US" sz="1200" dirty="0">
-                        <a:latin typeface="Malgun Gothic" charset="0"/>
-                        <a:ea typeface="Malgun Gothic" charset="0"/>
-                        <a:cs typeface="Malgun Gothic" charset="0"/>
+                        <a:latin typeface="NanumSquare Neo" charset="0"/>
+                        <a:ea typeface="NanumSquare Neo" charset="0"/>
+                        <a:cs typeface="NanumSquare Neo" charset="0"/>
                       </a:endParaRPr>
                     </a:p>
                   </a:txBody>
@@ -6793,16 +6823,16 @@
                           <a:solidFill>
                             <a:srgbClr val="1D1D1F"/>
                           </a:solidFill>
-                          <a:latin typeface="Malgun Gothic" pitchFamily="34" charset="0"/>
-                          <a:ea typeface="Malgun Gothic" pitchFamily="34" charset="-122"/>
-                          <a:cs typeface="Malgun Gothic" pitchFamily="34" charset="-120"/>
+                          <a:latin typeface="NanumSquare Neo" pitchFamily="34" charset="0"/>
+                          <a:ea typeface="NanumSquare Neo" pitchFamily="34" charset="-122"/>
+                          <a:cs typeface="NanumSquare Neo" pitchFamily="34" charset="-120"/>
                         </a:rPr>
                         <a:t>위반 0</a:t>
                       </a:r>
                       <a:endParaRPr lang="en-US" sz="1200" dirty="0">
-                        <a:latin typeface="Malgun Gothic" charset="0"/>
-                        <a:ea typeface="Malgun Gothic" charset="0"/>
-                        <a:cs typeface="Malgun Gothic" charset="0"/>
+                        <a:latin typeface="NanumSquare Neo" charset="0"/>
+                        <a:ea typeface="NanumSquare Neo" charset="0"/>
+                        <a:cs typeface="NanumSquare Neo" charset="0"/>
                       </a:endParaRPr>
                     </a:p>
                   </a:txBody>
@@ -6861,16 +6891,16 @@
                           <a:solidFill>
                             <a:srgbClr val="1D1D1F"/>
                           </a:solidFill>
-                          <a:latin typeface="Malgun Gothic" pitchFamily="34" charset="0"/>
-                          <a:ea typeface="Malgun Gothic" pitchFamily="34" charset="-122"/>
-                          <a:cs typeface="Malgun Gothic" pitchFamily="34" charset="-120"/>
+                          <a:latin typeface="NanumSquare Neo" pitchFamily="34" charset="0"/>
+                          <a:ea typeface="NanumSquare Neo" pitchFamily="34" charset="-122"/>
+                          <a:cs typeface="NanumSquare Neo" pitchFamily="34" charset="-120"/>
                         </a:rPr>
                         <a:t>−0.019 ns (1)</a:t>
                       </a:r>
                       <a:endParaRPr lang="en-US" sz="1200" dirty="0">
-                        <a:latin typeface="Malgun Gothic" charset="0"/>
-                        <a:ea typeface="Malgun Gothic" charset="0"/>
-                        <a:cs typeface="Malgun Gothic" charset="0"/>
+                        <a:latin typeface="NanumSquare Neo" charset="0"/>
+                        <a:ea typeface="NanumSquare Neo" charset="0"/>
+                        <a:cs typeface="NanumSquare Neo" charset="0"/>
                       </a:endParaRPr>
                     </a:p>
                   </a:txBody>
@@ -6929,16 +6959,16 @@
                           <a:solidFill>
                             <a:srgbClr val="1D1D1F"/>
                           </a:solidFill>
-                          <a:latin typeface="Malgun Gothic" pitchFamily="34" charset="0"/>
-                          <a:ea typeface="Malgun Gothic" pitchFamily="34" charset="-122"/>
-                          <a:cs typeface="Malgun Gothic" pitchFamily="34" charset="-120"/>
+                          <a:latin typeface="NanumSquare Neo" pitchFamily="34" charset="0"/>
+                          <a:ea typeface="NanumSquare Neo" pitchFamily="34" charset="-122"/>
+                          <a:cs typeface="NanumSquare Neo" pitchFamily="34" charset="-120"/>
                         </a:rPr>
                         <a:t>(진행 중)</a:t>
                       </a:r>
                       <a:endParaRPr lang="en-US" sz="1200" dirty="0">
-                        <a:latin typeface="Malgun Gothic" charset="0"/>
-                        <a:ea typeface="Malgun Gothic" charset="0"/>
-                        <a:cs typeface="Malgun Gothic" charset="0"/>
+                        <a:latin typeface="NanumSquare Neo" charset="0"/>
+                        <a:ea typeface="NanumSquare Neo" charset="0"/>
+                        <a:cs typeface="NanumSquare Neo" charset="0"/>
                       </a:endParaRPr>
                     </a:p>
                   </a:txBody>
@@ -6999,16 +7029,16 @@
                           <a:solidFill>
                             <a:srgbClr val="1D1D1F"/>
                           </a:solidFill>
-                          <a:latin typeface="Malgun Gothic" pitchFamily="34" charset="0"/>
-                          <a:ea typeface="Malgun Gothic" pitchFamily="34" charset="-122"/>
-                          <a:cs typeface="Malgun Gothic" pitchFamily="34" charset="-120"/>
+                          <a:latin typeface="NanumSquare Neo" pitchFamily="34" charset="0"/>
+                          <a:ea typeface="NanumSquare Neo" pitchFamily="34" charset="-122"/>
+                          <a:cs typeface="NanumSquare Neo" pitchFamily="34" charset="-120"/>
                         </a:rPr>
                         <a:t>전력 (vectorless)</a:t>
                       </a:r>
                       <a:endParaRPr lang="en-US" sz="1200" dirty="0">
-                        <a:latin typeface="Malgun Gothic" charset="0"/>
-                        <a:ea typeface="Malgun Gothic" charset="0"/>
-                        <a:cs typeface="Malgun Gothic" charset="0"/>
+                        <a:latin typeface="NanumSquare Neo" charset="0"/>
+                        <a:ea typeface="NanumSquare Neo" charset="0"/>
+                        <a:cs typeface="NanumSquare Neo" charset="0"/>
                       </a:endParaRPr>
                     </a:p>
                   </a:txBody>
@@ -7067,16 +7097,16 @@
                           <a:solidFill>
                             <a:srgbClr val="1D1D1F"/>
                           </a:solidFill>
-                          <a:latin typeface="Malgun Gothic" pitchFamily="34" charset="0"/>
-                          <a:ea typeface="Malgun Gothic" pitchFamily="34" charset="-122"/>
-                          <a:cs typeface="Malgun Gothic" pitchFamily="34" charset="-120"/>
+                          <a:latin typeface="NanumSquare Neo" pitchFamily="34" charset="0"/>
+                          <a:ea typeface="NanumSquare Neo" pitchFamily="34" charset="-122"/>
+                          <a:cs typeface="NanumSquare Neo" pitchFamily="34" charset="-120"/>
                         </a:rPr>
                         <a:t>5.89 mW</a:t>
                       </a:r>
                       <a:endParaRPr lang="en-US" sz="1200" dirty="0">
-                        <a:latin typeface="Malgun Gothic" charset="0"/>
-                        <a:ea typeface="Malgun Gothic" charset="0"/>
-                        <a:cs typeface="Malgun Gothic" charset="0"/>
+                        <a:latin typeface="NanumSquare Neo" charset="0"/>
+                        <a:ea typeface="NanumSquare Neo" charset="0"/>
+                        <a:cs typeface="NanumSquare Neo" charset="0"/>
                       </a:endParaRPr>
                     </a:p>
                   </a:txBody>
@@ -7135,16 +7165,16 @@
                           <a:solidFill>
                             <a:srgbClr val="1D1D1F"/>
                           </a:solidFill>
-                          <a:latin typeface="Malgun Gothic" pitchFamily="34" charset="0"/>
-                          <a:ea typeface="Malgun Gothic" pitchFamily="34" charset="-122"/>
-                          <a:cs typeface="Malgun Gothic" pitchFamily="34" charset="-120"/>
+                          <a:latin typeface="NanumSquare Neo" pitchFamily="34" charset="0"/>
+                          <a:ea typeface="NanumSquare Neo" pitchFamily="34" charset="-122"/>
+                          <a:cs typeface="NanumSquare Neo" pitchFamily="34" charset="-120"/>
                         </a:rPr>
                         <a:t>6.11 mW</a:t>
                       </a:r>
                       <a:endParaRPr lang="en-US" sz="1200" dirty="0">
-                        <a:latin typeface="Malgun Gothic" charset="0"/>
-                        <a:ea typeface="Malgun Gothic" charset="0"/>
-                        <a:cs typeface="Malgun Gothic" charset="0"/>
+                        <a:latin typeface="NanumSquare Neo" charset="0"/>
+                        <a:ea typeface="NanumSquare Neo" charset="0"/>
+                        <a:cs typeface="NanumSquare Neo" charset="0"/>
                       </a:endParaRPr>
                     </a:p>
                   </a:txBody>
@@ -7203,16 +7233,16 @@
                           <a:solidFill>
                             <a:srgbClr val="1D1D1F"/>
                           </a:solidFill>
-                          <a:latin typeface="Malgun Gothic" pitchFamily="34" charset="0"/>
-                          <a:ea typeface="Malgun Gothic" pitchFamily="34" charset="-122"/>
-                          <a:cs typeface="Malgun Gothic" pitchFamily="34" charset="-120"/>
+                          <a:latin typeface="NanumSquare Neo" pitchFamily="34" charset="0"/>
+                          <a:ea typeface="NanumSquare Neo" pitchFamily="34" charset="-122"/>
+                          <a:cs typeface="NanumSquare Neo" pitchFamily="34" charset="-120"/>
                         </a:rPr>
                         <a:t>(진행 중)</a:t>
                       </a:r>
                       <a:endParaRPr lang="en-US" sz="1200" dirty="0">
-                        <a:latin typeface="Malgun Gothic" charset="0"/>
-                        <a:ea typeface="Malgun Gothic" charset="0"/>
-                        <a:cs typeface="Malgun Gothic" charset="0"/>
+                        <a:latin typeface="NanumSquare Neo" charset="0"/>
+                        <a:ea typeface="NanumSquare Neo" charset="0"/>
+                        <a:cs typeface="NanumSquare Neo" charset="0"/>
                       </a:endParaRPr>
                     </a:p>
                   </a:txBody>
@@ -7273,16 +7303,16 @@
                           <a:solidFill>
                             <a:srgbClr val="1D1D1F"/>
                           </a:solidFill>
-                          <a:latin typeface="Malgun Gothic" pitchFamily="34" charset="0"/>
-                          <a:ea typeface="Malgun Gothic" pitchFamily="34" charset="-122"/>
-                          <a:cs typeface="Malgun Gothic" pitchFamily="34" charset="-120"/>
+                          <a:latin typeface="NanumSquare Neo" pitchFamily="34" charset="0"/>
+                          <a:ea typeface="NanumSquare Neo" pitchFamily="34" charset="-122"/>
+                          <a:cs typeface="NanumSquare Neo" pitchFamily="34" charset="-120"/>
                         </a:rPr>
                         <a:t>표준셀 면적</a:t>
                       </a:r>
                       <a:endParaRPr lang="en-US" sz="1200" dirty="0">
-                        <a:latin typeface="Malgun Gothic" charset="0"/>
-                        <a:ea typeface="Malgun Gothic" charset="0"/>
-                        <a:cs typeface="Malgun Gothic" charset="0"/>
+                        <a:latin typeface="NanumSquare Neo" charset="0"/>
+                        <a:ea typeface="NanumSquare Neo" charset="0"/>
+                        <a:cs typeface="NanumSquare Neo" charset="0"/>
                       </a:endParaRPr>
                     </a:p>
                   </a:txBody>
@@ -7341,16 +7371,16 @@
                           <a:solidFill>
                             <a:srgbClr val="1D1D1F"/>
                           </a:solidFill>
-                          <a:latin typeface="Malgun Gothic" pitchFamily="34" charset="0"/>
-                          <a:ea typeface="Malgun Gothic" pitchFamily="34" charset="-122"/>
-                          <a:cs typeface="Malgun Gothic" pitchFamily="34" charset="-120"/>
+                          <a:latin typeface="NanumSquare Neo" pitchFamily="34" charset="0"/>
+                          <a:ea typeface="NanumSquare Neo" pitchFamily="34" charset="-122"/>
+                          <a:cs typeface="NanumSquare Neo" pitchFamily="34" charset="-120"/>
                         </a:rPr>
                         <a:t>159,459 µm²</a:t>
                       </a:r>
                       <a:endParaRPr lang="en-US" sz="1200" dirty="0">
-                        <a:latin typeface="Malgun Gothic" charset="0"/>
-                        <a:ea typeface="Malgun Gothic" charset="0"/>
-                        <a:cs typeface="Malgun Gothic" charset="0"/>
+                        <a:latin typeface="NanumSquare Neo" charset="0"/>
+                        <a:ea typeface="NanumSquare Neo" charset="0"/>
+                        <a:cs typeface="NanumSquare Neo" charset="0"/>
                       </a:endParaRPr>
                     </a:p>
                   </a:txBody>
@@ -7409,16 +7439,16 @@
                           <a:solidFill>
                             <a:srgbClr val="1D1D1F"/>
                           </a:solidFill>
-                          <a:latin typeface="Malgun Gothic" pitchFamily="34" charset="0"/>
-                          <a:ea typeface="Malgun Gothic" pitchFamily="34" charset="-122"/>
-                          <a:cs typeface="Malgun Gothic" pitchFamily="34" charset="-120"/>
+                          <a:latin typeface="NanumSquare Neo" pitchFamily="34" charset="0"/>
+                          <a:ea typeface="NanumSquare Neo" pitchFamily="34" charset="-122"/>
+                          <a:cs typeface="NanumSquare Neo" pitchFamily="34" charset="-120"/>
                         </a:rPr>
                         <a:t>162,312 µm²</a:t>
                       </a:r>
                       <a:endParaRPr lang="en-US" sz="1200" dirty="0">
-                        <a:latin typeface="Malgun Gothic" charset="0"/>
-                        <a:ea typeface="Malgun Gothic" charset="0"/>
-                        <a:cs typeface="Malgun Gothic" charset="0"/>
+                        <a:latin typeface="NanumSquare Neo" charset="0"/>
+                        <a:ea typeface="NanumSquare Neo" charset="0"/>
+                        <a:cs typeface="NanumSquare Neo" charset="0"/>
                       </a:endParaRPr>
                     </a:p>
                   </a:txBody>
@@ -7477,16 +7507,16 @@
                           <a:solidFill>
                             <a:srgbClr val="1D1D1F"/>
                           </a:solidFill>
-                          <a:latin typeface="Malgun Gothic" pitchFamily="34" charset="0"/>
-                          <a:ea typeface="Malgun Gothic" pitchFamily="34" charset="-122"/>
-                          <a:cs typeface="Malgun Gothic" pitchFamily="34" charset="-120"/>
+                          <a:latin typeface="NanumSquare Neo" pitchFamily="34" charset="0"/>
+                          <a:ea typeface="NanumSquare Neo" pitchFamily="34" charset="-122"/>
+                          <a:cs typeface="NanumSquare Neo" pitchFamily="34" charset="-120"/>
                         </a:rPr>
                         <a:t>(진행 중)</a:t>
                       </a:r>
                       <a:endParaRPr lang="en-US" sz="1200" dirty="0">
-                        <a:latin typeface="Malgun Gothic" charset="0"/>
-                        <a:ea typeface="Malgun Gothic" charset="0"/>
-                        <a:cs typeface="Malgun Gothic" charset="0"/>
+                        <a:latin typeface="NanumSquare Neo" charset="0"/>
+                        <a:ea typeface="NanumSquare Neo" charset="0"/>
+                        <a:cs typeface="NanumSquare Neo" charset="0"/>
                       </a:endParaRPr>
                     </a:p>
                   </a:txBody>
@@ -7566,9 +7596,9 @@
                 <a:solidFill>
                   <a:srgbClr val="7A7A7A"/>
                 </a:solidFill>
-                <a:latin typeface="Malgun Gothic" pitchFamily="34" charset="0"/>
-                <a:ea typeface="Malgun Gothic" pitchFamily="34" charset="-122"/>
-                <a:cs typeface="Malgun Gothic" pitchFamily="34" charset="-120"/>
+                <a:latin typeface="NanumSquare Neo" pitchFamily="34" charset="0"/>
+                <a:ea typeface="NanumSquare Neo" pitchFamily="34" charset="-122"/>
+                <a:cs typeface="NanumSquare Neo" pitchFamily="34" charset="-120"/>
               </a:rPr>
               <a:t>괄호 안은 위반 경로 수. 5 ns, util 0.6, GPDK045, Quantus 추출.</a:t>
             </a:r>
@@ -7629,9 +7659,9 @@
                 <a:solidFill>
                   <a:srgbClr val="7A7A7A"/>
                 </a:solidFill>
-                <a:latin typeface="Malgun Gothic" pitchFamily="34" charset="0"/>
-                <a:ea typeface="Malgun Gothic" pitchFamily="34" charset="-122"/>
-                <a:cs typeface="Malgun Gothic" pitchFamily="34" charset="-120"/>
+                <a:latin typeface="NanumSquare Neo" pitchFamily="34" charset="0"/>
+                <a:ea typeface="NanumSquare Neo" pitchFamily="34" charset="-122"/>
+                <a:cs typeface="NanumSquare Neo" pitchFamily="34" charset="-120"/>
               </a:rPr>
               <a:t>P&amp;R 셀 배치도 (플립플롭 = 연회색, 클록 게이트 = 파랑)</a:t>
             </a:r>
@@ -7695,9 +7725,9 @@
                 <a:solidFill>
                   <a:srgbClr val="1D1D1F"/>
                 </a:solidFill>
-                <a:latin typeface="Malgun Gothic" pitchFamily="34" charset="0"/>
-                <a:ea typeface="Malgun Gothic" pitchFamily="34" charset="-122"/>
-                <a:cs typeface="Malgun Gothic" pitchFamily="34" charset="-120"/>
+                <a:latin typeface="NanumSquare Neo" pitchFamily="34" charset="0"/>
+                <a:ea typeface="NanumSquare Neo" pitchFamily="34" charset="-122"/>
+                <a:cs typeface="NanumSquare Neo" pitchFamily="34" charset="-120"/>
               </a:rPr>
               <a:t>원인</a:t>
             </a:r>
@@ -7734,9 +7764,9 @@
                 <a:solidFill>
                   <a:srgbClr val="1D1D1F"/>
                 </a:solidFill>
-                <a:latin typeface="Malgun Gothic" pitchFamily="34" charset="0"/>
-                <a:ea typeface="Malgun Gothic" pitchFamily="34" charset="-122"/>
-                <a:cs typeface="Malgun Gothic" pitchFamily="34" charset="-120"/>
+                <a:latin typeface="NanumSquare Neo" pitchFamily="34" charset="0"/>
+                <a:ea typeface="NanumSquare Neo" pitchFamily="34" charset="-122"/>
+                <a:cs typeface="NanumSquare Neo" pitchFamily="34" charset="-120"/>
               </a:rPr>
               <a:t>CTS가 래치를 말단 싱크로 균형 맞춰 AND 게이트보다 약 0.2 ns 일찍 열림</a:t>
             </a:r>
@@ -7800,9 +7830,9 @@
                 <a:solidFill>
                   <a:srgbClr val="0066CC"/>
                 </a:solidFill>
-                <a:latin typeface="Malgun Gothic" pitchFamily="34" charset="0"/>
-                <a:ea typeface="Malgun Gothic" pitchFamily="34" charset="-122"/>
-                <a:cs typeface="Malgun Gothic" pitchFamily="34" charset="-120"/>
+                <a:latin typeface="NanumSquare Neo" pitchFamily="34" charset="0"/>
+                <a:ea typeface="NanumSquare Neo" pitchFamily="34" charset="-122"/>
+                <a:cs typeface="NanumSquare Neo" pitchFamily="34" charset="-120"/>
               </a:rPr>
               <a:t>수정과 시도</a:t>
             </a:r>
@@ -7839,9 +7869,9 @@
                 <a:solidFill>
                   <a:srgbClr val="1D1D1F"/>
                 </a:solidFill>
-                <a:latin typeface="Malgun Gothic" pitchFamily="34" charset="0"/>
-                <a:ea typeface="Malgun Gothic" pitchFamily="34" charset="-122"/>
-                <a:cs typeface="Malgun Gothic" pitchFamily="34" charset="-120"/>
+                <a:latin typeface="NanumSquare Neo" pitchFamily="34" charset="0"/>
+                <a:ea typeface="NanumSquare Neo" pitchFamily="34" charset="-122"/>
+                <a:cs typeface="NanumSquare Neo" pitchFamily="34" charset="-120"/>
               </a:rPr>
               <a:t>래치+AND → 통합 클록게이트 셀로 hold 해결. signoff ECO는 setup −0.040 ns로 악화되어 미채택</a:t>
             </a:r>
@@ -7905,9 +7935,9 @@
                 <a:solidFill>
                   <a:srgbClr val="0066CC"/>
                 </a:solidFill>
-                <a:latin typeface="Malgun Gothic" pitchFamily="34" charset="0"/>
-                <a:ea typeface="Malgun Gothic" pitchFamily="34" charset="-122"/>
-                <a:cs typeface="Malgun Gothic" pitchFamily="34" charset="-120"/>
+                <a:latin typeface="NanumSquare Neo" pitchFamily="34" charset="0"/>
+                <a:ea typeface="NanumSquare Neo" pitchFamily="34" charset="-122"/>
+                <a:cs typeface="NanumSquare Neo" pitchFamily="34" charset="-120"/>
               </a:rPr>
               <a:t>남은 것</a:t>
             </a:r>
@@ -7944,9 +7974,9 @@
                 <a:solidFill>
                   <a:srgbClr val="1D1D1F"/>
                 </a:solidFill>
-                <a:latin typeface="Malgun Gothic" pitchFamily="34" charset="0"/>
-                <a:ea typeface="Malgun Gothic" pitchFamily="34" charset="-122"/>
-                <a:cs typeface="Malgun Gothic" pitchFamily="34" charset="-120"/>
+                <a:latin typeface="NanumSquare Neo" pitchFamily="34" charset="0"/>
+                <a:ea typeface="NanumSquare Neo" pitchFamily="34" charset="-122"/>
+                <a:cs typeface="NanumSquare Neo" pitchFamily="34" charset="-120"/>
               </a:rPr>
               <a:t>일반 경로 ps 단위 잔여 위반. 클록 여유로 흡수하는 것이 현재 해법</a:t>
             </a:r>
@@ -7986,9 +8016,9 @@
                 <a:solidFill>
                   <a:srgbClr val="7A7A7A"/>
                 </a:solidFill>
-                <a:latin typeface="Malgun Gothic"/>
-                <a:ea typeface="Malgun Gothic"/>
-                <a:cs typeface="Malgun Gothic"/>
+                <a:latin typeface="NanumSquare Neo"/>
+                <a:ea typeface="NanumSquare Neo"/>
+                <a:cs typeface="NanumSquare Neo"/>
               </a:defRPr>
             </a:lvl1pPr>
           </a:lstStyle>
@@ -8054,13 +8084,13 @@
               <a:buNone/>
             </a:pPr>
             <a:r>
-              <a:rPr lang="en-US" sz="2600" b="1" spc="-30" kern="0" dirty="0">
+              <a:rPr lang="en-US" sz="2600" b="1" dirty="0">
                 <a:solidFill>
                   <a:srgbClr val="1D1D1F"/>
                 </a:solidFill>
-                <a:latin typeface="Malgun Gothic" pitchFamily="34" charset="0"/>
-                <a:ea typeface="Malgun Gothic" pitchFamily="34" charset="-122"/>
-                <a:cs typeface="Malgun Gothic" pitchFamily="34" charset="-120"/>
+                <a:latin typeface="NanumSquare Neo" pitchFamily="34" charset="0"/>
+                <a:ea typeface="NanumSquare Neo" pitchFamily="34" charset="-122"/>
+                <a:cs typeface="NanumSquare Neo" pitchFamily="34" charset="-120"/>
               </a:rPr>
               <a:t>회전각은 인과적으로만 추정한다: 미래가 필요한 방법은 버렸다</a:t>
             </a:r>
@@ -8109,16 +8139,16 @@
                           <a:solidFill>
                             <a:srgbClr val="1D1D1F"/>
                           </a:solidFill>
-                          <a:latin typeface="Malgun Gothic" pitchFamily="34" charset="0"/>
-                          <a:ea typeface="Malgun Gothic" pitchFamily="34" charset="-122"/>
-                          <a:cs typeface="Malgun Gothic" pitchFamily="34" charset="-120"/>
+                          <a:latin typeface="NanumSquare Neo" pitchFamily="34" charset="0"/>
+                          <a:ea typeface="NanumSquare Neo" pitchFamily="34" charset="-122"/>
+                          <a:cs typeface="NanumSquare Neo" pitchFamily="34" charset="-120"/>
                         </a:rPr>
                         <a:t>방법</a:t>
                       </a:r>
                       <a:endParaRPr lang="en-US" sz="1400" dirty="0">
-                        <a:latin typeface="Malgun Gothic" charset="0"/>
-                        <a:ea typeface="Malgun Gothic" charset="0"/>
-                        <a:cs typeface="Malgun Gothic" charset="0"/>
+                        <a:latin typeface="NanumSquare Neo" charset="0"/>
+                        <a:ea typeface="NanumSquare Neo" charset="0"/>
+                        <a:cs typeface="NanumSquare Neo" charset="0"/>
                       </a:endParaRPr>
                     </a:p>
                   </a:txBody>
@@ -8177,16 +8207,16 @@
                           <a:solidFill>
                             <a:srgbClr val="1D1D1F"/>
                           </a:solidFill>
-                          <a:latin typeface="Malgun Gothic" pitchFamily="34" charset="0"/>
-                          <a:ea typeface="Malgun Gothic" pitchFamily="34" charset="-122"/>
-                          <a:cs typeface="Malgun Gothic" pitchFamily="34" charset="-120"/>
+                          <a:latin typeface="NanumSquare Neo" pitchFamily="34" charset="0"/>
+                          <a:ea typeface="NanumSquare Neo" pitchFamily="34" charset="-122"/>
+                          <a:cs typeface="NanumSquare Neo" pitchFamily="34" charset="-120"/>
                         </a:rPr>
                         <a:t>실시간 가능</a:t>
                       </a:r>
                       <a:endParaRPr lang="en-US" sz="1400" dirty="0">
-                        <a:latin typeface="Malgun Gothic" charset="0"/>
-                        <a:ea typeface="Malgun Gothic" charset="0"/>
-                        <a:cs typeface="Malgun Gothic" charset="0"/>
+                        <a:latin typeface="NanumSquare Neo" charset="0"/>
+                        <a:ea typeface="NanumSquare Neo" charset="0"/>
+                        <a:cs typeface="NanumSquare Neo" charset="0"/>
                       </a:endParaRPr>
                     </a:p>
                   </a:txBody>
@@ -8245,16 +8275,16 @@
                           <a:solidFill>
                             <a:srgbClr val="1D1D1F"/>
                           </a:solidFill>
-                          <a:latin typeface="Malgun Gothic" pitchFamily="34" charset="0"/>
-                          <a:ea typeface="Malgun Gothic" pitchFamily="34" charset="-122"/>
-                          <a:cs typeface="Malgun Gothic" pitchFamily="34" charset="-120"/>
+                          <a:latin typeface="NanumSquare Neo" pitchFamily="34" charset="0"/>
+                          <a:ea typeface="NanumSquare Neo" pitchFamily="34" charset="-122"/>
+                          <a:cs typeface="NanumSquare Neo" pitchFamily="34" charset="-120"/>
                         </a:rPr>
                         <a:t>UZH 20곳 평균 / 최악 오차</a:t>
                       </a:r>
                       <a:endParaRPr lang="en-US" sz="1400" dirty="0">
-                        <a:latin typeface="Malgun Gothic" charset="0"/>
-                        <a:ea typeface="Malgun Gothic" charset="0"/>
-                        <a:cs typeface="Malgun Gothic" charset="0"/>
+                        <a:latin typeface="NanumSquare Neo" charset="0"/>
+                        <a:ea typeface="NanumSquare Neo" charset="0"/>
+                        <a:cs typeface="NanumSquare Neo" charset="0"/>
                       </a:endParaRPr>
                     </a:p>
                   </a:txBody>
@@ -8315,16 +8345,16 @@
                           <a:solidFill>
                             <a:srgbClr val="1D1D1F"/>
                           </a:solidFill>
-                          <a:latin typeface="Malgun Gothic" pitchFamily="34" charset="0"/>
-                          <a:ea typeface="Malgun Gothic" pitchFamily="34" charset="-122"/>
-                          <a:cs typeface="Malgun Gothic" pitchFamily="34" charset="-120"/>
+                          <a:latin typeface="NanumSquare Neo" pitchFamily="34" charset="0"/>
+                          <a:ea typeface="NanumSquare Neo" pitchFamily="34" charset="-122"/>
+                          <a:cs typeface="NanumSquare Neo" pitchFamily="34" charset="-120"/>
                         </a:rPr>
                         <a:t>Contrast maximization (순수 인과)</a:t>
                       </a:r>
                       <a:endParaRPr lang="en-US" sz="1400" dirty="0">
-                        <a:latin typeface="Malgun Gothic" charset="0"/>
-                        <a:ea typeface="Malgun Gothic" charset="0"/>
-                        <a:cs typeface="Malgun Gothic" charset="0"/>
+                        <a:latin typeface="NanumSquare Neo" charset="0"/>
+                        <a:ea typeface="NanumSquare Neo" charset="0"/>
+                        <a:cs typeface="NanumSquare Neo" charset="0"/>
                       </a:endParaRPr>
                     </a:p>
                   </a:txBody>
@@ -8383,16 +8413,16 @@
                           <a:solidFill>
                             <a:srgbClr val="0066CC"/>
                           </a:solidFill>
-                          <a:latin typeface="Malgun Gothic" pitchFamily="34" charset="0"/>
-                          <a:ea typeface="Malgun Gothic" pitchFamily="34" charset="-122"/>
-                          <a:cs typeface="Malgun Gothic" pitchFamily="34" charset="-120"/>
+                          <a:latin typeface="NanumSquare Neo" pitchFamily="34" charset="0"/>
+                          <a:ea typeface="NanumSquare Neo" pitchFamily="34" charset="-122"/>
+                          <a:cs typeface="NanumSquare Neo" pitchFamily="34" charset="-120"/>
                         </a:rPr>
                         <a:t>가능</a:t>
                       </a:r>
                       <a:endParaRPr lang="en-US" sz="1400" dirty="0">
-                        <a:latin typeface="Malgun Gothic" charset="0"/>
-                        <a:ea typeface="Malgun Gothic" charset="0"/>
-                        <a:cs typeface="Malgun Gothic" charset="0"/>
+                        <a:latin typeface="NanumSquare Neo" charset="0"/>
+                        <a:ea typeface="NanumSquare Neo" charset="0"/>
+                        <a:cs typeface="NanumSquare Neo" charset="0"/>
                       </a:endParaRPr>
                     </a:p>
                   </a:txBody>
@@ -8451,16 +8481,16 @@
                           <a:solidFill>
                             <a:srgbClr val="1D1D1F"/>
                           </a:solidFill>
-                          <a:latin typeface="Malgun Gothic" pitchFamily="34" charset="0"/>
-                          <a:ea typeface="Malgun Gothic" pitchFamily="34" charset="-122"/>
-                          <a:cs typeface="Malgun Gothic" pitchFamily="34" charset="-120"/>
+                          <a:latin typeface="NanumSquare Neo" pitchFamily="34" charset="0"/>
+                          <a:ea typeface="NanumSquare Neo" pitchFamily="34" charset="-122"/>
+                          <a:cs typeface="NanumSquare Neo" pitchFamily="34" charset="-120"/>
                         </a:rPr>
                         <a:t>11.7° / 59.4°</a:t>
                       </a:r>
                       <a:endParaRPr lang="en-US" sz="1400" dirty="0">
-                        <a:latin typeface="Malgun Gothic" charset="0"/>
-                        <a:ea typeface="Malgun Gothic" charset="0"/>
-                        <a:cs typeface="Malgun Gothic" charset="0"/>
+                        <a:latin typeface="NanumSquare Neo" charset="0"/>
+                        <a:ea typeface="NanumSquare Neo" charset="0"/>
+                        <a:cs typeface="NanumSquare Neo" charset="0"/>
                       </a:endParaRPr>
                     </a:p>
                   </a:txBody>
@@ -8521,16 +8551,16 @@
                           <a:solidFill>
                             <a:srgbClr val="1D1D1F"/>
                           </a:solidFill>
-                          <a:latin typeface="Malgun Gothic" pitchFamily="34" charset="0"/>
-                          <a:ea typeface="Malgun Gothic" pitchFamily="34" charset="-122"/>
-                          <a:cs typeface="Malgun Gothic" pitchFamily="34" charset="-120"/>
+                          <a:latin typeface="NanumSquare Neo" pitchFamily="34" charset="0"/>
+                          <a:ea typeface="NanumSquare Neo" pitchFamily="34" charset="-122"/>
+                          <a:cs typeface="NanumSquare Neo" pitchFamily="34" charset="-120"/>
                         </a:rPr>
                         <a:t>+ forward-backward 평활</a:t>
                       </a:r>
                       <a:endParaRPr lang="en-US" sz="1400" dirty="0">
-                        <a:latin typeface="Malgun Gothic" charset="0"/>
-                        <a:ea typeface="Malgun Gothic" charset="0"/>
-                        <a:cs typeface="Malgun Gothic" charset="0"/>
+                        <a:latin typeface="NanumSquare Neo" charset="0"/>
+                        <a:ea typeface="NanumSquare Neo" charset="0"/>
+                        <a:cs typeface="NanumSquare Neo" charset="0"/>
                       </a:endParaRPr>
                     </a:p>
                   </a:txBody>
@@ -8589,16 +8619,16 @@
                           <a:solidFill>
                             <a:srgbClr val="1D1D1F"/>
                           </a:solidFill>
-                          <a:latin typeface="Malgun Gothic" pitchFamily="34" charset="0"/>
-                          <a:ea typeface="Malgun Gothic" pitchFamily="34" charset="-122"/>
-                          <a:cs typeface="Malgun Gothic" pitchFamily="34" charset="-120"/>
+                          <a:latin typeface="NanumSquare Neo" pitchFamily="34" charset="0"/>
+                          <a:ea typeface="NanumSquare Neo" pitchFamily="34" charset="-122"/>
+                          <a:cs typeface="NanumSquare Neo" pitchFamily="34" charset="-120"/>
                         </a:rPr>
                         <a:t>불가 (미래 필요)</a:t>
                       </a:r>
                       <a:endParaRPr lang="en-US" sz="1400" dirty="0">
-                        <a:latin typeface="Malgun Gothic" charset="0"/>
-                        <a:ea typeface="Malgun Gothic" charset="0"/>
-                        <a:cs typeface="Malgun Gothic" charset="0"/>
+                        <a:latin typeface="NanumSquare Neo" charset="0"/>
+                        <a:ea typeface="NanumSquare Neo" charset="0"/>
+                        <a:cs typeface="NanumSquare Neo" charset="0"/>
                       </a:endParaRPr>
                     </a:p>
                   </a:txBody>
@@ -8657,16 +8687,16 @@
                           <a:solidFill>
                             <a:srgbClr val="1D1D1F"/>
                           </a:solidFill>
-                          <a:latin typeface="Malgun Gothic" pitchFamily="34" charset="0"/>
-                          <a:ea typeface="Malgun Gothic" pitchFamily="34" charset="-122"/>
-                          <a:cs typeface="Malgun Gothic" pitchFamily="34" charset="-120"/>
+                          <a:latin typeface="NanumSquare Neo" pitchFamily="34" charset="0"/>
+                          <a:ea typeface="NanumSquare Neo" pitchFamily="34" charset="-122"/>
+                          <a:cs typeface="NanumSquare Neo" pitchFamily="34" charset="-120"/>
                         </a:rPr>
                         <a:t>10.2° / 44.3°</a:t>
                       </a:r>
                       <a:endParaRPr lang="en-US" sz="1400" dirty="0">
-                        <a:latin typeface="Malgun Gothic" charset="0"/>
-                        <a:ea typeface="Malgun Gothic" charset="0"/>
-                        <a:cs typeface="Malgun Gothic" charset="0"/>
+                        <a:latin typeface="NanumSquare Neo" charset="0"/>
+                        <a:ea typeface="NanumSquare Neo" charset="0"/>
+                        <a:cs typeface="NanumSquare Neo" charset="0"/>
                       </a:endParaRPr>
                     </a:p>
                   </a:txBody>
@@ -8727,16 +8757,16 @@
                           <a:solidFill>
                             <a:srgbClr val="1D1D1F"/>
                           </a:solidFill>
-                          <a:latin typeface="Malgun Gothic" pitchFamily="34" charset="0"/>
-                          <a:ea typeface="Malgun Gothic" pitchFamily="34" charset="-122"/>
-                          <a:cs typeface="Malgun Gothic" pitchFamily="34" charset="-120"/>
+                          <a:latin typeface="NanumSquare Neo" pitchFamily="34" charset="0"/>
+                          <a:ea typeface="NanumSquare Neo" pitchFamily="34" charset="-122"/>
+                          <a:cs typeface="NanumSquare Neo" pitchFamily="34" charset="-120"/>
                         </a:rPr>
                         <a:t>batch bundle adjustment</a:t>
                       </a:r>
                       <a:endParaRPr lang="en-US" sz="1400" dirty="0">
-                        <a:latin typeface="Malgun Gothic" charset="0"/>
-                        <a:ea typeface="Malgun Gothic" charset="0"/>
-                        <a:cs typeface="Malgun Gothic" charset="0"/>
+                        <a:latin typeface="NanumSquare Neo" charset="0"/>
+                        <a:ea typeface="NanumSquare Neo" charset="0"/>
+                        <a:cs typeface="NanumSquare Neo" charset="0"/>
                       </a:endParaRPr>
                     </a:p>
                   </a:txBody>
@@ -8795,16 +8825,16 @@
                           <a:solidFill>
                             <a:srgbClr val="1D1D1F"/>
                           </a:solidFill>
-                          <a:latin typeface="Malgun Gothic" pitchFamily="34" charset="0"/>
-                          <a:ea typeface="Malgun Gothic" pitchFamily="34" charset="-122"/>
-                          <a:cs typeface="Malgun Gothic" pitchFamily="34" charset="-120"/>
+                          <a:latin typeface="NanumSquare Neo" pitchFamily="34" charset="0"/>
+                          <a:ea typeface="NanumSquare Neo" pitchFamily="34" charset="-122"/>
+                          <a:cs typeface="NanumSquare Neo" pitchFamily="34" charset="-120"/>
                         </a:rPr>
                         <a:t>불가 (미래 필요)</a:t>
                       </a:r>
                       <a:endParaRPr lang="en-US" sz="1400" dirty="0">
-                        <a:latin typeface="Malgun Gothic" charset="0"/>
-                        <a:ea typeface="Malgun Gothic" charset="0"/>
-                        <a:cs typeface="Malgun Gothic" charset="0"/>
+                        <a:latin typeface="NanumSquare Neo" charset="0"/>
+                        <a:ea typeface="NanumSquare Neo" charset="0"/>
+                        <a:cs typeface="NanumSquare Neo" charset="0"/>
                       </a:endParaRPr>
                     </a:p>
                   </a:txBody>
@@ -8863,16 +8893,16 @@
                           <a:solidFill>
                             <a:srgbClr val="1D1D1F"/>
                           </a:solidFill>
-                          <a:latin typeface="Malgun Gothic" pitchFamily="34" charset="0"/>
-                          <a:ea typeface="Malgun Gothic" pitchFamily="34" charset="-122"/>
-                          <a:cs typeface="Malgun Gothic" pitchFamily="34" charset="-120"/>
+                          <a:latin typeface="NanumSquare Neo" pitchFamily="34" charset="0"/>
+                          <a:ea typeface="NanumSquare Neo" pitchFamily="34" charset="-122"/>
+                          <a:cs typeface="NanumSquare Neo" pitchFamily="34" charset="-120"/>
                         </a:rPr>
                         <a:t>11.5° / 28.7°</a:t>
                       </a:r>
                       <a:endParaRPr lang="en-US" sz="1400" dirty="0">
-                        <a:latin typeface="Malgun Gothic" charset="0"/>
-                        <a:ea typeface="Malgun Gothic" charset="0"/>
-                        <a:cs typeface="Malgun Gothic" charset="0"/>
+                        <a:latin typeface="NanumSquare Neo" charset="0"/>
+                        <a:ea typeface="NanumSquare Neo" charset="0"/>
+                        <a:cs typeface="NanumSquare Neo" charset="0"/>
                       </a:endParaRPr>
                     </a:p>
                   </a:txBody>
@@ -8933,16 +8963,16 @@
                           <a:solidFill>
                             <a:srgbClr val="1D1D1F"/>
                           </a:solidFill>
-                          <a:latin typeface="Malgun Gothic" pitchFamily="34" charset="0"/>
-                          <a:ea typeface="Malgun Gothic" pitchFamily="34" charset="-122"/>
-                          <a:cs typeface="Malgun Gothic" pitchFamily="34" charset="-120"/>
+                          <a:latin typeface="NanumSquare Neo" pitchFamily="34" charset="0"/>
+                          <a:ea typeface="NanumSquare Neo" pitchFamily="34" charset="-122"/>
+                          <a:cs typeface="NanumSquare Neo" pitchFamily="34" charset="-120"/>
                         </a:rPr>
                         <a:t>bounded-lag (L=8 윈도우, 128 이벤트 FIFO)</a:t>
                       </a:r>
                       <a:endParaRPr lang="en-US" sz="1400" dirty="0">
-                        <a:latin typeface="Malgun Gothic" charset="0"/>
-                        <a:ea typeface="Malgun Gothic" charset="0"/>
-                        <a:cs typeface="Malgun Gothic" charset="0"/>
+                        <a:latin typeface="NanumSquare Neo" charset="0"/>
+                        <a:ea typeface="NanumSquare Neo" charset="0"/>
+                        <a:cs typeface="NanumSquare Neo" charset="0"/>
                       </a:endParaRPr>
                     </a:p>
                   </a:txBody>
@@ -9001,16 +9031,16 @@
                           <a:solidFill>
                             <a:srgbClr val="0066CC"/>
                           </a:solidFill>
-                          <a:latin typeface="Malgun Gothic" pitchFamily="34" charset="0"/>
-                          <a:ea typeface="Malgun Gothic" pitchFamily="34" charset="-122"/>
-                          <a:cs typeface="Malgun Gothic" pitchFamily="34" charset="-120"/>
+                          <a:latin typeface="NanumSquare Neo" pitchFamily="34" charset="0"/>
+                          <a:ea typeface="NanumSquare Neo" pitchFamily="34" charset="-122"/>
+                          <a:cs typeface="NanumSquare Neo" pitchFamily="34" charset="-120"/>
                         </a:rPr>
                         <a:t>가능 (지연 L)</a:t>
                       </a:r>
                       <a:endParaRPr lang="en-US" sz="1400" dirty="0">
-                        <a:latin typeface="Malgun Gothic" charset="0"/>
-                        <a:ea typeface="Malgun Gothic" charset="0"/>
-                        <a:cs typeface="Malgun Gothic" charset="0"/>
+                        <a:latin typeface="NanumSquare Neo" charset="0"/>
+                        <a:ea typeface="NanumSquare Neo" charset="0"/>
+                        <a:cs typeface="NanumSquare Neo" charset="0"/>
                       </a:endParaRPr>
                     </a:p>
                   </a:txBody>
@@ -9069,16 +9099,16 @@
                           <a:solidFill>
                             <a:srgbClr val="1D1D1F"/>
                           </a:solidFill>
-                          <a:latin typeface="Malgun Gothic" pitchFamily="34" charset="0"/>
-                          <a:ea typeface="Malgun Gothic" pitchFamily="34" charset="-122"/>
-                          <a:cs typeface="Malgun Gothic" pitchFamily="34" charset="-120"/>
+                          <a:latin typeface="NanumSquare Neo" pitchFamily="34" charset="0"/>
+                          <a:ea typeface="NanumSquare Neo" pitchFamily="34" charset="-122"/>
+                          <a:cs typeface="NanumSquare Neo" pitchFamily="34" charset="-120"/>
                         </a:rPr>
                         <a:t>10.6° / 50.3°</a:t>
                       </a:r>
                       <a:endParaRPr lang="en-US" sz="1400" dirty="0">
-                        <a:latin typeface="Malgun Gothic" charset="0"/>
-                        <a:ea typeface="Malgun Gothic" charset="0"/>
-                        <a:cs typeface="Malgun Gothic" charset="0"/>
+                        <a:latin typeface="NanumSquare Neo" charset="0"/>
+                        <a:ea typeface="NanumSquare Neo" charset="0"/>
+                        <a:cs typeface="NanumSquare Neo" charset="0"/>
                       </a:endParaRPr>
                     </a:p>
                   </a:txBody>
@@ -9182,9 +9212,9 @@
                 <a:solidFill>
                   <a:srgbClr val="7A7A7A"/>
                 </a:solidFill>
-                <a:latin typeface="Malgun Gothic" pitchFamily="34" charset="0"/>
-                <a:ea typeface="Malgun Gothic" pitchFamily="34" charset="-122"/>
-                <a:cs typeface="Malgun Gothic" pitchFamily="34" charset="-120"/>
+                <a:latin typeface="NanumSquare Neo" pitchFamily="34" charset="0"/>
+                <a:ea typeface="NanumSquare Neo" pitchFamily="34" charset="-122"/>
+                <a:cs typeface="NanumSquare Neo" pitchFamily="34" charset="-120"/>
               </a:rPr>
               <a:t>실제 DELTA 영상: 장면 속 직선 방향으로 만든 회전각 정답(파랑) vs 우리 추정(주황), 오른쪽은 오차(°)</a:t>
             </a:r>
@@ -9248,9 +9278,9 @@
                 <a:solidFill>
                   <a:srgbClr val="0066CC"/>
                 </a:solidFill>
-                <a:latin typeface="Malgun Gothic" pitchFamily="34" charset="0"/>
-                <a:ea typeface="Malgun Gothic" pitchFamily="34" charset="-122"/>
-                <a:cs typeface="Malgun Gothic" pitchFamily="34" charset="-120"/>
+                <a:latin typeface="NanumSquare Neo" pitchFamily="34" charset="0"/>
+                <a:ea typeface="NanumSquare Neo" pitchFamily="34" charset="-122"/>
+                <a:cs typeface="NanumSquare Neo" pitchFamily="34" charset="-120"/>
               </a:rPr>
               <a:t>추정기 RTL (Bayes filter)</a:t>
             </a:r>
@@ -9287,9 +9317,9 @@
                 <a:solidFill>
                   <a:srgbClr val="1D1D1F"/>
                 </a:solidFill>
-                <a:latin typeface="Malgun Gothic" pitchFamily="34" charset="0"/>
-                <a:ea typeface="Malgun Gothic" pitchFamily="34" charset="-122"/>
-                <a:cs typeface="Malgun Gothic" pitchFamily="34" charset="-120"/>
+                <a:latin typeface="NanumSquare Neo" pitchFamily="34" charset="0"/>
+                <a:ea typeface="NanumSquare Neo" pitchFamily="34" charset="-122"/>
+                <a:cs typeface="NanumSquare Neo" pitchFamily="34" charset="-120"/>
               </a:rPr>
               <a:t>이산 베이즈 필터를 고정소수점으로 구현. UZH 이벤트 300개 재생에서 오라클과 비트 단위로 일치(1024각도 버전).</a:t>
             </a:r>
@@ -9353,9 +9383,9 @@
                 <a:solidFill>
                   <a:srgbClr val="1D1D1F"/>
                 </a:solidFill>
-                <a:latin typeface="Malgun Gothic" pitchFamily="34" charset="0"/>
-                <a:ea typeface="Malgun Gothic" pitchFamily="34" charset="-122"/>
-                <a:cs typeface="Malgun Gothic" pitchFamily="34" charset="-120"/>
+                <a:latin typeface="NanumSquare Neo" pitchFamily="34" charset="0"/>
+                <a:ea typeface="NanumSquare Neo" pitchFamily="34" charset="-122"/>
+                <a:cs typeface="NanumSquare Neo" pitchFamily="34" charset="-120"/>
               </a:rPr>
               <a:t>정직한 한계</a:t>
             </a:r>
@@ -9392,9 +9422,9 @@
                 <a:solidFill>
                   <a:srgbClr val="1D1D1F"/>
                 </a:solidFill>
-                <a:latin typeface="Malgun Gothic" pitchFamily="34" charset="0"/>
-                <a:ea typeface="Malgun Gothic" pitchFamily="34" charset="-122"/>
-                <a:cs typeface="Malgun Gothic" pitchFamily="34" charset="-120"/>
+                <a:latin typeface="NanumSquare Neo" pitchFamily="34" charset="0"/>
+                <a:ea typeface="NanumSquare Neo" pitchFamily="34" charset="-122"/>
+                <a:cs typeface="NanumSquare Neo" pitchFamily="34" charset="-120"/>
               </a:rPr>
               <a:t>정확도는 장면에 크게 의존한다. 로봇팔 실측(RobotEvt)에서는 UZH용 파라미터 그대로 평균 35.2° / 최악 91.8°.</a:t>
             </a:r>
@@ -9434,9 +9464,9 @@
                 <a:solidFill>
                   <a:srgbClr val="7A7A7A"/>
                 </a:solidFill>
-                <a:latin typeface="Malgun Gothic"/>
-                <a:ea typeface="Malgun Gothic"/>
-                <a:cs typeface="Malgun Gothic"/>
+                <a:latin typeface="NanumSquare Neo"/>
+                <a:ea typeface="NanumSquare Neo"/>
+                <a:cs typeface="NanumSquare Neo"/>
               </a:defRPr>
             </a:lvl1pPr>
           </a:lstStyle>
@@ -9502,13 +9532,13 @@
               <a:buNone/>
             </a:pPr>
             <a:r>
-              <a:rPr lang="en-US" sz="2600" b="1" spc="-30" kern="0" dirty="0">
+              <a:rPr lang="en-US" sz="2600" b="1" dirty="0">
                 <a:solidFill>
                   <a:srgbClr val="1D1D1F"/>
                 </a:solidFill>
-                <a:latin typeface="Malgun Gothic" pitchFamily="34" charset="0"/>
-                <a:ea typeface="Malgun Gothic" pitchFamily="34" charset="-122"/>
-                <a:cs typeface="Malgun Gothic" pitchFamily="34" charset="-120"/>
+                <a:latin typeface="NanumSquare Neo" pitchFamily="34" charset="0"/>
+                <a:ea typeface="NanumSquare Neo" pitchFamily="34" charset="-122"/>
+                <a:cs typeface="NanumSquare Neo" pitchFamily="34" charset="-120"/>
               </a:rPr>
               <a:t>실제 센서 영상으로 만든 월드 지도: 방 구조가 복원된다</a:t>
             </a:r>
@@ -9569,9 +9599,9 @@
                 <a:solidFill>
                   <a:srgbClr val="7A7A7A"/>
                 </a:solidFill>
-                <a:latin typeface="Malgun Gothic" pitchFamily="34" charset="0"/>
-                <a:ea typeface="Malgun Gothic" pitchFamily="34" charset="-122"/>
-                <a:cs typeface="Malgun Gothic" pitchFamily="34" charset="-120"/>
+                <a:latin typeface="NanumSquare Neo" pitchFamily="34" charset="0"/>
+                <a:ea typeface="NanumSquare Neo" pitchFamily="34" charset="-122"/>
+                <a:cs typeface="NanumSquare Neo" pitchFamily="34" charset="-120"/>
               </a:rPr>
               <a:t>실제 DELTA 영상(960×720) 월드 지도: 첫 결과 · 최종(균형형) · 최종(정제형) · 같은 시점의 실제 프레임(각도 보정 후)</a:t>
             </a:r>
@@ -9635,9 +9665,9 @@
                 <a:solidFill>
                   <a:srgbClr val="1D1D1F"/>
                 </a:solidFill>
-                <a:latin typeface="Malgun Gothic" pitchFamily="34" charset="0"/>
-                <a:ea typeface="Malgun Gothic" pitchFamily="34" charset="-122"/>
-                <a:cs typeface="Malgun Gothic" pitchFamily="34" charset="-120"/>
+                <a:latin typeface="NanumSquare Neo" pitchFamily="34" charset="0"/>
+                <a:ea typeface="NanumSquare Neo" pitchFamily="34" charset="-122"/>
+                <a:cs typeface="NanumSquare Neo" pitchFamily="34" charset="-120"/>
               </a:rPr>
               <a:t>정직한 평가</a:t>
             </a:r>
@@ -9674,9 +9704,9 @@
                 <a:solidFill>
                   <a:srgbClr val="1D1D1F"/>
                 </a:solidFill>
-                <a:latin typeface="Malgun Gothic" pitchFamily="34" charset="0"/>
-                <a:ea typeface="Malgun Gothic" pitchFamily="34" charset="-122"/>
-                <a:cs typeface="Malgun Gothic" pitchFamily="34" charset="-120"/>
+                <a:latin typeface="NanumSquare Neo" pitchFamily="34" charset="0"/>
+                <a:ea typeface="NanumSquare Neo" pitchFamily="34" charset="-122"/>
+                <a:cs typeface="NanumSquare Neo" pitchFamily="34" charset="-120"/>
               </a:rPr>
               <a:t>정답이 없는 실제 영상은 육안과 간접 지표로만 평가</a:t>
             </a:r>
@@ -9741,9 +9771,9 @@
                 <a:solidFill>
                   <a:srgbClr val="1D1D1F"/>
                 </a:solidFill>
-                <a:latin typeface="Malgun Gothic" pitchFamily="34" charset="0"/>
-                <a:ea typeface="Malgun Gothic" pitchFamily="34" charset="-122"/>
-                <a:cs typeface="Malgun Gothic" pitchFamily="34" charset="-120"/>
+                <a:latin typeface="NanumSquare Neo" pitchFamily="34" charset="0"/>
+                <a:ea typeface="NanumSquare Neo" pitchFamily="34" charset="-122"/>
+                <a:cs typeface="NanumSquare Neo" pitchFamily="34" charset="-120"/>
               </a:rPr>
               <a:t>UZH(모션캡처 정답): 좌 = 정답 자세 맵(시간 어긋남 보정 전이라 번짐), 우 = 우리 ECC 추정 맵</a:t>
             </a:r>
@@ -9762,9 +9792,9 @@
                 <a:solidFill>
                   <a:srgbClr val="1D1D1F"/>
                 </a:solidFill>
-                <a:latin typeface="Malgun Gothic" pitchFamily="34" charset="0"/>
-                <a:ea typeface="Malgun Gothic" pitchFamily="34" charset="-122"/>
-                <a:cs typeface="Malgun Gothic" pitchFamily="34" charset="-120"/>
+                <a:latin typeface="NanumSquare Neo" pitchFamily="34" charset="0"/>
+                <a:ea typeface="NanumSquare Neo" pitchFamily="34" charset="-122"/>
+                <a:cs typeface="NanumSquare Neo" pitchFamily="34" charset="-120"/>
               </a:rPr>
               <a:t>소프트웨어(ECC) 추정기: 광축 1초 구간 θ 오차 2.4~3.2° (정답 시간 보정 후)</a:t>
             </a:r>
@@ -9804,9 +9834,9 @@
                 <a:solidFill>
                   <a:srgbClr val="7A7A7A"/>
                 </a:solidFill>
-                <a:latin typeface="Malgun Gothic"/>
-                <a:ea typeface="Malgun Gothic"/>
-                <a:cs typeface="Malgun Gothic"/>
+                <a:latin typeface="NanumSquare Neo"/>
+                <a:ea typeface="NanumSquare Neo"/>
+                <a:cs typeface="NanumSquare Neo"/>
               </a:defRPr>
             </a:lvl1pPr>
           </a:lstStyle>
@@ -9872,13 +9902,13 @@
               <a:buNone/>
             </a:pPr>
             <a:r>
-              <a:rPr lang="en-US" sz="2600" b="1" spc="-30" kern="0" dirty="0">
+              <a:rPr lang="en-US" sz="2600" b="1" dirty="0">
                 <a:solidFill>
                   <a:srgbClr val="1D1D1F"/>
                 </a:solidFill>
-                <a:latin typeface="Malgun Gothic" pitchFamily="34" charset="0"/>
-                <a:ea typeface="Malgun Gothic" pitchFamily="34" charset="-122"/>
-                <a:cs typeface="Malgun Gothic" pitchFamily="34" charset="-120"/>
+                <a:latin typeface="NanumSquare Neo" pitchFamily="34" charset="0"/>
+                <a:ea typeface="NanumSquare Neo" pitchFamily="34" charset="-122"/>
+                <a:cs typeface="NanumSquare Neo" pitchFamily="34" charset="-120"/>
               </a:rPr>
               <a:t>다른 영상과 합성 정답에서도 같은 파이프라인이 동작한다</a:t>
             </a:r>
@@ -9939,9 +9969,9 @@
                 <a:solidFill>
                   <a:srgbClr val="7A7A7A"/>
                 </a:solidFill>
-                <a:latin typeface="Malgun Gothic" pitchFamily="34" charset="0"/>
-                <a:ea typeface="Malgun Gothic" pitchFamily="34" charset="-122"/>
-                <a:cs typeface="Malgun Gothic" pitchFamily="34" charset="-120"/>
+                <a:latin typeface="NanumSquare Neo" pitchFamily="34" charset="0"/>
+                <a:ea typeface="NanumSquare Neo" pitchFamily="34" charset="-122"/>
+                <a:cs typeface="NanumSquare Neo" pitchFamily="34" charset="-120"/>
               </a:rPr>
               <a:t>실제 팬(pan) 영상으로 만든 월드 지도 (한 번에 파노라마로 쌓임)</a:t>
             </a:r>
@@ -10002,9 +10032,9 @@
                 <a:solidFill>
                   <a:srgbClr val="7A7A7A"/>
                 </a:solidFill>
-                <a:latin typeface="Malgun Gothic" pitchFamily="34" charset="0"/>
-                <a:ea typeface="Malgun Gothic" pitchFamily="34" charset="-122"/>
-                <a:cs typeface="Malgun Gothic" pitchFamily="34" charset="-120"/>
+                <a:latin typeface="NanumSquare Neo" pitchFamily="34" charset="0"/>
+                <a:ea typeface="NanumSquare Neo" pitchFamily="34" charset="-122"/>
+                <a:cs typeface="NanumSquare Neo" pitchFamily="34" charset="-120"/>
               </a:rPr>
               <a:t>실제 롤 영상의 상대 3D 점구름</a:t>
             </a:r>
@@ -10065,9 +10095,9 @@
                 <a:solidFill>
                   <a:srgbClr val="7A7A7A"/>
                 </a:solidFill>
-                <a:latin typeface="Malgun Gothic" pitchFamily="34" charset="0"/>
-                <a:ea typeface="Malgun Gothic" pitchFamily="34" charset="-122"/>
-                <a:cs typeface="Malgun Gothic" pitchFamily="34" charset="-120"/>
+                <a:latin typeface="NanumSquare Neo" pitchFamily="34" charset="0"/>
+                <a:ea typeface="NanumSquare Neo" pitchFamily="34" charset="-122"/>
+                <a:cs typeface="NanumSquare Neo" pitchFamily="34" charset="-120"/>
               </a:rPr>
               <a:t>합성 정답 장면 대비 복원 결과</a:t>
             </a:r>
@@ -10131,9 +10161,9 @@
                 <a:solidFill>
                   <a:srgbClr val="1D1D1F"/>
                 </a:solidFill>
-                <a:latin typeface="Malgun Gothic" pitchFamily="34" charset="0"/>
-                <a:ea typeface="Malgun Gothic" pitchFamily="34" charset="-122"/>
-                <a:cs typeface="Malgun Gothic" pitchFamily="34" charset="-120"/>
+                <a:latin typeface="NanumSquare Neo" pitchFamily="34" charset="0"/>
+                <a:ea typeface="NanumSquare Neo" pitchFamily="34" charset="-122"/>
+                <a:cs typeface="NanumSquare Neo" pitchFamily="34" charset="-120"/>
               </a:rPr>
               <a:t>주의</a:t>
             </a:r>
@@ -10170,9 +10200,9 @@
                 <a:solidFill>
                   <a:srgbClr val="1D1D1F"/>
                 </a:solidFill>
-                <a:latin typeface="Malgun Gothic" pitchFamily="34" charset="0"/>
-                <a:ea typeface="Malgun Gothic" pitchFamily="34" charset="-122"/>
-                <a:cs typeface="Malgun Gothic" pitchFamily="34" charset="-120"/>
+                <a:latin typeface="NanumSquare Neo" pitchFamily="34" charset="0"/>
+                <a:ea typeface="NanumSquare Neo" pitchFamily="34" charset="-122"/>
+                <a:cs typeface="NanumSquare Neo" pitchFamily="34" charset="-120"/>
               </a:rPr>
               <a:t>합성 점수는 모델이 정확히 맞는 세계의 값, 실제 영상엔 정답 없음</a:t>
             </a:r>
@@ -10212,9 +10242,9 @@
                 <a:solidFill>
                   <a:srgbClr val="7A7A7A"/>
                 </a:solidFill>
-                <a:latin typeface="Malgun Gothic"/>
-                <a:ea typeface="Malgun Gothic"/>
-                <a:cs typeface="Malgun Gothic"/>
+                <a:latin typeface="NanumSquare Neo"/>
+                <a:ea typeface="NanumSquare Neo"/>
+                <a:cs typeface="NanumSquare Neo"/>
               </a:defRPr>
             </a:lvl1pPr>
           </a:lstStyle>
@@ -10280,13 +10310,13 @@
               <a:buNone/>
             </a:pPr>
             <a:r>
-              <a:rPr lang="en-US" sz="2600" b="1" spc="-30" kern="0" dirty="0">
+              <a:rPr lang="en-US" sz="2600" b="1" dirty="0">
                 <a:solidFill>
                   <a:srgbClr val="1D1D1F"/>
                 </a:solidFill>
-                <a:latin typeface="Malgun Gothic" pitchFamily="34" charset="0"/>
-                <a:ea typeface="Malgun Gothic" pitchFamily="34" charset="-122"/>
-                <a:cs typeface="Malgun Gothic" pitchFamily="34" charset="-120"/>
+                <a:latin typeface="NanumSquare Neo" pitchFamily="34" charset="0"/>
+                <a:ea typeface="NanumSquare Neo" pitchFamily="34" charset="-122"/>
+                <a:cs typeface="NanumSquare Neo" pitchFamily="34" charset="-120"/>
               </a:rPr>
               <a:t>남은 문제: 회전 중심이 어긋나 가까운 물체는 번진다</a:t>
             </a:r>
@@ -10347,9 +10377,9 @@
                 <a:solidFill>
                   <a:srgbClr val="7A7A7A"/>
                 </a:solidFill>
-                <a:latin typeface="Malgun Gothic" pitchFamily="34" charset="0"/>
-                <a:ea typeface="Malgun Gothic" pitchFamily="34" charset="-122"/>
-                <a:cs typeface="Malgun Gothic" pitchFamily="34" charset="-120"/>
+                <a:latin typeface="NanumSquare Neo" pitchFamily="34" charset="0"/>
+                <a:ea typeface="NanumSquare Neo" pitchFamily="34" charset="-122"/>
+                <a:cs typeface="NanumSquare Neo" pitchFamily="34" charset="-120"/>
               </a:rPr>
               <a:t>회전 중심 하나로 쌓은 지도(좌) → 깊이 층별 지도에서 선명한 층 선택(중) → 추정된 상대 깊이(우)</a:t>
             </a:r>
@@ -10413,9 +10443,9 @@
                 <a:solidFill>
                   <a:srgbClr val="1D1D1F"/>
                 </a:solidFill>
-                <a:latin typeface="Malgun Gothic" pitchFamily="34" charset="0"/>
-                <a:ea typeface="Malgun Gothic" pitchFamily="34" charset="-122"/>
-                <a:cs typeface="Malgun Gothic" pitchFamily="34" charset="-120"/>
+                <a:latin typeface="NanumSquare Neo" pitchFamily="34" charset="0"/>
+                <a:ea typeface="NanumSquare Neo" pitchFamily="34" charset="-122"/>
+                <a:cs typeface="NanumSquare Neo" pitchFamily="34" charset="-120"/>
               </a:rPr>
               <a:t>한계</a:t>
             </a:r>
@@ -10452,9 +10482,9 @@
                 <a:solidFill>
                   <a:srgbClr val="1D1D1F"/>
                 </a:solidFill>
-                <a:latin typeface="Malgun Gothic" pitchFamily="34" charset="0"/>
-                <a:ea typeface="Malgun Gothic" pitchFamily="34" charset="-122"/>
-                <a:cs typeface="Malgun Gothic" pitchFamily="34" charset="-120"/>
+                <a:latin typeface="NanumSquare Neo" pitchFamily="34" charset="0"/>
+                <a:ea typeface="NanumSquare Neo" pitchFamily="34" charset="-122"/>
+                <a:cs typeface="NanumSquare Neo" pitchFamily="34" charset="-120"/>
               </a:rPr>
               <a:t>깊이 층 선택은 소프트웨어 모델이다. RTL에는 회전만 반영했고, 시차 보정은 향후 과제로 남겼다.</a:t>
             </a:r>
@@ -10494,9 +10524,9 @@
                 <a:solidFill>
                   <a:srgbClr val="7A7A7A"/>
                 </a:solidFill>
-                <a:latin typeface="Malgun Gothic"/>
-                <a:ea typeface="Malgun Gothic"/>
-                <a:cs typeface="Malgun Gothic"/>
+                <a:latin typeface="NanumSquare Neo"/>
+                <a:ea typeface="NanumSquare Neo"/>
+                <a:cs typeface="NanumSquare Neo"/>
               </a:defRPr>
             </a:lvl1pPr>
           </a:lstStyle>
@@ -10562,13 +10592,13 @@
               <a:buNone/>
             </a:pPr>
             <a:r>
-              <a:rPr lang="en-US" sz="2600" b="1" spc="-30" kern="0" dirty="0">
+              <a:rPr lang="en-US" sz="2600" b="1" dirty="0">
                 <a:solidFill>
                   <a:srgbClr val="1D1D1F"/>
                 </a:solidFill>
-                <a:latin typeface="Malgun Gothic" pitchFamily="34" charset="0"/>
-                <a:ea typeface="Malgun Gothic" pitchFamily="34" charset="-122"/>
-                <a:cs typeface="Malgun Gothic" pitchFamily="34" charset="-120"/>
+                <a:latin typeface="NanumSquare Neo" pitchFamily="34" charset="0"/>
+                <a:ea typeface="NanumSquare Neo" pitchFamily="34" charset="-122"/>
+                <a:cs typeface="NanumSquare Neo" pitchFamily="34" charset="-120"/>
               </a:rPr>
               <a:t>생체 모방은 실제 데이터로 이긴 것만 남겼다</a:t>
             </a:r>
@@ -10617,16 +10647,16 @@
                           <a:solidFill>
                             <a:srgbClr val="1D1D1F"/>
                           </a:solidFill>
-                          <a:latin typeface="Malgun Gothic" pitchFamily="34" charset="0"/>
-                          <a:ea typeface="Malgun Gothic" pitchFamily="34" charset="-122"/>
-                          <a:cs typeface="Malgun Gothic" pitchFamily="34" charset="-120"/>
+                          <a:latin typeface="NanumSquare Neo" pitchFamily="34" charset="0"/>
+                          <a:ea typeface="NanumSquare Neo" pitchFamily="34" charset="-122"/>
+                          <a:cs typeface="NanumSquare Neo" pitchFamily="34" charset="-120"/>
                         </a:rPr>
                         <a:t>생체 모방 아이디어</a:t>
                       </a:r>
                       <a:endParaRPr lang="en-US" sz="1300" dirty="0">
-                        <a:latin typeface="Malgun Gothic" charset="0"/>
-                        <a:ea typeface="Malgun Gothic" charset="0"/>
-                        <a:cs typeface="Malgun Gothic" charset="0"/>
+                        <a:latin typeface="NanumSquare Neo" charset="0"/>
+                        <a:ea typeface="NanumSquare Neo" charset="0"/>
+                        <a:cs typeface="NanumSquare Neo" charset="0"/>
                       </a:endParaRPr>
                     </a:p>
                   </a:txBody>
@@ -10685,16 +10715,16 @@
                           <a:solidFill>
                             <a:srgbClr val="1D1D1F"/>
                           </a:solidFill>
-                          <a:latin typeface="Malgun Gothic" pitchFamily="34" charset="0"/>
-                          <a:ea typeface="Malgun Gothic" pitchFamily="34" charset="-122"/>
-                          <a:cs typeface="Malgun Gothic" pitchFamily="34" charset="-120"/>
+                          <a:latin typeface="NanumSquare Neo" pitchFamily="34" charset="0"/>
+                          <a:ea typeface="NanumSquare Neo" pitchFamily="34" charset="-122"/>
+                          <a:cs typeface="NanumSquare Neo" pitchFamily="34" charset="-120"/>
                         </a:rPr>
                         <a:t>결과</a:t>
                       </a:r>
                       <a:endParaRPr lang="en-US" sz="1300" dirty="0">
-                        <a:latin typeface="Malgun Gothic" charset="0"/>
-                        <a:ea typeface="Malgun Gothic" charset="0"/>
-                        <a:cs typeface="Malgun Gothic" charset="0"/>
+                        <a:latin typeface="NanumSquare Neo" charset="0"/>
+                        <a:ea typeface="NanumSquare Neo" charset="0"/>
+                        <a:cs typeface="NanumSquare Neo" charset="0"/>
                       </a:endParaRPr>
                     </a:p>
                   </a:txBody>
@@ -10753,16 +10783,16 @@
                           <a:solidFill>
                             <a:srgbClr val="1D1D1F"/>
                           </a:solidFill>
-                          <a:latin typeface="Malgun Gothic" pitchFamily="34" charset="0"/>
-                          <a:ea typeface="Malgun Gothic" pitchFamily="34" charset="-122"/>
-                          <a:cs typeface="Malgun Gothic" pitchFamily="34" charset="-120"/>
+                          <a:latin typeface="NanumSquare Neo" pitchFamily="34" charset="0"/>
+                          <a:ea typeface="NanumSquare Neo" pitchFamily="34" charset="-122"/>
+                          <a:cs typeface="NanumSquare Neo" pitchFamily="34" charset="-120"/>
                         </a:rPr>
                         <a:t>근거</a:t>
                       </a:r>
                       <a:endParaRPr lang="en-US" sz="1300" dirty="0">
-                        <a:latin typeface="Malgun Gothic" charset="0"/>
-                        <a:ea typeface="Malgun Gothic" charset="0"/>
-                        <a:cs typeface="Malgun Gothic" charset="0"/>
+                        <a:latin typeface="NanumSquare Neo" charset="0"/>
+                        <a:ea typeface="NanumSquare Neo" charset="0"/>
+                        <a:cs typeface="NanumSquare Neo" charset="0"/>
                       </a:endParaRPr>
                     </a:p>
                   </a:txBody>
@@ -10823,16 +10853,16 @@
                           <a:solidFill>
                             <a:srgbClr val="1D1D1F"/>
                           </a:solidFill>
-                          <a:latin typeface="Malgun Gothic" pitchFamily="34" charset="0"/>
-                          <a:ea typeface="Malgun Gothic" pitchFamily="34" charset="-122"/>
-                          <a:cs typeface="Malgun Gothic" pitchFamily="34" charset="-120"/>
+                          <a:latin typeface="NanumSquare Neo" pitchFamily="34" charset="0"/>
+                          <a:ea typeface="NanumSquare Neo" pitchFamily="34" charset="-122"/>
+                          <a:cs typeface="NanumSquare Neo" pitchFamily="34" charset="-120"/>
                         </a:rPr>
                         <a:t>중심와(fovea) / 이벤트 클러스터링 (1차)</a:t>
                       </a:r>
                       <a:endParaRPr lang="en-US" sz="1300" dirty="0">
-                        <a:latin typeface="Malgun Gothic" charset="0"/>
-                        <a:ea typeface="Malgun Gothic" charset="0"/>
-                        <a:cs typeface="Malgun Gothic" charset="0"/>
+                        <a:latin typeface="NanumSquare Neo" charset="0"/>
+                        <a:ea typeface="NanumSquare Neo" charset="0"/>
+                        <a:cs typeface="NanumSquare Neo" charset="0"/>
                       </a:endParaRPr>
                     </a:p>
                   </a:txBody>
@@ -10891,16 +10921,16 @@
                           <a:solidFill>
                             <a:srgbClr val="0066CC"/>
                           </a:solidFill>
-                          <a:latin typeface="Malgun Gothic" pitchFamily="34" charset="0"/>
-                          <a:ea typeface="Malgun Gothic" pitchFamily="34" charset="-122"/>
-                          <a:cs typeface="Malgun Gothic" pitchFamily="34" charset="-120"/>
+                          <a:latin typeface="NanumSquare Neo" pitchFamily="34" charset="0"/>
+                          <a:ea typeface="NanumSquare Neo" pitchFamily="34" charset="-122"/>
+                          <a:cs typeface="NanumSquare Neo" pitchFamily="34" charset="-120"/>
                         </a:rPr>
                         <a:t>채택</a:t>
                       </a:r>
                       <a:endParaRPr lang="en-US" sz="1300" dirty="0">
-                        <a:latin typeface="Malgun Gothic" charset="0"/>
-                        <a:ea typeface="Malgun Gothic" charset="0"/>
-                        <a:cs typeface="Malgun Gothic" charset="0"/>
+                        <a:latin typeface="NanumSquare Neo" charset="0"/>
+                        <a:ea typeface="NanumSquare Neo" charset="0"/>
+                        <a:cs typeface="NanumSquare Neo" charset="0"/>
                       </a:endParaRPr>
                     </a:p>
                   </a:txBody>
@@ -10959,16 +10989,16 @@
                           <a:solidFill>
                             <a:srgbClr val="1D1D1F"/>
                           </a:solidFill>
-                          <a:latin typeface="Malgun Gothic" pitchFamily="34" charset="0"/>
-                          <a:ea typeface="Malgun Gothic" pitchFamily="34" charset="-122"/>
-                          <a:cs typeface="Malgun Gothic" pitchFamily="34" charset="-120"/>
+                          <a:latin typeface="NanumSquare Neo" pitchFamily="34" charset="0"/>
+                          <a:ea typeface="NanumSquare Neo" pitchFamily="34" charset="-122"/>
+                          <a:cs typeface="NanumSquare Neo" pitchFamily="34" charset="-120"/>
                         </a:rPr>
                         <a:t>열 비트맵: 손실 57.6% → 6.9%(동일 합성 트래픽), 최종 결합판 0.47%(UZH 실측)</a:t>
                       </a:r>
                       <a:endParaRPr lang="en-US" sz="1300" dirty="0">
-                        <a:latin typeface="Malgun Gothic" charset="0"/>
-                        <a:ea typeface="Malgun Gothic" charset="0"/>
-                        <a:cs typeface="Malgun Gothic" charset="0"/>
+                        <a:latin typeface="NanumSquare Neo" charset="0"/>
+                        <a:ea typeface="NanumSquare Neo" charset="0"/>
+                        <a:cs typeface="NanumSquare Neo" charset="0"/>
                       </a:endParaRPr>
                     </a:p>
                   </a:txBody>
@@ -11029,16 +11059,16 @@
                           <a:solidFill>
                             <a:srgbClr val="1D1D1F"/>
                           </a:solidFill>
-                          <a:latin typeface="Malgun Gothic" pitchFamily="34" charset="0"/>
-                          <a:ea typeface="Malgun Gothic" pitchFamily="34" charset="-122"/>
-                          <a:cs typeface="Malgun Gothic" pitchFamily="34" charset="-120"/>
+                          <a:latin typeface="NanumSquare Neo" pitchFamily="34" charset="0"/>
+                          <a:ea typeface="NanumSquare Neo" pitchFamily="34" charset="-122"/>
+                          <a:cs typeface="NanumSquare Neo" pitchFamily="34" charset="-120"/>
                         </a:rPr>
                         <a:t>눈 깜빡임: 유휴 시 코어 클록 차단</a:t>
                       </a:r>
                       <a:endParaRPr lang="en-US" sz="1300" dirty="0">
-                        <a:latin typeface="Malgun Gothic" charset="0"/>
-                        <a:ea typeface="Malgun Gothic" charset="0"/>
-                        <a:cs typeface="Malgun Gothic" charset="0"/>
+                        <a:latin typeface="NanumSquare Neo" charset="0"/>
+                        <a:ea typeface="NanumSquare Neo" charset="0"/>
+                        <a:cs typeface="NanumSquare Neo" charset="0"/>
                       </a:endParaRPr>
                     </a:p>
                   </a:txBody>
@@ -11097,16 +11127,16 @@
                           <a:solidFill>
                             <a:srgbClr val="0066CC"/>
                           </a:solidFill>
-                          <a:latin typeface="Malgun Gothic" pitchFamily="34" charset="0"/>
-                          <a:ea typeface="Malgun Gothic" pitchFamily="34" charset="-122"/>
-                          <a:cs typeface="Malgun Gothic" pitchFamily="34" charset="-120"/>
+                          <a:latin typeface="NanumSquare Neo" pitchFamily="34" charset="0"/>
+                          <a:ea typeface="NanumSquare Neo" pitchFamily="34" charset="-122"/>
+                          <a:cs typeface="NanumSquare Neo" pitchFamily="34" charset="-120"/>
                         </a:rPr>
                         <a:t>채택</a:t>
                       </a:r>
                       <a:endParaRPr lang="en-US" sz="1300" dirty="0">
-                        <a:latin typeface="Malgun Gothic" charset="0"/>
-                        <a:ea typeface="Malgun Gothic" charset="0"/>
-                        <a:cs typeface="Malgun Gothic" charset="0"/>
+                        <a:latin typeface="NanumSquare Neo" charset="0"/>
+                        <a:ea typeface="NanumSquare Neo" charset="0"/>
+                        <a:cs typeface="NanumSquare Neo" charset="0"/>
                       </a:endParaRPr>
                     </a:p>
                   </a:txBody>
@@ -11165,16 +11195,16 @@
                           <a:solidFill>
                             <a:srgbClr val="1D1D1F"/>
                           </a:solidFill>
-                          <a:latin typeface="Malgun Gothic" pitchFamily="34" charset="0"/>
-                          <a:ea typeface="Malgun Gothic" pitchFamily="34" charset="-122"/>
-                          <a:cs typeface="Malgun Gothic" pitchFamily="34" charset="-120"/>
+                          <a:latin typeface="NanumSquare Neo" pitchFamily="34" charset="0"/>
+                          <a:ea typeface="NanumSquare Neo" pitchFamily="34" charset="-122"/>
+                          <a:cs typeface="NanumSquare Neo" pitchFamily="34" charset="-120"/>
                         </a:rPr>
                         <a:t>항상-켬과 출력·메모리 일치, 유휴 전력 −71%(시험 입력)</a:t>
                       </a:r>
                       <a:endParaRPr lang="en-US" sz="1300" dirty="0">
-                        <a:latin typeface="Malgun Gothic" charset="0"/>
-                        <a:ea typeface="Malgun Gothic" charset="0"/>
-                        <a:cs typeface="Malgun Gothic" charset="0"/>
+                        <a:latin typeface="NanumSquare Neo" charset="0"/>
+                        <a:ea typeface="NanumSquare Neo" charset="0"/>
+                        <a:cs typeface="NanumSquare Neo" charset="0"/>
                       </a:endParaRPr>
                     </a:p>
                   </a:txBody>
@@ -11235,16 +11265,16 @@
                           <a:solidFill>
                             <a:srgbClr val="1D1D1F"/>
                           </a:solidFill>
-                          <a:latin typeface="Malgun Gothic" pitchFamily="34" charset="0"/>
-                          <a:ea typeface="Malgun Gothic" pitchFamily="34" charset="-122"/>
-                          <a:cs typeface="Malgun Gothic" pitchFamily="34" charset="-120"/>
+                          <a:latin typeface="NanumSquare Neo" pitchFamily="34" charset="0"/>
+                          <a:ea typeface="NanumSquare Neo" pitchFamily="34" charset="-122"/>
+                          <a:cs typeface="NanumSquare Neo" pitchFamily="34" charset="-120"/>
                         </a:rPr>
                         <a:t>행 단위 선택적 활성화 (메모리)</a:t>
                       </a:r>
                       <a:endParaRPr lang="en-US" sz="1300" dirty="0">
-                        <a:latin typeface="Malgun Gothic" charset="0"/>
-                        <a:ea typeface="Malgun Gothic" charset="0"/>
-                        <a:cs typeface="Malgun Gothic" charset="0"/>
+                        <a:latin typeface="NanumSquare Neo" charset="0"/>
+                        <a:ea typeface="NanumSquare Neo" charset="0"/>
+                        <a:cs typeface="NanumSquare Neo" charset="0"/>
                       </a:endParaRPr>
                     </a:p>
                   </a:txBody>
@@ -11303,16 +11333,16 @@
                           <a:solidFill>
                             <a:srgbClr val="0066CC"/>
                           </a:solidFill>
-                          <a:latin typeface="Malgun Gothic" pitchFamily="34" charset="0"/>
-                          <a:ea typeface="Malgun Gothic" pitchFamily="34" charset="-122"/>
-                          <a:cs typeface="Malgun Gothic" pitchFamily="34" charset="-120"/>
+                          <a:latin typeface="NanumSquare Neo" pitchFamily="34" charset="0"/>
+                          <a:ea typeface="NanumSquare Neo" pitchFamily="34" charset="-122"/>
+                          <a:cs typeface="NanumSquare Neo" pitchFamily="34" charset="-120"/>
                         </a:rPr>
                         <a:t>채택</a:t>
                       </a:r>
                       <a:endParaRPr lang="en-US" sz="1300" dirty="0">
-                        <a:latin typeface="Malgun Gothic" charset="0"/>
-                        <a:ea typeface="Malgun Gothic" charset="0"/>
-                        <a:cs typeface="Malgun Gothic" charset="0"/>
+                        <a:latin typeface="NanumSquare Neo" charset="0"/>
+                        <a:ea typeface="NanumSquare Neo" charset="0"/>
+                        <a:cs typeface="NanumSquare Neo" charset="0"/>
                       </a:endParaRPr>
                     </a:p>
                   </a:txBody>
@@ -11371,16 +11401,16 @@
                           <a:solidFill>
                             <a:srgbClr val="1D1D1F"/>
                           </a:solidFill>
-                          <a:latin typeface="Malgun Gothic" pitchFamily="34" charset="0"/>
-                          <a:ea typeface="Malgun Gothic" pitchFamily="34" charset="-122"/>
-                          <a:cs typeface="Malgun Gothic" pitchFamily="34" charset="-120"/>
+                          <a:latin typeface="NanumSquare Neo" pitchFamily="34" charset="0"/>
+                          <a:ea typeface="NanumSquare Neo" pitchFamily="34" charset="-122"/>
+                          <a:cs typeface="NanumSquare Neo" pitchFamily="34" charset="-120"/>
                         </a:rPr>
                         <a:t>전력 −65.5%, 면적 −5%</a:t>
                       </a:r>
                       <a:endParaRPr lang="en-US" sz="1300" dirty="0">
-                        <a:latin typeface="Malgun Gothic" charset="0"/>
-                        <a:ea typeface="Malgun Gothic" charset="0"/>
-                        <a:cs typeface="Malgun Gothic" charset="0"/>
+                        <a:latin typeface="NanumSquare Neo" charset="0"/>
+                        <a:ea typeface="NanumSquare Neo" charset="0"/>
+                        <a:cs typeface="NanumSquare Neo" charset="0"/>
                       </a:endParaRPr>
                     </a:p>
                   </a:txBody>
@@ -11441,16 +11471,16 @@
                           <a:solidFill>
                             <a:srgbClr val="1D1D1F"/>
                           </a:solidFill>
-                          <a:latin typeface="Malgun Gothic" pitchFamily="34" charset="0"/>
-                          <a:ea typeface="Malgun Gothic" pitchFamily="34" charset="-122"/>
-                          <a:cs typeface="Malgun Gothic" pitchFamily="34" charset="-120"/>
+                          <a:latin typeface="NanumSquare Neo" pitchFamily="34" charset="0"/>
+                          <a:ea typeface="NanumSquare Neo" pitchFamily="34" charset="-122"/>
+                          <a:cs typeface="NanumSquare Neo" pitchFamily="34" charset="-120"/>
                         </a:rPr>
                         <a:t>이득 조절(과부하 솎아내기)</a:t>
                       </a:r>
                       <a:endParaRPr lang="en-US" sz="1300" dirty="0">
-                        <a:latin typeface="Malgun Gothic" charset="0"/>
-                        <a:ea typeface="Malgun Gothic" charset="0"/>
-                        <a:cs typeface="Malgun Gothic" charset="0"/>
+                        <a:latin typeface="NanumSquare Neo" charset="0"/>
+                        <a:ea typeface="NanumSquare Neo" charset="0"/>
+                        <a:cs typeface="NanumSquare Neo" charset="0"/>
                       </a:endParaRPr>
                     </a:p>
                   </a:txBody>
@@ -11509,16 +11539,16 @@
                           <a:solidFill>
                             <a:srgbClr val="1D1D1F"/>
                           </a:solidFill>
-                          <a:latin typeface="Malgun Gothic" pitchFamily="34" charset="0"/>
-                          <a:ea typeface="Malgun Gothic" pitchFamily="34" charset="-122"/>
-                          <a:cs typeface="Malgun Gothic" pitchFamily="34" charset="-120"/>
+                          <a:latin typeface="NanumSquare Neo" pitchFamily="34" charset="0"/>
+                          <a:ea typeface="NanumSquare Neo" pitchFamily="34" charset="-122"/>
+                          <a:cs typeface="NanumSquare Neo" pitchFamily="34" charset="-120"/>
                         </a:rPr>
                         <a:t>기각·정정</a:t>
                       </a:r>
                       <a:endParaRPr lang="en-US" sz="1300" dirty="0">
-                        <a:latin typeface="Malgun Gothic" charset="0"/>
-                        <a:ea typeface="Malgun Gothic" charset="0"/>
-                        <a:cs typeface="Malgun Gothic" charset="0"/>
+                        <a:latin typeface="NanumSquare Neo" charset="0"/>
+                        <a:ea typeface="NanumSquare Neo" charset="0"/>
+                        <a:cs typeface="NanumSquare Neo" charset="0"/>
                       </a:endParaRPr>
                     </a:p>
                   </a:txBody>
@@ -11577,16 +11607,16 @@
                           <a:solidFill>
                             <a:srgbClr val="1D1D1F"/>
                           </a:solidFill>
-                          <a:latin typeface="Malgun Gothic" pitchFamily="34" charset="0"/>
-                          <a:ea typeface="Malgun Gothic" pitchFamily="34" charset="-122"/>
-                          <a:cs typeface="Malgun Gothic" pitchFamily="34" charset="-120"/>
+                          <a:latin typeface="NanumSquare Neo" pitchFamily="34" charset="0"/>
+                          <a:ea typeface="NanumSquare Neo" pitchFamily="34" charset="-122"/>
+                          <a:cs typeface="NanumSquare Neo" pitchFamily="34" charset="-120"/>
                         </a:rPr>
                         <a:t>합성 장면에서만 이득, 실제 DELTA 프레임에서 이득 없음</a:t>
                       </a:r>
                       <a:endParaRPr lang="en-US" sz="1300" dirty="0">
-                        <a:latin typeface="Malgun Gothic" charset="0"/>
-                        <a:ea typeface="Malgun Gothic" charset="0"/>
-                        <a:cs typeface="Malgun Gothic" charset="0"/>
+                        <a:latin typeface="NanumSquare Neo" charset="0"/>
+                        <a:ea typeface="NanumSquare Neo" charset="0"/>
+                        <a:cs typeface="NanumSquare Neo" charset="0"/>
                       </a:endParaRPr>
                     </a:p>
                   </a:txBody>
@@ -11647,16 +11677,16 @@
                           <a:solidFill>
                             <a:srgbClr val="1D1D1F"/>
                           </a:solidFill>
-                          <a:latin typeface="Malgun Gothic" pitchFamily="34" charset="0"/>
-                          <a:ea typeface="Malgun Gothic" pitchFamily="34" charset="-122"/>
-                          <a:cs typeface="Malgun Gothic" pitchFamily="34" charset="-120"/>
+                          <a:latin typeface="NanumSquare Neo" pitchFamily="34" charset="0"/>
+                          <a:ea typeface="NanumSquare Neo" pitchFamily="34" charset="-122"/>
+                          <a:cs typeface="NanumSquare Neo" pitchFamily="34" charset="-120"/>
                         </a:rPr>
                         <a:t>추정기 입력 줄이기(ON만/중심 가중/불응기)</a:t>
                       </a:r>
                       <a:endParaRPr lang="en-US" sz="1300" dirty="0">
-                        <a:latin typeface="Malgun Gothic" charset="0"/>
-                        <a:ea typeface="Malgun Gothic" charset="0"/>
-                        <a:cs typeface="Malgun Gothic" charset="0"/>
+                        <a:latin typeface="NanumSquare Neo" charset="0"/>
+                        <a:ea typeface="NanumSquare Neo" charset="0"/>
+                        <a:cs typeface="NanumSquare Neo" charset="0"/>
                       </a:endParaRPr>
                     </a:p>
                   </a:txBody>
@@ -11715,16 +11745,16 @@
                           <a:solidFill>
                             <a:srgbClr val="1D1D1F"/>
                           </a:solidFill>
-                          <a:latin typeface="Malgun Gothic" pitchFamily="34" charset="0"/>
-                          <a:ea typeface="Malgun Gothic" pitchFamily="34" charset="-122"/>
-                          <a:cs typeface="Malgun Gothic" pitchFamily="34" charset="-120"/>
+                          <a:latin typeface="NanumSquare Neo" pitchFamily="34" charset="0"/>
+                          <a:ea typeface="NanumSquare Neo" pitchFamily="34" charset="-122"/>
+                          <a:cs typeface="NanumSquare Neo" pitchFamily="34" charset="-120"/>
                         </a:rPr>
                         <a:t>기각</a:t>
                       </a:r>
                       <a:endParaRPr lang="en-US" sz="1300" dirty="0">
-                        <a:latin typeface="Malgun Gothic" charset="0"/>
-                        <a:ea typeface="Malgun Gothic" charset="0"/>
-                        <a:cs typeface="Malgun Gothic" charset="0"/>
+                        <a:latin typeface="NanumSquare Neo" charset="0"/>
+                        <a:ea typeface="NanumSquare Neo" charset="0"/>
+                        <a:cs typeface="NanumSquare Neo" charset="0"/>
                       </a:endParaRPr>
                     </a:p>
                   </a:txBody>
@@ -11783,16 +11813,16 @@
                           <a:solidFill>
                             <a:srgbClr val="1D1D1F"/>
                           </a:solidFill>
-                          <a:latin typeface="Malgun Gothic" pitchFamily="34" charset="0"/>
-                          <a:ea typeface="Malgun Gothic" pitchFamily="34" charset="-122"/>
-                          <a:cs typeface="Malgun Gothic" pitchFamily="34" charset="-120"/>
+                          <a:latin typeface="NanumSquare Neo" pitchFamily="34" charset="0"/>
+                          <a:ea typeface="NanumSquare Neo" pitchFamily="34" charset="-122"/>
+                          <a:cs typeface="NanumSquare Neo" pitchFamily="34" charset="-120"/>
                         </a:rPr>
                         <a:t>정확도 1.5배 이상 악화</a:t>
                       </a:r>
                       <a:endParaRPr lang="en-US" sz="1300" dirty="0">
-                        <a:latin typeface="Malgun Gothic" charset="0"/>
-                        <a:ea typeface="Malgun Gothic" charset="0"/>
-                        <a:cs typeface="Malgun Gothic" charset="0"/>
+                        <a:latin typeface="NanumSquare Neo" charset="0"/>
+                        <a:ea typeface="NanumSquare Neo" charset="0"/>
+                        <a:cs typeface="NanumSquare Neo" charset="0"/>
                       </a:endParaRPr>
                     </a:p>
                   </a:txBody>
@@ -11853,16 +11883,16 @@
                           <a:solidFill>
                             <a:srgbClr val="1D1D1F"/>
                           </a:solidFill>
-                          <a:latin typeface="Malgun Gothic" pitchFamily="34" charset="0"/>
-                          <a:ea typeface="Malgun Gothic" pitchFamily="34" charset="-122"/>
-                          <a:cs typeface="Malgun Gothic" pitchFamily="34" charset="-120"/>
+                          <a:latin typeface="NanumSquare Neo" pitchFamily="34" charset="0"/>
+                          <a:ea typeface="NanumSquare Neo" pitchFamily="34" charset="-122"/>
+                          <a:cs typeface="NanumSquare Neo" pitchFamily="34" charset="-120"/>
                         </a:rPr>
                         <a:t>미세 안구운동(지터)</a:t>
                       </a:r>
                       <a:endParaRPr lang="en-US" sz="1300" dirty="0">
-                        <a:latin typeface="Malgun Gothic" charset="0"/>
-                        <a:ea typeface="Malgun Gothic" charset="0"/>
-                        <a:cs typeface="Malgun Gothic" charset="0"/>
+                        <a:latin typeface="NanumSquare Neo" charset="0"/>
+                        <a:ea typeface="NanumSquare Neo" charset="0"/>
+                        <a:cs typeface="NanumSquare Neo" charset="0"/>
                       </a:endParaRPr>
                     </a:p>
                   </a:txBody>
@@ -11921,16 +11951,16 @@
                           <a:solidFill>
                             <a:srgbClr val="1D1D1F"/>
                           </a:solidFill>
-                          <a:latin typeface="Malgun Gothic" pitchFamily="34" charset="0"/>
-                          <a:ea typeface="Malgun Gothic" pitchFamily="34" charset="-122"/>
-                          <a:cs typeface="Malgun Gothic" pitchFamily="34" charset="-120"/>
+                          <a:latin typeface="NanumSquare Neo" pitchFamily="34" charset="0"/>
+                          <a:ea typeface="NanumSquare Neo" pitchFamily="34" charset="-122"/>
+                          <a:cs typeface="NanumSquare Neo" pitchFamily="34" charset="-120"/>
                         </a:rPr>
                         <a:t>기각</a:t>
                       </a:r>
                       <a:endParaRPr lang="en-US" sz="1300" dirty="0">
-                        <a:latin typeface="Malgun Gothic" charset="0"/>
-                        <a:ea typeface="Malgun Gothic" charset="0"/>
-                        <a:cs typeface="Malgun Gothic" charset="0"/>
+                        <a:latin typeface="NanumSquare Neo" charset="0"/>
+                        <a:ea typeface="NanumSquare Neo" charset="0"/>
+                        <a:cs typeface="NanumSquare Neo" charset="0"/>
                       </a:endParaRPr>
                     </a:p>
                   </a:txBody>
@@ -11989,16 +12019,16 @@
                           <a:solidFill>
                             <a:srgbClr val="1D1D1F"/>
                           </a:solidFill>
-                          <a:latin typeface="Malgun Gothic" pitchFamily="34" charset="0"/>
-                          <a:ea typeface="Malgun Gothic" pitchFamily="34" charset="-122"/>
-                          <a:cs typeface="Malgun Gothic" pitchFamily="34" charset="-120"/>
+                          <a:latin typeface="NanumSquare Neo" pitchFamily="34" charset="0"/>
+                          <a:ea typeface="NanumSquare Neo" pitchFamily="34" charset="-122"/>
+                          <a:cs typeface="NanumSquare Neo" pitchFamily="34" charset="-120"/>
                         </a:rPr>
                         <a:t>부화소 복원 효과 없음</a:t>
                       </a:r>
                       <a:endParaRPr lang="en-US" sz="1300" dirty="0">
-                        <a:latin typeface="Malgun Gothic" charset="0"/>
-                        <a:ea typeface="Malgun Gothic" charset="0"/>
-                        <a:cs typeface="Malgun Gothic" charset="0"/>
+                        <a:latin typeface="NanumSquare Neo" charset="0"/>
+                        <a:ea typeface="NanumSquare Neo" charset="0"/>
+                        <a:cs typeface="NanumSquare Neo" charset="0"/>
                       </a:endParaRPr>
                     </a:p>
                   </a:txBody>
@@ -12059,16 +12089,16 @@
                           <a:solidFill>
                             <a:srgbClr val="1D1D1F"/>
                           </a:solidFill>
-                          <a:latin typeface="Malgun Gothic" pitchFamily="34" charset="0"/>
-                          <a:ea typeface="Malgun Gothic" pitchFamily="34" charset="-122"/>
-                          <a:cs typeface="Malgun Gothic" pitchFamily="34" charset="-120"/>
+                          <a:latin typeface="NanumSquare Neo" pitchFamily="34" charset="0"/>
+                          <a:ea typeface="NanumSquare Neo" pitchFamily="34" charset="-122"/>
+                          <a:cs typeface="NanumSquare Neo" pitchFamily="34" charset="-120"/>
                         </a:rPr>
                         <a:t>원심성 복사(VOR): 회전 지령을 θ 사전분포로</a:t>
                       </a:r>
                       <a:endParaRPr lang="en-US" sz="1300" dirty="0">
-                        <a:latin typeface="Malgun Gothic" charset="0"/>
-                        <a:ea typeface="Malgun Gothic" charset="0"/>
-                        <a:cs typeface="Malgun Gothic" charset="0"/>
+                        <a:latin typeface="NanumSquare Neo" charset="0"/>
+                        <a:ea typeface="NanumSquare Neo" charset="0"/>
+                        <a:cs typeface="NanumSquare Neo" charset="0"/>
                       </a:endParaRPr>
                     </a:p>
                   </a:txBody>
@@ -12127,16 +12157,16 @@
                           <a:solidFill>
                             <a:srgbClr val="1D1D1F"/>
                           </a:solidFill>
-                          <a:latin typeface="Malgun Gothic" pitchFamily="34" charset="0"/>
-                          <a:ea typeface="Malgun Gothic" pitchFamily="34" charset="-122"/>
-                          <a:cs typeface="Malgun Gothic" pitchFamily="34" charset="-120"/>
+                          <a:latin typeface="NanumSquare Neo" pitchFamily="34" charset="0"/>
+                          <a:ea typeface="NanumSquare Neo" pitchFamily="34" charset="-122"/>
+                          <a:cs typeface="NanumSquare Neo" pitchFamily="34" charset="-120"/>
                         </a:rPr>
                         <a:t>기각</a:t>
                       </a:r>
                       <a:endParaRPr lang="en-US" sz="1300" dirty="0">
-                        <a:latin typeface="Malgun Gothic" charset="0"/>
-                        <a:ea typeface="Malgun Gothic" charset="0"/>
-                        <a:cs typeface="Malgun Gothic" charset="0"/>
+                        <a:latin typeface="NanumSquare Neo" charset="0"/>
+                        <a:ea typeface="NanumSquare Neo" charset="0"/>
+                        <a:cs typeface="NanumSquare Neo" charset="0"/>
                       </a:endParaRPr>
                     </a:p>
                   </a:txBody>
@@ -12195,16 +12225,16 @@
                           <a:solidFill>
                             <a:srgbClr val="1D1D1F"/>
                           </a:solidFill>
-                          <a:latin typeface="Malgun Gothic" pitchFamily="34" charset="0"/>
-                          <a:ea typeface="Malgun Gothic" pitchFamily="34" charset="-122"/>
-                          <a:cs typeface="Malgun Gothic" pitchFamily="34" charset="-120"/>
+                          <a:latin typeface="NanumSquare Neo" pitchFamily="34" charset="0"/>
+                          <a:ea typeface="NanumSquare Neo" pitchFamily="34" charset="-122"/>
+                          <a:cs typeface="NanumSquare Neo" pitchFamily="34" charset="-120"/>
                         </a:rPr>
                         <a:t>UZH 평균 23.4°→8.5°이나 RobotEvt 36.1°→34.9°(기준 25.3° 미달), 사전 등록 기준 미통과</a:t>
                       </a:r>
                       <a:endParaRPr lang="en-US" sz="1300" dirty="0">
-                        <a:latin typeface="Malgun Gothic" charset="0"/>
-                        <a:ea typeface="Malgun Gothic" charset="0"/>
-                        <a:cs typeface="Malgun Gothic" charset="0"/>
+                        <a:latin typeface="NanumSquare Neo" charset="0"/>
+                        <a:ea typeface="NanumSquare Neo" charset="0"/>
+                        <a:cs typeface="NanumSquare Neo" charset="0"/>
                       </a:endParaRPr>
                     </a:p>
                   </a:txBody>
@@ -12265,16 +12295,16 @@
                           <a:solidFill>
                             <a:srgbClr val="1D1D1F"/>
                           </a:solidFill>
-                          <a:latin typeface="Malgun Gothic" pitchFamily="34" charset="0"/>
-                          <a:ea typeface="Malgun Gothic" pitchFamily="34" charset="-122"/>
-                          <a:cs typeface="Malgun Gothic" pitchFamily="34" charset="-120"/>
+                          <a:latin typeface="NanumSquare Neo" pitchFamily="34" charset="0"/>
+                          <a:ea typeface="NanumSquare Neo" pitchFamily="34" charset="-122"/>
+                          <a:cs typeface="NanumSquare Neo" pitchFamily="34" charset="-120"/>
                         </a:rPr>
                         <a:t>최근 쓰기 캐시 (감각 기억)</a:t>
                       </a:r>
                       <a:endParaRPr lang="en-US" sz="1300" dirty="0">
-                        <a:latin typeface="Malgun Gothic" charset="0"/>
-                        <a:ea typeface="Malgun Gothic" charset="0"/>
-                        <a:cs typeface="Malgun Gothic" charset="0"/>
+                        <a:latin typeface="NanumSquare Neo" charset="0"/>
+                        <a:ea typeface="NanumSquare Neo" charset="0"/>
+                        <a:cs typeface="NanumSquare Neo" charset="0"/>
                       </a:endParaRPr>
                     </a:p>
                   </a:txBody>
@@ -12333,16 +12363,16 @@
                           <a:solidFill>
                             <a:srgbClr val="7A7A7A"/>
                           </a:solidFill>
-                          <a:latin typeface="Malgun Gothic" pitchFamily="34" charset="0"/>
-                          <a:ea typeface="Malgun Gothic" pitchFamily="34" charset="-122"/>
-                          <a:cs typeface="Malgun Gothic" pitchFamily="34" charset="-120"/>
+                          <a:latin typeface="NanumSquare Neo" pitchFamily="34" charset="0"/>
+                          <a:ea typeface="NanumSquare Neo" pitchFamily="34" charset="-122"/>
+                          <a:cs typeface="NanumSquare Neo" pitchFamily="34" charset="-120"/>
                         </a:rPr>
                         <a:t>보류</a:t>
                       </a:r>
                       <a:endParaRPr lang="en-US" sz="1300" dirty="0">
-                        <a:latin typeface="Malgun Gothic" charset="0"/>
-                        <a:ea typeface="Malgun Gothic" charset="0"/>
-                        <a:cs typeface="Malgun Gothic" charset="0"/>
+                        <a:latin typeface="NanumSquare Neo" charset="0"/>
+                        <a:ea typeface="NanumSquare Neo" charset="0"/>
+                        <a:cs typeface="NanumSquare Neo" charset="0"/>
                       </a:endParaRPr>
                     </a:p>
                   </a:txBody>
@@ -12401,16 +12431,16 @@
                           <a:solidFill>
                             <a:srgbClr val="1D1D1F"/>
                           </a:solidFill>
-                          <a:latin typeface="Malgun Gothic" pitchFamily="34" charset="0"/>
-                          <a:ea typeface="Malgun Gothic" pitchFamily="34" charset="-122"/>
-                          <a:cs typeface="Malgun Gothic" pitchFamily="34" charset="-120"/>
+                          <a:latin typeface="NanumSquare Neo" pitchFamily="34" charset="0"/>
+                          <a:ea typeface="NanumSquare Neo" pitchFamily="34" charset="-122"/>
+                          <a:cs typeface="NanumSquare Neo" pitchFamily="34" charset="-120"/>
                         </a:rPr>
                         <a:t>64항목만 전력 −16%/면적 +5.5%, 필수 아님</a:t>
                       </a:r>
                       <a:endParaRPr lang="en-US" sz="1300" dirty="0">
-                        <a:latin typeface="Malgun Gothic" charset="0"/>
-                        <a:ea typeface="Malgun Gothic" charset="0"/>
-                        <a:cs typeface="Malgun Gothic" charset="0"/>
+                        <a:latin typeface="NanumSquare Neo" charset="0"/>
+                        <a:ea typeface="NanumSquare Neo" charset="0"/>
+                        <a:cs typeface="NanumSquare Neo" charset="0"/>
                       </a:endParaRPr>
                     </a:p>
                   </a:txBody>
@@ -12493,9 +12523,9 @@
                 <a:solidFill>
                   <a:srgbClr val="7A7A7A"/>
                 </a:solidFill>
-                <a:latin typeface="Malgun Gothic"/>
-                <a:ea typeface="Malgun Gothic"/>
-                <a:cs typeface="Malgun Gothic"/>
+                <a:latin typeface="NanumSquare Neo"/>
+                <a:ea typeface="NanumSquare Neo"/>
+                <a:cs typeface="NanumSquare Neo"/>
               </a:defRPr>
             </a:lvl1pPr>
           </a:lstStyle>
@@ -12561,13 +12591,13 @@
               <a:buNone/>
             </a:pPr>
             <a:r>
-              <a:rPr lang="en-US" sz="2600" b="1" spc="-30" kern="0" dirty="0">
+              <a:rPr lang="en-US" sz="2600" b="1" dirty="0">
                 <a:solidFill>
                   <a:srgbClr val="1D1D1F"/>
                 </a:solidFill>
-                <a:latin typeface="Malgun Gothic" pitchFamily="34" charset="0"/>
-                <a:ea typeface="Malgun Gothic" pitchFamily="34" charset="-122"/>
-                <a:cs typeface="Malgun Gothic" pitchFamily="34" charset="-120"/>
+                <a:latin typeface="NanumSquare Neo" pitchFamily="34" charset="0"/>
+                <a:ea typeface="NanumSquare Neo" pitchFamily="34" charset="-122"/>
+                <a:cs typeface="NanumSquare Neo" pitchFamily="34" charset="-120"/>
               </a:rPr>
               <a:t>장단점과 고려 사항: 확장 시 가장 큰 비용은 메모리</a:t>
             </a:r>
@@ -12631,9 +12661,9 @@
                 <a:solidFill>
                   <a:srgbClr val="0066CC"/>
                 </a:solidFill>
-                <a:latin typeface="Malgun Gothic" pitchFamily="34" charset="0"/>
-                <a:ea typeface="Malgun Gothic" pitchFamily="34" charset="-122"/>
-                <a:cs typeface="Malgun Gothic" pitchFamily="34" charset="-120"/>
+                <a:latin typeface="NanumSquare Neo" pitchFamily="34" charset="0"/>
+                <a:ea typeface="NanumSquare Neo" pitchFamily="34" charset="-122"/>
+                <a:cs typeface="NanumSquare Neo" pitchFamily="34" charset="-120"/>
               </a:rPr>
               <a:t>장점</a:t>
             </a:r>
@@ -12670,9 +12700,9 @@
                 <a:solidFill>
                   <a:srgbClr val="1D1D1F"/>
                 </a:solidFill>
-                <a:latin typeface="Malgun Gothic" pitchFamily="34" charset="0"/>
-                <a:ea typeface="Malgun Gothic" pitchFamily="34" charset="-122"/>
-                <a:cs typeface="Malgun Gothic" pitchFamily="34" charset="-120"/>
+                <a:latin typeface="NanumSquare Neo" pitchFamily="34" charset="0"/>
+                <a:ea typeface="NanumSquare Neo" pitchFamily="34" charset="-122"/>
+                <a:cs typeface="NanumSquare Neo" pitchFamily="34" charset="-120"/>
               </a:rPr>
               <a:t>• 곱셈기 없는 표 기반 좌표 변환, bit-exact 검증</a:t>
             </a:r>
@@ -12687,9 +12717,9 @@
                 <a:solidFill>
                   <a:srgbClr val="1D1D1F"/>
                 </a:solidFill>
-                <a:latin typeface="Malgun Gothic" pitchFamily="34" charset="0"/>
-                <a:ea typeface="Malgun Gothic" pitchFamily="34" charset="-122"/>
-                <a:cs typeface="Malgun Gothic" pitchFamily="34" charset="-120"/>
+                <a:latin typeface="NanumSquare Neo" pitchFamily="34" charset="0"/>
+                <a:ea typeface="NanumSquare Neo" pitchFamily="34" charset="-122"/>
+                <a:cs typeface="NanumSquare Neo" pitchFamily="34" charset="-120"/>
               </a:rPr>
               <a:t>• 메모리 클록 게이팅(−65.5%)과 blink로 구조적 전력 절감</a:t>
             </a:r>
@@ -12704,9 +12734,9 @@
                 <a:solidFill>
                   <a:srgbClr val="1D1D1F"/>
                 </a:solidFill>
-                <a:latin typeface="Malgun Gothic" pitchFamily="34" charset="0"/>
-                <a:ea typeface="Malgun Gothic" pitchFamily="34" charset="-122"/>
-                <a:cs typeface="Malgun Gothic" pitchFamily="34" charset="-120"/>
+                <a:latin typeface="NanumSquare Neo" pitchFamily="34" charset="0"/>
+                <a:ea typeface="NanumSquare Neo" pitchFamily="34" charset="-122"/>
+                <a:cs typeface="NanumSquare Neo" pitchFamily="34" charset="-120"/>
               </a:rPr>
               <a:t>• 실제 센서·로봇팔 데이터로 검증, 안 되는 것은 기각</a:t>
             </a:r>
@@ -12721,9 +12751,9 @@
                 <a:solidFill>
                   <a:srgbClr val="1D1D1F"/>
                 </a:solidFill>
-                <a:latin typeface="Malgun Gothic" pitchFamily="34" charset="0"/>
-                <a:ea typeface="Malgun Gothic" pitchFamily="34" charset="-122"/>
-                <a:cs typeface="Malgun Gothic" pitchFamily="34" charset="-120"/>
+                <a:latin typeface="NanumSquare Neo" pitchFamily="34" charset="0"/>
+                <a:ea typeface="NanumSquare Neo" pitchFamily="34" charset="-122"/>
+                <a:cs typeface="NanumSquare Neo" pitchFamily="34" charset="-120"/>
               </a:rPr>
               <a:t>• 3차 Q&amp;A로 확인된 물리 셋업(봉-피벗)과 모델이 일치</a:t>
             </a:r>
@@ -12787,9 +12817,9 @@
                 <a:solidFill>
                   <a:srgbClr val="1D1D1F"/>
                 </a:solidFill>
-                <a:latin typeface="Malgun Gothic" pitchFamily="34" charset="0"/>
-                <a:ea typeface="Malgun Gothic" pitchFamily="34" charset="-122"/>
-                <a:cs typeface="Malgun Gothic" pitchFamily="34" charset="-120"/>
+                <a:latin typeface="NanumSquare Neo" pitchFamily="34" charset="0"/>
+                <a:ea typeface="NanumSquare Neo" pitchFamily="34" charset="-122"/>
+                <a:cs typeface="NanumSquare Neo" pitchFamily="34" charset="-120"/>
               </a:rPr>
               <a:t>단점·한계</a:t>
             </a:r>
@@ -12826,9 +12856,9 @@
                 <a:solidFill>
                   <a:srgbClr val="1D1D1F"/>
                 </a:solidFill>
-                <a:latin typeface="Malgun Gothic" pitchFamily="34" charset="0"/>
-                <a:ea typeface="Malgun Gothic" pitchFamily="34" charset="-122"/>
-                <a:cs typeface="Malgun Gothic" pitchFamily="34" charset="-120"/>
+                <a:latin typeface="NanumSquare Neo" pitchFamily="34" charset="0"/>
+                <a:ea typeface="NanumSquare Neo" pitchFamily="34" charset="-122"/>
+                <a:cs typeface="NanumSquare Neo" pitchFamily="34" charset="-120"/>
               </a:rPr>
               <a:t>• 통합 회로의 합성·P&amp;R은 4×4 패치, 64×64 월드, 256각도 (좌표 변환·추정기만 1024×1024로 검증)</a:t>
             </a:r>
@@ -12843,9 +12873,9 @@
                 <a:solidFill>
                   <a:srgbClr val="1D1D1F"/>
                 </a:solidFill>
-                <a:latin typeface="Malgun Gothic" pitchFamily="34" charset="0"/>
-                <a:ea typeface="Malgun Gothic" pitchFamily="34" charset="-122"/>
-                <a:cs typeface="Malgun Gothic" pitchFamily="34" charset="-120"/>
+                <a:latin typeface="NanumSquare Neo" pitchFamily="34" charset="0"/>
+                <a:ea typeface="NanumSquare Neo" pitchFamily="34" charset="-122"/>
+                <a:cs typeface="NanumSquare Neo" pitchFamily="34" charset="-120"/>
               </a:rPr>
               <a:t>• 회전각 추정 정확도가 장면에 크게 의존</a:t>
             </a:r>
@@ -12860,9 +12890,9 @@
                 <a:solidFill>
                   <a:srgbClr val="1D1D1F"/>
                 </a:solidFill>
-                <a:latin typeface="Malgun Gothic" pitchFamily="34" charset="0"/>
-                <a:ea typeface="Malgun Gothic" pitchFamily="34" charset="-122"/>
-                <a:cs typeface="Malgun Gothic" pitchFamily="34" charset="-120"/>
+                <a:latin typeface="NanumSquare Neo" pitchFamily="34" charset="0"/>
+                <a:ea typeface="NanumSquare Neo" pitchFamily="34" charset="-122"/>
+                <a:cs typeface="NanumSquare Neo" pitchFamily="34" charset="-120"/>
               </a:rPr>
               <a:t>• 시차(깊이) 보정은 소프트웨어만, RTL 미반영</a:t>
             </a:r>
@@ -12877,9 +12907,9 @@
                 <a:solidFill>
                   <a:srgbClr val="1D1D1F"/>
                 </a:solidFill>
-                <a:latin typeface="Malgun Gothic" pitchFamily="34" charset="0"/>
-                <a:ea typeface="Malgun Gothic" pitchFamily="34" charset="-122"/>
-                <a:cs typeface="Malgun Gothic" pitchFamily="34" charset="-120"/>
+                <a:latin typeface="NanumSquare Neo" pitchFamily="34" charset="0"/>
+                <a:ea typeface="NanumSquare Neo" pitchFamily="34" charset="-122"/>
+                <a:cs typeface="NanumSquare Neo" pitchFamily="34" charset="-120"/>
               </a:rPr>
               <a:t>• 정답 없는 실제 영상은 간접 지표로만 평가</a:t>
             </a:r>
@@ -12943,9 +12973,9 @@
                 <a:solidFill>
                   <a:srgbClr val="0066CC"/>
                 </a:solidFill>
-                <a:latin typeface="Malgun Gothic" pitchFamily="34" charset="0"/>
-                <a:ea typeface="Malgun Gothic" pitchFamily="34" charset="-122"/>
-                <a:cs typeface="Malgun Gothic" pitchFamily="34" charset="-120"/>
+                <a:latin typeface="NanumSquare Neo" pitchFamily="34" charset="0"/>
+                <a:ea typeface="NanumSquare Neo" pitchFamily="34" charset="-122"/>
+                <a:cs typeface="NanumSquare Neo" pitchFamily="34" charset="-120"/>
               </a:rPr>
               <a:t>고려 사항: 목표 크기(1024×1024)로 확장할 때</a:t>
             </a:r>
@@ -12982,9 +13012,9 @@
                 <a:solidFill>
                   <a:srgbClr val="1D1D1F"/>
                 </a:solidFill>
-                <a:latin typeface="Malgun Gothic" pitchFamily="34" charset="0"/>
-                <a:ea typeface="Malgun Gothic" pitchFamily="34" charset="-122"/>
-                <a:cs typeface="Malgun Gothic" pitchFamily="34" charset="-120"/>
+                <a:latin typeface="NanumSquare Neo" pitchFamily="34" charset="0"/>
+                <a:ea typeface="NanumSquare Neo" pitchFamily="34" charset="-122"/>
+                <a:cs typeface="NanumSquare Neo" pitchFamily="34" charset="-120"/>
               </a:rPr>
               <a:t>• 1024×1024 × 2비트 = 약 2.1 Mbit. 지금의 FF 메모리 비용(약 12 µm²/비트)로는 약 25 mm² → SRAM 매크로가 필수 (제안 크기 기준 단순 계산, 합성 결과 아님)</a:t>
             </a:r>
@@ -12999,9 +13029,9 @@
                 <a:solidFill>
                   <a:srgbClr val="1D1D1F"/>
                 </a:solidFill>
-                <a:latin typeface="Malgun Gothic" pitchFamily="34" charset="0"/>
-                <a:ea typeface="Malgun Gothic" pitchFamily="34" charset="-122"/>
-                <a:cs typeface="Malgun Gothic" pitchFamily="34" charset="-120"/>
+                <a:latin typeface="NanumSquare Neo" pitchFamily="34" charset="0"/>
+                <a:ea typeface="NanumSquare Neo" pitchFamily="34" charset="-122"/>
+                <a:cs typeface="NanumSquare Neo" pitchFamily="34" charset="-120"/>
               </a:rPr>
               <a:t>• 교육용 PDK(GPDK045)에는 SRAM 컴파일러가 없어, 메모리 면적·전력은 별도 모델로 추정해야 함</a:t>
             </a:r>
@@ -13016,9 +13046,9 @@
                 <a:solidFill>
                   <a:srgbClr val="1D1D1F"/>
                 </a:solidFill>
-                <a:latin typeface="Malgun Gothic" pitchFamily="34" charset="0"/>
-                <a:ea typeface="Malgun Gothic" pitchFamily="34" charset="-122"/>
-                <a:cs typeface="Malgun Gothic" pitchFamily="34" charset="-120"/>
+                <a:latin typeface="NanumSquare Neo" pitchFamily="34" charset="0"/>
+                <a:ea typeface="NanumSquare Neo" pitchFamily="34" charset="-122"/>
+                <a:cs typeface="NanumSquare Neo" pitchFamily="34" charset="-120"/>
               </a:rPr>
               <a:t>• 쓰기 경로(FIFO·중재·좌표 변환)는 레인 수에 비례해 늘어나지만 메모리에 비하면 작다</a:t>
             </a:r>
@@ -13058,9 +13088,9 @@
                 <a:solidFill>
                   <a:srgbClr val="7A7A7A"/>
                 </a:solidFill>
-                <a:latin typeface="Malgun Gothic"/>
-                <a:ea typeface="Malgun Gothic"/>
-                <a:cs typeface="Malgun Gothic"/>
+                <a:latin typeface="NanumSquare Neo"/>
+                <a:ea typeface="NanumSquare Neo"/>
+                <a:cs typeface="NanumSquare Neo"/>
               </a:defRPr>
             </a:lvl1pPr>
           </a:lstStyle>
@@ -13124,13 +13154,13 @@
               <a:buNone/>
             </a:pPr>
             <a:r>
-              <a:rPr lang="en-US" sz="3400" b="1" spc="-30" kern="0" dirty="0">
+              <a:rPr lang="en-US" sz="3400" b="1" dirty="0">
                 <a:solidFill>
                   <a:srgbClr val="FFFFFF"/>
                 </a:solidFill>
-                <a:latin typeface="Malgun Gothic" pitchFamily="34" charset="0"/>
-                <a:ea typeface="Malgun Gothic" pitchFamily="34" charset="-122"/>
-                <a:cs typeface="Malgun Gothic" pitchFamily="34" charset="-120"/>
+                <a:latin typeface="NanumSquare Neo" pitchFamily="34" charset="0"/>
+                <a:ea typeface="NanumSquare Neo" pitchFamily="34" charset="-122"/>
+                <a:cs typeface="NanumSquare Neo" pitchFamily="34" charset="-120"/>
               </a:rPr>
               <a:t>요약과 앞으로</a:t>
             </a:r>
@@ -13167,9 +13197,9 @@
                 <a:solidFill>
                   <a:srgbClr val="2997FF"/>
                 </a:solidFill>
-                <a:latin typeface="Malgun Gothic" pitchFamily="34" charset="0"/>
-                <a:ea typeface="Malgun Gothic" pitchFamily="34" charset="-122"/>
-                <a:cs typeface="Malgun Gothic" pitchFamily="34" charset="-120"/>
+                <a:latin typeface="NanumSquare Neo" pitchFamily="34" charset="0"/>
+                <a:ea typeface="NanumSquare Neo" pitchFamily="34" charset="-122"/>
+                <a:cs typeface="NanumSquare Neo" pitchFamily="34" charset="-120"/>
               </a:rPr>
               <a:t>한 일</a:t>
             </a:r>
@@ -13210,9 +13240,9 @@
                 <a:solidFill>
                   <a:srgbClr val="FFFFFF"/>
                 </a:solidFill>
-                <a:latin typeface="Malgun Gothic" pitchFamily="34" charset="0"/>
-                <a:ea typeface="Malgun Gothic" pitchFamily="34" charset="-122"/>
-                <a:cs typeface="Malgun Gothic" pitchFamily="34" charset="-120"/>
+                <a:latin typeface="NanumSquare Neo" pitchFamily="34" charset="0"/>
+                <a:ea typeface="NanumSquare Neo" pitchFamily="34" charset="-122"/>
+                <a:cs typeface="NanumSquare Neo" pitchFamily="34" charset="-120"/>
               </a:rPr>
               <a:t>회전각으로 이벤트를 월드 좌표로 옮기는 회로를 RTL로 구현</a:t>
             </a:r>
@@ -13231,9 +13261,9 @@
                 <a:solidFill>
                   <a:srgbClr val="FFFFFF"/>
                 </a:solidFill>
-                <a:latin typeface="Malgun Gothic" pitchFamily="34" charset="0"/>
-                <a:ea typeface="Malgun Gothic" pitchFamily="34" charset="-122"/>
-                <a:cs typeface="Malgun Gothic" pitchFamily="34" charset="-120"/>
+                <a:latin typeface="NanumSquare Neo" pitchFamily="34" charset="0"/>
+                <a:ea typeface="NanumSquare Neo" pitchFamily="34" charset="-122"/>
+                <a:cs typeface="NanumSquare Neo" pitchFamily="34" charset="-120"/>
               </a:rPr>
               <a:t>표 기반 좌표 변환 (면적 2.5배↓, 전력 4.8배↓)</a:t>
             </a:r>
@@ -13252,9 +13282,9 @@
                 <a:solidFill>
                   <a:srgbClr val="FFFFFF"/>
                 </a:solidFill>
-                <a:latin typeface="Malgun Gothic" pitchFamily="34" charset="0"/>
-                <a:ea typeface="Malgun Gothic" pitchFamily="34" charset="-122"/>
-                <a:cs typeface="Malgun Gothic" pitchFamily="34" charset="-120"/>
+                <a:latin typeface="NanumSquare Neo" pitchFamily="34" charset="0"/>
+                <a:ea typeface="NanumSquare Neo" pitchFamily="34" charset="-122"/>
+                <a:cs typeface="NanumSquare Neo" pitchFamily="34" charset="-120"/>
               </a:rPr>
               <a:t>단일 쓰기 포트, 행 클록 게이팅, blink</a:t>
             </a:r>
@@ -13291,9 +13321,9 @@
                 <a:solidFill>
                   <a:srgbClr val="2997FF"/>
                 </a:solidFill>
-                <a:latin typeface="Malgun Gothic" pitchFamily="34" charset="0"/>
-                <a:ea typeface="Malgun Gothic" pitchFamily="34" charset="-122"/>
-                <a:cs typeface="Malgun Gothic" pitchFamily="34" charset="-120"/>
+                <a:latin typeface="NanumSquare Neo" pitchFamily="34" charset="0"/>
+                <a:ea typeface="NanumSquare Neo" pitchFamily="34" charset="-122"/>
+                <a:cs typeface="NanumSquare Neo" pitchFamily="34" charset="-120"/>
               </a:rPr>
               <a:t>확인한 것</a:t>
             </a:r>
@@ -13334,9 +13364,9 @@
                 <a:solidFill>
                   <a:srgbClr val="FFFFFF"/>
                 </a:solidFill>
-                <a:latin typeface="Malgun Gothic" pitchFamily="34" charset="0"/>
-                <a:ea typeface="Malgun Gothic" pitchFamily="34" charset="-122"/>
-                <a:cs typeface="Malgun Gothic" pitchFamily="34" charset="-120"/>
+                <a:latin typeface="NanumSquare Neo" pitchFamily="34" charset="0"/>
+                <a:ea typeface="NanumSquare Neo" pitchFamily="34" charset="-122"/>
+                <a:cs typeface="NanumSquare Neo" pitchFamily="34" charset="-120"/>
               </a:rPr>
               <a:t>소프트웨어 모델과 비트 단위 일치</a:t>
             </a:r>
@@ -13355,9 +13385,9 @@
                 <a:solidFill>
                   <a:srgbClr val="FFFFFF"/>
                 </a:solidFill>
-                <a:latin typeface="Malgun Gothic" pitchFamily="34" charset="0"/>
-                <a:ea typeface="Malgun Gothic" pitchFamily="34" charset="-122"/>
-                <a:cs typeface="Malgun Gothic" pitchFamily="34" charset="-120"/>
+                <a:latin typeface="NanumSquare Neo" pitchFamily="34" charset="0"/>
+                <a:ea typeface="NanumSquare Neo" pitchFamily="34" charset="-122"/>
+                <a:cs typeface="NanumSquare Neo" pitchFamily="34" charset="-120"/>
               </a:rPr>
               <a:t>메모리 전력 −65.5%</a:t>
             </a:r>
@@ -13376,9 +13406,9 @@
                 <a:solidFill>
                   <a:srgbClr val="FFFFFF"/>
                 </a:solidFill>
-                <a:latin typeface="Malgun Gothic" pitchFamily="34" charset="0"/>
-                <a:ea typeface="Malgun Gothic" pitchFamily="34" charset="-122"/>
-                <a:cs typeface="Malgun Gothic" pitchFamily="34" charset="-120"/>
+                <a:latin typeface="NanumSquare Neo" pitchFamily="34" charset="0"/>
+                <a:ea typeface="NanumSquare Neo" pitchFamily="34" charset="-122"/>
+                <a:cs typeface="NanumSquare Neo" pitchFamily="34" charset="-120"/>
               </a:rPr>
               <a:t>P&amp;R: DRC·antenna 0건, 클록 게이팅 hold는 ICG로 해결</a:t>
             </a:r>
@@ -13415,9 +13445,9 @@
                 <a:solidFill>
                   <a:srgbClr val="2997FF"/>
                 </a:solidFill>
-                <a:latin typeface="Malgun Gothic" pitchFamily="34" charset="0"/>
-                <a:ea typeface="Malgun Gothic" pitchFamily="34" charset="-122"/>
-                <a:cs typeface="Malgun Gothic" pitchFamily="34" charset="-120"/>
+                <a:latin typeface="NanumSquare Neo" pitchFamily="34" charset="0"/>
+                <a:ea typeface="NanumSquare Neo" pitchFamily="34" charset="-122"/>
+                <a:cs typeface="NanumSquare Neo" pitchFamily="34" charset="-120"/>
               </a:rPr>
               <a:t>남은 것</a:t>
             </a:r>
@@ -13458,9 +13488,9 @@
                 <a:solidFill>
                   <a:srgbClr val="FFFFFF"/>
                 </a:solidFill>
-                <a:latin typeface="Malgun Gothic" pitchFamily="34" charset="0"/>
-                <a:ea typeface="Malgun Gothic" pitchFamily="34" charset="-122"/>
-                <a:cs typeface="Malgun Gothic" pitchFamily="34" charset="-120"/>
+                <a:latin typeface="NanumSquare Neo" pitchFamily="34" charset="0"/>
+                <a:ea typeface="NanumSquare Neo" pitchFamily="34" charset="-122"/>
+                <a:cs typeface="NanumSquare Neo" pitchFamily="34" charset="-120"/>
               </a:rPr>
               <a:t>1024×1024로의 확장과 SRAM 모델링</a:t>
             </a:r>
@@ -13479,9 +13509,9 @@
                 <a:solidFill>
                   <a:srgbClr val="FFFFFF"/>
                 </a:solidFill>
-                <a:latin typeface="Malgun Gothic" pitchFamily="34" charset="0"/>
-                <a:ea typeface="Malgun Gothic" pitchFamily="34" charset="-122"/>
-                <a:cs typeface="Malgun Gothic" pitchFamily="34" charset="-120"/>
+                <a:latin typeface="NanumSquare Neo" pitchFamily="34" charset="0"/>
+                <a:ea typeface="NanumSquare Neo" pitchFamily="34" charset="-122"/>
+                <a:cs typeface="NanumSquare Neo" pitchFamily="34" charset="-120"/>
               </a:rPr>
               <a:t>시차 보정의 RTL 반영</a:t>
             </a:r>
@@ -13500,9 +13530,9 @@
                 <a:solidFill>
                   <a:srgbClr val="FFFFFF"/>
                 </a:solidFill>
-                <a:latin typeface="Malgun Gothic" pitchFamily="34" charset="0"/>
-                <a:ea typeface="Malgun Gothic" pitchFamily="34" charset="-122"/>
-                <a:cs typeface="Malgun Gothic" pitchFamily="34" charset="-120"/>
+                <a:latin typeface="NanumSquare Neo" pitchFamily="34" charset="0"/>
+                <a:ea typeface="NanumSquare Neo" pitchFamily="34" charset="-122"/>
+                <a:cs typeface="NanumSquare Neo" pitchFamily="34" charset="-120"/>
               </a:rPr>
               <a:t>실제 영상에서 θ 정확도 개선</a:t>
             </a:r>
@@ -13539,9 +13569,9 @@
                 <a:solidFill>
                   <a:srgbClr val="CCCCCC"/>
                 </a:solidFill>
-                <a:latin typeface="Malgun Gothic" pitchFamily="34" charset="0"/>
-                <a:ea typeface="Malgun Gothic" pitchFamily="34" charset="-122"/>
-                <a:cs typeface="Malgun Gothic" pitchFamily="34" charset="-120"/>
+                <a:latin typeface="NanumSquare Neo" pitchFamily="34" charset="0"/>
+                <a:ea typeface="NanumSquare Neo" pitchFamily="34" charset="-122"/>
+                <a:cs typeface="NanumSquare Neo" pitchFamily="34" charset="-120"/>
               </a:rPr>
               <a:t>주소 자체가 이벤트다 — 필요한 것만 옮기고, 쉬는 동안은 끈다.</a:t>
             </a:r>
@@ -13601,13 +13631,13 @@
               <a:buNone/>
             </a:pPr>
             <a:r>
-              <a:rPr lang="en-US" sz="2600" b="1" spc="-30" kern="0" dirty="0">
+              <a:rPr lang="en-US" sz="2600" b="1" dirty="0">
                 <a:solidFill>
                   <a:srgbClr val="1D1D1F"/>
                 </a:solidFill>
-                <a:latin typeface="Malgun Gothic" pitchFamily="34" charset="0"/>
-                <a:ea typeface="Malgun Gothic" pitchFamily="34" charset="-122"/>
-                <a:cs typeface="Malgun Gothic" pitchFamily="34" charset="-120"/>
+                <a:latin typeface="NanumSquare Neo" pitchFamily="34" charset="0"/>
+                <a:ea typeface="NanumSquare Neo" pitchFamily="34" charset="-122"/>
+                <a:cs typeface="NanumSquare Neo" pitchFamily="34" charset="-120"/>
               </a:rPr>
               <a:t>문제 정의: 센서가 돌아도 지도는 제자리에 있어야 한다</a:t>
             </a:r>
@@ -13671,9 +13701,9 @@
                 <a:solidFill>
                   <a:srgbClr val="0066CC"/>
                 </a:solidFill>
-                <a:latin typeface="Malgun Gothic" pitchFamily="34" charset="0"/>
-                <a:ea typeface="Malgun Gothic" pitchFamily="34" charset="-122"/>
-                <a:cs typeface="Malgun Gothic" pitchFamily="34" charset="-120"/>
+                <a:latin typeface="NanumSquare Neo" pitchFamily="34" charset="0"/>
+                <a:ea typeface="NanumSquare Neo" pitchFamily="34" charset="-122"/>
+                <a:cs typeface="NanumSquare Neo" pitchFamily="34" charset="-120"/>
               </a:rPr>
               <a:t>입력</a:t>
             </a:r>
@@ -13710,9 +13740,9 @@
                 <a:solidFill>
                   <a:srgbClr val="1D1D1F"/>
                 </a:solidFill>
-                <a:latin typeface="Malgun Gothic" pitchFamily="34" charset="0"/>
-                <a:ea typeface="Malgun Gothic" pitchFamily="34" charset="-122"/>
-                <a:cs typeface="Malgun Gothic" pitchFamily="34" charset="-120"/>
+                <a:latin typeface="NanumSquare Neo" pitchFamily="34" charset="0"/>
+                <a:ea typeface="NanumSquare Neo" pitchFamily="34" charset="-122"/>
+                <a:cs typeface="NanumSquare Neo" pitchFamily="34" charset="-120"/>
               </a:rPr>
               <a:t>센서 960×720</a:t>
             </a:r>
@@ -13727,9 +13757,9 @@
                 <a:solidFill>
                   <a:srgbClr val="1D1D1F"/>
                 </a:solidFill>
-                <a:latin typeface="Malgun Gothic" pitchFamily="34" charset="0"/>
-                <a:ea typeface="Malgun Gothic" pitchFamily="34" charset="-122"/>
-                <a:cs typeface="Malgun Gothic" pitchFamily="34" charset="-120"/>
+                <a:latin typeface="NanumSquare Neo" pitchFamily="34" charset="0"/>
+                <a:ea typeface="NanumSquare Neo" pitchFamily="34" charset="-122"/>
+                <a:cs typeface="NanumSquare Neo" pitchFamily="34" charset="-120"/>
               </a:rPr>
               <a:t>이벤트 = 주소 (x, y) + 극성</a:t>
             </a:r>
@@ -13744,9 +13774,9 @@
                 <a:solidFill>
                   <a:srgbClr val="1D1D1F"/>
                 </a:solidFill>
-                <a:latin typeface="Malgun Gothic" pitchFamily="34" charset="0"/>
-                <a:ea typeface="Malgun Gothic" pitchFamily="34" charset="-122"/>
-                <a:cs typeface="Malgun Gothic" pitchFamily="34" charset="-120"/>
+                <a:latin typeface="NanumSquare Neo" pitchFamily="34" charset="0"/>
+                <a:ea typeface="NanumSquare Neo" pitchFamily="34" charset="-122"/>
+                <a:cs typeface="NanumSquare Neo" pitchFamily="34" charset="-120"/>
               </a:rPr>
               <a:t>회전각 θ (외부 공급 또는 추정)</a:t>
             </a:r>
@@ -13810,9 +13840,9 @@
                 <a:solidFill>
                   <a:srgbClr val="0066CC"/>
                 </a:solidFill>
-                <a:latin typeface="Malgun Gothic" pitchFamily="34" charset="0"/>
-                <a:ea typeface="Malgun Gothic" pitchFamily="34" charset="-122"/>
-                <a:cs typeface="Malgun Gothic" pitchFamily="34" charset="-120"/>
+                <a:latin typeface="NanumSquare Neo" pitchFamily="34" charset="0"/>
+                <a:ea typeface="NanumSquare Neo" pitchFamily="34" charset="-122"/>
+                <a:cs typeface="NanumSquare Neo" pitchFamily="34" charset="-120"/>
               </a:rPr>
               <a:t>제약 (교수 Q&amp;A 확정)</a:t>
             </a:r>
@@ -13849,9 +13879,9 @@
                 <a:solidFill>
                   <a:srgbClr val="1D1D1F"/>
                 </a:solidFill>
-                <a:latin typeface="Malgun Gothic" pitchFamily="34" charset="0"/>
-                <a:ea typeface="Malgun Gothic" pitchFamily="34" charset="-122"/>
-                <a:cs typeface="Malgun Gothic" pitchFamily="34" charset="-120"/>
+                <a:latin typeface="NanumSquare Neo" pitchFamily="34" charset="0"/>
+                <a:ea typeface="NanumSquare Neo" pitchFamily="34" charset="-122"/>
+                <a:cs typeface="NanumSquare Neo" pitchFamily="34" charset="-120"/>
               </a:rPr>
               <a:t>회전 180° 이내</a:t>
             </a:r>
@@ -13866,9 +13896,9 @@
                 <a:solidFill>
                   <a:srgbClr val="1D1D1F"/>
                 </a:solidFill>
-                <a:latin typeface="Malgun Gothic" pitchFamily="34" charset="0"/>
-                <a:ea typeface="Malgun Gothic" pitchFamily="34" charset="-122"/>
-                <a:cs typeface="Malgun Gothic" pitchFamily="34" charset="-120"/>
+                <a:latin typeface="NanumSquare Neo" pitchFamily="34" charset="0"/>
+                <a:ea typeface="NanumSquare Neo" pitchFamily="34" charset="-122"/>
+                <a:cs typeface="NanumSquare Neo" pitchFamily="34" charset="-120"/>
               </a:rPr>
               <a:t>평행 이동 없음 (미세하게만)</a:t>
             </a:r>
@@ -13883,9 +13913,9 @@
                 <a:solidFill>
                   <a:srgbClr val="1D1D1F"/>
                 </a:solidFill>
-                <a:latin typeface="Malgun Gothic" pitchFamily="34" charset="0"/>
-                <a:ea typeface="Malgun Gothic" pitchFamily="34" charset="-122"/>
-                <a:cs typeface="Malgun Gothic" pitchFamily="34" charset="-120"/>
+                <a:latin typeface="NanumSquare Neo" pitchFamily="34" charset="0"/>
+                <a:ea typeface="NanumSquare Neo" pitchFamily="34" charset="-122"/>
+                <a:cs typeface="NanumSquare Neo" pitchFamily="34" charset="-120"/>
               </a:rPr>
               <a:t>표면만 보는 2차원 월드 메모리</a:t>
             </a:r>
@@ -13949,9 +13979,9 @@
                 <a:solidFill>
                   <a:srgbClr val="0066CC"/>
                 </a:solidFill>
-                <a:latin typeface="Malgun Gothic" pitchFamily="34" charset="0"/>
-                <a:ea typeface="Malgun Gothic" pitchFamily="34" charset="-122"/>
-                <a:cs typeface="Malgun Gothic" pitchFamily="34" charset="-120"/>
+                <a:latin typeface="NanumSquare Neo" pitchFamily="34" charset="0"/>
+                <a:ea typeface="NanumSquare Neo" pitchFamily="34" charset="-122"/>
+                <a:cs typeface="NanumSquare Neo" pitchFamily="34" charset="-120"/>
               </a:rPr>
               <a:t>출력</a:t>
             </a:r>
@@ -13988,9 +14018,9 @@
                 <a:solidFill>
                   <a:srgbClr val="1D1D1F"/>
                 </a:solidFill>
-                <a:latin typeface="Malgun Gothic" pitchFamily="34" charset="0"/>
-                <a:ea typeface="Malgun Gothic" pitchFamily="34" charset="-122"/>
-                <a:cs typeface="Malgun Gothic" pitchFamily="34" charset="-120"/>
+                <a:latin typeface="NanumSquare Neo" pitchFamily="34" charset="0"/>
+                <a:ea typeface="NanumSquare Neo" pitchFamily="34" charset="-122"/>
+                <a:cs typeface="NanumSquare Neo" pitchFamily="34" charset="-120"/>
               </a:rPr>
               <a:t>월드 메모리</a:t>
             </a:r>
@@ -14005,9 +14035,9 @@
                 <a:solidFill>
                   <a:srgbClr val="1D1D1F"/>
                 </a:solidFill>
-                <a:latin typeface="Malgun Gothic" pitchFamily="34" charset="0"/>
-                <a:ea typeface="Malgun Gothic" pitchFamily="34" charset="-122"/>
-                <a:cs typeface="Malgun Gothic" pitchFamily="34" charset="-120"/>
+                <a:latin typeface="NanumSquare Neo" pitchFamily="34" charset="0"/>
+                <a:ea typeface="NanumSquare Neo" pitchFamily="34" charset="-122"/>
+                <a:cs typeface="NanumSquare Neo" pitchFamily="34" charset="-120"/>
               </a:rPr>
               <a:t>칸마다 이벤트 유무 + 극성</a:t>
             </a:r>
@@ -14022,9 +14052,9 @@
                 <a:solidFill>
                   <a:srgbClr val="1D1D1F"/>
                 </a:solidFill>
-                <a:latin typeface="Malgun Gothic" pitchFamily="34" charset="0"/>
-                <a:ea typeface="Malgun Gothic" pitchFamily="34" charset="-122"/>
-                <a:cs typeface="Malgun Gothic" pitchFamily="34" charset="-120"/>
+                <a:latin typeface="NanumSquare Neo" pitchFamily="34" charset="0"/>
+                <a:ea typeface="NanumSquare Neo" pitchFamily="34" charset="-122"/>
+                <a:cs typeface="NanumSquare Neo" pitchFamily="34" charset="-120"/>
               </a:rPr>
               <a:t>호스트용 읽기 포트</a:t>
             </a:r>
@@ -14085,9 +14115,9 @@
                 <a:solidFill>
                   <a:srgbClr val="7A7A7A"/>
                 </a:solidFill>
-                <a:latin typeface="Malgun Gothic" pitchFamily="34" charset="0"/>
-                <a:ea typeface="Malgun Gothic" pitchFamily="34" charset="-122"/>
-                <a:cs typeface="Malgun Gothic" pitchFamily="34" charset="-120"/>
+                <a:latin typeface="NanumSquare Neo" pitchFamily="34" charset="0"/>
+                <a:ea typeface="NanumSquare Neo" pitchFamily="34" charset="-122"/>
+                <a:cs typeface="NanumSquare Neo" pitchFamily="34" charset="-120"/>
               </a:rPr>
               <a:t>회전을 보정하지 않고 쌓으면(위) 소용돌이로 번지고, 회전각으로 좌표를 바꿔 쌓으면(아래) 방의 구조가 보인다. (실제 DELTA 센서 영상, 소프트웨어 모델)</a:t>
             </a:r>
@@ -14151,9 +14181,9 @@
                 <a:solidFill>
                   <a:srgbClr val="2997FF"/>
                 </a:solidFill>
-                <a:latin typeface="Malgun Gothic" pitchFamily="34" charset="0"/>
-                <a:ea typeface="Malgun Gothic" pitchFamily="34" charset="-122"/>
-                <a:cs typeface="Malgun Gothic" pitchFamily="34" charset="-120"/>
+                <a:latin typeface="NanumSquare Neo" pitchFamily="34" charset="0"/>
+                <a:ea typeface="NanumSquare Neo" pitchFamily="34" charset="-122"/>
+                <a:cs typeface="NanumSquare Neo" pitchFamily="34" charset="-120"/>
               </a:rPr>
               <a:t>우리가 정한 평가 관점</a:t>
             </a:r>
@@ -14194,9 +14224,9 @@
                 <a:solidFill>
                   <a:srgbClr val="FFFFFF"/>
                 </a:solidFill>
-                <a:latin typeface="Malgun Gothic" pitchFamily="34" charset="0"/>
-                <a:ea typeface="Malgun Gothic" pitchFamily="34" charset="-122"/>
-                <a:cs typeface="Malgun Gothic" pitchFamily="34" charset="-120"/>
+                <a:latin typeface="NanumSquare Neo" pitchFamily="34" charset="0"/>
+                <a:ea typeface="NanumSquare Neo" pitchFamily="34" charset="-122"/>
+                <a:cs typeface="NanumSquare Neo" pitchFamily="34" charset="-120"/>
               </a:rPr>
               <a:t>이벤트를 잃지 않고 정확한 칸에 쓰는가</a:t>
             </a:r>
@@ -14215,9 +14245,9 @@
                 <a:solidFill>
                   <a:srgbClr val="FFFFFF"/>
                 </a:solidFill>
-                <a:latin typeface="Malgun Gothic" pitchFamily="34" charset="0"/>
-                <a:ea typeface="Malgun Gothic" pitchFamily="34" charset="-122"/>
-                <a:cs typeface="Malgun Gothic" pitchFamily="34" charset="-120"/>
+                <a:latin typeface="NanumSquare Neo" pitchFamily="34" charset="0"/>
+                <a:ea typeface="NanumSquare Neo" pitchFamily="34" charset="-122"/>
+                <a:cs typeface="NanumSquare Neo" pitchFamily="34" charset="-120"/>
               </a:rPr>
               <a:t>구현 가능한 면적·전력인가</a:t>
             </a:r>
@@ -14236,9 +14266,9 @@
                 <a:solidFill>
                   <a:srgbClr val="FFFFFF"/>
                 </a:solidFill>
-                <a:latin typeface="Malgun Gothic" pitchFamily="34" charset="0"/>
-                <a:ea typeface="Malgun Gothic" pitchFamily="34" charset="-122"/>
-                <a:cs typeface="Malgun Gothic" pitchFamily="34" charset="-120"/>
+                <a:latin typeface="NanumSquare Neo" pitchFamily="34" charset="0"/>
+                <a:ea typeface="NanumSquare Neo" pitchFamily="34" charset="-122"/>
+                <a:cs typeface="NanumSquare Neo" pitchFamily="34" charset="-120"/>
               </a:rPr>
               <a:t>회로가 실제 데이터에서 안정적인가</a:t>
             </a:r>
@@ -14257,9 +14287,9 @@
                 <a:solidFill>
                   <a:srgbClr val="FFFFFF"/>
                 </a:solidFill>
-                <a:latin typeface="Malgun Gothic" pitchFamily="34" charset="0"/>
-                <a:ea typeface="Malgun Gothic" pitchFamily="34" charset="-122"/>
-                <a:cs typeface="Malgun Gothic" pitchFamily="34" charset="-120"/>
+                <a:latin typeface="NanumSquare Neo" pitchFamily="34" charset="0"/>
+                <a:ea typeface="NanumSquare Neo" pitchFamily="34" charset="-122"/>
+                <a:cs typeface="NanumSquare Neo" pitchFamily="34" charset="-120"/>
               </a:rPr>
               <a:t>한계를 스스로 설명할 수 있는가</a:t>
             </a:r>
@@ -14299,9 +14329,9 @@
                 <a:solidFill>
                   <a:srgbClr val="7A7A7A"/>
                 </a:solidFill>
-                <a:latin typeface="Malgun Gothic"/>
-                <a:ea typeface="Malgun Gothic"/>
-                <a:cs typeface="Malgun Gothic"/>
+                <a:latin typeface="NanumSquare Neo"/>
+                <a:ea typeface="NanumSquare Neo"/>
+                <a:cs typeface="NanumSquare Neo"/>
               </a:defRPr>
             </a:lvl1pPr>
           </a:lstStyle>
@@ -14367,13 +14397,13 @@
               <a:buNone/>
             </a:pPr>
             <a:r>
-              <a:rPr lang="en-US" sz="2600" b="1" spc="-30" kern="0" dirty="0">
+              <a:rPr lang="en-US" sz="2600" b="1" dirty="0">
                 <a:solidFill>
                   <a:srgbClr val="1D1D1F"/>
                 </a:solidFill>
-                <a:latin typeface="Malgun Gothic" pitchFamily="34" charset="0"/>
-                <a:ea typeface="Malgun Gothic" pitchFamily="34" charset="-122"/>
-                <a:cs typeface="Malgun Gothic" pitchFamily="34" charset="-120"/>
+                <a:latin typeface="NanumSquare Neo" pitchFamily="34" charset="0"/>
+                <a:ea typeface="NanumSquare Neo" pitchFamily="34" charset="-122"/>
+                <a:cs typeface="NanumSquare Neo" pitchFamily="34" charset="-120"/>
               </a:rPr>
               <a:t>타겟은 로봇팔 손목 카메라, 크기는 이유와 함께 제안한다</a:t>
             </a:r>
@@ -14423,16 +14453,16 @@
                           <a:solidFill>
                             <a:srgbClr val="1D1D1F"/>
                           </a:solidFill>
-                          <a:latin typeface="Malgun Gothic" pitchFamily="34" charset="0"/>
-                          <a:ea typeface="Malgun Gothic" pitchFamily="34" charset="-122"/>
-                          <a:cs typeface="Malgun Gothic" pitchFamily="34" charset="-120"/>
+                          <a:latin typeface="NanumSquare Neo" pitchFamily="34" charset="0"/>
+                          <a:ea typeface="NanumSquare Neo" pitchFamily="34" charset="-122"/>
+                          <a:cs typeface="NanumSquare Neo" pitchFamily="34" charset="-120"/>
                         </a:rPr>
                         <a:t>항목</a:t>
                       </a:r>
                       <a:endParaRPr lang="en-US" sz="1400" dirty="0">
-                        <a:latin typeface="Malgun Gothic" charset="0"/>
-                        <a:ea typeface="Malgun Gothic" charset="0"/>
-                        <a:cs typeface="Malgun Gothic" charset="0"/>
+                        <a:latin typeface="NanumSquare Neo" charset="0"/>
+                        <a:ea typeface="NanumSquare Neo" charset="0"/>
+                        <a:cs typeface="NanumSquare Neo" charset="0"/>
                       </a:endParaRPr>
                     </a:p>
                   </a:txBody>
@@ -14491,16 +14521,16 @@
                           <a:solidFill>
                             <a:srgbClr val="1D1D1F"/>
                           </a:solidFill>
-                          <a:latin typeface="Malgun Gothic" pitchFamily="34" charset="0"/>
-                          <a:ea typeface="Malgun Gothic" pitchFamily="34" charset="-122"/>
-                          <a:cs typeface="Malgun Gothic" pitchFamily="34" charset="-120"/>
+                          <a:latin typeface="NanumSquare Neo" pitchFamily="34" charset="0"/>
+                          <a:ea typeface="NanumSquare Neo" pitchFamily="34" charset="-122"/>
+                          <a:cs typeface="NanumSquare Neo" pitchFamily="34" charset="-120"/>
                         </a:rPr>
                         <a:t>RTL로 검증한 크기</a:t>
                       </a:r>
                       <a:endParaRPr lang="en-US" sz="1400" dirty="0">
-                        <a:latin typeface="Malgun Gothic" charset="0"/>
-                        <a:ea typeface="Malgun Gothic" charset="0"/>
-                        <a:cs typeface="Malgun Gothic" charset="0"/>
+                        <a:latin typeface="NanumSquare Neo" charset="0"/>
+                        <a:ea typeface="NanumSquare Neo" charset="0"/>
+                        <a:cs typeface="NanumSquare Neo" charset="0"/>
                       </a:endParaRPr>
                     </a:p>
                   </a:txBody>
@@ -14559,16 +14589,16 @@
                           <a:solidFill>
                             <a:srgbClr val="1D1D1F"/>
                           </a:solidFill>
-                          <a:latin typeface="Malgun Gothic" pitchFamily="34" charset="0"/>
-                          <a:ea typeface="Malgun Gothic" pitchFamily="34" charset="-122"/>
-                          <a:cs typeface="Malgun Gothic" pitchFamily="34" charset="-120"/>
+                          <a:latin typeface="NanumSquare Neo" pitchFamily="34" charset="0"/>
+                          <a:ea typeface="NanumSquare Neo" pitchFamily="34" charset="-122"/>
+                          <a:cs typeface="NanumSquare Neo" pitchFamily="34" charset="-120"/>
                         </a:rPr>
                         <a:t>로봇팔 목표(제안)</a:t>
                       </a:r>
                       <a:endParaRPr lang="en-US" sz="1400" dirty="0">
-                        <a:latin typeface="Malgun Gothic" charset="0"/>
-                        <a:ea typeface="Malgun Gothic" charset="0"/>
-                        <a:cs typeface="Malgun Gothic" charset="0"/>
+                        <a:latin typeface="NanumSquare Neo" charset="0"/>
+                        <a:ea typeface="NanumSquare Neo" charset="0"/>
+                        <a:cs typeface="NanumSquare Neo" charset="0"/>
                       </a:endParaRPr>
                     </a:p>
                   </a:txBody>
@@ -14627,16 +14657,16 @@
                           <a:solidFill>
                             <a:srgbClr val="1D1D1F"/>
                           </a:solidFill>
-                          <a:latin typeface="Malgun Gothic" pitchFamily="34" charset="0"/>
-                          <a:ea typeface="Malgun Gothic" pitchFamily="34" charset="-122"/>
-                          <a:cs typeface="Malgun Gothic" pitchFamily="34" charset="-120"/>
+                          <a:latin typeface="NanumSquare Neo" pitchFamily="34" charset="0"/>
+                          <a:ea typeface="NanumSquare Neo" pitchFamily="34" charset="-122"/>
+                          <a:cs typeface="NanumSquare Neo" pitchFamily="34" charset="-120"/>
                         </a:rPr>
                         <a:t>근거</a:t>
                       </a:r>
                       <a:endParaRPr lang="en-US" sz="1400" dirty="0">
-                        <a:latin typeface="Malgun Gothic" charset="0"/>
-                        <a:ea typeface="Malgun Gothic" charset="0"/>
-                        <a:cs typeface="Malgun Gothic" charset="0"/>
+                        <a:latin typeface="NanumSquare Neo" charset="0"/>
+                        <a:ea typeface="NanumSquare Neo" charset="0"/>
+                        <a:cs typeface="NanumSquare Neo" charset="0"/>
                       </a:endParaRPr>
                     </a:p>
                   </a:txBody>
@@ -14697,16 +14727,16 @@
                           <a:solidFill>
                             <a:srgbClr val="1D1D1F"/>
                           </a:solidFill>
-                          <a:latin typeface="Malgun Gothic" pitchFamily="34" charset="0"/>
-                          <a:ea typeface="Malgun Gothic" pitchFamily="34" charset="-122"/>
-                          <a:cs typeface="Malgun Gothic" pitchFamily="34" charset="-120"/>
+                          <a:latin typeface="NanumSquare Neo" pitchFamily="34" charset="0"/>
+                          <a:ea typeface="NanumSquare Neo" pitchFamily="34" charset="-122"/>
+                          <a:cs typeface="NanumSquare Neo" pitchFamily="34" charset="-120"/>
                         </a:rPr>
                         <a:t>센서 패치</a:t>
                       </a:r>
                       <a:endParaRPr lang="en-US" sz="1400" dirty="0">
-                        <a:latin typeface="Malgun Gothic" charset="0"/>
-                        <a:ea typeface="Malgun Gothic" charset="0"/>
-                        <a:cs typeface="Malgun Gothic" charset="0"/>
+                        <a:latin typeface="NanumSquare Neo" charset="0"/>
+                        <a:ea typeface="NanumSquare Neo" charset="0"/>
+                        <a:cs typeface="NanumSquare Neo" charset="0"/>
                       </a:endParaRPr>
                     </a:p>
                   </a:txBody>
@@ -14765,16 +14795,16 @@
                           <a:solidFill>
                             <a:srgbClr val="1D1D1F"/>
                           </a:solidFill>
-                          <a:latin typeface="Malgun Gothic" pitchFamily="34" charset="0"/>
-                          <a:ea typeface="Malgun Gothic" pitchFamily="34" charset="-122"/>
-                          <a:cs typeface="Malgun Gothic" pitchFamily="34" charset="-120"/>
+                          <a:latin typeface="NanumSquare Neo" pitchFamily="34" charset="0"/>
+                          <a:ea typeface="NanumSquare Neo" pitchFamily="34" charset="-122"/>
+                          <a:cs typeface="NanumSquare Neo" pitchFamily="34" charset="-120"/>
                         </a:rPr>
                         <a:t>4×4</a:t>
                       </a:r>
                       <a:endParaRPr lang="en-US" sz="1400" dirty="0">
-                        <a:latin typeface="Malgun Gothic" charset="0"/>
-                        <a:ea typeface="Malgun Gothic" charset="0"/>
-                        <a:cs typeface="Malgun Gothic" charset="0"/>
+                        <a:latin typeface="NanumSquare Neo" charset="0"/>
+                        <a:ea typeface="NanumSquare Neo" charset="0"/>
+                        <a:cs typeface="NanumSquare Neo" charset="0"/>
                       </a:endParaRPr>
                     </a:p>
                   </a:txBody>
@@ -14833,16 +14863,16 @@
                           <a:solidFill>
                             <a:srgbClr val="1D1D1F"/>
                           </a:solidFill>
-                          <a:latin typeface="Malgun Gothic" pitchFamily="34" charset="0"/>
-                          <a:ea typeface="Malgun Gothic" pitchFamily="34" charset="-122"/>
-                          <a:cs typeface="Malgun Gothic" pitchFamily="34" charset="-120"/>
+                          <a:latin typeface="NanumSquare Neo" pitchFamily="34" charset="0"/>
+                          <a:ea typeface="NanumSquare Neo" pitchFamily="34" charset="-122"/>
+                          <a:cs typeface="NanumSquare Neo" pitchFamily="34" charset="-120"/>
                         </a:rPr>
                         <a:t>256×256</a:t>
                       </a:r>
                       <a:endParaRPr lang="en-US" sz="1400" dirty="0">
-                        <a:latin typeface="Malgun Gothic" charset="0"/>
-                        <a:ea typeface="Malgun Gothic" charset="0"/>
-                        <a:cs typeface="Malgun Gothic" charset="0"/>
+                        <a:latin typeface="NanumSquare Neo" charset="0"/>
+                        <a:ea typeface="NanumSquare Neo" charset="0"/>
+                        <a:cs typeface="NanumSquare Neo" charset="0"/>
                       </a:endParaRPr>
                     </a:p>
                   </a:txBody>
@@ -14901,16 +14931,16 @@
                           <a:solidFill>
                             <a:srgbClr val="1D1D1F"/>
                           </a:solidFill>
-                          <a:latin typeface="Malgun Gothic" pitchFamily="34" charset="0"/>
-                          <a:ea typeface="Malgun Gothic" pitchFamily="34" charset="-122"/>
-                          <a:cs typeface="Malgun Gothic" pitchFamily="34" charset="-120"/>
+                          <a:latin typeface="NanumSquare Neo" pitchFamily="34" charset="0"/>
+                          <a:ea typeface="NanumSquare Neo" pitchFamily="34" charset="-122"/>
+                          <a:cs typeface="NanumSquare Neo" pitchFamily="34" charset="-120"/>
                         </a:rPr>
                         <a:t>30~50 cm 근접 작업에서 부품 디테일 인식 필요</a:t>
                       </a:r>
                       <a:endParaRPr lang="en-US" sz="1400" dirty="0">
-                        <a:latin typeface="Malgun Gothic" charset="0"/>
-                        <a:ea typeface="Malgun Gothic" charset="0"/>
-                        <a:cs typeface="Malgun Gothic" charset="0"/>
+                        <a:latin typeface="NanumSquare Neo" charset="0"/>
+                        <a:ea typeface="NanumSquare Neo" charset="0"/>
+                        <a:cs typeface="NanumSquare Neo" charset="0"/>
                       </a:endParaRPr>
                     </a:p>
                   </a:txBody>
@@ -14971,16 +15001,16 @@
                           <a:solidFill>
                             <a:srgbClr val="1D1D1F"/>
                           </a:solidFill>
-                          <a:latin typeface="Malgun Gothic" pitchFamily="34" charset="0"/>
-                          <a:ea typeface="Malgun Gothic" pitchFamily="34" charset="-122"/>
-                          <a:cs typeface="Malgun Gothic" pitchFamily="34" charset="-120"/>
+                          <a:latin typeface="NanumSquare Neo" pitchFamily="34" charset="0"/>
+                          <a:ea typeface="NanumSquare Neo" pitchFamily="34" charset="-122"/>
+                          <a:cs typeface="NanumSquare Neo" pitchFamily="34" charset="-120"/>
                         </a:rPr>
                         <a:t>월드 메모리</a:t>
                       </a:r>
                       <a:endParaRPr lang="en-US" sz="1400" dirty="0">
-                        <a:latin typeface="Malgun Gothic" charset="0"/>
-                        <a:ea typeface="Malgun Gothic" charset="0"/>
-                        <a:cs typeface="Malgun Gothic" charset="0"/>
+                        <a:latin typeface="NanumSquare Neo" charset="0"/>
+                        <a:ea typeface="NanumSquare Neo" charset="0"/>
+                        <a:cs typeface="NanumSquare Neo" charset="0"/>
                       </a:endParaRPr>
                     </a:p>
                   </a:txBody>
@@ -15039,16 +15069,16 @@
                           <a:solidFill>
                             <a:srgbClr val="1D1D1F"/>
                           </a:solidFill>
-                          <a:latin typeface="Malgun Gothic" pitchFamily="34" charset="0"/>
-                          <a:ea typeface="Malgun Gothic" pitchFamily="34" charset="-122"/>
-                          <a:cs typeface="Malgun Gothic" pitchFamily="34" charset="-120"/>
+                          <a:latin typeface="NanumSquare Neo" pitchFamily="34" charset="0"/>
+                          <a:ea typeface="NanumSquare Neo" pitchFamily="34" charset="-122"/>
+                          <a:cs typeface="NanumSquare Neo" pitchFamily="34" charset="-120"/>
                         </a:rPr>
                         <a:t>1024×1024 (좌표 변환·추정기)</a:t>
                       </a:r>
                       <a:endParaRPr lang="en-US" sz="1400" dirty="0">
-                        <a:latin typeface="Malgun Gothic" charset="0"/>
-                        <a:ea typeface="Malgun Gothic" charset="0"/>
-                        <a:cs typeface="Malgun Gothic" charset="0"/>
+                        <a:latin typeface="NanumSquare Neo" charset="0"/>
+                        <a:ea typeface="NanumSquare Neo" charset="0"/>
+                        <a:cs typeface="NanumSquare Neo" charset="0"/>
                       </a:endParaRPr>
                     </a:p>
                     <a:p>
@@ -15060,16 +15090,16 @@
                           <a:solidFill>
                             <a:srgbClr val="1D1D1F"/>
                           </a:solidFill>
-                          <a:latin typeface="Malgun Gothic" pitchFamily="34" charset="0"/>
-                          <a:ea typeface="Malgun Gothic" pitchFamily="34" charset="-122"/>
-                          <a:cs typeface="Malgun Gothic" pitchFamily="34" charset="-120"/>
+                          <a:latin typeface="NanumSquare Neo" pitchFamily="34" charset="0"/>
+                          <a:ea typeface="NanumSquare Neo" pitchFamily="34" charset="-122"/>
+                          <a:cs typeface="NanumSquare Neo" pitchFamily="34" charset="-120"/>
                         </a:rPr>
                         <a:t>64×64 (쓰기 경로+메모리 통합)</a:t>
                       </a:r>
                       <a:endParaRPr lang="en-US" sz="1400" dirty="0">
-                        <a:latin typeface="Malgun Gothic" charset="0"/>
-                        <a:ea typeface="Malgun Gothic" charset="0"/>
-                        <a:cs typeface="Malgun Gothic" charset="0"/>
+                        <a:latin typeface="NanumSquare Neo" charset="0"/>
+                        <a:ea typeface="NanumSquare Neo" charset="0"/>
+                        <a:cs typeface="NanumSquare Neo" charset="0"/>
                       </a:endParaRPr>
                     </a:p>
                   </a:txBody>
@@ -15128,16 +15158,16 @@
                           <a:solidFill>
                             <a:srgbClr val="1D1D1F"/>
                           </a:solidFill>
-                          <a:latin typeface="Malgun Gothic" pitchFamily="34" charset="0"/>
-                          <a:ea typeface="Malgun Gothic" pitchFamily="34" charset="-122"/>
-                          <a:cs typeface="Malgun Gothic" pitchFamily="34" charset="-120"/>
+                          <a:latin typeface="NanumSquare Neo" pitchFamily="34" charset="0"/>
+                          <a:ea typeface="NanumSquare Neo" pitchFamily="34" charset="-122"/>
+                          <a:cs typeface="NanumSquare Neo" pitchFamily="34" charset="-120"/>
                         </a:rPr>
                         <a:t>1024×1024</a:t>
                       </a:r>
                       <a:endParaRPr lang="en-US" sz="1400" dirty="0">
-                        <a:latin typeface="Malgun Gothic" charset="0"/>
-                        <a:ea typeface="Malgun Gothic" charset="0"/>
-                        <a:cs typeface="Malgun Gothic" charset="0"/>
+                        <a:latin typeface="NanumSquare Neo" charset="0"/>
+                        <a:ea typeface="NanumSquare Neo" charset="0"/>
+                        <a:cs typeface="NanumSquare Neo" charset="0"/>
                       </a:endParaRPr>
                     </a:p>
                   </a:txBody>
@@ -15196,16 +15226,16 @@
                           <a:solidFill>
                             <a:srgbClr val="1D1D1F"/>
                           </a:solidFill>
-                          <a:latin typeface="Malgun Gothic" pitchFamily="34" charset="0"/>
-                          <a:ea typeface="Malgun Gothic" pitchFamily="34" charset="-122"/>
-                          <a:cs typeface="Malgun Gothic" pitchFamily="34" charset="-120"/>
+                          <a:latin typeface="NanumSquare Neo" pitchFamily="34" charset="0"/>
+                          <a:ea typeface="NanumSquare Neo" pitchFamily="34" charset="-122"/>
+                          <a:cs typeface="NanumSquare Neo" pitchFamily="34" charset="-120"/>
                         </a:rPr>
                         <a:t>회전 180° 이내라 파노라마처럼 무한히 커지지 않음, 패치의 2~4배면 충분</a:t>
                       </a:r>
                       <a:endParaRPr lang="en-US" sz="1400" dirty="0">
-                        <a:latin typeface="Malgun Gothic" charset="0"/>
-                        <a:ea typeface="Malgun Gothic" charset="0"/>
-                        <a:cs typeface="Malgun Gothic" charset="0"/>
+                        <a:latin typeface="NanumSquare Neo" charset="0"/>
+                        <a:ea typeface="NanumSquare Neo" charset="0"/>
+                        <a:cs typeface="NanumSquare Neo" charset="0"/>
                       </a:endParaRPr>
                     </a:p>
                   </a:txBody>
@@ -15266,16 +15296,16 @@
                           <a:solidFill>
                             <a:srgbClr val="1D1D1F"/>
                           </a:solidFill>
-                          <a:latin typeface="Malgun Gothic" pitchFamily="34" charset="0"/>
-                          <a:ea typeface="Malgun Gothic" pitchFamily="34" charset="-122"/>
-                          <a:cs typeface="Malgun Gothic" pitchFamily="34" charset="-120"/>
+                          <a:latin typeface="NanumSquare Neo" pitchFamily="34" charset="0"/>
+                          <a:ea typeface="NanumSquare Neo" pitchFamily="34" charset="-122"/>
+                          <a:cs typeface="NanumSquare Neo" pitchFamily="34" charset="-120"/>
                         </a:rPr>
                         <a:t>회전각 단계</a:t>
                       </a:r>
                       <a:endParaRPr lang="en-US" sz="1400" dirty="0">
-                        <a:latin typeface="Malgun Gothic" charset="0"/>
-                        <a:ea typeface="Malgun Gothic" charset="0"/>
-                        <a:cs typeface="Malgun Gothic" charset="0"/>
+                        <a:latin typeface="NanumSquare Neo" charset="0"/>
+                        <a:ea typeface="NanumSquare Neo" charset="0"/>
+                        <a:cs typeface="NanumSquare Neo" charset="0"/>
                       </a:endParaRPr>
                     </a:p>
                   </a:txBody>
@@ -15334,16 +15364,16 @@
                           <a:solidFill>
                             <a:srgbClr val="1D1D1F"/>
                           </a:solidFill>
-                          <a:latin typeface="Malgun Gothic" pitchFamily="34" charset="0"/>
-                          <a:ea typeface="Malgun Gothic" pitchFamily="34" charset="-122"/>
-                          <a:cs typeface="Malgun Gothic" pitchFamily="34" charset="-120"/>
+                          <a:latin typeface="NanumSquare Neo" pitchFamily="34" charset="0"/>
+                          <a:ea typeface="NanumSquare Neo" pitchFamily="34" charset="-122"/>
+                          <a:cs typeface="NanumSquare Neo" pitchFamily="34" charset="-120"/>
                         </a:rPr>
                         <a:t>1024 (좌표 변환·추정기)</a:t>
                       </a:r>
                       <a:endParaRPr lang="en-US" sz="1400" dirty="0">
-                        <a:latin typeface="Malgun Gothic" charset="0"/>
-                        <a:ea typeface="Malgun Gothic" charset="0"/>
-                        <a:cs typeface="Malgun Gothic" charset="0"/>
+                        <a:latin typeface="NanumSquare Neo" charset="0"/>
+                        <a:ea typeface="NanumSquare Neo" charset="0"/>
+                        <a:cs typeface="NanumSquare Neo" charset="0"/>
                       </a:endParaRPr>
                     </a:p>
                     <a:p>
@@ -15355,16 +15385,16 @@
                           <a:solidFill>
                             <a:srgbClr val="1D1D1F"/>
                           </a:solidFill>
-                          <a:latin typeface="Malgun Gothic" pitchFamily="34" charset="0"/>
-                          <a:ea typeface="Malgun Gothic" pitchFamily="34" charset="-122"/>
-                          <a:cs typeface="Malgun Gothic" pitchFamily="34" charset="-120"/>
+                          <a:latin typeface="NanumSquare Neo" pitchFamily="34" charset="0"/>
+                          <a:ea typeface="NanumSquare Neo" pitchFamily="34" charset="-122"/>
+                          <a:cs typeface="NanumSquare Neo" pitchFamily="34" charset="-120"/>
                         </a:rPr>
                         <a:t>256 (통합)</a:t>
                       </a:r>
                       <a:endParaRPr lang="en-US" sz="1400" dirty="0">
-                        <a:latin typeface="Malgun Gothic" charset="0"/>
-                        <a:ea typeface="Malgun Gothic" charset="0"/>
-                        <a:cs typeface="Malgun Gothic" charset="0"/>
+                        <a:latin typeface="NanumSquare Neo" charset="0"/>
+                        <a:ea typeface="NanumSquare Neo" charset="0"/>
+                        <a:cs typeface="NanumSquare Neo" charset="0"/>
                       </a:endParaRPr>
                     </a:p>
                   </a:txBody>
@@ -15423,16 +15453,16 @@
                           <a:solidFill>
                             <a:srgbClr val="1D1D1F"/>
                           </a:solidFill>
-                          <a:latin typeface="Malgun Gothic" pitchFamily="34" charset="0"/>
-                          <a:ea typeface="Malgun Gothic" pitchFamily="34" charset="-122"/>
-                          <a:cs typeface="Malgun Gothic" pitchFamily="34" charset="-120"/>
+                          <a:latin typeface="NanumSquare Neo" pitchFamily="34" charset="0"/>
+                          <a:ea typeface="NanumSquare Neo" pitchFamily="34" charset="-122"/>
+                          <a:cs typeface="NanumSquare Neo" pitchFamily="34" charset="-120"/>
                         </a:rPr>
                         <a:t>1024</a:t>
                       </a:r>
                       <a:endParaRPr lang="en-US" sz="1400" dirty="0">
-                        <a:latin typeface="Malgun Gothic" charset="0"/>
-                        <a:ea typeface="Malgun Gothic" charset="0"/>
-                        <a:cs typeface="Malgun Gothic" charset="0"/>
+                        <a:latin typeface="NanumSquare Neo" charset="0"/>
+                        <a:ea typeface="NanumSquare Neo" charset="0"/>
+                        <a:cs typeface="NanumSquare Neo" charset="0"/>
                       </a:endParaRPr>
                     </a:p>
                   </a:txBody>
@@ -15491,16 +15521,16 @@
                           <a:solidFill>
                             <a:srgbClr val="1D1D1F"/>
                           </a:solidFill>
-                          <a:latin typeface="Malgun Gothic" pitchFamily="34" charset="0"/>
-                          <a:ea typeface="Malgun Gothic" pitchFamily="34" charset="-122"/>
-                          <a:cs typeface="Malgun Gothic" pitchFamily="34" charset="-120"/>
+                          <a:latin typeface="NanumSquare Neo" pitchFamily="34" charset="0"/>
+                          <a:ea typeface="NanumSquare Neo" pitchFamily="34" charset="-122"/>
+                          <a:cs typeface="NanumSquare Neo" pitchFamily="34" charset="-120"/>
                         </a:rPr>
                         <a:t>약 0.18°/단계(180°/1024), 그립 정밀도</a:t>
                       </a:r>
                       <a:endParaRPr lang="en-US" sz="1400" dirty="0">
-                        <a:latin typeface="Malgun Gothic" charset="0"/>
-                        <a:ea typeface="Malgun Gothic" charset="0"/>
-                        <a:cs typeface="Malgun Gothic" charset="0"/>
+                        <a:latin typeface="NanumSquare Neo" charset="0"/>
+                        <a:ea typeface="NanumSquare Neo" charset="0"/>
+                        <a:cs typeface="NanumSquare Neo" charset="0"/>
                       </a:endParaRPr>
                     </a:p>
                   </a:txBody>
@@ -15607,9 +15637,9 @@
                 <a:solidFill>
                   <a:srgbClr val="0066CC"/>
                 </a:solidFill>
-                <a:latin typeface="Malgun Gothic" pitchFamily="34" charset="0"/>
-                <a:ea typeface="Malgun Gothic" pitchFamily="34" charset="-122"/>
-                <a:cs typeface="Malgun Gothic" pitchFamily="34" charset="-120"/>
+                <a:latin typeface="NanumSquare Neo" pitchFamily="34" charset="0"/>
+                <a:ea typeface="NanumSquare Neo" pitchFamily="34" charset="-122"/>
+                <a:cs typeface="NanumSquare Neo" pitchFamily="34" charset="-120"/>
               </a:rPr>
               <a:t>왜 로봇팔인가</a:t>
             </a:r>
@@ -15646,9 +15676,9 @@
                 <a:solidFill>
                   <a:srgbClr val="1D1D1F"/>
                 </a:solidFill>
-                <a:latin typeface="Malgun Gothic" pitchFamily="34" charset="0"/>
-                <a:ea typeface="Malgun Gothic" pitchFamily="34" charset="-122"/>
-                <a:cs typeface="Malgun Gothic" pitchFamily="34" charset="-120"/>
+                <a:latin typeface="NanumSquare Neo" pitchFamily="34" charset="0"/>
+                <a:ea typeface="NanumSquare Neo" pitchFamily="34" charset="-122"/>
+                <a:cs typeface="NanumSquare Neo" pitchFamily="34" charset="-120"/>
               </a:rPr>
               <a:t>회전만 하고 이동이 없다는 전제와 국소 스캔 동작이 일치한다. 센서 스펙(960×720, 6 mm 렌즈)도 3차 Q&amp;A로 확정됐다.</a:t>
             </a:r>
@@ -15712,9 +15742,9 @@
                 <a:solidFill>
                   <a:srgbClr val="1D1D1F"/>
                 </a:solidFill>
-                <a:latin typeface="Malgun Gothic" pitchFamily="34" charset="0"/>
-                <a:ea typeface="Malgun Gothic" pitchFamily="34" charset="-122"/>
-                <a:cs typeface="Malgun Gothic" pitchFamily="34" charset="-120"/>
+                <a:latin typeface="NanumSquare Neo" pitchFamily="34" charset="0"/>
+                <a:ea typeface="NanumSquare Neo" pitchFamily="34" charset="-122"/>
+                <a:cs typeface="NanumSquare Neo" pitchFamily="34" charset="-120"/>
               </a:rPr>
               <a:t>제외한 시나리오</a:t>
             </a:r>
@@ -15751,9 +15781,9 @@
                 <a:solidFill>
                   <a:srgbClr val="1D1D1F"/>
                 </a:solidFill>
-                <a:latin typeface="Malgun Gothic" pitchFamily="34" charset="0"/>
-                <a:ea typeface="Malgun Gothic" pitchFamily="34" charset="-122"/>
-                <a:cs typeface="Malgun Gothic" pitchFamily="34" charset="-120"/>
+                <a:latin typeface="NanumSquare Neo" pitchFamily="34" charset="0"/>
+                <a:ea typeface="NanumSquare Neo" pitchFamily="34" charset="-122"/>
+                <a:cs typeface="NanumSquare Neo" pitchFamily="34" charset="-120"/>
               </a:rPr>
               <a:t>자율주행: 이동이 지배적이라 전제가 깨짐</a:t>
             </a:r>
@@ -15768,9 +15798,9 @@
                 <a:solidFill>
                   <a:srgbClr val="1D1D1F"/>
                 </a:solidFill>
-                <a:latin typeface="Malgun Gothic" pitchFamily="34" charset="0"/>
-                <a:ea typeface="Malgun Gothic" pitchFamily="34" charset="-122"/>
-                <a:cs typeface="Malgun Gothic" pitchFamily="34" charset="-120"/>
+                <a:latin typeface="NanumSquare Neo" pitchFamily="34" charset="0"/>
+                <a:ea typeface="NanumSquare Neo" pitchFamily="34" charset="-122"/>
+                <a:cs typeface="NanumSquare Neo" pitchFamily="34" charset="-120"/>
               </a:rPr>
               <a:t>PTZ·산업 스캐너: 해상도 확장이 가장 어려워 후순위</a:t>
             </a:r>
@@ -15810,9 +15840,9 @@
                 <a:solidFill>
                   <a:srgbClr val="7A7A7A"/>
                 </a:solidFill>
-                <a:latin typeface="Malgun Gothic"/>
-                <a:ea typeface="Malgun Gothic"/>
-                <a:cs typeface="Malgun Gothic"/>
+                <a:latin typeface="NanumSquare Neo"/>
+                <a:ea typeface="NanumSquare Neo"/>
+                <a:cs typeface="NanumSquare Neo"/>
               </a:defRPr>
             </a:lvl1pPr>
           </a:lstStyle>
@@ -15878,13 +15908,13 @@
               <a:buNone/>
             </a:pPr>
             <a:r>
-              <a:rPr lang="en-US" sz="2600" b="1" spc="-30" kern="0" dirty="0">
+              <a:rPr lang="en-US" sz="2600" b="1" dirty="0">
                 <a:solidFill>
                   <a:srgbClr val="1D1D1F"/>
                 </a:solidFill>
-                <a:latin typeface="Malgun Gothic" pitchFamily="34" charset="0"/>
-                <a:ea typeface="Malgun Gothic" pitchFamily="34" charset="-122"/>
-                <a:cs typeface="Malgun Gothic" pitchFamily="34" charset="-120"/>
+                <a:latin typeface="NanumSquare Neo" pitchFamily="34" charset="0"/>
+                <a:ea typeface="NanumSquare Neo" pitchFamily="34" charset="-122"/>
+                <a:cs typeface="NanumSquare Neo" pitchFamily="34" charset="-120"/>
               </a:rPr>
               <a:t>구조: 1차 송신부 위에 좌표 변환과 월드 메모리를 얹었다</a:t>
             </a:r>
@@ -15948,9 +15978,9 @@
                 <a:solidFill>
                   <a:srgbClr val="1D1D1F"/>
                 </a:solidFill>
-                <a:latin typeface="Malgun Gothic" pitchFamily="34" charset="0"/>
-                <a:ea typeface="Malgun Gothic" pitchFamily="34" charset="-122"/>
-                <a:cs typeface="Malgun Gothic" pitchFamily="34" charset="-120"/>
+                <a:latin typeface="NanumSquare Neo" pitchFamily="34" charset="0"/>
+                <a:ea typeface="NanumSquare Neo" pitchFamily="34" charset="-122"/>
+                <a:cs typeface="NanumSquare Neo" pitchFamily="34" charset="-120"/>
               </a:rPr>
               <a:t>DVS 센서</a:t>
             </a:r>
@@ -15987,9 +16017,9 @@
                 <a:solidFill>
                   <a:srgbClr val="1D1D1F"/>
                 </a:solidFill>
-                <a:latin typeface="Malgun Gothic" pitchFamily="34" charset="0"/>
-                <a:ea typeface="Malgun Gothic" pitchFamily="34" charset="-122"/>
-                <a:cs typeface="Malgun Gothic" pitchFamily="34" charset="-120"/>
+                <a:latin typeface="NanumSquare Neo" pitchFamily="34" charset="0"/>
+                <a:ea typeface="NanumSquare Neo" pitchFamily="34" charset="-122"/>
+                <a:cs typeface="NanumSquare Neo" pitchFamily="34" charset="-120"/>
               </a:rPr>
               <a:t>주소 + 극성</a:t>
             </a:r>
@@ -16004,9 +16034,9 @@
                 <a:solidFill>
                   <a:srgbClr val="1D1D1F"/>
                 </a:solidFill>
-                <a:latin typeface="Malgun Gothic" pitchFamily="34" charset="0"/>
-                <a:ea typeface="Malgun Gothic" pitchFamily="34" charset="-122"/>
-                <a:cs typeface="Malgun Gothic" pitchFamily="34" charset="-120"/>
+                <a:latin typeface="NanumSquare Neo" pitchFamily="34" charset="0"/>
+                <a:ea typeface="NanumSquare Neo" pitchFamily="34" charset="-122"/>
+                <a:cs typeface="NanumSquare Neo" pitchFamily="34" charset="-120"/>
               </a:rPr>
               <a:t>(x, y, pol)</a:t>
             </a:r>
@@ -16070,9 +16100,9 @@
                 <a:solidFill>
                   <a:srgbClr val="1D1D1F"/>
                 </a:solidFill>
-                <a:latin typeface="Malgun Gothic" pitchFamily="34" charset="0"/>
-                <a:ea typeface="Malgun Gothic" pitchFamily="34" charset="-122"/>
-                <a:cs typeface="Malgun Gothic" pitchFamily="34" charset="-120"/>
+                <a:latin typeface="NanumSquare Neo" pitchFamily="34" charset="0"/>
+                <a:ea typeface="NanumSquare Neo" pitchFamily="34" charset="-122"/>
+                <a:cs typeface="NanumSquare Neo" pitchFamily="34" charset="-120"/>
               </a:rPr>
               <a:t>AER 송신부 (1차)</a:t>
             </a:r>
@@ -16109,9 +16139,9 @@
                 <a:solidFill>
                   <a:srgbClr val="1D1D1F"/>
                 </a:solidFill>
-                <a:latin typeface="Malgun Gothic" pitchFamily="34" charset="0"/>
-                <a:ea typeface="Malgun Gothic" pitchFamily="34" charset="-122"/>
-                <a:cs typeface="Malgun Gothic" pitchFamily="34" charset="-120"/>
+                <a:latin typeface="NanumSquare Neo" pitchFamily="34" charset="0"/>
+                <a:ea typeface="NanumSquare Neo" pitchFamily="34" charset="-122"/>
+                <a:cs typeface="NanumSquare Neo" pitchFamily="34" charset="-120"/>
               </a:rPr>
               <a:t>행 비트맵 + 훔치기 버퍼</a:t>
             </a:r>
@@ -16126,9 +16156,9 @@
                 <a:solidFill>
                   <a:srgbClr val="1D1D1F"/>
                 </a:solidFill>
-                <a:latin typeface="Malgun Gothic" pitchFamily="34" charset="0"/>
-                <a:ea typeface="Malgun Gothic" pitchFamily="34" charset="-122"/>
-                <a:cs typeface="Malgun Gothic" pitchFamily="34" charset="-120"/>
+                <a:latin typeface="NanumSquare Neo" pitchFamily="34" charset="0"/>
+                <a:ea typeface="NanumSquare Neo" pitchFamily="34" charset="-122"/>
+                <a:cs typeface="NanumSquare Neo" pitchFamily="34" charset="-120"/>
               </a:rPr>
               <a:t>사이클당 최대 8 이벤트</a:t>
             </a:r>
@@ -16143,9 +16173,9 @@
                 <a:solidFill>
                   <a:srgbClr val="1D1D1F"/>
                 </a:solidFill>
-                <a:latin typeface="Malgun Gothic" pitchFamily="34" charset="0"/>
-                <a:ea typeface="Malgun Gothic" pitchFamily="34" charset="-122"/>
-                <a:cs typeface="Malgun Gothic" pitchFamily="34" charset="-120"/>
+                <a:latin typeface="NanumSquare Neo" pitchFamily="34" charset="0"/>
+                <a:ea typeface="NanumSquare Neo" pitchFamily="34" charset="-122"/>
+                <a:cs typeface="NanumSquare Neo" pitchFamily="34" charset="-120"/>
               </a:rPr>
               <a:t>UZH 실측 손실 0.47%</a:t>
             </a:r>
@@ -16209,9 +16239,9 @@
                 <a:solidFill>
                   <a:srgbClr val="FFFFFF"/>
                 </a:solidFill>
-                <a:latin typeface="Malgun Gothic" pitchFamily="34" charset="0"/>
-                <a:ea typeface="Malgun Gothic" pitchFamily="34" charset="-122"/>
-                <a:cs typeface="Malgun Gothic" pitchFamily="34" charset="-120"/>
+                <a:latin typeface="NanumSquare Neo" pitchFamily="34" charset="0"/>
+                <a:ea typeface="NanumSquare Neo" pitchFamily="34" charset="-122"/>
+                <a:cs typeface="NanumSquare Neo" pitchFamily="34" charset="-120"/>
               </a:rPr>
               <a:t>좌표 변환 ×8 레인</a:t>
             </a:r>
@@ -16248,9 +16278,9 @@
                 <a:solidFill>
                   <a:srgbClr val="FFFFFF"/>
                 </a:solidFill>
-                <a:latin typeface="Malgun Gothic" pitchFamily="34" charset="0"/>
-                <a:ea typeface="Malgun Gothic" pitchFamily="34" charset="-122"/>
-                <a:cs typeface="Malgun Gothic" pitchFamily="34" charset="-120"/>
+                <a:latin typeface="NanumSquare Neo" pitchFamily="34" charset="0"/>
+                <a:ea typeface="NanumSquare Neo" pitchFamily="34" charset="-122"/>
+                <a:cs typeface="NanumSquare Neo" pitchFamily="34" charset="-120"/>
               </a:rPr>
               <a:t>RMCM: 4096가지</a:t>
             </a:r>
@@ -16265,9 +16295,9 @@
                 <a:solidFill>
                   <a:srgbClr val="FFFFFF"/>
                 </a:solidFill>
-                <a:latin typeface="Malgun Gothic" pitchFamily="34" charset="0"/>
-                <a:ea typeface="Malgun Gothic" pitchFamily="34" charset="-122"/>
-                <a:cs typeface="Malgun Gothic" pitchFamily="34" charset="-120"/>
+                <a:latin typeface="NanumSquare Neo" pitchFamily="34" charset="0"/>
+                <a:ea typeface="NanumSquare Neo" pitchFamily="34" charset="-122"/>
+                <a:cs typeface="NanumSquare Neo" pitchFamily="34" charset="-120"/>
               </a:rPr>
               <a:t>표 하나로 대체</a:t>
             </a:r>
@@ -16282,9 +16312,9 @@
                 <a:solidFill>
                   <a:srgbClr val="FFFFFF"/>
                 </a:solidFill>
-                <a:latin typeface="Malgun Gothic" pitchFamily="34" charset="0"/>
-                <a:ea typeface="Malgun Gothic" pitchFamily="34" charset="-122"/>
-                <a:cs typeface="Malgun Gothic" pitchFamily="34" charset="-120"/>
+                <a:latin typeface="NanumSquare Neo" pitchFamily="34" charset="0"/>
+                <a:ea typeface="NanumSquare Neo" pitchFamily="34" charset="-122"/>
+                <a:cs typeface="NanumSquare Neo" pitchFamily="34" charset="-120"/>
               </a:rPr>
               <a:t>곱셈기 없음</a:t>
             </a:r>
@@ -16348,9 +16378,9 @@
                 <a:solidFill>
                   <a:srgbClr val="1D1D1F"/>
                 </a:solidFill>
-                <a:latin typeface="Malgun Gothic" pitchFamily="34" charset="0"/>
-                <a:ea typeface="Malgun Gothic" pitchFamily="34" charset="-122"/>
-                <a:cs typeface="Malgun Gothic" pitchFamily="34" charset="-120"/>
+                <a:latin typeface="NanumSquare Neo" pitchFamily="34" charset="0"/>
+                <a:ea typeface="NanumSquare Neo" pitchFamily="34" charset="-122"/>
+                <a:cs typeface="NanumSquare Neo" pitchFamily="34" charset="-120"/>
               </a:rPr>
               <a:t>월드 메모리 쓰기</a:t>
             </a:r>
@@ -16387,9 +16417,9 @@
                 <a:solidFill>
                   <a:srgbClr val="1D1D1F"/>
                 </a:solidFill>
-                <a:latin typeface="Malgun Gothic" pitchFamily="34" charset="0"/>
-                <a:ea typeface="Malgun Gothic" pitchFamily="34" charset="-122"/>
-                <a:cs typeface="Malgun Gothic" pitchFamily="34" charset="-120"/>
+                <a:latin typeface="NanumSquare Neo" pitchFamily="34" charset="0"/>
+                <a:ea typeface="NanumSquare Neo" pitchFamily="34" charset="-122"/>
+                <a:cs typeface="NanumSquare Neo" pitchFamily="34" charset="-120"/>
               </a:rPr>
               <a:t>레인별 FIFO + 중재</a:t>
             </a:r>
@@ -16404,9 +16434,9 @@
                 <a:solidFill>
                   <a:srgbClr val="1D1D1F"/>
                 </a:solidFill>
-                <a:latin typeface="Malgun Gothic" pitchFamily="34" charset="0"/>
-                <a:ea typeface="Malgun Gothic" pitchFamily="34" charset="-122"/>
-                <a:cs typeface="Malgun Gothic" pitchFamily="34" charset="-120"/>
+                <a:latin typeface="NanumSquare Neo" pitchFamily="34" charset="0"/>
+                <a:ea typeface="NanumSquare Neo" pitchFamily="34" charset="-122"/>
+                <a:cs typeface="NanumSquare Neo" pitchFamily="34" charset="-120"/>
               </a:rPr>
               <a:t>단일 쓰기 포트</a:t>
             </a:r>
@@ -16470,9 +16500,9 @@
                 <a:solidFill>
                   <a:srgbClr val="FFFFFF"/>
                 </a:solidFill>
-                <a:latin typeface="Malgun Gothic" pitchFamily="34" charset="0"/>
-                <a:ea typeface="Malgun Gothic" pitchFamily="34" charset="-122"/>
-                <a:cs typeface="Malgun Gothic" pitchFamily="34" charset="-120"/>
+                <a:latin typeface="NanumSquare Neo" pitchFamily="34" charset="0"/>
+                <a:ea typeface="NanumSquare Neo" pitchFamily="34" charset="-122"/>
+                <a:cs typeface="NanumSquare Neo" pitchFamily="34" charset="-120"/>
               </a:rPr>
               <a:t>월드 메모리</a:t>
             </a:r>
@@ -16509,9 +16539,9 @@
                 <a:solidFill>
                   <a:srgbClr val="FFFFFF"/>
                 </a:solidFill>
-                <a:latin typeface="Malgun Gothic" pitchFamily="34" charset="0"/>
-                <a:ea typeface="Malgun Gothic" pitchFamily="34" charset="-122"/>
-                <a:cs typeface="Malgun Gothic" pitchFamily="34" charset="-120"/>
+                <a:latin typeface="NanumSquare Neo" pitchFamily="34" charset="0"/>
+                <a:ea typeface="NanumSquare Neo" pitchFamily="34" charset="-122"/>
+                <a:cs typeface="NanumSquare Neo" pitchFamily="34" charset="-120"/>
               </a:rPr>
               <a:t>행 클록 게이팅</a:t>
             </a:r>
@@ -16526,9 +16556,9 @@
                 <a:solidFill>
                   <a:srgbClr val="FFFFFF"/>
                 </a:solidFill>
-                <a:latin typeface="Malgun Gothic" pitchFamily="34" charset="0"/>
-                <a:ea typeface="Malgun Gothic" pitchFamily="34" charset="-122"/>
-                <a:cs typeface="Malgun Gothic" pitchFamily="34" charset="-120"/>
+                <a:latin typeface="NanumSquare Neo" pitchFamily="34" charset="0"/>
+                <a:ea typeface="NanumSquare Neo" pitchFamily="34" charset="-122"/>
+                <a:cs typeface="NanumSquare Neo" pitchFamily="34" charset="-120"/>
               </a:rPr>
               <a:t>읽기 포트</a:t>
             </a:r>
@@ -16688,9 +16718,9 @@
                 <a:solidFill>
                   <a:srgbClr val="FFFFFF"/>
                 </a:solidFill>
-                <a:latin typeface="Malgun Gothic" pitchFamily="34" charset="0"/>
-                <a:ea typeface="Malgun Gothic" pitchFamily="34" charset="-122"/>
-                <a:cs typeface="Malgun Gothic" pitchFamily="34" charset="-120"/>
+                <a:latin typeface="NanumSquare Neo" pitchFamily="34" charset="0"/>
+                <a:ea typeface="NanumSquare Neo" pitchFamily="34" charset="-122"/>
+                <a:cs typeface="NanumSquare Neo" pitchFamily="34" charset="-120"/>
               </a:rPr>
               <a:t>회전각 θ</a:t>
             </a:r>
@@ -16727,9 +16757,9 @@
                 <a:solidFill>
                   <a:srgbClr val="FFFFFF"/>
                 </a:solidFill>
-                <a:latin typeface="Malgun Gothic" pitchFamily="34" charset="0"/>
-                <a:ea typeface="Malgun Gothic" pitchFamily="34" charset="-122"/>
-                <a:cs typeface="Malgun Gothic" pitchFamily="34" charset="-120"/>
+                <a:latin typeface="NanumSquare Neo" pitchFamily="34" charset="0"/>
+                <a:ea typeface="NanumSquare Neo" pitchFamily="34" charset="-122"/>
+                <a:cs typeface="NanumSquare Neo" pitchFamily="34" charset="-120"/>
               </a:rPr>
               <a:t>외부 공급 또는</a:t>
             </a:r>
@@ -16744,9 +16774,9 @@
                 <a:solidFill>
                   <a:srgbClr val="FFFFFF"/>
                 </a:solidFill>
-                <a:latin typeface="Malgun Gothic" pitchFamily="34" charset="0"/>
-                <a:ea typeface="Malgun Gothic" pitchFamily="34" charset="-122"/>
-                <a:cs typeface="Malgun Gothic" pitchFamily="34" charset="-120"/>
+                <a:latin typeface="NanumSquare Neo" pitchFamily="34" charset="0"/>
+                <a:ea typeface="NanumSquare Neo" pitchFamily="34" charset="-122"/>
+                <a:cs typeface="NanumSquare Neo" pitchFamily="34" charset="-120"/>
               </a:rPr>
               <a:t>추정기(Bayes/CMax)</a:t>
             </a:r>
@@ -16834,9 +16864,9 @@
                 <a:solidFill>
                   <a:srgbClr val="0066CC"/>
                 </a:solidFill>
-                <a:latin typeface="Malgun Gothic" pitchFamily="34" charset="0"/>
-                <a:ea typeface="Malgun Gothic" pitchFamily="34" charset="-122"/>
-                <a:cs typeface="Malgun Gothic" pitchFamily="34" charset="-120"/>
+                <a:latin typeface="NanumSquare Neo" pitchFamily="34" charset="0"/>
+                <a:ea typeface="NanumSquare Neo" pitchFamily="34" charset="-122"/>
+                <a:cs typeface="NanumSquare Neo" pitchFamily="34" charset="-120"/>
               </a:rPr>
               <a:t>Blink: 입력이 없으면 코어 클록 차단</a:t>
             </a:r>
@@ -16873,9 +16903,9 @@
                 <a:solidFill>
                   <a:srgbClr val="1D1D1F"/>
                 </a:solidFill>
-                <a:latin typeface="Malgun Gothic" pitchFamily="34" charset="0"/>
-                <a:ea typeface="Malgun Gothic" pitchFamily="34" charset="-122"/>
-                <a:cs typeface="Malgun Gothic" pitchFamily="34" charset="-120"/>
+                <a:latin typeface="NanumSquare Neo" pitchFamily="34" charset="0"/>
+                <a:ea typeface="NanumSquare Neo" pitchFamily="34" charset="-122"/>
+                <a:cs typeface="NanumSquare Neo" pitchFamily="34" charset="-120"/>
               </a:rPr>
               <a:t>메모리는 자체 행 게이팅으로 항상 읽기 가능</a:t>
             </a:r>
@@ -16912,9 +16942,9 @@
                 <a:solidFill>
                   <a:srgbClr val="1D1D1F"/>
                 </a:solidFill>
-                <a:latin typeface="Malgun Gothic" pitchFamily="34" charset="0"/>
-                <a:ea typeface="Malgun Gothic" pitchFamily="34" charset="-122"/>
-                <a:cs typeface="Malgun Gothic" pitchFamily="34" charset="-120"/>
+                <a:latin typeface="NanumSquare Neo" pitchFamily="34" charset="0"/>
+                <a:ea typeface="NanumSquare Neo" pitchFamily="34" charset="-122"/>
+                <a:cs typeface="NanumSquare Neo" pitchFamily="34" charset="-120"/>
               </a:rPr>
               <a:t>핵심 선택 3가지: ① 계산 대신 표 ② 쓰기 포트 하나로 직렬화 ③ 메모리를 지배적 비용으로 보고 클록을 끄는 구조</a:t>
             </a:r>
@@ -16954,9 +16984,9 @@
                 <a:solidFill>
                   <a:srgbClr val="7A7A7A"/>
                 </a:solidFill>
-                <a:latin typeface="Malgun Gothic"/>
-                <a:ea typeface="Malgun Gothic"/>
-                <a:cs typeface="Malgun Gothic"/>
+                <a:latin typeface="NanumSquare Neo"/>
+                <a:ea typeface="NanumSquare Neo"/>
+                <a:cs typeface="NanumSquare Neo"/>
               </a:defRPr>
             </a:lvl1pPr>
           </a:lstStyle>
@@ -17022,13 +17052,13 @@
               <a:buNone/>
             </a:pPr>
             <a:r>
-              <a:rPr lang="en-US" sz="2600" b="1" spc="-30" kern="0" dirty="0">
+              <a:rPr lang="en-US" sz="2600" b="1" dirty="0">
                 <a:solidFill>
                   <a:srgbClr val="1D1D1F"/>
                 </a:solidFill>
-                <a:latin typeface="Malgun Gothic" pitchFamily="34" charset="0"/>
-                <a:ea typeface="Malgun Gothic" pitchFamily="34" charset="-122"/>
-                <a:cs typeface="Malgun Gothic" pitchFamily="34" charset="-120"/>
+                <a:latin typeface="NanumSquare Neo" pitchFamily="34" charset="0"/>
+                <a:ea typeface="NanumSquare Neo" pitchFamily="34" charset="-122"/>
+                <a:cs typeface="NanumSquare Neo" pitchFamily="34" charset="-120"/>
               </a:rPr>
               <a:t>좌표 변환은 계산을 줄이지 않고 아예 표로 바꿨다</a:t>
             </a:r>
@@ -17108,16 +17138,16 @@
                           <a:solidFill>
                             <a:srgbClr val="1D1D1F"/>
                           </a:solidFill>
-                          <a:latin typeface="Malgun Gothic" pitchFamily="34" charset="0"/>
-                          <a:ea typeface="Malgun Gothic" pitchFamily="34" charset="-122"/>
-                          <a:cs typeface="Malgun Gothic" pitchFamily="34" charset="-120"/>
+                          <a:latin typeface="NanumSquare Neo" pitchFamily="34" charset="0"/>
+                          <a:ea typeface="NanumSquare Neo" pitchFamily="34" charset="-122"/>
+                          <a:cs typeface="NanumSquare Neo" pitchFamily="34" charset="-120"/>
                         </a:rPr>
                         <a:t>200 MHz 타이밍 여유</a:t>
                       </a:r>
                       <a:endParaRPr lang="en-US" sz="1300" dirty="0">
-                        <a:latin typeface="Malgun Gothic" charset="0"/>
-                        <a:ea typeface="Malgun Gothic" charset="0"/>
-                        <a:cs typeface="Malgun Gothic" charset="0"/>
+                        <a:latin typeface="NanumSquare Neo" charset="0"/>
+                        <a:ea typeface="NanumSquare Neo" charset="0"/>
+                        <a:cs typeface="NanumSquare Neo" charset="0"/>
                       </a:endParaRPr>
                     </a:p>
                   </a:txBody>
@@ -17176,16 +17206,16 @@
                           <a:solidFill>
                             <a:srgbClr val="1D1D1F"/>
                           </a:solidFill>
-                          <a:latin typeface="Malgun Gothic" pitchFamily="34" charset="0"/>
-                          <a:ea typeface="Malgun Gothic" pitchFamily="34" charset="-122"/>
-                          <a:cs typeface="Malgun Gothic" pitchFamily="34" charset="-120"/>
+                          <a:latin typeface="NanumSquare Neo" pitchFamily="34" charset="0"/>
+                          <a:ea typeface="NanumSquare Neo" pitchFamily="34" charset="-122"/>
+                          <a:cs typeface="NanumSquare Neo" pitchFamily="34" charset="-120"/>
                         </a:rPr>
                         <a:t>슬랙</a:t>
                       </a:r>
                       <a:endParaRPr lang="en-US" sz="1300" dirty="0">
-                        <a:latin typeface="Malgun Gothic" charset="0"/>
-                        <a:ea typeface="Malgun Gothic" charset="0"/>
-                        <a:cs typeface="Malgun Gothic" charset="0"/>
+                        <a:latin typeface="NanumSquare Neo" charset="0"/>
+                        <a:ea typeface="NanumSquare Neo" charset="0"/>
+                        <a:cs typeface="NanumSquare Neo" charset="0"/>
                       </a:endParaRPr>
                     </a:p>
                   </a:txBody>
@@ -17246,16 +17276,16 @@
                           <a:solidFill>
                             <a:srgbClr val="1D1D1F"/>
                           </a:solidFill>
-                          <a:latin typeface="Malgun Gothic" pitchFamily="34" charset="0"/>
-                          <a:ea typeface="Malgun Gothic" pitchFamily="34" charset="-122"/>
-                          <a:cs typeface="Malgun Gothic" pitchFamily="34" charset="-120"/>
+                          <a:latin typeface="NanumSquare Neo" pitchFamily="34" charset="0"/>
+                          <a:ea typeface="NanumSquare Neo" pitchFamily="34" charset="-122"/>
+                          <a:cs typeface="NanumSquare Neo" pitchFamily="34" charset="-120"/>
                         </a:rPr>
                         <a:t>직접 행렬곱</a:t>
                       </a:r>
                       <a:endParaRPr lang="en-US" sz="1300" dirty="0">
-                        <a:latin typeface="Malgun Gothic" charset="0"/>
-                        <a:ea typeface="Malgun Gothic" charset="0"/>
-                        <a:cs typeface="Malgun Gothic" charset="0"/>
+                        <a:latin typeface="NanumSquare Neo" charset="0"/>
+                        <a:ea typeface="NanumSquare Neo" charset="0"/>
+                        <a:cs typeface="NanumSquare Neo" charset="0"/>
                       </a:endParaRPr>
                     </a:p>
                   </a:txBody>
@@ -17314,16 +17344,16 @@
                           <a:solidFill>
                             <a:srgbClr val="1D1D1F"/>
                           </a:solidFill>
-                          <a:latin typeface="Malgun Gothic" pitchFamily="34" charset="0"/>
-                          <a:ea typeface="Malgun Gothic" pitchFamily="34" charset="-122"/>
-                          <a:cs typeface="Malgun Gothic" pitchFamily="34" charset="-120"/>
+                          <a:latin typeface="NanumSquare Neo" pitchFamily="34" charset="0"/>
+                          <a:ea typeface="NanumSquare Neo" pitchFamily="34" charset="-122"/>
+                          <a:cs typeface="NanumSquare Neo" pitchFamily="34" charset="-120"/>
                         </a:rPr>
                         <a:t>+1 ps (턱걸이)</a:t>
                       </a:r>
                       <a:endParaRPr lang="en-US" sz="1300" dirty="0">
-                        <a:latin typeface="Malgun Gothic" charset="0"/>
-                        <a:ea typeface="Malgun Gothic" charset="0"/>
-                        <a:cs typeface="Malgun Gothic" charset="0"/>
+                        <a:latin typeface="NanumSquare Neo" charset="0"/>
+                        <a:ea typeface="NanumSquare Neo" charset="0"/>
+                        <a:cs typeface="NanumSquare Neo" charset="0"/>
                       </a:endParaRPr>
                     </a:p>
                   </a:txBody>
@@ -17384,16 +17414,16 @@
                           <a:solidFill>
                             <a:srgbClr val="1D1D1F"/>
                           </a:solidFill>
-                          <a:latin typeface="Malgun Gothic" pitchFamily="34" charset="0"/>
-                          <a:ea typeface="Malgun Gothic" pitchFamily="34" charset="-122"/>
-                          <a:cs typeface="Malgun Gothic" pitchFamily="34" charset="-120"/>
+                          <a:latin typeface="NanumSquare Neo" pitchFamily="34" charset="0"/>
+                          <a:ea typeface="NanumSquare Neo" pitchFamily="34" charset="-122"/>
+                          <a:cs typeface="NanumSquare Neo" pitchFamily="34" charset="-120"/>
                         </a:rPr>
                         <a:t>CORDIC</a:t>
                       </a:r>
                       <a:endParaRPr lang="en-US" sz="1300" dirty="0">
-                        <a:latin typeface="Malgun Gothic" charset="0"/>
-                        <a:ea typeface="Malgun Gothic" charset="0"/>
-                        <a:cs typeface="Malgun Gothic" charset="0"/>
+                        <a:latin typeface="NanumSquare Neo" charset="0"/>
+                        <a:ea typeface="NanumSquare Neo" charset="0"/>
+                        <a:cs typeface="NanumSquare Neo" charset="0"/>
                       </a:endParaRPr>
                     </a:p>
                   </a:txBody>
@@ -17452,16 +17482,16 @@
                           <a:solidFill>
                             <a:srgbClr val="1D1D1F"/>
                           </a:solidFill>
-                          <a:latin typeface="Malgun Gothic" pitchFamily="34" charset="0"/>
-                          <a:ea typeface="Malgun Gothic" pitchFamily="34" charset="-122"/>
-                          <a:cs typeface="Malgun Gothic" pitchFamily="34" charset="-120"/>
+                          <a:latin typeface="NanumSquare Neo" pitchFamily="34" charset="0"/>
+                          <a:ea typeface="NanumSquare Neo" pitchFamily="34" charset="-122"/>
+                          <a:cs typeface="NanumSquare Neo" pitchFamily="34" charset="-120"/>
                         </a:rPr>
                         <a:t>−252 ps (위반)</a:t>
                       </a:r>
                       <a:endParaRPr lang="en-US" sz="1300" dirty="0">
-                        <a:latin typeface="Malgun Gothic" charset="0"/>
-                        <a:ea typeface="Malgun Gothic" charset="0"/>
-                        <a:cs typeface="Malgun Gothic" charset="0"/>
+                        <a:latin typeface="NanumSquare Neo" charset="0"/>
+                        <a:ea typeface="NanumSquare Neo" charset="0"/>
+                        <a:cs typeface="NanumSquare Neo" charset="0"/>
                       </a:endParaRPr>
                     </a:p>
                   </a:txBody>
@@ -17522,16 +17552,16 @@
                           <a:solidFill>
                             <a:srgbClr val="1D1D1F"/>
                           </a:solidFill>
-                          <a:latin typeface="Malgun Gothic" pitchFamily="34" charset="0"/>
-                          <a:ea typeface="Malgun Gothic" pitchFamily="34" charset="-122"/>
-                          <a:cs typeface="Malgun Gothic" pitchFamily="34" charset="-120"/>
+                          <a:latin typeface="NanumSquare Neo" pitchFamily="34" charset="0"/>
+                          <a:ea typeface="NanumSquare Neo" pitchFamily="34" charset="-122"/>
+                          <a:cs typeface="NanumSquare Neo" pitchFamily="34" charset="-120"/>
                         </a:rPr>
                         <a:t>RMCM</a:t>
                       </a:r>
                       <a:endParaRPr lang="en-US" sz="1300" dirty="0">
-                        <a:latin typeface="Malgun Gothic" charset="0"/>
-                        <a:ea typeface="Malgun Gothic" charset="0"/>
-                        <a:cs typeface="Malgun Gothic" charset="0"/>
+                        <a:latin typeface="NanumSquare Neo" charset="0"/>
+                        <a:ea typeface="NanumSquare Neo" charset="0"/>
+                        <a:cs typeface="NanumSquare Neo" charset="0"/>
                       </a:endParaRPr>
                     </a:p>
                   </a:txBody>
@@ -17590,16 +17620,16 @@
                           <a:solidFill>
                             <a:srgbClr val="1D1D1F"/>
                           </a:solidFill>
-                          <a:latin typeface="Malgun Gothic" pitchFamily="34" charset="0"/>
-                          <a:ea typeface="Malgun Gothic" pitchFamily="34" charset="-122"/>
-                          <a:cs typeface="Malgun Gothic" pitchFamily="34" charset="-120"/>
+                          <a:latin typeface="NanumSquare Neo" pitchFamily="34" charset="0"/>
+                          <a:ea typeface="NanumSquare Neo" pitchFamily="34" charset="-122"/>
+                          <a:cs typeface="NanumSquare Neo" pitchFamily="34" charset="-120"/>
                         </a:rPr>
                         <a:t>+2,187 ps</a:t>
                       </a:r>
                       <a:endParaRPr lang="en-US" sz="1300" dirty="0">
-                        <a:latin typeface="Malgun Gothic" charset="0"/>
-                        <a:ea typeface="Malgun Gothic" charset="0"/>
-                        <a:cs typeface="Malgun Gothic" charset="0"/>
+                        <a:latin typeface="NanumSquare Neo" charset="0"/>
+                        <a:ea typeface="NanumSquare Neo" charset="0"/>
+                        <a:cs typeface="NanumSquare Neo" charset="0"/>
                       </a:endParaRPr>
                     </a:p>
                   </a:txBody>
@@ -17679,9 +17709,9 @@
                 <a:solidFill>
                   <a:srgbClr val="7A7A7A"/>
                 </a:solidFill>
-                <a:latin typeface="Malgun Gothic" pitchFamily="34" charset="0"/>
-                <a:ea typeface="Malgun Gothic" pitchFamily="34" charset="-122"/>
-                <a:cs typeface="Malgun Gothic" pitchFamily="34" charset="-120"/>
+                <a:latin typeface="NanumSquare Neo" pitchFamily="34" charset="0"/>
+                <a:ea typeface="NanumSquare Neo" pitchFamily="34" charset="-122"/>
+                <a:cs typeface="NanumSquare Neo" pitchFamily="34" charset="-120"/>
               </a:rPr>
               <a:t>Genus 합성, 5 ns, GPDK045. 입력 4096가지(4×4 로컬 좌표 × 256각도) 기준. RMCM은 직접 행렬곱과 bit-exact로 같은 값을 냄(근사 오차 0).</a:t>
             </a:r>
@@ -17745,9 +17775,9 @@
                 <a:solidFill>
                   <a:srgbClr val="FFFFFF"/>
                 </a:solidFill>
-                <a:latin typeface="Malgun Gothic" pitchFamily="34" charset="0"/>
-                <a:ea typeface="Malgun Gothic" pitchFamily="34" charset="-122"/>
-                <a:cs typeface="Malgun Gothic" pitchFamily="34" charset="-120"/>
+                <a:latin typeface="NanumSquare Neo" pitchFamily="34" charset="0"/>
+                <a:ea typeface="NanumSquare Neo" pitchFamily="34" charset="-122"/>
+                <a:cs typeface="NanumSquare Neo" pitchFamily="34" charset="-120"/>
               </a:rPr>
               <a:t>곱셈기를 없애는 것이 항상 이득은 아니다. 입력 후보가 몇 가지로 좁을 때는 계산을 없애고 표로 대체하는 쪽이 이겼다. (이 결론은 입력 공간이 큰 경우엔 달라질 수 있다.)</a:t>
             </a:r>
@@ -17787,9 +17817,9 @@
                 <a:solidFill>
                   <a:srgbClr val="7A7A7A"/>
                 </a:solidFill>
-                <a:latin typeface="Malgun Gothic"/>
-                <a:ea typeface="Malgun Gothic"/>
-                <a:cs typeface="Malgun Gothic"/>
+                <a:latin typeface="NanumSquare Neo"/>
+                <a:ea typeface="NanumSquare Neo"/>
+                <a:cs typeface="NanumSquare Neo"/>
               </a:defRPr>
             </a:lvl1pPr>
           </a:lstStyle>
@@ -17855,13 +17885,13 @@
               <a:buNone/>
             </a:pPr>
             <a:r>
-              <a:rPr lang="en-US" sz="2600" b="1" spc="-30" kern="0" dirty="0">
+              <a:rPr lang="en-US" sz="2600" b="1" dirty="0">
                 <a:solidFill>
                   <a:srgbClr val="1D1D1F"/>
                 </a:solidFill>
-                <a:latin typeface="Malgun Gothic" pitchFamily="34" charset="0"/>
-                <a:ea typeface="Malgun Gothic" pitchFamily="34" charset="-122"/>
-                <a:cs typeface="Malgun Gothic" pitchFamily="34" charset="-120"/>
+                <a:latin typeface="NanumSquare Neo" pitchFamily="34" charset="0"/>
+                <a:ea typeface="NanumSquare Neo" pitchFamily="34" charset="-122"/>
+                <a:cs typeface="NanumSquare Neo" pitchFamily="34" charset="-120"/>
               </a:rPr>
               <a:t>검증: 소프트웨어 기준값과 비트 단위로 모두 일치했다</a:t>
             </a:r>
@@ -17910,16 +17940,16 @@
                           <a:solidFill>
                             <a:srgbClr val="1D1D1F"/>
                           </a:solidFill>
-                          <a:latin typeface="Malgun Gothic" pitchFamily="34" charset="0"/>
-                          <a:ea typeface="Malgun Gothic" pitchFamily="34" charset="-122"/>
-                          <a:cs typeface="Malgun Gothic" pitchFamily="34" charset="-120"/>
+                          <a:latin typeface="NanumSquare Neo" pitchFamily="34" charset="0"/>
+                          <a:ea typeface="NanumSquare Neo" pitchFamily="34" charset="-122"/>
+                          <a:cs typeface="NanumSquare Neo" pitchFamily="34" charset="-120"/>
                         </a:rPr>
                         <a:t>검증 항목</a:t>
                       </a:r>
                       <a:endParaRPr lang="en-US" sz="1300" dirty="0">
-                        <a:latin typeface="Malgun Gothic" charset="0"/>
-                        <a:ea typeface="Malgun Gothic" charset="0"/>
-                        <a:cs typeface="Malgun Gothic" charset="0"/>
+                        <a:latin typeface="NanumSquare Neo" charset="0"/>
+                        <a:ea typeface="NanumSquare Neo" charset="0"/>
+                        <a:cs typeface="NanumSquare Neo" charset="0"/>
                       </a:endParaRPr>
                     </a:p>
                   </a:txBody>
@@ -17978,16 +18008,16 @@
                           <a:solidFill>
                             <a:srgbClr val="1D1D1F"/>
                           </a:solidFill>
-                          <a:latin typeface="Malgun Gothic" pitchFamily="34" charset="0"/>
-                          <a:ea typeface="Malgun Gothic" pitchFamily="34" charset="-122"/>
-                          <a:cs typeface="Malgun Gothic" pitchFamily="34" charset="-120"/>
+                          <a:latin typeface="NanumSquare Neo" pitchFamily="34" charset="0"/>
+                          <a:ea typeface="NanumSquare Neo" pitchFamily="34" charset="-122"/>
+                          <a:cs typeface="NanumSquare Neo" pitchFamily="34" charset="-120"/>
                         </a:rPr>
                         <a:t>범위</a:t>
                       </a:r>
                       <a:endParaRPr lang="en-US" sz="1300" dirty="0">
-                        <a:latin typeface="Malgun Gothic" charset="0"/>
-                        <a:ea typeface="Malgun Gothic" charset="0"/>
-                        <a:cs typeface="Malgun Gothic" charset="0"/>
+                        <a:latin typeface="NanumSquare Neo" charset="0"/>
+                        <a:ea typeface="NanumSquare Neo" charset="0"/>
+                        <a:cs typeface="NanumSquare Neo" charset="0"/>
                       </a:endParaRPr>
                     </a:p>
                   </a:txBody>
@@ -18046,16 +18076,16 @@
                           <a:solidFill>
                             <a:srgbClr val="1D1D1F"/>
                           </a:solidFill>
-                          <a:latin typeface="Malgun Gothic" pitchFamily="34" charset="0"/>
-                          <a:ea typeface="Malgun Gothic" pitchFamily="34" charset="-122"/>
-                          <a:cs typeface="Malgun Gothic" pitchFamily="34" charset="-120"/>
+                          <a:latin typeface="NanumSquare Neo" pitchFamily="34" charset="0"/>
+                          <a:ea typeface="NanumSquare Neo" pitchFamily="34" charset="-122"/>
+                          <a:cs typeface="NanumSquare Neo" pitchFamily="34" charset="-120"/>
                         </a:rPr>
                         <a:t>결과</a:t>
                       </a:r>
                       <a:endParaRPr lang="en-US" sz="1300" dirty="0">
-                        <a:latin typeface="Malgun Gothic" charset="0"/>
-                        <a:ea typeface="Malgun Gothic" charset="0"/>
-                        <a:cs typeface="Malgun Gothic" charset="0"/>
+                        <a:latin typeface="NanumSquare Neo" charset="0"/>
+                        <a:ea typeface="NanumSquare Neo" charset="0"/>
+                        <a:cs typeface="NanumSquare Neo" charset="0"/>
                       </a:endParaRPr>
                     </a:p>
                   </a:txBody>
@@ -18116,16 +18146,16 @@
                           <a:solidFill>
                             <a:srgbClr val="1D1D1F"/>
                           </a:solidFill>
-                          <a:latin typeface="Malgun Gothic" pitchFamily="34" charset="0"/>
-                          <a:ea typeface="Malgun Gothic" pitchFamily="34" charset="-122"/>
-                          <a:cs typeface="Malgun Gothic" pitchFamily="34" charset="-120"/>
+                          <a:latin typeface="NanumSquare Neo" pitchFamily="34" charset="0"/>
+                          <a:ea typeface="NanumSquare Neo" pitchFamily="34" charset="-122"/>
+                          <a:cs typeface="NanumSquare Neo" pitchFamily="34" charset="-120"/>
                         </a:rPr>
                         <a:t>좌표 변환 전수 검사 (RMCM RTL)</a:t>
                       </a:r>
                       <a:endParaRPr lang="en-US" sz="1300" dirty="0">
-                        <a:latin typeface="Malgun Gothic" charset="0"/>
-                        <a:ea typeface="Malgun Gothic" charset="0"/>
-                        <a:cs typeface="Malgun Gothic" charset="0"/>
+                        <a:latin typeface="NanumSquare Neo" charset="0"/>
+                        <a:ea typeface="NanumSquare Neo" charset="0"/>
+                        <a:cs typeface="NanumSquare Neo" charset="0"/>
                       </a:endParaRPr>
                     </a:p>
                   </a:txBody>
@@ -18184,16 +18214,16 @@
                           <a:solidFill>
                             <a:srgbClr val="1D1D1F"/>
                           </a:solidFill>
-                          <a:latin typeface="Malgun Gothic" pitchFamily="34" charset="0"/>
-                          <a:ea typeface="Malgun Gothic" pitchFamily="34" charset="-122"/>
-                          <a:cs typeface="Malgun Gothic" pitchFamily="34" charset="-120"/>
+                          <a:latin typeface="NanumSquare Neo" pitchFamily="34" charset="0"/>
+                          <a:ea typeface="NanumSquare Neo" pitchFamily="34" charset="-122"/>
+                          <a:cs typeface="NanumSquare Neo" pitchFamily="34" charset="-120"/>
                         </a:rPr>
                         <a:t>16 로컬 좌표 × 1024각도 = 16,384가지</a:t>
                       </a:r>
                       <a:endParaRPr lang="en-US" sz="1300" dirty="0">
-                        <a:latin typeface="Malgun Gothic" charset="0"/>
-                        <a:ea typeface="Malgun Gothic" charset="0"/>
-                        <a:cs typeface="Malgun Gothic" charset="0"/>
+                        <a:latin typeface="NanumSquare Neo" charset="0"/>
+                        <a:ea typeface="NanumSquare Neo" charset="0"/>
+                        <a:cs typeface="NanumSquare Neo" charset="0"/>
                       </a:endParaRPr>
                     </a:p>
                   </a:txBody>
@@ -18252,16 +18282,16 @@
                           <a:solidFill>
                             <a:srgbClr val="0066CC"/>
                           </a:solidFill>
-                          <a:latin typeface="Malgun Gothic" pitchFamily="34" charset="0"/>
-                          <a:ea typeface="Malgun Gothic" pitchFamily="34" charset="-122"/>
-                          <a:cs typeface="Malgun Gothic" pitchFamily="34" charset="-120"/>
+                          <a:latin typeface="NanumSquare Neo" pitchFamily="34" charset="0"/>
+                          <a:ea typeface="NanumSquare Neo" pitchFamily="34" charset="-122"/>
+                          <a:cs typeface="NanumSquare Neo" pitchFamily="34" charset="-120"/>
                         </a:rPr>
                         <a:t>16,384/16,384 일치</a:t>
                       </a:r>
                       <a:endParaRPr lang="en-US" sz="1300" dirty="0">
-                        <a:latin typeface="Malgun Gothic" charset="0"/>
-                        <a:ea typeface="Malgun Gothic" charset="0"/>
-                        <a:cs typeface="Malgun Gothic" charset="0"/>
+                        <a:latin typeface="NanumSquare Neo" charset="0"/>
+                        <a:ea typeface="NanumSquare Neo" charset="0"/>
+                        <a:cs typeface="NanumSquare Neo" charset="0"/>
                       </a:endParaRPr>
                     </a:p>
                   </a:txBody>
@@ -18322,16 +18352,16 @@
                           <a:solidFill>
                             <a:srgbClr val="1D1D1F"/>
                           </a:solidFill>
-                          <a:latin typeface="Malgun Gothic" pitchFamily="34" charset="0"/>
-                          <a:ea typeface="Malgun Gothic" pitchFamily="34" charset="-122"/>
-                          <a:cs typeface="Malgun Gothic" pitchFamily="34" charset="-120"/>
+                          <a:latin typeface="NanumSquare Neo" pitchFamily="34" charset="0"/>
+                          <a:ea typeface="NanumSquare Neo" pitchFamily="34" charset="-122"/>
+                          <a:cs typeface="NanumSquare Neo" pitchFamily="34" charset="-120"/>
                         </a:rPr>
                         <a:t>실제 이벤트 재생 (UZH, 통합 회로)</a:t>
                       </a:r>
                       <a:endParaRPr lang="en-US" sz="1300" dirty="0">
-                        <a:latin typeface="Malgun Gothic" charset="0"/>
-                        <a:ea typeface="Malgun Gothic" charset="0"/>
-                        <a:cs typeface="Malgun Gothic" charset="0"/>
+                        <a:latin typeface="NanumSquare Neo" charset="0"/>
+                        <a:ea typeface="NanumSquare Neo" charset="0"/>
+                        <a:cs typeface="NanumSquare Neo" charset="0"/>
                       </a:endParaRPr>
                     </a:p>
                   </a:txBody>
@@ -18390,16 +18420,16 @@
                           <a:solidFill>
                             <a:srgbClr val="1D1D1F"/>
                           </a:solidFill>
-                          <a:latin typeface="Malgun Gothic" pitchFamily="34" charset="0"/>
-                          <a:ea typeface="Malgun Gothic" pitchFamily="34" charset="-122"/>
-                          <a:cs typeface="Malgun Gothic" pitchFamily="34" charset="-120"/>
+                          <a:latin typeface="NanumSquare Neo" pitchFamily="34" charset="0"/>
+                          <a:ea typeface="NanumSquare Neo" pitchFamily="34" charset="-122"/>
+                          <a:cs typeface="NanumSquare Neo" pitchFamily="34" charset="-120"/>
                         </a:rPr>
                         <a:t>8,503개 이벤트 + 실제 자세</a:t>
                       </a:r>
                       <a:endParaRPr lang="en-US" sz="1300" dirty="0">
-                        <a:latin typeface="Malgun Gothic" charset="0"/>
-                        <a:ea typeface="Malgun Gothic" charset="0"/>
-                        <a:cs typeface="Malgun Gothic" charset="0"/>
+                        <a:latin typeface="NanumSquare Neo" charset="0"/>
+                        <a:ea typeface="NanumSquare Neo" charset="0"/>
+                        <a:cs typeface="NanumSquare Neo" charset="0"/>
                       </a:endParaRPr>
                     </a:p>
                   </a:txBody>
@@ -18458,16 +18488,16 @@
                           <a:solidFill>
                             <a:srgbClr val="0066CC"/>
                           </a:solidFill>
-                          <a:latin typeface="Malgun Gothic" pitchFamily="34" charset="0"/>
-                          <a:ea typeface="Malgun Gothic" pitchFamily="34" charset="-122"/>
-                          <a:cs typeface="Malgun Gothic" pitchFamily="34" charset="-120"/>
+                          <a:latin typeface="NanumSquare Neo" pitchFamily="34" charset="0"/>
+                          <a:ea typeface="NanumSquare Neo" pitchFamily="34" charset="-122"/>
+                          <a:cs typeface="NanumSquare Neo" pitchFamily="34" charset="-120"/>
                         </a:rPr>
                         <a:t>불일치 0, 손실 0, 90칸 기록</a:t>
                       </a:r>
                       <a:endParaRPr lang="en-US" sz="1300" dirty="0">
-                        <a:latin typeface="Malgun Gothic" charset="0"/>
-                        <a:ea typeface="Malgun Gothic" charset="0"/>
-                        <a:cs typeface="Malgun Gothic" charset="0"/>
+                        <a:latin typeface="NanumSquare Neo" charset="0"/>
+                        <a:ea typeface="NanumSquare Neo" charset="0"/>
+                        <a:cs typeface="NanumSquare Neo" charset="0"/>
                       </a:endParaRPr>
                     </a:p>
                   </a:txBody>
@@ -18528,16 +18558,16 @@
                           <a:solidFill>
                             <a:srgbClr val="1D1D1F"/>
                           </a:solidFill>
-                          <a:latin typeface="Malgun Gothic" pitchFamily="34" charset="0"/>
-                          <a:ea typeface="Malgun Gothic" pitchFamily="34" charset="-122"/>
-                          <a:cs typeface="Malgun Gothic" pitchFamily="34" charset="-120"/>
+                          <a:latin typeface="NanumSquare Neo" pitchFamily="34" charset="0"/>
+                          <a:ea typeface="NanumSquare Neo" pitchFamily="34" charset="-122"/>
+                          <a:cs typeface="NanumSquare Neo" pitchFamily="34" charset="-120"/>
                         </a:rPr>
                         <a:t>무작위 스트레스</a:t>
                       </a:r>
                       <a:endParaRPr lang="en-US" sz="1300" dirty="0">
-                        <a:latin typeface="Malgun Gothic" charset="0"/>
-                        <a:ea typeface="Malgun Gothic" charset="0"/>
-                        <a:cs typeface="Malgun Gothic" charset="0"/>
+                        <a:latin typeface="NanumSquare Neo" charset="0"/>
+                        <a:ea typeface="NanumSquare Neo" charset="0"/>
+                        <a:cs typeface="NanumSquare Neo" charset="0"/>
                       </a:endParaRPr>
                     </a:p>
                   </a:txBody>
@@ -18596,16 +18626,16 @@
                           <a:solidFill>
                             <a:srgbClr val="1D1D1F"/>
                           </a:solidFill>
-                          <a:latin typeface="Malgun Gothic" pitchFamily="34" charset="0"/>
-                          <a:ea typeface="Malgun Gothic" pitchFamily="34" charset="-122"/>
-                          <a:cs typeface="Malgun Gothic" pitchFamily="34" charset="-120"/>
+                          <a:latin typeface="NanumSquare Neo" pitchFamily="34" charset="0"/>
+                          <a:ea typeface="NanumSquare Neo" pitchFamily="34" charset="-122"/>
+                          <a:cs typeface="NanumSquare Neo" pitchFamily="34" charset="-120"/>
                         </a:rPr>
                         <a:t>20,000 사이클, 20% 도착률, 매 사이클 θ 변경</a:t>
                       </a:r>
                       <a:endParaRPr lang="en-US" sz="1300" dirty="0">
-                        <a:latin typeface="Malgun Gothic" charset="0"/>
-                        <a:ea typeface="Malgun Gothic" charset="0"/>
-                        <a:cs typeface="Malgun Gothic" charset="0"/>
+                        <a:latin typeface="NanumSquare Neo" charset="0"/>
+                        <a:ea typeface="NanumSquare Neo" charset="0"/>
+                        <a:cs typeface="NanumSquare Neo" charset="0"/>
                       </a:endParaRPr>
                     </a:p>
                   </a:txBody>
@@ -18664,16 +18694,16 @@
                           <a:solidFill>
                             <a:srgbClr val="0066CC"/>
                           </a:solidFill>
-                          <a:latin typeface="Malgun Gothic" pitchFamily="34" charset="0"/>
-                          <a:ea typeface="Malgun Gothic" pitchFamily="34" charset="-122"/>
-                          <a:cs typeface="Malgun Gothic" pitchFamily="34" charset="-120"/>
+                          <a:latin typeface="NanumSquare Neo" pitchFamily="34" charset="0"/>
+                          <a:ea typeface="NanumSquare Neo" pitchFamily="34" charset="-122"/>
+                          <a:cs typeface="NanumSquare Neo" pitchFamily="34" charset="-120"/>
                         </a:rPr>
                         <a:t>불일치 0 (20,241건), 528칸 기록</a:t>
                       </a:r>
                       <a:endParaRPr lang="en-US" sz="1300" dirty="0">
-                        <a:latin typeface="Malgun Gothic" charset="0"/>
-                        <a:ea typeface="Malgun Gothic" charset="0"/>
-                        <a:cs typeface="Malgun Gothic" charset="0"/>
+                        <a:latin typeface="NanumSquare Neo" charset="0"/>
+                        <a:ea typeface="NanumSquare Neo" charset="0"/>
+                        <a:cs typeface="NanumSquare Neo" charset="0"/>
                       </a:endParaRPr>
                     </a:p>
                   </a:txBody>
@@ -18734,16 +18764,16 @@
                           <a:solidFill>
                             <a:srgbClr val="1D1D1F"/>
                           </a:solidFill>
-                          <a:latin typeface="Malgun Gothic" pitchFamily="34" charset="0"/>
-                          <a:ea typeface="Malgun Gothic" pitchFamily="34" charset="-122"/>
-                          <a:cs typeface="Malgun Gothic" pitchFamily="34" charset="-120"/>
+                          <a:latin typeface="NanumSquare Neo" pitchFamily="34" charset="0"/>
+                          <a:ea typeface="NanumSquare Neo" pitchFamily="34" charset="-122"/>
+                          <a:cs typeface="NanumSquare Neo" pitchFamily="34" charset="-120"/>
                         </a:rPr>
                         <a:t>θ 추정기 RTL vs 오라클</a:t>
                       </a:r>
                       <a:endParaRPr lang="en-US" sz="1300" dirty="0">
-                        <a:latin typeface="Malgun Gothic" charset="0"/>
-                        <a:ea typeface="Malgun Gothic" charset="0"/>
-                        <a:cs typeface="Malgun Gothic" charset="0"/>
+                        <a:latin typeface="NanumSquare Neo" charset="0"/>
+                        <a:ea typeface="NanumSquare Neo" charset="0"/>
+                        <a:cs typeface="NanumSquare Neo" charset="0"/>
                       </a:endParaRPr>
                     </a:p>
                   </a:txBody>
@@ -18802,16 +18832,16 @@
                           <a:solidFill>
                             <a:srgbClr val="1D1D1F"/>
                           </a:solidFill>
-                          <a:latin typeface="Malgun Gothic" pitchFamily="34" charset="0"/>
-                          <a:ea typeface="Malgun Gothic" pitchFamily="34" charset="-122"/>
-                          <a:cs typeface="Malgun Gothic" pitchFamily="34" charset="-120"/>
+                          <a:latin typeface="NanumSquare Neo" pitchFamily="34" charset="0"/>
+                          <a:ea typeface="NanumSquare Neo" pitchFamily="34" charset="-122"/>
+                          <a:cs typeface="NanumSquare Neo" pitchFamily="34" charset="-120"/>
                         </a:rPr>
                         <a:t>UZH 이벤트 300개의 매 추정값 (1024각도, 외부 SRAM 포트 버전)</a:t>
                       </a:r>
                       <a:endParaRPr lang="en-US" sz="1300" dirty="0">
-                        <a:latin typeface="Malgun Gothic" charset="0"/>
-                        <a:ea typeface="Malgun Gothic" charset="0"/>
-                        <a:cs typeface="Malgun Gothic" charset="0"/>
+                        <a:latin typeface="NanumSquare Neo" charset="0"/>
+                        <a:ea typeface="NanumSquare Neo" charset="0"/>
+                        <a:cs typeface="NanumSquare Neo" charset="0"/>
                       </a:endParaRPr>
                     </a:p>
                   </a:txBody>
@@ -18870,16 +18900,16 @@
                           <a:solidFill>
                             <a:srgbClr val="0066CC"/>
                           </a:solidFill>
-                          <a:latin typeface="Malgun Gothic" pitchFamily="34" charset="0"/>
-                          <a:ea typeface="Malgun Gothic" pitchFamily="34" charset="-122"/>
-                          <a:cs typeface="Malgun Gothic" pitchFamily="34" charset="-120"/>
+                          <a:latin typeface="NanumSquare Neo" pitchFamily="34" charset="0"/>
+                          <a:ea typeface="NanumSquare Neo" pitchFamily="34" charset="-122"/>
+                          <a:cs typeface="NanumSquare Neo" pitchFamily="34" charset="-120"/>
                         </a:rPr>
                         <a:t>불일치 0</a:t>
                       </a:r>
                       <a:endParaRPr lang="en-US" sz="1300" dirty="0">
-                        <a:latin typeface="Malgun Gothic" charset="0"/>
-                        <a:ea typeface="Malgun Gothic" charset="0"/>
-                        <a:cs typeface="Malgun Gothic" charset="0"/>
+                        <a:latin typeface="NanumSquare Neo" charset="0"/>
+                        <a:ea typeface="NanumSquare Neo" charset="0"/>
+                        <a:cs typeface="NanumSquare Neo" charset="0"/>
                       </a:endParaRPr>
                     </a:p>
                   </a:txBody>
@@ -18940,16 +18970,16 @@
                           <a:solidFill>
                             <a:srgbClr val="1D1D1F"/>
                           </a:solidFill>
-                          <a:latin typeface="Malgun Gothic" pitchFamily="34" charset="0"/>
-                          <a:ea typeface="Malgun Gothic" pitchFamily="34" charset="-122"/>
-                          <a:cs typeface="Malgun Gothic" pitchFamily="34" charset="-120"/>
+                          <a:latin typeface="NanumSquare Neo" pitchFamily="34" charset="0"/>
+                          <a:ea typeface="NanumSquare Neo" pitchFamily="34" charset="-122"/>
+                          <a:cs typeface="NanumSquare Neo" pitchFamily="34" charset="-120"/>
                         </a:rPr>
                         <a:t>blink vs 항상-켬 코어</a:t>
                       </a:r>
                       <a:endParaRPr lang="en-US" sz="1300" dirty="0">
-                        <a:latin typeface="Malgun Gothic" charset="0"/>
-                        <a:ea typeface="Malgun Gothic" charset="0"/>
-                        <a:cs typeface="Malgun Gothic" charset="0"/>
+                        <a:latin typeface="NanumSquare Neo" charset="0"/>
+                        <a:ea typeface="NanumSquare Neo" charset="0"/>
+                        <a:cs typeface="NanumSquare Neo" charset="0"/>
                       </a:endParaRPr>
                     </a:p>
                   </a:txBody>
@@ -19008,16 +19038,16 @@
                           <a:solidFill>
                             <a:srgbClr val="1D1D1F"/>
                           </a:solidFill>
-                          <a:latin typeface="Malgun Gothic" pitchFamily="34" charset="0"/>
-                          <a:ea typeface="Malgun Gothic" pitchFamily="34" charset="-122"/>
-                          <a:cs typeface="Malgun Gothic" pitchFamily="34" charset="-120"/>
+                          <a:latin typeface="NanumSquare Neo" pitchFamily="34" charset="0"/>
+                          <a:ea typeface="NanumSquare Neo" pitchFamily="34" charset="-122"/>
+                          <a:cs typeface="NanumSquare Neo" pitchFamily="34" charset="-120"/>
                         </a:rPr>
                         <a:t>유휴 100~6000 사이클</a:t>
                       </a:r>
                       <a:endParaRPr lang="en-US" sz="1300" dirty="0">
-                        <a:latin typeface="Malgun Gothic" charset="0"/>
-                        <a:ea typeface="Malgun Gothic" charset="0"/>
-                        <a:cs typeface="Malgun Gothic" charset="0"/>
+                        <a:latin typeface="NanumSquare Neo" charset="0"/>
+                        <a:ea typeface="NanumSquare Neo" charset="0"/>
+                        <a:cs typeface="NanumSquare Neo" charset="0"/>
                       </a:endParaRPr>
                     </a:p>
                   </a:txBody>
@@ -19076,16 +19106,16 @@
                           <a:solidFill>
                             <a:srgbClr val="0066CC"/>
                           </a:solidFill>
-                          <a:latin typeface="Malgun Gothic" pitchFamily="34" charset="0"/>
-                          <a:ea typeface="Malgun Gothic" pitchFamily="34" charset="-122"/>
-                          <a:cs typeface="Malgun Gothic" pitchFamily="34" charset="-120"/>
+                          <a:latin typeface="NanumSquare Neo" pitchFamily="34" charset="0"/>
+                          <a:ea typeface="NanumSquare Neo" pitchFamily="34" charset="-122"/>
+                          <a:cs typeface="NanumSquare Neo" pitchFamily="34" charset="-120"/>
                         </a:rPr>
                         <a:t>overrun·메모리 이미지 불일치 0</a:t>
                       </a:r>
                       <a:endParaRPr lang="en-US" sz="1300" dirty="0">
-                        <a:latin typeface="Malgun Gothic" charset="0"/>
-                        <a:ea typeface="Malgun Gothic" charset="0"/>
-                        <a:cs typeface="Malgun Gothic" charset="0"/>
+                        <a:latin typeface="NanumSquare Neo" charset="0"/>
+                        <a:ea typeface="NanumSquare Neo" charset="0"/>
+                        <a:cs typeface="NanumSquare Neo" charset="0"/>
                       </a:endParaRPr>
                     </a:p>
                   </a:txBody>
@@ -19146,16 +19176,16 @@
                           <a:solidFill>
                             <a:srgbClr val="1D1D1F"/>
                           </a:solidFill>
-                          <a:latin typeface="Malgun Gothic" pitchFamily="34" charset="0"/>
-                          <a:ea typeface="Malgun Gothic" pitchFamily="34" charset="-122"/>
-                          <a:cs typeface="Malgun Gothic" pitchFamily="34" charset="-120"/>
+                          <a:latin typeface="NanumSquare Neo" pitchFamily="34" charset="0"/>
+                          <a:ea typeface="NanumSquare Neo" pitchFamily="34" charset="-122"/>
+                          <a:cs typeface="NanumSquare Neo" pitchFamily="34" charset="-120"/>
                         </a:rPr>
                         <a:t>게이트 시뮬레이션 (P&amp;R 후 netlist + signoff SDF)</a:t>
                       </a:r>
                       <a:endParaRPr lang="en-US" sz="1300" dirty="0">
-                        <a:latin typeface="Malgun Gothic" charset="0"/>
-                        <a:ea typeface="Malgun Gothic" charset="0"/>
-                        <a:cs typeface="Malgun Gothic" charset="0"/>
+                        <a:latin typeface="NanumSquare Neo" charset="0"/>
+                        <a:ea typeface="NanumSquare Neo" charset="0"/>
+                        <a:cs typeface="NanumSquare Neo" charset="0"/>
                       </a:endParaRPr>
                     </a:p>
                   </a:txBody>
@@ -19214,16 +19244,16 @@
                           <a:solidFill>
                             <a:srgbClr val="1D1D1F"/>
                           </a:solidFill>
-                          <a:latin typeface="Malgun Gothic" pitchFamily="34" charset="0"/>
-                          <a:ea typeface="Malgun Gothic" pitchFamily="34" charset="-122"/>
-                          <a:cs typeface="Malgun Gothic" pitchFamily="34" charset="-120"/>
+                          <a:latin typeface="NanumSquare Neo" pitchFamily="34" charset="0"/>
+                          <a:ea typeface="NanumSquare Neo" pitchFamily="34" charset="-122"/>
+                          <a:cs typeface="NanumSquare Neo" pitchFamily="34" charset="-120"/>
                         </a:rPr>
                         <a:t>무작위 6,000사이클 + 메모리 4,096칸 읽기</a:t>
                       </a:r>
                       <a:endParaRPr lang="en-US" sz="1300" dirty="0">
-                        <a:latin typeface="Malgun Gothic" charset="0"/>
-                        <a:ea typeface="Malgun Gothic" charset="0"/>
-                        <a:cs typeface="Malgun Gothic" charset="0"/>
+                        <a:latin typeface="NanumSquare Neo" charset="0"/>
+                        <a:ea typeface="NanumSquare Neo" charset="0"/>
+                        <a:cs typeface="NanumSquare Neo" charset="0"/>
                       </a:endParaRPr>
                     </a:p>
                   </a:txBody>
@@ -19282,16 +19312,16 @@
                           <a:solidFill>
                             <a:srgbClr val="0066CC"/>
                           </a:solidFill>
-                          <a:latin typeface="Malgun Gothic" pitchFamily="34" charset="0"/>
-                          <a:ea typeface="Malgun Gothic" pitchFamily="34" charset="-122"/>
-                          <a:cs typeface="Malgun Gothic" pitchFamily="34" charset="-120"/>
+                          <a:latin typeface="NanumSquare Neo" pitchFamily="34" charset="0"/>
+                          <a:ea typeface="NanumSquare Neo" pitchFamily="34" charset="-122"/>
+                          <a:cs typeface="NanumSquare Neo" pitchFamily="34" charset="-120"/>
                         </a:rPr>
                         <a:t>RTL과 출력 10,097줄 일치</a:t>
                       </a:r>
                       <a:endParaRPr lang="en-US" sz="1300" dirty="0">
-                        <a:latin typeface="Malgun Gothic" charset="0"/>
-                        <a:ea typeface="Malgun Gothic" charset="0"/>
-                        <a:cs typeface="Malgun Gothic" charset="0"/>
+                        <a:latin typeface="NanumSquare Neo" charset="0"/>
+                        <a:ea typeface="NanumSquare Neo" charset="0"/>
+                        <a:cs typeface="NanumSquare Neo" charset="0"/>
                       </a:endParaRPr>
                     </a:p>
                   </a:txBody>
@@ -19398,9 +19428,9 @@
                 <a:solidFill>
                   <a:srgbClr val="0066CC"/>
                 </a:solidFill>
-                <a:latin typeface="Malgun Gothic" pitchFamily="34" charset="0"/>
-                <a:ea typeface="Malgun Gothic" pitchFamily="34" charset="-122"/>
-                <a:cs typeface="Malgun Gothic" pitchFamily="34" charset="-120"/>
+                <a:latin typeface="NanumSquare Neo" pitchFamily="34" charset="0"/>
+                <a:ea typeface="NanumSquare Neo" pitchFamily="34" charset="-122"/>
+                <a:cs typeface="NanumSquare Neo" pitchFamily="34" charset="-120"/>
               </a:rPr>
               <a:t>검증이 잡아낸 실제 버그</a:t>
             </a:r>
@@ -19437,9 +19467,9 @@
                 <a:solidFill>
                   <a:srgbClr val="1D1D1F"/>
                 </a:solidFill>
-                <a:latin typeface="Malgun Gothic" pitchFamily="34" charset="0"/>
-                <a:ea typeface="Malgun Gothic" pitchFamily="34" charset="-122"/>
-                <a:cs typeface="Malgun Gothic" pitchFamily="34" charset="-120"/>
+                <a:latin typeface="NanumSquare Neo" pitchFamily="34" charset="0"/>
+                <a:ea typeface="NanumSquare Neo" pitchFamily="34" charset="-122"/>
+                <a:cs typeface="NanumSquare Neo" pitchFamily="34" charset="-120"/>
               </a:rPr>
               <a:t>① 등록형(registered) 파이프라인에서 θ가 한 박자 늦게 잡히는 것을 몰라 기대값이 어긋남 (테스트벤치, 2회)</a:t>
             </a:r>
@@ -19454,9 +19484,9 @@
                 <a:solidFill>
                   <a:srgbClr val="1D1D1F"/>
                 </a:solidFill>
-                <a:latin typeface="Malgun Gothic" pitchFamily="34" charset="0"/>
-                <a:ea typeface="Malgun Gothic" pitchFamily="34" charset="-122"/>
-                <a:cs typeface="Malgun Gothic" pitchFamily="34" charset="-120"/>
+                <a:latin typeface="NanumSquare Neo" pitchFamily="34" charset="0"/>
+                <a:ea typeface="NanumSquare Neo" pitchFamily="34" charset="-122"/>
+                <a:cs typeface="NanumSquare Neo" pitchFamily="34" charset="-120"/>
               </a:rPr>
               <a:t>② 추정기 RTL: 같은 사이클에 레지스터를 갱신하고 그 값으로 분기해 갱신 전 값을 읽는 버그 → 최종값을 조합논리로 먼저 계산하도록 수정</a:t>
             </a:r>
@@ -19496,9 +19526,9 @@
                 <a:solidFill>
                   <a:srgbClr val="7A7A7A"/>
                 </a:solidFill>
-                <a:latin typeface="Malgun Gothic"/>
-                <a:ea typeface="Malgun Gothic"/>
-                <a:cs typeface="Malgun Gothic"/>
+                <a:latin typeface="NanumSquare Neo"/>
+                <a:ea typeface="NanumSquare Neo"/>
+                <a:cs typeface="NanumSquare Neo"/>
               </a:defRPr>
             </a:lvl1pPr>
           </a:lstStyle>
@@ -19564,13 +19594,13 @@
               <a:buNone/>
             </a:pPr>
             <a:r>
-              <a:rPr lang="en-US" sz="2600" b="1" spc="-30" kern="0" dirty="0">
+              <a:rPr lang="en-US" sz="2600" b="1" dirty="0">
                 <a:solidFill>
                   <a:srgbClr val="1D1D1F"/>
                 </a:solidFill>
-                <a:latin typeface="Malgun Gothic" pitchFamily="34" charset="0"/>
-                <a:ea typeface="Malgun Gothic" pitchFamily="34" charset="-122"/>
-                <a:cs typeface="Malgun Gothic" pitchFamily="34" charset="-120"/>
+                <a:latin typeface="NanumSquare Neo" pitchFamily="34" charset="0"/>
+                <a:ea typeface="NanumSquare Neo" pitchFamily="34" charset="-122"/>
+                <a:cs typeface="NanumSquare Neo" pitchFamily="34" charset="-120"/>
               </a:rPr>
               <a:t>테스트벤치 파형: 이벤트가 레인을 거쳐 월드 주소로 나온다</a:t>
             </a:r>
@@ -19658,9 +19688,9 @@
                 <a:solidFill>
                   <a:srgbClr val="0066CC"/>
                 </a:solidFill>
-                <a:latin typeface="Malgun Gothic" pitchFamily="34" charset="0"/>
-                <a:ea typeface="Malgun Gothic" pitchFamily="34" charset="-122"/>
-                <a:cs typeface="Malgun Gothic" pitchFamily="34" charset="-120"/>
+                <a:latin typeface="NanumSquare Neo" pitchFamily="34" charset="0"/>
+                <a:ea typeface="NanumSquare Neo" pitchFamily="34" charset="-122"/>
+                <a:cs typeface="NanumSquare Neo" pitchFamily="34" charset="-120"/>
               </a:rPr>
               <a:t>읽는 법</a:t>
             </a:r>
@@ -19697,9 +19727,9 @@
                 <a:solidFill>
                   <a:srgbClr val="1D1D1F"/>
                 </a:solidFill>
-                <a:latin typeface="Malgun Gothic" pitchFamily="34" charset="0"/>
-                <a:ea typeface="Malgun Gothic" pitchFamily="34" charset="-122"/>
-                <a:cs typeface="Malgun Gothic" pitchFamily="34" charset="-120"/>
+                <a:latin typeface="NanumSquare Neo" pitchFamily="34" charset="0"/>
+                <a:ea typeface="NanumSquare Neo" pitchFamily="34" charset="-122"/>
+                <a:cs typeface="NanumSquare Neo" pitchFamily="34" charset="-120"/>
               </a:rPr>
               <a:t>• arrival: 16개 소스 중 어디서 이벤트가 왔는가(16비트 비트맵)</a:t>
             </a:r>
@@ -19714,9 +19744,9 @@
                 <a:solidFill>
                   <a:srgbClr val="1D1D1F"/>
                 </a:solidFill>
-                <a:latin typeface="Malgun Gothic" pitchFamily="34" charset="0"/>
-                <a:ea typeface="Malgun Gothic" pitchFamily="34" charset="-122"/>
-                <a:cs typeface="Malgun Gothic" pitchFamily="34" charset="-120"/>
+                <a:latin typeface="NanumSquare Neo" pitchFamily="34" charset="0"/>
+                <a:ea typeface="NanumSquare Neo" pitchFamily="34" charset="-122"/>
+                <a:cs typeface="NanumSquare Neo" pitchFamily="34" charset="-120"/>
               </a:rPr>
               <a:t>• theta_idx: 그 순간의 회전각 번호</a:t>
             </a:r>
@@ -19731,9 +19761,9 @@
                 <a:solidFill>
                   <a:srgbClr val="1D1D1F"/>
                 </a:solidFill>
-                <a:latin typeface="Malgun Gothic" pitchFamily="34" charset="0"/>
-                <a:ea typeface="Malgun Gothic" pitchFamily="34" charset="-122"/>
-                <a:cs typeface="Malgun Gothic" pitchFamily="34" charset="-120"/>
+                <a:latin typeface="NanumSquare Neo" pitchFamily="34" charset="0"/>
+                <a:ea typeface="NanumSquare Neo" pitchFamily="34" charset="-122"/>
+                <a:cs typeface="NanumSquare Neo" pitchFamily="34" charset="-120"/>
               </a:rPr>
               <a:t>• world_we · world_addr: 변환된 월드 좌표(y,x)가 쓰기 포트로 한 건씩 나옴</a:t>
             </a:r>
@@ -19748,9 +19778,9 @@
                 <a:solidFill>
                   <a:srgbClr val="1D1D1F"/>
                 </a:solidFill>
-                <a:latin typeface="Malgun Gothic" pitchFamily="34" charset="0"/>
-                <a:ea typeface="Malgun Gothic" pitchFamily="34" charset="-122"/>
-                <a:cs typeface="Malgun Gothic" pitchFamily="34" charset="-120"/>
+                <a:latin typeface="NanumSquare Neo" pitchFamily="34" charset="0"/>
+                <a:ea typeface="NanumSquare Neo" pitchFamily="34" charset="-122"/>
+                <a:cs typeface="NanumSquare Neo" pitchFamily="34" charset="-120"/>
               </a:rPr>
               <a:t>• overrun은 0으로 유지</a:t>
             </a:r>
@@ -19787,9 +19817,9 @@
                 <a:solidFill>
                   <a:srgbClr val="7A7A7A"/>
                 </a:solidFill>
-                <a:latin typeface="Malgun Gothic" pitchFamily="34" charset="0"/>
-                <a:ea typeface="Malgun Gothic" pitchFamily="34" charset="-122"/>
-                <a:cs typeface="Malgun Gothic" pitchFamily="34" charset="-120"/>
+                <a:latin typeface="NanumSquare Neo" pitchFamily="34" charset="0"/>
+                <a:ea typeface="NanumSquare Neo" pitchFamily="34" charset="-122"/>
+                <a:cs typeface="NanumSquare Neo" pitchFamily="34" charset="-120"/>
               </a:rPr>
               <a:t>RTL 시뮬레이션(Icarus Verilog), 실제 UZH 이벤트 + 실제 자세</a:t>
             </a:r>
@@ -19829,9 +19859,9 @@
                 <a:solidFill>
                   <a:srgbClr val="7A7A7A"/>
                 </a:solidFill>
-                <a:latin typeface="Malgun Gothic"/>
-                <a:ea typeface="Malgun Gothic"/>
-                <a:cs typeface="Malgun Gothic"/>
+                <a:latin typeface="NanumSquare Neo"/>
+                <a:ea typeface="NanumSquare Neo"/>
+                <a:cs typeface="NanumSquare Neo"/>
               </a:defRPr>
             </a:lvl1pPr>
           </a:lstStyle>
@@ -19897,13 +19927,13 @@
               <a:buNone/>
             </a:pPr>
             <a:r>
-              <a:rPr lang="en-US" sz="2600" b="1" spc="-30" kern="0" dirty="0">
+              <a:rPr lang="en-US" sz="2600" b="1" dirty="0">
                 <a:solidFill>
                   <a:srgbClr val="1D1D1F"/>
                 </a:solidFill>
-                <a:latin typeface="Malgun Gothic" pitchFamily="34" charset="0"/>
-                <a:ea typeface="Malgun Gothic" pitchFamily="34" charset="-122"/>
-                <a:cs typeface="Malgun Gothic" pitchFamily="34" charset="-120"/>
+                <a:latin typeface="NanumSquare Neo" pitchFamily="34" charset="0"/>
+                <a:ea typeface="NanumSquare Neo" pitchFamily="34" charset="-122"/>
+                <a:cs typeface="NanumSquare Neo" pitchFamily="34" charset="-120"/>
               </a:rPr>
               <a:t>RTL이 쓴 월드 메모리: 8,503개 이벤트가 90칸에 쌓였다</a:t>
             </a:r>
@@ -19991,9 +20021,9 @@
                 <a:solidFill>
                   <a:srgbClr val="0066CC"/>
                 </a:solidFill>
-                <a:latin typeface="Malgun Gothic" pitchFamily="34" charset="0"/>
-                <a:ea typeface="Malgun Gothic" pitchFamily="34" charset="-122"/>
-                <a:cs typeface="Malgun Gothic" pitchFamily="34" charset="-120"/>
+                <a:latin typeface="NanumSquare Neo" pitchFamily="34" charset="0"/>
+                <a:ea typeface="NanumSquare Neo" pitchFamily="34" charset="-122"/>
+                <a:cs typeface="NanumSquare Neo" pitchFamily="34" charset="-120"/>
               </a:rPr>
               <a:t>UZH 실제 이벤트 재생</a:t>
             </a:r>
@@ -20030,9 +20060,9 @@
                 <a:solidFill>
                   <a:srgbClr val="1D1D1F"/>
                 </a:solidFill>
-                <a:latin typeface="Malgun Gothic" pitchFamily="34" charset="0"/>
-                <a:ea typeface="Malgun Gothic" pitchFamily="34" charset="-122"/>
-                <a:cs typeface="Malgun Gothic" pitchFamily="34" charset="-120"/>
+                <a:latin typeface="NanumSquare Neo" pitchFamily="34" charset="0"/>
+                <a:ea typeface="NanumSquare Neo" pitchFamily="34" charset="-122"/>
+                <a:cs typeface="NanumSquare Neo" pitchFamily="34" charset="-120"/>
               </a:rPr>
               <a:t>이벤트 8,503개 → 쓰기 8,503건, 손실(overrun) 0</a:t>
             </a:r>
@@ -20047,9 +20077,9 @@
                 <a:solidFill>
                   <a:srgbClr val="1D1D1F"/>
                 </a:solidFill>
-                <a:latin typeface="Malgun Gothic" pitchFamily="34" charset="0"/>
-                <a:ea typeface="Malgun Gothic" pitchFamily="34" charset="-122"/>
-                <a:cs typeface="Malgun Gothic" pitchFamily="34" charset="-120"/>
+                <a:latin typeface="NanumSquare Neo" pitchFamily="34" charset="0"/>
+                <a:ea typeface="NanumSquare Neo" pitchFamily="34" charset="-122"/>
+                <a:cs typeface="NanumSquare Neo" pitchFamily="34" charset="-120"/>
               </a:rPr>
               <a:t>쓰기 모듈 입력 8,503건을 독립 계산한 기대값과 대조: 불일치 0</a:t>
             </a:r>
@@ -20064,9 +20094,9 @@
                 <a:solidFill>
                   <a:srgbClr val="1D1D1F"/>
                 </a:solidFill>
-                <a:latin typeface="Malgun Gothic" pitchFamily="34" charset="0"/>
-                <a:ea typeface="Malgun Gothic" pitchFamily="34" charset="-122"/>
-                <a:cs typeface="Malgun Gothic" pitchFamily="34" charset="-120"/>
+                <a:latin typeface="NanumSquare Neo" pitchFamily="34" charset="0"/>
+                <a:ea typeface="NanumSquare Neo" pitchFamily="34" charset="-122"/>
+                <a:cs typeface="NanumSquare Neo" pitchFamily="34" charset="-120"/>
               </a:rPr>
               <a:t>기록된 칸 90/4096</a:t>
             </a:r>
@@ -20130,9 +20160,9 @@
                 <a:solidFill>
                   <a:srgbClr val="0066CC"/>
                 </a:solidFill>
-                <a:latin typeface="Malgun Gothic" pitchFamily="34" charset="0"/>
-                <a:ea typeface="Malgun Gothic" pitchFamily="34" charset="-122"/>
-                <a:cs typeface="Malgun Gothic" pitchFamily="34" charset="-120"/>
+                <a:latin typeface="NanumSquare Neo" pitchFamily="34" charset="0"/>
+                <a:ea typeface="NanumSquare Neo" pitchFamily="34" charset="-122"/>
+                <a:cs typeface="NanumSquare Neo" pitchFamily="34" charset="-120"/>
               </a:rPr>
               <a:t>무작위 스트레스</a:t>
             </a:r>
@@ -20169,9 +20199,9 @@
                 <a:solidFill>
                   <a:srgbClr val="1D1D1F"/>
                 </a:solidFill>
-                <a:latin typeface="Malgun Gothic" pitchFamily="34" charset="0"/>
-                <a:ea typeface="Malgun Gothic" pitchFamily="34" charset="-122"/>
-                <a:cs typeface="Malgun Gothic" pitchFamily="34" charset="-120"/>
+                <a:latin typeface="NanumSquare Neo" pitchFamily="34" charset="0"/>
+                <a:ea typeface="NanumSquare Neo" pitchFamily="34" charset="-122"/>
+                <a:cs typeface="NanumSquare Neo" pitchFamily="34" charset="-120"/>
               </a:rPr>
               <a:t>20,000 사이클, 도착률 20%, 매 사이클 θ 변경</a:t>
             </a:r>
@@ -20186,9 +20216,9 @@
                 <a:solidFill>
                   <a:srgbClr val="1D1D1F"/>
                 </a:solidFill>
-                <a:latin typeface="Malgun Gothic" pitchFamily="34" charset="0"/>
-                <a:ea typeface="Malgun Gothic" pitchFamily="34" charset="-122"/>
-                <a:cs typeface="Malgun Gothic" pitchFamily="34" charset="-120"/>
+                <a:latin typeface="NanumSquare Neo" pitchFamily="34" charset="0"/>
+                <a:ea typeface="NanumSquare Neo" pitchFamily="34" charset="-122"/>
+                <a:cs typeface="NanumSquare Neo" pitchFamily="34" charset="-120"/>
               </a:rPr>
               <a:t>쓰기 20,241건 모두 기대값과 일치, 손실 0</a:t>
             </a:r>
@@ -20203,9 +20233,9 @@
                 <a:solidFill>
                   <a:srgbClr val="1D1D1F"/>
                 </a:solidFill>
-                <a:latin typeface="Malgun Gothic" pitchFamily="34" charset="0"/>
-                <a:ea typeface="Malgun Gothic" pitchFamily="34" charset="-122"/>
-                <a:cs typeface="Malgun Gothic" pitchFamily="34" charset="-120"/>
+                <a:latin typeface="NanumSquare Neo" pitchFamily="34" charset="0"/>
+                <a:ea typeface="NanumSquare Neo" pitchFamily="34" charset="-122"/>
+                <a:cs typeface="NanumSquare Neo" pitchFamily="34" charset="-120"/>
               </a:rPr>
               <a:t>기록된 칸 528/4096 (희소한 실제 트래픽이 놓치는 같은 사이클 충돌 경로를 자극)</a:t>
             </a:r>
@@ -20245,9 +20275,9 @@
                 <a:solidFill>
                   <a:srgbClr val="7A7A7A"/>
                 </a:solidFill>
-                <a:latin typeface="Malgun Gothic"/>
-                <a:ea typeface="Malgun Gothic"/>
-                <a:cs typeface="Malgun Gothic"/>
+                <a:latin typeface="NanumSquare Neo"/>
+                <a:ea typeface="NanumSquare Neo"/>
+                <a:cs typeface="NanumSquare Neo"/>
               </a:defRPr>
             </a:lvl1pPr>
           </a:lstStyle>
@@ -20313,13 +20343,13 @@
               <a:buNone/>
             </a:pPr>
             <a:r>
-              <a:rPr lang="en-US" sz="2600" b="1" spc="-30" kern="0" dirty="0">
+              <a:rPr lang="en-US" sz="2600" b="1" dirty="0">
                 <a:solidFill>
                   <a:srgbClr val="1D1D1F"/>
                 </a:solidFill>
-                <a:latin typeface="Malgun Gothic" pitchFamily="34" charset="0"/>
-                <a:ea typeface="Malgun Gothic" pitchFamily="34" charset="-122"/>
-                <a:cs typeface="Malgun Gothic" pitchFamily="34" charset="-120"/>
+                <a:latin typeface="NanumSquare Neo" pitchFamily="34" charset="0"/>
+                <a:ea typeface="NanumSquare Neo" pitchFamily="34" charset="-122"/>
+                <a:cs typeface="NanumSquare Neo" pitchFamily="34" charset="-120"/>
               </a:rPr>
               <a:t>면적의 70%는 월드 메모리, 그래서 메모리를 먼저 다뤘다</a:t>
             </a:r>
@@ -20376,9 +20406,9 @@
                 <a:solidFill>
                   <a:srgbClr val="1D1D1F"/>
                 </a:solidFill>
-                <a:latin typeface="Malgun Gothic" pitchFamily="34" charset="0"/>
-                <a:ea typeface="Malgun Gothic" pitchFamily="34" charset="-122"/>
-                <a:cs typeface="Malgun Gothic" pitchFamily="34" charset="-120"/>
+                <a:latin typeface="NanumSquare Neo" pitchFamily="34" charset="0"/>
+                <a:ea typeface="NanumSquare Neo" pitchFamily="34" charset="-122"/>
+                <a:cs typeface="NanumSquare Neo" pitchFamily="34" charset="-120"/>
               </a:rPr>
               <a:t>쓰기 모듈 + 레지스터 배열 합성: 211,856 µm², 전체의 98%가 저장소</a:t>
             </a:r>
@@ -20397,9 +20427,9 @@
                 <a:solidFill>
                   <a:srgbClr val="1D1D1F"/>
                 </a:solidFill>
-                <a:latin typeface="Malgun Gothic" pitchFamily="34" charset="0"/>
-                <a:ea typeface="Malgun Gothic" pitchFamily="34" charset="-122"/>
-                <a:cs typeface="Malgun Gothic" pitchFamily="34" charset="-120"/>
+                <a:latin typeface="NanumSquare Neo" pitchFamily="34" charset="0"/>
+                <a:ea typeface="NanumSquare Neo" pitchFamily="34" charset="-122"/>
+                <a:cs typeface="NanumSquare Neo" pitchFamily="34" charset="-120"/>
               </a:rPr>
               <a:t>저장소를 SRAM 인터페이스 밖으로 분리: 35,111 µm² (6.0배 감소). 단, 저장소는 별도 계산 대상</a:t>
             </a:r>
@@ -20418,9 +20448,9 @@
                 <a:solidFill>
                   <a:srgbClr val="1D1D1F"/>
                 </a:solidFill>
-                <a:latin typeface="Malgun Gothic" pitchFamily="34" charset="0"/>
-                <a:ea typeface="Malgun Gothic" pitchFamily="34" charset="-122"/>
-                <a:cs typeface="Malgun Gothic" pitchFamily="34" charset="-120"/>
+                <a:latin typeface="NanumSquare Neo" pitchFamily="34" charset="0"/>
+                <a:ea typeface="NanumSquare Neo" pitchFamily="34" charset="-122"/>
+                <a:cs typeface="NanumSquare Neo" pitchFamily="34" charset="-120"/>
               </a:rPr>
               <a:t>메모리 포함 P&amp;R: 메모리가 면적의 70% 이상, 약 12 µm²/비트</a:t>
             </a:r>
@@ -20439,9 +20469,9 @@
                 <a:solidFill>
                   <a:srgbClr val="1D1D1F"/>
                 </a:solidFill>
-                <a:latin typeface="Malgun Gothic" pitchFamily="34" charset="0"/>
-                <a:ea typeface="Malgun Gothic" pitchFamily="34" charset="-122"/>
-                <a:cs typeface="Malgun Gothic" pitchFamily="34" charset="-120"/>
+                <a:latin typeface="NanumSquare Neo" pitchFamily="34" charset="0"/>
+                <a:ea typeface="NanumSquare Neo" pitchFamily="34" charset="-122"/>
+                <a:cs typeface="NanumSquare Neo" pitchFamily="34" charset="-120"/>
               </a:rPr>
               <a:t>교육용 PDK에는 SRAM 매크로가 없다 → 메모리는 별도 추정 모델이 필요</a:t>
             </a:r>
@@ -20505,9 +20535,9 @@
                 <a:solidFill>
                   <a:srgbClr val="FFFFFF"/>
                 </a:solidFill>
-                <a:latin typeface="Malgun Gothic" pitchFamily="34" charset="0"/>
-                <a:ea typeface="Malgun Gothic" pitchFamily="34" charset="-122"/>
-                <a:cs typeface="Malgun Gothic" pitchFamily="34" charset="-120"/>
+                <a:latin typeface="NanumSquare Neo" pitchFamily="34" charset="0"/>
+                <a:ea typeface="NanumSquare Neo" pitchFamily="34" charset="-122"/>
+                <a:cs typeface="NanumSquare Neo" pitchFamily="34" charset="-120"/>
               </a:rPr>
               <a:t>→ 이후 최적화의 초점은</a:t>
             </a:r>
@@ -20522,9 +20552,9 @@
                 <a:solidFill>
                   <a:srgbClr val="FFFFFF"/>
                 </a:solidFill>
-                <a:latin typeface="Malgun Gothic" pitchFamily="34" charset="0"/>
-                <a:ea typeface="Malgun Gothic" pitchFamily="34" charset="-122"/>
-                <a:cs typeface="Malgun Gothic" pitchFamily="34" charset="-120"/>
+                <a:latin typeface="NanumSquare Neo" pitchFamily="34" charset="0"/>
+                <a:ea typeface="NanumSquare Neo" pitchFamily="34" charset="-122"/>
+                <a:cs typeface="NanumSquare Neo" pitchFamily="34" charset="-120"/>
               </a:rPr>
               <a:t>코어 로직이 아니라</a:t>
             </a:r>
@@ -20539,9 +20569,9 @@
                 <a:solidFill>
                   <a:srgbClr val="FFFFFF"/>
                 </a:solidFill>
-                <a:latin typeface="Malgun Gothic" pitchFamily="34" charset="0"/>
-                <a:ea typeface="Malgun Gothic" pitchFamily="34" charset="-122"/>
-                <a:cs typeface="Malgun Gothic" pitchFamily="34" charset="-120"/>
+                <a:latin typeface="NanumSquare Neo" pitchFamily="34" charset="0"/>
+                <a:ea typeface="NanumSquare Neo" pitchFamily="34" charset="-122"/>
+                <a:cs typeface="NanumSquare Neo" pitchFamily="34" charset="-120"/>
               </a:rPr>
               <a:t>메모리의 클록 동작에 맞췄다.</a:t>
             </a:r>
@@ -20581,9 +20611,9 @@
                 <a:solidFill>
                   <a:srgbClr val="7A7A7A"/>
                 </a:solidFill>
-                <a:latin typeface="Malgun Gothic"/>
-                <a:ea typeface="Malgun Gothic"/>
-                <a:cs typeface="Malgun Gothic"/>
+                <a:latin typeface="NanumSquare Neo"/>
+                <a:ea typeface="NanumSquare Neo"/>
+                <a:cs typeface="NanumSquare Neo"/>
               </a:defRPr>
             </a:lvl1pPr>
           </a:lstStyle>
@@ -20648,8 +20678,8 @@
     </a:clrScheme>
     <a:fontScheme name="Office">
       <a:majorFont>
-        <a:latin typeface="Malgun Gothic"/>
-        <a:ea typeface=""/>
+        <a:latin typeface="NanumSquare Neo"/>
+        <a:ea typeface="NanumSquare Neo"/>
         <a:cs typeface=""/>
         <a:font script="Jpan" typeface="游ゴシック Light"/>
         <a:font script="Hang" typeface="맑은 고딕"/>
@@ -20700,8 +20730,8 @@
         <a:font script="Tfng" typeface="Ebrima"/>
       </a:majorFont>
       <a:minorFont>
-        <a:latin typeface="Malgun Gothic"/>
-        <a:ea typeface=""/>
+        <a:latin typeface="NanumSquare Neo"/>
+        <a:ea typeface="NanumSquare Neo"/>
         <a:cs typeface=""/>
         <a:font script="Jpan" typeface="游ゴシック"/>
         <a:font script="Hang" typeface="맑은 고딕"/>

--- a/submission/REDRED_2차_발표자료.pptx
+++ b/submission/REDRED_2차_발표자료.pptx
@@ -141,8 +141,9 @@
                 <a:solidFill>
                   <a:srgbClr val="1D1D1F"/>
                 </a:solidFill>
-                <a:latin typeface="NanumSquare Neo"/>
-                <a:ea typeface="NanumSquare Neo"/>
+                <a:latin typeface="나눔스퀘어 네오 Regular"/>
+                <a:ea typeface="나눔스퀘어 네오 Regular"/>
+                <a:cs typeface="나눔스퀘어 네오 Regular"/>
               </a:defRPr>
             </a:pPr>
             <a:r>
@@ -150,8 +151,9 @@
                 <a:solidFill>
                   <a:srgbClr val="1D1D1F"/>
                 </a:solidFill>
-                <a:latin typeface="NanumSquare Neo"/>
-                <a:ea typeface="NanumSquare Neo"/>
+                <a:latin typeface="나눔스퀘어 네오 Regular"/>
+                <a:ea typeface="나눔스퀘어 네오 Regular"/>
+                <a:cs typeface="나눔스퀘어 네오 Regular"/>
               </a:rPr>
               <a:t>면적 (µm²)</a:t>
             </a:r>
@@ -200,8 +202,9 @@
                     <a:solidFill>
                       <a:srgbClr val="1D1D1F"/>
                     </a:solidFill>
-                    <a:latin typeface="NanumSquare Neo"/>
-                    <a:ea typeface="NanumSquare Neo"/>
+                    <a:latin typeface="나눔스퀘어 네오 Regular"/>
+                    <a:ea typeface="나눔스퀘어 네오 Regular"/>
+                    <a:cs typeface="나눔스퀘어 네오 Regular"/>
                   </a:defRPr>
                 </a:pPr>
               </a:p>
@@ -296,8 +299,9 @@
                   <a:solidFill>
                     <a:srgbClr val="1D1D1F"/>
                   </a:solidFill>
-                  <a:latin typeface="NanumSquare Neo"/>
-                  <a:ea typeface="NanumSquare Neo"/>
+                  <a:latin typeface="나눔스퀘어 네오 Regular"/>
+                  <a:ea typeface="나눔스퀘어 네오 Regular"/>
+                  <a:cs typeface="나눔스퀘어 네오 Regular"/>
                 </a:defRPr>
               </a:pPr>
             </a:p>
@@ -345,8 +349,9 @@
                 <a:solidFill>
                   <a:srgbClr val="1D1D1F"/>
                 </a:solidFill>
-                <a:latin typeface="NanumSquare Neo"/>
-                <a:ea typeface="NanumSquare Neo"/>
+                <a:latin typeface="나눔스퀘어 네오 Regular"/>
+                <a:ea typeface="나눔스퀘어 네오 Regular"/>
+                <a:cs typeface="나눔스퀘어 네오 Regular"/>
               </a:defRPr>
             </a:pPr>
             <a:endParaRPr lang="en-US"/>
@@ -398,8 +403,9 @@
                 <a:solidFill>
                   <a:srgbClr val="7A7A7A"/>
                 </a:solidFill>
-                <a:latin typeface="NanumSquare Neo"/>
-                <a:ea typeface="NanumSquare Neo"/>
+                <a:latin typeface="나눔스퀘어 네오 Regular"/>
+                <a:ea typeface="나눔스퀘어 네오 Regular"/>
+                <a:cs typeface="나눔스퀘어 네오 Regular"/>
               </a:defRPr>
             </a:pPr>
             <a:endParaRPr lang="en-US"/>
@@ -449,8 +455,9 @@
                 <a:solidFill>
                   <a:srgbClr val="1D1D1F"/>
                 </a:solidFill>
-                <a:latin typeface="NanumSquare Neo"/>
-                <a:ea typeface="NanumSquare Neo"/>
+                <a:latin typeface="나눔스퀘어 네오 Regular"/>
+                <a:ea typeface="나눔스퀘어 네오 Regular"/>
+                <a:cs typeface="나눔스퀘어 네오 Regular"/>
               </a:defRPr>
             </a:pPr>
             <a:r>
@@ -458,8 +465,9 @@
                 <a:solidFill>
                   <a:srgbClr val="1D1D1F"/>
                 </a:solidFill>
-                <a:latin typeface="NanumSquare Neo"/>
-                <a:ea typeface="NanumSquare Neo"/>
+                <a:latin typeface="나눔스퀘어 네오 Regular"/>
+                <a:ea typeface="나눔스퀘어 네오 Regular"/>
+                <a:cs typeface="나눔스퀘어 네오 Regular"/>
               </a:rPr>
               <a:t>전력 (mW)</a:t>
             </a:r>
@@ -508,8 +516,9 @@
                     <a:solidFill>
                       <a:srgbClr val="1D1D1F"/>
                     </a:solidFill>
-                    <a:latin typeface="NanumSquare Neo"/>
-                    <a:ea typeface="NanumSquare Neo"/>
+                    <a:latin typeface="나눔스퀘어 네오 Regular"/>
+                    <a:ea typeface="나눔스퀘어 네오 Regular"/>
+                    <a:cs typeface="나눔스퀘어 네오 Regular"/>
                   </a:defRPr>
                 </a:pPr>
               </a:p>
@@ -604,8 +613,9 @@
                   <a:solidFill>
                     <a:srgbClr val="1D1D1F"/>
                   </a:solidFill>
-                  <a:latin typeface="NanumSquare Neo"/>
-                  <a:ea typeface="NanumSquare Neo"/>
+                  <a:latin typeface="나눔스퀘어 네오 Regular"/>
+                  <a:ea typeface="나눔스퀘어 네오 Regular"/>
+                  <a:cs typeface="나눔스퀘어 네오 Regular"/>
                 </a:defRPr>
               </a:pPr>
             </a:p>
@@ -653,8 +663,9 @@
                 <a:solidFill>
                   <a:srgbClr val="1D1D1F"/>
                 </a:solidFill>
-                <a:latin typeface="NanumSquare Neo"/>
-                <a:ea typeface="NanumSquare Neo"/>
+                <a:latin typeface="나눔스퀘어 네오 Regular"/>
+                <a:ea typeface="나눔스퀘어 네오 Regular"/>
+                <a:cs typeface="나눔스퀘어 네오 Regular"/>
               </a:defRPr>
             </a:pPr>
             <a:endParaRPr lang="en-US"/>
@@ -706,8 +717,9 @@
                 <a:solidFill>
                   <a:srgbClr val="7A7A7A"/>
                 </a:solidFill>
-                <a:latin typeface="NanumSquare Neo"/>
-                <a:ea typeface="NanumSquare Neo"/>
+                <a:latin typeface="나눔스퀘어 네오 Regular"/>
+                <a:ea typeface="나눔스퀘어 네오 Regular"/>
+                <a:cs typeface="나눔스퀘어 네오 Regular"/>
               </a:defRPr>
             </a:pPr>
             <a:endParaRPr lang="en-US"/>
@@ -757,8 +769,9 @@
                 <a:solidFill>
                   <a:srgbClr val="1D1D1F"/>
                 </a:solidFill>
-                <a:latin typeface="NanumSquare Neo"/>
-                <a:ea typeface="NanumSquare Neo"/>
+                <a:latin typeface="나눔스퀘어 네오 Regular"/>
+                <a:ea typeface="나눔스퀘어 네오 Regular"/>
+                <a:cs typeface="나눔스퀘어 네오 Regular"/>
               </a:defRPr>
             </a:pPr>
             <a:r>
@@ -766,8 +779,9 @@
                 <a:solidFill>
                   <a:srgbClr val="1D1D1F"/>
                 </a:solidFill>
-                <a:latin typeface="NanumSquare Neo"/>
-                <a:ea typeface="NanumSquare Neo"/>
+                <a:latin typeface="나눔스퀘어 네오 Regular"/>
+                <a:ea typeface="나눔스퀘어 네오 Regular"/>
+                <a:cs typeface="나눔스퀘어 네오 Regular"/>
               </a:rPr>
               <a:t>P&amp;R 셀 면적 (µm²)</a:t>
             </a:r>
@@ -816,8 +830,9 @@
                     <a:solidFill>
                       <a:srgbClr val="1D1D1F"/>
                     </a:solidFill>
-                    <a:latin typeface="NanumSquare Neo"/>
-                    <a:ea typeface="NanumSquare Neo"/>
+                    <a:latin typeface="나눔스퀘어 네오 Regular"/>
+                    <a:ea typeface="나눔스퀘어 네오 Regular"/>
+                    <a:cs typeface="나눔스퀘어 네오 Regular"/>
                   </a:defRPr>
                 </a:pPr>
               </a:p>
@@ -895,8 +910,9 @@
                   <a:solidFill>
                     <a:srgbClr val="1D1D1F"/>
                   </a:solidFill>
-                  <a:latin typeface="NanumSquare Neo"/>
-                  <a:ea typeface="NanumSquare Neo"/>
+                  <a:latin typeface="나눔스퀘어 네오 Regular"/>
+                  <a:ea typeface="나눔스퀘어 네오 Regular"/>
+                  <a:cs typeface="나눔스퀘어 네오 Regular"/>
                 </a:defRPr>
               </a:pPr>
             </a:p>
@@ -944,8 +960,9 @@
                 <a:solidFill>
                   <a:srgbClr val="1D1D1F"/>
                 </a:solidFill>
-                <a:latin typeface="NanumSquare Neo"/>
-                <a:ea typeface="NanumSquare Neo"/>
+                <a:latin typeface="나눔스퀘어 네오 Regular"/>
+                <a:ea typeface="나눔스퀘어 네오 Regular"/>
+                <a:cs typeface="나눔스퀘어 네오 Regular"/>
               </a:defRPr>
             </a:pPr>
             <a:endParaRPr lang="en-US"/>
@@ -997,8 +1014,9 @@
                 <a:solidFill>
                   <a:srgbClr val="7A7A7A"/>
                 </a:solidFill>
-                <a:latin typeface="NanumSquare Neo"/>
-                <a:ea typeface="NanumSquare Neo"/>
+                <a:latin typeface="나눔스퀘어 네오 Regular"/>
+                <a:ea typeface="나눔스퀘어 네오 Regular"/>
+                <a:cs typeface="나눔스퀘어 네오 Regular"/>
               </a:defRPr>
             </a:pPr>
             <a:endParaRPr lang="en-US"/>
@@ -1048,8 +1066,9 @@
                 <a:solidFill>
                   <a:srgbClr val="1D1D1F"/>
                 </a:solidFill>
-                <a:latin typeface="NanumSquare Neo"/>
-                <a:ea typeface="NanumSquare Neo"/>
+                <a:latin typeface="나눔스퀘어 네오 Regular"/>
+                <a:ea typeface="나눔스퀘어 네오 Regular"/>
+                <a:cs typeface="나눔스퀘어 네오 Regular"/>
               </a:defRPr>
             </a:pPr>
             <a:r>
@@ -1057,8 +1076,9 @@
                 <a:solidFill>
                   <a:srgbClr val="1D1D1F"/>
                 </a:solidFill>
-                <a:latin typeface="NanumSquare Neo"/>
-                <a:ea typeface="NanumSquare Neo"/>
+                <a:latin typeface="나눔스퀘어 네오 Regular"/>
+                <a:ea typeface="나눔스퀘어 네오 Regular"/>
+                <a:cs typeface="나눔스퀘어 네오 Regular"/>
               </a:rPr>
               <a:t>실제 DELTA 활동도 전력 (mW)</a:t>
             </a:r>
@@ -1107,8 +1127,9 @@
                     <a:solidFill>
                       <a:srgbClr val="1D1D1F"/>
                     </a:solidFill>
-                    <a:latin typeface="NanumSquare Neo"/>
-                    <a:ea typeface="NanumSquare Neo"/>
+                    <a:latin typeface="나눔스퀘어 네오 Regular"/>
+                    <a:ea typeface="나눔스퀘어 네오 Regular"/>
+                    <a:cs typeface="나눔스퀘어 네오 Regular"/>
                   </a:defRPr>
                 </a:pPr>
               </a:p>
@@ -1254,8 +1275,9 @@
                   <a:solidFill>
                     <a:srgbClr val="1D1D1F"/>
                   </a:solidFill>
-                  <a:latin typeface="NanumSquare Neo"/>
-                  <a:ea typeface="NanumSquare Neo"/>
+                  <a:latin typeface="나눔스퀘어 네오 Regular"/>
+                  <a:ea typeface="나눔스퀘어 네오 Regular"/>
+                  <a:cs typeface="나눔스퀘어 네오 Regular"/>
                 </a:defRPr>
               </a:pPr>
             </a:p>
@@ -1303,8 +1325,9 @@
                 <a:solidFill>
                   <a:srgbClr val="1D1D1F"/>
                 </a:solidFill>
-                <a:latin typeface="NanumSquare Neo"/>
-                <a:ea typeface="NanumSquare Neo"/>
+                <a:latin typeface="나눔스퀘어 네오 Regular"/>
+                <a:ea typeface="나눔스퀘어 네오 Regular"/>
+                <a:cs typeface="나눔스퀘어 네오 Regular"/>
               </a:defRPr>
             </a:pPr>
             <a:endParaRPr lang="en-US"/>
@@ -1356,8 +1379,9 @@
                 <a:solidFill>
                   <a:srgbClr val="7A7A7A"/>
                 </a:solidFill>
-                <a:latin typeface="NanumSquare Neo"/>
-                <a:ea typeface="NanumSquare Neo"/>
+                <a:latin typeface="나눔스퀘어 네오 Regular"/>
+                <a:ea typeface="나눔스퀘어 네오 Regular"/>
+                <a:cs typeface="나눔스퀘어 네오 Regular"/>
               </a:defRPr>
             </a:pPr>
             <a:endParaRPr lang="en-US"/>
@@ -1407,8 +1431,9 @@
                 <a:solidFill>
                   <a:srgbClr val="1D1D1F"/>
                 </a:solidFill>
-                <a:latin typeface="NanumSquare Neo"/>
-                <a:ea typeface="NanumSquare Neo"/>
+                <a:latin typeface="나눔스퀘어 네오 Regular"/>
+                <a:ea typeface="나눔스퀘어 네오 Regular"/>
+                <a:cs typeface="나눔스퀘어 네오 Regular"/>
               </a:defRPr>
             </a:pPr>
             <a:r>
@@ -1416,8 +1441,9 @@
                 <a:solidFill>
                   <a:srgbClr val="1D1D1F"/>
                 </a:solidFill>
-                <a:latin typeface="NanumSquare Neo"/>
-                <a:ea typeface="NanumSquare Neo"/>
+                <a:latin typeface="나눔스퀘어 네오 Regular"/>
+                <a:ea typeface="나눔스퀘어 네오 Regular"/>
+                <a:cs typeface="나눔스퀘어 네오 Regular"/>
               </a:rPr>
               <a:t>유휴 6000사이클 VCD 전력 (mW)</a:t>
             </a:r>
@@ -1466,8 +1492,9 @@
                     <a:solidFill>
                       <a:srgbClr val="1D1D1F"/>
                     </a:solidFill>
-                    <a:latin typeface="NanumSquare Neo"/>
-                    <a:ea typeface="NanumSquare Neo"/>
+                    <a:latin typeface="나눔스퀘어 네오 Regular"/>
+                    <a:ea typeface="나눔스퀘어 네오 Regular"/>
+                    <a:cs typeface="나눔스퀘어 네오 Regular"/>
                   </a:defRPr>
                 </a:pPr>
               </a:p>
@@ -1545,8 +1572,9 @@
                   <a:solidFill>
                     <a:srgbClr val="1D1D1F"/>
                   </a:solidFill>
-                  <a:latin typeface="NanumSquare Neo"/>
-                  <a:ea typeface="NanumSquare Neo"/>
+                  <a:latin typeface="나눔스퀘어 네오 Regular"/>
+                  <a:ea typeface="나눔스퀘어 네오 Regular"/>
+                  <a:cs typeface="나눔스퀘어 네오 Regular"/>
                 </a:defRPr>
               </a:pPr>
             </a:p>
@@ -1594,8 +1622,9 @@
                 <a:solidFill>
                   <a:srgbClr val="1D1D1F"/>
                 </a:solidFill>
-                <a:latin typeface="NanumSquare Neo"/>
-                <a:ea typeface="NanumSquare Neo"/>
+                <a:latin typeface="나눔스퀘어 네오 Regular"/>
+                <a:ea typeface="나눔스퀘어 네오 Regular"/>
+                <a:cs typeface="나눔스퀘어 네오 Regular"/>
               </a:defRPr>
             </a:pPr>
             <a:endParaRPr lang="en-US"/>
@@ -1647,8 +1676,9 @@
                 <a:solidFill>
                   <a:srgbClr val="7A7A7A"/>
                 </a:solidFill>
-                <a:latin typeface="NanumSquare Neo"/>
-                <a:ea typeface="NanumSquare Neo"/>
+                <a:latin typeface="나눔스퀘어 네오 Regular"/>
+                <a:ea typeface="나눔스퀘어 네오 Regular"/>
+                <a:cs typeface="나눔스퀘어 네오 Regular"/>
               </a:defRPr>
             </a:pPr>
             <a:endParaRPr lang="en-US"/>
@@ -3786,9 +3816,9 @@
                 <a:solidFill>
                   <a:srgbClr val="7A7A7A"/>
                 </a:solidFill>
-                <a:latin typeface="NanumSquare Neo" pitchFamily="34" charset="0"/>
-                <a:ea typeface="NanumSquare Neo" pitchFamily="34" charset="-122"/>
-                <a:cs typeface="NanumSquare Neo" pitchFamily="34" charset="-120"/>
+                <a:latin typeface="나눔스퀘어 네오 Regular" pitchFamily="34" charset="0"/>
+                <a:ea typeface="나눔스퀘어 네오 Regular" pitchFamily="34" charset="-122"/>
+                <a:cs typeface="나눔스퀘어 네오 Regular" pitchFamily="34" charset="-120"/>
               </a:rPr>
               <a:t>팀 REDRED · Digital 2차</a:t>
             </a:r>
@@ -3828,9 +3858,9 @@
                 <a:solidFill>
                   <a:srgbClr val="7A7A7A"/>
                 </a:solidFill>
-                <a:latin typeface="NanumSquare Neo"/>
-                <a:ea typeface="NanumSquare Neo"/>
-                <a:cs typeface="NanumSquare Neo"/>
+                <a:latin typeface="나눔스퀘어 네오 Regular"/>
+                <a:ea typeface="나눔스퀘어 네오 Regular"/>
+                <a:cs typeface="나눔스퀘어 네오 Regular"/>
               </a:defRPr>
             </a:lvl1pPr>
           </a:lstStyle>
@@ -3905,9 +3935,9 @@
                 <a:solidFill>
                   <a:srgbClr val="7A7A7A"/>
                 </a:solidFill>
-                <a:latin typeface="NanumSquare Neo" pitchFamily="34" charset="0"/>
-                <a:ea typeface="NanumSquare Neo" pitchFamily="34" charset="-122"/>
-                <a:cs typeface="NanumSquare Neo" pitchFamily="34" charset="-120"/>
+                <a:latin typeface="나눔스퀘어 네오 Regular" pitchFamily="34" charset="0"/>
+                <a:ea typeface="나눔스퀘어 네오 Regular" pitchFamily="34" charset="-122"/>
+                <a:cs typeface="나눔스퀘어 네오 Regular" pitchFamily="34" charset="-120"/>
               </a:rPr>
               <a:t>팀 REDRED · Digital 2차</a:t>
             </a:r>
@@ -3947,9 +3977,9 @@
                 <a:solidFill>
                   <a:srgbClr val="7A7A7A"/>
                 </a:solidFill>
-                <a:latin typeface="NanumSquare Neo"/>
-                <a:ea typeface="NanumSquare Neo"/>
-                <a:cs typeface="NanumSquare Neo"/>
+                <a:latin typeface="나눔스퀘어 네오 Regular"/>
+                <a:ea typeface="나눔스퀘어 네오 Regular"/>
+                <a:cs typeface="나눔스퀘어 네오 Regular"/>
               </a:defRPr>
             </a:lvl1pPr>
           </a:lstStyle>
@@ -4052,9 +4082,9 @@
                 <a:solidFill>
                   <a:srgbClr val="7A7A7A"/>
                 </a:solidFill>
-                <a:latin typeface="NanumSquare Neo"/>
-                <a:ea typeface="NanumSquare Neo"/>
-                <a:cs typeface="NanumSquare Neo"/>
+                <a:latin typeface="나눔스퀘어 네오 Regular"/>
+                <a:ea typeface="나눔스퀘어 네오 Regular"/>
+                <a:cs typeface="나눔스퀘어 네오 Regular"/>
               </a:defRPr>
             </a:lvl1pPr>
           </a:lstStyle>
@@ -4089,9 +4119,9 @@
           <a:solidFill>
             <a:schemeClr val="tx1"/>
           </a:solidFill>
-          <a:latin typeface="+mj-lt"/>
-          <a:ea typeface="+mj-ea"/>
-          <a:cs typeface="+mj-cs"/>
+          <a:latin typeface="나눔스퀘어 네오 Regular"/>
+          <a:ea typeface="나눔스퀘어 네오 Regular"/>
+          <a:cs typeface="나눔스퀘어 네오 Regular"/>
         </a:defRPr>
       </a:lvl1pPr>
     </p:titleStyle>
@@ -4106,9 +4136,9 @@
           <a:solidFill>
             <a:schemeClr val="tx1"/>
           </a:solidFill>
-          <a:latin typeface="+mn-lt"/>
-          <a:ea typeface="+mn-ea"/>
-          <a:cs typeface="+mn-cs"/>
+          <a:latin typeface="나눔스퀘어 네오 Regular"/>
+          <a:ea typeface="나눔스퀘어 네오 Regular"/>
+          <a:cs typeface="나눔스퀘어 네오 Regular"/>
         </a:defRPr>
       </a:lvl1pPr>
       <a:lvl2pPr marL="742950" indent="-285750" algn="l" defTabSz="914400" rtl="0" eaLnBrk="1" latinLnBrk="0" hangingPunct="1">
@@ -4121,9 +4151,9 @@
           <a:solidFill>
             <a:schemeClr val="tx1"/>
           </a:solidFill>
-          <a:latin typeface="+mn-lt"/>
-          <a:ea typeface="+mn-ea"/>
-          <a:cs typeface="+mn-cs"/>
+          <a:latin typeface="나눔스퀘어 네오 Regular"/>
+          <a:ea typeface="나눔스퀘어 네오 Regular"/>
+          <a:cs typeface="나눔스퀘어 네오 Regular"/>
         </a:defRPr>
       </a:lvl2pPr>
       <a:lvl3pPr marL="1143000" indent="-228600" algn="l" defTabSz="914400" rtl="0" eaLnBrk="1" latinLnBrk="0" hangingPunct="1">
@@ -4136,9 +4166,9 @@
           <a:solidFill>
             <a:schemeClr val="tx1"/>
           </a:solidFill>
-          <a:latin typeface="+mn-lt"/>
-          <a:ea typeface="+mn-ea"/>
-          <a:cs typeface="+mn-cs"/>
+          <a:latin typeface="나눔스퀘어 네오 Regular"/>
+          <a:ea typeface="나눔스퀘어 네오 Regular"/>
+          <a:cs typeface="나눔스퀘어 네오 Regular"/>
         </a:defRPr>
       </a:lvl3pPr>
       <a:lvl4pPr marL="1600200" indent="-228600" algn="l" defTabSz="914400" rtl="0" eaLnBrk="1" latinLnBrk="0" hangingPunct="1">
@@ -4151,9 +4181,9 @@
           <a:solidFill>
             <a:schemeClr val="tx1"/>
           </a:solidFill>
-          <a:latin typeface="+mn-lt"/>
-          <a:ea typeface="+mn-ea"/>
-          <a:cs typeface="+mn-cs"/>
+          <a:latin typeface="나눔스퀘어 네오 Regular"/>
+          <a:ea typeface="나눔스퀘어 네오 Regular"/>
+          <a:cs typeface="나눔스퀘어 네오 Regular"/>
         </a:defRPr>
       </a:lvl4pPr>
       <a:lvl5pPr marL="2057400" indent="-228600" algn="l" defTabSz="914400" rtl="0" eaLnBrk="1" latinLnBrk="0" hangingPunct="1">
@@ -4166,9 +4196,9 @@
           <a:solidFill>
             <a:schemeClr val="tx1"/>
           </a:solidFill>
-          <a:latin typeface="+mn-lt"/>
-          <a:ea typeface="+mn-ea"/>
-          <a:cs typeface="+mn-cs"/>
+          <a:latin typeface="나눔스퀘어 네오 Regular"/>
+          <a:ea typeface="나눔스퀘어 네오 Regular"/>
+          <a:cs typeface="나눔스퀘어 네오 Regular"/>
         </a:defRPr>
       </a:lvl5pPr>
       <a:lvl6pPr marL="2514600" indent="-228600" algn="l" defTabSz="914400" rtl="0" eaLnBrk="1" latinLnBrk="0" hangingPunct="1">
@@ -4181,9 +4211,9 @@
           <a:solidFill>
             <a:schemeClr val="tx1"/>
           </a:solidFill>
-          <a:latin typeface="+mn-lt"/>
-          <a:ea typeface="+mn-ea"/>
-          <a:cs typeface="+mn-cs"/>
+          <a:latin typeface="나눔스퀘어 네오 Regular"/>
+          <a:ea typeface="나눔스퀘어 네오 Regular"/>
+          <a:cs typeface="나눔스퀘어 네오 Regular"/>
         </a:defRPr>
       </a:lvl6pPr>
       <a:lvl7pPr marL="2971800" indent="-228600" algn="l" defTabSz="914400" rtl="0" eaLnBrk="1" latinLnBrk="0" hangingPunct="1">
@@ -4196,9 +4226,9 @@
           <a:solidFill>
             <a:schemeClr val="tx1"/>
           </a:solidFill>
-          <a:latin typeface="+mn-lt"/>
-          <a:ea typeface="+mn-ea"/>
-          <a:cs typeface="+mn-cs"/>
+          <a:latin typeface="나눔스퀘어 네오 Regular"/>
+          <a:ea typeface="나눔스퀘어 네오 Regular"/>
+          <a:cs typeface="나눔스퀘어 네오 Regular"/>
         </a:defRPr>
       </a:lvl7pPr>
       <a:lvl8pPr marL="3429000" indent="-228600" algn="l" defTabSz="914400" rtl="0" eaLnBrk="1" latinLnBrk="0" hangingPunct="1">
@@ -4211,9 +4241,9 @@
           <a:solidFill>
             <a:schemeClr val="tx1"/>
           </a:solidFill>
-          <a:latin typeface="+mn-lt"/>
-          <a:ea typeface="+mn-ea"/>
-          <a:cs typeface="+mn-cs"/>
+          <a:latin typeface="나눔스퀘어 네오 Regular"/>
+          <a:ea typeface="나눔스퀘어 네오 Regular"/>
+          <a:cs typeface="나눔스퀘어 네오 Regular"/>
         </a:defRPr>
       </a:lvl8pPr>
       <a:lvl9pPr marL="3886200" indent="-228600" algn="l" defTabSz="914400" rtl="0" eaLnBrk="1" latinLnBrk="0" hangingPunct="1">
@@ -4226,9 +4256,9 @@
           <a:solidFill>
             <a:schemeClr val="tx1"/>
           </a:solidFill>
-          <a:latin typeface="+mn-lt"/>
-          <a:ea typeface="+mn-ea"/>
-          <a:cs typeface="+mn-cs"/>
+          <a:latin typeface="나눔스퀘어 네오 Regular"/>
+          <a:ea typeface="나눔스퀘어 네오 Regular"/>
+          <a:cs typeface="나눔스퀘어 네오 Regular"/>
         </a:defRPr>
       </a:lvl9pPr>
     </p:bodyStyle>
@@ -4241,9 +4271,9 @@
           <a:solidFill>
             <a:schemeClr val="tx1"/>
           </a:solidFill>
-          <a:latin typeface="+mn-lt"/>
-          <a:ea typeface="+mn-ea"/>
-          <a:cs typeface="+mn-cs"/>
+          <a:latin typeface="나눔스퀘어 네오 Regular"/>
+          <a:ea typeface="나눔스퀘어 네오 Regular"/>
+          <a:cs typeface="나눔스퀘어 네오 Regular"/>
         </a:defRPr>
       </a:lvl1pPr>
       <a:lvl2pPr marL="457200" algn="l" defTabSz="914400" rtl="0" eaLnBrk="1" latinLnBrk="0" hangingPunct="1">
@@ -4251,9 +4281,9 @@
           <a:solidFill>
             <a:schemeClr val="tx1"/>
           </a:solidFill>
-          <a:latin typeface="+mn-lt"/>
-          <a:ea typeface="+mn-ea"/>
-          <a:cs typeface="+mn-cs"/>
+          <a:latin typeface="나눔스퀘어 네오 Regular"/>
+          <a:ea typeface="나눔스퀘어 네오 Regular"/>
+          <a:cs typeface="나눔스퀘어 네오 Regular"/>
         </a:defRPr>
       </a:lvl2pPr>
       <a:lvl3pPr marL="914400" algn="l" defTabSz="914400" rtl="0" eaLnBrk="1" latinLnBrk="0" hangingPunct="1">
@@ -4261,9 +4291,9 @@
           <a:solidFill>
             <a:schemeClr val="tx1"/>
           </a:solidFill>
-          <a:latin typeface="+mn-lt"/>
-          <a:ea typeface="+mn-ea"/>
-          <a:cs typeface="+mn-cs"/>
+          <a:latin typeface="나눔스퀘어 네오 Regular"/>
+          <a:ea typeface="나눔스퀘어 네오 Regular"/>
+          <a:cs typeface="나눔스퀘어 네오 Regular"/>
         </a:defRPr>
       </a:lvl3pPr>
       <a:lvl4pPr marL="1371600" algn="l" defTabSz="914400" rtl="0" eaLnBrk="1" latinLnBrk="0" hangingPunct="1">
@@ -4271,9 +4301,9 @@
           <a:solidFill>
             <a:schemeClr val="tx1"/>
           </a:solidFill>
-          <a:latin typeface="+mn-lt"/>
-          <a:ea typeface="+mn-ea"/>
-          <a:cs typeface="+mn-cs"/>
+          <a:latin typeface="나눔스퀘어 네오 Regular"/>
+          <a:ea typeface="나눔스퀘어 네오 Regular"/>
+          <a:cs typeface="나눔스퀘어 네오 Regular"/>
         </a:defRPr>
       </a:lvl4pPr>
       <a:lvl5pPr marL="1828800" algn="l" defTabSz="914400" rtl="0" eaLnBrk="1" latinLnBrk="0" hangingPunct="1">
@@ -4281,9 +4311,9 @@
           <a:solidFill>
             <a:schemeClr val="tx1"/>
           </a:solidFill>
-          <a:latin typeface="+mn-lt"/>
-          <a:ea typeface="+mn-ea"/>
-          <a:cs typeface="+mn-cs"/>
+          <a:latin typeface="나눔스퀘어 네오 Regular"/>
+          <a:ea typeface="나눔스퀘어 네오 Regular"/>
+          <a:cs typeface="나눔스퀘어 네오 Regular"/>
         </a:defRPr>
       </a:lvl5pPr>
       <a:lvl6pPr marL="2286000" algn="l" defTabSz="914400" rtl="0" eaLnBrk="1" latinLnBrk="0" hangingPunct="1">
@@ -4291,9 +4321,9 @@
           <a:solidFill>
             <a:schemeClr val="tx1"/>
           </a:solidFill>
-          <a:latin typeface="+mn-lt"/>
-          <a:ea typeface="+mn-ea"/>
-          <a:cs typeface="+mn-cs"/>
+          <a:latin typeface="나눔스퀘어 네오 Regular"/>
+          <a:ea typeface="나눔스퀘어 네오 Regular"/>
+          <a:cs typeface="나눔스퀘어 네오 Regular"/>
         </a:defRPr>
       </a:lvl6pPr>
       <a:lvl7pPr marL="2743200" algn="l" defTabSz="914400" rtl="0" eaLnBrk="1" latinLnBrk="0" hangingPunct="1">
@@ -4301,9 +4331,9 @@
           <a:solidFill>
             <a:schemeClr val="tx1"/>
           </a:solidFill>
-          <a:latin typeface="+mn-lt"/>
-          <a:ea typeface="+mn-ea"/>
-          <a:cs typeface="+mn-cs"/>
+          <a:latin typeface="나눔스퀘어 네오 Regular"/>
+          <a:ea typeface="나눔스퀘어 네오 Regular"/>
+          <a:cs typeface="나눔스퀘어 네오 Regular"/>
         </a:defRPr>
       </a:lvl7pPr>
       <a:lvl8pPr marL="3200400" algn="l" defTabSz="914400" rtl="0" eaLnBrk="1" latinLnBrk="0" hangingPunct="1">
@@ -4311,9 +4341,9 @@
           <a:solidFill>
             <a:schemeClr val="tx1"/>
           </a:solidFill>
-          <a:latin typeface="+mn-lt"/>
-          <a:ea typeface="+mn-ea"/>
-          <a:cs typeface="+mn-cs"/>
+          <a:latin typeface="나눔스퀘어 네오 Regular"/>
+          <a:ea typeface="나눔스퀘어 네오 Regular"/>
+          <a:cs typeface="나눔스퀘어 네오 Regular"/>
         </a:defRPr>
       </a:lvl8pPr>
       <a:lvl9pPr marL="3657600" algn="l" defTabSz="914400" rtl="0" eaLnBrk="1" latinLnBrk="0" hangingPunct="1">
@@ -4321,9 +4351,9 @@
           <a:solidFill>
             <a:schemeClr val="tx1"/>
           </a:solidFill>
-          <a:latin typeface="+mn-lt"/>
-          <a:ea typeface="+mn-ea"/>
-          <a:cs typeface="+mn-cs"/>
+          <a:latin typeface="나눔스퀘어 네오 Regular"/>
+          <a:ea typeface="나눔스퀘어 네오 Regular"/>
+          <a:cs typeface="나눔스퀘어 네오 Regular"/>
         </a:defRPr>
       </a:lvl9pPr>
     </p:otherStyle>
@@ -4377,9 +4407,9 @@
                 <a:solidFill>
                   <a:srgbClr val="CCCCCC"/>
                 </a:solidFill>
-                <a:latin typeface="NanumSquare Neo" pitchFamily="34" charset="0"/>
-                <a:ea typeface="NanumSquare Neo" pitchFamily="34" charset="-122"/>
-                <a:cs typeface="NanumSquare Neo" pitchFamily="34" charset="-120"/>
+                <a:latin typeface="나눔스퀘어 네오 Regular" pitchFamily="34" charset="0"/>
+                <a:ea typeface="나눔스퀘어 네오 Regular" pitchFamily="34" charset="-122"/>
+                <a:cs typeface="나눔스퀘어 네오 Regular" pitchFamily="34" charset="-120"/>
               </a:rPr>
               <a:t>2026 전국 대학생 AI 반도체 회로 설계 경진대회 · Digital 트랙 2차 결과</a:t>
             </a:r>
@@ -4412,13 +4442,13 @@
               <a:buNone/>
             </a:pPr>
             <a:r>
-              <a:rPr lang="en-US" sz="4000" b="1" dirty="0">
+              <a:rPr lang="en-US" sz="4000" dirty="0">
                 <a:solidFill>
                   <a:srgbClr val="FFFFFF"/>
                 </a:solidFill>
-                <a:latin typeface="NanumSquare Neo" pitchFamily="34" charset="0"/>
-                <a:ea typeface="NanumSquare Neo" pitchFamily="34" charset="-122"/>
-                <a:cs typeface="NanumSquare Neo" pitchFamily="34" charset="-120"/>
+                <a:latin typeface="나눔스퀘어 네오 Bold" pitchFamily="34" charset="0"/>
+                <a:ea typeface="나눔스퀘어 네오 Bold" pitchFamily="34" charset="-122"/>
+                <a:cs typeface="나눔스퀘어 네오 Bold" pitchFamily="34" charset="-120"/>
               </a:rPr>
               <a:t>회전하는 이벤트 카메라를</a:t>
             </a:r>
@@ -4429,13 +4459,13 @@
               <a:buNone/>
             </a:pPr>
             <a:r>
-              <a:rPr lang="en-US" sz="4000" b="1" dirty="0">
+              <a:rPr lang="en-US" sz="4000" dirty="0">
                 <a:solidFill>
                   <a:srgbClr val="FFFFFF"/>
                 </a:solidFill>
-                <a:latin typeface="NanumSquare Neo" pitchFamily="34" charset="0"/>
-                <a:ea typeface="NanumSquare Neo" pitchFamily="34" charset="-122"/>
-                <a:cs typeface="NanumSquare Neo" pitchFamily="34" charset="-120"/>
+                <a:latin typeface="나눔스퀘어 네오 Bold" pitchFamily="34" charset="0"/>
+                <a:ea typeface="나눔스퀘어 네오 Bold" pitchFamily="34" charset="-122"/>
+                <a:cs typeface="나눔스퀘어 네오 Bold" pitchFamily="34" charset="-120"/>
               </a:rPr>
               <a:t>하나의 월드 지도로 옮기는 저전력 회로</a:t>
             </a:r>
@@ -4472,9 +4502,9 @@
                 <a:solidFill>
                   <a:srgbClr val="2997FF"/>
                 </a:solidFill>
-                <a:latin typeface="NanumSquare Neo" pitchFamily="34" charset="0"/>
-                <a:ea typeface="NanumSquare Neo" pitchFamily="34" charset="-122"/>
-                <a:cs typeface="NanumSquare Neo" pitchFamily="34" charset="-120"/>
+                <a:latin typeface="나눔스퀘어 네오 Regular" pitchFamily="34" charset="0"/>
+                <a:ea typeface="나눔스퀘어 네오 Regular" pitchFamily="34" charset="-122"/>
+                <a:cs typeface="나눔스퀘어 네오 Regular" pitchFamily="34" charset="-120"/>
               </a:rPr>
               <a:t>Event camera world-coordinate transform &amp; world memory (RTL, P&amp;R)</a:t>
             </a:r>
@@ -4511,9 +4541,9 @@
                 <a:solidFill>
                   <a:srgbClr val="CCCCCC"/>
                 </a:solidFill>
-                <a:latin typeface="NanumSquare Neo" pitchFamily="34" charset="0"/>
-                <a:ea typeface="NanumSquare Neo" pitchFamily="34" charset="-122"/>
-                <a:cs typeface="NanumSquare Neo" pitchFamily="34" charset="-120"/>
+                <a:latin typeface="나눔스퀘어 네오 Regular" pitchFamily="34" charset="0"/>
+                <a:ea typeface="나눔스퀘어 네오 Regular" pitchFamily="34" charset="-122"/>
+                <a:cs typeface="나눔스퀘어 네오 Regular" pitchFamily="34" charset="-120"/>
               </a:rPr>
               <a:t>팀 REDRED</a:t>
             </a:r>
@@ -4573,13 +4603,13 @@
               <a:buNone/>
             </a:pPr>
             <a:r>
-              <a:rPr lang="en-US" sz="2600" b="1" dirty="0">
+              <a:rPr lang="en-US" sz="2600" dirty="0">
                 <a:solidFill>
                   <a:srgbClr val="1D1D1F"/>
                 </a:solidFill>
-                <a:latin typeface="NanumSquare Neo" pitchFamily="34" charset="0"/>
-                <a:ea typeface="NanumSquare Neo" pitchFamily="34" charset="-122"/>
-                <a:cs typeface="NanumSquare Neo" pitchFamily="34" charset="-120"/>
+                <a:latin typeface="나눔스퀘어 네오 Bold" pitchFamily="34" charset="0"/>
+                <a:ea typeface="나눔스퀘어 네오 Bold" pitchFamily="34" charset="-122"/>
+                <a:cs typeface="나눔스퀘어 네오 Bold" pitchFamily="34" charset="-120"/>
               </a:rPr>
               <a:t>행 단위 클록 게이팅으로 메모리 전력을 65% 줄였다</a:t>
             </a:r>
@@ -4656,9 +4686,9 @@
                 <a:solidFill>
                   <a:srgbClr val="7A7A7A"/>
                 </a:solidFill>
-                <a:latin typeface="NanumSquare Neo" pitchFamily="34" charset="0"/>
-                <a:ea typeface="NanumSquare Neo" pitchFamily="34" charset="-122"/>
-                <a:cs typeface="NanumSquare Neo" pitchFamily="34" charset="-120"/>
+                <a:latin typeface="나눔스퀘어 네오 Regular" pitchFamily="34" charset="0"/>
+                <a:ea typeface="나눔스퀘어 네오 Regular" pitchFamily="34" charset="-122"/>
+                <a:cs typeface="나눔스퀘어 네오 Regular" pitchFamily="34" charset="-120"/>
               </a:rPr>
               <a:t>RTL 시뮬레이션 파형: 쓰는 행의 게이트 클록만 토글</a:t>
             </a:r>
@@ -4718,13 +4748,13 @@
               <a:buNone/>
             </a:pPr>
             <a:r>
-              <a:rPr lang="en-US" sz="1600" b="1" dirty="0">
+              <a:rPr lang="en-US" sz="1600" dirty="0">
                 <a:solidFill>
                   <a:srgbClr val="0066CC"/>
                 </a:solidFill>
-                <a:latin typeface="NanumSquare Neo" pitchFamily="34" charset="0"/>
-                <a:ea typeface="NanumSquare Neo" pitchFamily="34" charset="-122"/>
-                <a:cs typeface="NanumSquare Neo" pitchFamily="34" charset="-120"/>
+                <a:latin typeface="나눔스퀘어 네오 Bold" pitchFamily="34" charset="0"/>
+                <a:ea typeface="나눔스퀘어 네오 Bold" pitchFamily="34" charset="-122"/>
+                <a:cs typeface="나눔스퀘어 네오 Bold" pitchFamily="34" charset="-120"/>
               </a:rPr>
               <a:t>결과</a:t>
             </a:r>
@@ -4761,9 +4791,9 @@
                 <a:solidFill>
                   <a:srgbClr val="1D1D1F"/>
                 </a:solidFill>
-                <a:latin typeface="NanumSquare Neo" pitchFamily="34" charset="0"/>
-                <a:ea typeface="NanumSquare Neo" pitchFamily="34" charset="-122"/>
-                <a:cs typeface="NanumSquare Neo" pitchFamily="34" charset="-120"/>
+                <a:latin typeface="나눔스퀘어 네오 Regular" pitchFamily="34" charset="0"/>
+                <a:ea typeface="나눔스퀘어 네오 Regular" pitchFamily="34" charset="-122"/>
+                <a:cs typeface="나눔스퀘어 네오 Regular" pitchFamily="34" charset="-120"/>
               </a:rPr>
               <a:t>전력 2.522 → 0.870 mW (−65.5%)</a:t>
             </a:r>
@@ -4778,9 +4808,9 @@
                 <a:solidFill>
                   <a:srgbClr val="1D1D1F"/>
                 </a:solidFill>
-                <a:latin typeface="NanumSquare Neo" pitchFamily="34" charset="0"/>
-                <a:ea typeface="NanumSquare Neo" pitchFamily="34" charset="-122"/>
-                <a:cs typeface="NanumSquare Neo" pitchFamily="34" charset="-120"/>
+                <a:latin typeface="나눔스퀘어 네오 Regular" pitchFamily="34" charset="0"/>
+                <a:ea typeface="나눔스퀘어 네오 Regular" pitchFamily="34" charset="-122"/>
+                <a:cs typeface="나눔스퀘어 네오 Regular" pitchFamily="34" charset="-120"/>
               </a:rPr>
               <a:t>면적 90,105 → 85,617 µm² (−5.0%)</a:t>
             </a:r>
@@ -4817,9 +4847,9 @@
                 <a:solidFill>
                   <a:srgbClr val="7A7A7A"/>
                 </a:solidFill>
-                <a:latin typeface="NanumSquare Neo" pitchFamily="34" charset="0"/>
-                <a:ea typeface="NanumSquare Neo" pitchFamily="34" charset="-122"/>
-                <a:cs typeface="NanumSquare Neo" pitchFamily="34" charset="-120"/>
+                <a:latin typeface="나눔스퀘어 네오 Regular" pitchFamily="34" charset="0"/>
+                <a:ea typeface="나눔스퀘어 네오 Regular" pitchFamily="34" charset="-122"/>
+                <a:cs typeface="나눔스퀘어 네오 Regular" pitchFamily="34" charset="-120"/>
               </a:rPr>
               <a:t>C64·C256 = 쓰기 캐시 64·256항목. 원리: 행(y)마다 클록 게이트를 두어 쓰는 행의 128개 FF만 클록을 받는다(리셋 때만 전 행). 쓰기 캐시(64항목)는 전력 −16%, 면적 +5.5%로 이득이 작아 필수로 두지 않았다. 256항목은 오히려 전력이 늘었다.</a:t>
             </a:r>
@@ -4859,9 +4889,9 @@
                 <a:solidFill>
                   <a:srgbClr val="7A7A7A"/>
                 </a:solidFill>
-                <a:latin typeface="NanumSquare Neo"/>
-                <a:ea typeface="NanumSquare Neo"/>
-                <a:cs typeface="NanumSquare Neo"/>
+                <a:latin typeface="나눔스퀘어 네오 Regular"/>
+                <a:ea typeface="나눔스퀘어 네오 Regular"/>
+                <a:cs typeface="나눔스퀘어 네오 Regular"/>
               </a:defRPr>
             </a:lvl1pPr>
           </a:lstStyle>
@@ -4927,13 +4957,13 @@
               <a:buNone/>
             </a:pPr>
             <a:r>
-              <a:rPr lang="en-US" sz="2600" b="1" dirty="0">
+              <a:rPr lang="en-US" sz="2600" dirty="0">
                 <a:solidFill>
                   <a:srgbClr val="1D1D1F"/>
                 </a:solidFill>
-                <a:latin typeface="NanumSquare Neo" pitchFamily="34" charset="0"/>
-                <a:ea typeface="NanumSquare Neo" pitchFamily="34" charset="-122"/>
-                <a:cs typeface="NanumSquare Neo" pitchFamily="34" charset="-120"/>
+                <a:latin typeface="나눔스퀘어 네오 Bold" pitchFamily="34" charset="0"/>
+                <a:ea typeface="나눔스퀘어 네오 Bold" pitchFamily="34" charset="-122"/>
+                <a:cs typeface="나눔스퀘어 네오 Bold" pitchFamily="34" charset="-120"/>
               </a:rPr>
               <a:t>Blink: 입력이 없는 동안 코어 클록을 꺼 유휴 전력을 줄였다</a:t>
             </a:r>
@@ -5010,9 +5040,9 @@
                 <a:solidFill>
                   <a:srgbClr val="7A7A7A"/>
                 </a:solidFill>
-                <a:latin typeface="NanumSquare Neo" pitchFamily="34" charset="0"/>
-                <a:ea typeface="NanumSquare Neo" pitchFamily="34" charset="-122"/>
-                <a:cs typeface="NanumSquare Neo" pitchFamily="34" charset="-120"/>
+                <a:latin typeface="나눔스퀘어 네오 Regular" pitchFamily="34" charset="0"/>
+                <a:ea typeface="나눔스퀘어 네오 Regular" pitchFamily="34" charset="-122"/>
+                <a:cs typeface="나눔스퀘어 네오 Regular" pitchFamily="34" charset="-120"/>
               </a:rPr>
               <a:t>RTL 시뮬레이션 파형: 입력이 끊기면(511사이클) 코어 클록 차단, 새 입력에 재가동</a:t>
             </a:r>
@@ -5056,20 +5086,20 @@
                         <a:buNone/>
                       </a:pPr>
                       <a:r>
-                        <a:rPr lang="en-US" sz="1400" b="1" dirty="0">
+                        <a:rPr lang="en-US" sz="1400" dirty="0">
                           <a:solidFill>
                             <a:srgbClr val="1D1D1F"/>
                           </a:solidFill>
-                          <a:latin typeface="NanumSquare Neo" pitchFamily="34" charset="0"/>
-                          <a:ea typeface="NanumSquare Neo" pitchFamily="34" charset="-122"/>
-                          <a:cs typeface="NanumSquare Neo" pitchFamily="34" charset="-120"/>
+                          <a:latin typeface="나눔스퀘어 네오 Bold" pitchFamily="34" charset="0"/>
+                          <a:ea typeface="나눔스퀘어 네오 Bold" pitchFamily="34" charset="-122"/>
+                          <a:cs typeface="나눔스퀘어 네오 Bold" pitchFamily="34" charset="-120"/>
                         </a:rPr>
                         <a:t>200 MHz에서 칩이 일하는 비율 (실제 DELTA)</a:t>
                       </a:r>
                       <a:endParaRPr lang="en-US" sz="1400" dirty="0">
-                        <a:latin typeface="NanumSquare Neo" charset="0"/>
-                        <a:ea typeface="NanumSquare Neo" charset="0"/>
-                        <a:cs typeface="NanumSquare Neo" charset="0"/>
+                        <a:latin typeface="나눔스퀘어 네오 Regular" charset="0"/>
+                        <a:ea typeface="나눔스퀘어 네오 Regular" charset="0"/>
+                        <a:cs typeface="나눔스퀘어 네오 Regular" charset="0"/>
                       </a:endParaRPr>
                     </a:p>
                   </a:txBody>
@@ -5124,20 +5154,20 @@
                         <a:buNone/>
                       </a:pPr>
                       <a:r>
-                        <a:rPr lang="en-US" sz="1400" b="1" dirty="0">
+                        <a:rPr lang="en-US" sz="1400" dirty="0">
                           <a:solidFill>
                             <a:srgbClr val="1D1D1F"/>
                           </a:solidFill>
-                          <a:latin typeface="NanumSquare Neo" pitchFamily="34" charset="0"/>
-                          <a:ea typeface="NanumSquare Neo" pitchFamily="34" charset="-122"/>
-                          <a:cs typeface="NanumSquare Neo" pitchFamily="34" charset="-120"/>
+                          <a:latin typeface="나눔스퀘어 네오 Bold" pitchFamily="34" charset="0"/>
+                          <a:ea typeface="나눔스퀘어 네오 Bold" pitchFamily="34" charset="-122"/>
+                          <a:cs typeface="나눔스퀘어 네오 Bold" pitchFamily="34" charset="-120"/>
                         </a:rPr>
                         <a:t>비율</a:t>
                       </a:r>
                       <a:endParaRPr lang="en-US" sz="1400" dirty="0">
-                        <a:latin typeface="NanumSquare Neo" charset="0"/>
-                        <a:ea typeface="NanumSquare Neo" charset="0"/>
-                        <a:cs typeface="NanumSquare Neo" charset="0"/>
+                        <a:latin typeface="나눔스퀘어 네오 Regular" charset="0"/>
+                        <a:ea typeface="나눔스퀘어 네오 Regular" charset="0"/>
+                        <a:cs typeface="나눔스퀘어 네오 Regular" charset="0"/>
                       </a:endParaRPr>
                     </a:p>
                   </a:txBody>
@@ -5198,16 +5228,16 @@
                           <a:solidFill>
                             <a:srgbClr val="1D1D1F"/>
                           </a:solidFill>
-                          <a:latin typeface="NanumSquare Neo" pitchFamily="34" charset="0"/>
-                          <a:ea typeface="NanumSquare Neo" pitchFamily="34" charset="-122"/>
-                          <a:cs typeface="NanumSquare Neo" pitchFamily="34" charset="-120"/>
+                          <a:latin typeface="나눔스퀘어 네오 Regular" pitchFamily="34" charset="0"/>
+                          <a:ea typeface="나눔스퀘어 네오 Regular" pitchFamily="34" charset="-122"/>
+                          <a:cs typeface="나눔스퀘어 네오 Regular" pitchFamily="34" charset="-120"/>
                         </a:rPr>
                         <a:t>입력 8개/사이클 버스트 가정 (하한)</a:t>
                       </a:r>
                       <a:endParaRPr lang="en-US" sz="1400" dirty="0">
-                        <a:latin typeface="NanumSquare Neo" charset="0"/>
-                        <a:ea typeface="NanumSquare Neo" charset="0"/>
-                        <a:cs typeface="NanumSquare Neo" charset="0"/>
+                        <a:latin typeface="나눔스퀘어 네오 Regular" charset="0"/>
+                        <a:ea typeface="나눔스퀘어 네오 Regular" charset="0"/>
+                        <a:cs typeface="나눔스퀘어 네오 Regular" charset="0"/>
                       </a:endParaRPr>
                     </a:p>
                   </a:txBody>
@@ -5266,16 +5296,16 @@
                           <a:solidFill>
                             <a:srgbClr val="1D1D1F"/>
                           </a:solidFill>
-                          <a:latin typeface="NanumSquare Neo" pitchFamily="34" charset="0"/>
-                          <a:ea typeface="NanumSquare Neo" pitchFamily="34" charset="-122"/>
-                          <a:cs typeface="NanumSquare Neo" pitchFamily="34" charset="-120"/>
+                          <a:latin typeface="나눔스퀘어 네오 Regular" pitchFamily="34" charset="0"/>
+                          <a:ea typeface="나눔스퀘어 네오 Regular" pitchFamily="34" charset="-122"/>
+                          <a:cs typeface="나눔스퀘어 네오 Regular" pitchFamily="34" charset="-120"/>
                         </a:rPr>
                         <a:t>3.1% (p90 5.4%)</a:t>
                       </a:r>
                       <a:endParaRPr lang="en-US" sz="1400" dirty="0">
-                        <a:latin typeface="NanumSquare Neo" charset="0"/>
-                        <a:ea typeface="NanumSquare Neo" charset="0"/>
-                        <a:cs typeface="NanumSquare Neo" charset="0"/>
+                        <a:latin typeface="나눔스퀘어 네오 Regular" charset="0"/>
+                        <a:ea typeface="나눔스퀘어 네오 Regular" charset="0"/>
+                        <a:cs typeface="나눔스퀘어 네오 Regular" charset="0"/>
                       </a:endParaRPr>
                     </a:p>
                   </a:txBody>
@@ -5336,16 +5366,16 @@
                           <a:solidFill>
                             <a:srgbClr val="1D1D1F"/>
                           </a:solidFill>
-                          <a:latin typeface="NanumSquare Neo" pitchFamily="34" charset="0"/>
-                          <a:ea typeface="NanumSquare Neo" pitchFamily="34" charset="-122"/>
-                          <a:cs typeface="NanumSquare Neo" pitchFamily="34" charset="-120"/>
+                          <a:latin typeface="나눔스퀘어 네오 Regular" pitchFamily="34" charset="0"/>
+                          <a:ea typeface="나눔스퀘어 네오 Regular" pitchFamily="34" charset="-122"/>
+                          <a:cs typeface="나눔스퀘어 네오 Regular" pitchFamily="34" charset="-120"/>
                         </a:rPr>
                         <a:t>쓰기 포트 1건/사이클 상한 가정</a:t>
                       </a:r>
                       <a:endParaRPr lang="en-US" sz="1400" dirty="0">
-                        <a:latin typeface="NanumSquare Neo" charset="0"/>
-                        <a:ea typeface="NanumSquare Neo" charset="0"/>
-                        <a:cs typeface="NanumSquare Neo" charset="0"/>
+                        <a:latin typeface="나눔스퀘어 네오 Regular" charset="0"/>
+                        <a:ea typeface="나눔스퀘어 네오 Regular" charset="0"/>
+                        <a:cs typeface="나눔스퀘어 네오 Regular" charset="0"/>
                       </a:endParaRPr>
                     </a:p>
                   </a:txBody>
@@ -5404,16 +5434,16 @@
                           <a:solidFill>
                             <a:srgbClr val="1D1D1F"/>
                           </a:solidFill>
-                          <a:latin typeface="NanumSquare Neo" pitchFamily="34" charset="0"/>
-                          <a:ea typeface="NanumSquare Neo" pitchFamily="34" charset="-122"/>
-                          <a:cs typeface="NanumSquare Neo" pitchFamily="34" charset="-120"/>
+                          <a:latin typeface="나눔스퀘어 네오 Regular" pitchFamily="34" charset="0"/>
+                          <a:ea typeface="나눔스퀘어 네오 Regular" pitchFamily="34" charset="-122"/>
+                          <a:cs typeface="나눔스퀘어 네오 Regular" pitchFamily="34" charset="-120"/>
                         </a:rPr>
                         <a:t>25%</a:t>
                       </a:r>
                       <a:endParaRPr lang="en-US" sz="1400" dirty="0">
-                        <a:latin typeface="NanumSquare Neo" charset="0"/>
-                        <a:ea typeface="NanumSquare Neo" charset="0"/>
-                        <a:cs typeface="NanumSquare Neo" charset="0"/>
+                        <a:latin typeface="나눔스퀘어 네오 Regular" charset="0"/>
+                        <a:ea typeface="나눔스퀘어 네오 Regular" charset="0"/>
+                        <a:cs typeface="나눔스퀘어 네오 Regular" charset="0"/>
                       </a:endParaRPr>
                     </a:p>
                   </a:txBody>
@@ -5493,9 +5523,9 @@
                 <a:solidFill>
                   <a:srgbClr val="1D1D1F"/>
                 </a:solidFill>
-                <a:latin typeface="NanumSquare Neo" pitchFamily="34" charset="0"/>
-                <a:ea typeface="NanumSquare Neo" pitchFamily="34" charset="-122"/>
-                <a:cs typeface="NanumSquare Neo" pitchFamily="34" charset="-120"/>
+                <a:latin typeface="나눔스퀘어 네오 Regular" pitchFamily="34" charset="0"/>
+                <a:ea typeface="나눔스퀘어 네오 Regular" pitchFamily="34" charset="-122"/>
+                <a:cs typeface="나눔스퀘어 네오 Regular" pitchFamily="34" charset="-120"/>
               </a:rPr>
               <a:t>주의: −71%는 유휴가 길도록 만든 시험 입력의 값이다. 실제 부하에서의 절감은 위 가동 비율에 비례하며, vectorless 전력에서는 두 구성이 같게 나온다(활동도를 모르면 코어가 계속 켜져 있다고 가정).</a:t>
             </a:r>
@@ -5535,9 +5565,9 @@
                 <a:solidFill>
                   <a:srgbClr val="7A7A7A"/>
                 </a:solidFill>
-                <a:latin typeface="NanumSquare Neo"/>
-                <a:ea typeface="NanumSquare Neo"/>
-                <a:cs typeface="NanumSquare Neo"/>
+                <a:latin typeface="나눔스퀘어 네오 Regular"/>
+                <a:ea typeface="나눔스퀘어 네오 Regular"/>
+                <a:cs typeface="나눔스퀘어 네오 Regular"/>
               </a:defRPr>
             </a:lvl1pPr>
           </a:lstStyle>
@@ -5603,13 +5633,13 @@
               <a:buNone/>
             </a:pPr>
             <a:r>
-              <a:rPr lang="en-US" sz="2600" b="1" dirty="0">
+              <a:rPr lang="en-US" sz="2600" dirty="0">
                 <a:solidFill>
                   <a:srgbClr val="1D1D1F"/>
                 </a:solidFill>
-                <a:latin typeface="NanumSquare Neo" pitchFamily="34" charset="0"/>
-                <a:ea typeface="NanumSquare Neo" pitchFamily="34" charset="-122"/>
-                <a:cs typeface="NanumSquare Neo" pitchFamily="34" charset="-120"/>
+                <a:latin typeface="나눔스퀘어 네오 Bold" pitchFamily="34" charset="0"/>
+                <a:ea typeface="나눔스퀘어 네오 Bold" pitchFamily="34" charset="-122"/>
+                <a:cs typeface="나눔스퀘어 네오 Bold" pitchFamily="34" charset="-120"/>
               </a:rPr>
               <a:t>물리 검증: 클록 게이팅 hold는 구조로 해결, 일반 경로에 ps 단위 잔여</a:t>
             </a:r>
@@ -5655,20 +5685,20 @@
                         <a:buNone/>
                       </a:pPr>
                       <a:r>
-                        <a:rPr lang="en-US" sz="1200" b="1" dirty="0">
+                        <a:rPr lang="en-US" sz="1200" dirty="0">
                           <a:solidFill>
                             <a:srgbClr val="1D1D1F"/>
                           </a:solidFill>
-                          <a:latin typeface="NanumSquare Neo" pitchFamily="34" charset="0"/>
-                          <a:ea typeface="NanumSquare Neo" pitchFamily="34" charset="-122"/>
-                          <a:cs typeface="NanumSquare Neo" pitchFamily="34" charset="-120"/>
+                          <a:latin typeface="나눔스퀘어 네오 Bold" pitchFamily="34" charset="0"/>
+                          <a:ea typeface="나눔스퀘어 네오 Bold" pitchFamily="34" charset="-122"/>
+                          <a:cs typeface="나눔스퀘어 네오 Bold" pitchFamily="34" charset="-120"/>
                         </a:rPr>
                         <a:t>항목 (signoff)</a:t>
                       </a:r>
                       <a:endParaRPr lang="en-US" sz="1200" dirty="0">
-                        <a:latin typeface="NanumSquare Neo" charset="0"/>
-                        <a:ea typeface="NanumSquare Neo" charset="0"/>
-                        <a:cs typeface="NanumSquare Neo" charset="0"/>
+                        <a:latin typeface="나눔스퀘어 네오 Regular" charset="0"/>
+                        <a:ea typeface="나눔스퀘어 네오 Regular" charset="0"/>
+                        <a:cs typeface="나눔스퀘어 네오 Regular" charset="0"/>
                       </a:endParaRPr>
                     </a:p>
                   </a:txBody>
@@ -5723,20 +5753,20 @@
                         <a:buNone/>
                       </a:pPr>
                       <a:r>
-                        <a:rPr lang="en-US" sz="1200" b="1" dirty="0">
+                        <a:rPr lang="en-US" sz="1200" dirty="0">
                           <a:solidFill>
                             <a:srgbClr val="1D1D1F"/>
                           </a:solidFill>
-                          <a:latin typeface="NanumSquare Neo" pitchFamily="34" charset="0"/>
-                          <a:ea typeface="NanumSquare Neo" pitchFamily="34" charset="-122"/>
-                          <a:cs typeface="NanumSquare Neo" pitchFamily="34" charset="-120"/>
+                          <a:latin typeface="나눔스퀘어 네오 Bold" pitchFamily="34" charset="0"/>
+                          <a:ea typeface="나눔스퀘어 네오 Bold" pitchFamily="34" charset="-122"/>
+                          <a:cs typeface="나눔스퀘어 네오 Bold" pitchFamily="34" charset="-120"/>
                         </a:rPr>
                         <a:t>래치+AND 분리</a:t>
                       </a:r>
                       <a:endParaRPr lang="en-US" sz="1200" dirty="0">
-                        <a:latin typeface="NanumSquare Neo" charset="0"/>
-                        <a:ea typeface="NanumSquare Neo" charset="0"/>
-                        <a:cs typeface="NanumSquare Neo" charset="0"/>
+                        <a:latin typeface="나눔스퀘어 네오 Regular" charset="0"/>
+                        <a:ea typeface="나눔스퀘어 네오 Regular" charset="0"/>
+                        <a:cs typeface="나눔스퀘어 네오 Regular" charset="0"/>
                       </a:endParaRPr>
                     </a:p>
                   </a:txBody>
@@ -5791,20 +5821,20 @@
                         <a:buNone/>
                       </a:pPr>
                       <a:r>
-                        <a:rPr lang="en-US" sz="1200" b="1" dirty="0">
+                        <a:rPr lang="en-US" sz="1200" dirty="0">
                           <a:solidFill>
                             <a:srgbClr val="1D1D1F"/>
                           </a:solidFill>
-                          <a:latin typeface="NanumSquare Neo" pitchFamily="34" charset="0"/>
-                          <a:ea typeface="NanumSquare Neo" pitchFamily="34" charset="-122"/>
-                          <a:cs typeface="NanumSquare Neo" pitchFamily="34" charset="-120"/>
+                          <a:latin typeface="나눔스퀘어 네오 Bold" pitchFamily="34" charset="0"/>
+                          <a:ea typeface="나눔스퀘어 네오 Bold" pitchFamily="34" charset="-122"/>
+                          <a:cs typeface="나눔스퀘어 네오 Bold" pitchFamily="34" charset="-120"/>
                         </a:rPr>
                         <a:t>통합 ICG</a:t>
                       </a:r>
                       <a:endParaRPr lang="en-US" sz="1200" dirty="0">
-                        <a:latin typeface="NanumSquare Neo" charset="0"/>
-                        <a:ea typeface="NanumSquare Neo" charset="0"/>
-                        <a:cs typeface="NanumSquare Neo" charset="0"/>
+                        <a:latin typeface="나눔스퀘어 네오 Regular" charset="0"/>
+                        <a:ea typeface="나눔스퀘어 네오 Regular" charset="0"/>
+                        <a:cs typeface="나눔스퀘어 네오 Regular" charset="0"/>
                       </a:endParaRPr>
                     </a:p>
                   </a:txBody>
@@ -5859,20 +5889,20 @@
                         <a:buNone/>
                       </a:pPr>
                       <a:r>
-                        <a:rPr lang="en-US" sz="1200" b="1" dirty="0">
+                        <a:rPr lang="en-US" sz="1200" dirty="0">
                           <a:solidFill>
                             <a:srgbClr val="1D1D1F"/>
                           </a:solidFill>
-                          <a:latin typeface="NanumSquare Neo" pitchFamily="34" charset="0"/>
-                          <a:ea typeface="NanumSquare Neo" pitchFamily="34" charset="-122"/>
-                          <a:cs typeface="NanumSquare Neo" pitchFamily="34" charset="-120"/>
+                          <a:latin typeface="나눔스퀘어 네오 Bold" pitchFamily="34" charset="0"/>
+                          <a:ea typeface="나눔스퀘어 네오 Bold" pitchFamily="34" charset="-122"/>
+                          <a:cs typeface="나눔스퀘어 네오 Bold" pitchFamily="34" charset="-120"/>
                         </a:rPr>
                         <a:t>통합 ICG @5.2 ns</a:t>
                       </a:r>
                       <a:endParaRPr lang="en-US" sz="1200" dirty="0">
-                        <a:latin typeface="NanumSquare Neo" charset="0"/>
-                        <a:ea typeface="NanumSquare Neo" charset="0"/>
-                        <a:cs typeface="NanumSquare Neo" charset="0"/>
+                        <a:latin typeface="나눔스퀘어 네오 Regular" charset="0"/>
+                        <a:ea typeface="나눔스퀘어 네오 Regular" charset="0"/>
+                        <a:cs typeface="나눔스퀘어 네오 Regular" charset="0"/>
                       </a:endParaRPr>
                     </a:p>
                   </a:txBody>
@@ -5933,16 +5963,16 @@
                           <a:solidFill>
                             <a:srgbClr val="1D1D1F"/>
                           </a:solidFill>
-                          <a:latin typeface="NanumSquare Neo" pitchFamily="34" charset="0"/>
-                          <a:ea typeface="NanumSquare Neo" pitchFamily="34" charset="-122"/>
-                          <a:cs typeface="NanumSquare Neo" pitchFamily="34" charset="-120"/>
+                          <a:latin typeface="나눔스퀘어 네오 Regular" pitchFamily="34" charset="0"/>
+                          <a:ea typeface="나눔스퀘어 네오 Regular" pitchFamily="34" charset="-122"/>
+                          <a:cs typeface="나눔스퀘어 네오 Regular" pitchFamily="34" charset="-120"/>
                         </a:rPr>
                         <a:t>DRC / antenna</a:t>
                       </a:r>
                       <a:endParaRPr lang="en-US" sz="1200" dirty="0">
-                        <a:latin typeface="NanumSquare Neo" charset="0"/>
-                        <a:ea typeface="NanumSquare Neo" charset="0"/>
-                        <a:cs typeface="NanumSquare Neo" charset="0"/>
+                        <a:latin typeface="나눔스퀘어 네오 Regular" charset="0"/>
+                        <a:ea typeface="나눔스퀘어 네오 Regular" charset="0"/>
+                        <a:cs typeface="나눔스퀘어 네오 Regular" charset="0"/>
                       </a:endParaRPr>
                     </a:p>
                   </a:txBody>
@@ -6001,16 +6031,16 @@
                           <a:solidFill>
                             <a:srgbClr val="1D1D1F"/>
                           </a:solidFill>
-                          <a:latin typeface="NanumSquare Neo" pitchFamily="34" charset="0"/>
-                          <a:ea typeface="NanumSquare Neo" pitchFamily="34" charset="-122"/>
-                          <a:cs typeface="NanumSquare Neo" pitchFamily="34" charset="-120"/>
+                          <a:latin typeface="나눔스퀘어 네오 Regular" pitchFamily="34" charset="0"/>
+                          <a:ea typeface="나눔스퀘어 네오 Regular" pitchFamily="34" charset="-122"/>
+                          <a:cs typeface="나눔스퀘어 네오 Regular" pitchFamily="34" charset="-120"/>
                         </a:rPr>
                         <a:t>0 / 0</a:t>
                       </a:r>
                       <a:endParaRPr lang="en-US" sz="1200" dirty="0">
-                        <a:latin typeface="NanumSquare Neo" charset="0"/>
-                        <a:ea typeface="NanumSquare Neo" charset="0"/>
-                        <a:cs typeface="NanumSquare Neo" charset="0"/>
+                        <a:latin typeface="나눔스퀘어 네오 Regular" charset="0"/>
+                        <a:ea typeface="나눔스퀘어 네오 Regular" charset="0"/>
+                        <a:cs typeface="나눔스퀘어 네오 Regular" charset="0"/>
                       </a:endParaRPr>
                     </a:p>
                   </a:txBody>
@@ -6069,16 +6099,16 @@
                           <a:solidFill>
                             <a:srgbClr val="1D1D1F"/>
                           </a:solidFill>
-                          <a:latin typeface="NanumSquare Neo" pitchFamily="34" charset="0"/>
-                          <a:ea typeface="NanumSquare Neo" pitchFamily="34" charset="-122"/>
-                          <a:cs typeface="NanumSquare Neo" pitchFamily="34" charset="-120"/>
+                          <a:latin typeface="나눔스퀘어 네오 Regular" pitchFamily="34" charset="0"/>
+                          <a:ea typeface="나눔스퀘어 네오 Regular" pitchFamily="34" charset="-122"/>
+                          <a:cs typeface="나눔스퀘어 네오 Regular" pitchFamily="34" charset="-120"/>
                         </a:rPr>
                         <a:t>0 / 0</a:t>
                       </a:r>
                       <a:endParaRPr lang="en-US" sz="1200" dirty="0">
-                        <a:latin typeface="NanumSquare Neo" charset="0"/>
-                        <a:ea typeface="NanumSquare Neo" charset="0"/>
-                        <a:cs typeface="NanumSquare Neo" charset="0"/>
+                        <a:latin typeface="나눔스퀘어 네오 Regular" charset="0"/>
+                        <a:ea typeface="나눔스퀘어 네오 Regular" charset="0"/>
+                        <a:cs typeface="나눔스퀘어 네오 Regular" charset="0"/>
                       </a:endParaRPr>
                     </a:p>
                   </a:txBody>
@@ -6137,16 +6167,16 @@
                           <a:solidFill>
                             <a:srgbClr val="1D1D1F"/>
                           </a:solidFill>
-                          <a:latin typeface="NanumSquare Neo" pitchFamily="34" charset="0"/>
-                          <a:ea typeface="NanumSquare Neo" pitchFamily="34" charset="-122"/>
-                          <a:cs typeface="NanumSquare Neo" pitchFamily="34" charset="-120"/>
+                          <a:latin typeface="나눔스퀘어 네오 Regular" pitchFamily="34" charset="0"/>
+                          <a:ea typeface="나눔스퀘어 네오 Regular" pitchFamily="34" charset="-122"/>
+                          <a:cs typeface="나눔스퀘어 네오 Regular" pitchFamily="34" charset="-120"/>
                         </a:rPr>
-                        <a:t>(진행 중)</a:t>
+                        <a:t>0 / 0</a:t>
                       </a:r>
                       <a:endParaRPr lang="en-US" sz="1200" dirty="0">
-                        <a:latin typeface="NanumSquare Neo" charset="0"/>
-                        <a:ea typeface="NanumSquare Neo" charset="0"/>
-                        <a:cs typeface="NanumSquare Neo" charset="0"/>
+                        <a:latin typeface="나눔스퀘어 네오 Regular" charset="0"/>
+                        <a:ea typeface="나눔스퀘어 네오 Regular" charset="0"/>
+                        <a:cs typeface="나눔스퀘어 네오 Regular" charset="0"/>
                       </a:endParaRPr>
                     </a:p>
                   </a:txBody>
@@ -6207,16 +6237,16 @@
                           <a:solidFill>
                             <a:srgbClr val="1D1D1F"/>
                           </a:solidFill>
-                          <a:latin typeface="NanumSquare Neo" pitchFamily="34" charset="0"/>
-                          <a:ea typeface="NanumSquare Neo" pitchFamily="34" charset="-122"/>
-                          <a:cs typeface="NanumSquare Neo" pitchFamily="34" charset="-120"/>
+                          <a:latin typeface="나눔스퀘어 네오 Regular" pitchFamily="34" charset="0"/>
+                          <a:ea typeface="나눔스퀘어 네오 Regular" pitchFamily="34" charset="-122"/>
+                          <a:cs typeface="나눔스퀘어 네오 Regular" pitchFamily="34" charset="-120"/>
                         </a:rPr>
                         <a:t>클록 게이팅 hold</a:t>
                       </a:r>
                       <a:endParaRPr lang="en-US" sz="1200" dirty="0">
-                        <a:latin typeface="NanumSquare Neo" charset="0"/>
-                        <a:ea typeface="NanumSquare Neo" charset="0"/>
-                        <a:cs typeface="NanumSquare Neo" charset="0"/>
+                        <a:latin typeface="나눔스퀘어 네오 Regular" charset="0"/>
+                        <a:ea typeface="나눔스퀘어 네오 Regular" charset="0"/>
+                        <a:cs typeface="나눔스퀘어 네오 Regular" charset="0"/>
                       </a:endParaRPr>
                     </a:p>
                   </a:txBody>
@@ -6275,16 +6305,16 @@
                           <a:solidFill>
                             <a:srgbClr val="1D1D1F"/>
                           </a:solidFill>
-                          <a:latin typeface="NanumSquare Neo" pitchFamily="34" charset="0"/>
-                          <a:ea typeface="NanumSquare Neo" pitchFamily="34" charset="-122"/>
-                          <a:cs typeface="NanumSquare Neo" pitchFamily="34" charset="-120"/>
+                          <a:latin typeface="나눔스퀘어 네오 Regular" pitchFamily="34" charset="0"/>
+                          <a:ea typeface="나눔스퀘어 네오 Regular" pitchFamily="34" charset="-122"/>
+                          <a:cs typeface="나눔스퀘어 네오 Regular" pitchFamily="34" charset="-120"/>
                         </a:rPr>
                         <a:t>−0.030 ns (13)</a:t>
                       </a:r>
                       <a:endParaRPr lang="en-US" sz="1200" dirty="0">
-                        <a:latin typeface="NanumSquare Neo" charset="0"/>
-                        <a:ea typeface="NanumSquare Neo" charset="0"/>
-                        <a:cs typeface="NanumSquare Neo" charset="0"/>
+                        <a:latin typeface="나눔스퀘어 네오 Regular" charset="0"/>
+                        <a:ea typeface="나눔스퀘어 네오 Regular" charset="0"/>
+                        <a:cs typeface="나눔스퀘어 네오 Regular" charset="0"/>
                       </a:endParaRPr>
                     </a:p>
                   </a:txBody>
@@ -6343,16 +6373,16 @@
                           <a:solidFill>
                             <a:srgbClr val="1D1D1F"/>
                           </a:solidFill>
-                          <a:latin typeface="NanumSquare Neo" pitchFamily="34" charset="0"/>
-                          <a:ea typeface="NanumSquare Neo" pitchFamily="34" charset="-122"/>
-                          <a:cs typeface="NanumSquare Neo" pitchFamily="34" charset="-120"/>
+                          <a:latin typeface="나눔스퀘어 네오 Regular" pitchFamily="34" charset="0"/>
+                          <a:ea typeface="나눔스퀘어 네오 Regular" pitchFamily="34" charset="-122"/>
+                          <a:cs typeface="나눔스퀘어 네오 Regular" pitchFamily="34" charset="-120"/>
                         </a:rPr>
                         <a:t>+0.080 ns (0)</a:t>
                       </a:r>
                       <a:endParaRPr lang="en-US" sz="1200" dirty="0">
-                        <a:latin typeface="NanumSquare Neo" charset="0"/>
-                        <a:ea typeface="NanumSquare Neo" charset="0"/>
-                        <a:cs typeface="NanumSquare Neo" charset="0"/>
+                        <a:latin typeface="나눔스퀘어 네오 Regular" charset="0"/>
+                        <a:ea typeface="나눔스퀘어 네오 Regular" charset="0"/>
+                        <a:cs typeface="나눔스퀘어 네오 Regular" charset="0"/>
                       </a:endParaRPr>
                     </a:p>
                   </a:txBody>
@@ -6411,16 +6441,16 @@
                           <a:solidFill>
                             <a:srgbClr val="1D1D1F"/>
                           </a:solidFill>
-                          <a:latin typeface="NanumSquare Neo" pitchFamily="34" charset="0"/>
-                          <a:ea typeface="NanumSquare Neo" pitchFamily="34" charset="-122"/>
-                          <a:cs typeface="NanumSquare Neo" pitchFamily="34" charset="-120"/>
+                          <a:latin typeface="나눔스퀘어 네오 Regular" pitchFamily="34" charset="0"/>
+                          <a:ea typeface="나눔스퀘어 네오 Regular" pitchFamily="34" charset="-122"/>
+                          <a:cs typeface="나눔스퀘어 네오 Regular" pitchFamily="34" charset="-120"/>
                         </a:rPr>
-                        <a:t>(진행 중)</a:t>
+                        <a:t>+0.080 ns (0)</a:t>
                       </a:r>
                       <a:endParaRPr lang="en-US" sz="1200" dirty="0">
-                        <a:latin typeface="NanumSquare Neo" charset="0"/>
-                        <a:ea typeface="NanumSquare Neo" charset="0"/>
-                        <a:cs typeface="NanumSquare Neo" charset="0"/>
+                        <a:latin typeface="나눔스퀘어 네오 Regular" charset="0"/>
+                        <a:ea typeface="나눔스퀘어 네오 Regular" charset="0"/>
+                        <a:cs typeface="나눔스퀘어 네오 Regular" charset="0"/>
                       </a:endParaRPr>
                     </a:p>
                   </a:txBody>
@@ -6481,16 +6511,16 @@
                           <a:solidFill>
                             <a:srgbClr val="1D1D1F"/>
                           </a:solidFill>
-                          <a:latin typeface="NanumSquare Neo" pitchFamily="34" charset="0"/>
-                          <a:ea typeface="NanumSquare Neo" pitchFamily="34" charset="-122"/>
-                          <a:cs typeface="NanumSquare Neo" pitchFamily="34" charset="-120"/>
+                          <a:latin typeface="나눔스퀘어 네오 Regular" pitchFamily="34" charset="0"/>
+                          <a:ea typeface="나눔스퀘어 네오 Regular" pitchFamily="34" charset="-122"/>
+                          <a:cs typeface="나눔스퀘어 네오 Regular" pitchFamily="34" charset="-120"/>
                         </a:rPr>
                         <a:t>reg2reg hold</a:t>
                       </a:r>
                       <a:endParaRPr lang="en-US" sz="1200" dirty="0">
-                        <a:latin typeface="NanumSquare Neo" charset="0"/>
-                        <a:ea typeface="NanumSquare Neo" charset="0"/>
-                        <a:cs typeface="NanumSquare Neo" charset="0"/>
+                        <a:latin typeface="나눔스퀘어 네오 Regular" charset="0"/>
+                        <a:ea typeface="나눔스퀘어 네오 Regular" charset="0"/>
+                        <a:cs typeface="나눔스퀘어 네오 Regular" charset="0"/>
                       </a:endParaRPr>
                     </a:p>
                   </a:txBody>
@@ -6549,16 +6579,16 @@
                           <a:solidFill>
                             <a:srgbClr val="1D1D1F"/>
                           </a:solidFill>
-                          <a:latin typeface="NanumSquare Neo" pitchFamily="34" charset="0"/>
-                          <a:ea typeface="NanumSquare Neo" pitchFamily="34" charset="-122"/>
-                          <a:cs typeface="NanumSquare Neo" pitchFamily="34" charset="-120"/>
+                          <a:latin typeface="나눔스퀘어 네오 Regular" pitchFamily="34" charset="0"/>
+                          <a:ea typeface="나눔스퀘어 네오 Regular" pitchFamily="34" charset="-122"/>
+                          <a:cs typeface="나눔스퀘어 네오 Regular" pitchFamily="34" charset="-120"/>
                         </a:rPr>
                         <a:t>−0.010 ns (135)</a:t>
                       </a:r>
                       <a:endParaRPr lang="en-US" sz="1200" dirty="0">
-                        <a:latin typeface="NanumSquare Neo" charset="0"/>
-                        <a:ea typeface="NanumSquare Neo" charset="0"/>
-                        <a:cs typeface="NanumSquare Neo" charset="0"/>
+                        <a:latin typeface="나눔스퀘어 네오 Regular" charset="0"/>
+                        <a:ea typeface="나눔스퀘어 네오 Regular" charset="0"/>
+                        <a:cs typeface="나눔스퀘어 네오 Regular" charset="0"/>
                       </a:endParaRPr>
                     </a:p>
                   </a:txBody>
@@ -6617,16 +6647,16 @@
                           <a:solidFill>
                             <a:srgbClr val="1D1D1F"/>
                           </a:solidFill>
-                          <a:latin typeface="NanumSquare Neo" pitchFamily="34" charset="0"/>
-                          <a:ea typeface="NanumSquare Neo" pitchFamily="34" charset="-122"/>
-                          <a:cs typeface="NanumSquare Neo" pitchFamily="34" charset="-120"/>
+                          <a:latin typeface="나눔스퀘어 네오 Regular" pitchFamily="34" charset="0"/>
+                          <a:ea typeface="나눔스퀘어 네오 Regular" pitchFamily="34" charset="-122"/>
+                          <a:cs typeface="나눔스퀘어 네오 Regular" pitchFamily="34" charset="-120"/>
                         </a:rPr>
                         <a:t>−0.007 ns (34)</a:t>
                       </a:r>
                       <a:endParaRPr lang="en-US" sz="1200" dirty="0">
-                        <a:latin typeface="NanumSquare Neo" charset="0"/>
-                        <a:ea typeface="NanumSquare Neo" charset="0"/>
-                        <a:cs typeface="NanumSquare Neo" charset="0"/>
+                        <a:latin typeface="나눔스퀘어 네오 Regular" charset="0"/>
+                        <a:ea typeface="나눔스퀘어 네오 Regular" charset="0"/>
+                        <a:cs typeface="나눔스퀘어 네오 Regular" charset="0"/>
                       </a:endParaRPr>
                     </a:p>
                   </a:txBody>
@@ -6685,16 +6715,16 @@
                           <a:solidFill>
                             <a:srgbClr val="1D1D1F"/>
                           </a:solidFill>
-                          <a:latin typeface="NanumSquare Neo" pitchFamily="34" charset="0"/>
-                          <a:ea typeface="NanumSquare Neo" pitchFamily="34" charset="-122"/>
-                          <a:cs typeface="NanumSquare Neo" pitchFamily="34" charset="-120"/>
+                          <a:latin typeface="나눔스퀘어 네오 Regular" pitchFamily="34" charset="0"/>
+                          <a:ea typeface="나눔스퀘어 네오 Regular" pitchFamily="34" charset="-122"/>
+                          <a:cs typeface="나눔스퀘어 네오 Regular" pitchFamily="34" charset="-120"/>
                         </a:rPr>
-                        <a:t>(진행 중)</a:t>
+                        <a:t>-0.007 ns (61)</a:t>
                       </a:r>
                       <a:endParaRPr lang="en-US" sz="1200" dirty="0">
-                        <a:latin typeface="NanumSquare Neo" charset="0"/>
-                        <a:ea typeface="NanumSquare Neo" charset="0"/>
-                        <a:cs typeface="NanumSquare Neo" charset="0"/>
+                        <a:latin typeface="나눔스퀘어 네오 Regular" charset="0"/>
+                        <a:ea typeface="나눔스퀘어 네오 Regular" charset="0"/>
+                        <a:cs typeface="나눔스퀘어 네오 Regular" charset="0"/>
                       </a:endParaRPr>
                     </a:p>
                   </a:txBody>
@@ -6755,16 +6785,16 @@
                           <a:solidFill>
                             <a:srgbClr val="1D1D1F"/>
                           </a:solidFill>
-                          <a:latin typeface="NanumSquare Neo" pitchFamily="34" charset="0"/>
-                          <a:ea typeface="NanumSquare Neo" pitchFamily="34" charset="-122"/>
-                          <a:cs typeface="NanumSquare Neo" pitchFamily="34" charset="-120"/>
+                          <a:latin typeface="나눔스퀘어 네오 Regular" pitchFamily="34" charset="0"/>
+                          <a:ea typeface="나눔스퀘어 네오 Regular" pitchFamily="34" charset="-122"/>
+                          <a:cs typeface="나눔스퀘어 네오 Regular" pitchFamily="34" charset="-120"/>
                         </a:rPr>
                         <a:t>setup</a:t>
                       </a:r>
                       <a:endParaRPr lang="en-US" sz="1200" dirty="0">
-                        <a:latin typeface="NanumSquare Neo" charset="0"/>
-                        <a:ea typeface="NanumSquare Neo" charset="0"/>
-                        <a:cs typeface="NanumSquare Neo" charset="0"/>
+                        <a:latin typeface="나눔스퀘어 네오 Regular" charset="0"/>
+                        <a:ea typeface="나눔스퀘어 네오 Regular" charset="0"/>
+                        <a:cs typeface="나눔스퀘어 네오 Regular" charset="0"/>
                       </a:endParaRPr>
                     </a:p>
                   </a:txBody>
@@ -6823,16 +6853,16 @@
                           <a:solidFill>
                             <a:srgbClr val="1D1D1F"/>
                           </a:solidFill>
-                          <a:latin typeface="NanumSquare Neo" pitchFamily="34" charset="0"/>
-                          <a:ea typeface="NanumSquare Neo" pitchFamily="34" charset="-122"/>
-                          <a:cs typeface="NanumSquare Neo" pitchFamily="34" charset="-120"/>
+                          <a:latin typeface="나눔스퀘어 네오 Regular" pitchFamily="34" charset="0"/>
+                          <a:ea typeface="나눔스퀘어 네오 Regular" pitchFamily="34" charset="-122"/>
+                          <a:cs typeface="나눔스퀘어 네오 Regular" pitchFamily="34" charset="-120"/>
                         </a:rPr>
                         <a:t>위반 0</a:t>
                       </a:r>
                       <a:endParaRPr lang="en-US" sz="1200" dirty="0">
-                        <a:latin typeface="NanumSquare Neo" charset="0"/>
-                        <a:ea typeface="NanumSquare Neo" charset="0"/>
-                        <a:cs typeface="NanumSquare Neo" charset="0"/>
+                        <a:latin typeface="나눔스퀘어 네오 Regular" charset="0"/>
+                        <a:ea typeface="나눔스퀘어 네오 Regular" charset="0"/>
+                        <a:cs typeface="나눔스퀘어 네오 Regular" charset="0"/>
                       </a:endParaRPr>
                     </a:p>
                   </a:txBody>
@@ -6891,16 +6921,16 @@
                           <a:solidFill>
                             <a:srgbClr val="1D1D1F"/>
                           </a:solidFill>
-                          <a:latin typeface="NanumSquare Neo" pitchFamily="34" charset="0"/>
-                          <a:ea typeface="NanumSquare Neo" pitchFamily="34" charset="-122"/>
-                          <a:cs typeface="NanumSquare Neo" pitchFamily="34" charset="-120"/>
+                          <a:latin typeface="나눔스퀘어 네오 Regular" pitchFamily="34" charset="0"/>
+                          <a:ea typeface="나눔스퀘어 네오 Regular" pitchFamily="34" charset="-122"/>
+                          <a:cs typeface="나눔스퀘어 네오 Regular" pitchFamily="34" charset="-120"/>
                         </a:rPr>
                         <a:t>−0.019 ns (1)</a:t>
                       </a:r>
                       <a:endParaRPr lang="en-US" sz="1200" dirty="0">
-                        <a:latin typeface="NanumSquare Neo" charset="0"/>
-                        <a:ea typeface="NanumSquare Neo" charset="0"/>
-                        <a:cs typeface="NanumSquare Neo" charset="0"/>
+                        <a:latin typeface="나눔스퀘어 네오 Regular" charset="0"/>
+                        <a:ea typeface="나눔스퀘어 네오 Regular" charset="0"/>
+                        <a:cs typeface="나눔스퀘어 네오 Regular" charset="0"/>
                       </a:endParaRPr>
                     </a:p>
                   </a:txBody>
@@ -6959,16 +6989,16 @@
                           <a:solidFill>
                             <a:srgbClr val="1D1D1F"/>
                           </a:solidFill>
-                          <a:latin typeface="NanumSquare Neo" pitchFamily="34" charset="0"/>
-                          <a:ea typeface="NanumSquare Neo" pitchFamily="34" charset="-122"/>
-                          <a:cs typeface="NanumSquare Neo" pitchFamily="34" charset="-120"/>
+                          <a:latin typeface="나눔스퀘어 네오 Regular" pitchFamily="34" charset="0"/>
+                          <a:ea typeface="나눔스퀘어 네오 Regular" pitchFamily="34" charset="-122"/>
+                          <a:cs typeface="나눔스퀘어 네오 Regular" pitchFamily="34" charset="-120"/>
                         </a:rPr>
-                        <a:t>(진행 중)</a:t>
+                        <a:t>+0.077 ns (0)</a:t>
                       </a:r>
                       <a:endParaRPr lang="en-US" sz="1200" dirty="0">
-                        <a:latin typeface="NanumSquare Neo" charset="0"/>
-                        <a:ea typeface="NanumSquare Neo" charset="0"/>
-                        <a:cs typeface="NanumSquare Neo" charset="0"/>
+                        <a:latin typeface="나눔스퀘어 네오 Regular" charset="0"/>
+                        <a:ea typeface="나눔스퀘어 네오 Regular" charset="0"/>
+                        <a:cs typeface="나눔스퀘어 네오 Regular" charset="0"/>
                       </a:endParaRPr>
                     </a:p>
                   </a:txBody>
@@ -7029,16 +7059,16 @@
                           <a:solidFill>
                             <a:srgbClr val="1D1D1F"/>
                           </a:solidFill>
-                          <a:latin typeface="NanumSquare Neo" pitchFamily="34" charset="0"/>
-                          <a:ea typeface="NanumSquare Neo" pitchFamily="34" charset="-122"/>
-                          <a:cs typeface="NanumSquare Neo" pitchFamily="34" charset="-120"/>
+                          <a:latin typeface="나눔스퀘어 네오 Regular" pitchFamily="34" charset="0"/>
+                          <a:ea typeface="나눔스퀘어 네오 Regular" pitchFamily="34" charset="-122"/>
+                          <a:cs typeface="나눔스퀘어 네오 Regular" pitchFamily="34" charset="-120"/>
                         </a:rPr>
                         <a:t>전력 (vectorless)</a:t>
                       </a:r>
                       <a:endParaRPr lang="en-US" sz="1200" dirty="0">
-                        <a:latin typeface="NanumSquare Neo" charset="0"/>
-                        <a:ea typeface="NanumSquare Neo" charset="0"/>
-                        <a:cs typeface="NanumSquare Neo" charset="0"/>
+                        <a:latin typeface="나눔스퀘어 네오 Regular" charset="0"/>
+                        <a:ea typeface="나눔스퀘어 네오 Regular" charset="0"/>
+                        <a:cs typeface="나눔스퀘어 네오 Regular" charset="0"/>
                       </a:endParaRPr>
                     </a:p>
                   </a:txBody>
@@ -7097,16 +7127,16 @@
                           <a:solidFill>
                             <a:srgbClr val="1D1D1F"/>
                           </a:solidFill>
-                          <a:latin typeface="NanumSquare Neo" pitchFamily="34" charset="0"/>
-                          <a:ea typeface="NanumSquare Neo" pitchFamily="34" charset="-122"/>
-                          <a:cs typeface="NanumSquare Neo" pitchFamily="34" charset="-120"/>
+                          <a:latin typeface="나눔스퀘어 네오 Regular" pitchFamily="34" charset="0"/>
+                          <a:ea typeface="나눔스퀘어 네오 Regular" pitchFamily="34" charset="-122"/>
+                          <a:cs typeface="나눔스퀘어 네오 Regular" pitchFamily="34" charset="-120"/>
                         </a:rPr>
                         <a:t>5.89 mW</a:t>
                       </a:r>
                       <a:endParaRPr lang="en-US" sz="1200" dirty="0">
-                        <a:latin typeface="NanumSquare Neo" charset="0"/>
-                        <a:ea typeface="NanumSquare Neo" charset="0"/>
-                        <a:cs typeface="NanumSquare Neo" charset="0"/>
+                        <a:latin typeface="나눔스퀘어 네오 Regular" charset="0"/>
+                        <a:ea typeface="나눔스퀘어 네오 Regular" charset="0"/>
+                        <a:cs typeface="나눔스퀘어 네오 Regular" charset="0"/>
                       </a:endParaRPr>
                     </a:p>
                   </a:txBody>
@@ -7165,16 +7195,16 @@
                           <a:solidFill>
                             <a:srgbClr val="1D1D1F"/>
                           </a:solidFill>
-                          <a:latin typeface="NanumSquare Neo" pitchFamily="34" charset="0"/>
-                          <a:ea typeface="NanumSquare Neo" pitchFamily="34" charset="-122"/>
-                          <a:cs typeface="NanumSquare Neo" pitchFamily="34" charset="-120"/>
+                          <a:latin typeface="나눔스퀘어 네오 Regular" pitchFamily="34" charset="0"/>
+                          <a:ea typeface="나눔스퀘어 네오 Regular" pitchFamily="34" charset="-122"/>
+                          <a:cs typeface="나눔스퀘어 네오 Regular" pitchFamily="34" charset="-120"/>
                         </a:rPr>
                         <a:t>6.11 mW</a:t>
                       </a:r>
                       <a:endParaRPr lang="en-US" sz="1200" dirty="0">
-                        <a:latin typeface="NanumSquare Neo" charset="0"/>
-                        <a:ea typeface="NanumSquare Neo" charset="0"/>
-                        <a:cs typeface="NanumSquare Neo" charset="0"/>
+                        <a:latin typeface="나눔스퀘어 네오 Regular" charset="0"/>
+                        <a:ea typeface="나눔스퀘어 네오 Regular" charset="0"/>
+                        <a:cs typeface="나눔스퀘어 네오 Regular" charset="0"/>
                       </a:endParaRPr>
                     </a:p>
                   </a:txBody>
@@ -7233,16 +7263,16 @@
                           <a:solidFill>
                             <a:srgbClr val="1D1D1F"/>
                           </a:solidFill>
-                          <a:latin typeface="NanumSquare Neo" pitchFamily="34" charset="0"/>
-                          <a:ea typeface="NanumSquare Neo" pitchFamily="34" charset="-122"/>
-                          <a:cs typeface="NanumSquare Neo" pitchFamily="34" charset="-120"/>
+                          <a:latin typeface="나눔스퀘어 네오 Regular" pitchFamily="34" charset="0"/>
+                          <a:ea typeface="나눔스퀘어 네오 Regular" pitchFamily="34" charset="-122"/>
+                          <a:cs typeface="나눔스퀘어 네오 Regular" pitchFamily="34" charset="-120"/>
                         </a:rPr>
-                        <a:t>(진행 중)</a:t>
+                        <a:t>5.72 mW</a:t>
                       </a:r>
                       <a:endParaRPr lang="en-US" sz="1200" dirty="0">
-                        <a:latin typeface="NanumSquare Neo" charset="0"/>
-                        <a:ea typeface="NanumSquare Neo" charset="0"/>
-                        <a:cs typeface="NanumSquare Neo" charset="0"/>
+                        <a:latin typeface="나눔스퀘어 네오 Regular" charset="0"/>
+                        <a:ea typeface="나눔스퀘어 네오 Regular" charset="0"/>
+                        <a:cs typeface="나눔스퀘어 네오 Regular" charset="0"/>
                       </a:endParaRPr>
                     </a:p>
                   </a:txBody>
@@ -7303,16 +7333,16 @@
                           <a:solidFill>
                             <a:srgbClr val="1D1D1F"/>
                           </a:solidFill>
-                          <a:latin typeface="NanumSquare Neo" pitchFamily="34" charset="0"/>
-                          <a:ea typeface="NanumSquare Neo" pitchFamily="34" charset="-122"/>
-                          <a:cs typeface="NanumSquare Neo" pitchFamily="34" charset="-120"/>
+                          <a:latin typeface="나눔스퀘어 네오 Regular" pitchFamily="34" charset="0"/>
+                          <a:ea typeface="나눔스퀘어 네오 Regular" pitchFamily="34" charset="-122"/>
+                          <a:cs typeface="나눔스퀘어 네오 Regular" pitchFamily="34" charset="-120"/>
                         </a:rPr>
                         <a:t>표준셀 면적</a:t>
                       </a:r>
                       <a:endParaRPr lang="en-US" sz="1200" dirty="0">
-                        <a:latin typeface="NanumSquare Neo" charset="0"/>
-                        <a:ea typeface="NanumSquare Neo" charset="0"/>
-                        <a:cs typeface="NanumSquare Neo" charset="0"/>
+                        <a:latin typeface="나눔스퀘어 네오 Regular" charset="0"/>
+                        <a:ea typeface="나눔스퀘어 네오 Regular" charset="0"/>
+                        <a:cs typeface="나눔스퀘어 네오 Regular" charset="0"/>
                       </a:endParaRPr>
                     </a:p>
                   </a:txBody>
@@ -7371,16 +7401,16 @@
                           <a:solidFill>
                             <a:srgbClr val="1D1D1F"/>
                           </a:solidFill>
-                          <a:latin typeface="NanumSquare Neo" pitchFamily="34" charset="0"/>
-                          <a:ea typeface="NanumSquare Neo" pitchFamily="34" charset="-122"/>
-                          <a:cs typeface="NanumSquare Neo" pitchFamily="34" charset="-120"/>
+                          <a:latin typeface="나눔스퀘어 네오 Regular" pitchFamily="34" charset="0"/>
+                          <a:ea typeface="나눔스퀘어 네오 Regular" pitchFamily="34" charset="-122"/>
+                          <a:cs typeface="나눔스퀘어 네오 Regular" pitchFamily="34" charset="-120"/>
                         </a:rPr>
                         <a:t>159,459 µm²</a:t>
                       </a:r>
                       <a:endParaRPr lang="en-US" sz="1200" dirty="0">
-                        <a:latin typeface="NanumSquare Neo" charset="0"/>
-                        <a:ea typeface="NanumSquare Neo" charset="0"/>
-                        <a:cs typeface="NanumSquare Neo" charset="0"/>
+                        <a:latin typeface="나눔스퀘어 네오 Regular" charset="0"/>
+                        <a:ea typeface="나눔스퀘어 네오 Regular" charset="0"/>
+                        <a:cs typeface="나눔스퀘어 네오 Regular" charset="0"/>
                       </a:endParaRPr>
                     </a:p>
                   </a:txBody>
@@ -7439,16 +7469,16 @@
                           <a:solidFill>
                             <a:srgbClr val="1D1D1F"/>
                           </a:solidFill>
-                          <a:latin typeface="NanumSquare Neo" pitchFamily="34" charset="0"/>
-                          <a:ea typeface="NanumSquare Neo" pitchFamily="34" charset="-122"/>
-                          <a:cs typeface="NanumSquare Neo" pitchFamily="34" charset="-120"/>
+                          <a:latin typeface="나눔스퀘어 네오 Regular" pitchFamily="34" charset="0"/>
+                          <a:ea typeface="나눔스퀘어 네오 Regular" pitchFamily="34" charset="-122"/>
+                          <a:cs typeface="나눔스퀘어 네오 Regular" pitchFamily="34" charset="-120"/>
                         </a:rPr>
                         <a:t>162,312 µm²</a:t>
                       </a:r>
                       <a:endParaRPr lang="en-US" sz="1200" dirty="0">
-                        <a:latin typeface="NanumSquare Neo" charset="0"/>
-                        <a:ea typeface="NanumSquare Neo" charset="0"/>
-                        <a:cs typeface="NanumSquare Neo" charset="0"/>
+                        <a:latin typeface="나눔스퀘어 네오 Regular" charset="0"/>
+                        <a:ea typeface="나눔스퀘어 네오 Regular" charset="0"/>
+                        <a:cs typeface="나눔스퀘어 네오 Regular" charset="0"/>
                       </a:endParaRPr>
                     </a:p>
                   </a:txBody>
@@ -7507,16 +7537,16 @@
                           <a:solidFill>
                             <a:srgbClr val="1D1D1F"/>
                           </a:solidFill>
-                          <a:latin typeface="NanumSquare Neo" pitchFamily="34" charset="0"/>
-                          <a:ea typeface="NanumSquare Neo" pitchFamily="34" charset="-122"/>
-                          <a:cs typeface="NanumSquare Neo" pitchFamily="34" charset="-120"/>
+                          <a:latin typeface="나눔스퀘어 네오 Regular" pitchFamily="34" charset="0"/>
+                          <a:ea typeface="나눔스퀘어 네오 Regular" pitchFamily="34" charset="-122"/>
+                          <a:cs typeface="나눔스퀘어 네오 Regular" pitchFamily="34" charset="-120"/>
                         </a:rPr>
-                        <a:t>(진행 중)</a:t>
+                        <a:t>160,213 µm²</a:t>
                       </a:r>
                       <a:endParaRPr lang="en-US" sz="1200" dirty="0">
-                        <a:latin typeface="NanumSquare Neo" charset="0"/>
-                        <a:ea typeface="NanumSquare Neo" charset="0"/>
-                        <a:cs typeface="NanumSquare Neo" charset="0"/>
+                        <a:latin typeface="나눔스퀘어 네오 Regular" charset="0"/>
+                        <a:ea typeface="나눔스퀘어 네오 Regular" charset="0"/>
+                        <a:cs typeface="나눔스퀘어 네오 Regular" charset="0"/>
                       </a:endParaRPr>
                     </a:p>
                   </a:txBody>
@@ -7596,9 +7626,9 @@
                 <a:solidFill>
                   <a:srgbClr val="7A7A7A"/>
                 </a:solidFill>
-                <a:latin typeface="NanumSquare Neo" pitchFamily="34" charset="0"/>
-                <a:ea typeface="NanumSquare Neo" pitchFamily="34" charset="-122"/>
-                <a:cs typeface="NanumSquare Neo" pitchFamily="34" charset="-120"/>
+                <a:latin typeface="나눔스퀘어 네오 Regular" pitchFamily="34" charset="0"/>
+                <a:ea typeface="나눔스퀘어 네오 Regular" pitchFamily="34" charset="-122"/>
+                <a:cs typeface="나눔스퀘어 네오 Regular" pitchFamily="34" charset="-120"/>
               </a:rPr>
               <a:t>괄호 안은 위반 경로 수. 5 ns, util 0.6, GPDK045, Quantus 추출.</a:t>
             </a:r>
@@ -7659,9 +7689,9 @@
                 <a:solidFill>
                   <a:srgbClr val="7A7A7A"/>
                 </a:solidFill>
-                <a:latin typeface="NanumSquare Neo" pitchFamily="34" charset="0"/>
-                <a:ea typeface="NanumSquare Neo" pitchFamily="34" charset="-122"/>
-                <a:cs typeface="NanumSquare Neo" pitchFamily="34" charset="-120"/>
+                <a:latin typeface="나눔스퀘어 네오 Regular" pitchFamily="34" charset="0"/>
+                <a:ea typeface="나눔스퀘어 네오 Regular" pitchFamily="34" charset="-122"/>
+                <a:cs typeface="나눔스퀘어 네오 Regular" pitchFamily="34" charset="-120"/>
               </a:rPr>
               <a:t>P&amp;R 셀 배치도 (플립플롭 = 연회색, 클록 게이트 = 파랑)</a:t>
             </a:r>
@@ -7721,13 +7751,13 @@
               <a:buNone/>
             </a:pPr>
             <a:r>
-              <a:rPr lang="en-US" sz="1600" b="1" dirty="0">
+              <a:rPr lang="en-US" sz="1600" dirty="0">
                 <a:solidFill>
                   <a:srgbClr val="1D1D1F"/>
                 </a:solidFill>
-                <a:latin typeface="NanumSquare Neo" pitchFamily="34" charset="0"/>
-                <a:ea typeface="NanumSquare Neo" pitchFamily="34" charset="-122"/>
-                <a:cs typeface="NanumSquare Neo" pitchFamily="34" charset="-120"/>
+                <a:latin typeface="나눔스퀘어 네오 Bold" pitchFamily="34" charset="0"/>
+                <a:ea typeface="나눔스퀘어 네오 Bold" pitchFamily="34" charset="-122"/>
+                <a:cs typeface="나눔스퀘어 네오 Bold" pitchFamily="34" charset="-120"/>
               </a:rPr>
               <a:t>원인</a:t>
             </a:r>
@@ -7764,9 +7794,9 @@
                 <a:solidFill>
                   <a:srgbClr val="1D1D1F"/>
                 </a:solidFill>
-                <a:latin typeface="NanumSquare Neo" pitchFamily="34" charset="0"/>
-                <a:ea typeface="NanumSquare Neo" pitchFamily="34" charset="-122"/>
-                <a:cs typeface="NanumSquare Neo" pitchFamily="34" charset="-120"/>
+                <a:latin typeface="나눔스퀘어 네오 Regular" pitchFamily="34" charset="0"/>
+                <a:ea typeface="나눔스퀘어 네오 Regular" pitchFamily="34" charset="-122"/>
+                <a:cs typeface="나눔스퀘어 네오 Regular" pitchFamily="34" charset="-120"/>
               </a:rPr>
               <a:t>CTS가 래치를 말단 싱크로 균형 맞춰 AND 게이트보다 약 0.2 ns 일찍 열림</a:t>
             </a:r>
@@ -7826,13 +7856,13 @@
               <a:buNone/>
             </a:pPr>
             <a:r>
-              <a:rPr lang="en-US" sz="1600" b="1" dirty="0">
+              <a:rPr lang="en-US" sz="1600" dirty="0">
                 <a:solidFill>
                   <a:srgbClr val="0066CC"/>
                 </a:solidFill>
-                <a:latin typeface="NanumSquare Neo" pitchFamily="34" charset="0"/>
-                <a:ea typeface="NanumSquare Neo" pitchFamily="34" charset="-122"/>
-                <a:cs typeface="NanumSquare Neo" pitchFamily="34" charset="-120"/>
+                <a:latin typeface="나눔스퀘어 네오 Bold" pitchFamily="34" charset="0"/>
+                <a:ea typeface="나눔스퀘어 네오 Bold" pitchFamily="34" charset="-122"/>
+                <a:cs typeface="나눔스퀘어 네오 Bold" pitchFamily="34" charset="-120"/>
               </a:rPr>
               <a:t>수정과 시도</a:t>
             </a:r>
@@ -7869,9 +7899,9 @@
                 <a:solidFill>
                   <a:srgbClr val="1D1D1F"/>
                 </a:solidFill>
-                <a:latin typeface="NanumSquare Neo" pitchFamily="34" charset="0"/>
-                <a:ea typeface="NanumSquare Neo" pitchFamily="34" charset="-122"/>
-                <a:cs typeface="NanumSquare Neo" pitchFamily="34" charset="-120"/>
+                <a:latin typeface="나눔스퀘어 네오 Regular" pitchFamily="34" charset="0"/>
+                <a:ea typeface="나눔스퀘어 네오 Regular" pitchFamily="34" charset="-122"/>
+                <a:cs typeface="나눔스퀘어 네오 Regular" pitchFamily="34" charset="-120"/>
               </a:rPr>
               <a:t>래치+AND → 통합 클록게이트 셀로 hold 해결. signoff ECO는 setup −0.040 ns로 악화되어 미채택</a:t>
             </a:r>
@@ -7931,13 +7961,13 @@
               <a:buNone/>
             </a:pPr>
             <a:r>
-              <a:rPr lang="en-US" sz="1600" b="1" dirty="0">
+              <a:rPr lang="en-US" sz="1600" dirty="0">
                 <a:solidFill>
                   <a:srgbClr val="0066CC"/>
                 </a:solidFill>
-                <a:latin typeface="NanumSquare Neo" pitchFamily="34" charset="0"/>
-                <a:ea typeface="NanumSquare Neo" pitchFamily="34" charset="-122"/>
-                <a:cs typeface="NanumSquare Neo" pitchFamily="34" charset="-120"/>
+                <a:latin typeface="나눔스퀘어 네오 Bold" pitchFamily="34" charset="0"/>
+                <a:ea typeface="나눔스퀘어 네오 Bold" pitchFamily="34" charset="-122"/>
+                <a:cs typeface="나눔스퀘어 네오 Bold" pitchFamily="34" charset="-120"/>
               </a:rPr>
               <a:t>남은 것</a:t>
             </a:r>
@@ -7974,9 +8004,9 @@
                 <a:solidFill>
                   <a:srgbClr val="1D1D1F"/>
                 </a:solidFill>
-                <a:latin typeface="NanumSquare Neo" pitchFamily="34" charset="0"/>
-                <a:ea typeface="NanumSquare Neo" pitchFamily="34" charset="-122"/>
-                <a:cs typeface="NanumSquare Neo" pitchFamily="34" charset="-120"/>
+                <a:latin typeface="나눔스퀘어 네오 Regular" pitchFamily="34" charset="0"/>
+                <a:ea typeface="나눔스퀘어 네오 Regular" pitchFamily="34" charset="-122"/>
+                <a:cs typeface="나눔스퀘어 네오 Regular" pitchFamily="34" charset="-120"/>
               </a:rPr>
               <a:t>일반 경로 ps 단위 잔여 위반. 클록 여유로 흡수하는 것이 현재 해법</a:t>
             </a:r>
@@ -8016,9 +8046,9 @@
                 <a:solidFill>
                   <a:srgbClr val="7A7A7A"/>
                 </a:solidFill>
-                <a:latin typeface="NanumSquare Neo"/>
-                <a:ea typeface="NanumSquare Neo"/>
-                <a:cs typeface="NanumSquare Neo"/>
+                <a:latin typeface="나눔스퀘어 네오 Regular"/>
+                <a:ea typeface="나눔스퀘어 네오 Regular"/>
+                <a:cs typeface="나눔스퀘어 네오 Regular"/>
               </a:defRPr>
             </a:lvl1pPr>
           </a:lstStyle>
@@ -8084,13 +8114,13 @@
               <a:buNone/>
             </a:pPr>
             <a:r>
-              <a:rPr lang="en-US" sz="2600" b="1" dirty="0">
+              <a:rPr lang="en-US" sz="2600" dirty="0">
                 <a:solidFill>
                   <a:srgbClr val="1D1D1F"/>
                 </a:solidFill>
-                <a:latin typeface="NanumSquare Neo" pitchFamily="34" charset="0"/>
-                <a:ea typeface="NanumSquare Neo" pitchFamily="34" charset="-122"/>
-                <a:cs typeface="NanumSquare Neo" pitchFamily="34" charset="-120"/>
+                <a:latin typeface="나눔스퀘어 네오 Bold" pitchFamily="34" charset="0"/>
+                <a:ea typeface="나눔스퀘어 네오 Bold" pitchFamily="34" charset="-122"/>
+                <a:cs typeface="나눔스퀘어 네오 Bold" pitchFamily="34" charset="-120"/>
               </a:rPr>
               <a:t>회전각은 인과적으로만 추정한다: 미래가 필요한 방법은 버렸다</a:t>
             </a:r>
@@ -8135,20 +8165,20 @@
                         <a:buNone/>
                       </a:pPr>
                       <a:r>
-                        <a:rPr lang="en-US" sz="1400" b="1" dirty="0">
+                        <a:rPr lang="en-US" sz="1400" dirty="0">
                           <a:solidFill>
                             <a:srgbClr val="1D1D1F"/>
                           </a:solidFill>
-                          <a:latin typeface="NanumSquare Neo" pitchFamily="34" charset="0"/>
-                          <a:ea typeface="NanumSquare Neo" pitchFamily="34" charset="-122"/>
-                          <a:cs typeface="NanumSquare Neo" pitchFamily="34" charset="-120"/>
+                          <a:latin typeface="나눔스퀘어 네오 Bold" pitchFamily="34" charset="0"/>
+                          <a:ea typeface="나눔스퀘어 네오 Bold" pitchFamily="34" charset="-122"/>
+                          <a:cs typeface="나눔스퀘어 네오 Bold" pitchFamily="34" charset="-120"/>
                         </a:rPr>
                         <a:t>방법</a:t>
                       </a:r>
                       <a:endParaRPr lang="en-US" sz="1400" dirty="0">
-                        <a:latin typeface="NanumSquare Neo" charset="0"/>
-                        <a:ea typeface="NanumSquare Neo" charset="0"/>
-                        <a:cs typeface="NanumSquare Neo" charset="0"/>
+                        <a:latin typeface="나눔스퀘어 네오 Regular" charset="0"/>
+                        <a:ea typeface="나눔스퀘어 네오 Regular" charset="0"/>
+                        <a:cs typeface="나눔스퀘어 네오 Regular" charset="0"/>
                       </a:endParaRPr>
                     </a:p>
                   </a:txBody>
@@ -8203,20 +8233,20 @@
                         <a:buNone/>
                       </a:pPr>
                       <a:r>
-                        <a:rPr lang="en-US" sz="1400" b="1" dirty="0">
+                        <a:rPr lang="en-US" sz="1400" dirty="0">
                           <a:solidFill>
                             <a:srgbClr val="1D1D1F"/>
                           </a:solidFill>
-                          <a:latin typeface="NanumSquare Neo" pitchFamily="34" charset="0"/>
-                          <a:ea typeface="NanumSquare Neo" pitchFamily="34" charset="-122"/>
-                          <a:cs typeface="NanumSquare Neo" pitchFamily="34" charset="-120"/>
+                          <a:latin typeface="나눔스퀘어 네오 Bold" pitchFamily="34" charset="0"/>
+                          <a:ea typeface="나눔스퀘어 네오 Bold" pitchFamily="34" charset="-122"/>
+                          <a:cs typeface="나눔스퀘어 네오 Bold" pitchFamily="34" charset="-120"/>
                         </a:rPr>
                         <a:t>실시간 가능</a:t>
                       </a:r>
                       <a:endParaRPr lang="en-US" sz="1400" dirty="0">
-                        <a:latin typeface="NanumSquare Neo" charset="0"/>
-                        <a:ea typeface="NanumSquare Neo" charset="0"/>
-                        <a:cs typeface="NanumSquare Neo" charset="0"/>
+                        <a:latin typeface="나눔스퀘어 네오 Regular" charset="0"/>
+                        <a:ea typeface="나눔스퀘어 네오 Regular" charset="0"/>
+                        <a:cs typeface="나눔스퀘어 네오 Regular" charset="0"/>
                       </a:endParaRPr>
                     </a:p>
                   </a:txBody>
@@ -8271,20 +8301,20 @@
                         <a:buNone/>
                       </a:pPr>
                       <a:r>
-                        <a:rPr lang="en-US" sz="1400" b="1" dirty="0">
+                        <a:rPr lang="en-US" sz="1400" dirty="0">
                           <a:solidFill>
                             <a:srgbClr val="1D1D1F"/>
                           </a:solidFill>
-                          <a:latin typeface="NanumSquare Neo" pitchFamily="34" charset="0"/>
-                          <a:ea typeface="NanumSquare Neo" pitchFamily="34" charset="-122"/>
-                          <a:cs typeface="NanumSquare Neo" pitchFamily="34" charset="-120"/>
+                          <a:latin typeface="나눔스퀘어 네오 Bold" pitchFamily="34" charset="0"/>
+                          <a:ea typeface="나눔스퀘어 네오 Bold" pitchFamily="34" charset="-122"/>
+                          <a:cs typeface="나눔스퀘어 네오 Bold" pitchFamily="34" charset="-120"/>
                         </a:rPr>
                         <a:t>UZH 20곳 평균 / 최악 오차</a:t>
                       </a:r>
                       <a:endParaRPr lang="en-US" sz="1400" dirty="0">
-                        <a:latin typeface="NanumSquare Neo" charset="0"/>
-                        <a:ea typeface="NanumSquare Neo" charset="0"/>
-                        <a:cs typeface="NanumSquare Neo" charset="0"/>
+                        <a:latin typeface="나눔스퀘어 네오 Regular" charset="0"/>
+                        <a:ea typeface="나눔스퀘어 네오 Regular" charset="0"/>
+                        <a:cs typeface="나눔스퀘어 네오 Regular" charset="0"/>
                       </a:endParaRPr>
                     </a:p>
                   </a:txBody>
@@ -8345,16 +8375,16 @@
                           <a:solidFill>
                             <a:srgbClr val="1D1D1F"/>
                           </a:solidFill>
-                          <a:latin typeface="NanumSquare Neo" pitchFamily="34" charset="0"/>
-                          <a:ea typeface="NanumSquare Neo" pitchFamily="34" charset="-122"/>
-                          <a:cs typeface="NanumSquare Neo" pitchFamily="34" charset="-120"/>
+                          <a:latin typeface="나눔스퀘어 네오 Regular" pitchFamily="34" charset="0"/>
+                          <a:ea typeface="나눔스퀘어 네오 Regular" pitchFamily="34" charset="-122"/>
+                          <a:cs typeface="나눔스퀘어 네오 Regular" pitchFamily="34" charset="-120"/>
                         </a:rPr>
                         <a:t>Contrast maximization (순수 인과)</a:t>
                       </a:r>
                       <a:endParaRPr lang="en-US" sz="1400" dirty="0">
-                        <a:latin typeface="NanumSquare Neo" charset="0"/>
-                        <a:ea typeface="NanumSquare Neo" charset="0"/>
-                        <a:cs typeface="NanumSquare Neo" charset="0"/>
+                        <a:latin typeface="나눔스퀘어 네오 Regular" charset="0"/>
+                        <a:ea typeface="나눔스퀘어 네오 Regular" charset="0"/>
+                        <a:cs typeface="나눔스퀘어 네오 Regular" charset="0"/>
                       </a:endParaRPr>
                     </a:p>
                   </a:txBody>
@@ -8409,20 +8439,20 @@
                         <a:buNone/>
                       </a:pPr>
                       <a:r>
-                        <a:rPr lang="en-US" sz="1400" b="1" dirty="0">
+                        <a:rPr lang="en-US" sz="1400" dirty="0">
                           <a:solidFill>
                             <a:srgbClr val="0066CC"/>
                           </a:solidFill>
-                          <a:latin typeface="NanumSquare Neo" pitchFamily="34" charset="0"/>
-                          <a:ea typeface="NanumSquare Neo" pitchFamily="34" charset="-122"/>
-                          <a:cs typeface="NanumSquare Neo" pitchFamily="34" charset="-120"/>
+                          <a:latin typeface="나눔스퀘어 네오 Bold" pitchFamily="34" charset="0"/>
+                          <a:ea typeface="나눔스퀘어 네오 Bold" pitchFamily="34" charset="-122"/>
+                          <a:cs typeface="나눔스퀘어 네오 Bold" pitchFamily="34" charset="-120"/>
                         </a:rPr>
                         <a:t>가능</a:t>
                       </a:r>
                       <a:endParaRPr lang="en-US" sz="1400" dirty="0">
-                        <a:latin typeface="NanumSquare Neo" charset="0"/>
-                        <a:ea typeface="NanumSquare Neo" charset="0"/>
-                        <a:cs typeface="NanumSquare Neo" charset="0"/>
+                        <a:latin typeface="나눔스퀘어 네오 Regular" charset="0"/>
+                        <a:ea typeface="나눔스퀘어 네오 Regular" charset="0"/>
+                        <a:cs typeface="나눔스퀘어 네오 Regular" charset="0"/>
                       </a:endParaRPr>
                     </a:p>
                   </a:txBody>
@@ -8481,16 +8511,16 @@
                           <a:solidFill>
                             <a:srgbClr val="1D1D1F"/>
                           </a:solidFill>
-                          <a:latin typeface="NanumSquare Neo" pitchFamily="34" charset="0"/>
-                          <a:ea typeface="NanumSquare Neo" pitchFamily="34" charset="-122"/>
-                          <a:cs typeface="NanumSquare Neo" pitchFamily="34" charset="-120"/>
+                          <a:latin typeface="나눔스퀘어 네오 Regular" pitchFamily="34" charset="0"/>
+                          <a:ea typeface="나눔스퀘어 네오 Regular" pitchFamily="34" charset="-122"/>
+                          <a:cs typeface="나눔스퀘어 네오 Regular" pitchFamily="34" charset="-120"/>
                         </a:rPr>
                         <a:t>11.7° / 59.4°</a:t>
                       </a:r>
                       <a:endParaRPr lang="en-US" sz="1400" dirty="0">
-                        <a:latin typeface="NanumSquare Neo" charset="0"/>
-                        <a:ea typeface="NanumSquare Neo" charset="0"/>
-                        <a:cs typeface="NanumSquare Neo" charset="0"/>
+                        <a:latin typeface="나눔스퀘어 네오 Regular" charset="0"/>
+                        <a:ea typeface="나눔스퀘어 네오 Regular" charset="0"/>
+                        <a:cs typeface="나눔스퀘어 네오 Regular" charset="0"/>
                       </a:endParaRPr>
                     </a:p>
                   </a:txBody>
@@ -8551,84 +8581,16 @@
                           <a:solidFill>
                             <a:srgbClr val="1D1D1F"/>
                           </a:solidFill>
-                          <a:latin typeface="NanumSquare Neo" pitchFamily="34" charset="0"/>
-                          <a:ea typeface="NanumSquare Neo" pitchFamily="34" charset="-122"/>
-                          <a:cs typeface="NanumSquare Neo" pitchFamily="34" charset="-120"/>
+                          <a:latin typeface="나눔스퀘어 네오 Regular" pitchFamily="34" charset="0"/>
+                          <a:ea typeface="나눔스퀘어 네오 Regular" pitchFamily="34" charset="-122"/>
+                          <a:cs typeface="나눔스퀘어 네오 Regular" pitchFamily="34" charset="-120"/>
                         </a:rPr>
                         <a:t>+ forward-backward 평활</a:t>
                       </a:r>
                       <a:endParaRPr lang="en-US" sz="1400" dirty="0">
-                        <a:latin typeface="NanumSquare Neo" charset="0"/>
-                        <a:ea typeface="NanumSquare Neo" charset="0"/>
-                        <a:cs typeface="NanumSquare Neo" charset="0"/>
-                      </a:endParaRPr>
-                    </a:p>
-                  </a:txBody>
-                  <a:tcPr marL="73152" marR="73152" marT="36576" marB="36576" anchor="ctr">
-                    <a:lnL w="6350" cap="flat" cmpd="sng" algn="ctr">
-                      <a:solidFill>
-                        <a:srgbClr val="E0E0E0"/>
-                      </a:solidFill>
-                      <a:prstDash val="solid"/>
-                      <a:round/>
-                      <a:headEnd type="none" w="med" len="med"/>
-                      <a:tailEnd type="none" w="med" len="med"/>
-                    </a:lnL>
-                    <a:lnR w="6350" cap="flat" cmpd="sng" algn="ctr">
-                      <a:solidFill>
-                        <a:srgbClr val="E0E0E0"/>
-                      </a:solidFill>
-                      <a:prstDash val="solid"/>
-                      <a:round/>
-                      <a:headEnd type="none" w="med" len="med"/>
-                      <a:tailEnd type="none" w="med" len="med"/>
-                    </a:lnR>
-                    <a:lnT w="6350" cap="flat" cmpd="sng" algn="ctr">
-                      <a:solidFill>
-                        <a:srgbClr val="E0E0E0"/>
-                      </a:solidFill>
-                      <a:prstDash val="solid"/>
-                      <a:round/>
-                      <a:headEnd type="none" w="med" len="med"/>
-                      <a:tailEnd type="none" w="med" len="med"/>
-                    </a:lnT>
-                    <a:lnB w="6350" cap="flat" cmpd="sng" algn="ctr">
-                      <a:solidFill>
-                        <a:srgbClr val="E0E0E0"/>
-                      </a:solidFill>
-                      <a:prstDash val="solid"/>
-                      <a:round/>
-                      <a:headEnd type="none" w="med" len="med"/>
-                      <a:tailEnd type="none" w="med" len="med"/>
-                    </a:lnB>
-                    <a:solidFill>
-                      <a:srgbClr val="FFFFFF"/>
-                    </a:solidFill>
-                  </a:tcPr>
-                </a:tc>
-                <a:tc>
-                  <a:txBody>
-                    <a:bodyPr/>
-                    <a:lstStyle/>
-                    <a:p>
-                      <a:pPr eaLnBrk="0" indent="0" marL="0">
-                        <a:buNone/>
-                      </a:pPr>
-                      <a:r>
-                        <a:rPr lang="en-US" sz="1400" b="1" dirty="0">
-                          <a:solidFill>
-                            <a:srgbClr val="1D1D1F"/>
-                          </a:solidFill>
-                          <a:latin typeface="NanumSquare Neo" pitchFamily="34" charset="0"/>
-                          <a:ea typeface="NanumSquare Neo" pitchFamily="34" charset="-122"/>
-                          <a:cs typeface="NanumSquare Neo" pitchFamily="34" charset="-120"/>
-                        </a:rPr>
-                        <a:t>불가 (미래 필요)</a:t>
-                      </a:r>
-                      <a:endParaRPr lang="en-US" sz="1400" dirty="0">
-                        <a:latin typeface="NanumSquare Neo" charset="0"/>
-                        <a:ea typeface="NanumSquare Neo" charset="0"/>
-                        <a:cs typeface="NanumSquare Neo" charset="0"/>
+                        <a:latin typeface="나눔스퀘어 네오 Regular" charset="0"/>
+                        <a:ea typeface="나눔스퀘어 네오 Regular" charset="0"/>
+                        <a:cs typeface="나눔스퀘어 네오 Regular" charset="0"/>
                       </a:endParaRPr>
                     </a:p>
                   </a:txBody>
@@ -8687,16 +8649,84 @@
                           <a:solidFill>
                             <a:srgbClr val="1D1D1F"/>
                           </a:solidFill>
-                          <a:latin typeface="NanumSquare Neo" pitchFamily="34" charset="0"/>
-                          <a:ea typeface="NanumSquare Neo" pitchFamily="34" charset="-122"/>
-                          <a:cs typeface="NanumSquare Neo" pitchFamily="34" charset="-120"/>
+                          <a:latin typeface="나눔스퀘어 네오 Bold" pitchFamily="34" charset="0"/>
+                          <a:ea typeface="나눔스퀘어 네오 Bold" pitchFamily="34" charset="-122"/>
+                          <a:cs typeface="나눔스퀘어 네오 Bold" pitchFamily="34" charset="-120"/>
+                        </a:rPr>
+                        <a:t>불가 (미래 필요)</a:t>
+                      </a:r>
+                      <a:endParaRPr lang="en-US" sz="1400" dirty="0">
+                        <a:latin typeface="나눔스퀘어 네오 Regular" charset="0"/>
+                        <a:ea typeface="나눔스퀘어 네오 Regular" charset="0"/>
+                        <a:cs typeface="나눔스퀘어 네오 Regular" charset="0"/>
+                      </a:endParaRPr>
+                    </a:p>
+                  </a:txBody>
+                  <a:tcPr marL="73152" marR="73152" marT="36576" marB="36576" anchor="ctr">
+                    <a:lnL w="6350" cap="flat" cmpd="sng" algn="ctr">
+                      <a:solidFill>
+                        <a:srgbClr val="E0E0E0"/>
+                      </a:solidFill>
+                      <a:prstDash val="solid"/>
+                      <a:round/>
+                      <a:headEnd type="none" w="med" len="med"/>
+                      <a:tailEnd type="none" w="med" len="med"/>
+                    </a:lnL>
+                    <a:lnR w="6350" cap="flat" cmpd="sng" algn="ctr">
+                      <a:solidFill>
+                        <a:srgbClr val="E0E0E0"/>
+                      </a:solidFill>
+                      <a:prstDash val="solid"/>
+                      <a:round/>
+                      <a:headEnd type="none" w="med" len="med"/>
+                      <a:tailEnd type="none" w="med" len="med"/>
+                    </a:lnR>
+                    <a:lnT w="6350" cap="flat" cmpd="sng" algn="ctr">
+                      <a:solidFill>
+                        <a:srgbClr val="E0E0E0"/>
+                      </a:solidFill>
+                      <a:prstDash val="solid"/>
+                      <a:round/>
+                      <a:headEnd type="none" w="med" len="med"/>
+                      <a:tailEnd type="none" w="med" len="med"/>
+                    </a:lnT>
+                    <a:lnB w="6350" cap="flat" cmpd="sng" algn="ctr">
+                      <a:solidFill>
+                        <a:srgbClr val="E0E0E0"/>
+                      </a:solidFill>
+                      <a:prstDash val="solid"/>
+                      <a:round/>
+                      <a:headEnd type="none" w="med" len="med"/>
+                      <a:tailEnd type="none" w="med" len="med"/>
+                    </a:lnB>
+                    <a:solidFill>
+                      <a:srgbClr val="FFFFFF"/>
+                    </a:solidFill>
+                  </a:tcPr>
+                </a:tc>
+                <a:tc>
+                  <a:txBody>
+                    <a:bodyPr/>
+                    <a:lstStyle/>
+                    <a:p>
+                      <a:pPr eaLnBrk="0" indent="0" marL="0">
+                        <a:buNone/>
+                      </a:pPr>
+                      <a:r>
+                        <a:rPr lang="en-US" sz="1400" dirty="0">
+                          <a:solidFill>
+                            <a:srgbClr val="1D1D1F"/>
+                          </a:solidFill>
+                          <a:latin typeface="나눔스퀘어 네오 Regular" pitchFamily="34" charset="0"/>
+                          <a:ea typeface="나눔스퀘어 네오 Regular" pitchFamily="34" charset="-122"/>
+                          <a:cs typeface="나눔스퀘어 네오 Regular" pitchFamily="34" charset="-120"/>
                         </a:rPr>
                         <a:t>10.2° / 44.3°</a:t>
                       </a:r>
                       <a:endParaRPr lang="en-US" sz="1400" dirty="0">
-                        <a:latin typeface="NanumSquare Neo" charset="0"/>
-                        <a:ea typeface="NanumSquare Neo" charset="0"/>
-                        <a:cs typeface="NanumSquare Neo" charset="0"/>
+                        <a:latin typeface="나눔스퀘어 네오 Regular" charset="0"/>
+                        <a:ea typeface="나눔스퀘어 네오 Regular" charset="0"/>
+                        <a:cs typeface="나눔스퀘어 네오 Regular" charset="0"/>
                       </a:endParaRPr>
                     </a:p>
                   </a:txBody>
@@ -8757,84 +8787,16 @@
                           <a:solidFill>
                             <a:srgbClr val="1D1D1F"/>
                           </a:solidFill>
-                          <a:latin typeface="NanumSquare Neo" pitchFamily="34" charset="0"/>
-                          <a:ea typeface="NanumSquare Neo" pitchFamily="34" charset="-122"/>
-                          <a:cs typeface="NanumSquare Neo" pitchFamily="34" charset="-120"/>
+                          <a:latin typeface="나눔스퀘어 네오 Regular" pitchFamily="34" charset="0"/>
+                          <a:ea typeface="나눔스퀘어 네오 Regular" pitchFamily="34" charset="-122"/>
+                          <a:cs typeface="나눔스퀘어 네오 Regular" pitchFamily="34" charset="-120"/>
                         </a:rPr>
                         <a:t>batch bundle adjustment</a:t>
                       </a:r>
                       <a:endParaRPr lang="en-US" sz="1400" dirty="0">
-                        <a:latin typeface="NanumSquare Neo" charset="0"/>
-                        <a:ea typeface="NanumSquare Neo" charset="0"/>
-                        <a:cs typeface="NanumSquare Neo" charset="0"/>
-                      </a:endParaRPr>
-                    </a:p>
-                  </a:txBody>
-                  <a:tcPr marL="73152" marR="73152" marT="36576" marB="36576" anchor="ctr">
-                    <a:lnL w="6350" cap="flat" cmpd="sng" algn="ctr">
-                      <a:solidFill>
-                        <a:srgbClr val="E0E0E0"/>
-                      </a:solidFill>
-                      <a:prstDash val="solid"/>
-                      <a:round/>
-                      <a:headEnd type="none" w="med" len="med"/>
-                      <a:tailEnd type="none" w="med" len="med"/>
-                    </a:lnL>
-                    <a:lnR w="6350" cap="flat" cmpd="sng" algn="ctr">
-                      <a:solidFill>
-                        <a:srgbClr val="E0E0E0"/>
-                      </a:solidFill>
-                      <a:prstDash val="solid"/>
-                      <a:round/>
-                      <a:headEnd type="none" w="med" len="med"/>
-                      <a:tailEnd type="none" w="med" len="med"/>
-                    </a:lnR>
-                    <a:lnT w="6350" cap="flat" cmpd="sng" algn="ctr">
-                      <a:solidFill>
-                        <a:srgbClr val="E0E0E0"/>
-                      </a:solidFill>
-                      <a:prstDash val="solid"/>
-                      <a:round/>
-                      <a:headEnd type="none" w="med" len="med"/>
-                      <a:tailEnd type="none" w="med" len="med"/>
-                    </a:lnT>
-                    <a:lnB w="6350" cap="flat" cmpd="sng" algn="ctr">
-                      <a:solidFill>
-                        <a:srgbClr val="E0E0E0"/>
-                      </a:solidFill>
-                      <a:prstDash val="solid"/>
-                      <a:round/>
-                      <a:headEnd type="none" w="med" len="med"/>
-                      <a:tailEnd type="none" w="med" len="med"/>
-                    </a:lnB>
-                    <a:solidFill>
-                      <a:srgbClr val="FFFFFF"/>
-                    </a:solidFill>
-                  </a:tcPr>
-                </a:tc>
-                <a:tc>
-                  <a:txBody>
-                    <a:bodyPr/>
-                    <a:lstStyle/>
-                    <a:p>
-                      <a:pPr eaLnBrk="0" indent="0" marL="0">
-                        <a:buNone/>
-                      </a:pPr>
-                      <a:r>
-                        <a:rPr lang="en-US" sz="1400" b="1" dirty="0">
-                          <a:solidFill>
-                            <a:srgbClr val="1D1D1F"/>
-                          </a:solidFill>
-                          <a:latin typeface="NanumSquare Neo" pitchFamily="34" charset="0"/>
-                          <a:ea typeface="NanumSquare Neo" pitchFamily="34" charset="-122"/>
-                          <a:cs typeface="NanumSquare Neo" pitchFamily="34" charset="-120"/>
-                        </a:rPr>
-                        <a:t>불가 (미래 필요)</a:t>
-                      </a:r>
-                      <a:endParaRPr lang="en-US" sz="1400" dirty="0">
-                        <a:latin typeface="NanumSquare Neo" charset="0"/>
-                        <a:ea typeface="NanumSquare Neo" charset="0"/>
-                        <a:cs typeface="NanumSquare Neo" charset="0"/>
+                        <a:latin typeface="나눔스퀘어 네오 Regular" charset="0"/>
+                        <a:ea typeface="나눔스퀘어 네오 Regular" charset="0"/>
+                        <a:cs typeface="나눔스퀘어 네오 Regular" charset="0"/>
                       </a:endParaRPr>
                     </a:p>
                   </a:txBody>
@@ -8893,16 +8855,84 @@
                           <a:solidFill>
                             <a:srgbClr val="1D1D1F"/>
                           </a:solidFill>
-                          <a:latin typeface="NanumSquare Neo" pitchFamily="34" charset="0"/>
-                          <a:ea typeface="NanumSquare Neo" pitchFamily="34" charset="-122"/>
-                          <a:cs typeface="NanumSquare Neo" pitchFamily="34" charset="-120"/>
+                          <a:latin typeface="나눔스퀘어 네오 Bold" pitchFamily="34" charset="0"/>
+                          <a:ea typeface="나눔스퀘어 네오 Bold" pitchFamily="34" charset="-122"/>
+                          <a:cs typeface="나눔스퀘어 네오 Bold" pitchFamily="34" charset="-120"/>
+                        </a:rPr>
+                        <a:t>불가 (미래 필요)</a:t>
+                      </a:r>
+                      <a:endParaRPr lang="en-US" sz="1400" dirty="0">
+                        <a:latin typeface="나눔스퀘어 네오 Regular" charset="0"/>
+                        <a:ea typeface="나눔스퀘어 네오 Regular" charset="0"/>
+                        <a:cs typeface="나눔스퀘어 네오 Regular" charset="0"/>
+                      </a:endParaRPr>
+                    </a:p>
+                  </a:txBody>
+                  <a:tcPr marL="73152" marR="73152" marT="36576" marB="36576" anchor="ctr">
+                    <a:lnL w="6350" cap="flat" cmpd="sng" algn="ctr">
+                      <a:solidFill>
+                        <a:srgbClr val="E0E0E0"/>
+                      </a:solidFill>
+                      <a:prstDash val="solid"/>
+                      <a:round/>
+                      <a:headEnd type="none" w="med" len="med"/>
+                      <a:tailEnd type="none" w="med" len="med"/>
+                    </a:lnL>
+                    <a:lnR w="6350" cap="flat" cmpd="sng" algn="ctr">
+                      <a:solidFill>
+                        <a:srgbClr val="E0E0E0"/>
+                      </a:solidFill>
+                      <a:prstDash val="solid"/>
+                      <a:round/>
+                      <a:headEnd type="none" w="med" len="med"/>
+                      <a:tailEnd type="none" w="med" len="med"/>
+                    </a:lnR>
+                    <a:lnT w="6350" cap="flat" cmpd="sng" algn="ctr">
+                      <a:solidFill>
+                        <a:srgbClr val="E0E0E0"/>
+                      </a:solidFill>
+                      <a:prstDash val="solid"/>
+                      <a:round/>
+                      <a:headEnd type="none" w="med" len="med"/>
+                      <a:tailEnd type="none" w="med" len="med"/>
+                    </a:lnT>
+                    <a:lnB w="6350" cap="flat" cmpd="sng" algn="ctr">
+                      <a:solidFill>
+                        <a:srgbClr val="E0E0E0"/>
+                      </a:solidFill>
+                      <a:prstDash val="solid"/>
+                      <a:round/>
+                      <a:headEnd type="none" w="med" len="med"/>
+                      <a:tailEnd type="none" w="med" len="med"/>
+                    </a:lnB>
+                    <a:solidFill>
+                      <a:srgbClr val="FFFFFF"/>
+                    </a:solidFill>
+                  </a:tcPr>
+                </a:tc>
+                <a:tc>
+                  <a:txBody>
+                    <a:bodyPr/>
+                    <a:lstStyle/>
+                    <a:p>
+                      <a:pPr eaLnBrk="0" indent="0" marL="0">
+                        <a:buNone/>
+                      </a:pPr>
+                      <a:r>
+                        <a:rPr lang="en-US" sz="1400" dirty="0">
+                          <a:solidFill>
+                            <a:srgbClr val="1D1D1F"/>
+                          </a:solidFill>
+                          <a:latin typeface="나눔스퀘어 네오 Regular" pitchFamily="34" charset="0"/>
+                          <a:ea typeface="나눔스퀘어 네오 Regular" pitchFamily="34" charset="-122"/>
+                          <a:cs typeface="나눔스퀘어 네오 Regular" pitchFamily="34" charset="-120"/>
                         </a:rPr>
                         <a:t>11.5° / 28.7°</a:t>
                       </a:r>
                       <a:endParaRPr lang="en-US" sz="1400" dirty="0">
-                        <a:latin typeface="NanumSquare Neo" charset="0"/>
-                        <a:ea typeface="NanumSquare Neo" charset="0"/>
-                        <a:cs typeface="NanumSquare Neo" charset="0"/>
+                        <a:latin typeface="나눔스퀘어 네오 Regular" charset="0"/>
+                        <a:ea typeface="나눔스퀘어 네오 Regular" charset="0"/>
+                        <a:cs typeface="나눔스퀘어 네오 Regular" charset="0"/>
                       </a:endParaRPr>
                     </a:p>
                   </a:txBody>
@@ -8963,16 +8993,16 @@
                           <a:solidFill>
                             <a:srgbClr val="1D1D1F"/>
                           </a:solidFill>
-                          <a:latin typeface="NanumSquare Neo" pitchFamily="34" charset="0"/>
-                          <a:ea typeface="NanumSquare Neo" pitchFamily="34" charset="-122"/>
-                          <a:cs typeface="NanumSquare Neo" pitchFamily="34" charset="-120"/>
+                          <a:latin typeface="나눔스퀘어 네오 Regular" pitchFamily="34" charset="0"/>
+                          <a:ea typeface="나눔스퀘어 네오 Regular" pitchFamily="34" charset="-122"/>
+                          <a:cs typeface="나눔스퀘어 네오 Regular" pitchFamily="34" charset="-120"/>
                         </a:rPr>
                         <a:t>bounded-lag (L=8 윈도우, 128 이벤트 FIFO)</a:t>
                       </a:r>
                       <a:endParaRPr lang="en-US" sz="1400" dirty="0">
-                        <a:latin typeface="NanumSquare Neo" charset="0"/>
-                        <a:ea typeface="NanumSquare Neo" charset="0"/>
-                        <a:cs typeface="NanumSquare Neo" charset="0"/>
+                        <a:latin typeface="나눔스퀘어 네오 Regular" charset="0"/>
+                        <a:ea typeface="나눔스퀘어 네오 Regular" charset="0"/>
+                        <a:cs typeface="나눔스퀘어 네오 Regular" charset="0"/>
                       </a:endParaRPr>
                     </a:p>
                   </a:txBody>
@@ -9027,20 +9057,20 @@
                         <a:buNone/>
                       </a:pPr>
                       <a:r>
-                        <a:rPr lang="en-US" sz="1400" b="1" dirty="0">
+                        <a:rPr lang="en-US" sz="1400" dirty="0">
                           <a:solidFill>
                             <a:srgbClr val="0066CC"/>
                           </a:solidFill>
-                          <a:latin typeface="NanumSquare Neo" pitchFamily="34" charset="0"/>
-                          <a:ea typeface="NanumSquare Neo" pitchFamily="34" charset="-122"/>
-                          <a:cs typeface="NanumSquare Neo" pitchFamily="34" charset="-120"/>
+                          <a:latin typeface="나눔스퀘어 네오 Bold" pitchFamily="34" charset="0"/>
+                          <a:ea typeface="나눔스퀘어 네오 Bold" pitchFamily="34" charset="-122"/>
+                          <a:cs typeface="나눔스퀘어 네오 Bold" pitchFamily="34" charset="-120"/>
                         </a:rPr>
                         <a:t>가능 (지연 L)</a:t>
                       </a:r>
                       <a:endParaRPr lang="en-US" sz="1400" dirty="0">
-                        <a:latin typeface="NanumSquare Neo" charset="0"/>
-                        <a:ea typeface="NanumSquare Neo" charset="0"/>
-                        <a:cs typeface="NanumSquare Neo" charset="0"/>
+                        <a:latin typeface="나눔스퀘어 네오 Regular" charset="0"/>
+                        <a:ea typeface="나눔스퀘어 네오 Regular" charset="0"/>
+                        <a:cs typeface="나눔스퀘어 네오 Regular" charset="0"/>
                       </a:endParaRPr>
                     </a:p>
                   </a:txBody>
@@ -9099,16 +9129,16 @@
                           <a:solidFill>
                             <a:srgbClr val="1D1D1F"/>
                           </a:solidFill>
-                          <a:latin typeface="NanumSquare Neo" pitchFamily="34" charset="0"/>
-                          <a:ea typeface="NanumSquare Neo" pitchFamily="34" charset="-122"/>
-                          <a:cs typeface="NanumSquare Neo" pitchFamily="34" charset="-120"/>
+                          <a:latin typeface="나눔스퀘어 네오 Regular" pitchFamily="34" charset="0"/>
+                          <a:ea typeface="나눔스퀘어 네오 Regular" pitchFamily="34" charset="-122"/>
+                          <a:cs typeface="나눔스퀘어 네오 Regular" pitchFamily="34" charset="-120"/>
                         </a:rPr>
                         <a:t>10.6° / 50.3°</a:t>
                       </a:r>
                       <a:endParaRPr lang="en-US" sz="1400" dirty="0">
-                        <a:latin typeface="NanumSquare Neo" charset="0"/>
-                        <a:ea typeface="NanumSquare Neo" charset="0"/>
-                        <a:cs typeface="NanumSquare Neo" charset="0"/>
+                        <a:latin typeface="나눔스퀘어 네오 Regular" charset="0"/>
+                        <a:ea typeface="나눔스퀘어 네오 Regular" charset="0"/>
+                        <a:cs typeface="나눔스퀘어 네오 Regular" charset="0"/>
                       </a:endParaRPr>
                     </a:p>
                   </a:txBody>
@@ -9212,9 +9242,9 @@
                 <a:solidFill>
                   <a:srgbClr val="7A7A7A"/>
                 </a:solidFill>
-                <a:latin typeface="NanumSquare Neo" pitchFamily="34" charset="0"/>
-                <a:ea typeface="NanumSquare Neo" pitchFamily="34" charset="-122"/>
-                <a:cs typeface="NanumSquare Neo" pitchFamily="34" charset="-120"/>
+                <a:latin typeface="나눔스퀘어 네오 Regular" pitchFamily="34" charset="0"/>
+                <a:ea typeface="나눔스퀘어 네오 Regular" pitchFamily="34" charset="-122"/>
+                <a:cs typeface="나눔스퀘어 네오 Regular" pitchFamily="34" charset="-120"/>
               </a:rPr>
               <a:t>실제 DELTA 영상: 장면 속 직선 방향으로 만든 회전각 정답(파랑) vs 우리 추정(주황), 오른쪽은 오차(°)</a:t>
             </a:r>
@@ -9274,13 +9304,13 @@
               <a:buNone/>
             </a:pPr>
             <a:r>
-              <a:rPr lang="en-US" sz="1600" b="1" dirty="0">
+              <a:rPr lang="en-US" sz="1600" dirty="0">
                 <a:solidFill>
                   <a:srgbClr val="0066CC"/>
                 </a:solidFill>
-                <a:latin typeface="NanumSquare Neo" pitchFamily="34" charset="0"/>
-                <a:ea typeface="NanumSquare Neo" pitchFamily="34" charset="-122"/>
-                <a:cs typeface="NanumSquare Neo" pitchFamily="34" charset="-120"/>
+                <a:latin typeface="나눔스퀘어 네오 Bold" pitchFamily="34" charset="0"/>
+                <a:ea typeface="나눔스퀘어 네오 Bold" pitchFamily="34" charset="-122"/>
+                <a:cs typeface="나눔스퀘어 네오 Bold" pitchFamily="34" charset="-120"/>
               </a:rPr>
               <a:t>추정기 RTL (Bayes filter)</a:t>
             </a:r>
@@ -9317,9 +9347,9 @@
                 <a:solidFill>
                   <a:srgbClr val="1D1D1F"/>
                 </a:solidFill>
-                <a:latin typeface="NanumSquare Neo" pitchFamily="34" charset="0"/>
-                <a:ea typeface="NanumSquare Neo" pitchFamily="34" charset="-122"/>
-                <a:cs typeface="NanumSquare Neo" pitchFamily="34" charset="-120"/>
+                <a:latin typeface="나눔스퀘어 네오 Regular" pitchFamily="34" charset="0"/>
+                <a:ea typeface="나눔스퀘어 네오 Regular" pitchFamily="34" charset="-122"/>
+                <a:cs typeface="나눔스퀘어 네오 Regular" pitchFamily="34" charset="-120"/>
               </a:rPr>
               <a:t>이산 베이즈 필터를 고정소수점으로 구현. UZH 이벤트 300개 재생에서 오라클과 비트 단위로 일치(1024각도 버전).</a:t>
             </a:r>
@@ -9379,13 +9409,13 @@
               <a:buNone/>
             </a:pPr>
             <a:r>
-              <a:rPr lang="en-US" sz="1600" b="1" dirty="0">
+              <a:rPr lang="en-US" sz="1600" dirty="0">
                 <a:solidFill>
                   <a:srgbClr val="1D1D1F"/>
                 </a:solidFill>
-                <a:latin typeface="NanumSquare Neo" pitchFamily="34" charset="0"/>
-                <a:ea typeface="NanumSquare Neo" pitchFamily="34" charset="-122"/>
-                <a:cs typeface="NanumSquare Neo" pitchFamily="34" charset="-120"/>
+                <a:latin typeface="나눔스퀘어 네오 Bold" pitchFamily="34" charset="0"/>
+                <a:ea typeface="나눔스퀘어 네오 Bold" pitchFamily="34" charset="-122"/>
+                <a:cs typeface="나눔스퀘어 네오 Bold" pitchFamily="34" charset="-120"/>
               </a:rPr>
               <a:t>정직한 한계</a:t>
             </a:r>
@@ -9422,9 +9452,9 @@
                 <a:solidFill>
                   <a:srgbClr val="1D1D1F"/>
                 </a:solidFill>
-                <a:latin typeface="NanumSquare Neo" pitchFamily="34" charset="0"/>
-                <a:ea typeface="NanumSquare Neo" pitchFamily="34" charset="-122"/>
-                <a:cs typeface="NanumSquare Neo" pitchFamily="34" charset="-120"/>
+                <a:latin typeface="나눔스퀘어 네오 Regular" pitchFamily="34" charset="0"/>
+                <a:ea typeface="나눔스퀘어 네오 Regular" pitchFamily="34" charset="-122"/>
+                <a:cs typeface="나눔스퀘어 네오 Regular" pitchFamily="34" charset="-120"/>
               </a:rPr>
               <a:t>정확도는 장면에 크게 의존한다. 로봇팔 실측(RobotEvt)에서는 UZH용 파라미터 그대로 평균 35.2° / 최악 91.8°.</a:t>
             </a:r>
@@ -9464,9 +9494,9 @@
                 <a:solidFill>
                   <a:srgbClr val="7A7A7A"/>
                 </a:solidFill>
-                <a:latin typeface="NanumSquare Neo"/>
-                <a:ea typeface="NanumSquare Neo"/>
-                <a:cs typeface="NanumSquare Neo"/>
+                <a:latin typeface="나눔스퀘어 네오 Regular"/>
+                <a:ea typeface="나눔스퀘어 네오 Regular"/>
+                <a:cs typeface="나눔스퀘어 네오 Regular"/>
               </a:defRPr>
             </a:lvl1pPr>
           </a:lstStyle>
@@ -9532,13 +9562,13 @@
               <a:buNone/>
             </a:pPr>
             <a:r>
-              <a:rPr lang="en-US" sz="2600" b="1" dirty="0">
+              <a:rPr lang="en-US" sz="2600" dirty="0">
                 <a:solidFill>
                   <a:srgbClr val="1D1D1F"/>
                 </a:solidFill>
-                <a:latin typeface="NanumSquare Neo" pitchFamily="34" charset="0"/>
-                <a:ea typeface="NanumSquare Neo" pitchFamily="34" charset="-122"/>
-                <a:cs typeface="NanumSquare Neo" pitchFamily="34" charset="-120"/>
+                <a:latin typeface="나눔스퀘어 네오 Bold" pitchFamily="34" charset="0"/>
+                <a:ea typeface="나눔스퀘어 네오 Bold" pitchFamily="34" charset="-122"/>
+                <a:cs typeface="나눔스퀘어 네오 Bold" pitchFamily="34" charset="-120"/>
               </a:rPr>
               <a:t>실제 센서 영상으로 만든 월드 지도: 방 구조가 복원된다</a:t>
             </a:r>
@@ -9599,9 +9629,9 @@
                 <a:solidFill>
                   <a:srgbClr val="7A7A7A"/>
                 </a:solidFill>
-                <a:latin typeface="NanumSquare Neo" pitchFamily="34" charset="0"/>
-                <a:ea typeface="NanumSquare Neo" pitchFamily="34" charset="-122"/>
-                <a:cs typeface="NanumSquare Neo" pitchFamily="34" charset="-120"/>
+                <a:latin typeface="나눔스퀘어 네오 Regular" pitchFamily="34" charset="0"/>
+                <a:ea typeface="나눔스퀘어 네오 Regular" pitchFamily="34" charset="-122"/>
+                <a:cs typeface="나눔스퀘어 네오 Regular" pitchFamily="34" charset="-120"/>
               </a:rPr>
               <a:t>실제 DELTA 영상(960×720) 월드 지도: 첫 결과 · 최종(균형형) · 최종(정제형) · 같은 시점의 실제 프레임(각도 보정 후)</a:t>
             </a:r>
@@ -9661,13 +9691,13 @@
               <a:buNone/>
             </a:pPr>
             <a:r>
-              <a:rPr lang="en-US" sz="1600" b="1" dirty="0">
+              <a:rPr lang="en-US" sz="1600" dirty="0">
                 <a:solidFill>
                   <a:srgbClr val="1D1D1F"/>
                 </a:solidFill>
-                <a:latin typeface="NanumSquare Neo" pitchFamily="34" charset="0"/>
-                <a:ea typeface="NanumSquare Neo" pitchFamily="34" charset="-122"/>
-                <a:cs typeface="NanumSquare Neo" pitchFamily="34" charset="-120"/>
+                <a:latin typeface="나눔스퀘어 네오 Bold" pitchFamily="34" charset="0"/>
+                <a:ea typeface="나눔스퀘어 네오 Bold" pitchFamily="34" charset="-122"/>
+                <a:cs typeface="나눔스퀘어 네오 Bold" pitchFamily="34" charset="-120"/>
               </a:rPr>
               <a:t>정직한 평가</a:t>
             </a:r>
@@ -9704,9 +9734,9 @@
                 <a:solidFill>
                   <a:srgbClr val="1D1D1F"/>
                 </a:solidFill>
-                <a:latin typeface="NanumSquare Neo" pitchFamily="34" charset="0"/>
-                <a:ea typeface="NanumSquare Neo" pitchFamily="34" charset="-122"/>
-                <a:cs typeface="NanumSquare Neo" pitchFamily="34" charset="-120"/>
+                <a:latin typeface="나눔스퀘어 네오 Regular" pitchFamily="34" charset="0"/>
+                <a:ea typeface="나눔스퀘어 네오 Regular" pitchFamily="34" charset="-122"/>
+                <a:cs typeface="나눔스퀘어 네오 Regular" pitchFamily="34" charset="-120"/>
               </a:rPr>
               <a:t>정답이 없는 실제 영상은 육안과 간접 지표로만 평가</a:t>
             </a:r>
@@ -9771,9 +9801,9 @@
                 <a:solidFill>
                   <a:srgbClr val="1D1D1F"/>
                 </a:solidFill>
-                <a:latin typeface="NanumSquare Neo" pitchFamily="34" charset="0"/>
-                <a:ea typeface="NanumSquare Neo" pitchFamily="34" charset="-122"/>
-                <a:cs typeface="NanumSquare Neo" pitchFamily="34" charset="-120"/>
+                <a:latin typeface="나눔스퀘어 네오 Regular" pitchFamily="34" charset="0"/>
+                <a:ea typeface="나눔스퀘어 네오 Regular" pitchFamily="34" charset="-122"/>
+                <a:cs typeface="나눔스퀘어 네오 Regular" pitchFamily="34" charset="-120"/>
               </a:rPr>
               <a:t>UZH(모션캡처 정답): 좌 = 정답 자세 맵(시간 어긋남 보정 전이라 번짐), 우 = 우리 ECC 추정 맵</a:t>
             </a:r>
@@ -9792,9 +9822,9 @@
                 <a:solidFill>
                   <a:srgbClr val="1D1D1F"/>
                 </a:solidFill>
-                <a:latin typeface="NanumSquare Neo" pitchFamily="34" charset="0"/>
-                <a:ea typeface="NanumSquare Neo" pitchFamily="34" charset="-122"/>
-                <a:cs typeface="NanumSquare Neo" pitchFamily="34" charset="-120"/>
+                <a:latin typeface="나눔스퀘어 네오 Regular" pitchFamily="34" charset="0"/>
+                <a:ea typeface="나눔스퀘어 네오 Regular" pitchFamily="34" charset="-122"/>
+                <a:cs typeface="나눔스퀘어 네오 Regular" pitchFamily="34" charset="-120"/>
               </a:rPr>
               <a:t>소프트웨어(ECC) 추정기: 광축 1초 구간 θ 오차 2.4~3.2° (정답 시간 보정 후)</a:t>
             </a:r>
@@ -9834,9 +9864,9 @@
                 <a:solidFill>
                   <a:srgbClr val="7A7A7A"/>
                 </a:solidFill>
-                <a:latin typeface="NanumSquare Neo"/>
-                <a:ea typeface="NanumSquare Neo"/>
-                <a:cs typeface="NanumSquare Neo"/>
+                <a:latin typeface="나눔스퀘어 네오 Regular"/>
+                <a:ea typeface="나눔스퀘어 네오 Regular"/>
+                <a:cs typeface="나눔스퀘어 네오 Regular"/>
               </a:defRPr>
             </a:lvl1pPr>
           </a:lstStyle>
@@ -9902,13 +9932,13 @@
               <a:buNone/>
             </a:pPr>
             <a:r>
-              <a:rPr lang="en-US" sz="2600" b="1" dirty="0">
+              <a:rPr lang="en-US" sz="2600" dirty="0">
                 <a:solidFill>
                   <a:srgbClr val="1D1D1F"/>
                 </a:solidFill>
-                <a:latin typeface="NanumSquare Neo" pitchFamily="34" charset="0"/>
-                <a:ea typeface="NanumSquare Neo" pitchFamily="34" charset="-122"/>
-                <a:cs typeface="NanumSquare Neo" pitchFamily="34" charset="-120"/>
+                <a:latin typeface="나눔스퀘어 네오 Bold" pitchFamily="34" charset="0"/>
+                <a:ea typeface="나눔스퀘어 네오 Bold" pitchFamily="34" charset="-122"/>
+                <a:cs typeface="나눔스퀘어 네오 Bold" pitchFamily="34" charset="-120"/>
               </a:rPr>
               <a:t>다른 영상과 합성 정답에서도 같은 파이프라인이 동작한다</a:t>
             </a:r>
@@ -9969,9 +9999,9 @@
                 <a:solidFill>
                   <a:srgbClr val="7A7A7A"/>
                 </a:solidFill>
-                <a:latin typeface="NanumSquare Neo" pitchFamily="34" charset="0"/>
-                <a:ea typeface="NanumSquare Neo" pitchFamily="34" charset="-122"/>
-                <a:cs typeface="NanumSquare Neo" pitchFamily="34" charset="-120"/>
+                <a:latin typeface="나눔스퀘어 네오 Regular" pitchFamily="34" charset="0"/>
+                <a:ea typeface="나눔스퀘어 네오 Regular" pitchFamily="34" charset="-122"/>
+                <a:cs typeface="나눔스퀘어 네오 Regular" pitchFamily="34" charset="-120"/>
               </a:rPr>
               <a:t>실제 팬(pan) 영상으로 만든 월드 지도 (한 번에 파노라마로 쌓임)</a:t>
             </a:r>
@@ -10032,9 +10062,9 @@
                 <a:solidFill>
                   <a:srgbClr val="7A7A7A"/>
                 </a:solidFill>
-                <a:latin typeface="NanumSquare Neo" pitchFamily="34" charset="0"/>
-                <a:ea typeface="NanumSquare Neo" pitchFamily="34" charset="-122"/>
-                <a:cs typeface="NanumSquare Neo" pitchFamily="34" charset="-120"/>
+                <a:latin typeface="나눔스퀘어 네오 Regular" pitchFamily="34" charset="0"/>
+                <a:ea typeface="나눔스퀘어 네오 Regular" pitchFamily="34" charset="-122"/>
+                <a:cs typeface="나눔스퀘어 네오 Regular" pitchFamily="34" charset="-120"/>
               </a:rPr>
               <a:t>실제 롤 영상의 상대 3D 점구름</a:t>
             </a:r>
@@ -10095,9 +10125,9 @@
                 <a:solidFill>
                   <a:srgbClr val="7A7A7A"/>
                 </a:solidFill>
-                <a:latin typeface="NanumSquare Neo" pitchFamily="34" charset="0"/>
-                <a:ea typeface="NanumSquare Neo" pitchFamily="34" charset="-122"/>
-                <a:cs typeface="NanumSquare Neo" pitchFamily="34" charset="-120"/>
+                <a:latin typeface="나눔스퀘어 네오 Regular" pitchFamily="34" charset="0"/>
+                <a:ea typeface="나눔스퀘어 네오 Regular" pitchFamily="34" charset="-122"/>
+                <a:cs typeface="나눔스퀘어 네오 Regular" pitchFamily="34" charset="-120"/>
               </a:rPr>
               <a:t>합성 정답 장면 대비 복원 결과</a:t>
             </a:r>
@@ -10157,13 +10187,13 @@
               <a:buNone/>
             </a:pPr>
             <a:r>
-              <a:rPr lang="en-US" sz="1600" b="1" dirty="0">
+              <a:rPr lang="en-US" sz="1600" dirty="0">
                 <a:solidFill>
                   <a:srgbClr val="1D1D1F"/>
                 </a:solidFill>
-                <a:latin typeface="NanumSquare Neo" pitchFamily="34" charset="0"/>
-                <a:ea typeface="NanumSquare Neo" pitchFamily="34" charset="-122"/>
-                <a:cs typeface="NanumSquare Neo" pitchFamily="34" charset="-120"/>
+                <a:latin typeface="나눔스퀘어 네오 Bold" pitchFamily="34" charset="0"/>
+                <a:ea typeface="나눔스퀘어 네오 Bold" pitchFamily="34" charset="-122"/>
+                <a:cs typeface="나눔스퀘어 네오 Bold" pitchFamily="34" charset="-120"/>
               </a:rPr>
               <a:t>주의</a:t>
             </a:r>
@@ -10200,9 +10230,9 @@
                 <a:solidFill>
                   <a:srgbClr val="1D1D1F"/>
                 </a:solidFill>
-                <a:latin typeface="NanumSquare Neo" pitchFamily="34" charset="0"/>
-                <a:ea typeface="NanumSquare Neo" pitchFamily="34" charset="-122"/>
-                <a:cs typeface="NanumSquare Neo" pitchFamily="34" charset="-120"/>
+                <a:latin typeface="나눔스퀘어 네오 Regular" pitchFamily="34" charset="0"/>
+                <a:ea typeface="나눔스퀘어 네오 Regular" pitchFamily="34" charset="-122"/>
+                <a:cs typeface="나눔스퀘어 네오 Regular" pitchFamily="34" charset="-120"/>
               </a:rPr>
               <a:t>합성 점수는 모델이 정확히 맞는 세계의 값, 실제 영상엔 정답 없음</a:t>
             </a:r>
@@ -10242,9 +10272,9 @@
                 <a:solidFill>
                   <a:srgbClr val="7A7A7A"/>
                 </a:solidFill>
-                <a:latin typeface="NanumSquare Neo"/>
-                <a:ea typeface="NanumSquare Neo"/>
-                <a:cs typeface="NanumSquare Neo"/>
+                <a:latin typeface="나눔스퀘어 네오 Regular"/>
+                <a:ea typeface="나눔스퀘어 네오 Regular"/>
+                <a:cs typeface="나눔스퀘어 네오 Regular"/>
               </a:defRPr>
             </a:lvl1pPr>
           </a:lstStyle>
@@ -10310,13 +10340,13 @@
               <a:buNone/>
             </a:pPr>
             <a:r>
-              <a:rPr lang="en-US" sz="2600" b="1" dirty="0">
+              <a:rPr lang="en-US" sz="2600" dirty="0">
                 <a:solidFill>
                   <a:srgbClr val="1D1D1F"/>
                 </a:solidFill>
-                <a:latin typeface="NanumSquare Neo" pitchFamily="34" charset="0"/>
-                <a:ea typeface="NanumSquare Neo" pitchFamily="34" charset="-122"/>
-                <a:cs typeface="NanumSquare Neo" pitchFamily="34" charset="-120"/>
+                <a:latin typeface="나눔스퀘어 네오 Bold" pitchFamily="34" charset="0"/>
+                <a:ea typeface="나눔스퀘어 네오 Bold" pitchFamily="34" charset="-122"/>
+                <a:cs typeface="나눔스퀘어 네오 Bold" pitchFamily="34" charset="-120"/>
               </a:rPr>
               <a:t>남은 문제: 회전 중심이 어긋나 가까운 물체는 번진다</a:t>
             </a:r>
@@ -10377,9 +10407,9 @@
                 <a:solidFill>
                   <a:srgbClr val="7A7A7A"/>
                 </a:solidFill>
-                <a:latin typeface="NanumSquare Neo" pitchFamily="34" charset="0"/>
-                <a:ea typeface="NanumSquare Neo" pitchFamily="34" charset="-122"/>
-                <a:cs typeface="NanumSquare Neo" pitchFamily="34" charset="-120"/>
+                <a:latin typeface="나눔스퀘어 네오 Regular" pitchFamily="34" charset="0"/>
+                <a:ea typeface="나눔스퀘어 네오 Regular" pitchFamily="34" charset="-122"/>
+                <a:cs typeface="나눔스퀘어 네오 Regular" pitchFamily="34" charset="-120"/>
               </a:rPr>
               <a:t>회전 중심 하나로 쌓은 지도(좌) → 깊이 층별 지도에서 선명한 층 선택(중) → 추정된 상대 깊이(우)</a:t>
             </a:r>
@@ -10439,13 +10469,13 @@
               <a:buNone/>
             </a:pPr>
             <a:r>
-              <a:rPr lang="en-US" sz="1600" b="1" dirty="0">
+              <a:rPr lang="en-US" sz="1600" dirty="0">
                 <a:solidFill>
                   <a:srgbClr val="1D1D1F"/>
                 </a:solidFill>
-                <a:latin typeface="NanumSquare Neo" pitchFamily="34" charset="0"/>
-                <a:ea typeface="NanumSquare Neo" pitchFamily="34" charset="-122"/>
-                <a:cs typeface="NanumSquare Neo" pitchFamily="34" charset="-120"/>
+                <a:latin typeface="나눔스퀘어 네오 Bold" pitchFamily="34" charset="0"/>
+                <a:ea typeface="나눔스퀘어 네오 Bold" pitchFamily="34" charset="-122"/>
+                <a:cs typeface="나눔스퀘어 네오 Bold" pitchFamily="34" charset="-120"/>
               </a:rPr>
               <a:t>한계</a:t>
             </a:r>
@@ -10482,9 +10512,9 @@
                 <a:solidFill>
                   <a:srgbClr val="1D1D1F"/>
                 </a:solidFill>
-                <a:latin typeface="NanumSquare Neo" pitchFamily="34" charset="0"/>
-                <a:ea typeface="NanumSquare Neo" pitchFamily="34" charset="-122"/>
-                <a:cs typeface="NanumSquare Neo" pitchFamily="34" charset="-120"/>
+                <a:latin typeface="나눔스퀘어 네오 Regular" pitchFamily="34" charset="0"/>
+                <a:ea typeface="나눔스퀘어 네오 Regular" pitchFamily="34" charset="-122"/>
+                <a:cs typeface="나눔스퀘어 네오 Regular" pitchFamily="34" charset="-120"/>
               </a:rPr>
               <a:t>깊이 층 선택은 소프트웨어 모델이다. RTL에는 회전만 반영했고, 시차 보정은 향후 과제로 남겼다.</a:t>
             </a:r>
@@ -10524,9 +10554,9 @@
                 <a:solidFill>
                   <a:srgbClr val="7A7A7A"/>
                 </a:solidFill>
-                <a:latin typeface="NanumSquare Neo"/>
-                <a:ea typeface="NanumSquare Neo"/>
-                <a:cs typeface="NanumSquare Neo"/>
+                <a:latin typeface="나눔스퀘어 네오 Regular"/>
+                <a:ea typeface="나눔스퀘어 네오 Regular"/>
+                <a:cs typeface="나눔스퀘어 네오 Regular"/>
               </a:defRPr>
             </a:lvl1pPr>
           </a:lstStyle>
@@ -10592,13 +10622,13 @@
               <a:buNone/>
             </a:pPr>
             <a:r>
-              <a:rPr lang="en-US" sz="2600" b="1" dirty="0">
+              <a:rPr lang="en-US" sz="2600" dirty="0">
                 <a:solidFill>
                   <a:srgbClr val="1D1D1F"/>
                 </a:solidFill>
-                <a:latin typeface="NanumSquare Neo" pitchFamily="34" charset="0"/>
-                <a:ea typeface="NanumSquare Neo" pitchFamily="34" charset="-122"/>
-                <a:cs typeface="NanumSquare Neo" pitchFamily="34" charset="-120"/>
+                <a:latin typeface="나눔스퀘어 네오 Bold" pitchFamily="34" charset="0"/>
+                <a:ea typeface="나눔스퀘어 네오 Bold" pitchFamily="34" charset="-122"/>
+                <a:cs typeface="나눔스퀘어 네오 Bold" pitchFamily="34" charset="-120"/>
               </a:rPr>
               <a:t>생체 모방은 실제 데이터로 이긴 것만 남겼다</a:t>
             </a:r>
@@ -10643,20 +10673,20 @@
                         <a:buNone/>
                       </a:pPr>
                       <a:r>
-                        <a:rPr lang="en-US" sz="1300" b="1" dirty="0">
+                        <a:rPr lang="en-US" sz="1300" dirty="0">
                           <a:solidFill>
                             <a:srgbClr val="1D1D1F"/>
                           </a:solidFill>
-                          <a:latin typeface="NanumSquare Neo" pitchFamily="34" charset="0"/>
-                          <a:ea typeface="NanumSquare Neo" pitchFamily="34" charset="-122"/>
-                          <a:cs typeface="NanumSquare Neo" pitchFamily="34" charset="-120"/>
+                          <a:latin typeface="나눔스퀘어 네오 Bold" pitchFamily="34" charset="0"/>
+                          <a:ea typeface="나눔스퀘어 네오 Bold" pitchFamily="34" charset="-122"/>
+                          <a:cs typeface="나눔스퀘어 네오 Bold" pitchFamily="34" charset="-120"/>
                         </a:rPr>
                         <a:t>생체 모방 아이디어</a:t>
                       </a:r>
                       <a:endParaRPr lang="en-US" sz="1300" dirty="0">
-                        <a:latin typeface="NanumSquare Neo" charset="0"/>
-                        <a:ea typeface="NanumSquare Neo" charset="0"/>
-                        <a:cs typeface="NanumSquare Neo" charset="0"/>
+                        <a:latin typeface="나눔스퀘어 네오 Regular" charset="0"/>
+                        <a:ea typeface="나눔스퀘어 네오 Regular" charset="0"/>
+                        <a:cs typeface="나눔스퀘어 네오 Regular" charset="0"/>
                       </a:endParaRPr>
                     </a:p>
                   </a:txBody>
@@ -10711,20 +10741,20 @@
                         <a:buNone/>
                       </a:pPr>
                       <a:r>
-                        <a:rPr lang="en-US" sz="1300" b="1" dirty="0">
+                        <a:rPr lang="en-US" sz="1300" dirty="0">
                           <a:solidFill>
                             <a:srgbClr val="1D1D1F"/>
                           </a:solidFill>
-                          <a:latin typeface="NanumSquare Neo" pitchFamily="34" charset="0"/>
-                          <a:ea typeface="NanumSquare Neo" pitchFamily="34" charset="-122"/>
-                          <a:cs typeface="NanumSquare Neo" pitchFamily="34" charset="-120"/>
+                          <a:latin typeface="나눔스퀘어 네오 Bold" pitchFamily="34" charset="0"/>
+                          <a:ea typeface="나눔스퀘어 네오 Bold" pitchFamily="34" charset="-122"/>
+                          <a:cs typeface="나눔스퀘어 네오 Bold" pitchFamily="34" charset="-120"/>
                         </a:rPr>
                         <a:t>결과</a:t>
                       </a:r>
                       <a:endParaRPr lang="en-US" sz="1300" dirty="0">
-                        <a:latin typeface="NanumSquare Neo" charset="0"/>
-                        <a:ea typeface="NanumSquare Neo" charset="0"/>
-                        <a:cs typeface="NanumSquare Neo" charset="0"/>
+                        <a:latin typeface="나눔스퀘어 네오 Regular" charset="0"/>
+                        <a:ea typeface="나눔스퀘어 네오 Regular" charset="0"/>
+                        <a:cs typeface="나눔스퀘어 네오 Regular" charset="0"/>
                       </a:endParaRPr>
                     </a:p>
                   </a:txBody>
@@ -10779,20 +10809,20 @@
                         <a:buNone/>
                       </a:pPr>
                       <a:r>
-                        <a:rPr lang="en-US" sz="1300" b="1" dirty="0">
+                        <a:rPr lang="en-US" sz="1300" dirty="0">
                           <a:solidFill>
                             <a:srgbClr val="1D1D1F"/>
                           </a:solidFill>
-                          <a:latin typeface="NanumSquare Neo" pitchFamily="34" charset="0"/>
-                          <a:ea typeface="NanumSquare Neo" pitchFamily="34" charset="-122"/>
-                          <a:cs typeface="NanumSquare Neo" pitchFamily="34" charset="-120"/>
+                          <a:latin typeface="나눔스퀘어 네오 Bold" pitchFamily="34" charset="0"/>
+                          <a:ea typeface="나눔스퀘어 네오 Bold" pitchFamily="34" charset="-122"/>
+                          <a:cs typeface="나눔스퀘어 네오 Bold" pitchFamily="34" charset="-120"/>
                         </a:rPr>
                         <a:t>근거</a:t>
                       </a:r>
                       <a:endParaRPr lang="en-US" sz="1300" dirty="0">
-                        <a:latin typeface="NanumSquare Neo" charset="0"/>
-                        <a:ea typeface="NanumSquare Neo" charset="0"/>
-                        <a:cs typeface="NanumSquare Neo" charset="0"/>
+                        <a:latin typeface="나눔스퀘어 네오 Regular" charset="0"/>
+                        <a:ea typeface="나눔스퀘어 네오 Regular" charset="0"/>
+                        <a:cs typeface="나눔스퀘어 네오 Regular" charset="0"/>
                       </a:endParaRPr>
                     </a:p>
                   </a:txBody>
@@ -10853,16 +10883,16 @@
                           <a:solidFill>
                             <a:srgbClr val="1D1D1F"/>
                           </a:solidFill>
-                          <a:latin typeface="NanumSquare Neo" pitchFamily="34" charset="0"/>
-                          <a:ea typeface="NanumSquare Neo" pitchFamily="34" charset="-122"/>
-                          <a:cs typeface="NanumSquare Neo" pitchFamily="34" charset="-120"/>
+                          <a:latin typeface="나눔스퀘어 네오 Regular" pitchFamily="34" charset="0"/>
+                          <a:ea typeface="나눔스퀘어 네오 Regular" pitchFamily="34" charset="-122"/>
+                          <a:cs typeface="나눔스퀘어 네오 Regular" pitchFamily="34" charset="-120"/>
                         </a:rPr>
                         <a:t>중심와(fovea) / 이벤트 클러스터링 (1차)</a:t>
                       </a:r>
                       <a:endParaRPr lang="en-US" sz="1300" dirty="0">
-                        <a:latin typeface="NanumSquare Neo" charset="0"/>
-                        <a:ea typeface="NanumSquare Neo" charset="0"/>
-                        <a:cs typeface="NanumSquare Neo" charset="0"/>
+                        <a:latin typeface="나눔스퀘어 네오 Regular" charset="0"/>
+                        <a:ea typeface="나눔스퀘어 네오 Regular" charset="0"/>
+                        <a:cs typeface="나눔스퀘어 네오 Regular" charset="0"/>
                       </a:endParaRPr>
                     </a:p>
                   </a:txBody>
@@ -10917,20 +10947,20 @@
                         <a:buNone/>
                       </a:pPr>
                       <a:r>
-                        <a:rPr lang="en-US" sz="1300" b="1" dirty="0">
+                        <a:rPr lang="en-US" sz="1300" dirty="0">
                           <a:solidFill>
                             <a:srgbClr val="0066CC"/>
                           </a:solidFill>
-                          <a:latin typeface="NanumSquare Neo" pitchFamily="34" charset="0"/>
-                          <a:ea typeface="NanumSquare Neo" pitchFamily="34" charset="-122"/>
-                          <a:cs typeface="NanumSquare Neo" pitchFamily="34" charset="-120"/>
+                          <a:latin typeface="나눔스퀘어 네오 Bold" pitchFamily="34" charset="0"/>
+                          <a:ea typeface="나눔스퀘어 네오 Bold" pitchFamily="34" charset="-122"/>
+                          <a:cs typeface="나눔스퀘어 네오 Bold" pitchFamily="34" charset="-120"/>
                         </a:rPr>
                         <a:t>채택</a:t>
                       </a:r>
                       <a:endParaRPr lang="en-US" sz="1300" dirty="0">
-                        <a:latin typeface="NanumSquare Neo" charset="0"/>
-                        <a:ea typeface="NanumSquare Neo" charset="0"/>
-                        <a:cs typeface="NanumSquare Neo" charset="0"/>
+                        <a:latin typeface="나눔스퀘어 네오 Regular" charset="0"/>
+                        <a:ea typeface="나눔스퀘어 네오 Regular" charset="0"/>
+                        <a:cs typeface="나눔스퀘어 네오 Regular" charset="0"/>
                       </a:endParaRPr>
                     </a:p>
                   </a:txBody>
@@ -10989,16 +11019,16 @@
                           <a:solidFill>
                             <a:srgbClr val="1D1D1F"/>
                           </a:solidFill>
-                          <a:latin typeface="NanumSquare Neo" pitchFamily="34" charset="0"/>
-                          <a:ea typeface="NanumSquare Neo" pitchFamily="34" charset="-122"/>
-                          <a:cs typeface="NanumSquare Neo" pitchFamily="34" charset="-120"/>
+                          <a:latin typeface="나눔스퀘어 네오 Regular" pitchFamily="34" charset="0"/>
+                          <a:ea typeface="나눔스퀘어 네오 Regular" pitchFamily="34" charset="-122"/>
+                          <a:cs typeface="나눔스퀘어 네오 Regular" pitchFamily="34" charset="-120"/>
                         </a:rPr>
                         <a:t>열 비트맵: 손실 57.6% → 6.9%(동일 합성 트래픽), 최종 결합판 0.47%(UZH 실측)</a:t>
                       </a:r>
                       <a:endParaRPr lang="en-US" sz="1300" dirty="0">
-                        <a:latin typeface="NanumSquare Neo" charset="0"/>
-                        <a:ea typeface="NanumSquare Neo" charset="0"/>
-                        <a:cs typeface="NanumSquare Neo" charset="0"/>
+                        <a:latin typeface="나눔스퀘어 네오 Regular" charset="0"/>
+                        <a:ea typeface="나눔스퀘어 네오 Regular" charset="0"/>
+                        <a:cs typeface="나눔스퀘어 네오 Regular" charset="0"/>
                       </a:endParaRPr>
                     </a:p>
                   </a:txBody>
@@ -11059,16 +11089,16 @@
                           <a:solidFill>
                             <a:srgbClr val="1D1D1F"/>
                           </a:solidFill>
-                          <a:latin typeface="NanumSquare Neo" pitchFamily="34" charset="0"/>
-                          <a:ea typeface="NanumSquare Neo" pitchFamily="34" charset="-122"/>
-                          <a:cs typeface="NanumSquare Neo" pitchFamily="34" charset="-120"/>
+                          <a:latin typeface="나눔스퀘어 네오 Regular" pitchFamily="34" charset="0"/>
+                          <a:ea typeface="나눔스퀘어 네오 Regular" pitchFamily="34" charset="-122"/>
+                          <a:cs typeface="나눔스퀘어 네오 Regular" pitchFamily="34" charset="-120"/>
                         </a:rPr>
                         <a:t>눈 깜빡임: 유휴 시 코어 클록 차단</a:t>
                       </a:r>
                       <a:endParaRPr lang="en-US" sz="1300" dirty="0">
-                        <a:latin typeface="NanumSquare Neo" charset="0"/>
-                        <a:ea typeface="NanumSquare Neo" charset="0"/>
-                        <a:cs typeface="NanumSquare Neo" charset="0"/>
+                        <a:latin typeface="나눔스퀘어 네오 Regular" charset="0"/>
+                        <a:ea typeface="나눔스퀘어 네오 Regular" charset="0"/>
+                        <a:cs typeface="나눔스퀘어 네오 Regular" charset="0"/>
                       </a:endParaRPr>
                     </a:p>
                   </a:txBody>
@@ -11123,20 +11153,20 @@
                         <a:buNone/>
                       </a:pPr>
                       <a:r>
-                        <a:rPr lang="en-US" sz="1300" b="1" dirty="0">
+                        <a:rPr lang="en-US" sz="1300" dirty="0">
                           <a:solidFill>
                             <a:srgbClr val="0066CC"/>
                           </a:solidFill>
-                          <a:latin typeface="NanumSquare Neo" pitchFamily="34" charset="0"/>
-                          <a:ea typeface="NanumSquare Neo" pitchFamily="34" charset="-122"/>
-                          <a:cs typeface="NanumSquare Neo" pitchFamily="34" charset="-120"/>
+                          <a:latin typeface="나눔스퀘어 네오 Bold" pitchFamily="34" charset="0"/>
+                          <a:ea typeface="나눔스퀘어 네오 Bold" pitchFamily="34" charset="-122"/>
+                          <a:cs typeface="나눔스퀘어 네오 Bold" pitchFamily="34" charset="-120"/>
                         </a:rPr>
                         <a:t>채택</a:t>
                       </a:r>
                       <a:endParaRPr lang="en-US" sz="1300" dirty="0">
-                        <a:latin typeface="NanumSquare Neo" charset="0"/>
-                        <a:ea typeface="NanumSquare Neo" charset="0"/>
-                        <a:cs typeface="NanumSquare Neo" charset="0"/>
+                        <a:latin typeface="나눔스퀘어 네오 Regular" charset="0"/>
+                        <a:ea typeface="나눔스퀘어 네오 Regular" charset="0"/>
+                        <a:cs typeface="나눔스퀘어 네오 Regular" charset="0"/>
                       </a:endParaRPr>
                     </a:p>
                   </a:txBody>
@@ -11195,16 +11225,16 @@
                           <a:solidFill>
                             <a:srgbClr val="1D1D1F"/>
                           </a:solidFill>
-                          <a:latin typeface="NanumSquare Neo" pitchFamily="34" charset="0"/>
-                          <a:ea typeface="NanumSquare Neo" pitchFamily="34" charset="-122"/>
-                          <a:cs typeface="NanumSquare Neo" pitchFamily="34" charset="-120"/>
+                          <a:latin typeface="나눔스퀘어 네오 Regular" pitchFamily="34" charset="0"/>
+                          <a:ea typeface="나눔스퀘어 네오 Regular" pitchFamily="34" charset="-122"/>
+                          <a:cs typeface="나눔스퀘어 네오 Regular" pitchFamily="34" charset="-120"/>
                         </a:rPr>
                         <a:t>항상-켬과 출력·메모리 일치, 유휴 전력 −71%(시험 입력)</a:t>
                       </a:r>
                       <a:endParaRPr lang="en-US" sz="1300" dirty="0">
-                        <a:latin typeface="NanumSquare Neo" charset="0"/>
-                        <a:ea typeface="NanumSquare Neo" charset="0"/>
-                        <a:cs typeface="NanumSquare Neo" charset="0"/>
+                        <a:latin typeface="나눔스퀘어 네오 Regular" charset="0"/>
+                        <a:ea typeface="나눔스퀘어 네오 Regular" charset="0"/>
+                        <a:cs typeface="나눔스퀘어 네오 Regular" charset="0"/>
                       </a:endParaRPr>
                     </a:p>
                   </a:txBody>
@@ -11265,16 +11295,16 @@
                           <a:solidFill>
                             <a:srgbClr val="1D1D1F"/>
                           </a:solidFill>
-                          <a:latin typeface="NanumSquare Neo" pitchFamily="34" charset="0"/>
-                          <a:ea typeface="NanumSquare Neo" pitchFamily="34" charset="-122"/>
-                          <a:cs typeface="NanumSquare Neo" pitchFamily="34" charset="-120"/>
+                          <a:latin typeface="나눔스퀘어 네오 Regular" pitchFamily="34" charset="0"/>
+                          <a:ea typeface="나눔스퀘어 네오 Regular" pitchFamily="34" charset="-122"/>
+                          <a:cs typeface="나눔스퀘어 네오 Regular" pitchFamily="34" charset="-120"/>
                         </a:rPr>
                         <a:t>행 단위 선택적 활성화 (메모리)</a:t>
                       </a:r>
                       <a:endParaRPr lang="en-US" sz="1300" dirty="0">
-                        <a:latin typeface="NanumSquare Neo" charset="0"/>
-                        <a:ea typeface="NanumSquare Neo" charset="0"/>
-                        <a:cs typeface="NanumSquare Neo" charset="0"/>
+                        <a:latin typeface="나눔스퀘어 네오 Regular" charset="0"/>
+                        <a:ea typeface="나눔스퀘어 네오 Regular" charset="0"/>
+                        <a:cs typeface="나눔스퀘어 네오 Regular" charset="0"/>
                       </a:endParaRPr>
                     </a:p>
                   </a:txBody>
@@ -11329,20 +11359,20 @@
                         <a:buNone/>
                       </a:pPr>
                       <a:r>
-                        <a:rPr lang="en-US" sz="1300" b="1" dirty="0">
+                        <a:rPr lang="en-US" sz="1300" dirty="0">
                           <a:solidFill>
                             <a:srgbClr val="0066CC"/>
                           </a:solidFill>
-                          <a:latin typeface="NanumSquare Neo" pitchFamily="34" charset="0"/>
-                          <a:ea typeface="NanumSquare Neo" pitchFamily="34" charset="-122"/>
-                          <a:cs typeface="NanumSquare Neo" pitchFamily="34" charset="-120"/>
+                          <a:latin typeface="나눔스퀘어 네오 Bold" pitchFamily="34" charset="0"/>
+                          <a:ea typeface="나눔스퀘어 네오 Bold" pitchFamily="34" charset="-122"/>
+                          <a:cs typeface="나눔스퀘어 네오 Bold" pitchFamily="34" charset="-120"/>
                         </a:rPr>
                         <a:t>채택</a:t>
                       </a:r>
                       <a:endParaRPr lang="en-US" sz="1300" dirty="0">
-                        <a:latin typeface="NanumSquare Neo" charset="0"/>
-                        <a:ea typeface="NanumSquare Neo" charset="0"/>
-                        <a:cs typeface="NanumSquare Neo" charset="0"/>
+                        <a:latin typeface="나눔스퀘어 네오 Regular" charset="0"/>
+                        <a:ea typeface="나눔스퀘어 네오 Regular" charset="0"/>
+                        <a:cs typeface="나눔스퀘어 네오 Regular" charset="0"/>
                       </a:endParaRPr>
                     </a:p>
                   </a:txBody>
@@ -11401,16 +11431,16 @@
                           <a:solidFill>
                             <a:srgbClr val="1D1D1F"/>
                           </a:solidFill>
-                          <a:latin typeface="NanumSquare Neo" pitchFamily="34" charset="0"/>
-                          <a:ea typeface="NanumSquare Neo" pitchFamily="34" charset="-122"/>
-                          <a:cs typeface="NanumSquare Neo" pitchFamily="34" charset="-120"/>
+                          <a:latin typeface="나눔스퀘어 네오 Regular" pitchFamily="34" charset="0"/>
+                          <a:ea typeface="나눔스퀘어 네오 Regular" pitchFamily="34" charset="-122"/>
+                          <a:cs typeface="나눔스퀘어 네오 Regular" pitchFamily="34" charset="-120"/>
                         </a:rPr>
                         <a:t>전력 −65.5%, 면적 −5%</a:t>
                       </a:r>
                       <a:endParaRPr lang="en-US" sz="1300" dirty="0">
-                        <a:latin typeface="NanumSquare Neo" charset="0"/>
-                        <a:ea typeface="NanumSquare Neo" charset="0"/>
-                        <a:cs typeface="NanumSquare Neo" charset="0"/>
+                        <a:latin typeface="나눔스퀘어 네오 Regular" charset="0"/>
+                        <a:ea typeface="나눔스퀘어 네오 Regular" charset="0"/>
+                        <a:cs typeface="나눔스퀘어 네오 Regular" charset="0"/>
                       </a:endParaRPr>
                     </a:p>
                   </a:txBody>
@@ -11471,84 +11501,16 @@
                           <a:solidFill>
                             <a:srgbClr val="1D1D1F"/>
                           </a:solidFill>
-                          <a:latin typeface="NanumSquare Neo" pitchFamily="34" charset="0"/>
-                          <a:ea typeface="NanumSquare Neo" pitchFamily="34" charset="-122"/>
-                          <a:cs typeface="NanumSquare Neo" pitchFamily="34" charset="-120"/>
+                          <a:latin typeface="나눔스퀘어 네오 Regular" pitchFamily="34" charset="0"/>
+                          <a:ea typeface="나눔스퀘어 네오 Regular" pitchFamily="34" charset="-122"/>
+                          <a:cs typeface="나눔스퀘어 네오 Regular" pitchFamily="34" charset="-120"/>
                         </a:rPr>
                         <a:t>이득 조절(과부하 솎아내기)</a:t>
                       </a:r>
                       <a:endParaRPr lang="en-US" sz="1300" dirty="0">
-                        <a:latin typeface="NanumSquare Neo" charset="0"/>
-                        <a:ea typeface="NanumSquare Neo" charset="0"/>
-                        <a:cs typeface="NanumSquare Neo" charset="0"/>
-                      </a:endParaRPr>
-                    </a:p>
-                  </a:txBody>
-                  <a:tcPr marL="73152" marR="73152" marT="36576" marB="36576" anchor="ctr">
-                    <a:lnL w="6350" cap="flat" cmpd="sng" algn="ctr">
-                      <a:solidFill>
-                        <a:srgbClr val="E0E0E0"/>
-                      </a:solidFill>
-                      <a:prstDash val="solid"/>
-                      <a:round/>
-                      <a:headEnd type="none" w="med" len="med"/>
-                      <a:tailEnd type="none" w="med" len="med"/>
-                    </a:lnL>
-                    <a:lnR w="6350" cap="flat" cmpd="sng" algn="ctr">
-                      <a:solidFill>
-                        <a:srgbClr val="E0E0E0"/>
-                      </a:solidFill>
-                      <a:prstDash val="solid"/>
-                      <a:round/>
-                      <a:headEnd type="none" w="med" len="med"/>
-                      <a:tailEnd type="none" w="med" len="med"/>
-                    </a:lnR>
-                    <a:lnT w="6350" cap="flat" cmpd="sng" algn="ctr">
-                      <a:solidFill>
-                        <a:srgbClr val="E0E0E0"/>
-                      </a:solidFill>
-                      <a:prstDash val="solid"/>
-                      <a:round/>
-                      <a:headEnd type="none" w="med" len="med"/>
-                      <a:tailEnd type="none" w="med" len="med"/>
-                    </a:lnT>
-                    <a:lnB w="6350" cap="flat" cmpd="sng" algn="ctr">
-                      <a:solidFill>
-                        <a:srgbClr val="E0E0E0"/>
-                      </a:solidFill>
-                      <a:prstDash val="solid"/>
-                      <a:round/>
-                      <a:headEnd type="none" w="med" len="med"/>
-                      <a:tailEnd type="none" w="med" len="med"/>
-                    </a:lnB>
-                    <a:solidFill>
-                      <a:srgbClr val="FFFFFF"/>
-                    </a:solidFill>
-                  </a:tcPr>
-                </a:tc>
-                <a:tc>
-                  <a:txBody>
-                    <a:bodyPr/>
-                    <a:lstStyle/>
-                    <a:p>
-                      <a:pPr eaLnBrk="0" indent="0" marL="0">
-                        <a:buNone/>
-                      </a:pPr>
-                      <a:r>
-                        <a:rPr lang="en-US" sz="1300" b="1" dirty="0">
-                          <a:solidFill>
-                            <a:srgbClr val="1D1D1F"/>
-                          </a:solidFill>
-                          <a:latin typeface="NanumSquare Neo" pitchFamily="34" charset="0"/>
-                          <a:ea typeface="NanumSquare Neo" pitchFamily="34" charset="-122"/>
-                          <a:cs typeface="NanumSquare Neo" pitchFamily="34" charset="-120"/>
-                        </a:rPr>
-                        <a:t>기각·정정</a:t>
-                      </a:r>
-                      <a:endParaRPr lang="en-US" sz="1300" dirty="0">
-                        <a:latin typeface="NanumSquare Neo" charset="0"/>
-                        <a:ea typeface="NanumSquare Neo" charset="0"/>
-                        <a:cs typeface="NanumSquare Neo" charset="0"/>
+                        <a:latin typeface="나눔스퀘어 네오 Regular" charset="0"/>
+                        <a:ea typeface="나눔스퀘어 네오 Regular" charset="0"/>
+                        <a:cs typeface="나눔스퀘어 네오 Regular" charset="0"/>
                       </a:endParaRPr>
                     </a:p>
                   </a:txBody>
@@ -11607,16 +11569,84 @@
                           <a:solidFill>
                             <a:srgbClr val="1D1D1F"/>
                           </a:solidFill>
-                          <a:latin typeface="NanumSquare Neo" pitchFamily="34" charset="0"/>
-                          <a:ea typeface="NanumSquare Neo" pitchFamily="34" charset="-122"/>
-                          <a:cs typeface="NanumSquare Neo" pitchFamily="34" charset="-120"/>
+                          <a:latin typeface="나눔스퀘어 네오 Bold" pitchFamily="34" charset="0"/>
+                          <a:ea typeface="나눔스퀘어 네오 Bold" pitchFamily="34" charset="-122"/>
+                          <a:cs typeface="나눔스퀘어 네오 Bold" pitchFamily="34" charset="-120"/>
+                        </a:rPr>
+                        <a:t>기각·정정</a:t>
+                      </a:r>
+                      <a:endParaRPr lang="en-US" sz="1300" dirty="0">
+                        <a:latin typeface="나눔스퀘어 네오 Regular" charset="0"/>
+                        <a:ea typeface="나눔스퀘어 네오 Regular" charset="0"/>
+                        <a:cs typeface="나눔스퀘어 네오 Regular" charset="0"/>
+                      </a:endParaRPr>
+                    </a:p>
+                  </a:txBody>
+                  <a:tcPr marL="73152" marR="73152" marT="36576" marB="36576" anchor="ctr">
+                    <a:lnL w="6350" cap="flat" cmpd="sng" algn="ctr">
+                      <a:solidFill>
+                        <a:srgbClr val="E0E0E0"/>
+                      </a:solidFill>
+                      <a:prstDash val="solid"/>
+                      <a:round/>
+                      <a:headEnd type="none" w="med" len="med"/>
+                      <a:tailEnd type="none" w="med" len="med"/>
+                    </a:lnL>
+                    <a:lnR w="6350" cap="flat" cmpd="sng" algn="ctr">
+                      <a:solidFill>
+                        <a:srgbClr val="E0E0E0"/>
+                      </a:solidFill>
+                      <a:prstDash val="solid"/>
+                      <a:round/>
+                      <a:headEnd type="none" w="med" len="med"/>
+                      <a:tailEnd type="none" w="med" len="med"/>
+                    </a:lnR>
+                    <a:lnT w="6350" cap="flat" cmpd="sng" algn="ctr">
+                      <a:solidFill>
+                        <a:srgbClr val="E0E0E0"/>
+                      </a:solidFill>
+                      <a:prstDash val="solid"/>
+                      <a:round/>
+                      <a:headEnd type="none" w="med" len="med"/>
+                      <a:tailEnd type="none" w="med" len="med"/>
+                    </a:lnT>
+                    <a:lnB w="6350" cap="flat" cmpd="sng" algn="ctr">
+                      <a:solidFill>
+                        <a:srgbClr val="E0E0E0"/>
+                      </a:solidFill>
+                      <a:prstDash val="solid"/>
+                      <a:round/>
+                      <a:headEnd type="none" w="med" len="med"/>
+                      <a:tailEnd type="none" w="med" len="med"/>
+                    </a:lnB>
+                    <a:solidFill>
+                      <a:srgbClr val="FFFFFF"/>
+                    </a:solidFill>
+                  </a:tcPr>
+                </a:tc>
+                <a:tc>
+                  <a:txBody>
+                    <a:bodyPr/>
+                    <a:lstStyle/>
+                    <a:p>
+                      <a:pPr eaLnBrk="0" indent="0" marL="0">
+                        <a:buNone/>
+                      </a:pPr>
+                      <a:r>
+                        <a:rPr lang="en-US" sz="1300" dirty="0">
+                          <a:solidFill>
+                            <a:srgbClr val="1D1D1F"/>
+                          </a:solidFill>
+                          <a:latin typeface="나눔스퀘어 네오 Regular" pitchFamily="34" charset="0"/>
+                          <a:ea typeface="나눔스퀘어 네오 Regular" pitchFamily="34" charset="-122"/>
+                          <a:cs typeface="나눔스퀘어 네오 Regular" pitchFamily="34" charset="-120"/>
                         </a:rPr>
                         <a:t>합성 장면에서만 이득, 실제 DELTA 프레임에서 이득 없음</a:t>
                       </a:r>
                       <a:endParaRPr lang="en-US" sz="1300" dirty="0">
-                        <a:latin typeface="NanumSquare Neo" charset="0"/>
-                        <a:ea typeface="NanumSquare Neo" charset="0"/>
-                        <a:cs typeface="NanumSquare Neo" charset="0"/>
+                        <a:latin typeface="나눔스퀘어 네오 Regular" charset="0"/>
+                        <a:ea typeface="나눔스퀘어 네오 Regular" charset="0"/>
+                        <a:cs typeface="나눔스퀘어 네오 Regular" charset="0"/>
                       </a:endParaRPr>
                     </a:p>
                   </a:txBody>
@@ -11677,84 +11707,16 @@
                           <a:solidFill>
                             <a:srgbClr val="1D1D1F"/>
                           </a:solidFill>
-                          <a:latin typeface="NanumSquare Neo" pitchFamily="34" charset="0"/>
-                          <a:ea typeface="NanumSquare Neo" pitchFamily="34" charset="-122"/>
-                          <a:cs typeface="NanumSquare Neo" pitchFamily="34" charset="-120"/>
+                          <a:latin typeface="나눔스퀘어 네오 Regular" pitchFamily="34" charset="0"/>
+                          <a:ea typeface="나눔스퀘어 네오 Regular" pitchFamily="34" charset="-122"/>
+                          <a:cs typeface="나눔스퀘어 네오 Regular" pitchFamily="34" charset="-120"/>
                         </a:rPr>
                         <a:t>추정기 입력 줄이기(ON만/중심 가중/불응기)</a:t>
                       </a:r>
                       <a:endParaRPr lang="en-US" sz="1300" dirty="0">
-                        <a:latin typeface="NanumSquare Neo" charset="0"/>
-                        <a:ea typeface="NanumSquare Neo" charset="0"/>
-                        <a:cs typeface="NanumSquare Neo" charset="0"/>
-                      </a:endParaRPr>
-                    </a:p>
-                  </a:txBody>
-                  <a:tcPr marL="73152" marR="73152" marT="36576" marB="36576" anchor="ctr">
-                    <a:lnL w="6350" cap="flat" cmpd="sng" algn="ctr">
-                      <a:solidFill>
-                        <a:srgbClr val="E0E0E0"/>
-                      </a:solidFill>
-                      <a:prstDash val="solid"/>
-                      <a:round/>
-                      <a:headEnd type="none" w="med" len="med"/>
-                      <a:tailEnd type="none" w="med" len="med"/>
-                    </a:lnL>
-                    <a:lnR w="6350" cap="flat" cmpd="sng" algn="ctr">
-                      <a:solidFill>
-                        <a:srgbClr val="E0E0E0"/>
-                      </a:solidFill>
-                      <a:prstDash val="solid"/>
-                      <a:round/>
-                      <a:headEnd type="none" w="med" len="med"/>
-                      <a:tailEnd type="none" w="med" len="med"/>
-                    </a:lnR>
-                    <a:lnT w="6350" cap="flat" cmpd="sng" algn="ctr">
-                      <a:solidFill>
-                        <a:srgbClr val="E0E0E0"/>
-                      </a:solidFill>
-                      <a:prstDash val="solid"/>
-                      <a:round/>
-                      <a:headEnd type="none" w="med" len="med"/>
-                      <a:tailEnd type="none" w="med" len="med"/>
-                    </a:lnT>
-                    <a:lnB w="6350" cap="flat" cmpd="sng" algn="ctr">
-                      <a:solidFill>
-                        <a:srgbClr val="E0E0E0"/>
-                      </a:solidFill>
-                      <a:prstDash val="solid"/>
-                      <a:round/>
-                      <a:headEnd type="none" w="med" len="med"/>
-                      <a:tailEnd type="none" w="med" len="med"/>
-                    </a:lnB>
-                    <a:solidFill>
-                      <a:srgbClr val="FFFFFF"/>
-                    </a:solidFill>
-                  </a:tcPr>
-                </a:tc>
-                <a:tc>
-                  <a:txBody>
-                    <a:bodyPr/>
-                    <a:lstStyle/>
-                    <a:p>
-                      <a:pPr eaLnBrk="0" indent="0" marL="0">
-                        <a:buNone/>
-                      </a:pPr>
-                      <a:r>
-                        <a:rPr lang="en-US" sz="1300" b="1" dirty="0">
-                          <a:solidFill>
-                            <a:srgbClr val="1D1D1F"/>
-                          </a:solidFill>
-                          <a:latin typeface="NanumSquare Neo" pitchFamily="34" charset="0"/>
-                          <a:ea typeface="NanumSquare Neo" pitchFamily="34" charset="-122"/>
-                          <a:cs typeface="NanumSquare Neo" pitchFamily="34" charset="-120"/>
-                        </a:rPr>
-                        <a:t>기각</a:t>
-                      </a:r>
-                      <a:endParaRPr lang="en-US" sz="1300" dirty="0">
-                        <a:latin typeface="NanumSquare Neo" charset="0"/>
-                        <a:ea typeface="NanumSquare Neo" charset="0"/>
-                        <a:cs typeface="NanumSquare Neo" charset="0"/>
+                        <a:latin typeface="나눔스퀘어 네오 Regular" charset="0"/>
+                        <a:ea typeface="나눔스퀘어 네오 Regular" charset="0"/>
+                        <a:cs typeface="나눔스퀘어 네오 Regular" charset="0"/>
                       </a:endParaRPr>
                     </a:p>
                   </a:txBody>
@@ -11813,16 +11775,84 @@
                           <a:solidFill>
                             <a:srgbClr val="1D1D1F"/>
                           </a:solidFill>
-                          <a:latin typeface="NanumSquare Neo" pitchFamily="34" charset="0"/>
-                          <a:ea typeface="NanumSquare Neo" pitchFamily="34" charset="-122"/>
-                          <a:cs typeface="NanumSquare Neo" pitchFamily="34" charset="-120"/>
+                          <a:latin typeface="나눔스퀘어 네오 Bold" pitchFamily="34" charset="0"/>
+                          <a:ea typeface="나눔스퀘어 네오 Bold" pitchFamily="34" charset="-122"/>
+                          <a:cs typeface="나눔스퀘어 네오 Bold" pitchFamily="34" charset="-120"/>
+                        </a:rPr>
+                        <a:t>기각</a:t>
+                      </a:r>
+                      <a:endParaRPr lang="en-US" sz="1300" dirty="0">
+                        <a:latin typeface="나눔스퀘어 네오 Regular" charset="0"/>
+                        <a:ea typeface="나눔스퀘어 네오 Regular" charset="0"/>
+                        <a:cs typeface="나눔스퀘어 네오 Regular" charset="0"/>
+                      </a:endParaRPr>
+                    </a:p>
+                  </a:txBody>
+                  <a:tcPr marL="73152" marR="73152" marT="36576" marB="36576" anchor="ctr">
+                    <a:lnL w="6350" cap="flat" cmpd="sng" algn="ctr">
+                      <a:solidFill>
+                        <a:srgbClr val="E0E0E0"/>
+                      </a:solidFill>
+                      <a:prstDash val="solid"/>
+                      <a:round/>
+                      <a:headEnd type="none" w="med" len="med"/>
+                      <a:tailEnd type="none" w="med" len="med"/>
+                    </a:lnL>
+                    <a:lnR w="6350" cap="flat" cmpd="sng" algn="ctr">
+                      <a:solidFill>
+                        <a:srgbClr val="E0E0E0"/>
+                      </a:solidFill>
+                      <a:prstDash val="solid"/>
+                      <a:round/>
+                      <a:headEnd type="none" w="med" len="med"/>
+                      <a:tailEnd type="none" w="med" len="med"/>
+                    </a:lnR>
+                    <a:lnT w="6350" cap="flat" cmpd="sng" algn="ctr">
+                      <a:solidFill>
+                        <a:srgbClr val="E0E0E0"/>
+                      </a:solidFill>
+                      <a:prstDash val="solid"/>
+                      <a:round/>
+                      <a:headEnd type="none" w="med" len="med"/>
+                      <a:tailEnd type="none" w="med" len="med"/>
+                    </a:lnT>
+                    <a:lnB w="6350" cap="flat" cmpd="sng" algn="ctr">
+                      <a:solidFill>
+                        <a:srgbClr val="E0E0E0"/>
+                      </a:solidFill>
+                      <a:prstDash val="solid"/>
+                      <a:round/>
+                      <a:headEnd type="none" w="med" len="med"/>
+                      <a:tailEnd type="none" w="med" len="med"/>
+                    </a:lnB>
+                    <a:solidFill>
+                      <a:srgbClr val="FFFFFF"/>
+                    </a:solidFill>
+                  </a:tcPr>
+                </a:tc>
+                <a:tc>
+                  <a:txBody>
+                    <a:bodyPr/>
+                    <a:lstStyle/>
+                    <a:p>
+                      <a:pPr eaLnBrk="0" indent="0" marL="0">
+                        <a:buNone/>
+                      </a:pPr>
+                      <a:r>
+                        <a:rPr lang="en-US" sz="1300" dirty="0">
+                          <a:solidFill>
+                            <a:srgbClr val="1D1D1F"/>
+                          </a:solidFill>
+                          <a:latin typeface="나눔스퀘어 네오 Regular" pitchFamily="34" charset="0"/>
+                          <a:ea typeface="나눔스퀘어 네오 Regular" pitchFamily="34" charset="-122"/>
+                          <a:cs typeface="나눔스퀘어 네오 Regular" pitchFamily="34" charset="-120"/>
                         </a:rPr>
                         <a:t>정확도 1.5배 이상 악화</a:t>
                       </a:r>
                       <a:endParaRPr lang="en-US" sz="1300" dirty="0">
-                        <a:latin typeface="NanumSquare Neo" charset="0"/>
-                        <a:ea typeface="NanumSquare Neo" charset="0"/>
-                        <a:cs typeface="NanumSquare Neo" charset="0"/>
+                        <a:latin typeface="나눔스퀘어 네오 Regular" charset="0"/>
+                        <a:ea typeface="나눔스퀘어 네오 Regular" charset="0"/>
+                        <a:cs typeface="나눔스퀘어 네오 Regular" charset="0"/>
                       </a:endParaRPr>
                     </a:p>
                   </a:txBody>
@@ -11883,84 +11913,16 @@
                           <a:solidFill>
                             <a:srgbClr val="1D1D1F"/>
                           </a:solidFill>
-                          <a:latin typeface="NanumSquare Neo" pitchFamily="34" charset="0"/>
-                          <a:ea typeface="NanumSquare Neo" pitchFamily="34" charset="-122"/>
-                          <a:cs typeface="NanumSquare Neo" pitchFamily="34" charset="-120"/>
+                          <a:latin typeface="나눔스퀘어 네오 Regular" pitchFamily="34" charset="0"/>
+                          <a:ea typeface="나눔스퀘어 네오 Regular" pitchFamily="34" charset="-122"/>
+                          <a:cs typeface="나눔스퀘어 네오 Regular" pitchFamily="34" charset="-120"/>
                         </a:rPr>
                         <a:t>미세 안구운동(지터)</a:t>
                       </a:r>
                       <a:endParaRPr lang="en-US" sz="1300" dirty="0">
-                        <a:latin typeface="NanumSquare Neo" charset="0"/>
-                        <a:ea typeface="NanumSquare Neo" charset="0"/>
-                        <a:cs typeface="NanumSquare Neo" charset="0"/>
-                      </a:endParaRPr>
-                    </a:p>
-                  </a:txBody>
-                  <a:tcPr marL="73152" marR="73152" marT="36576" marB="36576" anchor="ctr">
-                    <a:lnL w="6350" cap="flat" cmpd="sng" algn="ctr">
-                      <a:solidFill>
-                        <a:srgbClr val="E0E0E0"/>
-                      </a:solidFill>
-                      <a:prstDash val="solid"/>
-                      <a:round/>
-                      <a:headEnd type="none" w="med" len="med"/>
-                      <a:tailEnd type="none" w="med" len="med"/>
-                    </a:lnL>
-                    <a:lnR w="6350" cap="flat" cmpd="sng" algn="ctr">
-                      <a:solidFill>
-                        <a:srgbClr val="E0E0E0"/>
-                      </a:solidFill>
-                      <a:prstDash val="solid"/>
-                      <a:round/>
-                      <a:headEnd type="none" w="med" len="med"/>
-                      <a:tailEnd type="none" w="med" len="med"/>
-                    </a:lnR>
-                    <a:lnT w="6350" cap="flat" cmpd="sng" algn="ctr">
-                      <a:solidFill>
-                        <a:srgbClr val="E0E0E0"/>
-                      </a:solidFill>
-                      <a:prstDash val="solid"/>
-                      <a:round/>
-                      <a:headEnd type="none" w="med" len="med"/>
-                      <a:tailEnd type="none" w="med" len="med"/>
-                    </a:lnT>
-                    <a:lnB w="6350" cap="flat" cmpd="sng" algn="ctr">
-                      <a:solidFill>
-                        <a:srgbClr val="E0E0E0"/>
-                      </a:solidFill>
-                      <a:prstDash val="solid"/>
-                      <a:round/>
-                      <a:headEnd type="none" w="med" len="med"/>
-                      <a:tailEnd type="none" w="med" len="med"/>
-                    </a:lnB>
-                    <a:solidFill>
-                      <a:srgbClr val="FFFFFF"/>
-                    </a:solidFill>
-                  </a:tcPr>
-                </a:tc>
-                <a:tc>
-                  <a:txBody>
-                    <a:bodyPr/>
-                    <a:lstStyle/>
-                    <a:p>
-                      <a:pPr eaLnBrk="0" indent="0" marL="0">
-                        <a:buNone/>
-                      </a:pPr>
-                      <a:r>
-                        <a:rPr lang="en-US" sz="1300" b="1" dirty="0">
-                          <a:solidFill>
-                            <a:srgbClr val="1D1D1F"/>
-                          </a:solidFill>
-                          <a:latin typeface="NanumSquare Neo" pitchFamily="34" charset="0"/>
-                          <a:ea typeface="NanumSquare Neo" pitchFamily="34" charset="-122"/>
-                          <a:cs typeface="NanumSquare Neo" pitchFamily="34" charset="-120"/>
-                        </a:rPr>
-                        <a:t>기각</a:t>
-                      </a:r>
-                      <a:endParaRPr lang="en-US" sz="1300" dirty="0">
-                        <a:latin typeface="NanumSquare Neo" charset="0"/>
-                        <a:ea typeface="NanumSquare Neo" charset="0"/>
-                        <a:cs typeface="NanumSquare Neo" charset="0"/>
+                        <a:latin typeface="나눔스퀘어 네오 Regular" charset="0"/>
+                        <a:ea typeface="나눔스퀘어 네오 Regular" charset="0"/>
+                        <a:cs typeface="나눔스퀘어 네오 Regular" charset="0"/>
                       </a:endParaRPr>
                     </a:p>
                   </a:txBody>
@@ -12019,16 +11981,84 @@
                           <a:solidFill>
                             <a:srgbClr val="1D1D1F"/>
                           </a:solidFill>
-                          <a:latin typeface="NanumSquare Neo" pitchFamily="34" charset="0"/>
-                          <a:ea typeface="NanumSquare Neo" pitchFamily="34" charset="-122"/>
-                          <a:cs typeface="NanumSquare Neo" pitchFamily="34" charset="-120"/>
+                          <a:latin typeface="나눔스퀘어 네오 Bold" pitchFamily="34" charset="0"/>
+                          <a:ea typeface="나눔스퀘어 네오 Bold" pitchFamily="34" charset="-122"/>
+                          <a:cs typeface="나눔스퀘어 네오 Bold" pitchFamily="34" charset="-120"/>
+                        </a:rPr>
+                        <a:t>기각</a:t>
+                      </a:r>
+                      <a:endParaRPr lang="en-US" sz="1300" dirty="0">
+                        <a:latin typeface="나눔스퀘어 네오 Regular" charset="0"/>
+                        <a:ea typeface="나눔스퀘어 네오 Regular" charset="0"/>
+                        <a:cs typeface="나눔스퀘어 네오 Regular" charset="0"/>
+                      </a:endParaRPr>
+                    </a:p>
+                  </a:txBody>
+                  <a:tcPr marL="73152" marR="73152" marT="36576" marB="36576" anchor="ctr">
+                    <a:lnL w="6350" cap="flat" cmpd="sng" algn="ctr">
+                      <a:solidFill>
+                        <a:srgbClr val="E0E0E0"/>
+                      </a:solidFill>
+                      <a:prstDash val="solid"/>
+                      <a:round/>
+                      <a:headEnd type="none" w="med" len="med"/>
+                      <a:tailEnd type="none" w="med" len="med"/>
+                    </a:lnL>
+                    <a:lnR w="6350" cap="flat" cmpd="sng" algn="ctr">
+                      <a:solidFill>
+                        <a:srgbClr val="E0E0E0"/>
+                      </a:solidFill>
+                      <a:prstDash val="solid"/>
+                      <a:round/>
+                      <a:headEnd type="none" w="med" len="med"/>
+                      <a:tailEnd type="none" w="med" len="med"/>
+                    </a:lnR>
+                    <a:lnT w="6350" cap="flat" cmpd="sng" algn="ctr">
+                      <a:solidFill>
+                        <a:srgbClr val="E0E0E0"/>
+                      </a:solidFill>
+                      <a:prstDash val="solid"/>
+                      <a:round/>
+                      <a:headEnd type="none" w="med" len="med"/>
+                      <a:tailEnd type="none" w="med" len="med"/>
+                    </a:lnT>
+                    <a:lnB w="6350" cap="flat" cmpd="sng" algn="ctr">
+                      <a:solidFill>
+                        <a:srgbClr val="E0E0E0"/>
+                      </a:solidFill>
+                      <a:prstDash val="solid"/>
+                      <a:round/>
+                      <a:headEnd type="none" w="med" len="med"/>
+                      <a:tailEnd type="none" w="med" len="med"/>
+                    </a:lnB>
+                    <a:solidFill>
+                      <a:srgbClr val="FFFFFF"/>
+                    </a:solidFill>
+                  </a:tcPr>
+                </a:tc>
+                <a:tc>
+                  <a:txBody>
+                    <a:bodyPr/>
+                    <a:lstStyle/>
+                    <a:p>
+                      <a:pPr eaLnBrk="0" indent="0" marL="0">
+                        <a:buNone/>
+                      </a:pPr>
+                      <a:r>
+                        <a:rPr lang="en-US" sz="1300" dirty="0">
+                          <a:solidFill>
+                            <a:srgbClr val="1D1D1F"/>
+                          </a:solidFill>
+                          <a:latin typeface="나눔스퀘어 네오 Regular" pitchFamily="34" charset="0"/>
+                          <a:ea typeface="나눔스퀘어 네오 Regular" pitchFamily="34" charset="-122"/>
+                          <a:cs typeface="나눔스퀘어 네오 Regular" pitchFamily="34" charset="-120"/>
                         </a:rPr>
                         <a:t>부화소 복원 효과 없음</a:t>
                       </a:r>
                       <a:endParaRPr lang="en-US" sz="1300" dirty="0">
-                        <a:latin typeface="NanumSquare Neo" charset="0"/>
-                        <a:ea typeface="NanumSquare Neo" charset="0"/>
-                        <a:cs typeface="NanumSquare Neo" charset="0"/>
+                        <a:latin typeface="나눔스퀘어 네오 Regular" charset="0"/>
+                        <a:ea typeface="나눔스퀘어 네오 Regular" charset="0"/>
+                        <a:cs typeface="나눔스퀘어 네오 Regular" charset="0"/>
                       </a:endParaRPr>
                     </a:p>
                   </a:txBody>
@@ -12089,84 +12119,16 @@
                           <a:solidFill>
                             <a:srgbClr val="1D1D1F"/>
                           </a:solidFill>
-                          <a:latin typeface="NanumSquare Neo" pitchFamily="34" charset="0"/>
-                          <a:ea typeface="NanumSquare Neo" pitchFamily="34" charset="-122"/>
-                          <a:cs typeface="NanumSquare Neo" pitchFamily="34" charset="-120"/>
+                          <a:latin typeface="나눔스퀘어 네오 Regular" pitchFamily="34" charset="0"/>
+                          <a:ea typeface="나눔스퀘어 네오 Regular" pitchFamily="34" charset="-122"/>
+                          <a:cs typeface="나눔스퀘어 네오 Regular" pitchFamily="34" charset="-120"/>
                         </a:rPr>
                         <a:t>원심성 복사(VOR): 회전 지령을 θ 사전분포로</a:t>
                       </a:r>
                       <a:endParaRPr lang="en-US" sz="1300" dirty="0">
-                        <a:latin typeface="NanumSquare Neo" charset="0"/>
-                        <a:ea typeface="NanumSquare Neo" charset="0"/>
-                        <a:cs typeface="NanumSquare Neo" charset="0"/>
-                      </a:endParaRPr>
-                    </a:p>
-                  </a:txBody>
-                  <a:tcPr marL="73152" marR="73152" marT="36576" marB="36576" anchor="ctr">
-                    <a:lnL w="6350" cap="flat" cmpd="sng" algn="ctr">
-                      <a:solidFill>
-                        <a:srgbClr val="E0E0E0"/>
-                      </a:solidFill>
-                      <a:prstDash val="solid"/>
-                      <a:round/>
-                      <a:headEnd type="none" w="med" len="med"/>
-                      <a:tailEnd type="none" w="med" len="med"/>
-                    </a:lnL>
-                    <a:lnR w="6350" cap="flat" cmpd="sng" algn="ctr">
-                      <a:solidFill>
-                        <a:srgbClr val="E0E0E0"/>
-                      </a:solidFill>
-                      <a:prstDash val="solid"/>
-                      <a:round/>
-                      <a:headEnd type="none" w="med" len="med"/>
-                      <a:tailEnd type="none" w="med" len="med"/>
-                    </a:lnR>
-                    <a:lnT w="6350" cap="flat" cmpd="sng" algn="ctr">
-                      <a:solidFill>
-                        <a:srgbClr val="E0E0E0"/>
-                      </a:solidFill>
-                      <a:prstDash val="solid"/>
-                      <a:round/>
-                      <a:headEnd type="none" w="med" len="med"/>
-                      <a:tailEnd type="none" w="med" len="med"/>
-                    </a:lnT>
-                    <a:lnB w="6350" cap="flat" cmpd="sng" algn="ctr">
-                      <a:solidFill>
-                        <a:srgbClr val="E0E0E0"/>
-                      </a:solidFill>
-                      <a:prstDash val="solid"/>
-                      <a:round/>
-                      <a:headEnd type="none" w="med" len="med"/>
-                      <a:tailEnd type="none" w="med" len="med"/>
-                    </a:lnB>
-                    <a:solidFill>
-                      <a:srgbClr val="FFFFFF"/>
-                    </a:solidFill>
-                  </a:tcPr>
-                </a:tc>
-                <a:tc>
-                  <a:txBody>
-                    <a:bodyPr/>
-                    <a:lstStyle/>
-                    <a:p>
-                      <a:pPr eaLnBrk="0" indent="0" marL="0">
-                        <a:buNone/>
-                      </a:pPr>
-                      <a:r>
-                        <a:rPr lang="en-US" sz="1300" b="1" dirty="0">
-                          <a:solidFill>
-                            <a:srgbClr val="1D1D1F"/>
-                          </a:solidFill>
-                          <a:latin typeface="NanumSquare Neo" pitchFamily="34" charset="0"/>
-                          <a:ea typeface="NanumSquare Neo" pitchFamily="34" charset="-122"/>
-                          <a:cs typeface="NanumSquare Neo" pitchFamily="34" charset="-120"/>
-                        </a:rPr>
-                        <a:t>기각</a:t>
-                      </a:r>
-                      <a:endParaRPr lang="en-US" sz="1300" dirty="0">
-                        <a:latin typeface="NanumSquare Neo" charset="0"/>
-                        <a:ea typeface="NanumSquare Neo" charset="0"/>
-                        <a:cs typeface="NanumSquare Neo" charset="0"/>
+                        <a:latin typeface="나눔스퀘어 네오 Regular" charset="0"/>
+                        <a:ea typeface="나눔스퀘어 네오 Regular" charset="0"/>
+                        <a:cs typeface="나눔스퀘어 네오 Regular" charset="0"/>
                       </a:endParaRPr>
                     </a:p>
                   </a:txBody>
@@ -12225,16 +12187,84 @@
                           <a:solidFill>
                             <a:srgbClr val="1D1D1F"/>
                           </a:solidFill>
-                          <a:latin typeface="NanumSquare Neo" pitchFamily="34" charset="0"/>
-                          <a:ea typeface="NanumSquare Neo" pitchFamily="34" charset="-122"/>
-                          <a:cs typeface="NanumSquare Neo" pitchFamily="34" charset="-120"/>
+                          <a:latin typeface="나눔스퀘어 네오 Bold" pitchFamily="34" charset="0"/>
+                          <a:ea typeface="나눔스퀘어 네오 Bold" pitchFamily="34" charset="-122"/>
+                          <a:cs typeface="나눔스퀘어 네오 Bold" pitchFamily="34" charset="-120"/>
+                        </a:rPr>
+                        <a:t>기각</a:t>
+                      </a:r>
+                      <a:endParaRPr lang="en-US" sz="1300" dirty="0">
+                        <a:latin typeface="나눔스퀘어 네오 Regular" charset="0"/>
+                        <a:ea typeface="나눔스퀘어 네오 Regular" charset="0"/>
+                        <a:cs typeface="나눔스퀘어 네오 Regular" charset="0"/>
+                      </a:endParaRPr>
+                    </a:p>
+                  </a:txBody>
+                  <a:tcPr marL="73152" marR="73152" marT="36576" marB="36576" anchor="ctr">
+                    <a:lnL w="6350" cap="flat" cmpd="sng" algn="ctr">
+                      <a:solidFill>
+                        <a:srgbClr val="E0E0E0"/>
+                      </a:solidFill>
+                      <a:prstDash val="solid"/>
+                      <a:round/>
+                      <a:headEnd type="none" w="med" len="med"/>
+                      <a:tailEnd type="none" w="med" len="med"/>
+                    </a:lnL>
+                    <a:lnR w="6350" cap="flat" cmpd="sng" algn="ctr">
+                      <a:solidFill>
+                        <a:srgbClr val="E0E0E0"/>
+                      </a:solidFill>
+                      <a:prstDash val="solid"/>
+                      <a:round/>
+                      <a:headEnd type="none" w="med" len="med"/>
+                      <a:tailEnd type="none" w="med" len="med"/>
+                    </a:lnR>
+                    <a:lnT w="6350" cap="flat" cmpd="sng" algn="ctr">
+                      <a:solidFill>
+                        <a:srgbClr val="E0E0E0"/>
+                      </a:solidFill>
+                      <a:prstDash val="solid"/>
+                      <a:round/>
+                      <a:headEnd type="none" w="med" len="med"/>
+                      <a:tailEnd type="none" w="med" len="med"/>
+                    </a:lnT>
+                    <a:lnB w="6350" cap="flat" cmpd="sng" algn="ctr">
+                      <a:solidFill>
+                        <a:srgbClr val="E0E0E0"/>
+                      </a:solidFill>
+                      <a:prstDash val="solid"/>
+                      <a:round/>
+                      <a:headEnd type="none" w="med" len="med"/>
+                      <a:tailEnd type="none" w="med" len="med"/>
+                    </a:lnB>
+                    <a:solidFill>
+                      <a:srgbClr val="FFFFFF"/>
+                    </a:solidFill>
+                  </a:tcPr>
+                </a:tc>
+                <a:tc>
+                  <a:txBody>
+                    <a:bodyPr/>
+                    <a:lstStyle/>
+                    <a:p>
+                      <a:pPr eaLnBrk="0" indent="0" marL="0">
+                        <a:buNone/>
+                      </a:pPr>
+                      <a:r>
+                        <a:rPr lang="en-US" sz="1300" dirty="0">
+                          <a:solidFill>
+                            <a:srgbClr val="1D1D1F"/>
+                          </a:solidFill>
+                          <a:latin typeface="나눔스퀘어 네오 Regular" pitchFamily="34" charset="0"/>
+                          <a:ea typeface="나눔스퀘어 네오 Regular" pitchFamily="34" charset="-122"/>
+                          <a:cs typeface="나눔스퀘어 네오 Regular" pitchFamily="34" charset="-120"/>
                         </a:rPr>
                         <a:t>UZH 평균 23.4°→8.5°이나 RobotEvt 36.1°→34.9°(기준 25.3° 미달), 사전 등록 기준 미통과</a:t>
                       </a:r>
                       <a:endParaRPr lang="en-US" sz="1300" dirty="0">
-                        <a:latin typeface="NanumSquare Neo" charset="0"/>
-                        <a:ea typeface="NanumSquare Neo" charset="0"/>
-                        <a:cs typeface="NanumSquare Neo" charset="0"/>
+                        <a:latin typeface="나눔스퀘어 네오 Regular" charset="0"/>
+                        <a:ea typeface="나눔스퀘어 네오 Regular" charset="0"/>
+                        <a:cs typeface="나눔스퀘어 네오 Regular" charset="0"/>
                       </a:endParaRPr>
                     </a:p>
                   </a:txBody>
@@ -12295,16 +12325,16 @@
                           <a:solidFill>
                             <a:srgbClr val="1D1D1F"/>
                           </a:solidFill>
-                          <a:latin typeface="NanumSquare Neo" pitchFamily="34" charset="0"/>
-                          <a:ea typeface="NanumSquare Neo" pitchFamily="34" charset="-122"/>
-                          <a:cs typeface="NanumSquare Neo" pitchFamily="34" charset="-120"/>
+                          <a:latin typeface="나눔스퀘어 네오 Regular" pitchFamily="34" charset="0"/>
+                          <a:ea typeface="나눔스퀘어 네오 Regular" pitchFamily="34" charset="-122"/>
+                          <a:cs typeface="나눔스퀘어 네오 Regular" pitchFamily="34" charset="-120"/>
                         </a:rPr>
                         <a:t>최근 쓰기 캐시 (감각 기억)</a:t>
                       </a:r>
                       <a:endParaRPr lang="en-US" sz="1300" dirty="0">
-                        <a:latin typeface="NanumSquare Neo" charset="0"/>
-                        <a:ea typeface="NanumSquare Neo" charset="0"/>
-                        <a:cs typeface="NanumSquare Neo" charset="0"/>
+                        <a:latin typeface="나눔스퀘어 네오 Regular" charset="0"/>
+                        <a:ea typeface="나눔스퀘어 네오 Regular" charset="0"/>
+                        <a:cs typeface="나눔스퀘어 네오 Regular" charset="0"/>
                       </a:endParaRPr>
                     </a:p>
                   </a:txBody>
@@ -12359,20 +12389,20 @@
                         <a:buNone/>
                       </a:pPr>
                       <a:r>
-                        <a:rPr lang="en-US" sz="1300" b="1" dirty="0">
+                        <a:rPr lang="en-US" sz="1300" dirty="0">
                           <a:solidFill>
                             <a:srgbClr val="7A7A7A"/>
                           </a:solidFill>
-                          <a:latin typeface="NanumSquare Neo" pitchFamily="34" charset="0"/>
-                          <a:ea typeface="NanumSquare Neo" pitchFamily="34" charset="-122"/>
-                          <a:cs typeface="NanumSquare Neo" pitchFamily="34" charset="-120"/>
+                          <a:latin typeface="나눔스퀘어 네오 Bold" pitchFamily="34" charset="0"/>
+                          <a:ea typeface="나눔스퀘어 네오 Bold" pitchFamily="34" charset="-122"/>
+                          <a:cs typeface="나눔스퀘어 네오 Bold" pitchFamily="34" charset="-120"/>
                         </a:rPr>
                         <a:t>보류</a:t>
                       </a:r>
                       <a:endParaRPr lang="en-US" sz="1300" dirty="0">
-                        <a:latin typeface="NanumSquare Neo" charset="0"/>
-                        <a:ea typeface="NanumSquare Neo" charset="0"/>
-                        <a:cs typeface="NanumSquare Neo" charset="0"/>
+                        <a:latin typeface="나눔스퀘어 네오 Regular" charset="0"/>
+                        <a:ea typeface="나눔스퀘어 네오 Regular" charset="0"/>
+                        <a:cs typeface="나눔스퀘어 네오 Regular" charset="0"/>
                       </a:endParaRPr>
                     </a:p>
                   </a:txBody>
@@ -12431,16 +12461,16 @@
                           <a:solidFill>
                             <a:srgbClr val="1D1D1F"/>
                           </a:solidFill>
-                          <a:latin typeface="NanumSquare Neo" pitchFamily="34" charset="0"/>
-                          <a:ea typeface="NanumSquare Neo" pitchFamily="34" charset="-122"/>
-                          <a:cs typeface="NanumSquare Neo" pitchFamily="34" charset="-120"/>
+                          <a:latin typeface="나눔스퀘어 네오 Regular" pitchFamily="34" charset="0"/>
+                          <a:ea typeface="나눔스퀘어 네오 Regular" pitchFamily="34" charset="-122"/>
+                          <a:cs typeface="나눔스퀘어 네오 Regular" pitchFamily="34" charset="-120"/>
                         </a:rPr>
                         <a:t>64항목만 전력 −16%/면적 +5.5%, 필수 아님</a:t>
                       </a:r>
                       <a:endParaRPr lang="en-US" sz="1300" dirty="0">
-                        <a:latin typeface="NanumSquare Neo" charset="0"/>
-                        <a:ea typeface="NanumSquare Neo" charset="0"/>
-                        <a:cs typeface="NanumSquare Neo" charset="0"/>
+                        <a:latin typeface="나눔스퀘어 네오 Regular" charset="0"/>
+                        <a:ea typeface="나눔스퀘어 네오 Regular" charset="0"/>
+                        <a:cs typeface="나눔스퀘어 네오 Regular" charset="0"/>
                       </a:endParaRPr>
                     </a:p>
                   </a:txBody>
@@ -12523,9 +12553,9 @@
                 <a:solidFill>
                   <a:srgbClr val="7A7A7A"/>
                 </a:solidFill>
-                <a:latin typeface="NanumSquare Neo"/>
-                <a:ea typeface="NanumSquare Neo"/>
-                <a:cs typeface="NanumSquare Neo"/>
+                <a:latin typeface="나눔스퀘어 네오 Regular"/>
+                <a:ea typeface="나눔스퀘어 네오 Regular"/>
+                <a:cs typeface="나눔스퀘어 네오 Regular"/>
               </a:defRPr>
             </a:lvl1pPr>
           </a:lstStyle>
@@ -12591,13 +12621,13 @@
               <a:buNone/>
             </a:pPr>
             <a:r>
-              <a:rPr lang="en-US" sz="2600" b="1" dirty="0">
+              <a:rPr lang="en-US" sz="2600" dirty="0">
                 <a:solidFill>
                   <a:srgbClr val="1D1D1F"/>
                 </a:solidFill>
-                <a:latin typeface="NanumSquare Neo" pitchFamily="34" charset="0"/>
-                <a:ea typeface="NanumSquare Neo" pitchFamily="34" charset="-122"/>
-                <a:cs typeface="NanumSquare Neo" pitchFamily="34" charset="-120"/>
+                <a:latin typeface="나눔스퀘어 네오 Bold" pitchFamily="34" charset="0"/>
+                <a:ea typeface="나눔스퀘어 네오 Bold" pitchFamily="34" charset="-122"/>
+                <a:cs typeface="나눔스퀘어 네오 Bold" pitchFamily="34" charset="-120"/>
               </a:rPr>
               <a:t>장단점과 고려 사항: 확장 시 가장 큰 비용은 메모리</a:t>
             </a:r>
@@ -12657,13 +12687,13 @@
               <a:buNone/>
             </a:pPr>
             <a:r>
-              <a:rPr lang="en-US" sz="1600" b="1" dirty="0">
+              <a:rPr lang="en-US" sz="1600" dirty="0">
                 <a:solidFill>
                   <a:srgbClr val="0066CC"/>
                 </a:solidFill>
-                <a:latin typeface="NanumSquare Neo" pitchFamily="34" charset="0"/>
-                <a:ea typeface="NanumSquare Neo" pitchFamily="34" charset="-122"/>
-                <a:cs typeface="NanumSquare Neo" pitchFamily="34" charset="-120"/>
+                <a:latin typeface="나눔스퀘어 네오 Bold" pitchFamily="34" charset="0"/>
+                <a:ea typeface="나눔스퀘어 네오 Bold" pitchFamily="34" charset="-122"/>
+                <a:cs typeface="나눔스퀘어 네오 Bold" pitchFamily="34" charset="-120"/>
               </a:rPr>
               <a:t>장점</a:t>
             </a:r>
@@ -12700,9 +12730,9 @@
                 <a:solidFill>
                   <a:srgbClr val="1D1D1F"/>
                 </a:solidFill>
-                <a:latin typeface="NanumSquare Neo" pitchFamily="34" charset="0"/>
-                <a:ea typeface="NanumSquare Neo" pitchFamily="34" charset="-122"/>
-                <a:cs typeface="NanumSquare Neo" pitchFamily="34" charset="-120"/>
+                <a:latin typeface="나눔스퀘어 네오 Regular" pitchFamily="34" charset="0"/>
+                <a:ea typeface="나눔스퀘어 네오 Regular" pitchFamily="34" charset="-122"/>
+                <a:cs typeface="나눔스퀘어 네오 Regular" pitchFamily="34" charset="-120"/>
               </a:rPr>
               <a:t>• 곱셈기 없는 표 기반 좌표 변환, bit-exact 검증</a:t>
             </a:r>
@@ -12717,9 +12747,9 @@
                 <a:solidFill>
                   <a:srgbClr val="1D1D1F"/>
                 </a:solidFill>
-                <a:latin typeface="NanumSquare Neo" pitchFamily="34" charset="0"/>
-                <a:ea typeface="NanumSquare Neo" pitchFamily="34" charset="-122"/>
-                <a:cs typeface="NanumSquare Neo" pitchFamily="34" charset="-120"/>
+                <a:latin typeface="나눔스퀘어 네오 Regular" pitchFamily="34" charset="0"/>
+                <a:ea typeface="나눔스퀘어 네오 Regular" pitchFamily="34" charset="-122"/>
+                <a:cs typeface="나눔스퀘어 네오 Regular" pitchFamily="34" charset="-120"/>
               </a:rPr>
               <a:t>• 메모리 클록 게이팅(−65.5%)과 blink로 구조적 전력 절감</a:t>
             </a:r>
@@ -12734,9 +12764,9 @@
                 <a:solidFill>
                   <a:srgbClr val="1D1D1F"/>
                 </a:solidFill>
-                <a:latin typeface="NanumSquare Neo" pitchFamily="34" charset="0"/>
-                <a:ea typeface="NanumSquare Neo" pitchFamily="34" charset="-122"/>
-                <a:cs typeface="NanumSquare Neo" pitchFamily="34" charset="-120"/>
+                <a:latin typeface="나눔스퀘어 네오 Regular" pitchFamily="34" charset="0"/>
+                <a:ea typeface="나눔스퀘어 네오 Regular" pitchFamily="34" charset="-122"/>
+                <a:cs typeface="나눔스퀘어 네오 Regular" pitchFamily="34" charset="-120"/>
               </a:rPr>
               <a:t>• 실제 센서·로봇팔 데이터로 검증, 안 되는 것은 기각</a:t>
             </a:r>
@@ -12751,9 +12781,9 @@
                 <a:solidFill>
                   <a:srgbClr val="1D1D1F"/>
                 </a:solidFill>
-                <a:latin typeface="NanumSquare Neo" pitchFamily="34" charset="0"/>
-                <a:ea typeface="NanumSquare Neo" pitchFamily="34" charset="-122"/>
-                <a:cs typeface="NanumSquare Neo" pitchFamily="34" charset="-120"/>
+                <a:latin typeface="나눔스퀘어 네오 Regular" pitchFamily="34" charset="0"/>
+                <a:ea typeface="나눔스퀘어 네오 Regular" pitchFamily="34" charset="-122"/>
+                <a:cs typeface="나눔스퀘어 네오 Regular" pitchFamily="34" charset="-120"/>
               </a:rPr>
               <a:t>• 3차 Q&amp;A로 확인된 물리 셋업(봉-피벗)과 모델이 일치</a:t>
             </a:r>
@@ -12813,13 +12843,13 @@
               <a:buNone/>
             </a:pPr>
             <a:r>
-              <a:rPr lang="en-US" sz="1600" b="1" dirty="0">
+              <a:rPr lang="en-US" sz="1600" dirty="0">
                 <a:solidFill>
                   <a:srgbClr val="1D1D1F"/>
                 </a:solidFill>
-                <a:latin typeface="NanumSquare Neo" pitchFamily="34" charset="0"/>
-                <a:ea typeface="NanumSquare Neo" pitchFamily="34" charset="-122"/>
-                <a:cs typeface="NanumSquare Neo" pitchFamily="34" charset="-120"/>
+                <a:latin typeface="나눔스퀘어 네오 Bold" pitchFamily="34" charset="0"/>
+                <a:ea typeface="나눔스퀘어 네오 Bold" pitchFamily="34" charset="-122"/>
+                <a:cs typeface="나눔스퀘어 네오 Bold" pitchFamily="34" charset="-120"/>
               </a:rPr>
               <a:t>단점·한계</a:t>
             </a:r>
@@ -12856,9 +12886,9 @@
                 <a:solidFill>
                   <a:srgbClr val="1D1D1F"/>
                 </a:solidFill>
-                <a:latin typeface="NanumSquare Neo" pitchFamily="34" charset="0"/>
-                <a:ea typeface="NanumSquare Neo" pitchFamily="34" charset="-122"/>
-                <a:cs typeface="NanumSquare Neo" pitchFamily="34" charset="-120"/>
+                <a:latin typeface="나눔스퀘어 네오 Regular" pitchFamily="34" charset="0"/>
+                <a:ea typeface="나눔스퀘어 네오 Regular" pitchFamily="34" charset="-122"/>
+                <a:cs typeface="나눔스퀘어 네오 Regular" pitchFamily="34" charset="-120"/>
               </a:rPr>
               <a:t>• 통합 회로의 합성·P&amp;R은 4×4 패치, 64×64 월드, 256각도 (좌표 변환·추정기만 1024×1024로 검증)</a:t>
             </a:r>
@@ -12873,9 +12903,9 @@
                 <a:solidFill>
                   <a:srgbClr val="1D1D1F"/>
                 </a:solidFill>
-                <a:latin typeface="NanumSquare Neo" pitchFamily="34" charset="0"/>
-                <a:ea typeface="NanumSquare Neo" pitchFamily="34" charset="-122"/>
-                <a:cs typeface="NanumSquare Neo" pitchFamily="34" charset="-120"/>
+                <a:latin typeface="나눔스퀘어 네오 Regular" pitchFamily="34" charset="0"/>
+                <a:ea typeface="나눔스퀘어 네오 Regular" pitchFamily="34" charset="-122"/>
+                <a:cs typeface="나눔스퀘어 네오 Regular" pitchFamily="34" charset="-120"/>
               </a:rPr>
               <a:t>• 회전각 추정 정확도가 장면에 크게 의존</a:t>
             </a:r>
@@ -12890,9 +12920,9 @@
                 <a:solidFill>
                   <a:srgbClr val="1D1D1F"/>
                 </a:solidFill>
-                <a:latin typeface="NanumSquare Neo" pitchFamily="34" charset="0"/>
-                <a:ea typeface="NanumSquare Neo" pitchFamily="34" charset="-122"/>
-                <a:cs typeface="NanumSquare Neo" pitchFamily="34" charset="-120"/>
+                <a:latin typeface="나눔스퀘어 네오 Regular" pitchFamily="34" charset="0"/>
+                <a:ea typeface="나눔스퀘어 네오 Regular" pitchFamily="34" charset="-122"/>
+                <a:cs typeface="나눔스퀘어 네오 Regular" pitchFamily="34" charset="-120"/>
               </a:rPr>
               <a:t>• 시차(깊이) 보정은 소프트웨어만, RTL 미반영</a:t>
             </a:r>
@@ -12907,9 +12937,9 @@
                 <a:solidFill>
                   <a:srgbClr val="1D1D1F"/>
                 </a:solidFill>
-                <a:latin typeface="NanumSquare Neo" pitchFamily="34" charset="0"/>
-                <a:ea typeface="NanumSquare Neo" pitchFamily="34" charset="-122"/>
-                <a:cs typeface="NanumSquare Neo" pitchFamily="34" charset="-120"/>
+                <a:latin typeface="나눔스퀘어 네오 Regular" pitchFamily="34" charset="0"/>
+                <a:ea typeface="나눔스퀘어 네오 Regular" pitchFamily="34" charset="-122"/>
+                <a:cs typeface="나눔스퀘어 네오 Regular" pitchFamily="34" charset="-120"/>
               </a:rPr>
               <a:t>• 정답 없는 실제 영상은 간접 지표로만 평가</a:t>
             </a:r>
@@ -12969,13 +12999,13 @@
               <a:buNone/>
             </a:pPr>
             <a:r>
-              <a:rPr lang="en-US" sz="1600" b="1" dirty="0">
+              <a:rPr lang="en-US" sz="1600" dirty="0">
                 <a:solidFill>
                   <a:srgbClr val="0066CC"/>
                 </a:solidFill>
-                <a:latin typeface="NanumSquare Neo" pitchFamily="34" charset="0"/>
-                <a:ea typeface="NanumSquare Neo" pitchFamily="34" charset="-122"/>
-                <a:cs typeface="NanumSquare Neo" pitchFamily="34" charset="-120"/>
+                <a:latin typeface="나눔스퀘어 네오 Bold" pitchFamily="34" charset="0"/>
+                <a:ea typeface="나눔스퀘어 네오 Bold" pitchFamily="34" charset="-122"/>
+                <a:cs typeface="나눔스퀘어 네오 Bold" pitchFamily="34" charset="-120"/>
               </a:rPr>
               <a:t>고려 사항: 목표 크기(1024×1024)로 확장할 때</a:t>
             </a:r>
@@ -13012,9 +13042,9 @@
                 <a:solidFill>
                   <a:srgbClr val="1D1D1F"/>
                 </a:solidFill>
-                <a:latin typeface="NanumSquare Neo" pitchFamily="34" charset="0"/>
-                <a:ea typeface="NanumSquare Neo" pitchFamily="34" charset="-122"/>
-                <a:cs typeface="NanumSquare Neo" pitchFamily="34" charset="-120"/>
+                <a:latin typeface="나눔스퀘어 네오 Regular" pitchFamily="34" charset="0"/>
+                <a:ea typeface="나눔스퀘어 네오 Regular" pitchFamily="34" charset="-122"/>
+                <a:cs typeface="나눔스퀘어 네오 Regular" pitchFamily="34" charset="-120"/>
               </a:rPr>
               <a:t>• 1024×1024 × 2비트 = 약 2.1 Mbit. 지금의 FF 메모리 비용(약 12 µm²/비트)로는 약 25 mm² → SRAM 매크로가 필수 (제안 크기 기준 단순 계산, 합성 결과 아님)</a:t>
             </a:r>
@@ -13029,9 +13059,9 @@
                 <a:solidFill>
                   <a:srgbClr val="1D1D1F"/>
                 </a:solidFill>
-                <a:latin typeface="NanumSquare Neo" pitchFamily="34" charset="0"/>
-                <a:ea typeface="NanumSquare Neo" pitchFamily="34" charset="-122"/>
-                <a:cs typeface="NanumSquare Neo" pitchFamily="34" charset="-120"/>
+                <a:latin typeface="나눔스퀘어 네오 Regular" pitchFamily="34" charset="0"/>
+                <a:ea typeface="나눔스퀘어 네오 Regular" pitchFamily="34" charset="-122"/>
+                <a:cs typeface="나눔스퀘어 네오 Regular" pitchFamily="34" charset="-120"/>
               </a:rPr>
               <a:t>• 교육용 PDK(GPDK045)에는 SRAM 컴파일러가 없어, 메모리 면적·전력은 별도 모델로 추정해야 함</a:t>
             </a:r>
@@ -13046,9 +13076,26 @@
                 <a:solidFill>
                   <a:srgbClr val="1D1D1F"/>
                 </a:solidFill>
-                <a:latin typeface="NanumSquare Neo" pitchFamily="34" charset="0"/>
-                <a:ea typeface="NanumSquare Neo" pitchFamily="34" charset="-122"/>
-                <a:cs typeface="NanumSquare Neo" pitchFamily="34" charset="-120"/>
+                <a:latin typeface="나눔스퀘어 네오 Regular" pitchFamily="34" charset="0"/>
+                <a:ea typeface="나눔스퀘어 네오 Regular" pitchFamily="34" charset="-122"/>
+                <a:cs typeface="나눔스퀘어 네오 Regular" pitchFamily="34" charset="-120"/>
+              </a:rPr>
+              <a:t>• 좌표 변환 표(RMCM)는 1024각도로 늘리면 항목이 16배(16,384가지)가 되어 면적이 15.9배(1,199→19,071 µm²). 이 크기에서 직접 행렬곱과의 비교는 아직 안 함</a:t>
+            </a:r>
+            <a:endParaRPr lang="en-US" sz="1400" dirty="0"/>
+          </a:p>
+          <a:p>
+            <a:pPr eaLnBrk="0" indent="0" marL="0">
+              <a:buNone/>
+            </a:pPr>
+            <a:r>
+              <a:rPr lang="en-US" sz="1400" dirty="0">
+                <a:solidFill>
+                  <a:srgbClr val="1D1D1F"/>
+                </a:solidFill>
+                <a:latin typeface="나눔스퀘어 네오 Regular" pitchFamily="34" charset="0"/>
+                <a:ea typeface="나눔스퀘어 네오 Regular" pitchFamily="34" charset="-122"/>
+                <a:cs typeface="나눔스퀘어 네오 Regular" pitchFamily="34" charset="-120"/>
               </a:rPr>
               <a:t>• 쓰기 경로(FIFO·중재·좌표 변환)는 레인 수에 비례해 늘어나지만 메모리에 비하면 작다</a:t>
             </a:r>
@@ -13088,9 +13135,9 @@
                 <a:solidFill>
                   <a:srgbClr val="7A7A7A"/>
                 </a:solidFill>
-                <a:latin typeface="NanumSquare Neo"/>
-                <a:ea typeface="NanumSquare Neo"/>
-                <a:cs typeface="NanumSquare Neo"/>
+                <a:latin typeface="나눔스퀘어 네오 Regular"/>
+                <a:ea typeface="나눔스퀘어 네오 Regular"/>
+                <a:cs typeface="나눔스퀘어 네오 Regular"/>
               </a:defRPr>
             </a:lvl1pPr>
           </a:lstStyle>
@@ -13154,13 +13201,13 @@
               <a:buNone/>
             </a:pPr>
             <a:r>
-              <a:rPr lang="en-US" sz="3400" b="1" dirty="0">
+              <a:rPr lang="en-US" sz="3400" dirty="0">
                 <a:solidFill>
                   <a:srgbClr val="FFFFFF"/>
                 </a:solidFill>
-                <a:latin typeface="NanumSquare Neo" pitchFamily="34" charset="0"/>
-                <a:ea typeface="NanumSquare Neo" pitchFamily="34" charset="-122"/>
-                <a:cs typeface="NanumSquare Neo" pitchFamily="34" charset="-120"/>
+                <a:latin typeface="나눔스퀘어 네오 Bold" pitchFamily="34" charset="0"/>
+                <a:ea typeface="나눔스퀘어 네오 Bold" pitchFamily="34" charset="-122"/>
+                <a:cs typeface="나눔스퀘어 네오 Bold" pitchFamily="34" charset="-120"/>
               </a:rPr>
               <a:t>요약과 앞으로</a:t>
             </a:r>
@@ -13193,13 +13240,13 @@
               <a:buNone/>
             </a:pPr>
             <a:r>
-              <a:rPr lang="en-US" sz="1800" b="1" dirty="0">
+              <a:rPr lang="en-US" sz="1800" dirty="0">
                 <a:solidFill>
                   <a:srgbClr val="2997FF"/>
                 </a:solidFill>
-                <a:latin typeface="NanumSquare Neo" pitchFamily="34" charset="0"/>
-                <a:ea typeface="NanumSquare Neo" pitchFamily="34" charset="-122"/>
-                <a:cs typeface="NanumSquare Neo" pitchFamily="34" charset="-120"/>
+                <a:latin typeface="나눔스퀘어 네오 Bold" pitchFamily="34" charset="0"/>
+                <a:ea typeface="나눔스퀘어 네오 Bold" pitchFamily="34" charset="-122"/>
+                <a:cs typeface="나눔스퀘어 네오 Bold" pitchFamily="34" charset="-120"/>
               </a:rPr>
               <a:t>한 일</a:t>
             </a:r>
@@ -13240,9 +13287,9 @@
                 <a:solidFill>
                   <a:srgbClr val="FFFFFF"/>
                 </a:solidFill>
-                <a:latin typeface="NanumSquare Neo" pitchFamily="34" charset="0"/>
-                <a:ea typeface="NanumSquare Neo" pitchFamily="34" charset="-122"/>
-                <a:cs typeface="NanumSquare Neo" pitchFamily="34" charset="-120"/>
+                <a:latin typeface="나눔스퀘어 네오 Regular" pitchFamily="34" charset="0"/>
+                <a:ea typeface="나눔스퀘어 네오 Regular" pitchFamily="34" charset="-122"/>
+                <a:cs typeface="나눔스퀘어 네오 Regular" pitchFamily="34" charset="-120"/>
               </a:rPr>
               <a:t>회전각으로 이벤트를 월드 좌표로 옮기는 회로를 RTL로 구현</a:t>
             </a:r>
@@ -13261,9 +13308,9 @@
                 <a:solidFill>
                   <a:srgbClr val="FFFFFF"/>
                 </a:solidFill>
-                <a:latin typeface="NanumSquare Neo" pitchFamily="34" charset="0"/>
-                <a:ea typeface="NanumSquare Neo" pitchFamily="34" charset="-122"/>
-                <a:cs typeface="NanumSquare Neo" pitchFamily="34" charset="-120"/>
+                <a:latin typeface="나눔스퀘어 네오 Regular" pitchFamily="34" charset="0"/>
+                <a:ea typeface="나눔스퀘어 네오 Regular" pitchFamily="34" charset="-122"/>
+                <a:cs typeface="나눔스퀘어 네오 Regular" pitchFamily="34" charset="-120"/>
               </a:rPr>
               <a:t>표 기반 좌표 변환 (면적 2.5배↓, 전력 4.8배↓)</a:t>
             </a:r>
@@ -13282,9 +13329,9 @@
                 <a:solidFill>
                   <a:srgbClr val="FFFFFF"/>
                 </a:solidFill>
-                <a:latin typeface="NanumSquare Neo" pitchFamily="34" charset="0"/>
-                <a:ea typeface="NanumSquare Neo" pitchFamily="34" charset="-122"/>
-                <a:cs typeface="NanumSquare Neo" pitchFamily="34" charset="-120"/>
+                <a:latin typeface="나눔스퀘어 네오 Regular" pitchFamily="34" charset="0"/>
+                <a:ea typeface="나눔스퀘어 네오 Regular" pitchFamily="34" charset="-122"/>
+                <a:cs typeface="나눔스퀘어 네오 Regular" pitchFamily="34" charset="-120"/>
               </a:rPr>
               <a:t>단일 쓰기 포트, 행 클록 게이팅, blink</a:t>
             </a:r>
@@ -13317,13 +13364,13 @@
               <a:buNone/>
             </a:pPr>
             <a:r>
-              <a:rPr lang="en-US" sz="1800" b="1" dirty="0">
+              <a:rPr lang="en-US" sz="1800" dirty="0">
                 <a:solidFill>
                   <a:srgbClr val="2997FF"/>
                 </a:solidFill>
-                <a:latin typeface="NanumSquare Neo" pitchFamily="34" charset="0"/>
-                <a:ea typeface="NanumSquare Neo" pitchFamily="34" charset="-122"/>
-                <a:cs typeface="NanumSquare Neo" pitchFamily="34" charset="-120"/>
+                <a:latin typeface="나눔스퀘어 네오 Bold" pitchFamily="34" charset="0"/>
+                <a:ea typeface="나눔스퀘어 네오 Bold" pitchFamily="34" charset="-122"/>
+                <a:cs typeface="나눔스퀘어 네오 Bold" pitchFamily="34" charset="-120"/>
               </a:rPr>
               <a:t>확인한 것</a:t>
             </a:r>
@@ -13364,9 +13411,9 @@
                 <a:solidFill>
                   <a:srgbClr val="FFFFFF"/>
                 </a:solidFill>
-                <a:latin typeface="NanumSquare Neo" pitchFamily="34" charset="0"/>
-                <a:ea typeface="NanumSquare Neo" pitchFamily="34" charset="-122"/>
-                <a:cs typeface="NanumSquare Neo" pitchFamily="34" charset="-120"/>
+                <a:latin typeface="나눔스퀘어 네오 Regular" pitchFamily="34" charset="0"/>
+                <a:ea typeface="나눔스퀘어 네오 Regular" pitchFamily="34" charset="-122"/>
+                <a:cs typeface="나눔스퀘어 네오 Regular" pitchFamily="34" charset="-120"/>
               </a:rPr>
               <a:t>소프트웨어 모델과 비트 단위 일치</a:t>
             </a:r>
@@ -13385,9 +13432,9 @@
                 <a:solidFill>
                   <a:srgbClr val="FFFFFF"/>
                 </a:solidFill>
-                <a:latin typeface="NanumSquare Neo" pitchFamily="34" charset="0"/>
-                <a:ea typeface="NanumSquare Neo" pitchFamily="34" charset="-122"/>
-                <a:cs typeface="NanumSquare Neo" pitchFamily="34" charset="-120"/>
+                <a:latin typeface="나눔스퀘어 네오 Regular" pitchFamily="34" charset="0"/>
+                <a:ea typeface="나눔스퀘어 네오 Regular" pitchFamily="34" charset="-122"/>
+                <a:cs typeface="나눔스퀘어 네오 Regular" pitchFamily="34" charset="-120"/>
               </a:rPr>
               <a:t>메모리 전력 −65.5%</a:t>
             </a:r>
@@ -13406,9 +13453,9 @@
                 <a:solidFill>
                   <a:srgbClr val="FFFFFF"/>
                 </a:solidFill>
-                <a:latin typeface="NanumSquare Neo" pitchFamily="34" charset="0"/>
-                <a:ea typeface="NanumSquare Neo" pitchFamily="34" charset="-122"/>
-                <a:cs typeface="NanumSquare Neo" pitchFamily="34" charset="-120"/>
+                <a:latin typeface="나눔스퀘어 네오 Regular" pitchFamily="34" charset="0"/>
+                <a:ea typeface="나눔스퀘어 네오 Regular" pitchFamily="34" charset="-122"/>
+                <a:cs typeface="나눔스퀘어 네오 Regular" pitchFamily="34" charset="-120"/>
               </a:rPr>
               <a:t>P&amp;R: DRC·antenna 0건, 클록 게이팅 hold는 ICG로 해결</a:t>
             </a:r>
@@ -13441,13 +13488,13 @@
               <a:buNone/>
             </a:pPr>
             <a:r>
-              <a:rPr lang="en-US" sz="1800" b="1" dirty="0">
+              <a:rPr lang="en-US" sz="1800" dirty="0">
                 <a:solidFill>
                   <a:srgbClr val="2997FF"/>
                 </a:solidFill>
-                <a:latin typeface="NanumSquare Neo" pitchFamily="34" charset="0"/>
-                <a:ea typeface="NanumSquare Neo" pitchFamily="34" charset="-122"/>
-                <a:cs typeface="NanumSquare Neo" pitchFamily="34" charset="-120"/>
+                <a:latin typeface="나눔스퀘어 네오 Bold" pitchFamily="34" charset="0"/>
+                <a:ea typeface="나눔스퀘어 네오 Bold" pitchFamily="34" charset="-122"/>
+                <a:cs typeface="나눔스퀘어 네오 Bold" pitchFamily="34" charset="-120"/>
               </a:rPr>
               <a:t>남은 것</a:t>
             </a:r>
@@ -13488,9 +13535,9 @@
                 <a:solidFill>
                   <a:srgbClr val="FFFFFF"/>
                 </a:solidFill>
-                <a:latin typeface="NanumSquare Neo" pitchFamily="34" charset="0"/>
-                <a:ea typeface="NanumSquare Neo" pitchFamily="34" charset="-122"/>
-                <a:cs typeface="NanumSquare Neo" pitchFamily="34" charset="-120"/>
+                <a:latin typeface="나눔스퀘어 네오 Regular" pitchFamily="34" charset="0"/>
+                <a:ea typeface="나눔스퀘어 네오 Regular" pitchFamily="34" charset="-122"/>
+                <a:cs typeface="나눔스퀘어 네오 Regular" pitchFamily="34" charset="-120"/>
               </a:rPr>
               <a:t>1024×1024로의 확장과 SRAM 모델링</a:t>
             </a:r>
@@ -13509,9 +13556,9 @@
                 <a:solidFill>
                   <a:srgbClr val="FFFFFF"/>
                 </a:solidFill>
-                <a:latin typeface="NanumSquare Neo" pitchFamily="34" charset="0"/>
-                <a:ea typeface="NanumSquare Neo" pitchFamily="34" charset="-122"/>
-                <a:cs typeface="NanumSquare Neo" pitchFamily="34" charset="-120"/>
+                <a:latin typeface="나눔스퀘어 네오 Regular" pitchFamily="34" charset="0"/>
+                <a:ea typeface="나눔스퀘어 네오 Regular" pitchFamily="34" charset="-122"/>
+                <a:cs typeface="나눔스퀘어 네오 Regular" pitchFamily="34" charset="-120"/>
               </a:rPr>
               <a:t>시차 보정의 RTL 반영</a:t>
             </a:r>
@@ -13530,9 +13577,9 @@
                 <a:solidFill>
                   <a:srgbClr val="FFFFFF"/>
                 </a:solidFill>
-                <a:latin typeface="NanumSquare Neo" pitchFamily="34" charset="0"/>
-                <a:ea typeface="NanumSquare Neo" pitchFamily="34" charset="-122"/>
-                <a:cs typeface="NanumSquare Neo" pitchFamily="34" charset="-120"/>
+                <a:latin typeface="나눔스퀘어 네오 Regular" pitchFamily="34" charset="0"/>
+                <a:ea typeface="나눔스퀘어 네오 Regular" pitchFamily="34" charset="-122"/>
+                <a:cs typeface="나눔스퀘어 네오 Regular" pitchFamily="34" charset="-120"/>
               </a:rPr>
               <a:t>실제 영상에서 θ 정확도 개선</a:t>
             </a:r>
@@ -13565,13 +13612,13 @@
               <a:buNone/>
             </a:pPr>
             <a:r>
-              <a:rPr lang="en-US" sz="1800" b="1" dirty="0">
+              <a:rPr lang="en-US" sz="1800" dirty="0">
                 <a:solidFill>
                   <a:srgbClr val="CCCCCC"/>
                 </a:solidFill>
-                <a:latin typeface="NanumSquare Neo" pitchFamily="34" charset="0"/>
-                <a:ea typeface="NanumSquare Neo" pitchFamily="34" charset="-122"/>
-                <a:cs typeface="NanumSquare Neo" pitchFamily="34" charset="-120"/>
+                <a:latin typeface="나눔스퀘어 네오 Bold" pitchFamily="34" charset="0"/>
+                <a:ea typeface="나눔스퀘어 네오 Bold" pitchFamily="34" charset="-122"/>
+                <a:cs typeface="나눔스퀘어 네오 Bold" pitchFamily="34" charset="-120"/>
               </a:rPr>
               <a:t>주소 자체가 이벤트다 — 필요한 것만 옮기고, 쉬는 동안은 끈다.</a:t>
             </a:r>
@@ -13631,13 +13678,13 @@
               <a:buNone/>
             </a:pPr>
             <a:r>
-              <a:rPr lang="en-US" sz="2600" b="1" dirty="0">
+              <a:rPr lang="en-US" sz="2600" dirty="0">
                 <a:solidFill>
                   <a:srgbClr val="1D1D1F"/>
                 </a:solidFill>
-                <a:latin typeface="NanumSquare Neo" pitchFamily="34" charset="0"/>
-                <a:ea typeface="NanumSquare Neo" pitchFamily="34" charset="-122"/>
-                <a:cs typeface="NanumSquare Neo" pitchFamily="34" charset="-120"/>
+                <a:latin typeface="나눔스퀘어 네오 Bold" pitchFamily="34" charset="0"/>
+                <a:ea typeface="나눔스퀘어 네오 Bold" pitchFamily="34" charset="-122"/>
+                <a:cs typeface="나눔스퀘어 네오 Bold" pitchFamily="34" charset="-120"/>
               </a:rPr>
               <a:t>문제 정의: 센서가 돌아도 지도는 제자리에 있어야 한다</a:t>
             </a:r>
@@ -13697,13 +13744,13 @@
               <a:buNone/>
             </a:pPr>
             <a:r>
-              <a:rPr lang="en-US" sz="1600" b="1" dirty="0">
+              <a:rPr lang="en-US" sz="1600" dirty="0">
                 <a:solidFill>
                   <a:srgbClr val="0066CC"/>
                 </a:solidFill>
-                <a:latin typeface="NanumSquare Neo" pitchFamily="34" charset="0"/>
-                <a:ea typeface="NanumSquare Neo" pitchFamily="34" charset="-122"/>
-                <a:cs typeface="NanumSquare Neo" pitchFamily="34" charset="-120"/>
+                <a:latin typeface="나눔스퀘어 네오 Bold" pitchFamily="34" charset="0"/>
+                <a:ea typeface="나눔스퀘어 네오 Bold" pitchFamily="34" charset="-122"/>
+                <a:cs typeface="나눔스퀘어 네오 Bold" pitchFamily="34" charset="-120"/>
               </a:rPr>
               <a:t>입력</a:t>
             </a:r>
@@ -13740,9 +13787,9 @@
                 <a:solidFill>
                   <a:srgbClr val="1D1D1F"/>
                 </a:solidFill>
-                <a:latin typeface="NanumSquare Neo" pitchFamily="34" charset="0"/>
-                <a:ea typeface="NanumSquare Neo" pitchFamily="34" charset="-122"/>
-                <a:cs typeface="NanumSquare Neo" pitchFamily="34" charset="-120"/>
+                <a:latin typeface="나눔스퀘어 네오 Regular" pitchFamily="34" charset="0"/>
+                <a:ea typeface="나눔스퀘어 네오 Regular" pitchFamily="34" charset="-122"/>
+                <a:cs typeface="나눔스퀘어 네오 Regular" pitchFamily="34" charset="-120"/>
               </a:rPr>
               <a:t>센서 960×720</a:t>
             </a:r>
@@ -13757,9 +13804,9 @@
                 <a:solidFill>
                   <a:srgbClr val="1D1D1F"/>
                 </a:solidFill>
-                <a:latin typeface="NanumSquare Neo" pitchFamily="34" charset="0"/>
-                <a:ea typeface="NanumSquare Neo" pitchFamily="34" charset="-122"/>
-                <a:cs typeface="NanumSquare Neo" pitchFamily="34" charset="-120"/>
+                <a:latin typeface="나눔스퀘어 네오 Regular" pitchFamily="34" charset="0"/>
+                <a:ea typeface="나눔스퀘어 네오 Regular" pitchFamily="34" charset="-122"/>
+                <a:cs typeface="나눔스퀘어 네오 Regular" pitchFamily="34" charset="-120"/>
               </a:rPr>
               <a:t>이벤트 = 주소 (x, y) + 극성</a:t>
             </a:r>
@@ -13774,9 +13821,9 @@
                 <a:solidFill>
                   <a:srgbClr val="1D1D1F"/>
                 </a:solidFill>
-                <a:latin typeface="NanumSquare Neo" pitchFamily="34" charset="0"/>
-                <a:ea typeface="NanumSquare Neo" pitchFamily="34" charset="-122"/>
-                <a:cs typeface="NanumSquare Neo" pitchFamily="34" charset="-120"/>
+                <a:latin typeface="나눔스퀘어 네오 Regular" pitchFamily="34" charset="0"/>
+                <a:ea typeface="나눔스퀘어 네오 Regular" pitchFamily="34" charset="-122"/>
+                <a:cs typeface="나눔스퀘어 네오 Regular" pitchFamily="34" charset="-120"/>
               </a:rPr>
               <a:t>회전각 θ (외부 공급 또는 추정)</a:t>
             </a:r>
@@ -13836,13 +13883,13 @@
               <a:buNone/>
             </a:pPr>
             <a:r>
-              <a:rPr lang="en-US" sz="1600" b="1" dirty="0">
+              <a:rPr lang="en-US" sz="1600" dirty="0">
                 <a:solidFill>
                   <a:srgbClr val="0066CC"/>
                 </a:solidFill>
-                <a:latin typeface="NanumSquare Neo" pitchFamily="34" charset="0"/>
-                <a:ea typeface="NanumSquare Neo" pitchFamily="34" charset="-122"/>
-                <a:cs typeface="NanumSquare Neo" pitchFamily="34" charset="-120"/>
+                <a:latin typeface="나눔스퀘어 네오 Bold" pitchFamily="34" charset="0"/>
+                <a:ea typeface="나눔스퀘어 네오 Bold" pitchFamily="34" charset="-122"/>
+                <a:cs typeface="나눔스퀘어 네오 Bold" pitchFamily="34" charset="-120"/>
               </a:rPr>
               <a:t>제약 (교수 Q&amp;A 확정)</a:t>
             </a:r>
@@ -13879,9 +13926,9 @@
                 <a:solidFill>
                   <a:srgbClr val="1D1D1F"/>
                 </a:solidFill>
-                <a:latin typeface="NanumSquare Neo" pitchFamily="34" charset="0"/>
-                <a:ea typeface="NanumSquare Neo" pitchFamily="34" charset="-122"/>
-                <a:cs typeface="NanumSquare Neo" pitchFamily="34" charset="-120"/>
+                <a:latin typeface="나눔스퀘어 네오 Regular" pitchFamily="34" charset="0"/>
+                <a:ea typeface="나눔스퀘어 네오 Regular" pitchFamily="34" charset="-122"/>
+                <a:cs typeface="나눔스퀘어 네오 Regular" pitchFamily="34" charset="-120"/>
               </a:rPr>
               <a:t>회전 180° 이내</a:t>
             </a:r>
@@ -13896,9 +13943,9 @@
                 <a:solidFill>
                   <a:srgbClr val="1D1D1F"/>
                 </a:solidFill>
-                <a:latin typeface="NanumSquare Neo" pitchFamily="34" charset="0"/>
-                <a:ea typeface="NanumSquare Neo" pitchFamily="34" charset="-122"/>
-                <a:cs typeface="NanumSquare Neo" pitchFamily="34" charset="-120"/>
+                <a:latin typeface="나눔스퀘어 네오 Regular" pitchFamily="34" charset="0"/>
+                <a:ea typeface="나눔스퀘어 네오 Regular" pitchFamily="34" charset="-122"/>
+                <a:cs typeface="나눔스퀘어 네오 Regular" pitchFamily="34" charset="-120"/>
               </a:rPr>
               <a:t>평행 이동 없음 (미세하게만)</a:t>
             </a:r>
@@ -13913,9 +13960,9 @@
                 <a:solidFill>
                   <a:srgbClr val="1D1D1F"/>
                 </a:solidFill>
-                <a:latin typeface="NanumSquare Neo" pitchFamily="34" charset="0"/>
-                <a:ea typeface="NanumSquare Neo" pitchFamily="34" charset="-122"/>
-                <a:cs typeface="NanumSquare Neo" pitchFamily="34" charset="-120"/>
+                <a:latin typeface="나눔스퀘어 네오 Regular" pitchFamily="34" charset="0"/>
+                <a:ea typeface="나눔스퀘어 네오 Regular" pitchFamily="34" charset="-122"/>
+                <a:cs typeface="나눔스퀘어 네오 Regular" pitchFamily="34" charset="-120"/>
               </a:rPr>
               <a:t>표면만 보는 2차원 월드 메모리</a:t>
             </a:r>
@@ -13975,13 +14022,13 @@
               <a:buNone/>
             </a:pPr>
             <a:r>
-              <a:rPr lang="en-US" sz="1600" b="1" dirty="0">
+              <a:rPr lang="en-US" sz="1600" dirty="0">
                 <a:solidFill>
                   <a:srgbClr val="0066CC"/>
                 </a:solidFill>
-                <a:latin typeface="NanumSquare Neo" pitchFamily="34" charset="0"/>
-                <a:ea typeface="NanumSquare Neo" pitchFamily="34" charset="-122"/>
-                <a:cs typeface="NanumSquare Neo" pitchFamily="34" charset="-120"/>
+                <a:latin typeface="나눔스퀘어 네오 Bold" pitchFamily="34" charset="0"/>
+                <a:ea typeface="나눔스퀘어 네오 Bold" pitchFamily="34" charset="-122"/>
+                <a:cs typeface="나눔스퀘어 네오 Bold" pitchFamily="34" charset="-120"/>
               </a:rPr>
               <a:t>출력</a:t>
             </a:r>
@@ -14018,9 +14065,9 @@
                 <a:solidFill>
                   <a:srgbClr val="1D1D1F"/>
                 </a:solidFill>
-                <a:latin typeface="NanumSquare Neo" pitchFamily="34" charset="0"/>
-                <a:ea typeface="NanumSquare Neo" pitchFamily="34" charset="-122"/>
-                <a:cs typeface="NanumSquare Neo" pitchFamily="34" charset="-120"/>
+                <a:latin typeface="나눔스퀘어 네오 Regular" pitchFamily="34" charset="0"/>
+                <a:ea typeface="나눔스퀘어 네오 Regular" pitchFamily="34" charset="-122"/>
+                <a:cs typeface="나눔스퀘어 네오 Regular" pitchFamily="34" charset="-120"/>
               </a:rPr>
               <a:t>월드 메모리</a:t>
             </a:r>
@@ -14035,9 +14082,9 @@
                 <a:solidFill>
                   <a:srgbClr val="1D1D1F"/>
                 </a:solidFill>
-                <a:latin typeface="NanumSquare Neo" pitchFamily="34" charset="0"/>
-                <a:ea typeface="NanumSquare Neo" pitchFamily="34" charset="-122"/>
-                <a:cs typeface="NanumSquare Neo" pitchFamily="34" charset="-120"/>
+                <a:latin typeface="나눔스퀘어 네오 Regular" pitchFamily="34" charset="0"/>
+                <a:ea typeface="나눔스퀘어 네오 Regular" pitchFamily="34" charset="-122"/>
+                <a:cs typeface="나눔스퀘어 네오 Regular" pitchFamily="34" charset="-120"/>
               </a:rPr>
               <a:t>칸마다 이벤트 유무 + 극성</a:t>
             </a:r>
@@ -14052,9 +14099,9 @@
                 <a:solidFill>
                   <a:srgbClr val="1D1D1F"/>
                 </a:solidFill>
-                <a:latin typeface="NanumSquare Neo" pitchFamily="34" charset="0"/>
-                <a:ea typeface="NanumSquare Neo" pitchFamily="34" charset="-122"/>
-                <a:cs typeface="NanumSquare Neo" pitchFamily="34" charset="-120"/>
+                <a:latin typeface="나눔스퀘어 네오 Regular" pitchFamily="34" charset="0"/>
+                <a:ea typeface="나눔스퀘어 네오 Regular" pitchFamily="34" charset="-122"/>
+                <a:cs typeface="나눔스퀘어 네오 Regular" pitchFamily="34" charset="-120"/>
               </a:rPr>
               <a:t>호스트용 읽기 포트</a:t>
             </a:r>
@@ -14115,9 +14162,9 @@
                 <a:solidFill>
                   <a:srgbClr val="7A7A7A"/>
                 </a:solidFill>
-                <a:latin typeface="NanumSquare Neo" pitchFamily="34" charset="0"/>
-                <a:ea typeface="NanumSquare Neo" pitchFamily="34" charset="-122"/>
-                <a:cs typeface="NanumSquare Neo" pitchFamily="34" charset="-120"/>
+                <a:latin typeface="나눔스퀘어 네오 Regular" pitchFamily="34" charset="0"/>
+                <a:ea typeface="나눔스퀘어 네오 Regular" pitchFamily="34" charset="-122"/>
+                <a:cs typeface="나눔스퀘어 네오 Regular" pitchFamily="34" charset="-120"/>
               </a:rPr>
               <a:t>회전을 보정하지 않고 쌓으면(위) 소용돌이로 번지고, 회전각으로 좌표를 바꿔 쌓으면(아래) 방의 구조가 보인다. (실제 DELTA 센서 영상, 소프트웨어 모델)</a:t>
             </a:r>
@@ -14177,13 +14224,13 @@
               <a:buNone/>
             </a:pPr>
             <a:r>
-              <a:rPr lang="en-US" sz="1700" b="1" dirty="0">
+              <a:rPr lang="en-US" sz="1700" dirty="0">
                 <a:solidFill>
                   <a:srgbClr val="2997FF"/>
                 </a:solidFill>
-                <a:latin typeface="NanumSquare Neo" pitchFamily="34" charset="0"/>
-                <a:ea typeface="NanumSquare Neo" pitchFamily="34" charset="-122"/>
-                <a:cs typeface="NanumSquare Neo" pitchFamily="34" charset="-120"/>
+                <a:latin typeface="나눔스퀘어 네오 Bold" pitchFamily="34" charset="0"/>
+                <a:ea typeface="나눔스퀘어 네오 Bold" pitchFamily="34" charset="-122"/>
+                <a:cs typeface="나눔스퀘어 네오 Bold" pitchFamily="34" charset="-120"/>
               </a:rPr>
               <a:t>우리가 정한 평가 관점</a:t>
             </a:r>
@@ -14224,9 +14271,9 @@
                 <a:solidFill>
                   <a:srgbClr val="FFFFFF"/>
                 </a:solidFill>
-                <a:latin typeface="NanumSquare Neo" pitchFamily="34" charset="0"/>
-                <a:ea typeface="NanumSquare Neo" pitchFamily="34" charset="-122"/>
-                <a:cs typeface="NanumSquare Neo" pitchFamily="34" charset="-120"/>
+                <a:latin typeface="나눔스퀘어 네오 Regular" pitchFamily="34" charset="0"/>
+                <a:ea typeface="나눔스퀘어 네오 Regular" pitchFamily="34" charset="-122"/>
+                <a:cs typeface="나눔스퀘어 네오 Regular" pitchFamily="34" charset="-120"/>
               </a:rPr>
               <a:t>이벤트를 잃지 않고 정확한 칸에 쓰는가</a:t>
             </a:r>
@@ -14245,9 +14292,9 @@
                 <a:solidFill>
                   <a:srgbClr val="FFFFFF"/>
                 </a:solidFill>
-                <a:latin typeface="NanumSquare Neo" pitchFamily="34" charset="0"/>
-                <a:ea typeface="NanumSquare Neo" pitchFamily="34" charset="-122"/>
-                <a:cs typeface="NanumSquare Neo" pitchFamily="34" charset="-120"/>
+                <a:latin typeface="나눔스퀘어 네오 Regular" pitchFamily="34" charset="0"/>
+                <a:ea typeface="나눔스퀘어 네오 Regular" pitchFamily="34" charset="-122"/>
+                <a:cs typeface="나눔스퀘어 네오 Regular" pitchFamily="34" charset="-120"/>
               </a:rPr>
               <a:t>구현 가능한 면적·전력인가</a:t>
             </a:r>
@@ -14266,9 +14313,9 @@
                 <a:solidFill>
                   <a:srgbClr val="FFFFFF"/>
                 </a:solidFill>
-                <a:latin typeface="NanumSquare Neo" pitchFamily="34" charset="0"/>
-                <a:ea typeface="NanumSquare Neo" pitchFamily="34" charset="-122"/>
-                <a:cs typeface="NanumSquare Neo" pitchFamily="34" charset="-120"/>
+                <a:latin typeface="나눔스퀘어 네오 Regular" pitchFamily="34" charset="0"/>
+                <a:ea typeface="나눔스퀘어 네오 Regular" pitchFamily="34" charset="-122"/>
+                <a:cs typeface="나눔스퀘어 네오 Regular" pitchFamily="34" charset="-120"/>
               </a:rPr>
               <a:t>회로가 실제 데이터에서 안정적인가</a:t>
             </a:r>
@@ -14287,9 +14334,9 @@
                 <a:solidFill>
                   <a:srgbClr val="FFFFFF"/>
                 </a:solidFill>
-                <a:latin typeface="NanumSquare Neo" pitchFamily="34" charset="0"/>
-                <a:ea typeface="NanumSquare Neo" pitchFamily="34" charset="-122"/>
-                <a:cs typeface="NanumSquare Neo" pitchFamily="34" charset="-120"/>
+                <a:latin typeface="나눔스퀘어 네오 Regular" pitchFamily="34" charset="0"/>
+                <a:ea typeface="나눔스퀘어 네오 Regular" pitchFamily="34" charset="-122"/>
+                <a:cs typeface="나눔스퀘어 네오 Regular" pitchFamily="34" charset="-120"/>
               </a:rPr>
               <a:t>한계를 스스로 설명할 수 있는가</a:t>
             </a:r>
@@ -14329,9 +14376,9 @@
                 <a:solidFill>
                   <a:srgbClr val="7A7A7A"/>
                 </a:solidFill>
-                <a:latin typeface="NanumSquare Neo"/>
-                <a:ea typeface="NanumSquare Neo"/>
-                <a:cs typeface="NanumSquare Neo"/>
+                <a:latin typeface="나눔스퀘어 네오 Regular"/>
+                <a:ea typeface="나눔스퀘어 네오 Regular"/>
+                <a:cs typeface="나눔스퀘어 네오 Regular"/>
               </a:defRPr>
             </a:lvl1pPr>
           </a:lstStyle>
@@ -14397,13 +14444,13 @@
               <a:buNone/>
             </a:pPr>
             <a:r>
-              <a:rPr lang="en-US" sz="2600" b="1" dirty="0">
+              <a:rPr lang="en-US" sz="2600" dirty="0">
                 <a:solidFill>
                   <a:srgbClr val="1D1D1F"/>
                 </a:solidFill>
-                <a:latin typeface="NanumSquare Neo" pitchFamily="34" charset="0"/>
-                <a:ea typeface="NanumSquare Neo" pitchFamily="34" charset="-122"/>
-                <a:cs typeface="NanumSquare Neo" pitchFamily="34" charset="-120"/>
+                <a:latin typeface="나눔스퀘어 네오 Bold" pitchFamily="34" charset="0"/>
+                <a:ea typeface="나눔스퀘어 네오 Bold" pitchFamily="34" charset="-122"/>
+                <a:cs typeface="나눔스퀘어 네오 Bold" pitchFamily="34" charset="-120"/>
               </a:rPr>
               <a:t>타겟은 로봇팔 손목 카메라, 크기는 이유와 함께 제안한다</a:t>
             </a:r>
@@ -14449,20 +14496,20 @@
                         <a:buNone/>
                       </a:pPr>
                       <a:r>
-                        <a:rPr lang="en-US" sz="1400" b="1" dirty="0">
+                        <a:rPr lang="en-US" sz="1400" dirty="0">
                           <a:solidFill>
                             <a:srgbClr val="1D1D1F"/>
                           </a:solidFill>
-                          <a:latin typeface="NanumSquare Neo" pitchFamily="34" charset="0"/>
-                          <a:ea typeface="NanumSquare Neo" pitchFamily="34" charset="-122"/>
-                          <a:cs typeface="NanumSquare Neo" pitchFamily="34" charset="-120"/>
+                          <a:latin typeface="나눔스퀘어 네오 Bold" pitchFamily="34" charset="0"/>
+                          <a:ea typeface="나눔스퀘어 네오 Bold" pitchFamily="34" charset="-122"/>
+                          <a:cs typeface="나눔스퀘어 네오 Bold" pitchFamily="34" charset="-120"/>
                         </a:rPr>
                         <a:t>항목</a:t>
                       </a:r>
                       <a:endParaRPr lang="en-US" sz="1400" dirty="0">
-                        <a:latin typeface="NanumSquare Neo" charset="0"/>
-                        <a:ea typeface="NanumSquare Neo" charset="0"/>
-                        <a:cs typeface="NanumSquare Neo" charset="0"/>
+                        <a:latin typeface="나눔스퀘어 네오 Regular" charset="0"/>
+                        <a:ea typeface="나눔스퀘어 네오 Regular" charset="0"/>
+                        <a:cs typeface="나눔스퀘어 네오 Regular" charset="0"/>
                       </a:endParaRPr>
                     </a:p>
                   </a:txBody>
@@ -14517,20 +14564,20 @@
                         <a:buNone/>
                       </a:pPr>
                       <a:r>
-                        <a:rPr lang="en-US" sz="1400" b="1" dirty="0">
+                        <a:rPr lang="en-US" sz="1400" dirty="0">
                           <a:solidFill>
                             <a:srgbClr val="1D1D1F"/>
                           </a:solidFill>
-                          <a:latin typeface="NanumSquare Neo" pitchFamily="34" charset="0"/>
-                          <a:ea typeface="NanumSquare Neo" pitchFamily="34" charset="-122"/>
-                          <a:cs typeface="NanumSquare Neo" pitchFamily="34" charset="-120"/>
+                          <a:latin typeface="나눔스퀘어 네오 Bold" pitchFamily="34" charset="0"/>
+                          <a:ea typeface="나눔스퀘어 네오 Bold" pitchFamily="34" charset="-122"/>
+                          <a:cs typeface="나눔스퀘어 네오 Bold" pitchFamily="34" charset="-120"/>
                         </a:rPr>
                         <a:t>RTL로 검증한 크기</a:t>
                       </a:r>
                       <a:endParaRPr lang="en-US" sz="1400" dirty="0">
-                        <a:latin typeface="NanumSquare Neo" charset="0"/>
-                        <a:ea typeface="NanumSquare Neo" charset="0"/>
-                        <a:cs typeface="NanumSquare Neo" charset="0"/>
+                        <a:latin typeface="나눔스퀘어 네오 Regular" charset="0"/>
+                        <a:ea typeface="나눔스퀘어 네오 Regular" charset="0"/>
+                        <a:cs typeface="나눔스퀘어 네오 Regular" charset="0"/>
                       </a:endParaRPr>
                     </a:p>
                   </a:txBody>
@@ -14585,20 +14632,20 @@
                         <a:buNone/>
                       </a:pPr>
                       <a:r>
-                        <a:rPr lang="en-US" sz="1400" b="1" dirty="0">
+                        <a:rPr lang="en-US" sz="1400" dirty="0">
                           <a:solidFill>
                             <a:srgbClr val="1D1D1F"/>
                           </a:solidFill>
-                          <a:latin typeface="NanumSquare Neo" pitchFamily="34" charset="0"/>
-                          <a:ea typeface="NanumSquare Neo" pitchFamily="34" charset="-122"/>
-                          <a:cs typeface="NanumSquare Neo" pitchFamily="34" charset="-120"/>
+                          <a:latin typeface="나눔스퀘어 네오 Bold" pitchFamily="34" charset="0"/>
+                          <a:ea typeface="나눔스퀘어 네오 Bold" pitchFamily="34" charset="-122"/>
+                          <a:cs typeface="나눔스퀘어 네오 Bold" pitchFamily="34" charset="-120"/>
                         </a:rPr>
                         <a:t>로봇팔 목표(제안)</a:t>
                       </a:r>
                       <a:endParaRPr lang="en-US" sz="1400" dirty="0">
-                        <a:latin typeface="NanumSquare Neo" charset="0"/>
-                        <a:ea typeface="NanumSquare Neo" charset="0"/>
-                        <a:cs typeface="NanumSquare Neo" charset="0"/>
+                        <a:latin typeface="나눔스퀘어 네오 Regular" charset="0"/>
+                        <a:ea typeface="나눔스퀘어 네오 Regular" charset="0"/>
+                        <a:cs typeface="나눔스퀘어 네오 Regular" charset="0"/>
                       </a:endParaRPr>
                     </a:p>
                   </a:txBody>
@@ -14653,20 +14700,20 @@
                         <a:buNone/>
                       </a:pPr>
                       <a:r>
-                        <a:rPr lang="en-US" sz="1400" b="1" dirty="0">
+                        <a:rPr lang="en-US" sz="1400" dirty="0">
                           <a:solidFill>
                             <a:srgbClr val="1D1D1F"/>
                           </a:solidFill>
-                          <a:latin typeface="NanumSquare Neo" pitchFamily="34" charset="0"/>
-                          <a:ea typeface="NanumSquare Neo" pitchFamily="34" charset="-122"/>
-                          <a:cs typeface="NanumSquare Neo" pitchFamily="34" charset="-120"/>
+                          <a:latin typeface="나눔스퀘어 네오 Bold" pitchFamily="34" charset="0"/>
+                          <a:ea typeface="나눔스퀘어 네오 Bold" pitchFamily="34" charset="-122"/>
+                          <a:cs typeface="나눔스퀘어 네오 Bold" pitchFamily="34" charset="-120"/>
                         </a:rPr>
                         <a:t>근거</a:t>
                       </a:r>
                       <a:endParaRPr lang="en-US" sz="1400" dirty="0">
-                        <a:latin typeface="NanumSquare Neo" charset="0"/>
-                        <a:ea typeface="NanumSquare Neo" charset="0"/>
-                        <a:cs typeface="NanumSquare Neo" charset="0"/>
+                        <a:latin typeface="나눔스퀘어 네오 Regular" charset="0"/>
+                        <a:ea typeface="나눔스퀘어 네오 Regular" charset="0"/>
+                        <a:cs typeface="나눔스퀘어 네오 Regular" charset="0"/>
                       </a:endParaRPr>
                     </a:p>
                   </a:txBody>
@@ -14727,16 +14774,16 @@
                           <a:solidFill>
                             <a:srgbClr val="1D1D1F"/>
                           </a:solidFill>
-                          <a:latin typeface="NanumSquare Neo" pitchFamily="34" charset="0"/>
-                          <a:ea typeface="NanumSquare Neo" pitchFamily="34" charset="-122"/>
-                          <a:cs typeface="NanumSquare Neo" pitchFamily="34" charset="-120"/>
+                          <a:latin typeface="나눔스퀘어 네오 Regular" pitchFamily="34" charset="0"/>
+                          <a:ea typeface="나눔스퀘어 네오 Regular" pitchFamily="34" charset="-122"/>
+                          <a:cs typeface="나눔스퀘어 네오 Regular" pitchFamily="34" charset="-120"/>
                         </a:rPr>
                         <a:t>센서 패치</a:t>
                       </a:r>
                       <a:endParaRPr lang="en-US" sz="1400" dirty="0">
-                        <a:latin typeface="NanumSquare Neo" charset="0"/>
-                        <a:ea typeface="NanumSquare Neo" charset="0"/>
-                        <a:cs typeface="NanumSquare Neo" charset="0"/>
+                        <a:latin typeface="나눔스퀘어 네오 Regular" charset="0"/>
+                        <a:ea typeface="나눔스퀘어 네오 Regular" charset="0"/>
+                        <a:cs typeface="나눔스퀘어 네오 Regular" charset="0"/>
                       </a:endParaRPr>
                     </a:p>
                   </a:txBody>
@@ -14795,16 +14842,16 @@
                           <a:solidFill>
                             <a:srgbClr val="1D1D1F"/>
                           </a:solidFill>
-                          <a:latin typeface="NanumSquare Neo" pitchFamily="34" charset="0"/>
-                          <a:ea typeface="NanumSquare Neo" pitchFamily="34" charset="-122"/>
-                          <a:cs typeface="NanumSquare Neo" pitchFamily="34" charset="-120"/>
+                          <a:latin typeface="나눔스퀘어 네오 Regular" pitchFamily="34" charset="0"/>
+                          <a:ea typeface="나눔스퀘어 네오 Regular" pitchFamily="34" charset="-122"/>
+                          <a:cs typeface="나눔스퀘어 네오 Regular" pitchFamily="34" charset="-120"/>
                         </a:rPr>
                         <a:t>4×4</a:t>
                       </a:r>
                       <a:endParaRPr lang="en-US" sz="1400" dirty="0">
-                        <a:latin typeface="NanumSquare Neo" charset="0"/>
-                        <a:ea typeface="NanumSquare Neo" charset="0"/>
-                        <a:cs typeface="NanumSquare Neo" charset="0"/>
+                        <a:latin typeface="나눔스퀘어 네오 Regular" charset="0"/>
+                        <a:ea typeface="나눔스퀘어 네오 Regular" charset="0"/>
+                        <a:cs typeface="나눔스퀘어 네오 Regular" charset="0"/>
                       </a:endParaRPr>
                     </a:p>
                   </a:txBody>
@@ -14863,16 +14910,16 @@
                           <a:solidFill>
                             <a:srgbClr val="1D1D1F"/>
                           </a:solidFill>
-                          <a:latin typeface="NanumSquare Neo" pitchFamily="34" charset="0"/>
-                          <a:ea typeface="NanumSquare Neo" pitchFamily="34" charset="-122"/>
-                          <a:cs typeface="NanumSquare Neo" pitchFamily="34" charset="-120"/>
+                          <a:latin typeface="나눔스퀘어 네오 Regular" pitchFamily="34" charset="0"/>
+                          <a:ea typeface="나눔스퀘어 네오 Regular" pitchFamily="34" charset="-122"/>
+                          <a:cs typeface="나눔스퀘어 네오 Regular" pitchFamily="34" charset="-120"/>
                         </a:rPr>
                         <a:t>256×256</a:t>
                       </a:r>
                       <a:endParaRPr lang="en-US" sz="1400" dirty="0">
-                        <a:latin typeface="NanumSquare Neo" charset="0"/>
-                        <a:ea typeface="NanumSquare Neo" charset="0"/>
-                        <a:cs typeface="NanumSquare Neo" charset="0"/>
+                        <a:latin typeface="나눔스퀘어 네오 Regular" charset="0"/>
+                        <a:ea typeface="나눔스퀘어 네오 Regular" charset="0"/>
+                        <a:cs typeface="나눔스퀘어 네오 Regular" charset="0"/>
                       </a:endParaRPr>
                     </a:p>
                   </a:txBody>
@@ -14931,16 +14978,16 @@
                           <a:solidFill>
                             <a:srgbClr val="1D1D1F"/>
                           </a:solidFill>
-                          <a:latin typeface="NanumSquare Neo" pitchFamily="34" charset="0"/>
-                          <a:ea typeface="NanumSquare Neo" pitchFamily="34" charset="-122"/>
-                          <a:cs typeface="NanumSquare Neo" pitchFamily="34" charset="-120"/>
+                          <a:latin typeface="나눔스퀘어 네오 Regular" pitchFamily="34" charset="0"/>
+                          <a:ea typeface="나눔스퀘어 네오 Regular" pitchFamily="34" charset="-122"/>
+                          <a:cs typeface="나눔스퀘어 네오 Regular" pitchFamily="34" charset="-120"/>
                         </a:rPr>
                         <a:t>30~50 cm 근접 작업에서 부품 디테일 인식 필요</a:t>
                       </a:r>
                       <a:endParaRPr lang="en-US" sz="1400" dirty="0">
-                        <a:latin typeface="NanumSquare Neo" charset="0"/>
-                        <a:ea typeface="NanumSquare Neo" charset="0"/>
-                        <a:cs typeface="NanumSquare Neo" charset="0"/>
+                        <a:latin typeface="나눔스퀘어 네오 Regular" charset="0"/>
+                        <a:ea typeface="나눔스퀘어 네오 Regular" charset="0"/>
+                        <a:cs typeface="나눔스퀘어 네오 Regular" charset="0"/>
                       </a:endParaRPr>
                     </a:p>
                   </a:txBody>
@@ -15001,16 +15048,16 @@
                           <a:solidFill>
                             <a:srgbClr val="1D1D1F"/>
                           </a:solidFill>
-                          <a:latin typeface="NanumSquare Neo" pitchFamily="34" charset="0"/>
-                          <a:ea typeface="NanumSquare Neo" pitchFamily="34" charset="-122"/>
-                          <a:cs typeface="NanumSquare Neo" pitchFamily="34" charset="-120"/>
+                          <a:latin typeface="나눔스퀘어 네오 Regular" pitchFamily="34" charset="0"/>
+                          <a:ea typeface="나눔스퀘어 네오 Regular" pitchFamily="34" charset="-122"/>
+                          <a:cs typeface="나눔스퀘어 네오 Regular" pitchFamily="34" charset="-120"/>
                         </a:rPr>
                         <a:t>월드 메모리</a:t>
                       </a:r>
                       <a:endParaRPr lang="en-US" sz="1400" dirty="0">
-                        <a:latin typeface="NanumSquare Neo" charset="0"/>
-                        <a:ea typeface="NanumSquare Neo" charset="0"/>
-                        <a:cs typeface="NanumSquare Neo" charset="0"/>
+                        <a:latin typeface="나눔스퀘어 네오 Regular" charset="0"/>
+                        <a:ea typeface="나눔스퀘어 네오 Regular" charset="0"/>
+                        <a:cs typeface="나눔스퀘어 네오 Regular" charset="0"/>
                       </a:endParaRPr>
                     </a:p>
                   </a:txBody>
@@ -15069,16 +15116,16 @@
                           <a:solidFill>
                             <a:srgbClr val="1D1D1F"/>
                           </a:solidFill>
-                          <a:latin typeface="NanumSquare Neo" pitchFamily="34" charset="0"/>
-                          <a:ea typeface="NanumSquare Neo" pitchFamily="34" charset="-122"/>
-                          <a:cs typeface="NanumSquare Neo" pitchFamily="34" charset="-120"/>
+                          <a:latin typeface="나눔스퀘어 네오 Regular" pitchFamily="34" charset="0"/>
+                          <a:ea typeface="나눔스퀘어 네오 Regular" pitchFamily="34" charset="-122"/>
+                          <a:cs typeface="나눔스퀘어 네오 Regular" pitchFamily="34" charset="-120"/>
                         </a:rPr>
                         <a:t>1024×1024 (좌표 변환·추정기)</a:t>
                       </a:r>
                       <a:endParaRPr lang="en-US" sz="1400" dirty="0">
-                        <a:latin typeface="NanumSquare Neo" charset="0"/>
-                        <a:ea typeface="NanumSquare Neo" charset="0"/>
-                        <a:cs typeface="NanumSquare Neo" charset="0"/>
+                        <a:latin typeface="나눔스퀘어 네오 Regular" charset="0"/>
+                        <a:ea typeface="나눔스퀘어 네오 Regular" charset="0"/>
+                        <a:cs typeface="나눔스퀘어 네오 Regular" charset="0"/>
                       </a:endParaRPr>
                     </a:p>
                     <a:p>
@@ -15090,16 +15137,16 @@
                           <a:solidFill>
                             <a:srgbClr val="1D1D1F"/>
                           </a:solidFill>
-                          <a:latin typeface="NanumSquare Neo" pitchFamily="34" charset="0"/>
-                          <a:ea typeface="NanumSquare Neo" pitchFamily="34" charset="-122"/>
-                          <a:cs typeface="NanumSquare Neo" pitchFamily="34" charset="-120"/>
+                          <a:latin typeface="나눔스퀘어 네오 Regular" pitchFamily="34" charset="0"/>
+                          <a:ea typeface="나눔스퀘어 네오 Regular" pitchFamily="34" charset="-122"/>
+                          <a:cs typeface="나눔스퀘어 네오 Regular" pitchFamily="34" charset="-120"/>
                         </a:rPr>
                         <a:t>64×64 (쓰기 경로+메모리 통합)</a:t>
                       </a:r>
                       <a:endParaRPr lang="en-US" sz="1400" dirty="0">
-                        <a:latin typeface="NanumSquare Neo" charset="0"/>
-                        <a:ea typeface="NanumSquare Neo" charset="0"/>
-                        <a:cs typeface="NanumSquare Neo" charset="0"/>
+                        <a:latin typeface="나눔스퀘어 네오 Regular" charset="0"/>
+                        <a:ea typeface="나눔스퀘어 네오 Regular" charset="0"/>
+                        <a:cs typeface="나눔스퀘어 네오 Regular" charset="0"/>
                       </a:endParaRPr>
                     </a:p>
                   </a:txBody>
@@ -15158,16 +15205,16 @@
                           <a:solidFill>
                             <a:srgbClr val="1D1D1F"/>
                           </a:solidFill>
-                          <a:latin typeface="NanumSquare Neo" pitchFamily="34" charset="0"/>
-                          <a:ea typeface="NanumSquare Neo" pitchFamily="34" charset="-122"/>
-                          <a:cs typeface="NanumSquare Neo" pitchFamily="34" charset="-120"/>
+                          <a:latin typeface="나눔스퀘어 네오 Regular" pitchFamily="34" charset="0"/>
+                          <a:ea typeface="나눔스퀘어 네오 Regular" pitchFamily="34" charset="-122"/>
+                          <a:cs typeface="나눔스퀘어 네오 Regular" pitchFamily="34" charset="-120"/>
                         </a:rPr>
                         <a:t>1024×1024</a:t>
                       </a:r>
                       <a:endParaRPr lang="en-US" sz="1400" dirty="0">
-                        <a:latin typeface="NanumSquare Neo" charset="0"/>
-                        <a:ea typeface="NanumSquare Neo" charset="0"/>
-                        <a:cs typeface="NanumSquare Neo" charset="0"/>
+                        <a:latin typeface="나눔스퀘어 네오 Regular" charset="0"/>
+                        <a:ea typeface="나눔스퀘어 네오 Regular" charset="0"/>
+                        <a:cs typeface="나눔스퀘어 네오 Regular" charset="0"/>
                       </a:endParaRPr>
                     </a:p>
                   </a:txBody>
@@ -15226,16 +15273,16 @@
                           <a:solidFill>
                             <a:srgbClr val="1D1D1F"/>
                           </a:solidFill>
-                          <a:latin typeface="NanumSquare Neo" pitchFamily="34" charset="0"/>
-                          <a:ea typeface="NanumSquare Neo" pitchFamily="34" charset="-122"/>
-                          <a:cs typeface="NanumSquare Neo" pitchFamily="34" charset="-120"/>
+                          <a:latin typeface="나눔스퀘어 네오 Regular" pitchFamily="34" charset="0"/>
+                          <a:ea typeface="나눔스퀘어 네오 Regular" pitchFamily="34" charset="-122"/>
+                          <a:cs typeface="나눔스퀘어 네오 Regular" pitchFamily="34" charset="-120"/>
                         </a:rPr>
                         <a:t>회전 180° 이내라 파노라마처럼 무한히 커지지 않음, 패치의 2~4배면 충분</a:t>
                       </a:r>
                       <a:endParaRPr lang="en-US" sz="1400" dirty="0">
-                        <a:latin typeface="NanumSquare Neo" charset="0"/>
-                        <a:ea typeface="NanumSquare Neo" charset="0"/>
-                        <a:cs typeface="NanumSquare Neo" charset="0"/>
+                        <a:latin typeface="나눔스퀘어 네오 Regular" charset="0"/>
+                        <a:ea typeface="나눔스퀘어 네오 Regular" charset="0"/>
+                        <a:cs typeface="나눔스퀘어 네오 Regular" charset="0"/>
                       </a:endParaRPr>
                     </a:p>
                   </a:txBody>
@@ -15296,16 +15343,16 @@
                           <a:solidFill>
                             <a:srgbClr val="1D1D1F"/>
                           </a:solidFill>
-                          <a:latin typeface="NanumSquare Neo" pitchFamily="34" charset="0"/>
-                          <a:ea typeface="NanumSquare Neo" pitchFamily="34" charset="-122"/>
-                          <a:cs typeface="NanumSquare Neo" pitchFamily="34" charset="-120"/>
+                          <a:latin typeface="나눔스퀘어 네오 Regular" pitchFamily="34" charset="0"/>
+                          <a:ea typeface="나눔스퀘어 네오 Regular" pitchFamily="34" charset="-122"/>
+                          <a:cs typeface="나눔스퀘어 네오 Regular" pitchFamily="34" charset="-120"/>
                         </a:rPr>
                         <a:t>회전각 단계</a:t>
                       </a:r>
                       <a:endParaRPr lang="en-US" sz="1400" dirty="0">
-                        <a:latin typeface="NanumSquare Neo" charset="0"/>
-                        <a:ea typeface="NanumSquare Neo" charset="0"/>
-                        <a:cs typeface="NanumSquare Neo" charset="0"/>
+                        <a:latin typeface="나눔스퀘어 네오 Regular" charset="0"/>
+                        <a:ea typeface="나눔스퀘어 네오 Regular" charset="0"/>
+                        <a:cs typeface="나눔스퀘어 네오 Regular" charset="0"/>
                       </a:endParaRPr>
                     </a:p>
                   </a:txBody>
@@ -15364,16 +15411,16 @@
                           <a:solidFill>
                             <a:srgbClr val="1D1D1F"/>
                           </a:solidFill>
-                          <a:latin typeface="NanumSquare Neo" pitchFamily="34" charset="0"/>
-                          <a:ea typeface="NanumSquare Neo" pitchFamily="34" charset="-122"/>
-                          <a:cs typeface="NanumSquare Neo" pitchFamily="34" charset="-120"/>
+                          <a:latin typeface="나눔스퀘어 네오 Regular" pitchFamily="34" charset="0"/>
+                          <a:ea typeface="나눔스퀘어 네오 Regular" pitchFamily="34" charset="-122"/>
+                          <a:cs typeface="나눔스퀘어 네오 Regular" pitchFamily="34" charset="-120"/>
                         </a:rPr>
                         <a:t>1024 (좌표 변환·추정기)</a:t>
                       </a:r>
                       <a:endParaRPr lang="en-US" sz="1400" dirty="0">
-                        <a:latin typeface="NanumSquare Neo" charset="0"/>
-                        <a:ea typeface="NanumSquare Neo" charset="0"/>
-                        <a:cs typeface="NanumSquare Neo" charset="0"/>
+                        <a:latin typeface="나눔스퀘어 네오 Regular" charset="0"/>
+                        <a:ea typeface="나눔스퀘어 네오 Regular" charset="0"/>
+                        <a:cs typeface="나눔스퀘어 네오 Regular" charset="0"/>
                       </a:endParaRPr>
                     </a:p>
                     <a:p>
@@ -15385,16 +15432,16 @@
                           <a:solidFill>
                             <a:srgbClr val="1D1D1F"/>
                           </a:solidFill>
-                          <a:latin typeface="NanumSquare Neo" pitchFamily="34" charset="0"/>
-                          <a:ea typeface="NanumSquare Neo" pitchFamily="34" charset="-122"/>
-                          <a:cs typeface="NanumSquare Neo" pitchFamily="34" charset="-120"/>
+                          <a:latin typeface="나눔스퀘어 네오 Regular" pitchFamily="34" charset="0"/>
+                          <a:ea typeface="나눔스퀘어 네오 Regular" pitchFamily="34" charset="-122"/>
+                          <a:cs typeface="나눔스퀘어 네오 Regular" pitchFamily="34" charset="-120"/>
                         </a:rPr>
                         <a:t>256 (통합)</a:t>
                       </a:r>
                       <a:endParaRPr lang="en-US" sz="1400" dirty="0">
-                        <a:latin typeface="NanumSquare Neo" charset="0"/>
-                        <a:ea typeface="NanumSquare Neo" charset="0"/>
-                        <a:cs typeface="NanumSquare Neo" charset="0"/>
+                        <a:latin typeface="나눔스퀘어 네오 Regular" charset="0"/>
+                        <a:ea typeface="나눔스퀘어 네오 Regular" charset="0"/>
+                        <a:cs typeface="나눔스퀘어 네오 Regular" charset="0"/>
                       </a:endParaRPr>
                     </a:p>
                   </a:txBody>
@@ -15453,16 +15500,16 @@
                           <a:solidFill>
                             <a:srgbClr val="1D1D1F"/>
                           </a:solidFill>
-                          <a:latin typeface="NanumSquare Neo" pitchFamily="34" charset="0"/>
-                          <a:ea typeface="NanumSquare Neo" pitchFamily="34" charset="-122"/>
-                          <a:cs typeface="NanumSquare Neo" pitchFamily="34" charset="-120"/>
+                          <a:latin typeface="나눔스퀘어 네오 Regular" pitchFamily="34" charset="0"/>
+                          <a:ea typeface="나눔스퀘어 네오 Regular" pitchFamily="34" charset="-122"/>
+                          <a:cs typeface="나눔스퀘어 네오 Regular" pitchFamily="34" charset="-120"/>
                         </a:rPr>
                         <a:t>1024</a:t>
                       </a:r>
                       <a:endParaRPr lang="en-US" sz="1400" dirty="0">
-                        <a:latin typeface="NanumSquare Neo" charset="0"/>
-                        <a:ea typeface="NanumSquare Neo" charset="0"/>
-                        <a:cs typeface="NanumSquare Neo" charset="0"/>
+                        <a:latin typeface="나눔스퀘어 네오 Regular" charset="0"/>
+                        <a:ea typeface="나눔스퀘어 네오 Regular" charset="0"/>
+                        <a:cs typeface="나눔스퀘어 네오 Regular" charset="0"/>
                       </a:endParaRPr>
                     </a:p>
                   </a:txBody>
@@ -15521,16 +15568,16 @@
                           <a:solidFill>
                             <a:srgbClr val="1D1D1F"/>
                           </a:solidFill>
-                          <a:latin typeface="NanumSquare Neo" pitchFamily="34" charset="0"/>
-                          <a:ea typeface="NanumSquare Neo" pitchFamily="34" charset="-122"/>
-                          <a:cs typeface="NanumSquare Neo" pitchFamily="34" charset="-120"/>
+                          <a:latin typeface="나눔스퀘어 네오 Regular" pitchFamily="34" charset="0"/>
+                          <a:ea typeface="나눔스퀘어 네오 Regular" pitchFamily="34" charset="-122"/>
+                          <a:cs typeface="나눔스퀘어 네오 Regular" pitchFamily="34" charset="-120"/>
                         </a:rPr>
                         <a:t>약 0.18°/단계(180°/1024), 그립 정밀도</a:t>
                       </a:r>
                       <a:endParaRPr lang="en-US" sz="1400" dirty="0">
-                        <a:latin typeface="NanumSquare Neo" charset="0"/>
-                        <a:ea typeface="NanumSquare Neo" charset="0"/>
-                        <a:cs typeface="NanumSquare Neo" charset="0"/>
+                        <a:latin typeface="나눔스퀘어 네오 Regular" charset="0"/>
+                        <a:ea typeface="나눔스퀘어 네오 Regular" charset="0"/>
+                        <a:cs typeface="나눔스퀘어 네오 Regular" charset="0"/>
                       </a:endParaRPr>
                     </a:p>
                   </a:txBody>
@@ -15633,13 +15680,13 @@
               <a:buNone/>
             </a:pPr>
             <a:r>
-              <a:rPr lang="en-US" sz="1600" b="1" dirty="0">
+              <a:rPr lang="en-US" sz="1600" dirty="0">
                 <a:solidFill>
                   <a:srgbClr val="0066CC"/>
                 </a:solidFill>
-                <a:latin typeface="NanumSquare Neo" pitchFamily="34" charset="0"/>
-                <a:ea typeface="NanumSquare Neo" pitchFamily="34" charset="-122"/>
-                <a:cs typeface="NanumSquare Neo" pitchFamily="34" charset="-120"/>
+                <a:latin typeface="나눔스퀘어 네오 Bold" pitchFamily="34" charset="0"/>
+                <a:ea typeface="나눔스퀘어 네오 Bold" pitchFamily="34" charset="-122"/>
+                <a:cs typeface="나눔스퀘어 네오 Bold" pitchFamily="34" charset="-120"/>
               </a:rPr>
               <a:t>왜 로봇팔인가</a:t>
             </a:r>
@@ -15676,9 +15723,9 @@
                 <a:solidFill>
                   <a:srgbClr val="1D1D1F"/>
                 </a:solidFill>
-                <a:latin typeface="NanumSquare Neo" pitchFamily="34" charset="0"/>
-                <a:ea typeface="NanumSquare Neo" pitchFamily="34" charset="-122"/>
-                <a:cs typeface="NanumSquare Neo" pitchFamily="34" charset="-120"/>
+                <a:latin typeface="나눔스퀘어 네오 Regular" pitchFamily="34" charset="0"/>
+                <a:ea typeface="나눔스퀘어 네오 Regular" pitchFamily="34" charset="-122"/>
+                <a:cs typeface="나눔스퀘어 네오 Regular" pitchFamily="34" charset="-120"/>
               </a:rPr>
               <a:t>회전만 하고 이동이 없다는 전제와 국소 스캔 동작이 일치한다. 센서 스펙(960×720, 6 mm 렌즈)도 3차 Q&amp;A로 확정됐다.</a:t>
             </a:r>
@@ -15738,13 +15785,13 @@
               <a:buNone/>
             </a:pPr>
             <a:r>
-              <a:rPr lang="en-US" sz="1600" b="1" dirty="0">
+              <a:rPr lang="en-US" sz="1600" dirty="0">
                 <a:solidFill>
                   <a:srgbClr val="1D1D1F"/>
                 </a:solidFill>
-                <a:latin typeface="NanumSquare Neo" pitchFamily="34" charset="0"/>
-                <a:ea typeface="NanumSquare Neo" pitchFamily="34" charset="-122"/>
-                <a:cs typeface="NanumSquare Neo" pitchFamily="34" charset="-120"/>
+                <a:latin typeface="나눔스퀘어 네오 Bold" pitchFamily="34" charset="0"/>
+                <a:ea typeface="나눔스퀘어 네오 Bold" pitchFamily="34" charset="-122"/>
+                <a:cs typeface="나눔스퀘어 네오 Bold" pitchFamily="34" charset="-120"/>
               </a:rPr>
               <a:t>제외한 시나리오</a:t>
             </a:r>
@@ -15781,9 +15828,9 @@
                 <a:solidFill>
                   <a:srgbClr val="1D1D1F"/>
                 </a:solidFill>
-                <a:latin typeface="NanumSquare Neo" pitchFamily="34" charset="0"/>
-                <a:ea typeface="NanumSquare Neo" pitchFamily="34" charset="-122"/>
-                <a:cs typeface="NanumSquare Neo" pitchFamily="34" charset="-120"/>
+                <a:latin typeface="나눔스퀘어 네오 Regular" pitchFamily="34" charset="0"/>
+                <a:ea typeface="나눔스퀘어 네오 Regular" pitchFamily="34" charset="-122"/>
+                <a:cs typeface="나눔스퀘어 네오 Regular" pitchFamily="34" charset="-120"/>
               </a:rPr>
               <a:t>자율주행: 이동이 지배적이라 전제가 깨짐</a:t>
             </a:r>
@@ -15798,9 +15845,9 @@
                 <a:solidFill>
                   <a:srgbClr val="1D1D1F"/>
                 </a:solidFill>
-                <a:latin typeface="NanumSquare Neo" pitchFamily="34" charset="0"/>
-                <a:ea typeface="NanumSquare Neo" pitchFamily="34" charset="-122"/>
-                <a:cs typeface="NanumSquare Neo" pitchFamily="34" charset="-120"/>
+                <a:latin typeface="나눔스퀘어 네오 Regular" pitchFamily="34" charset="0"/>
+                <a:ea typeface="나눔스퀘어 네오 Regular" pitchFamily="34" charset="-122"/>
+                <a:cs typeface="나눔스퀘어 네오 Regular" pitchFamily="34" charset="-120"/>
               </a:rPr>
               <a:t>PTZ·산업 스캐너: 해상도 확장이 가장 어려워 후순위</a:t>
             </a:r>
@@ -15840,9 +15887,9 @@
                 <a:solidFill>
                   <a:srgbClr val="7A7A7A"/>
                 </a:solidFill>
-                <a:latin typeface="NanumSquare Neo"/>
-                <a:ea typeface="NanumSquare Neo"/>
-                <a:cs typeface="NanumSquare Neo"/>
+                <a:latin typeface="나눔스퀘어 네오 Regular"/>
+                <a:ea typeface="나눔스퀘어 네오 Regular"/>
+                <a:cs typeface="나눔스퀘어 네오 Regular"/>
               </a:defRPr>
             </a:lvl1pPr>
           </a:lstStyle>
@@ -15908,13 +15955,13 @@
               <a:buNone/>
             </a:pPr>
             <a:r>
-              <a:rPr lang="en-US" sz="2600" b="1" dirty="0">
+              <a:rPr lang="en-US" sz="2600" dirty="0">
                 <a:solidFill>
                   <a:srgbClr val="1D1D1F"/>
                 </a:solidFill>
-                <a:latin typeface="NanumSquare Neo" pitchFamily="34" charset="0"/>
-                <a:ea typeface="NanumSquare Neo" pitchFamily="34" charset="-122"/>
-                <a:cs typeface="NanumSquare Neo" pitchFamily="34" charset="-120"/>
+                <a:latin typeface="나눔스퀘어 네오 Bold" pitchFamily="34" charset="0"/>
+                <a:ea typeface="나눔스퀘어 네오 Bold" pitchFamily="34" charset="-122"/>
+                <a:cs typeface="나눔스퀘어 네오 Bold" pitchFamily="34" charset="-120"/>
               </a:rPr>
               <a:t>구조: 1차 송신부 위에 좌표 변환과 월드 메모리를 얹었다</a:t>
             </a:r>
@@ -15974,13 +16021,13 @@
               <a:buNone/>
             </a:pPr>
             <a:r>
-              <a:rPr lang="en-US" sz="1500" b="1" dirty="0">
+              <a:rPr lang="en-US" sz="1500" dirty="0">
                 <a:solidFill>
                   <a:srgbClr val="1D1D1F"/>
                 </a:solidFill>
-                <a:latin typeface="NanumSquare Neo" pitchFamily="34" charset="0"/>
-                <a:ea typeface="NanumSquare Neo" pitchFamily="34" charset="-122"/>
-                <a:cs typeface="NanumSquare Neo" pitchFamily="34" charset="-120"/>
+                <a:latin typeface="나눔스퀘어 네오 Bold" pitchFamily="34" charset="0"/>
+                <a:ea typeface="나눔스퀘어 네오 Bold" pitchFamily="34" charset="-122"/>
+                <a:cs typeface="나눔스퀘어 네오 Bold" pitchFamily="34" charset="-120"/>
               </a:rPr>
               <a:t>DVS 센서</a:t>
             </a:r>
@@ -16017,9 +16064,9 @@
                 <a:solidFill>
                   <a:srgbClr val="1D1D1F"/>
                 </a:solidFill>
-                <a:latin typeface="NanumSquare Neo" pitchFamily="34" charset="0"/>
-                <a:ea typeface="NanumSquare Neo" pitchFamily="34" charset="-122"/>
-                <a:cs typeface="NanumSquare Neo" pitchFamily="34" charset="-120"/>
+                <a:latin typeface="나눔스퀘어 네오 Regular" pitchFamily="34" charset="0"/>
+                <a:ea typeface="나눔스퀘어 네오 Regular" pitchFamily="34" charset="-122"/>
+                <a:cs typeface="나눔스퀘어 네오 Regular" pitchFamily="34" charset="-120"/>
               </a:rPr>
               <a:t>주소 + 극성</a:t>
             </a:r>
@@ -16034,9 +16081,9 @@
                 <a:solidFill>
                   <a:srgbClr val="1D1D1F"/>
                 </a:solidFill>
-                <a:latin typeface="NanumSquare Neo" pitchFamily="34" charset="0"/>
-                <a:ea typeface="NanumSquare Neo" pitchFamily="34" charset="-122"/>
-                <a:cs typeface="NanumSquare Neo" pitchFamily="34" charset="-120"/>
+                <a:latin typeface="나눔스퀘어 네오 Regular" pitchFamily="34" charset="0"/>
+                <a:ea typeface="나눔스퀘어 네오 Regular" pitchFamily="34" charset="-122"/>
+                <a:cs typeface="나눔스퀘어 네오 Regular" pitchFamily="34" charset="-120"/>
               </a:rPr>
               <a:t>(x, y, pol)</a:t>
             </a:r>
@@ -16096,13 +16143,13 @@
               <a:buNone/>
             </a:pPr>
             <a:r>
-              <a:rPr lang="en-US" sz="1500" b="1" dirty="0">
+              <a:rPr lang="en-US" sz="1500" dirty="0">
                 <a:solidFill>
                   <a:srgbClr val="1D1D1F"/>
                 </a:solidFill>
-                <a:latin typeface="NanumSquare Neo" pitchFamily="34" charset="0"/>
-                <a:ea typeface="NanumSquare Neo" pitchFamily="34" charset="-122"/>
-                <a:cs typeface="NanumSquare Neo" pitchFamily="34" charset="-120"/>
+                <a:latin typeface="나눔스퀘어 네오 Bold" pitchFamily="34" charset="0"/>
+                <a:ea typeface="나눔스퀘어 네오 Bold" pitchFamily="34" charset="-122"/>
+                <a:cs typeface="나눔스퀘어 네오 Bold" pitchFamily="34" charset="-120"/>
               </a:rPr>
               <a:t>AER 송신부 (1차)</a:t>
             </a:r>
@@ -16139,9 +16186,9 @@
                 <a:solidFill>
                   <a:srgbClr val="1D1D1F"/>
                 </a:solidFill>
-                <a:latin typeface="NanumSquare Neo" pitchFamily="34" charset="0"/>
-                <a:ea typeface="NanumSquare Neo" pitchFamily="34" charset="-122"/>
-                <a:cs typeface="NanumSquare Neo" pitchFamily="34" charset="-120"/>
+                <a:latin typeface="나눔스퀘어 네오 Regular" pitchFamily="34" charset="0"/>
+                <a:ea typeface="나눔스퀘어 네오 Regular" pitchFamily="34" charset="-122"/>
+                <a:cs typeface="나눔스퀘어 네오 Regular" pitchFamily="34" charset="-120"/>
               </a:rPr>
               <a:t>행 비트맵 + 훔치기 버퍼</a:t>
             </a:r>
@@ -16156,9 +16203,9 @@
                 <a:solidFill>
                   <a:srgbClr val="1D1D1F"/>
                 </a:solidFill>
-                <a:latin typeface="NanumSquare Neo" pitchFamily="34" charset="0"/>
-                <a:ea typeface="NanumSquare Neo" pitchFamily="34" charset="-122"/>
-                <a:cs typeface="NanumSquare Neo" pitchFamily="34" charset="-120"/>
+                <a:latin typeface="나눔스퀘어 네오 Regular" pitchFamily="34" charset="0"/>
+                <a:ea typeface="나눔스퀘어 네오 Regular" pitchFamily="34" charset="-122"/>
+                <a:cs typeface="나눔스퀘어 네오 Regular" pitchFamily="34" charset="-120"/>
               </a:rPr>
               <a:t>사이클당 최대 8 이벤트</a:t>
             </a:r>
@@ -16173,9 +16220,9 @@
                 <a:solidFill>
                   <a:srgbClr val="1D1D1F"/>
                 </a:solidFill>
-                <a:latin typeface="NanumSquare Neo" pitchFamily="34" charset="0"/>
-                <a:ea typeface="NanumSquare Neo" pitchFamily="34" charset="-122"/>
-                <a:cs typeface="NanumSquare Neo" pitchFamily="34" charset="-120"/>
+                <a:latin typeface="나눔스퀘어 네오 Regular" pitchFamily="34" charset="0"/>
+                <a:ea typeface="나눔스퀘어 네오 Regular" pitchFamily="34" charset="-122"/>
+                <a:cs typeface="나눔스퀘어 네오 Regular" pitchFamily="34" charset="-120"/>
               </a:rPr>
               <a:t>UZH 실측 손실 0.47%</a:t>
             </a:r>
@@ -16235,13 +16282,13 @@
               <a:buNone/>
             </a:pPr>
             <a:r>
-              <a:rPr lang="en-US" sz="1500" b="1" dirty="0">
+              <a:rPr lang="en-US" sz="1500" dirty="0">
                 <a:solidFill>
                   <a:srgbClr val="FFFFFF"/>
                 </a:solidFill>
-                <a:latin typeface="NanumSquare Neo" pitchFamily="34" charset="0"/>
-                <a:ea typeface="NanumSquare Neo" pitchFamily="34" charset="-122"/>
-                <a:cs typeface="NanumSquare Neo" pitchFamily="34" charset="-120"/>
+                <a:latin typeface="나눔스퀘어 네오 Bold" pitchFamily="34" charset="0"/>
+                <a:ea typeface="나눔스퀘어 네오 Bold" pitchFamily="34" charset="-122"/>
+                <a:cs typeface="나눔스퀘어 네오 Bold" pitchFamily="34" charset="-120"/>
               </a:rPr>
               <a:t>좌표 변환 ×8 레인</a:t>
             </a:r>
@@ -16278,9 +16325,9 @@
                 <a:solidFill>
                   <a:srgbClr val="FFFFFF"/>
                 </a:solidFill>
-                <a:latin typeface="NanumSquare Neo" pitchFamily="34" charset="0"/>
-                <a:ea typeface="NanumSquare Neo" pitchFamily="34" charset="-122"/>
-                <a:cs typeface="NanumSquare Neo" pitchFamily="34" charset="-120"/>
+                <a:latin typeface="나눔스퀘어 네오 Regular" pitchFamily="34" charset="0"/>
+                <a:ea typeface="나눔스퀘어 네오 Regular" pitchFamily="34" charset="-122"/>
+                <a:cs typeface="나눔스퀘어 네오 Regular" pitchFamily="34" charset="-120"/>
               </a:rPr>
               <a:t>RMCM: 4096가지</a:t>
             </a:r>
@@ -16295,9 +16342,9 @@
                 <a:solidFill>
                   <a:srgbClr val="FFFFFF"/>
                 </a:solidFill>
-                <a:latin typeface="NanumSquare Neo" pitchFamily="34" charset="0"/>
-                <a:ea typeface="NanumSquare Neo" pitchFamily="34" charset="-122"/>
-                <a:cs typeface="NanumSquare Neo" pitchFamily="34" charset="-120"/>
+                <a:latin typeface="나눔스퀘어 네오 Regular" pitchFamily="34" charset="0"/>
+                <a:ea typeface="나눔스퀘어 네오 Regular" pitchFamily="34" charset="-122"/>
+                <a:cs typeface="나눔스퀘어 네오 Regular" pitchFamily="34" charset="-120"/>
               </a:rPr>
               <a:t>표 하나로 대체</a:t>
             </a:r>
@@ -16312,9 +16359,9 @@
                 <a:solidFill>
                   <a:srgbClr val="FFFFFF"/>
                 </a:solidFill>
-                <a:latin typeface="NanumSquare Neo" pitchFamily="34" charset="0"/>
-                <a:ea typeface="NanumSquare Neo" pitchFamily="34" charset="-122"/>
-                <a:cs typeface="NanumSquare Neo" pitchFamily="34" charset="-120"/>
+                <a:latin typeface="나눔스퀘어 네오 Regular" pitchFamily="34" charset="0"/>
+                <a:ea typeface="나눔스퀘어 네오 Regular" pitchFamily="34" charset="-122"/>
+                <a:cs typeface="나눔스퀘어 네오 Regular" pitchFamily="34" charset="-120"/>
               </a:rPr>
               <a:t>곱셈기 없음</a:t>
             </a:r>
@@ -16374,13 +16421,13 @@
               <a:buNone/>
             </a:pPr>
             <a:r>
-              <a:rPr lang="en-US" sz="1500" b="1" dirty="0">
+              <a:rPr lang="en-US" sz="1500" dirty="0">
                 <a:solidFill>
                   <a:srgbClr val="1D1D1F"/>
                 </a:solidFill>
-                <a:latin typeface="NanumSquare Neo" pitchFamily="34" charset="0"/>
-                <a:ea typeface="NanumSquare Neo" pitchFamily="34" charset="-122"/>
-                <a:cs typeface="NanumSquare Neo" pitchFamily="34" charset="-120"/>
+                <a:latin typeface="나눔스퀘어 네오 Bold" pitchFamily="34" charset="0"/>
+                <a:ea typeface="나눔스퀘어 네오 Bold" pitchFamily="34" charset="-122"/>
+                <a:cs typeface="나눔스퀘어 네오 Bold" pitchFamily="34" charset="-120"/>
               </a:rPr>
               <a:t>월드 메모리 쓰기</a:t>
             </a:r>
@@ -16417,9 +16464,9 @@
                 <a:solidFill>
                   <a:srgbClr val="1D1D1F"/>
                 </a:solidFill>
-                <a:latin typeface="NanumSquare Neo" pitchFamily="34" charset="0"/>
-                <a:ea typeface="NanumSquare Neo" pitchFamily="34" charset="-122"/>
-                <a:cs typeface="NanumSquare Neo" pitchFamily="34" charset="-120"/>
+                <a:latin typeface="나눔스퀘어 네오 Regular" pitchFamily="34" charset="0"/>
+                <a:ea typeface="나눔스퀘어 네오 Regular" pitchFamily="34" charset="-122"/>
+                <a:cs typeface="나눔스퀘어 네오 Regular" pitchFamily="34" charset="-120"/>
               </a:rPr>
               <a:t>레인별 FIFO + 중재</a:t>
             </a:r>
@@ -16434,9 +16481,9 @@
                 <a:solidFill>
                   <a:srgbClr val="1D1D1F"/>
                 </a:solidFill>
-                <a:latin typeface="NanumSquare Neo" pitchFamily="34" charset="0"/>
-                <a:ea typeface="NanumSquare Neo" pitchFamily="34" charset="-122"/>
-                <a:cs typeface="NanumSquare Neo" pitchFamily="34" charset="-120"/>
+                <a:latin typeface="나눔스퀘어 네오 Regular" pitchFamily="34" charset="0"/>
+                <a:ea typeface="나눔스퀘어 네오 Regular" pitchFamily="34" charset="-122"/>
+                <a:cs typeface="나눔스퀘어 네오 Regular" pitchFamily="34" charset="-120"/>
               </a:rPr>
               <a:t>단일 쓰기 포트</a:t>
             </a:r>
@@ -16496,13 +16543,13 @@
               <a:buNone/>
             </a:pPr>
             <a:r>
-              <a:rPr lang="en-US" sz="1500" b="1" dirty="0">
+              <a:rPr lang="en-US" sz="1500" dirty="0">
                 <a:solidFill>
                   <a:srgbClr val="FFFFFF"/>
                 </a:solidFill>
-                <a:latin typeface="NanumSquare Neo" pitchFamily="34" charset="0"/>
-                <a:ea typeface="NanumSquare Neo" pitchFamily="34" charset="-122"/>
-                <a:cs typeface="NanumSquare Neo" pitchFamily="34" charset="-120"/>
+                <a:latin typeface="나눔스퀘어 네오 Bold" pitchFamily="34" charset="0"/>
+                <a:ea typeface="나눔스퀘어 네오 Bold" pitchFamily="34" charset="-122"/>
+                <a:cs typeface="나눔스퀘어 네오 Bold" pitchFamily="34" charset="-120"/>
               </a:rPr>
               <a:t>월드 메모리</a:t>
             </a:r>
@@ -16539,9 +16586,9 @@
                 <a:solidFill>
                   <a:srgbClr val="FFFFFF"/>
                 </a:solidFill>
-                <a:latin typeface="NanumSquare Neo" pitchFamily="34" charset="0"/>
-                <a:ea typeface="NanumSquare Neo" pitchFamily="34" charset="-122"/>
-                <a:cs typeface="NanumSquare Neo" pitchFamily="34" charset="-120"/>
+                <a:latin typeface="나눔스퀘어 네오 Regular" pitchFamily="34" charset="0"/>
+                <a:ea typeface="나눔스퀘어 네오 Regular" pitchFamily="34" charset="-122"/>
+                <a:cs typeface="나눔스퀘어 네오 Regular" pitchFamily="34" charset="-120"/>
               </a:rPr>
               <a:t>행 클록 게이팅</a:t>
             </a:r>
@@ -16556,9 +16603,9 @@
                 <a:solidFill>
                   <a:srgbClr val="FFFFFF"/>
                 </a:solidFill>
-                <a:latin typeface="NanumSquare Neo" pitchFamily="34" charset="0"/>
-                <a:ea typeface="NanumSquare Neo" pitchFamily="34" charset="-122"/>
-                <a:cs typeface="NanumSquare Neo" pitchFamily="34" charset="-120"/>
+                <a:latin typeface="나눔스퀘어 네오 Regular" pitchFamily="34" charset="0"/>
+                <a:ea typeface="나눔스퀘어 네오 Regular" pitchFamily="34" charset="-122"/>
+                <a:cs typeface="나눔스퀘어 네오 Regular" pitchFamily="34" charset="-120"/>
               </a:rPr>
               <a:t>읽기 포트</a:t>
             </a:r>
@@ -16714,13 +16761,13 @@
               <a:buNone/>
             </a:pPr>
             <a:r>
-              <a:rPr lang="en-US" sz="1500" b="1" dirty="0">
+              <a:rPr lang="en-US" sz="1500" dirty="0">
                 <a:solidFill>
                   <a:srgbClr val="FFFFFF"/>
                 </a:solidFill>
-                <a:latin typeface="NanumSquare Neo" pitchFamily="34" charset="0"/>
-                <a:ea typeface="NanumSquare Neo" pitchFamily="34" charset="-122"/>
-                <a:cs typeface="NanumSquare Neo" pitchFamily="34" charset="-120"/>
+                <a:latin typeface="나눔스퀘어 네오 Bold" pitchFamily="34" charset="0"/>
+                <a:ea typeface="나눔스퀘어 네오 Bold" pitchFamily="34" charset="-122"/>
+                <a:cs typeface="나눔스퀘어 네오 Bold" pitchFamily="34" charset="-120"/>
               </a:rPr>
               <a:t>회전각 θ</a:t>
             </a:r>
@@ -16757,9 +16804,9 @@
                 <a:solidFill>
                   <a:srgbClr val="FFFFFF"/>
                 </a:solidFill>
-                <a:latin typeface="NanumSquare Neo" pitchFamily="34" charset="0"/>
-                <a:ea typeface="NanumSquare Neo" pitchFamily="34" charset="-122"/>
-                <a:cs typeface="NanumSquare Neo" pitchFamily="34" charset="-120"/>
+                <a:latin typeface="나눔스퀘어 네오 Regular" pitchFamily="34" charset="0"/>
+                <a:ea typeface="나눔스퀘어 네오 Regular" pitchFamily="34" charset="-122"/>
+                <a:cs typeface="나눔스퀘어 네오 Regular" pitchFamily="34" charset="-120"/>
               </a:rPr>
               <a:t>외부 공급 또는</a:t>
             </a:r>
@@ -16774,9 +16821,9 @@
                 <a:solidFill>
                   <a:srgbClr val="FFFFFF"/>
                 </a:solidFill>
-                <a:latin typeface="NanumSquare Neo" pitchFamily="34" charset="0"/>
-                <a:ea typeface="NanumSquare Neo" pitchFamily="34" charset="-122"/>
-                <a:cs typeface="NanumSquare Neo" pitchFamily="34" charset="-120"/>
+                <a:latin typeface="나눔스퀘어 네오 Regular" pitchFamily="34" charset="0"/>
+                <a:ea typeface="나눔스퀘어 네오 Regular" pitchFamily="34" charset="-122"/>
+                <a:cs typeface="나눔스퀘어 네오 Regular" pitchFamily="34" charset="-120"/>
               </a:rPr>
               <a:t>추정기(Bayes/CMax)</a:t>
             </a:r>
@@ -16860,13 +16907,13 @@
               <a:buNone/>
             </a:pPr>
             <a:r>
-              <a:rPr lang="en-US" sz="1500" b="1" dirty="0">
+              <a:rPr lang="en-US" sz="1500" dirty="0">
                 <a:solidFill>
                   <a:srgbClr val="0066CC"/>
                 </a:solidFill>
-                <a:latin typeface="NanumSquare Neo" pitchFamily="34" charset="0"/>
-                <a:ea typeface="NanumSquare Neo" pitchFamily="34" charset="-122"/>
-                <a:cs typeface="NanumSquare Neo" pitchFamily="34" charset="-120"/>
+                <a:latin typeface="나눔스퀘어 네오 Bold" pitchFamily="34" charset="0"/>
+                <a:ea typeface="나눔스퀘어 네오 Bold" pitchFamily="34" charset="-122"/>
+                <a:cs typeface="나눔스퀘어 네오 Bold" pitchFamily="34" charset="-120"/>
               </a:rPr>
               <a:t>Blink: 입력이 없으면 코어 클록 차단</a:t>
             </a:r>
@@ -16903,9 +16950,9 @@
                 <a:solidFill>
                   <a:srgbClr val="1D1D1F"/>
                 </a:solidFill>
-                <a:latin typeface="NanumSquare Neo" pitchFamily="34" charset="0"/>
-                <a:ea typeface="NanumSquare Neo" pitchFamily="34" charset="-122"/>
-                <a:cs typeface="NanumSquare Neo" pitchFamily="34" charset="-120"/>
+                <a:latin typeface="나눔스퀘어 네오 Regular" pitchFamily="34" charset="0"/>
+                <a:ea typeface="나눔스퀘어 네오 Regular" pitchFamily="34" charset="-122"/>
+                <a:cs typeface="나눔스퀘어 네오 Regular" pitchFamily="34" charset="-120"/>
               </a:rPr>
               <a:t>메모리는 자체 행 게이팅으로 항상 읽기 가능</a:t>
             </a:r>
@@ -16938,13 +16985,13 @@
               <a:buNone/>
             </a:pPr>
             <a:r>
-              <a:rPr lang="en-US" sz="1500" b="1" dirty="0">
+              <a:rPr lang="en-US" sz="1500" dirty="0">
                 <a:solidFill>
                   <a:srgbClr val="1D1D1F"/>
                 </a:solidFill>
-                <a:latin typeface="NanumSquare Neo" pitchFamily="34" charset="0"/>
-                <a:ea typeface="NanumSquare Neo" pitchFamily="34" charset="-122"/>
-                <a:cs typeface="NanumSquare Neo" pitchFamily="34" charset="-120"/>
+                <a:latin typeface="나눔스퀘어 네오 Bold" pitchFamily="34" charset="0"/>
+                <a:ea typeface="나눔스퀘어 네오 Bold" pitchFamily="34" charset="-122"/>
+                <a:cs typeface="나눔스퀘어 네오 Bold" pitchFamily="34" charset="-120"/>
               </a:rPr>
               <a:t>핵심 선택 3가지: ① 계산 대신 표 ② 쓰기 포트 하나로 직렬화 ③ 메모리를 지배적 비용으로 보고 클록을 끄는 구조</a:t>
             </a:r>
@@ -16984,9 +17031,9 @@
                 <a:solidFill>
                   <a:srgbClr val="7A7A7A"/>
                 </a:solidFill>
-                <a:latin typeface="NanumSquare Neo"/>
-                <a:ea typeface="NanumSquare Neo"/>
-                <a:cs typeface="NanumSquare Neo"/>
+                <a:latin typeface="나눔스퀘어 네오 Regular"/>
+                <a:ea typeface="나눔스퀘어 네오 Regular"/>
+                <a:cs typeface="나눔스퀘어 네오 Regular"/>
               </a:defRPr>
             </a:lvl1pPr>
           </a:lstStyle>
@@ -17052,13 +17099,13 @@
               <a:buNone/>
             </a:pPr>
             <a:r>
-              <a:rPr lang="en-US" sz="2600" b="1" dirty="0">
+              <a:rPr lang="en-US" sz="2600" dirty="0">
                 <a:solidFill>
                   <a:srgbClr val="1D1D1F"/>
                 </a:solidFill>
-                <a:latin typeface="NanumSquare Neo" pitchFamily="34" charset="0"/>
-                <a:ea typeface="NanumSquare Neo" pitchFamily="34" charset="-122"/>
-                <a:cs typeface="NanumSquare Neo" pitchFamily="34" charset="-120"/>
+                <a:latin typeface="나눔스퀘어 네오 Bold" pitchFamily="34" charset="0"/>
+                <a:ea typeface="나눔스퀘어 네오 Bold" pitchFamily="34" charset="-122"/>
+                <a:cs typeface="나눔스퀘어 네오 Bold" pitchFamily="34" charset="-120"/>
               </a:rPr>
               <a:t>좌표 변환은 계산을 줄이지 않고 아예 표로 바꿨다</a:t>
             </a:r>
@@ -17134,20 +17181,20 @@
                         <a:buNone/>
                       </a:pPr>
                       <a:r>
-                        <a:rPr lang="en-US" sz="1300" b="1" dirty="0">
+                        <a:rPr lang="en-US" sz="1300" dirty="0">
                           <a:solidFill>
                             <a:srgbClr val="1D1D1F"/>
                           </a:solidFill>
-                          <a:latin typeface="NanumSquare Neo" pitchFamily="34" charset="0"/>
-                          <a:ea typeface="NanumSquare Neo" pitchFamily="34" charset="-122"/>
-                          <a:cs typeface="NanumSquare Neo" pitchFamily="34" charset="-120"/>
+                          <a:latin typeface="나눔스퀘어 네오 Bold" pitchFamily="34" charset="0"/>
+                          <a:ea typeface="나눔스퀘어 네오 Bold" pitchFamily="34" charset="-122"/>
+                          <a:cs typeface="나눔스퀘어 네오 Bold" pitchFamily="34" charset="-120"/>
                         </a:rPr>
                         <a:t>200 MHz 타이밍 여유</a:t>
                       </a:r>
                       <a:endParaRPr lang="en-US" sz="1300" dirty="0">
-                        <a:latin typeface="NanumSquare Neo" charset="0"/>
-                        <a:ea typeface="NanumSquare Neo" charset="0"/>
-                        <a:cs typeface="NanumSquare Neo" charset="0"/>
+                        <a:latin typeface="나눔스퀘어 네오 Regular" charset="0"/>
+                        <a:ea typeface="나눔스퀘어 네오 Regular" charset="0"/>
+                        <a:cs typeface="나눔스퀘어 네오 Regular" charset="0"/>
                       </a:endParaRPr>
                     </a:p>
                   </a:txBody>
@@ -17202,20 +17249,20 @@
                         <a:buNone/>
                       </a:pPr>
                       <a:r>
-                        <a:rPr lang="en-US" sz="1300" b="1" dirty="0">
+                        <a:rPr lang="en-US" sz="1300" dirty="0">
                           <a:solidFill>
                             <a:srgbClr val="1D1D1F"/>
                           </a:solidFill>
-                          <a:latin typeface="NanumSquare Neo" pitchFamily="34" charset="0"/>
-                          <a:ea typeface="NanumSquare Neo" pitchFamily="34" charset="-122"/>
-                          <a:cs typeface="NanumSquare Neo" pitchFamily="34" charset="-120"/>
+                          <a:latin typeface="나눔스퀘어 네오 Bold" pitchFamily="34" charset="0"/>
+                          <a:ea typeface="나눔스퀘어 네오 Bold" pitchFamily="34" charset="-122"/>
+                          <a:cs typeface="나눔스퀘어 네오 Bold" pitchFamily="34" charset="-120"/>
                         </a:rPr>
                         <a:t>슬랙</a:t>
                       </a:r>
                       <a:endParaRPr lang="en-US" sz="1300" dirty="0">
-                        <a:latin typeface="NanumSquare Neo" charset="0"/>
-                        <a:ea typeface="NanumSquare Neo" charset="0"/>
-                        <a:cs typeface="NanumSquare Neo" charset="0"/>
+                        <a:latin typeface="나눔스퀘어 네오 Regular" charset="0"/>
+                        <a:ea typeface="나눔스퀘어 네오 Regular" charset="0"/>
+                        <a:cs typeface="나눔스퀘어 네오 Regular" charset="0"/>
                       </a:endParaRPr>
                     </a:p>
                   </a:txBody>
@@ -17276,16 +17323,16 @@
                           <a:solidFill>
                             <a:srgbClr val="1D1D1F"/>
                           </a:solidFill>
-                          <a:latin typeface="NanumSquare Neo" pitchFamily="34" charset="0"/>
-                          <a:ea typeface="NanumSquare Neo" pitchFamily="34" charset="-122"/>
-                          <a:cs typeface="NanumSquare Neo" pitchFamily="34" charset="-120"/>
+                          <a:latin typeface="나눔스퀘어 네오 Regular" pitchFamily="34" charset="0"/>
+                          <a:ea typeface="나눔스퀘어 네오 Regular" pitchFamily="34" charset="-122"/>
+                          <a:cs typeface="나눔스퀘어 네오 Regular" pitchFamily="34" charset="-120"/>
                         </a:rPr>
                         <a:t>직접 행렬곱</a:t>
                       </a:r>
                       <a:endParaRPr lang="en-US" sz="1300" dirty="0">
-                        <a:latin typeface="NanumSquare Neo" charset="0"/>
-                        <a:ea typeface="NanumSquare Neo" charset="0"/>
-                        <a:cs typeface="NanumSquare Neo" charset="0"/>
+                        <a:latin typeface="나눔스퀘어 네오 Regular" charset="0"/>
+                        <a:ea typeface="나눔스퀘어 네오 Regular" charset="0"/>
+                        <a:cs typeface="나눔스퀘어 네오 Regular" charset="0"/>
                       </a:endParaRPr>
                     </a:p>
                   </a:txBody>
@@ -17344,16 +17391,16 @@
                           <a:solidFill>
                             <a:srgbClr val="1D1D1F"/>
                           </a:solidFill>
-                          <a:latin typeface="NanumSquare Neo" pitchFamily="34" charset="0"/>
-                          <a:ea typeface="NanumSquare Neo" pitchFamily="34" charset="-122"/>
-                          <a:cs typeface="NanumSquare Neo" pitchFamily="34" charset="-120"/>
+                          <a:latin typeface="나눔스퀘어 네오 Regular" pitchFamily="34" charset="0"/>
+                          <a:ea typeface="나눔스퀘어 네오 Regular" pitchFamily="34" charset="-122"/>
+                          <a:cs typeface="나눔스퀘어 네오 Regular" pitchFamily="34" charset="-120"/>
                         </a:rPr>
                         <a:t>+1 ps (턱걸이)</a:t>
                       </a:r>
                       <a:endParaRPr lang="en-US" sz="1300" dirty="0">
-                        <a:latin typeface="NanumSquare Neo" charset="0"/>
-                        <a:ea typeface="NanumSquare Neo" charset="0"/>
-                        <a:cs typeface="NanumSquare Neo" charset="0"/>
+                        <a:latin typeface="나눔스퀘어 네오 Regular" charset="0"/>
+                        <a:ea typeface="나눔스퀘어 네오 Regular" charset="0"/>
+                        <a:cs typeface="나눔스퀘어 네오 Regular" charset="0"/>
                       </a:endParaRPr>
                     </a:p>
                   </a:txBody>
@@ -17414,16 +17461,16 @@
                           <a:solidFill>
                             <a:srgbClr val="1D1D1F"/>
                           </a:solidFill>
-                          <a:latin typeface="NanumSquare Neo" pitchFamily="34" charset="0"/>
-                          <a:ea typeface="NanumSquare Neo" pitchFamily="34" charset="-122"/>
-                          <a:cs typeface="NanumSquare Neo" pitchFamily="34" charset="-120"/>
+                          <a:latin typeface="나눔스퀘어 네오 Regular" pitchFamily="34" charset="0"/>
+                          <a:ea typeface="나눔스퀘어 네오 Regular" pitchFamily="34" charset="-122"/>
+                          <a:cs typeface="나눔스퀘어 네오 Regular" pitchFamily="34" charset="-120"/>
                         </a:rPr>
                         <a:t>CORDIC</a:t>
                       </a:r>
                       <a:endParaRPr lang="en-US" sz="1300" dirty="0">
-                        <a:latin typeface="NanumSquare Neo" charset="0"/>
-                        <a:ea typeface="NanumSquare Neo" charset="0"/>
-                        <a:cs typeface="NanumSquare Neo" charset="0"/>
+                        <a:latin typeface="나눔스퀘어 네오 Regular" charset="0"/>
+                        <a:ea typeface="나눔스퀘어 네오 Regular" charset="0"/>
+                        <a:cs typeface="나눔스퀘어 네오 Regular" charset="0"/>
                       </a:endParaRPr>
                     </a:p>
                   </a:txBody>
@@ -17482,16 +17529,16 @@
                           <a:solidFill>
                             <a:srgbClr val="1D1D1F"/>
                           </a:solidFill>
-                          <a:latin typeface="NanumSquare Neo" pitchFamily="34" charset="0"/>
-                          <a:ea typeface="NanumSquare Neo" pitchFamily="34" charset="-122"/>
-                          <a:cs typeface="NanumSquare Neo" pitchFamily="34" charset="-120"/>
+                          <a:latin typeface="나눔스퀘어 네오 Regular" pitchFamily="34" charset="0"/>
+                          <a:ea typeface="나눔스퀘어 네오 Regular" pitchFamily="34" charset="-122"/>
+                          <a:cs typeface="나눔스퀘어 네오 Regular" pitchFamily="34" charset="-120"/>
                         </a:rPr>
                         <a:t>−252 ps (위반)</a:t>
                       </a:r>
                       <a:endParaRPr lang="en-US" sz="1300" dirty="0">
-                        <a:latin typeface="NanumSquare Neo" charset="0"/>
-                        <a:ea typeface="NanumSquare Neo" charset="0"/>
-                        <a:cs typeface="NanumSquare Neo" charset="0"/>
+                        <a:latin typeface="나눔스퀘어 네오 Regular" charset="0"/>
+                        <a:ea typeface="나눔스퀘어 네오 Regular" charset="0"/>
+                        <a:cs typeface="나눔스퀘어 네오 Regular" charset="0"/>
                       </a:endParaRPr>
                     </a:p>
                   </a:txBody>
@@ -17548,20 +17595,20 @@
                         <a:buNone/>
                       </a:pPr>
                       <a:r>
-                        <a:rPr lang="en-US" sz="1300" b="1" dirty="0">
+                        <a:rPr lang="en-US" sz="1300" dirty="0">
                           <a:solidFill>
                             <a:srgbClr val="1D1D1F"/>
                           </a:solidFill>
-                          <a:latin typeface="NanumSquare Neo" pitchFamily="34" charset="0"/>
-                          <a:ea typeface="NanumSquare Neo" pitchFamily="34" charset="-122"/>
-                          <a:cs typeface="NanumSquare Neo" pitchFamily="34" charset="-120"/>
+                          <a:latin typeface="나눔스퀘어 네오 Bold" pitchFamily="34" charset="0"/>
+                          <a:ea typeface="나눔스퀘어 네오 Bold" pitchFamily="34" charset="-122"/>
+                          <a:cs typeface="나눔스퀘어 네오 Bold" pitchFamily="34" charset="-120"/>
                         </a:rPr>
                         <a:t>RMCM</a:t>
                       </a:r>
                       <a:endParaRPr lang="en-US" sz="1300" dirty="0">
-                        <a:latin typeface="NanumSquare Neo" charset="0"/>
-                        <a:ea typeface="NanumSquare Neo" charset="0"/>
-                        <a:cs typeface="NanumSquare Neo" charset="0"/>
+                        <a:latin typeface="나눔스퀘어 네오 Regular" charset="0"/>
+                        <a:ea typeface="나눔스퀘어 네오 Regular" charset="0"/>
+                        <a:cs typeface="나눔스퀘어 네오 Regular" charset="0"/>
                       </a:endParaRPr>
                     </a:p>
                   </a:txBody>
@@ -17616,20 +17663,20 @@
                         <a:buNone/>
                       </a:pPr>
                       <a:r>
-                        <a:rPr lang="en-US" sz="1300" b="1" dirty="0">
+                        <a:rPr lang="en-US" sz="1300" dirty="0">
                           <a:solidFill>
                             <a:srgbClr val="1D1D1F"/>
                           </a:solidFill>
-                          <a:latin typeface="NanumSquare Neo" pitchFamily="34" charset="0"/>
-                          <a:ea typeface="NanumSquare Neo" pitchFamily="34" charset="-122"/>
-                          <a:cs typeface="NanumSquare Neo" pitchFamily="34" charset="-120"/>
+                          <a:latin typeface="나눔스퀘어 네오 Bold" pitchFamily="34" charset="0"/>
+                          <a:ea typeface="나눔스퀘어 네오 Bold" pitchFamily="34" charset="-122"/>
+                          <a:cs typeface="나눔스퀘어 네오 Bold" pitchFamily="34" charset="-120"/>
                         </a:rPr>
                         <a:t>+2,187 ps</a:t>
                       </a:r>
                       <a:endParaRPr lang="en-US" sz="1300" dirty="0">
-                        <a:latin typeface="NanumSquare Neo" charset="0"/>
-                        <a:ea typeface="NanumSquare Neo" charset="0"/>
-                        <a:cs typeface="NanumSquare Neo" charset="0"/>
+                        <a:latin typeface="나눔스퀘어 네오 Regular" charset="0"/>
+                        <a:ea typeface="나눔스퀘어 네오 Regular" charset="0"/>
+                        <a:cs typeface="나눔스퀘어 네오 Regular" charset="0"/>
                       </a:endParaRPr>
                     </a:p>
                   </a:txBody>
@@ -17709,11 +17756,11 @@
                 <a:solidFill>
                   <a:srgbClr val="7A7A7A"/>
                 </a:solidFill>
-                <a:latin typeface="NanumSquare Neo" pitchFamily="34" charset="0"/>
-                <a:ea typeface="NanumSquare Neo" pitchFamily="34" charset="-122"/>
-                <a:cs typeface="NanumSquare Neo" pitchFamily="34" charset="-120"/>
+                <a:latin typeface="나눔스퀘어 네오 Regular" pitchFamily="34" charset="0"/>
+                <a:ea typeface="나눔스퀘어 네오 Regular" pitchFamily="34" charset="-122"/>
+                <a:cs typeface="나눔스퀘어 네오 Regular" pitchFamily="34" charset="-120"/>
               </a:rPr>
-              <a:t>Genus 합성, 5 ns, GPDK045. 입력 4096가지(4×4 로컬 좌표 × 256각도) 기준. RMCM은 직접 행렬곱과 bit-exact로 같은 값을 냄(근사 오차 0).</a:t>
+              <a:t>Genus 합성, 5 ns, GPDK045. 입력 4096가지(256각도) 기준, RMCM은 직접 행렬곱과 bit-exact. 1024각도 RMCM(16,384가지)은 면적 19,071 µm², 0.297 mW, 슬랙 +1,178 ps(256각도의 15.9배 면적).</a:t>
             </a:r>
             <a:endParaRPr lang="en-US" sz="1300" dirty="0"/>
           </a:p>
@@ -17771,13 +17818,13 @@
               <a:buNone/>
             </a:pPr>
             <a:r>
-              <a:rPr lang="en-US" sz="1600" b="1" dirty="0">
+              <a:rPr lang="en-US" sz="1600" dirty="0">
                 <a:solidFill>
                   <a:srgbClr val="FFFFFF"/>
                 </a:solidFill>
-                <a:latin typeface="NanumSquare Neo" pitchFamily="34" charset="0"/>
-                <a:ea typeface="NanumSquare Neo" pitchFamily="34" charset="-122"/>
-                <a:cs typeface="NanumSquare Neo" pitchFamily="34" charset="-120"/>
+                <a:latin typeface="나눔스퀘어 네오 Bold" pitchFamily="34" charset="0"/>
+                <a:ea typeface="나눔스퀘어 네오 Bold" pitchFamily="34" charset="-122"/>
+                <a:cs typeface="나눔스퀘어 네오 Bold" pitchFamily="34" charset="-120"/>
               </a:rPr>
               <a:t>곱셈기를 없애는 것이 항상 이득은 아니다. 입력 후보가 몇 가지로 좁을 때는 계산을 없애고 표로 대체하는 쪽이 이겼다. (이 결론은 입력 공간이 큰 경우엔 달라질 수 있다.)</a:t>
             </a:r>
@@ -17817,9 +17864,9 @@
                 <a:solidFill>
                   <a:srgbClr val="7A7A7A"/>
                 </a:solidFill>
-                <a:latin typeface="NanumSquare Neo"/>
-                <a:ea typeface="NanumSquare Neo"/>
-                <a:cs typeface="NanumSquare Neo"/>
+                <a:latin typeface="나눔스퀘어 네오 Regular"/>
+                <a:ea typeface="나눔스퀘어 네오 Regular"/>
+                <a:cs typeface="나눔스퀘어 네오 Regular"/>
               </a:defRPr>
             </a:lvl1pPr>
           </a:lstStyle>
@@ -17885,13 +17932,13 @@
               <a:buNone/>
             </a:pPr>
             <a:r>
-              <a:rPr lang="en-US" sz="2600" b="1" dirty="0">
+              <a:rPr lang="en-US" sz="2600" dirty="0">
                 <a:solidFill>
                   <a:srgbClr val="1D1D1F"/>
                 </a:solidFill>
-                <a:latin typeface="NanumSquare Neo" pitchFamily="34" charset="0"/>
-                <a:ea typeface="NanumSquare Neo" pitchFamily="34" charset="-122"/>
-                <a:cs typeface="NanumSquare Neo" pitchFamily="34" charset="-120"/>
+                <a:latin typeface="나눔스퀘어 네오 Bold" pitchFamily="34" charset="0"/>
+                <a:ea typeface="나눔스퀘어 네오 Bold" pitchFamily="34" charset="-122"/>
+                <a:cs typeface="나눔스퀘어 네오 Bold" pitchFamily="34" charset="-120"/>
               </a:rPr>
               <a:t>검증: 소프트웨어 기준값과 비트 단위로 모두 일치했다</a:t>
             </a:r>
@@ -17936,20 +17983,20 @@
                         <a:buNone/>
                       </a:pPr>
                       <a:r>
-                        <a:rPr lang="en-US" sz="1300" b="1" dirty="0">
+                        <a:rPr lang="en-US" sz="1300" dirty="0">
                           <a:solidFill>
                             <a:srgbClr val="1D1D1F"/>
                           </a:solidFill>
-                          <a:latin typeface="NanumSquare Neo" pitchFamily="34" charset="0"/>
-                          <a:ea typeface="NanumSquare Neo" pitchFamily="34" charset="-122"/>
-                          <a:cs typeface="NanumSquare Neo" pitchFamily="34" charset="-120"/>
+                          <a:latin typeface="나눔스퀘어 네오 Bold" pitchFamily="34" charset="0"/>
+                          <a:ea typeface="나눔스퀘어 네오 Bold" pitchFamily="34" charset="-122"/>
+                          <a:cs typeface="나눔스퀘어 네오 Bold" pitchFamily="34" charset="-120"/>
                         </a:rPr>
                         <a:t>검증 항목</a:t>
                       </a:r>
                       <a:endParaRPr lang="en-US" sz="1300" dirty="0">
-                        <a:latin typeface="NanumSquare Neo" charset="0"/>
-                        <a:ea typeface="NanumSquare Neo" charset="0"/>
-                        <a:cs typeface="NanumSquare Neo" charset="0"/>
+                        <a:latin typeface="나눔스퀘어 네오 Regular" charset="0"/>
+                        <a:ea typeface="나눔스퀘어 네오 Regular" charset="0"/>
+                        <a:cs typeface="나눔스퀘어 네오 Regular" charset="0"/>
                       </a:endParaRPr>
                     </a:p>
                   </a:txBody>
@@ -18004,20 +18051,20 @@
                         <a:buNone/>
                       </a:pPr>
                       <a:r>
-                        <a:rPr lang="en-US" sz="1300" b="1" dirty="0">
+                        <a:rPr lang="en-US" sz="1300" dirty="0">
                           <a:solidFill>
                             <a:srgbClr val="1D1D1F"/>
                           </a:solidFill>
-                          <a:latin typeface="NanumSquare Neo" pitchFamily="34" charset="0"/>
-                          <a:ea typeface="NanumSquare Neo" pitchFamily="34" charset="-122"/>
-                          <a:cs typeface="NanumSquare Neo" pitchFamily="34" charset="-120"/>
+                          <a:latin typeface="나눔스퀘어 네오 Bold" pitchFamily="34" charset="0"/>
+                          <a:ea typeface="나눔스퀘어 네오 Bold" pitchFamily="34" charset="-122"/>
+                          <a:cs typeface="나눔스퀘어 네오 Bold" pitchFamily="34" charset="-120"/>
                         </a:rPr>
                         <a:t>범위</a:t>
                       </a:r>
                       <a:endParaRPr lang="en-US" sz="1300" dirty="0">
-                        <a:latin typeface="NanumSquare Neo" charset="0"/>
-                        <a:ea typeface="NanumSquare Neo" charset="0"/>
-                        <a:cs typeface="NanumSquare Neo" charset="0"/>
+                        <a:latin typeface="나눔스퀘어 네오 Regular" charset="0"/>
+                        <a:ea typeface="나눔스퀘어 네오 Regular" charset="0"/>
+                        <a:cs typeface="나눔스퀘어 네오 Regular" charset="0"/>
                       </a:endParaRPr>
                     </a:p>
                   </a:txBody>
@@ -18072,20 +18119,20 @@
                         <a:buNone/>
                       </a:pPr>
                       <a:r>
-                        <a:rPr lang="en-US" sz="1300" b="1" dirty="0">
+                        <a:rPr lang="en-US" sz="1300" dirty="0">
                           <a:solidFill>
                             <a:srgbClr val="1D1D1F"/>
                           </a:solidFill>
-                          <a:latin typeface="NanumSquare Neo" pitchFamily="34" charset="0"/>
-                          <a:ea typeface="NanumSquare Neo" pitchFamily="34" charset="-122"/>
-                          <a:cs typeface="NanumSquare Neo" pitchFamily="34" charset="-120"/>
+                          <a:latin typeface="나눔스퀘어 네오 Bold" pitchFamily="34" charset="0"/>
+                          <a:ea typeface="나눔스퀘어 네오 Bold" pitchFamily="34" charset="-122"/>
+                          <a:cs typeface="나눔스퀘어 네오 Bold" pitchFamily="34" charset="-120"/>
                         </a:rPr>
                         <a:t>결과</a:t>
                       </a:r>
                       <a:endParaRPr lang="en-US" sz="1300" dirty="0">
-                        <a:latin typeface="NanumSquare Neo" charset="0"/>
-                        <a:ea typeface="NanumSquare Neo" charset="0"/>
-                        <a:cs typeface="NanumSquare Neo" charset="0"/>
+                        <a:latin typeface="나눔스퀘어 네오 Regular" charset="0"/>
+                        <a:ea typeface="나눔스퀘어 네오 Regular" charset="0"/>
+                        <a:cs typeface="나눔스퀘어 네오 Regular" charset="0"/>
                       </a:endParaRPr>
                     </a:p>
                   </a:txBody>
@@ -18146,16 +18193,16 @@
                           <a:solidFill>
                             <a:srgbClr val="1D1D1F"/>
                           </a:solidFill>
-                          <a:latin typeface="NanumSquare Neo" pitchFamily="34" charset="0"/>
-                          <a:ea typeface="NanumSquare Neo" pitchFamily="34" charset="-122"/>
-                          <a:cs typeface="NanumSquare Neo" pitchFamily="34" charset="-120"/>
+                          <a:latin typeface="나눔스퀘어 네오 Regular" pitchFamily="34" charset="0"/>
+                          <a:ea typeface="나눔스퀘어 네오 Regular" pitchFamily="34" charset="-122"/>
+                          <a:cs typeface="나눔스퀘어 네오 Regular" pitchFamily="34" charset="-120"/>
                         </a:rPr>
                         <a:t>좌표 변환 전수 검사 (RMCM RTL)</a:t>
                       </a:r>
                       <a:endParaRPr lang="en-US" sz="1300" dirty="0">
-                        <a:latin typeface="NanumSquare Neo" charset="0"/>
-                        <a:ea typeface="NanumSquare Neo" charset="0"/>
-                        <a:cs typeface="NanumSquare Neo" charset="0"/>
+                        <a:latin typeface="나눔스퀘어 네오 Regular" charset="0"/>
+                        <a:ea typeface="나눔스퀘어 네오 Regular" charset="0"/>
+                        <a:cs typeface="나눔스퀘어 네오 Regular" charset="0"/>
                       </a:endParaRPr>
                     </a:p>
                   </a:txBody>
@@ -18214,16 +18261,16 @@
                           <a:solidFill>
                             <a:srgbClr val="1D1D1F"/>
                           </a:solidFill>
-                          <a:latin typeface="NanumSquare Neo" pitchFamily="34" charset="0"/>
-                          <a:ea typeface="NanumSquare Neo" pitchFamily="34" charset="-122"/>
-                          <a:cs typeface="NanumSquare Neo" pitchFamily="34" charset="-120"/>
+                          <a:latin typeface="나눔스퀘어 네오 Regular" pitchFamily="34" charset="0"/>
+                          <a:ea typeface="나눔스퀘어 네오 Regular" pitchFamily="34" charset="-122"/>
+                          <a:cs typeface="나눔스퀘어 네오 Regular" pitchFamily="34" charset="-120"/>
                         </a:rPr>
                         <a:t>16 로컬 좌표 × 1024각도 = 16,384가지</a:t>
                       </a:r>
                       <a:endParaRPr lang="en-US" sz="1300" dirty="0">
-                        <a:latin typeface="NanumSquare Neo" charset="0"/>
-                        <a:ea typeface="NanumSquare Neo" charset="0"/>
-                        <a:cs typeface="NanumSquare Neo" charset="0"/>
+                        <a:latin typeface="나눔스퀘어 네오 Regular" charset="0"/>
+                        <a:ea typeface="나눔스퀘어 네오 Regular" charset="0"/>
+                        <a:cs typeface="나눔스퀘어 네오 Regular" charset="0"/>
                       </a:endParaRPr>
                     </a:p>
                   </a:txBody>
@@ -18278,20 +18325,20 @@
                         <a:buNone/>
                       </a:pPr>
                       <a:r>
-                        <a:rPr lang="en-US" sz="1300" b="1" dirty="0">
+                        <a:rPr lang="en-US" sz="1300" dirty="0">
                           <a:solidFill>
                             <a:srgbClr val="0066CC"/>
                           </a:solidFill>
-                          <a:latin typeface="NanumSquare Neo" pitchFamily="34" charset="0"/>
-                          <a:ea typeface="NanumSquare Neo" pitchFamily="34" charset="-122"/>
-                          <a:cs typeface="NanumSquare Neo" pitchFamily="34" charset="-120"/>
+                          <a:latin typeface="나눔스퀘어 네오 Bold" pitchFamily="34" charset="0"/>
+                          <a:ea typeface="나눔스퀘어 네오 Bold" pitchFamily="34" charset="-122"/>
+                          <a:cs typeface="나눔스퀘어 네오 Bold" pitchFamily="34" charset="-120"/>
                         </a:rPr>
                         <a:t>16,384/16,384 일치</a:t>
                       </a:r>
                       <a:endParaRPr lang="en-US" sz="1300" dirty="0">
-                        <a:latin typeface="NanumSquare Neo" charset="0"/>
-                        <a:ea typeface="NanumSquare Neo" charset="0"/>
-                        <a:cs typeface="NanumSquare Neo" charset="0"/>
+                        <a:latin typeface="나눔스퀘어 네오 Regular" charset="0"/>
+                        <a:ea typeface="나눔스퀘어 네오 Regular" charset="0"/>
+                        <a:cs typeface="나눔스퀘어 네오 Regular" charset="0"/>
                       </a:endParaRPr>
                     </a:p>
                   </a:txBody>
@@ -18352,16 +18399,16 @@
                           <a:solidFill>
                             <a:srgbClr val="1D1D1F"/>
                           </a:solidFill>
-                          <a:latin typeface="NanumSquare Neo" pitchFamily="34" charset="0"/>
-                          <a:ea typeface="NanumSquare Neo" pitchFamily="34" charset="-122"/>
-                          <a:cs typeface="NanumSquare Neo" pitchFamily="34" charset="-120"/>
+                          <a:latin typeface="나눔스퀘어 네오 Regular" pitchFamily="34" charset="0"/>
+                          <a:ea typeface="나눔스퀘어 네오 Regular" pitchFamily="34" charset="-122"/>
+                          <a:cs typeface="나눔스퀘어 네오 Regular" pitchFamily="34" charset="-120"/>
                         </a:rPr>
                         <a:t>실제 이벤트 재생 (UZH, 통합 회로)</a:t>
                       </a:r>
                       <a:endParaRPr lang="en-US" sz="1300" dirty="0">
-                        <a:latin typeface="NanumSquare Neo" charset="0"/>
-                        <a:ea typeface="NanumSquare Neo" charset="0"/>
-                        <a:cs typeface="NanumSquare Neo" charset="0"/>
+                        <a:latin typeface="나눔스퀘어 네오 Regular" charset="0"/>
+                        <a:ea typeface="나눔스퀘어 네오 Regular" charset="0"/>
+                        <a:cs typeface="나눔스퀘어 네오 Regular" charset="0"/>
                       </a:endParaRPr>
                     </a:p>
                   </a:txBody>
@@ -18420,16 +18467,16 @@
                           <a:solidFill>
                             <a:srgbClr val="1D1D1F"/>
                           </a:solidFill>
-                          <a:latin typeface="NanumSquare Neo" pitchFamily="34" charset="0"/>
-                          <a:ea typeface="NanumSquare Neo" pitchFamily="34" charset="-122"/>
-                          <a:cs typeface="NanumSquare Neo" pitchFamily="34" charset="-120"/>
+                          <a:latin typeface="나눔스퀘어 네오 Regular" pitchFamily="34" charset="0"/>
+                          <a:ea typeface="나눔스퀘어 네오 Regular" pitchFamily="34" charset="-122"/>
+                          <a:cs typeface="나눔스퀘어 네오 Regular" pitchFamily="34" charset="-120"/>
                         </a:rPr>
                         <a:t>8,503개 이벤트 + 실제 자세</a:t>
                       </a:r>
                       <a:endParaRPr lang="en-US" sz="1300" dirty="0">
-                        <a:latin typeface="NanumSquare Neo" charset="0"/>
-                        <a:ea typeface="NanumSquare Neo" charset="0"/>
-                        <a:cs typeface="NanumSquare Neo" charset="0"/>
+                        <a:latin typeface="나눔스퀘어 네오 Regular" charset="0"/>
+                        <a:ea typeface="나눔스퀘어 네오 Regular" charset="0"/>
+                        <a:cs typeface="나눔스퀘어 네오 Regular" charset="0"/>
                       </a:endParaRPr>
                     </a:p>
                   </a:txBody>
@@ -18484,20 +18531,20 @@
                         <a:buNone/>
                       </a:pPr>
                       <a:r>
-                        <a:rPr lang="en-US" sz="1300" b="1" dirty="0">
+                        <a:rPr lang="en-US" sz="1300" dirty="0">
                           <a:solidFill>
                             <a:srgbClr val="0066CC"/>
                           </a:solidFill>
-                          <a:latin typeface="NanumSquare Neo" pitchFamily="34" charset="0"/>
-                          <a:ea typeface="NanumSquare Neo" pitchFamily="34" charset="-122"/>
-                          <a:cs typeface="NanumSquare Neo" pitchFamily="34" charset="-120"/>
+                          <a:latin typeface="나눔스퀘어 네오 Bold" pitchFamily="34" charset="0"/>
+                          <a:ea typeface="나눔스퀘어 네오 Bold" pitchFamily="34" charset="-122"/>
+                          <a:cs typeface="나눔스퀘어 네오 Bold" pitchFamily="34" charset="-120"/>
                         </a:rPr>
                         <a:t>불일치 0, 손실 0, 90칸 기록</a:t>
                       </a:r>
                       <a:endParaRPr lang="en-US" sz="1300" dirty="0">
-                        <a:latin typeface="NanumSquare Neo" charset="0"/>
-                        <a:ea typeface="NanumSquare Neo" charset="0"/>
-                        <a:cs typeface="NanumSquare Neo" charset="0"/>
+                        <a:latin typeface="나눔스퀘어 네오 Regular" charset="0"/>
+                        <a:ea typeface="나눔스퀘어 네오 Regular" charset="0"/>
+                        <a:cs typeface="나눔스퀘어 네오 Regular" charset="0"/>
                       </a:endParaRPr>
                     </a:p>
                   </a:txBody>
@@ -18558,16 +18605,16 @@
                           <a:solidFill>
                             <a:srgbClr val="1D1D1F"/>
                           </a:solidFill>
-                          <a:latin typeface="NanumSquare Neo" pitchFamily="34" charset="0"/>
-                          <a:ea typeface="NanumSquare Neo" pitchFamily="34" charset="-122"/>
-                          <a:cs typeface="NanumSquare Neo" pitchFamily="34" charset="-120"/>
+                          <a:latin typeface="나눔스퀘어 네오 Regular" pitchFamily="34" charset="0"/>
+                          <a:ea typeface="나눔스퀘어 네오 Regular" pitchFamily="34" charset="-122"/>
+                          <a:cs typeface="나눔스퀘어 네오 Regular" pitchFamily="34" charset="-120"/>
                         </a:rPr>
                         <a:t>무작위 스트레스</a:t>
                       </a:r>
                       <a:endParaRPr lang="en-US" sz="1300" dirty="0">
-                        <a:latin typeface="NanumSquare Neo" charset="0"/>
-                        <a:ea typeface="NanumSquare Neo" charset="0"/>
-                        <a:cs typeface="NanumSquare Neo" charset="0"/>
+                        <a:latin typeface="나눔스퀘어 네오 Regular" charset="0"/>
+                        <a:ea typeface="나눔스퀘어 네오 Regular" charset="0"/>
+                        <a:cs typeface="나눔스퀘어 네오 Regular" charset="0"/>
                       </a:endParaRPr>
                     </a:p>
                   </a:txBody>
@@ -18626,16 +18673,16 @@
                           <a:solidFill>
                             <a:srgbClr val="1D1D1F"/>
                           </a:solidFill>
-                          <a:latin typeface="NanumSquare Neo" pitchFamily="34" charset="0"/>
-                          <a:ea typeface="NanumSquare Neo" pitchFamily="34" charset="-122"/>
-                          <a:cs typeface="NanumSquare Neo" pitchFamily="34" charset="-120"/>
+                          <a:latin typeface="나눔스퀘어 네오 Regular" pitchFamily="34" charset="0"/>
+                          <a:ea typeface="나눔스퀘어 네오 Regular" pitchFamily="34" charset="-122"/>
+                          <a:cs typeface="나눔스퀘어 네오 Regular" pitchFamily="34" charset="-120"/>
                         </a:rPr>
                         <a:t>20,000 사이클, 20% 도착률, 매 사이클 θ 변경</a:t>
                       </a:r>
                       <a:endParaRPr lang="en-US" sz="1300" dirty="0">
-                        <a:latin typeface="NanumSquare Neo" charset="0"/>
-                        <a:ea typeface="NanumSquare Neo" charset="0"/>
-                        <a:cs typeface="NanumSquare Neo" charset="0"/>
+                        <a:latin typeface="나눔스퀘어 네오 Regular" charset="0"/>
+                        <a:ea typeface="나눔스퀘어 네오 Regular" charset="0"/>
+                        <a:cs typeface="나눔스퀘어 네오 Regular" charset="0"/>
                       </a:endParaRPr>
                     </a:p>
                   </a:txBody>
@@ -18690,20 +18737,20 @@
                         <a:buNone/>
                       </a:pPr>
                       <a:r>
-                        <a:rPr lang="en-US" sz="1300" b="1" dirty="0">
+                        <a:rPr lang="en-US" sz="1300" dirty="0">
                           <a:solidFill>
                             <a:srgbClr val="0066CC"/>
                           </a:solidFill>
-                          <a:latin typeface="NanumSquare Neo" pitchFamily="34" charset="0"/>
-                          <a:ea typeface="NanumSquare Neo" pitchFamily="34" charset="-122"/>
-                          <a:cs typeface="NanumSquare Neo" pitchFamily="34" charset="-120"/>
+                          <a:latin typeface="나눔스퀘어 네오 Bold" pitchFamily="34" charset="0"/>
+                          <a:ea typeface="나눔스퀘어 네오 Bold" pitchFamily="34" charset="-122"/>
+                          <a:cs typeface="나눔스퀘어 네오 Bold" pitchFamily="34" charset="-120"/>
                         </a:rPr>
                         <a:t>불일치 0 (20,241건), 528칸 기록</a:t>
                       </a:r>
                       <a:endParaRPr lang="en-US" sz="1300" dirty="0">
-                        <a:latin typeface="NanumSquare Neo" charset="0"/>
-                        <a:ea typeface="NanumSquare Neo" charset="0"/>
-                        <a:cs typeface="NanumSquare Neo" charset="0"/>
+                        <a:latin typeface="나눔스퀘어 네오 Regular" charset="0"/>
+                        <a:ea typeface="나눔스퀘어 네오 Regular" charset="0"/>
+                        <a:cs typeface="나눔스퀘어 네오 Regular" charset="0"/>
                       </a:endParaRPr>
                     </a:p>
                   </a:txBody>
@@ -18764,16 +18811,16 @@
                           <a:solidFill>
                             <a:srgbClr val="1D1D1F"/>
                           </a:solidFill>
-                          <a:latin typeface="NanumSquare Neo" pitchFamily="34" charset="0"/>
-                          <a:ea typeface="NanumSquare Neo" pitchFamily="34" charset="-122"/>
-                          <a:cs typeface="NanumSquare Neo" pitchFamily="34" charset="-120"/>
+                          <a:latin typeface="나눔스퀘어 네오 Regular" pitchFamily="34" charset="0"/>
+                          <a:ea typeface="나눔스퀘어 네오 Regular" pitchFamily="34" charset="-122"/>
+                          <a:cs typeface="나눔스퀘어 네오 Regular" pitchFamily="34" charset="-120"/>
                         </a:rPr>
                         <a:t>θ 추정기 RTL vs 오라클</a:t>
                       </a:r>
                       <a:endParaRPr lang="en-US" sz="1300" dirty="0">
-                        <a:latin typeface="NanumSquare Neo" charset="0"/>
-                        <a:ea typeface="NanumSquare Neo" charset="0"/>
-                        <a:cs typeface="NanumSquare Neo" charset="0"/>
+                        <a:latin typeface="나눔스퀘어 네오 Regular" charset="0"/>
+                        <a:ea typeface="나눔스퀘어 네오 Regular" charset="0"/>
+                        <a:cs typeface="나눔스퀘어 네오 Regular" charset="0"/>
                       </a:endParaRPr>
                     </a:p>
                   </a:txBody>
@@ -18832,16 +18879,16 @@
                           <a:solidFill>
                             <a:srgbClr val="1D1D1F"/>
                           </a:solidFill>
-                          <a:latin typeface="NanumSquare Neo" pitchFamily="34" charset="0"/>
-                          <a:ea typeface="NanumSquare Neo" pitchFamily="34" charset="-122"/>
-                          <a:cs typeface="NanumSquare Neo" pitchFamily="34" charset="-120"/>
+                          <a:latin typeface="나눔스퀘어 네오 Regular" pitchFamily="34" charset="0"/>
+                          <a:ea typeface="나눔스퀘어 네오 Regular" pitchFamily="34" charset="-122"/>
+                          <a:cs typeface="나눔스퀘어 네오 Regular" pitchFamily="34" charset="-120"/>
                         </a:rPr>
                         <a:t>UZH 이벤트 300개의 매 추정값 (1024각도, 외부 SRAM 포트 버전)</a:t>
                       </a:r>
                       <a:endParaRPr lang="en-US" sz="1300" dirty="0">
-                        <a:latin typeface="NanumSquare Neo" charset="0"/>
-                        <a:ea typeface="NanumSquare Neo" charset="0"/>
-                        <a:cs typeface="NanumSquare Neo" charset="0"/>
+                        <a:latin typeface="나눔스퀘어 네오 Regular" charset="0"/>
+                        <a:ea typeface="나눔스퀘어 네오 Regular" charset="0"/>
+                        <a:cs typeface="나눔스퀘어 네오 Regular" charset="0"/>
                       </a:endParaRPr>
                     </a:p>
                   </a:txBody>
@@ -18896,20 +18943,20 @@
                         <a:buNone/>
                       </a:pPr>
                       <a:r>
-                        <a:rPr lang="en-US" sz="1300" b="1" dirty="0">
+                        <a:rPr lang="en-US" sz="1300" dirty="0">
                           <a:solidFill>
                             <a:srgbClr val="0066CC"/>
                           </a:solidFill>
-                          <a:latin typeface="NanumSquare Neo" pitchFamily="34" charset="0"/>
-                          <a:ea typeface="NanumSquare Neo" pitchFamily="34" charset="-122"/>
-                          <a:cs typeface="NanumSquare Neo" pitchFamily="34" charset="-120"/>
+                          <a:latin typeface="나눔스퀘어 네오 Bold" pitchFamily="34" charset="0"/>
+                          <a:ea typeface="나눔스퀘어 네오 Bold" pitchFamily="34" charset="-122"/>
+                          <a:cs typeface="나눔스퀘어 네오 Bold" pitchFamily="34" charset="-120"/>
                         </a:rPr>
                         <a:t>불일치 0</a:t>
                       </a:r>
                       <a:endParaRPr lang="en-US" sz="1300" dirty="0">
-                        <a:latin typeface="NanumSquare Neo" charset="0"/>
-                        <a:ea typeface="NanumSquare Neo" charset="0"/>
-                        <a:cs typeface="NanumSquare Neo" charset="0"/>
+                        <a:latin typeface="나눔스퀘어 네오 Regular" charset="0"/>
+                        <a:ea typeface="나눔스퀘어 네오 Regular" charset="0"/>
+                        <a:cs typeface="나눔스퀘어 네오 Regular" charset="0"/>
                       </a:endParaRPr>
                     </a:p>
                   </a:txBody>
@@ -18970,16 +19017,16 @@
                           <a:solidFill>
                             <a:srgbClr val="1D1D1F"/>
                           </a:solidFill>
-                          <a:latin typeface="NanumSquare Neo" pitchFamily="34" charset="0"/>
-                          <a:ea typeface="NanumSquare Neo" pitchFamily="34" charset="-122"/>
-                          <a:cs typeface="NanumSquare Neo" pitchFamily="34" charset="-120"/>
+                          <a:latin typeface="나눔스퀘어 네오 Regular" pitchFamily="34" charset="0"/>
+                          <a:ea typeface="나눔스퀘어 네오 Regular" pitchFamily="34" charset="-122"/>
+                          <a:cs typeface="나눔스퀘어 네오 Regular" pitchFamily="34" charset="-120"/>
                         </a:rPr>
                         <a:t>blink vs 항상-켬 코어</a:t>
                       </a:r>
                       <a:endParaRPr lang="en-US" sz="1300" dirty="0">
-                        <a:latin typeface="NanumSquare Neo" charset="0"/>
-                        <a:ea typeface="NanumSquare Neo" charset="0"/>
-                        <a:cs typeface="NanumSquare Neo" charset="0"/>
+                        <a:latin typeface="나눔스퀘어 네오 Regular" charset="0"/>
+                        <a:ea typeface="나눔스퀘어 네오 Regular" charset="0"/>
+                        <a:cs typeface="나눔스퀘어 네오 Regular" charset="0"/>
                       </a:endParaRPr>
                     </a:p>
                   </a:txBody>
@@ -19038,16 +19085,16 @@
                           <a:solidFill>
                             <a:srgbClr val="1D1D1F"/>
                           </a:solidFill>
-                          <a:latin typeface="NanumSquare Neo" pitchFamily="34" charset="0"/>
-                          <a:ea typeface="NanumSquare Neo" pitchFamily="34" charset="-122"/>
-                          <a:cs typeface="NanumSquare Neo" pitchFamily="34" charset="-120"/>
+                          <a:latin typeface="나눔스퀘어 네오 Regular" pitchFamily="34" charset="0"/>
+                          <a:ea typeface="나눔스퀘어 네오 Regular" pitchFamily="34" charset="-122"/>
+                          <a:cs typeface="나눔스퀘어 네오 Regular" pitchFamily="34" charset="-120"/>
                         </a:rPr>
                         <a:t>유휴 100~6000 사이클</a:t>
                       </a:r>
                       <a:endParaRPr lang="en-US" sz="1300" dirty="0">
-                        <a:latin typeface="NanumSquare Neo" charset="0"/>
-                        <a:ea typeface="NanumSquare Neo" charset="0"/>
-                        <a:cs typeface="NanumSquare Neo" charset="0"/>
+                        <a:latin typeface="나눔스퀘어 네오 Regular" charset="0"/>
+                        <a:ea typeface="나눔스퀘어 네오 Regular" charset="0"/>
+                        <a:cs typeface="나눔스퀘어 네오 Regular" charset="0"/>
                       </a:endParaRPr>
                     </a:p>
                   </a:txBody>
@@ -19102,20 +19149,20 @@
                         <a:buNone/>
                       </a:pPr>
                       <a:r>
-                        <a:rPr lang="en-US" sz="1300" b="1" dirty="0">
+                        <a:rPr lang="en-US" sz="1300" dirty="0">
                           <a:solidFill>
                             <a:srgbClr val="0066CC"/>
                           </a:solidFill>
-                          <a:latin typeface="NanumSquare Neo" pitchFamily="34" charset="0"/>
-                          <a:ea typeface="NanumSquare Neo" pitchFamily="34" charset="-122"/>
-                          <a:cs typeface="NanumSquare Neo" pitchFamily="34" charset="-120"/>
+                          <a:latin typeface="나눔스퀘어 네오 Bold" pitchFamily="34" charset="0"/>
+                          <a:ea typeface="나눔스퀘어 네오 Bold" pitchFamily="34" charset="-122"/>
+                          <a:cs typeface="나눔스퀘어 네오 Bold" pitchFamily="34" charset="-120"/>
                         </a:rPr>
                         <a:t>overrun·메모리 이미지 불일치 0</a:t>
                       </a:r>
                       <a:endParaRPr lang="en-US" sz="1300" dirty="0">
-                        <a:latin typeface="NanumSquare Neo" charset="0"/>
-                        <a:ea typeface="NanumSquare Neo" charset="0"/>
-                        <a:cs typeface="NanumSquare Neo" charset="0"/>
+                        <a:latin typeface="나눔스퀘어 네오 Regular" charset="0"/>
+                        <a:ea typeface="나눔스퀘어 네오 Regular" charset="0"/>
+                        <a:cs typeface="나눔스퀘어 네오 Regular" charset="0"/>
                       </a:endParaRPr>
                     </a:p>
                   </a:txBody>
@@ -19176,16 +19223,16 @@
                           <a:solidFill>
                             <a:srgbClr val="1D1D1F"/>
                           </a:solidFill>
-                          <a:latin typeface="NanumSquare Neo" pitchFamily="34" charset="0"/>
-                          <a:ea typeface="NanumSquare Neo" pitchFamily="34" charset="-122"/>
-                          <a:cs typeface="NanumSquare Neo" pitchFamily="34" charset="-120"/>
+                          <a:latin typeface="나눔스퀘어 네오 Regular" pitchFamily="34" charset="0"/>
+                          <a:ea typeface="나눔스퀘어 네오 Regular" pitchFamily="34" charset="-122"/>
+                          <a:cs typeface="나눔스퀘어 네오 Regular" pitchFamily="34" charset="-120"/>
                         </a:rPr>
                         <a:t>게이트 시뮬레이션 (P&amp;R 후 netlist + signoff SDF)</a:t>
                       </a:r>
                       <a:endParaRPr lang="en-US" sz="1300" dirty="0">
-                        <a:latin typeface="NanumSquare Neo" charset="0"/>
-                        <a:ea typeface="NanumSquare Neo" charset="0"/>
-                        <a:cs typeface="NanumSquare Neo" charset="0"/>
+                        <a:latin typeface="나눔스퀘어 네오 Regular" charset="0"/>
+                        <a:ea typeface="나눔스퀘어 네오 Regular" charset="0"/>
+                        <a:cs typeface="나눔스퀘어 네오 Regular" charset="0"/>
                       </a:endParaRPr>
                     </a:p>
                   </a:txBody>
@@ -19244,16 +19291,16 @@
                           <a:solidFill>
                             <a:srgbClr val="1D1D1F"/>
                           </a:solidFill>
-                          <a:latin typeface="NanumSquare Neo" pitchFamily="34" charset="0"/>
-                          <a:ea typeface="NanumSquare Neo" pitchFamily="34" charset="-122"/>
-                          <a:cs typeface="NanumSquare Neo" pitchFamily="34" charset="-120"/>
+                          <a:latin typeface="나눔스퀘어 네오 Regular" pitchFamily="34" charset="0"/>
+                          <a:ea typeface="나눔스퀘어 네오 Regular" pitchFamily="34" charset="-122"/>
+                          <a:cs typeface="나눔스퀘어 네오 Regular" pitchFamily="34" charset="-120"/>
                         </a:rPr>
                         <a:t>무작위 6,000사이클 + 메모리 4,096칸 읽기</a:t>
                       </a:r>
                       <a:endParaRPr lang="en-US" sz="1300" dirty="0">
-                        <a:latin typeface="NanumSquare Neo" charset="0"/>
-                        <a:ea typeface="NanumSquare Neo" charset="0"/>
-                        <a:cs typeface="NanumSquare Neo" charset="0"/>
+                        <a:latin typeface="나눔스퀘어 네오 Regular" charset="0"/>
+                        <a:ea typeface="나눔스퀘어 네오 Regular" charset="0"/>
+                        <a:cs typeface="나눔스퀘어 네오 Regular" charset="0"/>
                       </a:endParaRPr>
                     </a:p>
                   </a:txBody>
@@ -19308,20 +19355,20 @@
                         <a:buNone/>
                       </a:pPr>
                       <a:r>
-                        <a:rPr lang="en-US" sz="1300" b="1" dirty="0">
+                        <a:rPr lang="en-US" sz="1300" dirty="0">
                           <a:solidFill>
                             <a:srgbClr val="0066CC"/>
                           </a:solidFill>
-                          <a:latin typeface="NanumSquare Neo" pitchFamily="34" charset="0"/>
-                          <a:ea typeface="NanumSquare Neo" pitchFamily="34" charset="-122"/>
-                          <a:cs typeface="NanumSquare Neo" pitchFamily="34" charset="-120"/>
+                          <a:latin typeface="나눔스퀘어 네오 Bold" pitchFamily="34" charset="0"/>
+                          <a:ea typeface="나눔스퀘어 네오 Bold" pitchFamily="34" charset="-122"/>
+                          <a:cs typeface="나눔스퀘어 네오 Bold" pitchFamily="34" charset="-120"/>
                         </a:rPr>
                         <a:t>RTL과 출력 10,097줄 일치</a:t>
                       </a:r>
                       <a:endParaRPr lang="en-US" sz="1300" dirty="0">
-                        <a:latin typeface="NanumSquare Neo" charset="0"/>
-                        <a:ea typeface="NanumSquare Neo" charset="0"/>
-                        <a:cs typeface="NanumSquare Neo" charset="0"/>
+                        <a:latin typeface="나눔스퀘어 네오 Regular" charset="0"/>
+                        <a:ea typeface="나눔스퀘어 네오 Regular" charset="0"/>
+                        <a:cs typeface="나눔스퀘어 네오 Regular" charset="0"/>
                       </a:endParaRPr>
                     </a:p>
                   </a:txBody>
@@ -19424,13 +19471,13 @@
               <a:buNone/>
             </a:pPr>
             <a:r>
-              <a:rPr lang="en-US" sz="1600" b="1" dirty="0">
+              <a:rPr lang="en-US" sz="1600" dirty="0">
                 <a:solidFill>
                   <a:srgbClr val="0066CC"/>
                 </a:solidFill>
-                <a:latin typeface="NanumSquare Neo" pitchFamily="34" charset="0"/>
-                <a:ea typeface="NanumSquare Neo" pitchFamily="34" charset="-122"/>
-                <a:cs typeface="NanumSquare Neo" pitchFamily="34" charset="-120"/>
+                <a:latin typeface="나눔스퀘어 네오 Bold" pitchFamily="34" charset="0"/>
+                <a:ea typeface="나눔스퀘어 네오 Bold" pitchFamily="34" charset="-122"/>
+                <a:cs typeface="나눔스퀘어 네오 Bold" pitchFamily="34" charset="-120"/>
               </a:rPr>
               <a:t>검증이 잡아낸 실제 버그</a:t>
             </a:r>
@@ -19467,9 +19514,9 @@
                 <a:solidFill>
                   <a:srgbClr val="1D1D1F"/>
                 </a:solidFill>
-                <a:latin typeface="NanumSquare Neo" pitchFamily="34" charset="0"/>
-                <a:ea typeface="NanumSquare Neo" pitchFamily="34" charset="-122"/>
-                <a:cs typeface="NanumSquare Neo" pitchFamily="34" charset="-120"/>
+                <a:latin typeface="나눔스퀘어 네오 Regular" pitchFamily="34" charset="0"/>
+                <a:ea typeface="나눔스퀘어 네오 Regular" pitchFamily="34" charset="-122"/>
+                <a:cs typeface="나눔스퀘어 네오 Regular" pitchFamily="34" charset="-120"/>
               </a:rPr>
               <a:t>① 등록형(registered) 파이프라인에서 θ가 한 박자 늦게 잡히는 것을 몰라 기대값이 어긋남 (테스트벤치, 2회)</a:t>
             </a:r>
@@ -19484,9 +19531,9 @@
                 <a:solidFill>
                   <a:srgbClr val="1D1D1F"/>
                 </a:solidFill>
-                <a:latin typeface="NanumSquare Neo" pitchFamily="34" charset="0"/>
-                <a:ea typeface="NanumSquare Neo" pitchFamily="34" charset="-122"/>
-                <a:cs typeface="NanumSquare Neo" pitchFamily="34" charset="-120"/>
+                <a:latin typeface="나눔스퀘어 네오 Regular" pitchFamily="34" charset="0"/>
+                <a:ea typeface="나눔스퀘어 네오 Regular" pitchFamily="34" charset="-122"/>
+                <a:cs typeface="나눔스퀘어 네오 Regular" pitchFamily="34" charset="-120"/>
               </a:rPr>
               <a:t>② 추정기 RTL: 같은 사이클에 레지스터를 갱신하고 그 값으로 분기해 갱신 전 값을 읽는 버그 → 최종값을 조합논리로 먼저 계산하도록 수정</a:t>
             </a:r>
@@ -19526,9 +19573,9 @@
                 <a:solidFill>
                   <a:srgbClr val="7A7A7A"/>
                 </a:solidFill>
-                <a:latin typeface="NanumSquare Neo"/>
-                <a:ea typeface="NanumSquare Neo"/>
-                <a:cs typeface="NanumSquare Neo"/>
+                <a:latin typeface="나눔스퀘어 네오 Regular"/>
+                <a:ea typeface="나눔스퀘어 네오 Regular"/>
+                <a:cs typeface="나눔스퀘어 네오 Regular"/>
               </a:defRPr>
             </a:lvl1pPr>
           </a:lstStyle>
@@ -19594,13 +19641,13 @@
               <a:buNone/>
             </a:pPr>
             <a:r>
-              <a:rPr lang="en-US" sz="2600" b="1" dirty="0">
+              <a:rPr lang="en-US" sz="2600" dirty="0">
                 <a:solidFill>
                   <a:srgbClr val="1D1D1F"/>
                 </a:solidFill>
-                <a:latin typeface="NanumSquare Neo" pitchFamily="34" charset="0"/>
-                <a:ea typeface="NanumSquare Neo" pitchFamily="34" charset="-122"/>
-                <a:cs typeface="NanumSquare Neo" pitchFamily="34" charset="-120"/>
+                <a:latin typeface="나눔스퀘어 네오 Bold" pitchFamily="34" charset="0"/>
+                <a:ea typeface="나눔스퀘어 네오 Bold" pitchFamily="34" charset="-122"/>
+                <a:cs typeface="나눔스퀘어 네오 Bold" pitchFamily="34" charset="-120"/>
               </a:rPr>
               <a:t>테스트벤치 파형: 이벤트가 레인을 거쳐 월드 주소로 나온다</a:t>
             </a:r>
@@ -19684,13 +19731,13 @@
               <a:buNone/>
             </a:pPr>
             <a:r>
-              <a:rPr lang="en-US" sz="1600" b="1" dirty="0">
+              <a:rPr lang="en-US" sz="1600" dirty="0">
                 <a:solidFill>
                   <a:srgbClr val="0066CC"/>
                 </a:solidFill>
-                <a:latin typeface="NanumSquare Neo" pitchFamily="34" charset="0"/>
-                <a:ea typeface="NanumSquare Neo" pitchFamily="34" charset="-122"/>
-                <a:cs typeface="NanumSquare Neo" pitchFamily="34" charset="-120"/>
+                <a:latin typeface="나눔스퀘어 네오 Bold" pitchFamily="34" charset="0"/>
+                <a:ea typeface="나눔스퀘어 네오 Bold" pitchFamily="34" charset="-122"/>
+                <a:cs typeface="나눔스퀘어 네오 Bold" pitchFamily="34" charset="-120"/>
               </a:rPr>
               <a:t>읽는 법</a:t>
             </a:r>
@@ -19727,9 +19774,9 @@
                 <a:solidFill>
                   <a:srgbClr val="1D1D1F"/>
                 </a:solidFill>
-                <a:latin typeface="NanumSquare Neo" pitchFamily="34" charset="0"/>
-                <a:ea typeface="NanumSquare Neo" pitchFamily="34" charset="-122"/>
-                <a:cs typeface="NanumSquare Neo" pitchFamily="34" charset="-120"/>
+                <a:latin typeface="나눔스퀘어 네오 Regular" pitchFamily="34" charset="0"/>
+                <a:ea typeface="나눔스퀘어 네오 Regular" pitchFamily="34" charset="-122"/>
+                <a:cs typeface="나눔스퀘어 네오 Regular" pitchFamily="34" charset="-120"/>
               </a:rPr>
               <a:t>• arrival: 16개 소스 중 어디서 이벤트가 왔는가(16비트 비트맵)</a:t>
             </a:r>
@@ -19744,9 +19791,9 @@
                 <a:solidFill>
                   <a:srgbClr val="1D1D1F"/>
                 </a:solidFill>
-                <a:latin typeface="NanumSquare Neo" pitchFamily="34" charset="0"/>
-                <a:ea typeface="NanumSquare Neo" pitchFamily="34" charset="-122"/>
-                <a:cs typeface="NanumSquare Neo" pitchFamily="34" charset="-120"/>
+                <a:latin typeface="나눔스퀘어 네오 Regular" pitchFamily="34" charset="0"/>
+                <a:ea typeface="나눔스퀘어 네오 Regular" pitchFamily="34" charset="-122"/>
+                <a:cs typeface="나눔스퀘어 네오 Regular" pitchFamily="34" charset="-120"/>
               </a:rPr>
               <a:t>• theta_idx: 그 순간의 회전각 번호</a:t>
             </a:r>
@@ -19761,9 +19808,9 @@
                 <a:solidFill>
                   <a:srgbClr val="1D1D1F"/>
                 </a:solidFill>
-                <a:latin typeface="NanumSquare Neo" pitchFamily="34" charset="0"/>
-                <a:ea typeface="NanumSquare Neo" pitchFamily="34" charset="-122"/>
-                <a:cs typeface="NanumSquare Neo" pitchFamily="34" charset="-120"/>
+                <a:latin typeface="나눔스퀘어 네오 Regular" pitchFamily="34" charset="0"/>
+                <a:ea typeface="나눔스퀘어 네오 Regular" pitchFamily="34" charset="-122"/>
+                <a:cs typeface="나눔스퀘어 네오 Regular" pitchFamily="34" charset="-120"/>
               </a:rPr>
               <a:t>• world_we · world_addr: 변환된 월드 좌표(y,x)가 쓰기 포트로 한 건씩 나옴</a:t>
             </a:r>
@@ -19778,9 +19825,9 @@
                 <a:solidFill>
                   <a:srgbClr val="1D1D1F"/>
                 </a:solidFill>
-                <a:latin typeface="NanumSquare Neo" pitchFamily="34" charset="0"/>
-                <a:ea typeface="NanumSquare Neo" pitchFamily="34" charset="-122"/>
-                <a:cs typeface="NanumSquare Neo" pitchFamily="34" charset="-120"/>
+                <a:latin typeface="나눔스퀘어 네오 Regular" pitchFamily="34" charset="0"/>
+                <a:ea typeface="나눔스퀘어 네오 Regular" pitchFamily="34" charset="-122"/>
+                <a:cs typeface="나눔스퀘어 네오 Regular" pitchFamily="34" charset="-120"/>
               </a:rPr>
               <a:t>• overrun은 0으로 유지</a:t>
             </a:r>
@@ -19817,9 +19864,9 @@
                 <a:solidFill>
                   <a:srgbClr val="7A7A7A"/>
                 </a:solidFill>
-                <a:latin typeface="NanumSquare Neo" pitchFamily="34" charset="0"/>
-                <a:ea typeface="NanumSquare Neo" pitchFamily="34" charset="-122"/>
-                <a:cs typeface="NanumSquare Neo" pitchFamily="34" charset="-120"/>
+                <a:latin typeface="나눔스퀘어 네오 Regular" pitchFamily="34" charset="0"/>
+                <a:ea typeface="나눔스퀘어 네오 Regular" pitchFamily="34" charset="-122"/>
+                <a:cs typeface="나눔스퀘어 네오 Regular" pitchFamily="34" charset="-120"/>
               </a:rPr>
               <a:t>RTL 시뮬레이션(Icarus Verilog), 실제 UZH 이벤트 + 실제 자세</a:t>
             </a:r>
@@ -19859,9 +19906,9 @@
                 <a:solidFill>
                   <a:srgbClr val="7A7A7A"/>
                 </a:solidFill>
-                <a:latin typeface="NanumSquare Neo"/>
-                <a:ea typeface="NanumSquare Neo"/>
-                <a:cs typeface="NanumSquare Neo"/>
+                <a:latin typeface="나눔스퀘어 네오 Regular"/>
+                <a:ea typeface="나눔스퀘어 네오 Regular"/>
+                <a:cs typeface="나눔스퀘어 네오 Regular"/>
               </a:defRPr>
             </a:lvl1pPr>
           </a:lstStyle>
@@ -19927,13 +19974,13 @@
               <a:buNone/>
             </a:pPr>
             <a:r>
-              <a:rPr lang="en-US" sz="2600" b="1" dirty="0">
+              <a:rPr lang="en-US" sz="2600" dirty="0">
                 <a:solidFill>
                   <a:srgbClr val="1D1D1F"/>
                 </a:solidFill>
-                <a:latin typeface="NanumSquare Neo" pitchFamily="34" charset="0"/>
-                <a:ea typeface="NanumSquare Neo" pitchFamily="34" charset="-122"/>
-                <a:cs typeface="NanumSquare Neo" pitchFamily="34" charset="-120"/>
+                <a:latin typeface="나눔스퀘어 네오 Bold" pitchFamily="34" charset="0"/>
+                <a:ea typeface="나눔스퀘어 네오 Bold" pitchFamily="34" charset="-122"/>
+                <a:cs typeface="나눔스퀘어 네오 Bold" pitchFamily="34" charset="-120"/>
               </a:rPr>
               <a:t>RTL이 쓴 월드 메모리: 8,503개 이벤트가 90칸에 쌓였다</a:t>
             </a:r>
@@ -20017,13 +20064,13 @@
               <a:buNone/>
             </a:pPr>
             <a:r>
-              <a:rPr lang="en-US" sz="1600" b="1" dirty="0">
+              <a:rPr lang="en-US" sz="1600" dirty="0">
                 <a:solidFill>
                   <a:srgbClr val="0066CC"/>
                 </a:solidFill>
-                <a:latin typeface="NanumSquare Neo" pitchFamily="34" charset="0"/>
-                <a:ea typeface="NanumSquare Neo" pitchFamily="34" charset="-122"/>
-                <a:cs typeface="NanumSquare Neo" pitchFamily="34" charset="-120"/>
+                <a:latin typeface="나눔스퀘어 네오 Bold" pitchFamily="34" charset="0"/>
+                <a:ea typeface="나눔스퀘어 네오 Bold" pitchFamily="34" charset="-122"/>
+                <a:cs typeface="나눔스퀘어 네오 Bold" pitchFamily="34" charset="-120"/>
               </a:rPr>
               <a:t>UZH 실제 이벤트 재생</a:t>
             </a:r>
@@ -20060,9 +20107,9 @@
                 <a:solidFill>
                   <a:srgbClr val="1D1D1F"/>
                 </a:solidFill>
-                <a:latin typeface="NanumSquare Neo" pitchFamily="34" charset="0"/>
-                <a:ea typeface="NanumSquare Neo" pitchFamily="34" charset="-122"/>
-                <a:cs typeface="NanumSquare Neo" pitchFamily="34" charset="-120"/>
+                <a:latin typeface="나눔스퀘어 네오 Regular" pitchFamily="34" charset="0"/>
+                <a:ea typeface="나눔스퀘어 네오 Regular" pitchFamily="34" charset="-122"/>
+                <a:cs typeface="나눔스퀘어 네오 Regular" pitchFamily="34" charset="-120"/>
               </a:rPr>
               <a:t>이벤트 8,503개 → 쓰기 8,503건, 손실(overrun) 0</a:t>
             </a:r>
@@ -20077,9 +20124,9 @@
                 <a:solidFill>
                   <a:srgbClr val="1D1D1F"/>
                 </a:solidFill>
-                <a:latin typeface="NanumSquare Neo" pitchFamily="34" charset="0"/>
-                <a:ea typeface="NanumSquare Neo" pitchFamily="34" charset="-122"/>
-                <a:cs typeface="NanumSquare Neo" pitchFamily="34" charset="-120"/>
+                <a:latin typeface="나눔스퀘어 네오 Regular" pitchFamily="34" charset="0"/>
+                <a:ea typeface="나눔스퀘어 네오 Regular" pitchFamily="34" charset="-122"/>
+                <a:cs typeface="나눔스퀘어 네오 Regular" pitchFamily="34" charset="-120"/>
               </a:rPr>
               <a:t>쓰기 모듈 입력 8,503건을 독립 계산한 기대값과 대조: 불일치 0</a:t>
             </a:r>
@@ -20094,9 +20141,9 @@
                 <a:solidFill>
                   <a:srgbClr val="1D1D1F"/>
                 </a:solidFill>
-                <a:latin typeface="NanumSquare Neo" pitchFamily="34" charset="0"/>
-                <a:ea typeface="NanumSquare Neo" pitchFamily="34" charset="-122"/>
-                <a:cs typeface="NanumSquare Neo" pitchFamily="34" charset="-120"/>
+                <a:latin typeface="나눔스퀘어 네오 Regular" pitchFamily="34" charset="0"/>
+                <a:ea typeface="나눔스퀘어 네오 Regular" pitchFamily="34" charset="-122"/>
+                <a:cs typeface="나눔스퀘어 네오 Regular" pitchFamily="34" charset="-120"/>
               </a:rPr>
               <a:t>기록된 칸 90/4096</a:t>
             </a:r>
@@ -20156,13 +20203,13 @@
               <a:buNone/>
             </a:pPr>
             <a:r>
-              <a:rPr lang="en-US" sz="1600" b="1" dirty="0">
+              <a:rPr lang="en-US" sz="1600" dirty="0">
                 <a:solidFill>
                   <a:srgbClr val="0066CC"/>
                 </a:solidFill>
-                <a:latin typeface="NanumSquare Neo" pitchFamily="34" charset="0"/>
-                <a:ea typeface="NanumSquare Neo" pitchFamily="34" charset="-122"/>
-                <a:cs typeface="NanumSquare Neo" pitchFamily="34" charset="-120"/>
+                <a:latin typeface="나눔스퀘어 네오 Bold" pitchFamily="34" charset="0"/>
+                <a:ea typeface="나눔스퀘어 네오 Bold" pitchFamily="34" charset="-122"/>
+                <a:cs typeface="나눔스퀘어 네오 Bold" pitchFamily="34" charset="-120"/>
               </a:rPr>
               <a:t>무작위 스트레스</a:t>
             </a:r>
@@ -20199,9 +20246,9 @@
                 <a:solidFill>
                   <a:srgbClr val="1D1D1F"/>
                 </a:solidFill>
-                <a:latin typeface="NanumSquare Neo" pitchFamily="34" charset="0"/>
-                <a:ea typeface="NanumSquare Neo" pitchFamily="34" charset="-122"/>
-                <a:cs typeface="NanumSquare Neo" pitchFamily="34" charset="-120"/>
+                <a:latin typeface="나눔스퀘어 네오 Regular" pitchFamily="34" charset="0"/>
+                <a:ea typeface="나눔스퀘어 네오 Regular" pitchFamily="34" charset="-122"/>
+                <a:cs typeface="나눔스퀘어 네오 Regular" pitchFamily="34" charset="-120"/>
               </a:rPr>
               <a:t>20,000 사이클, 도착률 20%, 매 사이클 θ 변경</a:t>
             </a:r>
@@ -20216,9 +20263,9 @@
                 <a:solidFill>
                   <a:srgbClr val="1D1D1F"/>
                 </a:solidFill>
-                <a:latin typeface="NanumSquare Neo" pitchFamily="34" charset="0"/>
-                <a:ea typeface="NanumSquare Neo" pitchFamily="34" charset="-122"/>
-                <a:cs typeface="NanumSquare Neo" pitchFamily="34" charset="-120"/>
+                <a:latin typeface="나눔스퀘어 네오 Regular" pitchFamily="34" charset="0"/>
+                <a:ea typeface="나눔스퀘어 네오 Regular" pitchFamily="34" charset="-122"/>
+                <a:cs typeface="나눔스퀘어 네오 Regular" pitchFamily="34" charset="-120"/>
               </a:rPr>
               <a:t>쓰기 20,241건 모두 기대값과 일치, 손실 0</a:t>
             </a:r>
@@ -20233,9 +20280,9 @@
                 <a:solidFill>
                   <a:srgbClr val="1D1D1F"/>
                 </a:solidFill>
-                <a:latin typeface="NanumSquare Neo" pitchFamily="34" charset="0"/>
-                <a:ea typeface="NanumSquare Neo" pitchFamily="34" charset="-122"/>
-                <a:cs typeface="NanumSquare Neo" pitchFamily="34" charset="-120"/>
+                <a:latin typeface="나눔스퀘어 네오 Regular" pitchFamily="34" charset="0"/>
+                <a:ea typeface="나눔스퀘어 네오 Regular" pitchFamily="34" charset="-122"/>
+                <a:cs typeface="나눔스퀘어 네오 Regular" pitchFamily="34" charset="-120"/>
               </a:rPr>
               <a:t>기록된 칸 528/4096 (희소한 실제 트래픽이 놓치는 같은 사이클 충돌 경로를 자극)</a:t>
             </a:r>
@@ -20275,9 +20322,9 @@
                 <a:solidFill>
                   <a:srgbClr val="7A7A7A"/>
                 </a:solidFill>
-                <a:latin typeface="NanumSquare Neo"/>
-                <a:ea typeface="NanumSquare Neo"/>
-                <a:cs typeface="NanumSquare Neo"/>
+                <a:latin typeface="나눔스퀘어 네오 Regular"/>
+                <a:ea typeface="나눔스퀘어 네오 Regular"/>
+                <a:cs typeface="나눔스퀘어 네오 Regular"/>
               </a:defRPr>
             </a:lvl1pPr>
           </a:lstStyle>
@@ -20343,13 +20390,13 @@
               <a:buNone/>
             </a:pPr>
             <a:r>
-              <a:rPr lang="en-US" sz="2600" b="1" dirty="0">
+              <a:rPr lang="en-US" sz="2600" dirty="0">
                 <a:solidFill>
                   <a:srgbClr val="1D1D1F"/>
                 </a:solidFill>
-                <a:latin typeface="NanumSquare Neo" pitchFamily="34" charset="0"/>
-                <a:ea typeface="NanumSquare Neo" pitchFamily="34" charset="-122"/>
-                <a:cs typeface="NanumSquare Neo" pitchFamily="34" charset="-120"/>
+                <a:latin typeface="나눔스퀘어 네오 Bold" pitchFamily="34" charset="0"/>
+                <a:ea typeface="나눔스퀘어 네오 Bold" pitchFamily="34" charset="-122"/>
+                <a:cs typeface="나눔스퀘어 네오 Bold" pitchFamily="34" charset="-120"/>
               </a:rPr>
               <a:t>면적의 70%는 월드 메모리, 그래서 메모리를 먼저 다뤘다</a:t>
             </a:r>
@@ -20406,9 +20453,9 @@
                 <a:solidFill>
                   <a:srgbClr val="1D1D1F"/>
                 </a:solidFill>
-                <a:latin typeface="NanumSquare Neo" pitchFamily="34" charset="0"/>
-                <a:ea typeface="NanumSquare Neo" pitchFamily="34" charset="-122"/>
-                <a:cs typeface="NanumSquare Neo" pitchFamily="34" charset="-120"/>
+                <a:latin typeface="나눔스퀘어 네오 Regular" pitchFamily="34" charset="0"/>
+                <a:ea typeface="나눔스퀘어 네오 Regular" pitchFamily="34" charset="-122"/>
+                <a:cs typeface="나눔스퀘어 네오 Regular" pitchFamily="34" charset="-120"/>
               </a:rPr>
               <a:t>쓰기 모듈 + 레지스터 배열 합성: 211,856 µm², 전체의 98%가 저장소</a:t>
             </a:r>
@@ -20427,9 +20474,9 @@
                 <a:solidFill>
                   <a:srgbClr val="1D1D1F"/>
                 </a:solidFill>
-                <a:latin typeface="NanumSquare Neo" pitchFamily="34" charset="0"/>
-                <a:ea typeface="NanumSquare Neo" pitchFamily="34" charset="-122"/>
-                <a:cs typeface="NanumSquare Neo" pitchFamily="34" charset="-120"/>
+                <a:latin typeface="나눔스퀘어 네오 Regular" pitchFamily="34" charset="0"/>
+                <a:ea typeface="나눔스퀘어 네오 Regular" pitchFamily="34" charset="-122"/>
+                <a:cs typeface="나눔스퀘어 네오 Regular" pitchFamily="34" charset="-120"/>
               </a:rPr>
               <a:t>저장소를 SRAM 인터페이스 밖으로 분리: 35,111 µm² (6.0배 감소). 단, 저장소는 별도 계산 대상</a:t>
             </a:r>
@@ -20448,9 +20495,9 @@
                 <a:solidFill>
                   <a:srgbClr val="1D1D1F"/>
                 </a:solidFill>
-                <a:latin typeface="NanumSquare Neo" pitchFamily="34" charset="0"/>
-                <a:ea typeface="NanumSquare Neo" pitchFamily="34" charset="-122"/>
-                <a:cs typeface="NanumSquare Neo" pitchFamily="34" charset="-120"/>
+                <a:latin typeface="나눔스퀘어 네오 Regular" pitchFamily="34" charset="0"/>
+                <a:ea typeface="나눔스퀘어 네오 Regular" pitchFamily="34" charset="-122"/>
+                <a:cs typeface="나눔스퀘어 네오 Regular" pitchFamily="34" charset="-120"/>
               </a:rPr>
               <a:t>메모리 포함 P&amp;R: 메모리가 면적의 70% 이상, 약 12 µm²/비트</a:t>
             </a:r>
@@ -20469,9 +20516,9 @@
                 <a:solidFill>
                   <a:srgbClr val="1D1D1F"/>
                 </a:solidFill>
-                <a:latin typeface="NanumSquare Neo" pitchFamily="34" charset="0"/>
-                <a:ea typeface="NanumSquare Neo" pitchFamily="34" charset="-122"/>
-                <a:cs typeface="NanumSquare Neo" pitchFamily="34" charset="-120"/>
+                <a:latin typeface="나눔스퀘어 네오 Regular" pitchFamily="34" charset="0"/>
+                <a:ea typeface="나눔스퀘어 네오 Regular" pitchFamily="34" charset="-122"/>
+                <a:cs typeface="나눔스퀘어 네오 Regular" pitchFamily="34" charset="-120"/>
               </a:rPr>
               <a:t>교육용 PDK에는 SRAM 매크로가 없다 → 메모리는 별도 추정 모델이 필요</a:t>
             </a:r>
@@ -20531,13 +20578,13 @@
               <a:buNone/>
             </a:pPr>
             <a:r>
-              <a:rPr lang="en-US" sz="1600" b="1" dirty="0">
+              <a:rPr lang="en-US" sz="1600" dirty="0">
                 <a:solidFill>
                   <a:srgbClr val="FFFFFF"/>
                 </a:solidFill>
-                <a:latin typeface="NanumSquare Neo" pitchFamily="34" charset="0"/>
-                <a:ea typeface="NanumSquare Neo" pitchFamily="34" charset="-122"/>
-                <a:cs typeface="NanumSquare Neo" pitchFamily="34" charset="-120"/>
+                <a:latin typeface="나눔스퀘어 네오 Bold" pitchFamily="34" charset="0"/>
+                <a:ea typeface="나눔스퀘어 네오 Bold" pitchFamily="34" charset="-122"/>
+                <a:cs typeface="나눔스퀘어 네오 Bold" pitchFamily="34" charset="-120"/>
               </a:rPr>
               <a:t>→ 이후 최적화의 초점은</a:t>
             </a:r>
@@ -20548,13 +20595,13 @@
               <a:buNone/>
             </a:pPr>
             <a:r>
-              <a:rPr lang="en-US" sz="1600" b="1" dirty="0">
+              <a:rPr lang="en-US" sz="1600" dirty="0">
                 <a:solidFill>
                   <a:srgbClr val="FFFFFF"/>
                 </a:solidFill>
-                <a:latin typeface="NanumSquare Neo" pitchFamily="34" charset="0"/>
-                <a:ea typeface="NanumSquare Neo" pitchFamily="34" charset="-122"/>
-                <a:cs typeface="NanumSquare Neo" pitchFamily="34" charset="-120"/>
+                <a:latin typeface="나눔스퀘어 네오 Bold" pitchFamily="34" charset="0"/>
+                <a:ea typeface="나눔스퀘어 네오 Bold" pitchFamily="34" charset="-122"/>
+                <a:cs typeface="나눔스퀘어 네오 Bold" pitchFamily="34" charset="-120"/>
               </a:rPr>
               <a:t>코어 로직이 아니라</a:t>
             </a:r>
@@ -20565,13 +20612,13 @@
               <a:buNone/>
             </a:pPr>
             <a:r>
-              <a:rPr lang="en-US" sz="1600" b="1" dirty="0">
+              <a:rPr lang="en-US" sz="1600" dirty="0">
                 <a:solidFill>
                   <a:srgbClr val="FFFFFF"/>
                 </a:solidFill>
-                <a:latin typeface="NanumSquare Neo" pitchFamily="34" charset="0"/>
-                <a:ea typeface="NanumSquare Neo" pitchFamily="34" charset="-122"/>
-                <a:cs typeface="NanumSquare Neo" pitchFamily="34" charset="-120"/>
+                <a:latin typeface="나눔스퀘어 네오 Bold" pitchFamily="34" charset="0"/>
+                <a:ea typeface="나눔스퀘어 네오 Bold" pitchFamily="34" charset="-122"/>
+                <a:cs typeface="나눔스퀘어 네오 Bold" pitchFamily="34" charset="-120"/>
               </a:rPr>
               <a:t>메모리의 클록 동작에 맞췄다.</a:t>
             </a:r>
@@ -20611,9 +20658,9 @@
                 <a:solidFill>
                   <a:srgbClr val="7A7A7A"/>
                 </a:solidFill>
-                <a:latin typeface="NanumSquare Neo"/>
-                <a:ea typeface="NanumSquare Neo"/>
-                <a:cs typeface="NanumSquare Neo"/>
+                <a:latin typeface="나눔스퀘어 네오 Regular"/>
+                <a:ea typeface="나눔스퀘어 네오 Regular"/>
+                <a:cs typeface="나눔스퀘어 네오 Regular"/>
               </a:defRPr>
             </a:lvl1pPr>
           </a:lstStyle>
@@ -20678,11 +20725,11 @@
     </a:clrScheme>
     <a:fontScheme name="Office">
       <a:majorFont>
-        <a:latin typeface="NanumSquare Neo"/>
-        <a:ea typeface="NanumSquare Neo"/>
-        <a:cs typeface=""/>
+        <a:latin typeface="나눔스퀘어 네오 Regular"/>
+        <a:ea typeface="나눔스퀘어 네오 Regular"/>
+        <a:cs typeface="나눔스퀘어 네오 Regular"/>
         <a:font script="Jpan" typeface="游ゴシック Light"/>
-        <a:font script="Hang" typeface="맑은 고딕"/>
+        <a:font script="Hang" typeface="나눔스퀘어 네오 Regular"/>
         <a:font script="Hans" typeface="等线 Light"/>
         <a:font script="Hant" typeface="新細明體"/>
         <a:font script="Arab" typeface="Times New Roman"/>
@@ -20730,11 +20777,11 @@
         <a:font script="Tfng" typeface="Ebrima"/>
       </a:majorFont>
       <a:minorFont>
-        <a:latin typeface="NanumSquare Neo"/>
-        <a:ea typeface="NanumSquare Neo"/>
-        <a:cs typeface=""/>
+        <a:latin typeface="나눔스퀘어 네오 Regular"/>
+        <a:ea typeface="나눔스퀘어 네오 Regular"/>
+        <a:cs typeface="나눔스퀘어 네오 Regular"/>
         <a:font script="Jpan" typeface="游ゴシック"/>
-        <a:font script="Hang" typeface="맑은 고딕"/>
+        <a:font script="Hang" typeface="나눔스퀘어 네오 Regular"/>
         <a:font script="Hans" typeface="等线"/>
         <a:font script="Hant" typeface="新細明體"/>
         <a:font script="Arab" typeface="Arial"/>

--- a/submission/REDRED_2차_발표자료.pptx
+++ b/submission/REDRED_2차_발표자료.pptx
@@ -10663,7 +10663,7 @@
                 <a:gridCol w="1188720"/>
                 <a:gridCol w="5852160"/>
               </a:tblGrid>
-              <a:tr h="493776">
+              <a:tr h="420624">
                 <a:tc>
                   <a:txBody>
                     <a:bodyPr/>
@@ -10673,7 +10673,7 @@
                         <a:buNone/>
                       </a:pPr>
                       <a:r>
-                        <a:rPr lang="en-US" sz="1300" dirty="0">
+                        <a:rPr lang="en-US" sz="1200" dirty="0">
                           <a:solidFill>
                             <a:srgbClr val="1D1D1F"/>
                           </a:solidFill>
@@ -10683,7 +10683,7 @@
                         </a:rPr>
                         <a:t>생체 모방 아이디어</a:t>
                       </a:r>
-                      <a:endParaRPr lang="en-US" sz="1300" dirty="0">
+                      <a:endParaRPr lang="en-US" sz="1200" dirty="0">
                         <a:latin typeface="나눔스퀘어 네오 Regular" charset="0"/>
                         <a:ea typeface="나눔스퀘어 네오 Regular" charset="0"/>
                         <a:cs typeface="나눔스퀘어 네오 Regular" charset="0"/>
@@ -10741,7 +10741,7 @@
                         <a:buNone/>
                       </a:pPr>
                       <a:r>
-                        <a:rPr lang="en-US" sz="1300" dirty="0">
+                        <a:rPr lang="en-US" sz="1200" dirty="0">
                           <a:solidFill>
                             <a:srgbClr val="1D1D1F"/>
                           </a:solidFill>
@@ -10751,7 +10751,7 @@
                         </a:rPr>
                         <a:t>결과</a:t>
                       </a:r>
-                      <a:endParaRPr lang="en-US" sz="1300" dirty="0">
+                      <a:endParaRPr lang="en-US" sz="1200" dirty="0">
                         <a:latin typeface="나눔스퀘어 네오 Regular" charset="0"/>
                         <a:ea typeface="나눔스퀘어 네오 Regular" charset="0"/>
                         <a:cs typeface="나눔스퀘어 네오 Regular" charset="0"/>
@@ -10809,7 +10809,7 @@
                         <a:buNone/>
                       </a:pPr>
                       <a:r>
-                        <a:rPr lang="en-US" sz="1300" dirty="0">
+                        <a:rPr lang="en-US" sz="1200" dirty="0">
                           <a:solidFill>
                             <a:srgbClr val="1D1D1F"/>
                           </a:solidFill>
@@ -10819,7 +10819,7 @@
                         </a:rPr>
                         <a:t>근거</a:t>
                       </a:r>
-                      <a:endParaRPr lang="en-US" sz="1300" dirty="0">
+                      <a:endParaRPr lang="en-US" sz="1200" dirty="0">
                         <a:latin typeface="나눔스퀘어 네오 Regular" charset="0"/>
                         <a:ea typeface="나눔스퀘어 네오 Regular" charset="0"/>
                         <a:cs typeface="나눔스퀘어 네오 Regular" charset="0"/>
@@ -10869,7 +10869,7 @@
                   </a:tcPr>
                 </a:tc>
               </a:tr>
-              <a:tr h="493776">
+              <a:tr h="420624">
                 <a:tc>
                   <a:txBody>
                     <a:bodyPr/>
@@ -10879,7 +10879,7 @@
                         <a:buNone/>
                       </a:pPr>
                       <a:r>
-                        <a:rPr lang="en-US" sz="1300" dirty="0">
+                        <a:rPr lang="en-US" sz="1200" dirty="0">
                           <a:solidFill>
                             <a:srgbClr val="1D1D1F"/>
                           </a:solidFill>
@@ -10889,7 +10889,7 @@
                         </a:rPr>
                         <a:t>중심와(fovea) / 이벤트 클러스터링 (1차)</a:t>
                       </a:r>
-                      <a:endParaRPr lang="en-US" sz="1300" dirty="0">
+                      <a:endParaRPr lang="en-US" sz="1200" dirty="0">
                         <a:latin typeface="나눔스퀘어 네오 Regular" charset="0"/>
                         <a:ea typeface="나눔스퀘어 네오 Regular" charset="0"/>
                         <a:cs typeface="나눔스퀘어 네오 Regular" charset="0"/>
@@ -10947,7 +10947,7 @@
                         <a:buNone/>
                       </a:pPr>
                       <a:r>
-                        <a:rPr lang="en-US" sz="1300" dirty="0">
+                        <a:rPr lang="en-US" sz="1200" dirty="0">
                           <a:solidFill>
                             <a:srgbClr val="0066CC"/>
                           </a:solidFill>
@@ -10957,7 +10957,7 @@
                         </a:rPr>
                         <a:t>채택</a:t>
                       </a:r>
-                      <a:endParaRPr lang="en-US" sz="1300" dirty="0">
+                      <a:endParaRPr lang="en-US" sz="1200" dirty="0">
                         <a:latin typeface="나눔스퀘어 네오 Regular" charset="0"/>
                         <a:ea typeface="나눔스퀘어 네오 Regular" charset="0"/>
                         <a:cs typeface="나눔스퀘어 네오 Regular" charset="0"/>
@@ -11015,7 +11015,7 @@
                         <a:buNone/>
                       </a:pPr>
                       <a:r>
-                        <a:rPr lang="en-US" sz="1300" dirty="0">
+                        <a:rPr lang="en-US" sz="1200" dirty="0">
                           <a:solidFill>
                             <a:srgbClr val="1D1D1F"/>
                           </a:solidFill>
@@ -11025,7 +11025,7 @@
                         </a:rPr>
                         <a:t>열 비트맵: 손실 57.6% → 6.9%(동일 합성 트래픽), 최종 결합판 0.47%(UZH 실측)</a:t>
                       </a:r>
-                      <a:endParaRPr lang="en-US" sz="1300" dirty="0">
+                      <a:endParaRPr lang="en-US" sz="1200" dirty="0">
                         <a:latin typeface="나눔스퀘어 네오 Regular" charset="0"/>
                         <a:ea typeface="나눔스퀘어 네오 Regular" charset="0"/>
                         <a:cs typeface="나눔스퀘어 네오 Regular" charset="0"/>
@@ -11075,7 +11075,7 @@
                   </a:tcPr>
                 </a:tc>
               </a:tr>
-              <a:tr h="493776">
+              <a:tr h="420624">
                 <a:tc>
                   <a:txBody>
                     <a:bodyPr/>
@@ -11085,7 +11085,7 @@
                         <a:buNone/>
                       </a:pPr>
                       <a:r>
-                        <a:rPr lang="en-US" sz="1300" dirty="0">
+                        <a:rPr lang="en-US" sz="1200" dirty="0">
                           <a:solidFill>
                             <a:srgbClr val="1D1D1F"/>
                           </a:solidFill>
@@ -11095,7 +11095,7 @@
                         </a:rPr>
                         <a:t>눈 깜빡임: 유휴 시 코어 클록 차단</a:t>
                       </a:r>
-                      <a:endParaRPr lang="en-US" sz="1300" dirty="0">
+                      <a:endParaRPr lang="en-US" sz="1200" dirty="0">
                         <a:latin typeface="나눔스퀘어 네오 Regular" charset="0"/>
                         <a:ea typeface="나눔스퀘어 네오 Regular" charset="0"/>
                         <a:cs typeface="나눔스퀘어 네오 Regular" charset="0"/>
@@ -11153,7 +11153,7 @@
                         <a:buNone/>
                       </a:pPr>
                       <a:r>
-                        <a:rPr lang="en-US" sz="1300" dirty="0">
+                        <a:rPr lang="en-US" sz="1200" dirty="0">
                           <a:solidFill>
                             <a:srgbClr val="0066CC"/>
                           </a:solidFill>
@@ -11163,7 +11163,7 @@
                         </a:rPr>
                         <a:t>채택</a:t>
                       </a:r>
-                      <a:endParaRPr lang="en-US" sz="1300" dirty="0">
+                      <a:endParaRPr lang="en-US" sz="1200" dirty="0">
                         <a:latin typeface="나눔스퀘어 네오 Regular" charset="0"/>
                         <a:ea typeface="나눔스퀘어 네오 Regular" charset="0"/>
                         <a:cs typeface="나눔스퀘어 네오 Regular" charset="0"/>
@@ -11221,7 +11221,7 @@
                         <a:buNone/>
                       </a:pPr>
                       <a:r>
-                        <a:rPr lang="en-US" sz="1300" dirty="0">
+                        <a:rPr lang="en-US" sz="1200" dirty="0">
                           <a:solidFill>
                             <a:srgbClr val="1D1D1F"/>
                           </a:solidFill>
@@ -11231,7 +11231,7 @@
                         </a:rPr>
                         <a:t>항상-켬과 출력·메모리 일치, 유휴 전력 −71%(시험 입력)</a:t>
                       </a:r>
-                      <a:endParaRPr lang="en-US" sz="1300" dirty="0">
+                      <a:endParaRPr lang="en-US" sz="1200" dirty="0">
                         <a:latin typeface="나눔스퀘어 네오 Regular" charset="0"/>
                         <a:ea typeface="나눔스퀘어 네오 Regular" charset="0"/>
                         <a:cs typeface="나눔스퀘어 네오 Regular" charset="0"/>
@@ -11281,7 +11281,7 @@
                   </a:tcPr>
                 </a:tc>
               </a:tr>
-              <a:tr h="493776">
+              <a:tr h="420624">
                 <a:tc>
                   <a:txBody>
                     <a:bodyPr/>
@@ -11291,7 +11291,7 @@
                         <a:buNone/>
                       </a:pPr>
                       <a:r>
-                        <a:rPr lang="en-US" sz="1300" dirty="0">
+                        <a:rPr lang="en-US" sz="1200" dirty="0">
                           <a:solidFill>
                             <a:srgbClr val="1D1D1F"/>
                           </a:solidFill>
@@ -11301,7 +11301,7 @@
                         </a:rPr>
                         <a:t>행 단위 선택적 활성화 (메모리)</a:t>
                       </a:r>
-                      <a:endParaRPr lang="en-US" sz="1300" dirty="0">
+                      <a:endParaRPr lang="en-US" sz="1200" dirty="0">
                         <a:latin typeface="나눔스퀘어 네오 Regular" charset="0"/>
                         <a:ea typeface="나눔스퀘어 네오 Regular" charset="0"/>
                         <a:cs typeface="나눔스퀘어 네오 Regular" charset="0"/>
@@ -11359,7 +11359,7 @@
                         <a:buNone/>
                       </a:pPr>
                       <a:r>
-                        <a:rPr lang="en-US" sz="1300" dirty="0">
+                        <a:rPr lang="en-US" sz="1200" dirty="0">
                           <a:solidFill>
                             <a:srgbClr val="0066CC"/>
                           </a:solidFill>
@@ -11369,7 +11369,7 @@
                         </a:rPr>
                         <a:t>채택</a:t>
                       </a:r>
-                      <a:endParaRPr lang="en-US" sz="1300" dirty="0">
+                      <a:endParaRPr lang="en-US" sz="1200" dirty="0">
                         <a:latin typeface="나눔스퀘어 네오 Regular" charset="0"/>
                         <a:ea typeface="나눔스퀘어 네오 Regular" charset="0"/>
                         <a:cs typeface="나눔스퀘어 네오 Regular" charset="0"/>
@@ -11427,7 +11427,7 @@
                         <a:buNone/>
                       </a:pPr>
                       <a:r>
-                        <a:rPr lang="en-US" sz="1300" dirty="0">
+                        <a:rPr lang="en-US" sz="1200" dirty="0">
                           <a:solidFill>
                             <a:srgbClr val="1D1D1F"/>
                           </a:solidFill>
@@ -11437,7 +11437,7 @@
                         </a:rPr>
                         <a:t>전력 −65.5%, 면적 −5%</a:t>
                       </a:r>
-                      <a:endParaRPr lang="en-US" sz="1300" dirty="0">
+                      <a:endParaRPr lang="en-US" sz="1200" dirty="0">
                         <a:latin typeface="나눔스퀘어 네오 Regular" charset="0"/>
                         <a:ea typeface="나눔스퀘어 네오 Regular" charset="0"/>
                         <a:cs typeface="나눔스퀘어 네오 Regular" charset="0"/>
@@ -11487,7 +11487,7 @@
                   </a:tcPr>
                 </a:tc>
               </a:tr>
-              <a:tr h="493776">
+              <a:tr h="420624">
                 <a:tc>
                   <a:txBody>
                     <a:bodyPr/>
@@ -11497,7 +11497,7 @@
                         <a:buNone/>
                       </a:pPr>
                       <a:r>
-                        <a:rPr lang="en-US" sz="1300" dirty="0">
+                        <a:rPr lang="en-US" sz="1200" dirty="0">
                           <a:solidFill>
                             <a:srgbClr val="1D1D1F"/>
                           </a:solidFill>
@@ -11507,7 +11507,7 @@
                         </a:rPr>
                         <a:t>이득 조절(과부하 솎아내기)</a:t>
                       </a:r>
-                      <a:endParaRPr lang="en-US" sz="1300" dirty="0">
+                      <a:endParaRPr lang="en-US" sz="1200" dirty="0">
                         <a:latin typeface="나눔스퀘어 네오 Regular" charset="0"/>
                         <a:ea typeface="나눔스퀘어 네오 Regular" charset="0"/>
                         <a:cs typeface="나눔스퀘어 네오 Regular" charset="0"/>
@@ -11565,7 +11565,7 @@
                         <a:buNone/>
                       </a:pPr>
                       <a:r>
-                        <a:rPr lang="en-US" sz="1300" dirty="0">
+                        <a:rPr lang="en-US" sz="1200" dirty="0">
                           <a:solidFill>
                             <a:srgbClr val="1D1D1F"/>
                           </a:solidFill>
@@ -11575,7 +11575,7 @@
                         </a:rPr>
                         <a:t>기각·정정</a:t>
                       </a:r>
-                      <a:endParaRPr lang="en-US" sz="1300" dirty="0">
+                      <a:endParaRPr lang="en-US" sz="1200" dirty="0">
                         <a:latin typeface="나눔스퀘어 네오 Regular" charset="0"/>
                         <a:ea typeface="나눔스퀘어 네오 Regular" charset="0"/>
                         <a:cs typeface="나눔스퀘어 네오 Regular" charset="0"/>
@@ -11633,7 +11633,7 @@
                         <a:buNone/>
                       </a:pPr>
                       <a:r>
-                        <a:rPr lang="en-US" sz="1300" dirty="0">
+                        <a:rPr lang="en-US" sz="1200" dirty="0">
                           <a:solidFill>
                             <a:srgbClr val="1D1D1F"/>
                           </a:solidFill>
@@ -11643,7 +11643,7 @@
                         </a:rPr>
                         <a:t>합성 장면에서만 이득, 실제 DELTA 프레임에서 이득 없음</a:t>
                       </a:r>
-                      <a:endParaRPr lang="en-US" sz="1300" dirty="0">
+                      <a:endParaRPr lang="en-US" sz="1200" dirty="0">
                         <a:latin typeface="나눔스퀘어 네오 Regular" charset="0"/>
                         <a:ea typeface="나눔스퀘어 네오 Regular" charset="0"/>
                         <a:cs typeface="나눔스퀘어 네오 Regular" charset="0"/>
@@ -11693,7 +11693,7 @@
                   </a:tcPr>
                 </a:tc>
               </a:tr>
-              <a:tr h="493776">
+              <a:tr h="420624">
                 <a:tc>
                   <a:txBody>
                     <a:bodyPr/>
@@ -11703,7 +11703,7 @@
                         <a:buNone/>
                       </a:pPr>
                       <a:r>
-                        <a:rPr lang="en-US" sz="1300" dirty="0">
+                        <a:rPr lang="en-US" sz="1200" dirty="0">
                           <a:solidFill>
                             <a:srgbClr val="1D1D1F"/>
                           </a:solidFill>
@@ -11713,7 +11713,7 @@
                         </a:rPr>
                         <a:t>추정기 입력 줄이기(ON만/중심 가중/불응기)</a:t>
                       </a:r>
-                      <a:endParaRPr lang="en-US" sz="1300" dirty="0">
+                      <a:endParaRPr lang="en-US" sz="1200" dirty="0">
                         <a:latin typeface="나눔스퀘어 네오 Regular" charset="0"/>
                         <a:ea typeface="나눔스퀘어 네오 Regular" charset="0"/>
                         <a:cs typeface="나눔스퀘어 네오 Regular" charset="0"/>
@@ -11771,7 +11771,7 @@
                         <a:buNone/>
                       </a:pPr>
                       <a:r>
-                        <a:rPr lang="en-US" sz="1300" dirty="0">
+                        <a:rPr lang="en-US" sz="1200" dirty="0">
                           <a:solidFill>
                             <a:srgbClr val="1D1D1F"/>
                           </a:solidFill>
@@ -11781,7 +11781,7 @@
                         </a:rPr>
                         <a:t>기각</a:t>
                       </a:r>
-                      <a:endParaRPr lang="en-US" sz="1300" dirty="0">
+                      <a:endParaRPr lang="en-US" sz="1200" dirty="0">
                         <a:latin typeface="나눔스퀘어 네오 Regular" charset="0"/>
                         <a:ea typeface="나눔스퀘어 네오 Regular" charset="0"/>
                         <a:cs typeface="나눔스퀘어 네오 Regular" charset="0"/>
@@ -11839,7 +11839,7 @@
                         <a:buNone/>
                       </a:pPr>
                       <a:r>
-                        <a:rPr lang="en-US" sz="1300" dirty="0">
+                        <a:rPr lang="en-US" sz="1200" dirty="0">
                           <a:solidFill>
                             <a:srgbClr val="1D1D1F"/>
                           </a:solidFill>
@@ -11849,7 +11849,7 @@
                         </a:rPr>
                         <a:t>정확도 1.5배 이상 악화</a:t>
                       </a:r>
-                      <a:endParaRPr lang="en-US" sz="1300" dirty="0">
+                      <a:endParaRPr lang="en-US" sz="1200" dirty="0">
                         <a:latin typeface="나눔스퀘어 네오 Regular" charset="0"/>
                         <a:ea typeface="나눔스퀘어 네오 Regular" charset="0"/>
                         <a:cs typeface="나눔스퀘어 네오 Regular" charset="0"/>
@@ -11899,7 +11899,7 @@
                   </a:tcPr>
                 </a:tc>
               </a:tr>
-              <a:tr h="493776">
+              <a:tr h="420624">
                 <a:tc>
                   <a:txBody>
                     <a:bodyPr/>
@@ -11909,7 +11909,7 @@
                         <a:buNone/>
                       </a:pPr>
                       <a:r>
-                        <a:rPr lang="en-US" sz="1300" dirty="0">
+                        <a:rPr lang="en-US" sz="1200" dirty="0">
                           <a:solidFill>
                             <a:srgbClr val="1D1D1F"/>
                           </a:solidFill>
@@ -11919,7 +11919,7 @@
                         </a:rPr>
                         <a:t>미세 안구운동(지터)</a:t>
                       </a:r>
-                      <a:endParaRPr lang="en-US" sz="1300" dirty="0">
+                      <a:endParaRPr lang="en-US" sz="1200" dirty="0">
                         <a:latin typeface="나눔스퀘어 네오 Regular" charset="0"/>
                         <a:ea typeface="나눔스퀘어 네오 Regular" charset="0"/>
                         <a:cs typeface="나눔스퀘어 네오 Regular" charset="0"/>
@@ -11977,7 +11977,7 @@
                         <a:buNone/>
                       </a:pPr>
                       <a:r>
-                        <a:rPr lang="en-US" sz="1300" dirty="0">
+                        <a:rPr lang="en-US" sz="1200" dirty="0">
                           <a:solidFill>
                             <a:srgbClr val="1D1D1F"/>
                           </a:solidFill>
@@ -11987,7 +11987,7 @@
                         </a:rPr>
                         <a:t>기각</a:t>
                       </a:r>
-                      <a:endParaRPr lang="en-US" sz="1300" dirty="0">
+                      <a:endParaRPr lang="en-US" sz="1200" dirty="0">
                         <a:latin typeface="나눔스퀘어 네오 Regular" charset="0"/>
                         <a:ea typeface="나눔스퀘어 네오 Regular" charset="0"/>
                         <a:cs typeface="나눔스퀘어 네오 Regular" charset="0"/>
@@ -12045,7 +12045,7 @@
                         <a:buNone/>
                       </a:pPr>
                       <a:r>
-                        <a:rPr lang="en-US" sz="1300" dirty="0">
+                        <a:rPr lang="en-US" sz="1200" dirty="0">
                           <a:solidFill>
                             <a:srgbClr val="1D1D1F"/>
                           </a:solidFill>
@@ -12055,7 +12055,7 @@
                         </a:rPr>
                         <a:t>부화소 복원 효과 없음</a:t>
                       </a:r>
-                      <a:endParaRPr lang="en-US" sz="1300" dirty="0">
+                      <a:endParaRPr lang="en-US" sz="1200" dirty="0">
                         <a:latin typeface="나눔스퀘어 네오 Regular" charset="0"/>
                         <a:ea typeface="나눔스퀘어 네오 Regular" charset="0"/>
                         <a:cs typeface="나눔스퀘어 네오 Regular" charset="0"/>
@@ -12105,7 +12105,7 @@
                   </a:tcPr>
                 </a:tc>
               </a:tr>
-              <a:tr h="493776">
+              <a:tr h="420624">
                 <a:tc>
                   <a:txBody>
                     <a:bodyPr/>
@@ -12115,7 +12115,7 @@
                         <a:buNone/>
                       </a:pPr>
                       <a:r>
-                        <a:rPr lang="en-US" sz="1300" dirty="0">
+                        <a:rPr lang="en-US" sz="1200" dirty="0">
                           <a:solidFill>
                             <a:srgbClr val="1D1D1F"/>
                           </a:solidFill>
@@ -12125,7 +12125,7 @@
                         </a:rPr>
                         <a:t>원심성 복사(VOR): 회전 지령을 θ 사전분포로</a:t>
                       </a:r>
-                      <a:endParaRPr lang="en-US" sz="1300" dirty="0">
+                      <a:endParaRPr lang="en-US" sz="1200" dirty="0">
                         <a:latin typeface="나눔스퀘어 네오 Regular" charset="0"/>
                         <a:ea typeface="나눔스퀘어 네오 Regular" charset="0"/>
                         <a:cs typeface="나눔스퀘어 네오 Regular" charset="0"/>
@@ -12183,7 +12183,7 @@
                         <a:buNone/>
                       </a:pPr>
                       <a:r>
-                        <a:rPr lang="en-US" sz="1300" dirty="0">
+                        <a:rPr lang="en-US" sz="1200" dirty="0">
                           <a:solidFill>
                             <a:srgbClr val="1D1D1F"/>
                           </a:solidFill>
@@ -12193,7 +12193,7 @@
                         </a:rPr>
                         <a:t>기각</a:t>
                       </a:r>
-                      <a:endParaRPr lang="en-US" sz="1300" dirty="0">
+                      <a:endParaRPr lang="en-US" sz="1200" dirty="0">
                         <a:latin typeface="나눔스퀘어 네오 Regular" charset="0"/>
                         <a:ea typeface="나눔스퀘어 네오 Regular" charset="0"/>
                         <a:cs typeface="나눔스퀘어 네오 Regular" charset="0"/>
@@ -12251,7 +12251,7 @@
                         <a:buNone/>
                       </a:pPr>
                       <a:r>
-                        <a:rPr lang="en-US" sz="1300" dirty="0">
+                        <a:rPr lang="en-US" sz="1200" dirty="0">
                           <a:solidFill>
                             <a:srgbClr val="1D1D1F"/>
                           </a:solidFill>
@@ -12261,7 +12261,7 @@
                         </a:rPr>
                         <a:t>UZH 평균 23.4°→8.5°이나 RobotEvt 36.1°→34.9°(기준 25.3° 미달), 사전 등록 기준 미통과</a:t>
                       </a:r>
-                      <a:endParaRPr lang="en-US" sz="1300" dirty="0">
+                      <a:endParaRPr lang="en-US" sz="1200" dirty="0">
                         <a:latin typeface="나눔스퀘어 네오 Regular" charset="0"/>
                         <a:ea typeface="나눔스퀘어 네오 Regular" charset="0"/>
                         <a:cs typeface="나눔스퀘어 네오 Regular" charset="0"/>
@@ -12311,7 +12311,7 @@
                   </a:tcPr>
                 </a:tc>
               </a:tr>
-              <a:tr h="493776">
+              <a:tr h="420624">
                 <a:tc>
                   <a:txBody>
                     <a:bodyPr/>
@@ -12321,7 +12321,7 @@
                         <a:buNone/>
                       </a:pPr>
                       <a:r>
-                        <a:rPr lang="en-US" sz="1300" dirty="0">
+                        <a:rPr lang="en-US" sz="1200" dirty="0">
                           <a:solidFill>
                             <a:srgbClr val="1D1D1F"/>
                           </a:solidFill>
@@ -12329,9 +12329,9 @@
                           <a:ea typeface="나눔스퀘어 네오 Regular" pitchFamily="34" charset="-122"/>
                           <a:cs typeface="나눔스퀘어 네오 Regular" pitchFamily="34" charset="-120"/>
                         </a:rPr>
-                        <a:t>최근 쓰기 캐시 (감각 기억)</a:t>
+                        <a:t>희소 행 할당(해마식 지연 할당)</a:t>
                       </a:r>
-                      <a:endParaRPr lang="en-US" sz="1300" dirty="0">
+                      <a:endParaRPr lang="en-US" sz="1200" dirty="0">
                         <a:latin typeface="나눔스퀘어 네오 Regular" charset="0"/>
                         <a:ea typeface="나눔스퀘어 네오 Regular" charset="0"/>
                         <a:cs typeface="나눔스퀘어 네오 Regular" charset="0"/>
@@ -12389,17 +12389,17 @@
                         <a:buNone/>
                       </a:pPr>
                       <a:r>
-                        <a:rPr lang="en-US" sz="1300" dirty="0">
+                        <a:rPr lang="en-US" sz="1200" dirty="0">
                           <a:solidFill>
-                            <a:srgbClr val="7A7A7A"/>
+                            <a:srgbClr val="1D1D1F"/>
                           </a:solidFill>
                           <a:latin typeface="나눔스퀘어 네오 Bold" pitchFamily="34" charset="0"/>
                           <a:ea typeface="나눔스퀘어 네오 Bold" pitchFamily="34" charset="-122"/>
                           <a:cs typeface="나눔스퀘어 네오 Bold" pitchFamily="34" charset="-120"/>
                         </a:rPr>
-                        <a:t>보류</a:t>
+                        <a:t>기각</a:t>
                       </a:r>
-                      <a:endParaRPr lang="en-US" sz="1300" dirty="0">
+                      <a:endParaRPr lang="en-US" sz="1200" dirty="0">
                         <a:latin typeface="나눔스퀘어 네오 Regular" charset="0"/>
                         <a:ea typeface="나눔스퀘어 네오 Regular" charset="0"/>
                         <a:cs typeface="나눔스퀘어 네오 Regular" charset="0"/>
@@ -12457,7 +12457,419 @@
                         <a:buNone/>
                       </a:pPr>
                       <a:r>
-                        <a:rPr lang="en-US" sz="1300" dirty="0">
+                        <a:rPr lang="en-US" sz="1200" dirty="0">
+                          <a:solidFill>
+                            <a:srgbClr val="1D1D1F"/>
+                          </a:solidFill>
+                          <a:latin typeface="나눔스퀘어 네오 Regular" pitchFamily="34" charset="0"/>
+                          <a:ea typeface="나눔스퀘어 네오 Regular" pitchFamily="34" charset="-122"/>
+                          <a:cs typeface="나눔스퀘어 네오 Regular" pitchFamily="34" charset="-120"/>
+                        </a:rPr>
+                        <a:t>건드려진 행 UZH 52.9%·RobotEvt 55.5%(기준 50% 이하 미달), 칸은 13~17%</a:t>
+                      </a:r>
+                      <a:endParaRPr lang="en-US" sz="1200" dirty="0">
+                        <a:latin typeface="나눔스퀘어 네오 Regular" charset="0"/>
+                        <a:ea typeface="나눔스퀘어 네오 Regular" charset="0"/>
+                        <a:cs typeface="나눔스퀘어 네오 Regular" charset="0"/>
+                      </a:endParaRPr>
+                    </a:p>
+                  </a:txBody>
+                  <a:tcPr marL="73152" marR="73152" marT="36576" marB="36576" anchor="ctr">
+                    <a:lnL w="6350" cap="flat" cmpd="sng" algn="ctr">
+                      <a:solidFill>
+                        <a:srgbClr val="E0E0E0"/>
+                      </a:solidFill>
+                      <a:prstDash val="solid"/>
+                      <a:round/>
+                      <a:headEnd type="none" w="med" len="med"/>
+                      <a:tailEnd type="none" w="med" len="med"/>
+                    </a:lnL>
+                    <a:lnR w="6350" cap="flat" cmpd="sng" algn="ctr">
+                      <a:solidFill>
+                        <a:srgbClr val="E0E0E0"/>
+                      </a:solidFill>
+                      <a:prstDash val="solid"/>
+                      <a:round/>
+                      <a:headEnd type="none" w="med" len="med"/>
+                      <a:tailEnd type="none" w="med" len="med"/>
+                    </a:lnR>
+                    <a:lnT w="6350" cap="flat" cmpd="sng" algn="ctr">
+                      <a:solidFill>
+                        <a:srgbClr val="E0E0E0"/>
+                      </a:solidFill>
+                      <a:prstDash val="solid"/>
+                      <a:round/>
+                      <a:headEnd type="none" w="med" len="med"/>
+                      <a:tailEnd type="none" w="med" len="med"/>
+                    </a:lnT>
+                    <a:lnB w="6350" cap="flat" cmpd="sng" algn="ctr">
+                      <a:solidFill>
+                        <a:srgbClr val="E0E0E0"/>
+                      </a:solidFill>
+                      <a:prstDash val="solid"/>
+                      <a:round/>
+                      <a:headEnd type="none" w="med" len="med"/>
+                      <a:tailEnd type="none" w="med" len="med"/>
+                    </a:lnB>
+                    <a:solidFill>
+                      <a:srgbClr val="FFFFFF"/>
+                    </a:solidFill>
+                  </a:tcPr>
+                </a:tc>
+              </a:tr>
+              <a:tr h="420624">
+                <a:tc>
+                  <a:txBody>
+                    <a:bodyPr/>
+                    <a:lstStyle/>
+                    <a:p>
+                      <a:pPr eaLnBrk="0" indent="0" marL="0">
+                        <a:buNone/>
+                      </a:pPr>
+                      <a:r>
+                        <a:rPr lang="en-US" sz="1200" dirty="0">
+                          <a:solidFill>
+                            <a:srgbClr val="1D1D1F"/>
+                          </a:solidFill>
+                          <a:latin typeface="나눔스퀘어 네오 Regular" pitchFamily="34" charset="0"/>
+                          <a:ea typeface="나눔스퀘어 네오 Regular" pitchFamily="34" charset="-122"/>
+                          <a:cs typeface="나눔스퀘어 네오 Regular" pitchFamily="34" charset="-120"/>
+                        </a:rPr>
+                        <a:t>기억 소멸(forgetting)</a:t>
+                      </a:r>
+                      <a:endParaRPr lang="en-US" sz="1200" dirty="0">
+                        <a:latin typeface="나눔스퀘어 네오 Regular" charset="0"/>
+                        <a:ea typeface="나눔스퀘어 네오 Regular" charset="0"/>
+                        <a:cs typeface="나눔스퀘어 네오 Regular" charset="0"/>
+                      </a:endParaRPr>
+                    </a:p>
+                  </a:txBody>
+                  <a:tcPr marL="73152" marR="73152" marT="36576" marB="36576" anchor="ctr">
+                    <a:lnL w="6350" cap="flat" cmpd="sng" algn="ctr">
+                      <a:solidFill>
+                        <a:srgbClr val="E0E0E0"/>
+                      </a:solidFill>
+                      <a:prstDash val="solid"/>
+                      <a:round/>
+                      <a:headEnd type="none" w="med" len="med"/>
+                      <a:tailEnd type="none" w="med" len="med"/>
+                    </a:lnL>
+                    <a:lnR w="6350" cap="flat" cmpd="sng" algn="ctr">
+                      <a:solidFill>
+                        <a:srgbClr val="E0E0E0"/>
+                      </a:solidFill>
+                      <a:prstDash val="solid"/>
+                      <a:round/>
+                      <a:headEnd type="none" w="med" len="med"/>
+                      <a:tailEnd type="none" w="med" len="med"/>
+                    </a:lnR>
+                    <a:lnT w="6350" cap="flat" cmpd="sng" algn="ctr">
+                      <a:solidFill>
+                        <a:srgbClr val="E0E0E0"/>
+                      </a:solidFill>
+                      <a:prstDash val="solid"/>
+                      <a:round/>
+                      <a:headEnd type="none" w="med" len="med"/>
+                      <a:tailEnd type="none" w="med" len="med"/>
+                    </a:lnT>
+                    <a:lnB w="6350" cap="flat" cmpd="sng" algn="ctr">
+                      <a:solidFill>
+                        <a:srgbClr val="E0E0E0"/>
+                      </a:solidFill>
+                      <a:prstDash val="solid"/>
+                      <a:round/>
+                      <a:headEnd type="none" w="med" len="med"/>
+                      <a:tailEnd type="none" w="med" len="med"/>
+                    </a:lnB>
+                    <a:solidFill>
+                      <a:srgbClr val="FFFFFF"/>
+                    </a:solidFill>
+                  </a:tcPr>
+                </a:tc>
+                <a:tc>
+                  <a:txBody>
+                    <a:bodyPr/>
+                    <a:lstStyle/>
+                    <a:p>
+                      <a:pPr eaLnBrk="0" indent="0" marL="0">
+                        <a:buNone/>
+                      </a:pPr>
+                      <a:r>
+                        <a:rPr lang="en-US" sz="1200" dirty="0">
+                          <a:solidFill>
+                            <a:srgbClr val="1D1D1F"/>
+                          </a:solidFill>
+                          <a:latin typeface="나눔스퀘어 네오 Bold" pitchFamily="34" charset="0"/>
+                          <a:ea typeface="나눔스퀘어 네오 Bold" pitchFamily="34" charset="-122"/>
+                          <a:cs typeface="나눔스퀘어 네오 Bold" pitchFamily="34" charset="-120"/>
+                        </a:rPr>
+                        <a:t>기각</a:t>
+                      </a:r>
+                      <a:endParaRPr lang="en-US" sz="1200" dirty="0">
+                        <a:latin typeface="나눔스퀘어 네오 Regular" charset="0"/>
+                        <a:ea typeface="나눔스퀘어 네오 Regular" charset="0"/>
+                        <a:cs typeface="나눔스퀘어 네오 Regular" charset="0"/>
+                      </a:endParaRPr>
+                    </a:p>
+                  </a:txBody>
+                  <a:tcPr marL="73152" marR="73152" marT="36576" marB="36576" anchor="ctr">
+                    <a:lnL w="6350" cap="flat" cmpd="sng" algn="ctr">
+                      <a:solidFill>
+                        <a:srgbClr val="E0E0E0"/>
+                      </a:solidFill>
+                      <a:prstDash val="solid"/>
+                      <a:round/>
+                      <a:headEnd type="none" w="med" len="med"/>
+                      <a:tailEnd type="none" w="med" len="med"/>
+                    </a:lnL>
+                    <a:lnR w="6350" cap="flat" cmpd="sng" algn="ctr">
+                      <a:solidFill>
+                        <a:srgbClr val="E0E0E0"/>
+                      </a:solidFill>
+                      <a:prstDash val="solid"/>
+                      <a:round/>
+                      <a:headEnd type="none" w="med" len="med"/>
+                      <a:tailEnd type="none" w="med" len="med"/>
+                    </a:lnR>
+                    <a:lnT w="6350" cap="flat" cmpd="sng" algn="ctr">
+                      <a:solidFill>
+                        <a:srgbClr val="E0E0E0"/>
+                      </a:solidFill>
+                      <a:prstDash val="solid"/>
+                      <a:round/>
+                      <a:headEnd type="none" w="med" len="med"/>
+                      <a:tailEnd type="none" w="med" len="med"/>
+                    </a:lnT>
+                    <a:lnB w="6350" cap="flat" cmpd="sng" algn="ctr">
+                      <a:solidFill>
+                        <a:srgbClr val="E0E0E0"/>
+                      </a:solidFill>
+                      <a:prstDash val="solid"/>
+                      <a:round/>
+                      <a:headEnd type="none" w="med" len="med"/>
+                      <a:tailEnd type="none" w="med" len="med"/>
+                    </a:lnB>
+                    <a:solidFill>
+                      <a:srgbClr val="FFFFFF"/>
+                    </a:solidFill>
+                  </a:tcPr>
+                </a:tc>
+                <a:tc>
+                  <a:txBody>
+                    <a:bodyPr/>
+                    <a:lstStyle/>
+                    <a:p>
+                      <a:pPr eaLnBrk="0" indent="0" marL="0">
+                        <a:buNone/>
+                      </a:pPr>
+                      <a:r>
+                        <a:rPr lang="en-US" sz="1200" dirty="0">
+                          <a:solidFill>
+                            <a:srgbClr val="1D1D1F"/>
+                          </a:solidFill>
+                          <a:latin typeface="나눔스퀘어 네오 Regular" pitchFamily="34" charset="0"/>
+                          <a:ea typeface="나눔스퀘어 네오 Regular" pitchFamily="34" charset="-122"/>
+                          <a:cs typeface="나눔스퀘어 네오 Regular" pitchFamily="34" charset="-120"/>
+                        </a:rPr>
+                        <a:t>카운터 감쇠(K=4096): UZH 23.4°→23.8°, RobotEvt 36.1°→36.0°(0.8배 기준 미달)</a:t>
+                      </a:r>
+                      <a:endParaRPr lang="en-US" sz="1200" dirty="0">
+                        <a:latin typeface="나눔스퀘어 네오 Regular" charset="0"/>
+                        <a:ea typeface="나눔스퀘어 네오 Regular" charset="0"/>
+                        <a:cs typeface="나눔스퀘어 네오 Regular" charset="0"/>
+                      </a:endParaRPr>
+                    </a:p>
+                  </a:txBody>
+                  <a:tcPr marL="73152" marR="73152" marT="36576" marB="36576" anchor="ctr">
+                    <a:lnL w="6350" cap="flat" cmpd="sng" algn="ctr">
+                      <a:solidFill>
+                        <a:srgbClr val="E0E0E0"/>
+                      </a:solidFill>
+                      <a:prstDash val="solid"/>
+                      <a:round/>
+                      <a:headEnd type="none" w="med" len="med"/>
+                      <a:tailEnd type="none" w="med" len="med"/>
+                    </a:lnL>
+                    <a:lnR w="6350" cap="flat" cmpd="sng" algn="ctr">
+                      <a:solidFill>
+                        <a:srgbClr val="E0E0E0"/>
+                      </a:solidFill>
+                      <a:prstDash val="solid"/>
+                      <a:round/>
+                      <a:headEnd type="none" w="med" len="med"/>
+                      <a:tailEnd type="none" w="med" len="med"/>
+                    </a:lnR>
+                    <a:lnT w="6350" cap="flat" cmpd="sng" algn="ctr">
+                      <a:solidFill>
+                        <a:srgbClr val="E0E0E0"/>
+                      </a:solidFill>
+                      <a:prstDash val="solid"/>
+                      <a:round/>
+                      <a:headEnd type="none" w="med" len="med"/>
+                      <a:tailEnd type="none" w="med" len="med"/>
+                    </a:lnT>
+                    <a:lnB w="6350" cap="flat" cmpd="sng" algn="ctr">
+                      <a:solidFill>
+                        <a:srgbClr val="E0E0E0"/>
+                      </a:solidFill>
+                      <a:prstDash val="solid"/>
+                      <a:round/>
+                      <a:headEnd type="none" w="med" len="med"/>
+                      <a:tailEnd type="none" w="med" len="med"/>
+                    </a:lnB>
+                    <a:solidFill>
+                      <a:srgbClr val="FFFFFF"/>
+                    </a:solidFill>
+                  </a:tcPr>
+                </a:tc>
+              </a:tr>
+              <a:tr h="420624">
+                <a:tc>
+                  <a:txBody>
+                    <a:bodyPr/>
+                    <a:lstStyle/>
+                    <a:p>
+                      <a:pPr eaLnBrk="0" indent="0" marL="0">
+                        <a:buNone/>
+                      </a:pPr>
+                      <a:r>
+                        <a:rPr lang="en-US" sz="1200" dirty="0">
+                          <a:solidFill>
+                            <a:srgbClr val="1D1D1F"/>
+                          </a:solidFill>
+                          <a:latin typeface="나눔스퀘어 네오 Regular" pitchFamily="34" charset="0"/>
+                          <a:ea typeface="나눔스퀘어 네오 Regular" pitchFamily="34" charset="-122"/>
+                          <a:cs typeface="나눔스퀘어 네오 Regular" pitchFamily="34" charset="-120"/>
+                        </a:rPr>
+                        <a:t>최근 쓰기 캐시 (감각 기억)</a:t>
+                      </a:r>
+                      <a:endParaRPr lang="en-US" sz="1200" dirty="0">
+                        <a:latin typeface="나눔스퀘어 네오 Regular" charset="0"/>
+                        <a:ea typeface="나눔스퀘어 네오 Regular" charset="0"/>
+                        <a:cs typeface="나눔스퀘어 네오 Regular" charset="0"/>
+                      </a:endParaRPr>
+                    </a:p>
+                  </a:txBody>
+                  <a:tcPr marL="73152" marR="73152" marT="36576" marB="36576" anchor="ctr">
+                    <a:lnL w="6350" cap="flat" cmpd="sng" algn="ctr">
+                      <a:solidFill>
+                        <a:srgbClr val="E0E0E0"/>
+                      </a:solidFill>
+                      <a:prstDash val="solid"/>
+                      <a:round/>
+                      <a:headEnd type="none" w="med" len="med"/>
+                      <a:tailEnd type="none" w="med" len="med"/>
+                    </a:lnL>
+                    <a:lnR w="6350" cap="flat" cmpd="sng" algn="ctr">
+                      <a:solidFill>
+                        <a:srgbClr val="E0E0E0"/>
+                      </a:solidFill>
+                      <a:prstDash val="solid"/>
+                      <a:round/>
+                      <a:headEnd type="none" w="med" len="med"/>
+                      <a:tailEnd type="none" w="med" len="med"/>
+                    </a:lnR>
+                    <a:lnT w="6350" cap="flat" cmpd="sng" algn="ctr">
+                      <a:solidFill>
+                        <a:srgbClr val="E0E0E0"/>
+                      </a:solidFill>
+                      <a:prstDash val="solid"/>
+                      <a:round/>
+                      <a:headEnd type="none" w="med" len="med"/>
+                      <a:tailEnd type="none" w="med" len="med"/>
+                    </a:lnT>
+                    <a:lnB w="6350" cap="flat" cmpd="sng" algn="ctr">
+                      <a:solidFill>
+                        <a:srgbClr val="E0E0E0"/>
+                      </a:solidFill>
+                      <a:prstDash val="solid"/>
+                      <a:round/>
+                      <a:headEnd type="none" w="med" len="med"/>
+                      <a:tailEnd type="none" w="med" len="med"/>
+                    </a:lnB>
+                    <a:solidFill>
+                      <a:srgbClr val="FFFFFF"/>
+                    </a:solidFill>
+                  </a:tcPr>
+                </a:tc>
+                <a:tc>
+                  <a:txBody>
+                    <a:bodyPr/>
+                    <a:lstStyle/>
+                    <a:p>
+                      <a:pPr eaLnBrk="0" indent="0" marL="0">
+                        <a:buNone/>
+                      </a:pPr>
+                      <a:r>
+                        <a:rPr lang="en-US" sz="1200" dirty="0">
+                          <a:solidFill>
+                            <a:srgbClr val="7A7A7A"/>
+                          </a:solidFill>
+                          <a:latin typeface="나눔스퀘어 네오 Bold" pitchFamily="34" charset="0"/>
+                          <a:ea typeface="나눔스퀘어 네오 Bold" pitchFamily="34" charset="-122"/>
+                          <a:cs typeface="나눔스퀘어 네오 Bold" pitchFamily="34" charset="-120"/>
+                        </a:rPr>
+                        <a:t>보류</a:t>
+                      </a:r>
+                      <a:endParaRPr lang="en-US" sz="1200" dirty="0">
+                        <a:latin typeface="나눔스퀘어 네오 Regular" charset="0"/>
+                        <a:ea typeface="나눔스퀘어 네오 Regular" charset="0"/>
+                        <a:cs typeface="나눔스퀘어 네오 Regular" charset="0"/>
+                      </a:endParaRPr>
+                    </a:p>
+                  </a:txBody>
+                  <a:tcPr marL="73152" marR="73152" marT="36576" marB="36576" anchor="ctr">
+                    <a:lnL w="6350" cap="flat" cmpd="sng" algn="ctr">
+                      <a:solidFill>
+                        <a:srgbClr val="E0E0E0"/>
+                      </a:solidFill>
+                      <a:prstDash val="solid"/>
+                      <a:round/>
+                      <a:headEnd type="none" w="med" len="med"/>
+                      <a:tailEnd type="none" w="med" len="med"/>
+                    </a:lnL>
+                    <a:lnR w="6350" cap="flat" cmpd="sng" algn="ctr">
+                      <a:solidFill>
+                        <a:srgbClr val="E0E0E0"/>
+                      </a:solidFill>
+                      <a:prstDash val="solid"/>
+                      <a:round/>
+                      <a:headEnd type="none" w="med" len="med"/>
+                      <a:tailEnd type="none" w="med" len="med"/>
+                    </a:lnR>
+                    <a:lnT w="6350" cap="flat" cmpd="sng" algn="ctr">
+                      <a:solidFill>
+                        <a:srgbClr val="E0E0E0"/>
+                      </a:solidFill>
+                      <a:prstDash val="solid"/>
+                      <a:round/>
+                      <a:headEnd type="none" w="med" len="med"/>
+                      <a:tailEnd type="none" w="med" len="med"/>
+                    </a:lnT>
+                    <a:lnB w="6350" cap="flat" cmpd="sng" algn="ctr">
+                      <a:solidFill>
+                        <a:srgbClr val="E0E0E0"/>
+                      </a:solidFill>
+                      <a:prstDash val="solid"/>
+                      <a:round/>
+                      <a:headEnd type="none" w="med" len="med"/>
+                      <a:tailEnd type="none" w="med" len="med"/>
+                    </a:lnB>
+                    <a:solidFill>
+                      <a:srgbClr val="FFFFFF"/>
+                    </a:solidFill>
+                  </a:tcPr>
+                </a:tc>
+                <a:tc>
+                  <a:txBody>
+                    <a:bodyPr/>
+                    <a:lstStyle/>
+                    <a:p>
+                      <a:pPr eaLnBrk="0" indent="0" marL="0">
+                        <a:buNone/>
+                      </a:pPr>
+                      <a:r>
+                        <a:rPr lang="en-US" sz="1200" dirty="0">
                           <a:solidFill>
                             <a:srgbClr val="1D1D1F"/>
                           </a:solidFill>
@@ -12467,7 +12879,7 @@
                         </a:rPr>
                         <a:t>64항목만 전력 −16%/면적 +5.5%, 필수 아님</a:t>
                       </a:r>
-                      <a:endParaRPr lang="en-US" sz="1300" dirty="0">
+                      <a:endParaRPr lang="en-US" sz="1200" dirty="0">
                         <a:latin typeface="나눔스퀘어 네오 Regular" charset="0"/>
                         <a:ea typeface="나눔스퀘어 네오 Regular" charset="0"/>
                         <a:cs typeface="나눔스퀘어 네오 Regular" charset="0"/>

--- a/submission/REDRED_2차_발표자료.pptx
+++ b/submission/REDRED_2차_발표자료.pptx
@@ -3339,7 +3339,7 @@
           <a:p>
             <a:r>
               <a:rPr lang="en-US" dirty="0"/>
-              <a:t>좌표 변환을 세 가지로 구현해 같은 조건에서 합성했습니다. 직접 행렬 곱, CORDIC, 그리고 RMCM입니다. CORDIC은 곱셈기를 없애니 더 작을 것이라 예상했지만 오히려 면적이 네 배 이상 커졌습니다. 우리 문제는 로컬 좌표가 4가지, 각도 후보가 256가지뿐이라 입력 공간 전체가 4096가지입니다. 그래서 전체를 표 하나로 만든 RMCM이 면적 2.5분의 1, 전력 4.8분의 1로 압승했고 근사 오차도 없습니다. 이 결론은 입력 공간이 좁을 때에 한정된다는 점도 함께 말씀드립니다.</a:t>
+              <a:t>좌표 변환을 세 가지로 구현해 같은 조건에서 합성했습니다. 직접 행렬 곱, CORDIC, 그리고 RMCM입니다. CORDIC은 곱셈기를 없애니 더 작을 것이라 예상했지만 오히려 면적이 네 배 이상 커졌습니다. 우리 문제는 로컬 좌표가 4가지, 각도 후보가 256가지뿐이라 입력 공간 전체가 4096가지입니다. 그래서 전체를 표 하나로 만든 RMCM이 면적 2.5분의 1, 전력 4.8분의 1로 압승했고 근사 오차도 없습니다. 이 결론은 입력 공간이 좁을 때에 한정됩니다. 각도를 1024단계로 늘려 다시 합성했더니 표가 19071제곱마이크로미터, 직접 행렬곱이 5209제곱마이크로미터로 결과가 뒤집혔습니다.</a:t>
             </a:r>
             <a:endParaRPr lang="en-US" dirty="0"/>
           </a:p>
@@ -5527,7 +5527,7 @@
                 <a:ea typeface="나눔스퀘어 네오 Regular" pitchFamily="34" charset="-122"/>
                 <a:cs typeface="나눔스퀘어 네오 Regular" pitchFamily="34" charset="-120"/>
               </a:rPr>
-              <a:t>주의: −71%는 유휴가 길도록 만든 시험 입력의 값이다. 실제 부하에서의 절감은 위 가동 비율에 비례하며, vectorless 전력에서는 두 구성이 같게 나온다(활동도를 모르면 코어가 계속 켜져 있다고 가정).</a:t>
+              <a:t>주의: −71%는 유휴가 길도록 만든 시험 입력의 값이다. 실제 부하에서의 절감은 위 가동 비율에 비례하며, vectorless 전력에서는 두 구성이 같게 나온다(활동도를 모르면 코어가 계속 켜져 있다고 가정). blink top P&amp;R(5.2 ns): DRC·antenna 0, setup +0.022 ns, hold −0.010 ns(181경로), 5.94 mW.</a:t>
             </a:r>
             <a:endParaRPr lang="en-US" sz="1300" dirty="0"/>
           </a:p>
@@ -7903,7 +7903,7 @@
                 <a:ea typeface="나눔스퀘어 네오 Regular" pitchFamily="34" charset="-122"/>
                 <a:cs typeface="나눔스퀘어 네오 Regular" pitchFamily="34" charset="-120"/>
               </a:rPr>
-              <a:t>래치+AND → 통합 클록게이트 셀로 hold 해결. signoff ECO는 setup −0.040 ns로 악화되어 미채택</a:t>
+              <a:t>래치+AND → 통합 클록게이트 셀로 hold 해결. ECO·hold 목표 강화는 setup이 깨져(−0.04~−1.17 ns) 미채택</a:t>
             </a:r>
             <a:endParaRPr lang="en-US" sz="1300" dirty="0"/>
           </a:p>
@@ -13492,7 +13492,7 @@
                 <a:ea typeface="나눔스퀘어 네오 Regular" pitchFamily="34" charset="-122"/>
                 <a:cs typeface="나눔스퀘어 네오 Regular" pitchFamily="34" charset="-120"/>
               </a:rPr>
-              <a:t>• 좌표 변환 표(RMCM)는 1024각도로 늘리면 항목이 16배(16,384가지)가 되어 면적이 15.9배(1,199→19,071 µm²). 이 크기에서 직접 행렬곱과의 비교는 아직 안 함</a:t>
+              <a:t>• 1024각도 목표 크기에서는 좌표 변환 표(RMCM) 19,071 µm²가 직접 행렬곱 5,209 µm²보다 3.7배 커서 직접 행렬곱이 맞음(단, 슬랙 0 ps로 여유 없음)</a:t>
             </a:r>
             <a:endParaRPr lang="en-US" sz="1400" dirty="0"/>
           </a:p>
@@ -13724,7 +13724,7 @@
                 <a:ea typeface="나눔스퀘어 네오 Regular" pitchFamily="34" charset="-122"/>
                 <a:cs typeface="나눔스퀘어 네오 Regular" pitchFamily="34" charset="-120"/>
               </a:rPr>
-              <a:t>표 기반 좌표 변환 (면적 2.5배↓, 전력 4.8배↓)</a:t>
+              <a:t>표 기반 좌표 변환 (256각도에서 면적 2.5배↓, 전력 4.8배↓)</a:t>
             </a:r>
             <a:endParaRPr lang="en-US" sz="1700" dirty="0"/>
           </a:p>
@@ -17519,7 +17519,7 @@
                 <a:ea typeface="나눔스퀘어 네오 Bold" pitchFamily="34" charset="-122"/>
                 <a:cs typeface="나눔스퀘어 네오 Bold" pitchFamily="34" charset="-120"/>
               </a:rPr>
-              <a:t>좌표 변환은 계산을 줄이지 않고 아예 표로 바꿨다</a:t>
+              <a:t>좌표 변환: 256각도에서는 계산 대신 표가 이겼다</a:t>
             </a:r>
             <a:endParaRPr lang="en-US" sz="2600" dirty="0"/>
           </a:p>
@@ -18172,7 +18172,7 @@
                 <a:ea typeface="나눔스퀘어 네오 Regular" pitchFamily="34" charset="-122"/>
                 <a:cs typeface="나눔스퀘어 네오 Regular" pitchFamily="34" charset="-120"/>
               </a:rPr>
-              <a:t>Genus 합성, 5 ns, GPDK045. 입력 4096가지(256각도) 기준, RMCM은 직접 행렬곱과 bit-exact. 1024각도 RMCM(16,384가지)은 면적 19,071 µm², 0.297 mW, 슬랙 +1,178 ps(256각도의 15.9배 면적).</a:t>
+              <a:t>Genus 합성, 5 ns, GPDK045. 입력 4096가지(256각도) 기준, RMCM은 직접 행렬곱과 bit-exact. 1024각도에서는 RMCM 19,071 µm²·0.297 mW·+1,178 ps, 직접 행렬곱 5,209 µm²·0.279 mW·0 ps.</a:t>
             </a:r>
             <a:endParaRPr lang="en-US" sz="1300" dirty="0"/>
           </a:p>
@@ -18238,7 +18238,7 @@
                 <a:ea typeface="나눔스퀘어 네오 Bold" pitchFamily="34" charset="-122"/>
                 <a:cs typeface="나눔스퀘어 네오 Bold" pitchFamily="34" charset="-120"/>
               </a:rPr>
-              <a:t>곱셈기를 없애는 것이 항상 이득은 아니다. 입력 후보가 몇 가지로 좁을 때는 계산을 없애고 표로 대체하는 쪽이 이겼다. (이 결론은 입력 공간이 큰 경우엔 달라질 수 있다.)</a:t>
+              <a:t>곱셈기를 없애는 것이 항상 이득은 아니다. 256각도(입력 4,096가지)에서는 표가 이겼지만, 1024각도(16,384가지)에서는 표가 직접 행렬곱보다 3.7배 커서 결과가 뒤집혔다.</a:t>
             </a:r>
             <a:endParaRPr lang="en-US" sz="1600" dirty="0"/>
           </a:p>

--- a/submission/REDRED_2차_발표자료.pptx
+++ b/submission/REDRED_2차_발표자료.pptx
@@ -2371,7 +2371,7 @@
           <a:p>
             <a:r>
               <a:rPr lang="en-US" dirty="0"/>
-              <a:t>배치배선까지 완주해 Quantus 추출 기반 signoff 수준으로 재타이밍했습니다. 래치와 AND 게이트를 따로 둔 행 게이팅 설계는 DRC와 antenna는 0건이었지만 클록 게이팅 hold가 최악 마이너스 30피코초였습니다. 원인은 클록 트리 합성이 래치를 말단 싱크로 보고 균형을 맞추면서 래치가 AND 게이트보다 0.2나노초 일찍 열린 것이었습니다. 라이브러리의 통합 클록 게이트 셀로 바꾸자 클록 게이팅 hold 위반은 0건이 됐습니다. 다만 5나노초에서 일반 레지스터 경로에 hold 마이너스 7피코초, setup 마이너스 19피코초 위반이 남았고, signoff 단계 ECO로는 setup이 오히려 나빠져 채택하지 않았습니다. 클록을 5.2나노초로 늦춘 결과는 오른쪽 열에 적었습니다.</a:t>
+              <a:t>배치배선까지 완주해 Quantus 추출 기반 signoff 수준으로 재타이밍했습니다. 래치와 AND 게이트를 따로 둔 행 게이팅 설계는 DRC와 antenna는 0건이었지만 클록 게이팅 hold가 최악 마이너스 30피코초였습니다. 원인은 클록 트리 합성이 래치를 말단 싱크로 보고 균형을 맞추면서 래치가 AND 게이트보다 0.2나노초 일찍 열린 것이었습니다. 라이브러리의 통합 클록 게이트 셀로 바꾸자 클록 게이팅 hold 위반은 0건이 됐습니다. 다만 일반 레지스터 경로에는 hold 마이너스 7피코초가 남았습니다. 이 경로는 월드 메모리 플립플롭이 자기 자신으로 돌아오는 짧은 경로입니다. 지연 버퍼를 새로 넣는 방법은 메모리 배열에 빈자리가 없어 버퍼가 멀리 밀려나면서 setup이 깨졌습니다. 그래서 해당 경로의 선택 회로 292개를 한 단계 느린 셀로 교체하고 남은 setup 위반 한 경로를 후처리로 고쳤습니다. 5.2나노초에서 hold와 setup 위반이 모두 0건이 됐고, RTL과 배치배선 넷리스트의 게이트 시뮬레이션도 일치합니다. 오른쪽 열이 그 결과입니다. hold 여유는 3피코초로 얇습니다.</a:t>
             </a:r>
             <a:endParaRPr lang="en-US" dirty="0"/>
           </a:p>
@@ -5641,7 +5641,7 @@
                 <a:ea typeface="나눔스퀘어 네오 Bold" pitchFamily="34" charset="-122"/>
                 <a:cs typeface="나눔스퀘어 네오 Bold" pitchFamily="34" charset="-120"/>
               </a:rPr>
-              <a:t>물리 검증: 클록 게이팅 hold는 구조로 해결, 일반 경로에 ps 단위 잔여</a:t>
+              <a:t>물리 검증: hold는 구조 수정과 ECO로 해결, 5.2 ns에서 위반 0건</a:t>
             </a:r>
             <a:endParaRPr lang="en-US" sz="2600" dirty="0"/>
           </a:p>
@@ -5897,7 +5897,7 @@
                           <a:ea typeface="나눔스퀘어 네오 Bold" pitchFamily="34" charset="-122"/>
                           <a:cs typeface="나눔스퀘어 네오 Bold" pitchFamily="34" charset="-120"/>
                         </a:rPr>
-                        <a:t>통합 ICG @5.2 ns</a:t>
+                        <a:t>통합 ICG @5.2 ns + hold ECO</a:t>
                       </a:r>
                       <a:endParaRPr lang="en-US" sz="1200" dirty="0">
                         <a:latin typeface="나눔스퀘어 네오 Regular" charset="0"/>
@@ -6719,7 +6719,7 @@
                           <a:ea typeface="나눔스퀘어 네오 Regular" pitchFamily="34" charset="-122"/>
                           <a:cs typeface="나눔스퀘어 네오 Regular" pitchFamily="34" charset="-120"/>
                         </a:rPr>
-                        <a:t>-0.007 ns (61)</a:t>
+                        <a:t>+0.003 ns (0)</a:t>
                       </a:r>
                       <a:endParaRPr lang="en-US" sz="1200" dirty="0">
                         <a:latin typeface="나눔스퀘어 네오 Regular" charset="0"/>
@@ -6993,7 +6993,7 @@
                           <a:ea typeface="나눔스퀘어 네오 Regular" pitchFamily="34" charset="-122"/>
                           <a:cs typeface="나눔스퀘어 네오 Regular" pitchFamily="34" charset="-120"/>
                         </a:rPr>
-                        <a:t>+0.077 ns (0)</a:t>
+                        <a:t>+0.028 ns (0)</a:t>
                       </a:r>
                       <a:endParaRPr lang="en-US" sz="1200" dirty="0">
                         <a:latin typeface="나눔스퀘어 네오 Regular" charset="0"/>
@@ -7267,7 +7267,7 @@
                           <a:ea typeface="나눔스퀘어 네오 Regular" pitchFamily="34" charset="-122"/>
                           <a:cs typeface="나눔스퀘어 네오 Regular" pitchFamily="34" charset="-120"/>
                         </a:rPr>
-                        <a:t>5.72 mW</a:t>
+                        <a:t>5.75 mW</a:t>
                       </a:r>
                       <a:endParaRPr lang="en-US" sz="1200" dirty="0">
                         <a:latin typeface="나눔스퀘어 네오 Regular" charset="0"/>
@@ -7541,7 +7541,7 @@
                           <a:ea typeface="나눔스퀘어 네오 Regular" pitchFamily="34" charset="-122"/>
                           <a:cs typeface="나눔스퀘어 네오 Regular" pitchFamily="34" charset="-120"/>
                         </a:rPr>
-                        <a:t>160,213 µm²</a:t>
+                        <a:t>160,682 µm²</a:t>
                       </a:r>
                       <a:endParaRPr lang="en-US" sz="1200" dirty="0">
                         <a:latin typeface="나눔스퀘어 네오 Regular" charset="0"/>
@@ -7630,7 +7630,7 @@
                 <a:ea typeface="나눔스퀘어 네오 Regular" pitchFamily="34" charset="-122"/>
                 <a:cs typeface="나눔스퀘어 네오 Regular" pitchFamily="34" charset="-120"/>
               </a:rPr>
-              <a:t>괄호 안은 위반 경로 수. 5 ns, util 0.6, GPDK045, Quantus 추출.</a:t>
+              <a:t>괄호 안은 위반 경로 수. 앞 두 열 5.0 ns, 오른쪽 열 5.2 ns, util 0.6, GPDK045, Quantus 추출.</a:t>
             </a:r>
             <a:endParaRPr lang="en-US" sz="1100" dirty="0"/>
           </a:p>
@@ -7903,7 +7903,7 @@
                 <a:ea typeface="나눔스퀘어 네오 Regular" pitchFamily="34" charset="-122"/>
                 <a:cs typeface="나눔스퀘어 네오 Regular" pitchFamily="34" charset="-120"/>
               </a:rPr>
-              <a:t>래치+AND → 통합 클록게이트 셀로 hold 해결. ECO·hold 목표 강화는 setup이 깨져(−0.04~−1.17 ns) 미채택</a:t>
+              <a:t>래치+AND → 통합 클록게이트 셀. reg2reg hold는 hold mux 292개를 느린 셀로 교체하는 ECO로 해결(5.2 ns)</a:t>
             </a:r>
             <a:endParaRPr lang="en-US" sz="1300" dirty="0"/>
           </a:p>
@@ -8008,7 +8008,7 @@
                 <a:ea typeface="나눔스퀘어 네오 Regular" pitchFamily="34" charset="-122"/>
                 <a:cs typeface="나눔스퀘어 네오 Regular" pitchFamily="34" charset="-120"/>
               </a:rPr>
-              <a:t>일반 경로 ps 단위 잔여 위반. 클록 여유로 흡수하는 것이 현재 해법</a:t>
+              <a:t>hold 여유 +3 ps로 얇음(팀 공통 uncertainty 0.1 ns 기준). 5.0 ns 설계와 blink top에는 미적용</a:t>
             </a:r>
             <a:endParaRPr lang="en-US" sz="1300" dirty="0"/>
           </a:p>
@@ -13869,7 +13869,7 @@
                 <a:ea typeface="나눔스퀘어 네오 Regular" pitchFamily="34" charset="-122"/>
                 <a:cs typeface="나눔스퀘어 네오 Regular" pitchFamily="34" charset="-120"/>
               </a:rPr>
-              <a:t>P&amp;R: DRC·antenna 0건, 클록 게이팅 hold는 ICG로 해결</a:t>
+              <a:t>P&amp;R(5.2 ns, 행 게이팅 통합 설계): DRC·antenna·hold·setup 위반 0건 (blink 포함 top은 hold −10 ps 잔여)</a:t>
             </a:r>
             <a:endParaRPr lang="en-US" sz="1700" dirty="0"/>
           </a:p>

--- a/submission/REDRED_2차_발표자료.pptx
+++ b/submission/REDRED_2차_발표자료.pptx
@@ -2811,7 +2811,7 @@
           <a:p>
             <a:r>
               <a:rPr lang="en-US" dirty="0"/>
-              <a:t>생체 모방 아이디어를 여러 개 시도했지만, 합성 장면에서만 이득이 나온 것은 실제 프레임으로 확인해 기각했습니다. 눈 깜빡임을 본뜬 유휴 클록 차단과, 메모리 행 단위 클록 게이팅은 실제 데이터로 이득이 확인되어 채택했습니다. 반대로 이득 조절은 합성 장면에서는 좋아 보였지만 실제 DELTA 프레임에서는 이득이 없어서 정정했습니다. 습관화, 도약성 억제, 미세 안구운동, 추정기 입력 줄이기도 사전에 정한 기준을 넘지 못해 기각했습니다. 무엇을 안 했는지도 설계의 일부라고 생각합니다.</a:t>
+              <a:t>생체 모방 아이디어를 여러 개 시도했지만, 합성 장면에서만 이득이 나온 것은 실제 프레임으로 확인해 기각했습니다. 눈 깜빡임을 본뜬 유휴 클록 차단과, 메모리 행 단위 클록 게이팅은 실제 데이터로 이득이 확인되어 채택했습니다. 반대로 이득 조절은 합성 장면에서는 좋아 보였지만 실제 DELTA 프레임에서는 이득이 없어서 정정했습니다. 습관화, 도약성 억제, 미세 안구운동, 추정기 입력 줄이기도 사전에 정한 기준을 넘지 못해 기각했습니다. 지도 제작 방식으로는 키프레임과 루프 클로저를 쓰는 SLAM식 구조도 시험했는데, 합성 데이터와 실제 DELTA 영상 모두에서 현재 구조보다 나아지지 않고 메모리만 커져서 채택하지 않았습니다. 무엇을 안 했는지도 설계의 일부라고 생각합니다.</a:t>
             </a:r>
             <a:endParaRPr lang="en-US" dirty="0"/>
           </a:p>
@@ -5527,7 +5527,7 @@
                 <a:ea typeface="나눔스퀘어 네오 Regular" pitchFamily="34" charset="-122"/>
                 <a:cs typeface="나눔스퀘어 네오 Regular" pitchFamily="34" charset="-120"/>
               </a:rPr>
-              <a:t>주의: −71%는 유휴가 길도록 만든 시험 입력의 값이다. 실제 부하에서의 절감은 위 가동 비율에 비례하며, vectorless 전력에서는 두 구성이 같게 나온다(활동도를 모르면 코어가 계속 켜져 있다고 가정). blink top P&amp;R(5.2 ns): DRC·antenna 0, setup +0.022 ns, hold −0.010 ns(181경로), 5.94 mW.</a:t>
+              <a:t>주의: −71%는 유휴가 길도록 만든 시험 입력의 값이다. 실제 부하에서의 절감은 위 가동 비율에 비례하며, vectorless 전력에서는 두 구성이 같게 나온다(활동도를 모르면 코어가 계속 켜져 있다고 가정). blink top P&amp;R(5.2 ns, hold ECO 후): DRC·antenna 0, setup +0.069 ns, hold 위반 0(여유 0 ps), 5.97 mW. ECO 전에는 hold −0.010 ns(181경로).</a:t>
             </a:r>
             <a:endParaRPr lang="en-US" sz="1300" dirty="0"/>
           </a:p>
@@ -8008,7 +8008,7 @@
                 <a:ea typeface="나눔스퀘어 네오 Regular" pitchFamily="34" charset="-122"/>
                 <a:cs typeface="나눔스퀘어 네오 Regular" pitchFamily="34" charset="-120"/>
               </a:rPr>
-              <a:t>hold 여유 +3 ps로 얇음(팀 공통 uncertainty 0.1 ns 기준). 5.0 ns 설계와 blink top에는 미적용</a:t>
+              <a:t>hold 여유 +3 ps로 얇음(팀 공통 uncertainty 0.1 ns 기준). 5.0 ns는 setup이 안 닫힘(원본도 −19 ps). blink top 5.2 ns도 같은 ECO로 위반 0</a:t>
             </a:r>
             <a:endParaRPr lang="en-US" sz="1300" dirty="0"/>
           </a:p>
@@ -9343,7 +9343,7 @@
               <a:buNone/>
             </a:pPr>
             <a:r>
-              <a:rPr lang="en-US" sz="1300" dirty="0">
+              <a:rPr lang="en-US" sz="1200" dirty="0">
                 <a:solidFill>
                   <a:srgbClr val="1D1D1F"/>
                 </a:solidFill>
@@ -9351,9 +9351,9 @@
                 <a:ea typeface="나눔스퀘어 네오 Regular" pitchFamily="34" charset="-122"/>
                 <a:cs typeface="나눔스퀘어 네오 Regular" pitchFamily="34" charset="-120"/>
               </a:rPr>
-              <a:t>이산 베이즈 필터를 고정소수점으로 구현. UZH 이벤트 300개 재생에서 오라클과 비트 단위로 일치(1024각도 버전).</a:t>
+              <a:t>고정소수점 이산 베이즈 필터, UZH 300개 재생에서 오라클과 비트 단위 일치. 합성 584,631 µm²·14.5 mW(60%가 belief 메모리 FF), 단독 P&amp;R은 타이밍 미달(−17.7 ns) → SRAM 필요.</a:t>
             </a:r>
-            <a:endParaRPr lang="en-US" sz="1300" dirty="0"/>
+            <a:endParaRPr lang="en-US" sz="1200" dirty="0"/>
           </a:p>
         </p:txBody>
       </p:sp>
@@ -10663,7 +10663,7 @@
                 <a:gridCol w="1188720"/>
                 <a:gridCol w="5852160"/>
               </a:tblGrid>
-              <a:tr h="420624">
+              <a:tr h="384048">
                 <a:tc>
                   <a:txBody>
                     <a:bodyPr/>
@@ -10869,7 +10869,7 @@
                   </a:tcPr>
                 </a:tc>
               </a:tr>
-              <a:tr h="420624">
+              <a:tr h="384048">
                 <a:tc>
                   <a:txBody>
                     <a:bodyPr/>
@@ -11075,7 +11075,7 @@
                   </a:tcPr>
                 </a:tc>
               </a:tr>
-              <a:tr h="420624">
+              <a:tr h="384048">
                 <a:tc>
                   <a:txBody>
                     <a:bodyPr/>
@@ -11281,7 +11281,7 @@
                   </a:tcPr>
                 </a:tc>
               </a:tr>
-              <a:tr h="420624">
+              <a:tr h="384048">
                 <a:tc>
                   <a:txBody>
                     <a:bodyPr/>
@@ -11487,7 +11487,7 @@
                   </a:tcPr>
                 </a:tc>
               </a:tr>
-              <a:tr h="420624">
+              <a:tr h="384048">
                 <a:tc>
                   <a:txBody>
                     <a:bodyPr/>
@@ -11693,7 +11693,7 @@
                   </a:tcPr>
                 </a:tc>
               </a:tr>
-              <a:tr h="420624">
+              <a:tr h="384048">
                 <a:tc>
                   <a:txBody>
                     <a:bodyPr/>
@@ -11899,7 +11899,7 @@
                   </a:tcPr>
                 </a:tc>
               </a:tr>
-              <a:tr h="420624">
+              <a:tr h="384048">
                 <a:tc>
                   <a:txBody>
                     <a:bodyPr/>
@@ -12105,7 +12105,7 @@
                   </a:tcPr>
                 </a:tc>
               </a:tr>
-              <a:tr h="420624">
+              <a:tr h="384048">
                 <a:tc>
                   <a:txBody>
                     <a:bodyPr/>
@@ -12311,7 +12311,7 @@
                   </a:tcPr>
                 </a:tc>
               </a:tr>
-              <a:tr h="420624">
+              <a:tr h="384048">
                 <a:tc>
                   <a:txBody>
                     <a:bodyPr/>
@@ -12517,7 +12517,7 @@
                   </a:tcPr>
                 </a:tc>
               </a:tr>
-              <a:tr h="420624">
+              <a:tr h="384048">
                 <a:tc>
                   <a:txBody>
                     <a:bodyPr/>
@@ -12723,7 +12723,213 @@
                   </a:tcPr>
                 </a:tc>
               </a:tr>
-              <a:tr h="420624">
+              <a:tr h="384048">
+                <a:tc>
+                  <a:txBody>
+                    <a:bodyPr/>
+                    <a:lstStyle/>
+                    <a:p>
+                      <a:pPr eaLnBrk="0" indent="0" marL="0">
+                        <a:buNone/>
+                      </a:pPr>
+                      <a:r>
+                        <a:rPr lang="en-US" sz="1200" dirty="0">
+                          <a:solidFill>
+                            <a:srgbClr val="1D1D1F"/>
+                          </a:solidFill>
+                          <a:latin typeface="나눔스퀘어 네오 Regular" pitchFamily="34" charset="0"/>
+                          <a:ea typeface="나눔스퀘어 네오 Regular" pitchFamily="34" charset="-122"/>
+                          <a:cs typeface="나눔스퀘어 네오 Regular" pitchFamily="34" charset="-120"/>
+                        </a:rPr>
+                        <a:t>키프레임(SLAM): 키프레임 + 자세 그래프 + 루프 클로저</a:t>
+                      </a:r>
+                      <a:endParaRPr lang="en-US" sz="1200" dirty="0">
+                        <a:latin typeface="나눔스퀘어 네오 Regular" charset="0"/>
+                        <a:ea typeface="나눔스퀘어 네오 Regular" charset="0"/>
+                        <a:cs typeface="나눔스퀘어 네오 Regular" charset="0"/>
+                      </a:endParaRPr>
+                    </a:p>
+                  </a:txBody>
+                  <a:tcPr marL="73152" marR="73152" marT="36576" marB="36576" anchor="ctr">
+                    <a:lnL w="6350" cap="flat" cmpd="sng" algn="ctr">
+                      <a:solidFill>
+                        <a:srgbClr val="E0E0E0"/>
+                      </a:solidFill>
+                      <a:prstDash val="solid"/>
+                      <a:round/>
+                      <a:headEnd type="none" w="med" len="med"/>
+                      <a:tailEnd type="none" w="med" len="med"/>
+                    </a:lnL>
+                    <a:lnR w="6350" cap="flat" cmpd="sng" algn="ctr">
+                      <a:solidFill>
+                        <a:srgbClr val="E0E0E0"/>
+                      </a:solidFill>
+                      <a:prstDash val="solid"/>
+                      <a:round/>
+                      <a:headEnd type="none" w="med" len="med"/>
+                      <a:tailEnd type="none" w="med" len="med"/>
+                    </a:lnR>
+                    <a:lnT w="6350" cap="flat" cmpd="sng" algn="ctr">
+                      <a:solidFill>
+                        <a:srgbClr val="E0E0E0"/>
+                      </a:solidFill>
+                      <a:prstDash val="solid"/>
+                      <a:round/>
+                      <a:headEnd type="none" w="med" len="med"/>
+                      <a:tailEnd type="none" w="med" len="med"/>
+                    </a:lnT>
+                    <a:lnB w="6350" cap="flat" cmpd="sng" algn="ctr">
+                      <a:solidFill>
+                        <a:srgbClr val="E0E0E0"/>
+                      </a:solidFill>
+                      <a:prstDash val="solid"/>
+                      <a:round/>
+                      <a:headEnd type="none" w="med" len="med"/>
+                      <a:tailEnd type="none" w="med" len="med"/>
+                    </a:lnB>
+                    <a:solidFill>
+                      <a:srgbClr val="FFFFFF"/>
+                    </a:solidFill>
+                  </a:tcPr>
+                </a:tc>
+                <a:tc>
+                  <a:txBody>
+                    <a:bodyPr/>
+                    <a:lstStyle/>
+                    <a:p>
+                      <a:pPr eaLnBrk="0" indent="0" marL="0">
+                        <a:buNone/>
+                      </a:pPr>
+                      <a:r>
+                        <a:rPr lang="en-US" sz="1200" dirty="0">
+                          <a:solidFill>
+                            <a:srgbClr val="1D1D1F"/>
+                          </a:solidFill>
+                          <a:latin typeface="나눔스퀘어 네오 Bold" pitchFamily="34" charset="0"/>
+                          <a:ea typeface="나눔스퀘어 네오 Bold" pitchFamily="34" charset="-122"/>
+                          <a:cs typeface="나눔스퀘어 네오 Bold" pitchFamily="34" charset="-120"/>
+                        </a:rPr>
+                        <a:t>기각</a:t>
+                      </a:r>
+                      <a:endParaRPr lang="en-US" sz="1200" dirty="0">
+                        <a:latin typeface="나눔스퀘어 네오 Regular" charset="0"/>
+                        <a:ea typeface="나눔스퀘어 네오 Regular" charset="0"/>
+                        <a:cs typeface="나눔스퀘어 네오 Regular" charset="0"/>
+                      </a:endParaRPr>
+                    </a:p>
+                  </a:txBody>
+                  <a:tcPr marL="73152" marR="73152" marT="36576" marB="36576" anchor="ctr">
+                    <a:lnL w="6350" cap="flat" cmpd="sng" algn="ctr">
+                      <a:solidFill>
+                        <a:srgbClr val="E0E0E0"/>
+                      </a:solidFill>
+                      <a:prstDash val="solid"/>
+                      <a:round/>
+                      <a:headEnd type="none" w="med" len="med"/>
+                      <a:tailEnd type="none" w="med" len="med"/>
+                    </a:lnL>
+                    <a:lnR w="6350" cap="flat" cmpd="sng" algn="ctr">
+                      <a:solidFill>
+                        <a:srgbClr val="E0E0E0"/>
+                      </a:solidFill>
+                      <a:prstDash val="solid"/>
+                      <a:round/>
+                      <a:headEnd type="none" w="med" len="med"/>
+                      <a:tailEnd type="none" w="med" len="med"/>
+                    </a:lnR>
+                    <a:lnT w="6350" cap="flat" cmpd="sng" algn="ctr">
+                      <a:solidFill>
+                        <a:srgbClr val="E0E0E0"/>
+                      </a:solidFill>
+                      <a:prstDash val="solid"/>
+                      <a:round/>
+                      <a:headEnd type="none" w="med" len="med"/>
+                      <a:tailEnd type="none" w="med" len="med"/>
+                    </a:lnT>
+                    <a:lnB w="6350" cap="flat" cmpd="sng" algn="ctr">
+                      <a:solidFill>
+                        <a:srgbClr val="E0E0E0"/>
+                      </a:solidFill>
+                      <a:prstDash val="solid"/>
+                      <a:round/>
+                      <a:headEnd type="none" w="med" len="med"/>
+                      <a:tailEnd type="none" w="med" len="med"/>
+                    </a:lnB>
+                    <a:solidFill>
+                      <a:srgbClr val="FFFFFF"/>
+                    </a:solidFill>
+                  </a:tcPr>
+                </a:tc>
+                <a:tc>
+                  <a:txBody>
+                    <a:bodyPr/>
+                    <a:lstStyle/>
+                    <a:p>
+                      <a:pPr eaLnBrk="0" indent="0" marL="0">
+                        <a:buNone/>
+                      </a:pPr>
+                      <a:r>
+                        <a:rPr lang="en-US" sz="1200" dirty="0">
+                          <a:solidFill>
+                            <a:srgbClr val="1D1D1F"/>
+                          </a:solidFill>
+                          <a:latin typeface="나눔스퀘어 네오 Regular" pitchFamily="34" charset="0"/>
+                          <a:ea typeface="나눔스퀘어 네오 Regular" pitchFamily="34" charset="-122"/>
+                          <a:cs typeface="나눔스퀘어 네오 Regular" pitchFamily="34" charset="-120"/>
+                        </a:rPr>
+                        <a:t>합성 오차 0.35~0.40°(현재) 대 0.43~1.0°, 실제 DELTA 지도 정합 0.241 → 0.18~0.20, 메모리 3.7배(7.86 Mbit)</a:t>
+                      </a:r>
+                      <a:endParaRPr lang="en-US" sz="1200" dirty="0">
+                        <a:latin typeface="나눔스퀘어 네오 Regular" charset="0"/>
+                        <a:ea typeface="나눔스퀘어 네오 Regular" charset="0"/>
+                        <a:cs typeface="나눔스퀘어 네오 Regular" charset="0"/>
+                      </a:endParaRPr>
+                    </a:p>
+                  </a:txBody>
+                  <a:tcPr marL="73152" marR="73152" marT="36576" marB="36576" anchor="ctr">
+                    <a:lnL w="6350" cap="flat" cmpd="sng" algn="ctr">
+                      <a:solidFill>
+                        <a:srgbClr val="E0E0E0"/>
+                      </a:solidFill>
+                      <a:prstDash val="solid"/>
+                      <a:round/>
+                      <a:headEnd type="none" w="med" len="med"/>
+                      <a:tailEnd type="none" w="med" len="med"/>
+                    </a:lnL>
+                    <a:lnR w="6350" cap="flat" cmpd="sng" algn="ctr">
+                      <a:solidFill>
+                        <a:srgbClr val="E0E0E0"/>
+                      </a:solidFill>
+                      <a:prstDash val="solid"/>
+                      <a:round/>
+                      <a:headEnd type="none" w="med" len="med"/>
+                      <a:tailEnd type="none" w="med" len="med"/>
+                    </a:lnR>
+                    <a:lnT w="6350" cap="flat" cmpd="sng" algn="ctr">
+                      <a:solidFill>
+                        <a:srgbClr val="E0E0E0"/>
+                      </a:solidFill>
+                      <a:prstDash val="solid"/>
+                      <a:round/>
+                      <a:headEnd type="none" w="med" len="med"/>
+                      <a:tailEnd type="none" w="med" len="med"/>
+                    </a:lnT>
+                    <a:lnB w="6350" cap="flat" cmpd="sng" algn="ctr">
+                      <a:solidFill>
+                        <a:srgbClr val="E0E0E0"/>
+                      </a:solidFill>
+                      <a:prstDash val="solid"/>
+                      <a:round/>
+                      <a:headEnd type="none" w="med" len="med"/>
+                      <a:tailEnd type="none" w="med" len="med"/>
+                    </a:lnB>
+                    <a:solidFill>
+                      <a:srgbClr val="FFFFFF"/>
+                    </a:solidFill>
+                  </a:tcPr>
+                </a:tc>
+              </a:tr>
+              <a:tr h="384048">
                 <a:tc>
                   <a:txBody>
                     <a:bodyPr/>
@@ -13869,7 +14075,7 @@
                 <a:ea typeface="나눔스퀘어 네오 Regular" pitchFamily="34" charset="-122"/>
                 <a:cs typeface="나눔스퀘어 네오 Regular" pitchFamily="34" charset="-120"/>
               </a:rPr>
-              <a:t>P&amp;R(5.2 ns, 행 게이팅 통합 설계): DRC·antenna·hold·setup 위반 0건 (blink 포함 top은 hold −10 ps 잔여)</a:t>
+              <a:t>P&amp;R(5.2 ns, 행 게이팅 통합 설계와 blink top): DRC·antenna·hold·setup 위반 0건</a:t>
             </a:r>
             <a:endParaRPr lang="en-US" sz="1700" dirty="0"/>
           </a:p>

--- a/submission/REDRED_2차_발표자료.pptx
+++ b/submission/REDRED_2차_발표자료.pptx
@@ -3339,7 +3339,7 @@
           <a:p>
             <a:r>
               <a:rPr lang="en-US" dirty="0"/>
-              <a:t>좌표 변환을 세 가지로 구현해 같은 조건에서 합성했습니다. 직접 행렬 곱, CORDIC, 그리고 RMCM입니다. CORDIC은 곱셈기를 없애니 더 작을 것이라 예상했지만 오히려 면적이 네 배 이상 커졌습니다. 우리 문제는 로컬 좌표가 4가지, 각도 후보가 256가지뿐이라 입력 공간 전체가 4096가지입니다. 그래서 전체를 표 하나로 만든 RMCM이 면적 2.5분의 1, 전력 4.8분의 1로 압승했고 근사 오차도 없습니다. 이 결론은 입력 공간이 좁을 때에 한정됩니다. 각도를 1024단계로 늘려 다시 합성했더니 표가 19071제곱마이크로미터, 직접 행렬곱이 5209제곱마이크로미터로 결과가 뒤집혔습니다.</a:t>
+              <a:t>좌표 변환을 세 가지로 구현해 같은 조건에서 합성했습니다. 직접 행렬 곱, CORDIC, 그리고 RMCM입니다. CORDIC은 곱셈기를 없애니 더 작을 것이라 예상했지만 오히려 면적이 네 배 이상 커졌습니다. 우리 문제는 로컬 좌표가 4가지, 각도 후보가 256가지뿐이라 입력 공간 전체가 4096가지입니다. 그래서 전체를 표 하나로 만든 RMCM이 면적 2.5분의 1, 전력 4.8분의 1로 압승했고 근사 오차도 없습니다. 이 결론은 입력 공간이 좁을 때에 한정됩니다. 각도를 1024단계로 늘려 다시 합성했더니 표가 19071제곱마이크로미터, 직접 행렬곱이 5209제곱마이크로미터로 결과가 뒤집혔습니다. 배치배선까지 해 보니 차이가 더 커졌습니다. 직접 행렬곱은 면적 7354제곱마이크로미터에 DRC 위반이 없고 setup이 0.1나노초 모자란 수준이지만, 표는 면적 33935제곱마이크로미터에 배선이 풀리지 않아 DRC 위반이 1만 건 이상이고 타이밍도 크게 어긋났습니다. 그래서 목표 크기인 1024각도에서는 직접 행렬곱이 맞다고 판단합니다.</a:t>
             </a:r>
             <a:endParaRPr lang="en-US" dirty="0"/>
           </a:p>
@@ -18370,7 +18370,7 @@
               <a:buNone/>
             </a:pPr>
             <a:r>
-              <a:rPr lang="en-US" sz="1300" dirty="0">
+              <a:rPr lang="en-US" sz="1200" dirty="0">
                 <a:solidFill>
                   <a:srgbClr val="7A7A7A"/>
                 </a:solidFill>
@@ -18378,9 +18378,9 @@
                 <a:ea typeface="나눔스퀘어 네오 Regular" pitchFamily="34" charset="-122"/>
                 <a:cs typeface="나눔스퀘어 네오 Regular" pitchFamily="34" charset="-120"/>
               </a:rPr>
-              <a:t>Genus 합성, 5 ns, GPDK045. 입력 4096가지(256각도) 기준, RMCM은 직접 행렬곱과 bit-exact. 1024각도에서는 RMCM 19,071 µm²·0.297 mW·+1,178 ps, 직접 행렬곱 5,209 µm²·0.279 mW·0 ps.</a:t>
+              <a:t>Genus 합성, 5 ns, GPDK045. 입력 4096가지(256각도) 기준, RMCM은 직접 행렬곱과 bit-exact. 1024각도: 합성 RMCM 19,071 vs 직접 5,209 µm². P&amp;R(5 ns) RMCM 33,935 µm²·DRC 1만+·setup −20.9 ns, 직접 7,354 µm²·DRC 0·setup −0.099 ns.</a:t>
             </a:r>
-            <a:endParaRPr lang="en-US" sz="1300" dirty="0"/>
+            <a:endParaRPr lang="en-US" sz="1200" dirty="0"/>
           </a:p>
         </p:txBody>
       </p:sp>
@@ -18444,7 +18444,7 @@
                 <a:ea typeface="나눔스퀘어 네오 Bold" pitchFamily="34" charset="-122"/>
                 <a:cs typeface="나눔스퀘어 네오 Bold" pitchFamily="34" charset="-120"/>
               </a:rPr>
-              <a:t>곱셈기를 없애는 것이 항상 이득은 아니다. 256각도(입력 4,096가지)에서는 표가 이겼지만, 1024각도(16,384가지)에서는 표가 직접 행렬곱보다 3.7배 커서 결과가 뒤집혔다.</a:t>
+              <a:t>곱셈기를 없애는 것이 항상 이득은 아니다. 256각도(입력 4,096가지)에서는 표가 이겼지만, 1024각도(16,384가지)에서는 표가 직접 행렬곱보다 합성 3.7배, 배치배선 후 4.6배 크고 배선도 안 풀려 결과가 뒤집혔다.</a:t>
             </a:r>
             <a:endParaRPr lang="en-US" sz="1600" dirty="0"/>
           </a:p>
